--- a/presentation/ai_process.pptx
+++ b/presentation/ai_process.pptx
@@ -108,7 +108,7 @@
   <p:extLst>
     <p:ext uri="{521415D9-36F7-43E2-AB2F-B90AF26B5E84}">
       <p14:sectionLst xmlns:p14="http://schemas.microsoft.com/office/powerpoint/2010/main">
-        <p14:section name="Как работали" id="{fe875a79-4bb9-4d04-63ca-aeac3f18190f}">
+        <p14:section name="Как работали" id="{d6a036e6-e0cc-97d5-0c7e-7ea36f17bb23}">
           <p14:sldIdLst>
             <p14:sldId id="256"/>
             <p14:sldId id="257"/>
@@ -606,7 +606,7 @@
           <a:p>
             <a:r>
               <a:rPr lang="en-US" dirty="0"/>
-              <a:t>Слева — исследования. Каждая плашка — один шаг: обзор, работа инженера, ревью или решение человека. В первых двух исследованиях ревью нашло 7 ошибок, и два вывода пришлось перевернуть. Робот с языковой моделью выполнил миссию, заданную словами, 6 из 6; робот с простым правилом — ни разу. В Gazebo робот вернулся на базу в прогонах 8 из 9, после правки — 7 из 7. Разбор потерь дал плюс восемь очков на трудном уровне. Ожидание ответа модели стоило 73 очка; если робот едет, пока модель думает, возвращается 42 — эта работа ещё на ревью. А один опыт выигрыша не показал, и мы говорим об этом прямо. Справа — решения людей: не минимальная версия, робот-учёный, исследователи не пишут код, главная цель — результативный робот. Качество держится на устройстве процесса, а не на вере в один ответ модели.</a:t>
+              <a:t>Слева — исследования. Каждая плашка — один шаг: обзор, работа инженера, ревью или решение человека. В первых двух исследованиях ревью нашло 7 ошибок, и два вывода пришлось перевернуть. Робот с языковой моделью выполнил миссию, заданную словами, 6 из 6; робот с простым правилом — ни разу. В Gazebo робот вернулся на базу в прогонах 8 из 9, после правки — 7 из 7. Разбор потерь дал плюс шесть очков на трудном уровне. Ожидание ответа модели стоило 73 очка; если робот едет, пока модель думает, возвращается 42 — эта работа ещё на ревью. А один опыт выигрыша не показал, и мы говорим об этом прямо. Справа — решения людей: не минимальная версия, робот-учёный, исследователи не пишут код, главная цель — результативный робот. Качество держится на устройстве процесса, а не на вере в один ответ модели.</a:t>
             </a:r>
             <a:endParaRPr lang="en-US" dirty="0"/>
           </a:p>
@@ -5036,7 +5036,7 @@
         <p:spPr>
           <a:xfrm>
             <a:off x="548640" y="3776472"/>
-            <a:ext cx="4617720" cy="256032"/>
+            <a:ext cx="4334256" cy="256032"/>
           </a:xfrm>
           <a:prstGeom prst="rect">
             <a:avLst/>
@@ -5071,7 +5071,7 @@
         </p:nvSpPr>
         <p:spPr>
           <a:xfrm>
-            <a:off x="5303520" y="3781044"/>
+            <a:off x="5020056" y="3781044"/>
             <a:ext cx="246888" cy="246888"/>
           </a:xfrm>
           <a:prstGeom prst="roundRect">
@@ -5111,7 +5111,7 @@
         </p:nvSpPr>
         <p:spPr>
           <a:xfrm>
-            <a:off x="5586984" y="3781044"/>
+            <a:off x="5303520" y="3781044"/>
             <a:ext cx="246888" cy="246888"/>
           </a:xfrm>
           <a:prstGeom prst="roundRect">
@@ -5151,7 +5151,7 @@
         </p:nvSpPr>
         <p:spPr>
           <a:xfrm>
-            <a:off x="5870448" y="3781044"/>
+            <a:off x="5586984" y="3781044"/>
             <a:ext cx="246888" cy="246888"/>
           </a:xfrm>
           <a:prstGeom prst="roundRect">
@@ -5191,7 +5191,7 @@
         </p:nvSpPr>
         <p:spPr>
           <a:xfrm>
-            <a:off x="6153912" y="3781044"/>
+            <a:off x="5870448" y="3781044"/>
             <a:ext cx="246888" cy="246888"/>
           </a:xfrm>
           <a:prstGeom prst="roundRect">
@@ -5225,7 +5225,47 @@
       </p:sp>
       <p:sp>
         <p:nvSpPr>
-          <p:cNvPr id="49" name="lane-4-result"/>
+          <p:cNvPr id="49" name="lane-4-chip-5"/>
+          <p:cNvSpPr txBox="1"/>
+          <p:nvPr/>
+        </p:nvSpPr>
+        <p:spPr>
+          <a:xfrm>
+            <a:off x="6153912" y="3781044"/>
+            <a:ext cx="246888" cy="246888"/>
+          </a:xfrm>
+          <a:prstGeom prst="roundRect">
+            <a:avLst>
+              <a:gd name="adj" fmla="val 14815"/>
+            </a:avLst>
+          </a:prstGeom>
+          <a:solidFill>
+            <a:schemeClr val="accent3"/>
+          </a:solidFill>
+          <a:ln/>
+        </p:spPr>
+        <p:txBody>
+          <a:bodyPr wrap="square" lIns="0" tIns="0" rIns="0" bIns="0" rtlCol="0" anchor="ctr"/>
+          <a:lstStyle/>
+          <a:p>
+            <a:pPr algn="ctr" indent="0" marL="0">
+              <a:buNone/>
+            </a:pPr>
+            <a:r>
+              <a:rPr lang="en-US" sz="1300" b="1" dirty="0">
+                <a:solidFill>
+                  <a:schemeClr val="bg1"/>
+                </a:solidFill>
+              </a:rPr>
+              <a:t>✓</a:t>
+            </a:r>
+            <a:endParaRPr lang="en-US" sz="1300" dirty="0"/>
+          </a:p>
+        </p:txBody>
+      </p:sp>
+      <p:sp>
+        <p:nvSpPr>
+          <p:cNvPr id="50" name="lane-4-result"/>
           <p:cNvSpPr txBox="1"/>
           <p:nvPr/>
         </p:nvSpPr>
@@ -5253,7 +5293,7 @@
                   <a:schemeClr val="tx2"/>
                 </a:solidFill>
               </a:rPr>
-              <a:t>+8,3 очка на трудном уровне; правки по ревью идут</a:t>
+              <a:t>пережидание сбоя датчика: +6,4 очка на трудном уровне</a:t>
             </a:r>
             <a:endParaRPr lang="en-US" sz="1600" dirty="0"/>
           </a:p>
@@ -5261,7 +5301,7 @@
       </p:sp>
       <p:sp>
         <p:nvSpPr>
-          <p:cNvPr id="50" name="lane-5-rule"/>
+          <p:cNvPr id="51" name="lane-5-rule"/>
           <p:cNvSpPr/>
           <p:nvPr/>
         </p:nvSpPr>
@@ -5284,7 +5324,7 @@
       </p:sp>
       <p:sp>
         <p:nvSpPr>
-          <p:cNvPr id="51" name="lane-5-name"/>
+          <p:cNvPr id="52" name="lane-5-name"/>
           <p:cNvSpPr txBox="1"/>
           <p:nvPr/>
         </p:nvSpPr>
@@ -5320,7 +5360,7 @@
       </p:sp>
       <p:sp>
         <p:nvSpPr>
-          <p:cNvPr id="52" name="lane-5-chip-1"/>
+          <p:cNvPr id="53" name="lane-5-chip-1"/>
           <p:cNvSpPr txBox="1"/>
           <p:nvPr/>
         </p:nvSpPr>
@@ -5360,7 +5400,7 @@
       </p:sp>
       <p:sp>
         <p:nvSpPr>
-          <p:cNvPr id="53" name="lane-5-chip-2"/>
+          <p:cNvPr id="54" name="lane-5-chip-2"/>
           <p:cNvSpPr txBox="1"/>
           <p:nvPr/>
         </p:nvSpPr>
@@ -5400,7 +5440,7 @@
       </p:sp>
       <p:sp>
         <p:nvSpPr>
-          <p:cNvPr id="54" name="lane-5-chip-3"/>
+          <p:cNvPr id="55" name="lane-5-chip-3"/>
           <p:cNvSpPr txBox="1"/>
           <p:nvPr/>
         </p:nvSpPr>
@@ -5440,7 +5480,7 @@
       </p:sp>
       <p:sp>
         <p:nvSpPr>
-          <p:cNvPr id="55" name="lane-5-chip-4"/>
+          <p:cNvPr id="56" name="lane-5-chip-4"/>
           <p:cNvSpPr txBox="1"/>
           <p:nvPr/>
         </p:nvSpPr>
@@ -5480,7 +5520,7 @@
       </p:sp>
       <p:sp>
         <p:nvSpPr>
-          <p:cNvPr id="56" name="lane-5-next"/>
+          <p:cNvPr id="57" name="lane-5-next"/>
           <p:cNvSpPr txBox="1"/>
           <p:nvPr/>
         </p:nvSpPr>
@@ -5516,7 +5556,7 @@
       </p:sp>
       <p:sp>
         <p:nvSpPr>
-          <p:cNvPr id="57" name="lane-5-chip-6"/>
+          <p:cNvPr id="58" name="lane-5-chip-6"/>
           <p:cNvSpPr txBox="1"/>
           <p:nvPr/>
         </p:nvSpPr>
@@ -5556,7 +5596,7 @@
       </p:sp>
       <p:sp>
         <p:nvSpPr>
-          <p:cNvPr id="58" name="lane-5-result"/>
+          <p:cNvPr id="59" name="lane-5-result"/>
           <p:cNvSpPr txBox="1"/>
           <p:nvPr/>
         </p:nvSpPr>
@@ -5592,7 +5632,7 @@
       </p:sp>
       <p:sp>
         <p:nvSpPr>
-          <p:cNvPr id="59" name="lane-6-rule"/>
+          <p:cNvPr id="60" name="lane-6-rule"/>
           <p:cNvSpPr/>
           <p:nvPr/>
         </p:nvSpPr>
@@ -5615,7 +5655,7 @@
       </p:sp>
       <p:sp>
         <p:nvSpPr>
-          <p:cNvPr id="60" name="lane-6-name"/>
+          <p:cNvPr id="61" name="lane-6-name"/>
           <p:cNvSpPr txBox="1"/>
           <p:nvPr/>
         </p:nvSpPr>
@@ -5651,7 +5691,7 @@
       </p:sp>
       <p:sp>
         <p:nvSpPr>
-          <p:cNvPr id="61" name="lane-6-chip-1"/>
+          <p:cNvPr id="62" name="lane-6-chip-1"/>
           <p:cNvSpPr txBox="1"/>
           <p:nvPr/>
         </p:nvSpPr>
@@ -5691,7 +5731,7 @@
       </p:sp>
       <p:sp>
         <p:nvSpPr>
-          <p:cNvPr id="62" name="lane-6-chip-2"/>
+          <p:cNvPr id="63" name="lane-6-chip-2"/>
           <p:cNvSpPr txBox="1"/>
           <p:nvPr/>
         </p:nvSpPr>
@@ -5731,7 +5771,7 @@
       </p:sp>
       <p:sp>
         <p:nvSpPr>
-          <p:cNvPr id="63" name="lane-6-chip-3"/>
+          <p:cNvPr id="64" name="lane-6-chip-3"/>
           <p:cNvSpPr txBox="1"/>
           <p:nvPr/>
         </p:nvSpPr>
@@ -5771,7 +5811,7 @@
       </p:sp>
       <p:sp>
         <p:nvSpPr>
-          <p:cNvPr id="64" name="lane-6-chip-4"/>
+          <p:cNvPr id="65" name="lane-6-chip-4"/>
           <p:cNvSpPr txBox="1"/>
           <p:nvPr/>
         </p:nvSpPr>
@@ -5811,7 +5851,7 @@
       </p:sp>
       <p:sp>
         <p:nvSpPr>
-          <p:cNvPr id="65" name="lane-6-chip-5"/>
+          <p:cNvPr id="66" name="lane-6-chip-5"/>
           <p:cNvSpPr txBox="1"/>
           <p:nvPr/>
         </p:nvSpPr>
@@ -5851,7 +5891,7 @@
       </p:sp>
       <p:sp>
         <p:nvSpPr>
-          <p:cNvPr id="66" name="lane-6-result"/>
+          <p:cNvPr id="67" name="lane-6-result"/>
           <p:cNvSpPr txBox="1"/>
           <p:nvPr/>
         </p:nvSpPr>
@@ -5887,7 +5927,7 @@
       </p:sp>
       <p:sp>
         <p:nvSpPr>
-          <p:cNvPr id="67" name="decisions-head"/>
+          <p:cNvPr id="68" name="decisions-head"/>
           <p:cNvSpPr txBox="1"/>
           <p:nvPr/>
         </p:nvSpPr>
@@ -5923,7 +5963,7 @@
       </p:sp>
       <p:sp>
         <p:nvSpPr>
-          <p:cNvPr id="68" name="decision-1-chip"/>
+          <p:cNvPr id="69" name="decision-1-chip"/>
           <p:cNvSpPr txBox="1"/>
           <p:nvPr/>
         </p:nvSpPr>
@@ -5963,7 +6003,7 @@
       </p:sp>
       <p:sp>
         <p:nvSpPr>
-          <p:cNvPr id="69" name="decision-1-quote"/>
+          <p:cNvPr id="70" name="decision-1-quote"/>
           <p:cNvSpPr txBox="1"/>
           <p:nvPr/>
         </p:nvSpPr>
@@ -5999,7 +6039,7 @@
       </p:sp>
       <p:sp>
         <p:nvSpPr>
-          <p:cNvPr id="70" name="decision-1-out"/>
+          <p:cNvPr id="71" name="decision-1-out"/>
           <p:cNvSpPr txBox="1"/>
           <p:nvPr/>
         </p:nvSpPr>
@@ -6035,7 +6075,7 @@
       </p:sp>
       <p:sp>
         <p:nvSpPr>
-          <p:cNvPr id="71" name="decision-2-chip"/>
+          <p:cNvPr id="72" name="decision-2-chip"/>
           <p:cNvSpPr txBox="1"/>
           <p:nvPr/>
         </p:nvSpPr>
@@ -6075,7 +6115,7 @@
       </p:sp>
       <p:sp>
         <p:nvSpPr>
-          <p:cNvPr id="72" name="decision-2-quote"/>
+          <p:cNvPr id="73" name="decision-2-quote"/>
           <p:cNvSpPr txBox="1"/>
           <p:nvPr/>
         </p:nvSpPr>
@@ -6111,7 +6151,7 @@
       </p:sp>
       <p:sp>
         <p:nvSpPr>
-          <p:cNvPr id="73" name="decision-2-out"/>
+          <p:cNvPr id="74" name="decision-2-out"/>
           <p:cNvSpPr txBox="1"/>
           <p:nvPr/>
         </p:nvSpPr>
@@ -6147,7 +6187,7 @@
       </p:sp>
       <p:sp>
         <p:nvSpPr>
-          <p:cNvPr id="74" name="decision-3-chip"/>
+          <p:cNvPr id="75" name="decision-3-chip"/>
           <p:cNvSpPr txBox="1"/>
           <p:nvPr/>
         </p:nvSpPr>
@@ -6187,7 +6227,7 @@
       </p:sp>
       <p:sp>
         <p:nvSpPr>
-          <p:cNvPr id="75" name="decision-3-quote"/>
+          <p:cNvPr id="76" name="decision-3-quote"/>
           <p:cNvSpPr txBox="1"/>
           <p:nvPr/>
         </p:nvSpPr>
@@ -6223,7 +6263,7 @@
       </p:sp>
       <p:sp>
         <p:nvSpPr>
-          <p:cNvPr id="76" name="decision-3-out"/>
+          <p:cNvPr id="77" name="decision-3-out"/>
           <p:cNvSpPr txBox="1"/>
           <p:nvPr/>
         </p:nvSpPr>
@@ -6259,7 +6299,7 @@
       </p:sp>
       <p:sp>
         <p:nvSpPr>
-          <p:cNvPr id="77" name="decision-4-chip"/>
+          <p:cNvPr id="78" name="decision-4-chip"/>
           <p:cNvSpPr txBox="1"/>
           <p:nvPr/>
         </p:nvSpPr>
@@ -6299,7 +6339,7 @@
       </p:sp>
       <p:sp>
         <p:nvSpPr>
-          <p:cNvPr id="78" name="decision-4-quote"/>
+          <p:cNvPr id="79" name="decision-4-quote"/>
           <p:cNvSpPr txBox="1"/>
           <p:nvPr/>
         </p:nvSpPr>
@@ -6335,7 +6375,7 @@
       </p:sp>
       <p:sp>
         <p:nvSpPr>
-          <p:cNvPr id="79" name="decision-4-out"/>
+          <p:cNvPr id="80" name="decision-4-out"/>
           <p:cNvSpPr txBox="1"/>
           <p:nvPr/>
         </p:nvSpPr>
@@ -6363,7 +6403,7 @@
                   <a:schemeClr val="tx2"/>
                 </a:solidFill>
               </a:rPr>
-              <a:t>разбор потерь очков: +8 очков на трудном уровне</a:t>
+              <a:t>разбор потерь очков: +6 очков на трудном уровне</a:t>
             </a:r>
             <a:endParaRPr lang="en-US" sz="1300" dirty="0"/>
           </a:p>
@@ -6371,7 +6411,7 @@
       </p:sp>
       <p:sp>
         <p:nvSpPr>
-          <p:cNvPr id="80" name="decision-5-chip"/>
+          <p:cNvPr id="81" name="decision-5-chip"/>
           <p:cNvSpPr txBox="1"/>
           <p:nvPr/>
         </p:nvSpPr>
@@ -6411,7 +6451,7 @@
       </p:sp>
       <p:sp>
         <p:nvSpPr>
-          <p:cNvPr id="81" name="decision-5-quote"/>
+          <p:cNvPr id="82" name="decision-5-quote"/>
           <p:cNvSpPr txBox="1"/>
           <p:nvPr/>
         </p:nvSpPr>
@@ -6447,7 +6487,7 @@
       </p:sp>
       <p:sp>
         <p:nvSpPr>
-          <p:cNvPr id="82" name="decision-5-out"/>
+          <p:cNvPr id="83" name="decision-5-out"/>
           <p:cNvSpPr txBox="1"/>
           <p:nvPr/>
         </p:nvSpPr>
@@ -6483,7 +6523,7 @@
       </p:sp>
       <p:sp>
         <p:nvSpPr>
-          <p:cNvPr id="83" name="decision-6-chip"/>
+          <p:cNvPr id="84" name="decision-6-chip"/>
           <p:cNvSpPr txBox="1"/>
           <p:nvPr/>
         </p:nvSpPr>
@@ -6523,7 +6563,7 @@
       </p:sp>
       <p:sp>
         <p:nvSpPr>
-          <p:cNvPr id="84" name="decision-6-quote"/>
+          <p:cNvPr id="85" name="decision-6-quote"/>
           <p:cNvSpPr txBox="1"/>
           <p:nvPr/>
         </p:nvSpPr>
@@ -6559,7 +6599,7 @@
       </p:sp>
       <p:sp>
         <p:nvSpPr>
-          <p:cNvPr id="85" name="conclusion-card"/>
+          <p:cNvPr id="86" name="conclusion-card"/>
           <p:cNvSpPr/>
           <p:nvPr/>
         </p:nvSpPr>
@@ -6581,7 +6621,7 @@
       </p:sp>
       <p:sp>
         <p:nvSpPr>
-          <p:cNvPr id="86" name="conclusion-text"/>
+          <p:cNvPr id="87" name="conclusion-text"/>
           <p:cNvSpPr txBox="1"/>
           <p:nvPr/>
         </p:nvSpPr>

--- a/presentation/ai_process.pptx
+++ b/presentation/ai_process.pptx
@@ -108,7 +108,7 @@
   <p:extLst>
     <p:ext uri="{521415D9-36F7-43E2-AB2F-B90AF26B5E84}">
       <p14:sectionLst xmlns:p14="http://schemas.microsoft.com/office/powerpoint/2010/main">
-        <p14:section name="Как работали" id="{d6a036e6-e0cc-97d5-0c7e-7ea36f17bb23}">
+        <p14:section name="Как работали" id="{58730f8d-cd08-0e41-e768-b8ae628e89fa}">
           <p14:sldIdLst>
             <p14:sldId id="256"/>
             <p14:sldId id="257"/>
@@ -606,7 +606,7 @@
           <a:p>
             <a:r>
               <a:rPr lang="en-US" dirty="0"/>
-              <a:t>Слева — исследования. Каждая плашка — один шаг: обзор, работа инженера, ревью или решение человека. В первых двух исследованиях ревью нашло 7 ошибок, и два вывода пришлось перевернуть. Робот с языковой моделью выполнил миссию, заданную словами, 6 из 6; робот с простым правилом — ни разу. В Gazebo робот вернулся на базу в прогонах 8 из 9, после правки — 7 из 7. Разбор потерь дал плюс шесть очков на трудном уровне. Ожидание ответа модели стоило 73 очка; если робот едет, пока модель думает, возвращается 42 — эта работа ещё на ревью. А один опыт выигрыша не показал, и мы говорим об этом прямо. Справа — решения людей: не минимальная версия, робот-учёный, исследователи не пишут код, главная цель — результативный робот. Качество держится на устройстве процесса, а не на вере в один ответ модели.</a:t>
+              <a:t>Каждая строка — одно исследование, каждый значок — один шаг: обзор исследователя, работа инженера или ревью. Галочка — работа принята. В первых двух исследованиях ревью нашло 7 ошибок, и два вывода пришлось перевернуть. В обзорах литературы проверка нашла две выдуманные ссылки. Робот с языковой моделью выполнил миссию, заданную словами, 6 из 6; робот с простым правилом — ни разу. Ожидание ответа модели стоило 73 очка; если робот едет, пока модель думает, возвращается 42 — эту работу ревью вернуло, она ещё не принята. В Gazebo робот вернулся на базу в прогонах 8 из 9, после правки — 7 из 7. Разбор потерь дал плюс шесть очков на трудном уровне. Не всё закончилось выигрышем: один опыт его не показал, новые схемы агента оказались не лучше нынешней, одну работу ревью вернуло, и мы её отложили. Качество держится на устройстве процесса, а не на вере в один ответ модели.</a:t>
             </a:r>
             <a:endParaRPr lang="en-US" dirty="0"/>
           </a:p>
@@ -1649,16 +1649,40 @@
           </a:p>
         </p:txBody>
       </p:sp>
-      <p:sp>
-        <p:nvSpPr>
-          <p:cNvPr id="13" name="lead-model"/>
+      <p:pic>
+        <p:nvPicPr>
+          <p:cNvPr id="13" name="lead-logo" descr="/Users/a/MAI/DID/presentation/assets/logos/claude.png">    </p:cNvPr>
+          <p:cNvPicPr>
+            <a:picLocks noChangeAspect="1"/>
+          </p:cNvPicPr>
+          <p:nvPr/>
+        </p:nvPicPr>
+        <p:blipFill>
+          <a:blip r:embed="rId1"/>
+          <a:stretch>
+            <a:fillRect/>
+          </a:stretch>
+        </p:blipFill>
+        <p:spPr>
+          <a:xfrm>
+            <a:off x="3218688" y="3822192"/>
+            <a:ext cx="173736" cy="173736"/>
+          </a:xfrm>
+          <a:prstGeom prst="rect">
+            <a:avLst/>
+          </a:prstGeom>
+        </p:spPr>
+      </p:pic>
+      <p:sp>
+        <p:nvSpPr>
+          <p:cNvPr id="14" name="lead-model"/>
           <p:cNvSpPr txBox="1"/>
           <p:nvPr/>
         </p:nvSpPr>
         <p:spPr>
           <a:xfrm>
-            <a:off x="3218688" y="3739896"/>
-            <a:ext cx="1883664" cy="274320"/>
+            <a:off x="3474720" y="3739896"/>
+            <a:ext cx="1627632" cy="274320"/>
           </a:xfrm>
           <a:prstGeom prst="rect">
             <a:avLst/>
@@ -1687,7 +1711,7 @@
       </p:sp>
       <p:sp>
         <p:nvSpPr>
-          <p:cNvPr id="14" name="arrow-lead-roles"/>
+          <p:cNvPr id="15" name="arrow-lead-roles"/>
           <p:cNvSpPr/>
           <p:nvPr/>
         </p:nvSpPr>
@@ -1711,7 +1735,7 @@
       </p:sp>
       <p:sp>
         <p:nvSpPr>
-          <p:cNvPr id="15" name="role-1-card"/>
+          <p:cNvPr id="16" name="role-1-card"/>
           <p:cNvSpPr/>
           <p:nvPr/>
         </p:nvSpPr>
@@ -1733,7 +1757,7 @@
       </p:sp>
       <p:sp>
         <p:nvSpPr>
-          <p:cNvPr id="16" name="role-1-head"/>
+          <p:cNvPr id="17" name="role-1-head"/>
           <p:cNvSpPr txBox="1"/>
           <p:nvPr/>
         </p:nvSpPr>
@@ -1769,7 +1793,7 @@
       </p:sp>
       <p:sp>
         <p:nvSpPr>
-          <p:cNvPr id="17" name="role-1-body"/>
+          <p:cNvPr id="18" name="role-1-body"/>
           <p:cNvSpPr txBox="1"/>
           <p:nvPr/>
         </p:nvSpPr>
@@ -1803,25 +1827,49 @@
           </a:p>
         </p:txBody>
       </p:sp>
-      <p:sp>
-        <p:nvSpPr>
-          <p:cNvPr id="18" name="role-1-model"/>
+      <p:pic>
+        <p:nvPicPr>
+          <p:cNvPr id="19" name="role-1-logo-1" descr="/Users/a/MAI/DID/presentation/assets/logos/gemini.png">    </p:cNvPr>
+          <p:cNvPicPr>
+            <a:picLocks noChangeAspect="1"/>
+          </p:cNvPicPr>
+          <p:nvPr/>
+        </p:nvPicPr>
+        <p:blipFill>
+          <a:blip r:embed="rId2"/>
+          <a:stretch>
+            <a:fillRect/>
+          </a:stretch>
+        </p:blipFill>
+        <p:spPr>
+          <a:xfrm>
+            <a:off x="5852160" y="2596896"/>
+            <a:ext cx="173736" cy="173736"/>
+          </a:xfrm>
+          <a:prstGeom prst="rect">
+            <a:avLst/>
+          </a:prstGeom>
+        </p:spPr>
+      </p:pic>
+      <p:sp>
+        <p:nvSpPr>
+          <p:cNvPr id="20" name="role-1-model"/>
           <p:cNvSpPr txBox="1"/>
           <p:nvPr/>
         </p:nvSpPr>
         <p:spPr>
           <a:xfrm>
-            <a:off x="5852160" y="2587752"/>
-            <a:ext cx="2564892" cy="201168"/>
-          </a:xfrm>
-          <a:prstGeom prst="rect">
-            <a:avLst/>
-          </a:prstGeom>
-          <a:noFill/>
-          <a:ln/>
-        </p:spPr>
-        <p:txBody>
-          <a:bodyPr wrap="square" lIns="0" tIns="0" rIns="0" bIns="0" rtlCol="0" anchor="b"/>
+            <a:off x="6108192" y="2587752"/>
+            <a:ext cx="2308860" cy="201168"/>
+          </a:xfrm>
+          <a:prstGeom prst="rect">
+            <a:avLst/>
+          </a:prstGeom>
+          <a:noFill/>
+          <a:ln/>
+        </p:spPr>
+        <p:txBody>
+          <a:bodyPr wrap="none" lIns="0" tIns="0" rIns="0" bIns="0" rtlCol="0" anchor="b"/>
           <a:lstStyle/>
           <a:p>
             <a:pPr algn="l" indent="0" marL="0">
@@ -1841,7 +1889,7 @@
       </p:sp>
       <p:sp>
         <p:nvSpPr>
-          <p:cNvPr id="19" name="role-2-card"/>
+          <p:cNvPr id="21" name="role-2-card"/>
           <p:cNvSpPr/>
           <p:nvPr/>
         </p:nvSpPr>
@@ -1863,7 +1911,7 @@
       </p:sp>
       <p:sp>
         <p:nvSpPr>
-          <p:cNvPr id="20" name="role-2-head"/>
+          <p:cNvPr id="22" name="role-2-head"/>
           <p:cNvSpPr txBox="1"/>
           <p:nvPr/>
         </p:nvSpPr>
@@ -1899,7 +1947,7 @@
       </p:sp>
       <p:sp>
         <p:nvSpPr>
-          <p:cNvPr id="21" name="role-2-body"/>
+          <p:cNvPr id="23" name="role-2-body"/>
           <p:cNvSpPr txBox="1"/>
           <p:nvPr/>
         </p:nvSpPr>
@@ -1933,25 +1981,49 @@
           </a:p>
         </p:txBody>
       </p:sp>
-      <p:sp>
-        <p:nvSpPr>
-          <p:cNvPr id="22" name="role-2-model"/>
+      <p:pic>
+        <p:nvPicPr>
+          <p:cNvPr id="24" name="role-2-logo-1" descr="/Users/a/MAI/DID/presentation/assets/logos/claude.png">    </p:cNvPr>
+          <p:cNvPicPr>
+            <a:picLocks noChangeAspect="1"/>
+          </p:cNvPicPr>
+          <p:nvPr/>
+        </p:nvPicPr>
+        <p:blipFill>
+          <a:blip r:embed="rId3"/>
+          <a:stretch>
+            <a:fillRect/>
+          </a:stretch>
+        </p:blipFill>
+        <p:spPr>
+          <a:xfrm>
+            <a:off x="8892540" y="2596896"/>
+            <a:ext cx="173736" cy="173736"/>
+          </a:xfrm>
+          <a:prstGeom prst="rect">
+            <a:avLst/>
+          </a:prstGeom>
+        </p:spPr>
+      </p:pic>
+      <p:sp>
+        <p:nvSpPr>
+          <p:cNvPr id="25" name="role-2-model"/>
           <p:cNvSpPr txBox="1"/>
           <p:nvPr/>
         </p:nvSpPr>
         <p:spPr>
           <a:xfrm>
-            <a:off x="8892540" y="2587752"/>
-            <a:ext cx="2564892" cy="201168"/>
-          </a:xfrm>
-          <a:prstGeom prst="rect">
-            <a:avLst/>
-          </a:prstGeom>
-          <a:noFill/>
-          <a:ln/>
-        </p:spPr>
-        <p:txBody>
-          <a:bodyPr wrap="square" lIns="0" tIns="0" rIns="0" bIns="0" rtlCol="0" anchor="b"/>
+            <a:off x="9148572" y="2587752"/>
+            <a:ext cx="2308860" cy="201168"/>
+          </a:xfrm>
+          <a:prstGeom prst="rect">
+            <a:avLst/>
+          </a:prstGeom>
+          <a:noFill/>
+          <a:ln/>
+        </p:spPr>
+        <p:txBody>
+          <a:bodyPr wrap="none" lIns="0" tIns="0" rIns="0" bIns="0" rtlCol="0" anchor="b"/>
           <a:lstStyle/>
           <a:p>
             <a:pPr algn="l" indent="0" marL="0">
@@ -1971,7 +2043,7 @@
       </p:sp>
       <p:sp>
         <p:nvSpPr>
-          <p:cNvPr id="23" name="role-3-card"/>
+          <p:cNvPr id="26" name="role-3-card"/>
           <p:cNvSpPr/>
           <p:nvPr/>
         </p:nvSpPr>
@@ -1993,7 +2065,7 @@
       </p:sp>
       <p:sp>
         <p:nvSpPr>
-          <p:cNvPr id="24" name="role-3-head"/>
+          <p:cNvPr id="27" name="role-3-head"/>
           <p:cNvSpPr txBox="1"/>
           <p:nvPr/>
         </p:nvSpPr>
@@ -2029,7 +2101,7 @@
       </p:sp>
       <p:sp>
         <p:nvSpPr>
-          <p:cNvPr id="25" name="role-3-body"/>
+          <p:cNvPr id="28" name="role-3-body"/>
           <p:cNvSpPr txBox="1"/>
           <p:nvPr/>
         </p:nvSpPr>
@@ -2063,25 +2135,49 @@
           </a:p>
         </p:txBody>
       </p:sp>
-      <p:sp>
-        <p:nvSpPr>
-          <p:cNvPr id="26" name="role-3-model"/>
+      <p:pic>
+        <p:nvPicPr>
+          <p:cNvPr id="29" name="role-3-logo-1" descr="/Users/a/MAI/DID/presentation/assets/logos/openai.png">    </p:cNvPr>
+          <p:cNvPicPr>
+            <a:picLocks noChangeAspect="1"/>
+          </p:cNvPicPr>
+          <p:nvPr/>
+        </p:nvPicPr>
+        <p:blipFill>
+          <a:blip r:embed="rId4"/>
+          <a:stretch>
+            <a:fillRect/>
+          </a:stretch>
+        </p:blipFill>
+        <p:spPr>
+          <a:xfrm>
+            <a:off x="5852160" y="3867912"/>
+            <a:ext cx="173736" cy="173736"/>
+          </a:xfrm>
+          <a:prstGeom prst="rect">
+            <a:avLst/>
+          </a:prstGeom>
+        </p:spPr>
+      </p:pic>
+      <p:sp>
+        <p:nvSpPr>
+          <p:cNvPr id="30" name="role-3-model"/>
           <p:cNvSpPr txBox="1"/>
           <p:nvPr/>
         </p:nvSpPr>
         <p:spPr>
           <a:xfrm>
-            <a:off x="5852160" y="3858768"/>
-            <a:ext cx="2564892" cy="201168"/>
-          </a:xfrm>
-          <a:prstGeom prst="rect">
-            <a:avLst/>
-          </a:prstGeom>
-          <a:noFill/>
-          <a:ln/>
-        </p:spPr>
-        <p:txBody>
-          <a:bodyPr wrap="square" lIns="0" tIns="0" rIns="0" bIns="0" rtlCol="0" anchor="b"/>
+            <a:off x="6108192" y="3858768"/>
+            <a:ext cx="2308860" cy="201168"/>
+          </a:xfrm>
+          <a:prstGeom prst="rect">
+            <a:avLst/>
+          </a:prstGeom>
+          <a:noFill/>
+          <a:ln/>
+        </p:spPr>
+        <p:txBody>
+          <a:bodyPr wrap="none" lIns="0" tIns="0" rIns="0" bIns="0" rtlCol="0" anchor="b"/>
           <a:lstStyle/>
           <a:p>
             <a:pPr algn="l" indent="0" marL="0">
@@ -2101,7 +2197,7 @@
       </p:sp>
       <p:sp>
         <p:nvSpPr>
-          <p:cNvPr id="27" name="role-4-card"/>
+          <p:cNvPr id="31" name="role-4-card"/>
           <p:cNvSpPr/>
           <p:nvPr/>
         </p:nvSpPr>
@@ -2123,7 +2219,7 @@
       </p:sp>
       <p:sp>
         <p:nvSpPr>
-          <p:cNvPr id="28" name="role-4-head"/>
+          <p:cNvPr id="32" name="role-4-head"/>
           <p:cNvSpPr txBox="1"/>
           <p:nvPr/>
         </p:nvSpPr>
@@ -2159,7 +2255,7 @@
       </p:sp>
       <p:sp>
         <p:nvSpPr>
-          <p:cNvPr id="29" name="role-4-body"/>
+          <p:cNvPr id="33" name="role-4-body"/>
           <p:cNvSpPr txBox="1"/>
           <p:nvPr/>
         </p:nvSpPr>
@@ -2193,25 +2289,73 @@
           </a:p>
         </p:txBody>
       </p:sp>
-      <p:sp>
-        <p:nvSpPr>
-          <p:cNvPr id="30" name="role-4-model"/>
+      <p:pic>
+        <p:nvPicPr>
+          <p:cNvPr id="34" name="role-4-logo-1" descr="/Users/a/MAI/DID/presentation/assets/logos/claude.png">    </p:cNvPr>
+          <p:cNvPicPr>
+            <a:picLocks noChangeAspect="1"/>
+          </p:cNvPicPr>
+          <p:nvPr/>
+        </p:nvPicPr>
+        <p:blipFill>
+          <a:blip r:embed="rId5"/>
+          <a:stretch>
+            <a:fillRect/>
+          </a:stretch>
+        </p:blipFill>
+        <p:spPr>
+          <a:xfrm>
+            <a:off x="8892540" y="3867912"/>
+            <a:ext cx="173736" cy="173736"/>
+          </a:xfrm>
+          <a:prstGeom prst="rect">
+            <a:avLst/>
+          </a:prstGeom>
+        </p:spPr>
+      </p:pic>
+      <p:pic>
+        <p:nvPicPr>
+          <p:cNvPr id="35" name="role-4-logo-2" descr="/Users/a/MAI/DID/presentation/assets/logos/openai.png">    </p:cNvPr>
+          <p:cNvPicPr>
+            <a:picLocks noChangeAspect="1"/>
+          </p:cNvPicPr>
+          <p:nvPr/>
+        </p:nvPicPr>
+        <p:blipFill>
+          <a:blip r:embed="rId6"/>
+          <a:stretch>
+            <a:fillRect/>
+          </a:stretch>
+        </p:blipFill>
+        <p:spPr>
+          <a:xfrm>
+            <a:off x="9121140" y="3867912"/>
+            <a:ext cx="173736" cy="173736"/>
+          </a:xfrm>
+          <a:prstGeom prst="rect">
+            <a:avLst/>
+          </a:prstGeom>
+        </p:spPr>
+      </p:pic>
+      <p:sp>
+        <p:nvSpPr>
+          <p:cNvPr id="36" name="role-4-model"/>
           <p:cNvSpPr txBox="1"/>
           <p:nvPr/>
         </p:nvSpPr>
         <p:spPr>
           <a:xfrm>
-            <a:off x="8892540" y="3858768"/>
-            <a:ext cx="2564892" cy="201168"/>
-          </a:xfrm>
-          <a:prstGeom prst="rect">
-            <a:avLst/>
-          </a:prstGeom>
-          <a:noFill/>
-          <a:ln/>
-        </p:spPr>
-        <p:txBody>
-          <a:bodyPr wrap="square" lIns="0" tIns="0" rIns="0" bIns="0" rtlCol="0" anchor="b"/>
+            <a:off x="9377172" y="3858768"/>
+            <a:ext cx="2080260" cy="201168"/>
+          </a:xfrm>
+          <a:prstGeom prst="rect">
+            <a:avLst/>
+          </a:prstGeom>
+          <a:noFill/>
+          <a:ln/>
+        </p:spPr>
+        <p:txBody>
+          <a:bodyPr wrap="none" lIns="0" tIns="0" rIns="0" bIns="0" rtlCol="0" anchor="b"/>
           <a:lstStyle/>
           <a:p>
             <a:pPr algn="l" indent="0" marL="0">
@@ -2223,7 +2367,7 @@
                   <a:schemeClr val="accent5"/>
                 </a:solidFill>
               </a:rPr>
-              <a:t>Claude Fable 5.1 и GPT-6 Astra</a:t>
+              <a:t>Fable 5.1 и GPT-6 Astra</a:t>
             </a:r>
             <a:endParaRPr lang="en-US" sz="1200" dirty="0"/>
           </a:p>
@@ -2231,7 +2375,7 @@
       </p:sp>
       <p:sp>
         <p:nvSpPr>
-          <p:cNvPr id="31" name="cycle-label"/>
+          <p:cNvPr id="37" name="cycle-label"/>
           <p:cNvSpPr txBox="1"/>
           <p:nvPr/>
         </p:nvSpPr>
@@ -2278,7 +2422,7 @@
       </p:sp>
       <p:sp>
         <p:nvSpPr>
-          <p:cNvPr id="32" name="cycle-1-card"/>
+          <p:cNvPr id="38" name="cycle-1-card"/>
           <p:cNvSpPr/>
           <p:nvPr/>
         </p:nvSpPr>
@@ -2300,7 +2444,7 @@
       </p:sp>
       <p:sp>
         <p:nvSpPr>
-          <p:cNvPr id="33" name="cycle-1-text"/>
+          <p:cNvPr id="39" name="cycle-1-text"/>
           <p:cNvSpPr txBox="1"/>
           <p:nvPr/>
         </p:nvSpPr>
@@ -2350,7 +2494,7 @@
       </p:sp>
       <p:sp>
         <p:nvSpPr>
-          <p:cNvPr id="34" name="cycle-1-arrow"/>
+          <p:cNvPr id="40" name="cycle-1-arrow"/>
           <p:cNvSpPr/>
           <p:nvPr/>
         </p:nvSpPr>
@@ -2374,7 +2518,7 @@
       </p:sp>
       <p:sp>
         <p:nvSpPr>
-          <p:cNvPr id="35" name="cycle-2-card"/>
+          <p:cNvPr id="41" name="cycle-2-card"/>
           <p:cNvSpPr/>
           <p:nvPr/>
         </p:nvSpPr>
@@ -2396,7 +2540,7 @@
       </p:sp>
       <p:sp>
         <p:nvSpPr>
-          <p:cNvPr id="36" name="cycle-2-text"/>
+          <p:cNvPr id="42" name="cycle-2-text"/>
           <p:cNvSpPr txBox="1"/>
           <p:nvPr/>
         </p:nvSpPr>
@@ -2432,7 +2576,7 @@
       </p:sp>
       <p:sp>
         <p:nvSpPr>
-          <p:cNvPr id="37" name="cycle-2-arrow"/>
+          <p:cNvPr id="43" name="cycle-2-arrow"/>
           <p:cNvSpPr/>
           <p:nvPr/>
         </p:nvSpPr>
@@ -2456,7 +2600,7 @@
       </p:sp>
       <p:sp>
         <p:nvSpPr>
-          <p:cNvPr id="38" name="cycle-3-card"/>
+          <p:cNvPr id="44" name="cycle-3-card"/>
           <p:cNvSpPr/>
           <p:nvPr/>
         </p:nvSpPr>
@@ -2478,7 +2622,7 @@
       </p:sp>
       <p:sp>
         <p:nvSpPr>
-          <p:cNvPr id="39" name="cycle-3-text"/>
+          <p:cNvPr id="45" name="cycle-3-text"/>
           <p:cNvSpPr txBox="1"/>
           <p:nvPr/>
         </p:nvSpPr>
@@ -2528,7 +2672,7 @@
       </p:sp>
       <p:sp>
         <p:nvSpPr>
-          <p:cNvPr id="40" name="cycle-3-arrow"/>
+          <p:cNvPr id="46" name="cycle-3-arrow"/>
           <p:cNvSpPr/>
           <p:nvPr/>
         </p:nvSpPr>
@@ -2552,7 +2696,7 @@
       </p:sp>
       <p:sp>
         <p:nvSpPr>
-          <p:cNvPr id="41" name="cycle-4-card"/>
+          <p:cNvPr id="47" name="cycle-4-card"/>
           <p:cNvSpPr/>
           <p:nvPr/>
         </p:nvSpPr>
@@ -2574,7 +2718,7 @@
       </p:sp>
       <p:sp>
         <p:nvSpPr>
-          <p:cNvPr id="42" name="cycle-4-text"/>
+          <p:cNvPr id="48" name="cycle-4-text"/>
           <p:cNvSpPr txBox="1"/>
           <p:nvPr/>
         </p:nvSpPr>
@@ -2624,7 +2768,7 @@
       </p:sp>
       <p:sp>
         <p:nvSpPr>
-          <p:cNvPr id="43" name="cycle-4-arrow"/>
+          <p:cNvPr id="49" name="cycle-4-arrow"/>
           <p:cNvSpPr/>
           <p:nvPr/>
         </p:nvSpPr>
@@ -2648,7 +2792,7 @@
       </p:sp>
       <p:sp>
         <p:nvSpPr>
-          <p:cNvPr id="44" name="cycle-5-card"/>
+          <p:cNvPr id="50" name="cycle-5-card"/>
           <p:cNvSpPr/>
           <p:nvPr/>
         </p:nvSpPr>
@@ -2670,7 +2814,7 @@
       </p:sp>
       <p:sp>
         <p:nvSpPr>
-          <p:cNvPr id="45" name="cycle-5-text"/>
+          <p:cNvPr id="51" name="cycle-5-text"/>
           <p:cNvSpPr txBox="1"/>
           <p:nvPr/>
         </p:nvSpPr>
@@ -2706,7 +2850,7 @@
       </p:sp>
       <p:sp>
         <p:nvSpPr>
-          <p:cNvPr id="46" name="cycle-5-arrow"/>
+          <p:cNvPr id="52" name="cycle-5-arrow"/>
           <p:cNvSpPr/>
           <p:nvPr/>
         </p:nvSpPr>
@@ -2730,7 +2874,7 @@
       </p:sp>
       <p:sp>
         <p:nvSpPr>
-          <p:cNvPr id="47" name="cycle-6-card"/>
+          <p:cNvPr id="53" name="cycle-6-card"/>
           <p:cNvSpPr/>
           <p:nvPr/>
         </p:nvSpPr>
@@ -2752,7 +2896,7 @@
       </p:sp>
       <p:sp>
         <p:nvSpPr>
-          <p:cNvPr id="48" name="cycle-6-text"/>
+          <p:cNvPr id="54" name="cycle-6-text"/>
           <p:cNvSpPr txBox="1"/>
           <p:nvPr/>
         </p:nvSpPr>
@@ -2802,7 +2946,7 @@
       </p:sp>
       <p:sp>
         <p:nvSpPr>
-          <p:cNvPr id="49" name="cycle-6-arrow"/>
+          <p:cNvPr id="55" name="cycle-6-arrow"/>
           <p:cNvSpPr/>
           <p:nvPr/>
         </p:nvSpPr>
@@ -2826,7 +2970,7 @@
       </p:sp>
       <p:sp>
         <p:nvSpPr>
-          <p:cNvPr id="50" name="cycle-7-card"/>
+          <p:cNvPr id="56" name="cycle-7-card"/>
           <p:cNvSpPr/>
           <p:nvPr/>
         </p:nvSpPr>
@@ -2848,7 +2992,7 @@
       </p:sp>
       <p:sp>
         <p:nvSpPr>
-          <p:cNvPr id="51" name="cycle-7-text"/>
+          <p:cNvPr id="57" name="cycle-7-text"/>
           <p:cNvSpPr txBox="1"/>
           <p:nvPr/>
         </p:nvSpPr>
@@ -2898,7 +3042,7 @@
       </p:sp>
       <p:sp>
         <p:nvSpPr>
-          <p:cNvPr id="52" name="num-1-card"/>
+          <p:cNvPr id="58" name="num-1-card"/>
           <p:cNvSpPr/>
           <p:nvPr/>
         </p:nvSpPr>
@@ -2920,7 +3064,7 @@
       </p:sp>
       <p:sp>
         <p:nvSpPr>
-          <p:cNvPr id="53" name="num-1-value"/>
+          <p:cNvPr id="59" name="num-1-value"/>
           <p:cNvSpPr txBox="1"/>
           <p:nvPr/>
         </p:nvSpPr>
@@ -2956,7 +3100,7 @@
       </p:sp>
       <p:sp>
         <p:nvSpPr>
-          <p:cNvPr id="54" name="num-1-label"/>
+          <p:cNvPr id="60" name="num-1-label"/>
           <p:cNvSpPr txBox="1"/>
           <p:nvPr/>
         </p:nvSpPr>
@@ -2992,7 +3136,7 @@
       </p:sp>
       <p:sp>
         <p:nvSpPr>
-          <p:cNvPr id="55" name="num-2-card"/>
+          <p:cNvPr id="61" name="num-2-card"/>
           <p:cNvSpPr/>
           <p:nvPr/>
         </p:nvSpPr>
@@ -3014,7 +3158,7 @@
       </p:sp>
       <p:sp>
         <p:nvSpPr>
-          <p:cNvPr id="56" name="num-2-value"/>
+          <p:cNvPr id="62" name="num-2-value"/>
           <p:cNvSpPr txBox="1"/>
           <p:nvPr/>
         </p:nvSpPr>
@@ -3050,7 +3194,7 @@
       </p:sp>
       <p:sp>
         <p:nvSpPr>
-          <p:cNvPr id="57" name="num-2-label"/>
+          <p:cNvPr id="63" name="num-2-label"/>
           <p:cNvSpPr txBox="1"/>
           <p:nvPr/>
         </p:nvSpPr>
@@ -3086,7 +3230,7 @@
       </p:sp>
       <p:sp>
         <p:nvSpPr>
-          <p:cNvPr id="58" name="num-3-card"/>
+          <p:cNvPr id="64" name="num-3-card"/>
           <p:cNvSpPr/>
           <p:nvPr/>
         </p:nvSpPr>
@@ -3108,7 +3252,7 @@
       </p:sp>
       <p:sp>
         <p:nvSpPr>
-          <p:cNvPr id="59" name="num-3-value"/>
+          <p:cNvPr id="65" name="num-3-value"/>
           <p:cNvSpPr txBox="1"/>
           <p:nvPr/>
         </p:nvSpPr>
@@ -3144,7 +3288,7 @@
       </p:sp>
       <p:sp>
         <p:nvSpPr>
-          <p:cNvPr id="60" name="num-3-label"/>
+          <p:cNvPr id="66" name="num-3-label"/>
           <p:cNvSpPr txBox="1"/>
           <p:nvPr/>
         </p:nvSpPr>
@@ -3180,7 +3324,7 @@
       </p:sp>
       <p:sp>
         <p:nvSpPr>
-          <p:cNvPr id="61" name="num-4-card"/>
+          <p:cNvPr id="67" name="num-4-card"/>
           <p:cNvSpPr/>
           <p:nvPr/>
         </p:nvSpPr>
@@ -3202,7 +3346,7 @@
       </p:sp>
       <p:sp>
         <p:nvSpPr>
-          <p:cNvPr id="62" name="num-4-1-value"/>
+          <p:cNvPr id="68" name="num-4-1-value"/>
           <p:cNvSpPr txBox="1"/>
           <p:nvPr/>
         </p:nvSpPr>
@@ -3238,7 +3382,7 @@
       </p:sp>
       <p:sp>
         <p:nvSpPr>
-          <p:cNvPr id="63" name="num-4-1-label"/>
+          <p:cNvPr id="69" name="num-4-1-label"/>
           <p:cNvSpPr txBox="1"/>
           <p:nvPr/>
         </p:nvSpPr>
@@ -3274,7 +3418,7 @@
       </p:sp>
       <p:sp>
         <p:nvSpPr>
-          <p:cNvPr id="64" name="num-4-2-value"/>
+          <p:cNvPr id="70" name="num-4-2-value"/>
           <p:cNvSpPr txBox="1"/>
           <p:nvPr/>
         </p:nvSpPr>
@@ -3310,7 +3454,7 @@
       </p:sp>
       <p:sp>
         <p:nvSpPr>
-          <p:cNvPr id="65" name="num-4-2-label"/>
+          <p:cNvPr id="71" name="num-4-2-label"/>
           <p:cNvSpPr txBox="1"/>
           <p:nvPr/>
         </p:nvSpPr>
@@ -3346,7 +3490,7 @@
       </p:sp>
       <p:sp>
         <p:nvSpPr>
-          <p:cNvPr id="66" name="num-4-3-value"/>
+          <p:cNvPr id="72" name="num-4-3-value"/>
           <p:cNvSpPr txBox="1"/>
           <p:nvPr/>
         </p:nvSpPr>
@@ -3382,7 +3526,7 @@
       </p:sp>
       <p:sp>
         <p:nvSpPr>
-          <p:cNvPr id="67" name="num-4-3-label"/>
+          <p:cNvPr id="73" name="num-4-3-label"/>
           <p:cNvSpPr txBox="1"/>
           <p:nvPr/>
         </p:nvSpPr>
@@ -3518,7 +3662,7 @@
                   <a:schemeClr val="tx1"/>
                 </a:solidFill>
               </a:rPr>
-              <a:t>Что решали люди и как прошли исследования</a:t>
+              <a:t>Как прошли исследования</a:t>
             </a:r>
             <a:endParaRPr lang="en-US" sz="3200" dirty="0"/>
           </a:p>
@@ -3556,7 +3700,7 @@
                   <a:schemeClr val="accent5"/>
                 </a:solidFill>
               </a:rPr>
-              <a:t>На развилках решал человек; код каждой работы до вливания читала независимая модель-ревьюер</a:t>
+              <a:t>Каждая строка — одно исследование, каждый значок — один шаг: какая модель работала и чем закончилось</a:t>
             </a:r>
             <a:endParaRPr lang="en-US" sz="1600" dirty="0"/>
           </a:p>
@@ -3564,39 +3708,81 @@
       </p:sp>
       <p:sp>
         <p:nvSpPr>
-          <p:cNvPr id="5" name="legend-1-chip"/>
-          <p:cNvSpPr txBox="1"/>
-          <p:nvPr/>
-        </p:nvSpPr>
-        <p:spPr>
-          <a:xfrm>
-            <a:off x="548640" y="1705356"/>
-            <a:ext cx="246888" cy="246888"/>
+          <p:cNvPr id="5" name="legend-1-chip-tile"/>
+          <p:cNvSpPr/>
+          <p:nvPr/>
+        </p:nvSpPr>
+        <p:spPr>
+          <a:xfrm>
+            <a:off x="548640" y="1700784"/>
+            <a:ext cx="256032" cy="256032"/>
           </a:xfrm>
           <a:prstGeom prst="roundRect">
             <a:avLst>
-              <a:gd name="adj" fmla="val 14815"/>
+              <a:gd name="adj" fmla="val 14286"/>
             </a:avLst>
           </a:prstGeom>
           <a:solidFill>
-            <a:schemeClr val="accent2"/>
-          </a:solidFill>
-          <a:ln/>
-        </p:spPr>
-        <p:txBody>
-          <a:bodyPr wrap="square" lIns="0" tIns="0" rIns="0" bIns="0" rtlCol="0" anchor="ctr"/>
-          <a:lstStyle/>
-          <a:p>
-            <a:pPr algn="ctr" indent="0" marL="0">
-              <a:buNone/>
-            </a:pPr>
-            <a:r>
-              <a:rPr lang="en-US" sz="1300" b="1" dirty="0">
-                <a:solidFill>
-                  <a:schemeClr val="bg1"/>
-                </a:solidFill>
-              </a:rPr>
-              <a:t>Г</a:t>
+            <a:schemeClr val="bg2"/>
+          </a:solidFill>
+          <a:ln/>
+        </p:spPr>
+      </p:sp>
+      <p:pic>
+        <p:nvPicPr>
+          <p:cNvPr id="6" name="legend-1-chip" descr="/Users/a/MAI/DID/presentation/assets/logos/gemini.png">    </p:cNvPr>
+          <p:cNvPicPr>
+            <a:picLocks noChangeAspect="1"/>
+          </p:cNvPicPr>
+          <p:nvPr/>
+        </p:nvPicPr>
+        <p:blipFill>
+          <a:blip r:embed="rId1"/>
+          <a:stretch>
+            <a:fillRect/>
+          </a:stretch>
+        </p:blipFill>
+        <p:spPr>
+          <a:xfrm>
+            <a:off x="589788" y="1741932"/>
+            <a:ext cx="173736" cy="173736"/>
+          </a:xfrm>
+          <a:prstGeom prst="rect">
+            <a:avLst/>
+          </a:prstGeom>
+        </p:spPr>
+      </p:pic>
+      <p:sp>
+        <p:nvSpPr>
+          <p:cNvPr id="7" name="legend-1-word"/>
+          <p:cNvSpPr txBox="1"/>
+          <p:nvPr/>
+        </p:nvSpPr>
+        <p:spPr>
+          <a:xfrm>
+            <a:off x="877824" y="1691640"/>
+            <a:ext cx="2787091" cy="274320"/>
+          </a:xfrm>
+          <a:prstGeom prst="rect">
+            <a:avLst/>
+          </a:prstGeom>
+          <a:noFill/>
+          <a:ln/>
+        </p:spPr>
+        <p:txBody>
+          <a:bodyPr wrap="none" lIns="0" tIns="0" rIns="0" bIns="0" rtlCol="0" anchor="ctr"/>
+          <a:lstStyle/>
+          <a:p>
+            <a:pPr algn="l" indent="0" marL="0">
+              <a:buNone/>
+            </a:pPr>
+            <a:r>
+              <a:rPr lang="en-US" sz="1300" dirty="0">
+                <a:solidFill>
+                  <a:schemeClr val="tx2"/>
+                </a:solidFill>
+              </a:rPr>
+              <a:t>Gemini 3.8 Flash — исследователь</a:t>
             </a:r>
             <a:endParaRPr lang="en-US" sz="1300" dirty="0"/>
           </a:p>
@@ -3604,75 +3790,81 @@
       </p:sp>
       <p:sp>
         <p:nvSpPr>
-          <p:cNvPr id="6" name="legend-1-word"/>
-          <p:cNvSpPr txBox="1"/>
-          <p:nvPr/>
-        </p:nvSpPr>
-        <p:spPr>
-          <a:xfrm>
-            <a:off x="859536" y="1691640"/>
-            <a:ext cx="568757" cy="274320"/>
-          </a:xfrm>
-          <a:prstGeom prst="rect">
-            <a:avLst/>
-          </a:prstGeom>
-          <a:noFill/>
-          <a:ln/>
-        </p:spPr>
-        <p:txBody>
-          <a:bodyPr wrap="none" lIns="0" tIns="0" rIns="0" bIns="0" rtlCol="0" anchor="ctr"/>
-          <a:lstStyle/>
-          <a:p>
-            <a:pPr algn="l" indent="0" marL="0">
-              <a:buNone/>
-            </a:pPr>
-            <a:r>
-              <a:rPr lang="en-US" sz="1300" dirty="0">
-                <a:solidFill>
-                  <a:schemeClr val="tx2"/>
-                </a:solidFill>
-              </a:rPr>
-              <a:t>Gemini</a:t>
-            </a:r>
-            <a:endParaRPr lang="en-US" sz="1300" dirty="0"/>
-          </a:p>
-        </p:txBody>
-      </p:sp>
-      <p:sp>
-        <p:nvSpPr>
-          <p:cNvPr id="7" name="legend-2-chip"/>
-          <p:cNvSpPr txBox="1"/>
-          <p:nvPr/>
-        </p:nvSpPr>
-        <p:spPr>
-          <a:xfrm>
-            <a:off x="1528877" y="1705356"/>
-            <a:ext cx="246888" cy="246888"/>
+          <p:cNvPr id="8" name="legend-2-chip-tile"/>
+          <p:cNvSpPr/>
+          <p:nvPr/>
+        </p:nvSpPr>
+        <p:spPr>
+          <a:xfrm>
+            <a:off x="3866083" y="1700784"/>
+            <a:ext cx="256032" cy="256032"/>
           </a:xfrm>
           <a:prstGeom prst="roundRect">
             <a:avLst>
-              <a:gd name="adj" fmla="val 14815"/>
+              <a:gd name="adj" fmla="val 14286"/>
             </a:avLst>
           </a:prstGeom>
           <a:solidFill>
-            <a:schemeClr val="accent5"/>
-          </a:solidFill>
-          <a:ln/>
-        </p:spPr>
-        <p:txBody>
-          <a:bodyPr wrap="square" lIns="0" tIns="0" rIns="0" bIns="0" rtlCol="0" anchor="ctr"/>
-          <a:lstStyle/>
-          <a:p>
-            <a:pPr algn="ctr" indent="0" marL="0">
-              <a:buNone/>
-            </a:pPr>
-            <a:r>
-              <a:rPr lang="en-US" sz="1300" b="1" dirty="0">
-                <a:solidFill>
-                  <a:schemeClr val="bg1"/>
-                </a:solidFill>
-              </a:rPr>
-              <a:t>И</a:t>
+            <a:schemeClr val="bg2"/>
+          </a:solidFill>
+          <a:ln/>
+        </p:spPr>
+      </p:sp>
+      <p:pic>
+        <p:nvPicPr>
+          <p:cNvPr id="9" name="legend-2-chip" descr="/Users/a/MAI/DID/presentation/assets/logos/claude.png">    </p:cNvPr>
+          <p:cNvPicPr>
+            <a:picLocks noChangeAspect="1"/>
+          </p:cNvPicPr>
+          <p:nvPr/>
+        </p:nvPicPr>
+        <p:blipFill>
+          <a:blip r:embed="rId2"/>
+          <a:stretch>
+            <a:fillRect/>
+          </a:stretch>
+        </p:blipFill>
+        <p:spPr>
+          <a:xfrm>
+            <a:off x="3907231" y="1741932"/>
+            <a:ext cx="173736" cy="173736"/>
+          </a:xfrm>
+          <a:prstGeom prst="rect">
+            <a:avLst/>
+          </a:prstGeom>
+        </p:spPr>
+      </p:pic>
+      <p:sp>
+        <p:nvSpPr>
+          <p:cNvPr id="10" name="legend-2-word"/>
+          <p:cNvSpPr txBox="1"/>
+          <p:nvPr/>
+        </p:nvSpPr>
+        <p:spPr>
+          <a:xfrm>
+            <a:off x="4195267" y="1691640"/>
+            <a:ext cx="2185416" cy="274320"/>
+          </a:xfrm>
+          <a:prstGeom prst="rect">
+            <a:avLst/>
+          </a:prstGeom>
+          <a:noFill/>
+          <a:ln/>
+        </p:spPr>
+        <p:txBody>
+          <a:bodyPr wrap="none" lIns="0" tIns="0" rIns="0" bIns="0" rtlCol="0" anchor="ctr"/>
+          <a:lstStyle/>
+          <a:p>
+            <a:pPr algn="l" indent="0" marL="0">
+              <a:buNone/>
+            </a:pPr>
+            <a:r>
+              <a:rPr lang="en-US" sz="1300" dirty="0">
+                <a:solidFill>
+                  <a:schemeClr val="tx2"/>
+                </a:solidFill>
+              </a:rPr>
+              <a:t>Claude Opus 5.5 — инженер</a:t>
             </a:r>
             <a:endParaRPr lang="en-US" sz="1300" dirty="0"/>
           </a:p>
@@ -3680,75 +3872,81 @@
       </p:sp>
       <p:sp>
         <p:nvSpPr>
-          <p:cNvPr id="8" name="legend-2-word"/>
-          <p:cNvSpPr txBox="1"/>
-          <p:nvPr/>
-        </p:nvSpPr>
-        <p:spPr>
-          <a:xfrm>
-            <a:off x="1839773" y="1691640"/>
-            <a:ext cx="657454" cy="274320"/>
-          </a:xfrm>
-          <a:prstGeom prst="rect">
-            <a:avLst/>
-          </a:prstGeom>
-          <a:noFill/>
-          <a:ln/>
-        </p:spPr>
-        <p:txBody>
-          <a:bodyPr wrap="none" lIns="0" tIns="0" rIns="0" bIns="0" rtlCol="0" anchor="ctr"/>
-          <a:lstStyle/>
-          <a:p>
-            <a:pPr algn="l" indent="0" marL="0">
-              <a:buNone/>
-            </a:pPr>
-            <a:r>
-              <a:rPr lang="en-US" sz="1300" dirty="0">
-                <a:solidFill>
-                  <a:schemeClr val="tx2"/>
-                </a:solidFill>
-              </a:rPr>
-              <a:t>инженер</a:t>
-            </a:r>
-            <a:endParaRPr lang="en-US" sz="1300" dirty="0"/>
-          </a:p>
-        </p:txBody>
-      </p:sp>
-      <p:sp>
-        <p:nvSpPr>
-          <p:cNvPr id="9" name="legend-3-chip"/>
-          <p:cNvSpPr txBox="1"/>
-          <p:nvPr/>
-        </p:nvSpPr>
-        <p:spPr>
-          <a:xfrm>
-            <a:off x="2597810" y="1705356"/>
-            <a:ext cx="246888" cy="246888"/>
+          <p:cNvPr id="11" name="legend-3-chip-tile"/>
+          <p:cNvSpPr/>
+          <p:nvPr/>
+        </p:nvSpPr>
+        <p:spPr>
+          <a:xfrm>
+            <a:off x="6581851" y="1700784"/>
+            <a:ext cx="256032" cy="256032"/>
           </a:xfrm>
           <a:prstGeom prst="roundRect">
             <a:avLst>
-              <a:gd name="adj" fmla="val 14815"/>
+              <a:gd name="adj" fmla="val 14286"/>
             </a:avLst>
           </a:prstGeom>
           <a:solidFill>
-            <a:schemeClr val="accent6"/>
-          </a:solidFill>
-          <a:ln/>
-        </p:spPr>
-        <p:txBody>
-          <a:bodyPr wrap="square" lIns="0" tIns="0" rIns="0" bIns="0" rtlCol="0" anchor="ctr"/>
-          <a:lstStyle/>
-          <a:p>
-            <a:pPr algn="ctr" indent="0" marL="0">
-              <a:buNone/>
-            </a:pPr>
-            <a:r>
-              <a:rPr lang="en-US" sz="1300" b="1" dirty="0">
-                <a:solidFill>
-                  <a:schemeClr val="bg1"/>
-                </a:solidFill>
-              </a:rPr>
-              <a:t>Р</a:t>
+            <a:schemeClr val="bg2"/>
+          </a:solidFill>
+          <a:ln/>
+        </p:spPr>
+      </p:sp>
+      <p:pic>
+        <p:nvPicPr>
+          <p:cNvPr id="12" name="legend-3-chip" descr="/Users/a/MAI/DID/presentation/assets/logos/openai.png">    </p:cNvPr>
+          <p:cNvPicPr>
+            <a:picLocks noChangeAspect="1"/>
+          </p:cNvPicPr>
+          <p:nvPr/>
+        </p:nvPicPr>
+        <p:blipFill>
+          <a:blip r:embed="rId3"/>
+          <a:stretch>
+            <a:fillRect/>
+          </a:stretch>
+        </p:blipFill>
+        <p:spPr>
+          <a:xfrm>
+            <a:off x="6622999" y="1741932"/>
+            <a:ext cx="173736" cy="173736"/>
+          </a:xfrm>
+          <a:prstGeom prst="rect">
+            <a:avLst/>
+          </a:prstGeom>
+        </p:spPr>
+      </p:pic>
+      <p:sp>
+        <p:nvSpPr>
+          <p:cNvPr id="13" name="legend-3-word"/>
+          <p:cNvSpPr txBox="1"/>
+          <p:nvPr/>
+        </p:nvSpPr>
+        <p:spPr>
+          <a:xfrm>
+            <a:off x="6911035" y="1691640"/>
+            <a:ext cx="1841602" cy="274320"/>
+          </a:xfrm>
+          <a:prstGeom prst="rect">
+            <a:avLst/>
+          </a:prstGeom>
+          <a:noFill/>
+          <a:ln/>
+        </p:spPr>
+        <p:txBody>
+          <a:bodyPr wrap="none" lIns="0" tIns="0" rIns="0" bIns="0" rtlCol="0" anchor="ctr"/>
+          <a:lstStyle/>
+          <a:p>
+            <a:pPr algn="l" indent="0" marL="0">
+              <a:buNone/>
+            </a:pPr>
+            <a:r>
+              <a:rPr lang="en-US" sz="1300" dirty="0">
+                <a:solidFill>
+                  <a:schemeClr val="tx2"/>
+                </a:solidFill>
+              </a:rPr>
+              <a:t>GPT-6.1 Sol — ревьюер</a:t>
             </a:r>
             <a:endParaRPr lang="en-US" sz="1300" dirty="0"/>
           </a:p>
@@ -3756,54 +3954,18 @@
       </p:sp>
       <p:sp>
         <p:nvSpPr>
-          <p:cNvPr id="10" name="legend-3-word"/>
+          <p:cNvPr id="14" name="legend-4-chip"/>
           <p:cNvSpPr txBox="1"/>
           <p:nvPr/>
         </p:nvSpPr>
         <p:spPr>
           <a:xfrm>
-            <a:off x="2908706" y="1691640"/>
-            <a:ext cx="480060" cy="274320"/>
-          </a:xfrm>
-          <a:prstGeom prst="rect">
-            <a:avLst/>
-          </a:prstGeom>
-          <a:noFill/>
-          <a:ln/>
-        </p:spPr>
-        <p:txBody>
-          <a:bodyPr wrap="none" lIns="0" tIns="0" rIns="0" bIns="0" rtlCol="0" anchor="ctr"/>
-          <a:lstStyle/>
-          <a:p>
-            <a:pPr algn="l" indent="0" marL="0">
-              <a:buNone/>
-            </a:pPr>
-            <a:r>
-              <a:rPr lang="en-US" sz="1300" dirty="0">
-                <a:solidFill>
-                  <a:schemeClr val="tx2"/>
-                </a:solidFill>
-              </a:rPr>
-              <a:t>ревью</a:t>
-            </a:r>
-            <a:endParaRPr lang="en-US" sz="1300" dirty="0"/>
-          </a:p>
-        </p:txBody>
-      </p:sp>
-      <p:sp>
-        <p:nvSpPr>
-          <p:cNvPr id="11" name="legend-4-chip"/>
-          <p:cNvSpPr txBox="1"/>
-          <p:nvPr/>
-        </p:nvSpPr>
-        <p:spPr>
-          <a:xfrm>
-            <a:off x="3489350" y="1705356"/>
-            <a:ext cx="246888" cy="246888"/>
+            <a:off x="8953805" y="1700784"/>
+            <a:ext cx="256032" cy="256032"/>
           </a:xfrm>
           <a:prstGeom prst="roundRect">
             <a:avLst>
-              <a:gd name="adj" fmla="val 14815"/>
+              <a:gd name="adj" fmla="val 14286"/>
             </a:avLst>
           </a:prstGeom>
           <a:solidFill>
@@ -3832,14 +3994,14 @@
       </p:sp>
       <p:sp>
         <p:nvSpPr>
-          <p:cNvPr id="12" name="legend-4-word"/>
+          <p:cNvPr id="15" name="legend-4-word"/>
           <p:cNvSpPr txBox="1"/>
           <p:nvPr/>
         </p:nvSpPr>
         <p:spPr>
           <a:xfrm>
-            <a:off x="3800246" y="1691640"/>
-            <a:ext cx="657454" cy="274320"/>
+            <a:off x="9282989" y="1691640"/>
+            <a:ext cx="1239926" cy="274320"/>
           </a:xfrm>
           <a:prstGeom prst="rect">
             <a:avLst/>
@@ -3860,7 +4022,7 @@
                   <a:schemeClr val="tx2"/>
                 </a:solidFill>
               </a:rPr>
-              <a:t>принято</a:t>
+              <a:t>работа принята</a:t>
             </a:r>
             <a:endParaRPr lang="en-US" sz="1300" dirty="0"/>
           </a:p>
@@ -3868,602 +4030,14 @@
       </p:sp>
       <p:sp>
         <p:nvSpPr>
-          <p:cNvPr id="13" name="legend-5-chip"/>
-          <p:cNvSpPr txBox="1"/>
-          <p:nvPr/>
-        </p:nvSpPr>
-        <p:spPr>
-          <a:xfrm>
-            <a:off x="4558284" y="1705356"/>
-            <a:ext cx="246888" cy="246888"/>
-          </a:xfrm>
-          <a:prstGeom prst="roundRect">
-            <a:avLst>
-              <a:gd name="adj" fmla="val 14815"/>
-            </a:avLst>
-          </a:prstGeom>
-          <a:solidFill>
-            <a:schemeClr val="accent1"/>
-          </a:solidFill>
-          <a:ln/>
-        </p:spPr>
-        <p:txBody>
-          <a:bodyPr wrap="square" lIns="0" tIns="0" rIns="0" bIns="0" rtlCol="0" anchor="ctr"/>
-          <a:lstStyle/>
-          <a:p>
-            <a:pPr algn="ctr" indent="0" marL="0">
-              <a:buNone/>
-            </a:pPr>
-            <a:r>
-              <a:rPr lang="en-US" sz="1300" b="1" dirty="0">
-                <a:solidFill>
-                  <a:schemeClr val="bg1"/>
-                </a:solidFill>
-              </a:rPr>
-              <a:t>Ч</a:t>
-            </a:r>
-            <a:endParaRPr lang="en-US" sz="1300" dirty="0"/>
-          </a:p>
-        </p:txBody>
-      </p:sp>
-      <p:sp>
-        <p:nvSpPr>
-          <p:cNvPr id="14" name="legend-5-word"/>
-          <p:cNvSpPr txBox="1"/>
-          <p:nvPr/>
-        </p:nvSpPr>
-        <p:spPr>
-          <a:xfrm>
-            <a:off x="4869180" y="1691640"/>
-            <a:ext cx="1455725" cy="274320"/>
-          </a:xfrm>
-          <a:prstGeom prst="rect">
-            <a:avLst/>
-          </a:prstGeom>
-          <a:noFill/>
-          <a:ln/>
-        </p:spPr>
-        <p:txBody>
-          <a:bodyPr wrap="none" lIns="0" tIns="0" rIns="0" bIns="0" rtlCol="0" anchor="ctr"/>
-          <a:lstStyle/>
-          <a:p>
-            <a:pPr algn="l" indent="0" marL="0">
-              <a:buNone/>
-            </a:pPr>
-            <a:r>
-              <a:rPr lang="en-US" sz="1300" dirty="0">
-                <a:solidFill>
-                  <a:schemeClr val="tx2"/>
-                </a:solidFill>
-              </a:rPr>
-              <a:t>решение человека</a:t>
-            </a:r>
-            <a:endParaRPr lang="en-US" sz="1300" dirty="0"/>
-          </a:p>
-        </p:txBody>
-      </p:sp>
-      <p:sp>
-        <p:nvSpPr>
-          <p:cNvPr id="15" name="lane-1-name"/>
-          <p:cNvSpPr txBox="1"/>
-          <p:nvPr/>
-        </p:nvSpPr>
-        <p:spPr>
-          <a:xfrm>
-            <a:off x="548640" y="2075688"/>
-            <a:ext cx="2633472" cy="256032"/>
-          </a:xfrm>
-          <a:prstGeom prst="rect">
-            <a:avLst/>
-          </a:prstGeom>
-          <a:noFill/>
-          <a:ln/>
-        </p:spPr>
-        <p:txBody>
-          <a:bodyPr wrap="square" lIns="0" tIns="0" rIns="0" bIns="0" rtlCol="0" anchor="ctr"/>
-          <a:lstStyle/>
-          <a:p>
-            <a:pPr algn="l" indent="0" marL="0">
-              <a:buNone/>
-            </a:pPr>
-            <a:r>
-              <a:rPr lang="en-US" sz="1600" b="1" dirty="0">
-                <a:solidFill>
-                  <a:schemeClr val="tx1"/>
-                </a:solidFill>
-              </a:rPr>
-              <a:t>R1, R4. Среда и гипотезы</a:t>
-            </a:r>
-            <a:endParaRPr lang="en-US" sz="1600" dirty="0"/>
-          </a:p>
-        </p:txBody>
-      </p:sp>
-      <p:sp>
-        <p:nvSpPr>
-          <p:cNvPr id="16" name="lane-1-chip-1"/>
-          <p:cNvSpPr txBox="1"/>
-          <p:nvPr/>
-        </p:nvSpPr>
-        <p:spPr>
-          <a:xfrm>
-            <a:off x="3319272" y="2080260"/>
-            <a:ext cx="246888" cy="246888"/>
-          </a:xfrm>
-          <a:prstGeom prst="roundRect">
-            <a:avLst>
-              <a:gd name="adj" fmla="val 14815"/>
-            </a:avLst>
-          </a:prstGeom>
-          <a:solidFill>
-            <a:schemeClr val="accent2"/>
-          </a:solidFill>
-          <a:ln/>
-        </p:spPr>
-        <p:txBody>
-          <a:bodyPr wrap="square" lIns="0" tIns="0" rIns="0" bIns="0" rtlCol="0" anchor="ctr"/>
-          <a:lstStyle/>
-          <a:p>
-            <a:pPr algn="ctr" indent="0" marL="0">
-              <a:buNone/>
-            </a:pPr>
-            <a:r>
-              <a:rPr lang="en-US" sz="1300" b="1" dirty="0">
-                <a:solidFill>
-                  <a:schemeClr val="bg1"/>
-                </a:solidFill>
-              </a:rPr>
-              <a:t>Г</a:t>
-            </a:r>
-            <a:endParaRPr lang="en-US" sz="1300" dirty="0"/>
-          </a:p>
-        </p:txBody>
-      </p:sp>
-      <p:sp>
-        <p:nvSpPr>
-          <p:cNvPr id="17" name="lane-1-chip-2"/>
-          <p:cNvSpPr txBox="1"/>
-          <p:nvPr/>
-        </p:nvSpPr>
-        <p:spPr>
-          <a:xfrm>
-            <a:off x="3602736" y="2080260"/>
-            <a:ext cx="246888" cy="246888"/>
-          </a:xfrm>
-          <a:prstGeom prst="roundRect">
-            <a:avLst>
-              <a:gd name="adj" fmla="val 14815"/>
-            </a:avLst>
-          </a:prstGeom>
-          <a:solidFill>
-            <a:schemeClr val="accent1"/>
-          </a:solidFill>
-          <a:ln/>
-        </p:spPr>
-        <p:txBody>
-          <a:bodyPr wrap="square" lIns="0" tIns="0" rIns="0" bIns="0" rtlCol="0" anchor="ctr"/>
-          <a:lstStyle/>
-          <a:p>
-            <a:pPr algn="ctr" indent="0" marL="0">
-              <a:buNone/>
-            </a:pPr>
-            <a:r>
-              <a:rPr lang="en-US" sz="1300" b="1" dirty="0">
-                <a:solidFill>
-                  <a:schemeClr val="bg1"/>
-                </a:solidFill>
-              </a:rPr>
-              <a:t>Ч</a:t>
-            </a:r>
-            <a:endParaRPr lang="en-US" sz="1300" dirty="0"/>
-          </a:p>
-        </p:txBody>
-      </p:sp>
-      <p:sp>
-        <p:nvSpPr>
-          <p:cNvPr id="18" name="lane-1-chip-3"/>
-          <p:cNvSpPr txBox="1"/>
-          <p:nvPr/>
-        </p:nvSpPr>
-        <p:spPr>
-          <a:xfrm>
-            <a:off x="3886200" y="2080260"/>
-            <a:ext cx="246888" cy="246888"/>
-          </a:xfrm>
-          <a:prstGeom prst="roundRect">
-            <a:avLst>
-              <a:gd name="adj" fmla="val 14815"/>
-            </a:avLst>
-          </a:prstGeom>
-          <a:solidFill>
-            <a:schemeClr val="accent6"/>
-          </a:solidFill>
-          <a:ln/>
-        </p:spPr>
-        <p:txBody>
-          <a:bodyPr wrap="square" lIns="0" tIns="0" rIns="0" bIns="0" rtlCol="0" anchor="ctr"/>
-          <a:lstStyle/>
-          <a:p>
-            <a:pPr algn="ctr" indent="0" marL="0">
-              <a:buNone/>
-            </a:pPr>
-            <a:r>
-              <a:rPr lang="en-US" sz="1300" b="1" dirty="0">
-                <a:solidFill>
-                  <a:schemeClr val="bg1"/>
-                </a:solidFill>
-              </a:rPr>
-              <a:t>Р</a:t>
-            </a:r>
-            <a:endParaRPr lang="en-US" sz="1300" dirty="0"/>
-          </a:p>
-        </p:txBody>
-      </p:sp>
-      <p:sp>
-        <p:nvSpPr>
-          <p:cNvPr id="19" name="lane-1-chip-4"/>
-          <p:cNvSpPr txBox="1"/>
-          <p:nvPr/>
-        </p:nvSpPr>
-        <p:spPr>
-          <a:xfrm>
-            <a:off x="4169664" y="2080260"/>
-            <a:ext cx="246888" cy="246888"/>
-          </a:xfrm>
-          <a:prstGeom prst="roundRect">
-            <a:avLst>
-              <a:gd name="adj" fmla="val 14815"/>
-            </a:avLst>
-          </a:prstGeom>
-          <a:solidFill>
-            <a:schemeClr val="accent5"/>
-          </a:solidFill>
-          <a:ln/>
-        </p:spPr>
-        <p:txBody>
-          <a:bodyPr wrap="square" lIns="0" tIns="0" rIns="0" bIns="0" rtlCol="0" anchor="ctr"/>
-          <a:lstStyle/>
-          <a:p>
-            <a:pPr algn="ctr" indent="0" marL="0">
-              <a:buNone/>
-            </a:pPr>
-            <a:r>
-              <a:rPr lang="en-US" sz="1300" b="1" dirty="0">
-                <a:solidFill>
-                  <a:schemeClr val="bg1"/>
-                </a:solidFill>
-              </a:rPr>
-              <a:t>И</a:t>
-            </a:r>
-            <a:endParaRPr lang="en-US" sz="1300" dirty="0"/>
-          </a:p>
-        </p:txBody>
-      </p:sp>
-      <p:sp>
-        <p:nvSpPr>
-          <p:cNvPr id="20" name="lane-1-chip-5"/>
-          <p:cNvSpPr txBox="1"/>
-          <p:nvPr/>
-        </p:nvSpPr>
-        <p:spPr>
-          <a:xfrm>
-            <a:off x="4453128" y="2080260"/>
-            <a:ext cx="246888" cy="246888"/>
-          </a:xfrm>
-          <a:prstGeom prst="roundRect">
-            <a:avLst>
-              <a:gd name="adj" fmla="val 14815"/>
-            </a:avLst>
-          </a:prstGeom>
-          <a:solidFill>
-            <a:schemeClr val="accent6"/>
-          </a:solidFill>
-          <a:ln/>
-        </p:spPr>
-        <p:txBody>
-          <a:bodyPr wrap="square" lIns="0" tIns="0" rIns="0" bIns="0" rtlCol="0" anchor="ctr"/>
-          <a:lstStyle/>
-          <a:p>
-            <a:pPr algn="ctr" indent="0" marL="0">
-              <a:buNone/>
-            </a:pPr>
-            <a:r>
-              <a:rPr lang="en-US" sz="1300" b="1" dirty="0">
-                <a:solidFill>
-                  <a:schemeClr val="bg1"/>
-                </a:solidFill>
-              </a:rPr>
-              <a:t>Р</a:t>
-            </a:r>
-            <a:endParaRPr lang="en-US" sz="1300" dirty="0"/>
-          </a:p>
-        </p:txBody>
-      </p:sp>
-      <p:sp>
-        <p:nvSpPr>
-          <p:cNvPr id="21" name="lane-1-chip-6"/>
-          <p:cNvSpPr txBox="1"/>
-          <p:nvPr/>
-        </p:nvSpPr>
-        <p:spPr>
-          <a:xfrm>
-            <a:off x="4736592" y="2080260"/>
-            <a:ext cx="246888" cy="246888"/>
-          </a:xfrm>
-          <a:prstGeom prst="roundRect">
-            <a:avLst>
-              <a:gd name="adj" fmla="val 14815"/>
-            </a:avLst>
-          </a:prstGeom>
-          <a:solidFill>
-            <a:schemeClr val="accent5"/>
-          </a:solidFill>
-          <a:ln/>
-        </p:spPr>
-        <p:txBody>
-          <a:bodyPr wrap="square" lIns="0" tIns="0" rIns="0" bIns="0" rtlCol="0" anchor="ctr"/>
-          <a:lstStyle/>
-          <a:p>
-            <a:pPr algn="ctr" indent="0" marL="0">
-              <a:buNone/>
-            </a:pPr>
-            <a:r>
-              <a:rPr lang="en-US" sz="1300" b="1" dirty="0">
-                <a:solidFill>
-                  <a:schemeClr val="bg1"/>
-                </a:solidFill>
-              </a:rPr>
-              <a:t>И</a:t>
-            </a:r>
-            <a:endParaRPr lang="en-US" sz="1300" dirty="0"/>
-          </a:p>
-        </p:txBody>
-      </p:sp>
-      <p:sp>
-        <p:nvSpPr>
-          <p:cNvPr id="22" name="lane-1-chip-7"/>
-          <p:cNvSpPr txBox="1"/>
-          <p:nvPr/>
-        </p:nvSpPr>
-        <p:spPr>
-          <a:xfrm>
-            <a:off x="5020056" y="2080260"/>
-            <a:ext cx="246888" cy="246888"/>
-          </a:xfrm>
-          <a:prstGeom prst="roundRect">
-            <a:avLst>
-              <a:gd name="adj" fmla="val 14815"/>
-            </a:avLst>
-          </a:prstGeom>
-          <a:solidFill>
-            <a:schemeClr val="accent6"/>
-          </a:solidFill>
-          <a:ln/>
-        </p:spPr>
-        <p:txBody>
-          <a:bodyPr wrap="square" lIns="0" tIns="0" rIns="0" bIns="0" rtlCol="0" anchor="ctr"/>
-          <a:lstStyle/>
-          <a:p>
-            <a:pPr algn="ctr" indent="0" marL="0">
-              <a:buNone/>
-            </a:pPr>
-            <a:r>
-              <a:rPr lang="en-US" sz="1300" b="1" dirty="0">
-                <a:solidFill>
-                  <a:schemeClr val="bg1"/>
-                </a:solidFill>
-              </a:rPr>
-              <a:t>Р</a:t>
-            </a:r>
-            <a:endParaRPr lang="en-US" sz="1300" dirty="0"/>
-          </a:p>
-        </p:txBody>
-      </p:sp>
-      <p:sp>
-        <p:nvSpPr>
-          <p:cNvPr id="23" name="lane-1-chip-8"/>
-          <p:cNvSpPr txBox="1"/>
-          <p:nvPr/>
-        </p:nvSpPr>
-        <p:spPr>
-          <a:xfrm>
-            <a:off x="5303520" y="2080260"/>
-            <a:ext cx="246888" cy="246888"/>
-          </a:xfrm>
-          <a:prstGeom prst="roundRect">
-            <a:avLst>
-              <a:gd name="adj" fmla="val 14815"/>
-            </a:avLst>
-          </a:prstGeom>
-          <a:solidFill>
-            <a:schemeClr val="accent5"/>
-          </a:solidFill>
-          <a:ln/>
-        </p:spPr>
-        <p:txBody>
-          <a:bodyPr wrap="square" lIns="0" tIns="0" rIns="0" bIns="0" rtlCol="0" anchor="ctr"/>
-          <a:lstStyle/>
-          <a:p>
-            <a:pPr algn="ctr" indent="0" marL="0">
-              <a:buNone/>
-            </a:pPr>
-            <a:r>
-              <a:rPr lang="en-US" sz="1300" b="1" dirty="0">
-                <a:solidFill>
-                  <a:schemeClr val="bg1"/>
-                </a:solidFill>
-              </a:rPr>
-              <a:t>И</a:t>
-            </a:r>
-            <a:endParaRPr lang="en-US" sz="1300" dirty="0"/>
-          </a:p>
-        </p:txBody>
-      </p:sp>
-      <p:sp>
-        <p:nvSpPr>
-          <p:cNvPr id="24" name="lane-1-chip-9"/>
-          <p:cNvSpPr txBox="1"/>
-          <p:nvPr/>
-        </p:nvSpPr>
-        <p:spPr>
-          <a:xfrm>
-            <a:off x="5586984" y="2080260"/>
-            <a:ext cx="246888" cy="246888"/>
-          </a:xfrm>
-          <a:prstGeom prst="roundRect">
-            <a:avLst>
-              <a:gd name="adj" fmla="val 14815"/>
-            </a:avLst>
-          </a:prstGeom>
-          <a:solidFill>
-            <a:schemeClr val="accent6"/>
-          </a:solidFill>
-          <a:ln/>
-        </p:spPr>
-        <p:txBody>
-          <a:bodyPr wrap="square" lIns="0" tIns="0" rIns="0" bIns="0" rtlCol="0" anchor="ctr"/>
-          <a:lstStyle/>
-          <a:p>
-            <a:pPr algn="ctr" indent="0" marL="0">
-              <a:buNone/>
-            </a:pPr>
-            <a:r>
-              <a:rPr lang="en-US" sz="1300" b="1" dirty="0">
-                <a:solidFill>
-                  <a:schemeClr val="bg1"/>
-                </a:solidFill>
-              </a:rPr>
-              <a:t>Р</a:t>
-            </a:r>
-            <a:endParaRPr lang="en-US" sz="1300" dirty="0"/>
-          </a:p>
-        </p:txBody>
-      </p:sp>
-      <p:sp>
-        <p:nvSpPr>
-          <p:cNvPr id="25" name="lane-1-chip-10"/>
-          <p:cNvSpPr txBox="1"/>
-          <p:nvPr/>
-        </p:nvSpPr>
-        <p:spPr>
-          <a:xfrm>
-            <a:off x="5870448" y="2080260"/>
-            <a:ext cx="246888" cy="246888"/>
-          </a:xfrm>
-          <a:prstGeom prst="roundRect">
-            <a:avLst>
-              <a:gd name="adj" fmla="val 14815"/>
-            </a:avLst>
-          </a:prstGeom>
-          <a:solidFill>
-            <a:schemeClr val="accent5"/>
-          </a:solidFill>
-          <a:ln/>
-        </p:spPr>
-        <p:txBody>
-          <a:bodyPr wrap="square" lIns="0" tIns="0" rIns="0" bIns="0" rtlCol="0" anchor="ctr"/>
-          <a:lstStyle/>
-          <a:p>
-            <a:pPr algn="ctr" indent="0" marL="0">
-              <a:buNone/>
-            </a:pPr>
-            <a:r>
-              <a:rPr lang="en-US" sz="1300" b="1" dirty="0">
-                <a:solidFill>
-                  <a:schemeClr val="bg1"/>
-                </a:solidFill>
-              </a:rPr>
-              <a:t>И</a:t>
-            </a:r>
-            <a:endParaRPr lang="en-US" sz="1300" dirty="0"/>
-          </a:p>
-        </p:txBody>
-      </p:sp>
-      <p:sp>
-        <p:nvSpPr>
-          <p:cNvPr id="26" name="lane-1-chip-11"/>
-          <p:cNvSpPr txBox="1"/>
-          <p:nvPr/>
-        </p:nvSpPr>
-        <p:spPr>
-          <a:xfrm>
-            <a:off x="6153912" y="2080260"/>
-            <a:ext cx="246888" cy="246888"/>
-          </a:xfrm>
-          <a:prstGeom prst="roundRect">
-            <a:avLst>
-              <a:gd name="adj" fmla="val 14815"/>
-            </a:avLst>
-          </a:prstGeom>
-          <a:solidFill>
-            <a:schemeClr val="accent3"/>
-          </a:solidFill>
-          <a:ln/>
-        </p:spPr>
-        <p:txBody>
-          <a:bodyPr wrap="square" lIns="0" tIns="0" rIns="0" bIns="0" rtlCol="0" anchor="ctr"/>
-          <a:lstStyle/>
-          <a:p>
-            <a:pPr algn="ctr" indent="0" marL="0">
-              <a:buNone/>
-            </a:pPr>
-            <a:r>
-              <a:rPr lang="en-US" sz="1300" b="1" dirty="0">
-                <a:solidFill>
-                  <a:schemeClr val="bg1"/>
-                </a:solidFill>
-              </a:rPr>
-              <a:t>✓</a:t>
-            </a:r>
-            <a:endParaRPr lang="en-US" sz="1300" dirty="0"/>
-          </a:p>
-        </p:txBody>
-      </p:sp>
-      <p:sp>
-        <p:nvSpPr>
-          <p:cNvPr id="27" name="lane-1-result"/>
-          <p:cNvSpPr txBox="1"/>
-          <p:nvPr/>
-        </p:nvSpPr>
-        <p:spPr>
-          <a:xfrm>
-            <a:off x="548640" y="2327148"/>
-            <a:ext cx="5852160" cy="246888"/>
-          </a:xfrm>
-          <a:prstGeom prst="rect">
-            <a:avLst/>
-          </a:prstGeom>
-          <a:noFill/>
-          <a:ln/>
-        </p:spPr>
-        <p:txBody>
-          <a:bodyPr wrap="square" lIns="0" tIns="0" rIns="0" bIns="0" rtlCol="0" anchor="ctr"/>
-          <a:lstStyle/>
-          <a:p>
-            <a:pPr algn="l" indent="0" marL="0">
-              <a:buNone/>
-            </a:pPr>
-            <a:r>
-              <a:rPr lang="en-US" sz="1600" dirty="0">
-                <a:solidFill>
-                  <a:schemeClr val="tx2"/>
-                </a:solidFill>
-              </a:rPr>
-              <a:t>ревью нашло 7 ошибок; два вывода перевёрнуты</a:t>
-            </a:r>
-            <a:endParaRPr lang="en-US" sz="1600" dirty="0"/>
-          </a:p>
-        </p:txBody>
-      </p:sp>
-      <p:sp>
-        <p:nvSpPr>
-          <p:cNvPr id="28" name="lane-2-rule"/>
-          <p:cNvSpPr/>
-          <p:nvPr/>
-        </p:nvSpPr>
-        <p:spPr>
-          <a:xfrm>
-            <a:off x="548640" y="2615184"/>
-            <a:ext cx="5852160" cy="0"/>
+          <p:cNvPr id="16" name="lane-1-rule"/>
+          <p:cNvSpPr/>
+          <p:nvPr/>
+        </p:nvSpPr>
+        <p:spPr>
+          <a:xfrm>
+            <a:off x="548640" y="2093976"/>
+            <a:ext cx="11091672" cy="0"/>
           </a:xfrm>
           <a:prstGeom prst="line">
             <a:avLst/>
@@ -4479,23 +4053,23 @@
       </p:sp>
       <p:sp>
         <p:nvSpPr>
-          <p:cNvPr id="29" name="lane-2-name"/>
+          <p:cNvPr id="17" name="lane-1-name"/>
           <p:cNvSpPr txBox="1"/>
           <p:nvPr/>
         </p:nvSpPr>
         <p:spPr>
           <a:xfrm>
-            <a:off x="548640" y="2642616"/>
-            <a:ext cx="4334256" cy="256032"/>
-          </a:xfrm>
-          <a:prstGeom prst="rect">
-            <a:avLst/>
-          </a:prstGeom>
-          <a:noFill/>
-          <a:ln/>
-        </p:spPr>
-        <p:txBody>
-          <a:bodyPr wrap="square" lIns="0" tIns="0" rIns="0" bIns="0" rtlCol="0" anchor="ctr"/>
+            <a:off x="548640" y="2093976"/>
+            <a:ext cx="3611880" cy="338328"/>
+          </a:xfrm>
+          <a:prstGeom prst="rect">
+            <a:avLst/>
+          </a:prstGeom>
+          <a:noFill/>
+          <a:ln/>
+        </p:spPr>
+        <p:txBody>
+          <a:bodyPr wrap="none" lIns="0" tIns="0" rIns="0" bIns="0" rtlCol="0" anchor="ctr"/>
           <a:lstStyle/>
           <a:p>
             <a:pPr algn="l" indent="0" marL="0">
@@ -4507,7 +4081,7 @@
                   <a:schemeClr val="tx1"/>
                 </a:solidFill>
               </a:rPr>
-              <a:t>R13. Миссия, заданная словами</a:t>
+              <a:t>R1, R4. Среда и гипотезы</a:t>
             </a:r>
             <a:endParaRPr lang="en-US" sz="1600" dirty="0"/>
           </a:p>
@@ -4515,181 +4089,435 @@
       </p:sp>
       <p:sp>
         <p:nvSpPr>
-          <p:cNvPr id="30" name="lane-2-chip-1"/>
-          <p:cNvSpPr txBox="1"/>
-          <p:nvPr/>
-        </p:nvSpPr>
-        <p:spPr>
-          <a:xfrm>
-            <a:off x="5020056" y="2647188"/>
-            <a:ext cx="246888" cy="246888"/>
+          <p:cNvPr id="18" name="lane-1-chip-1-tile"/>
+          <p:cNvSpPr/>
+          <p:nvPr/>
+        </p:nvSpPr>
+        <p:spPr>
+          <a:xfrm>
+            <a:off x="4251960" y="2135124"/>
+            <a:ext cx="256032" cy="256032"/>
           </a:xfrm>
           <a:prstGeom prst="roundRect">
             <a:avLst>
-              <a:gd name="adj" fmla="val 14815"/>
+              <a:gd name="adj" fmla="val 14286"/>
             </a:avLst>
           </a:prstGeom>
           <a:solidFill>
-            <a:schemeClr val="accent2"/>
-          </a:solidFill>
-          <a:ln/>
-        </p:spPr>
-        <p:txBody>
-          <a:bodyPr wrap="square" lIns="0" tIns="0" rIns="0" bIns="0" rtlCol="0" anchor="ctr"/>
-          <a:lstStyle/>
-          <a:p>
-            <a:pPr algn="ctr" indent="0" marL="0">
-              <a:buNone/>
-            </a:pPr>
-            <a:r>
-              <a:rPr lang="en-US" sz="1300" b="1" dirty="0">
-                <a:solidFill>
-                  <a:schemeClr val="bg1"/>
-                </a:solidFill>
-              </a:rPr>
-              <a:t>Г</a:t>
-            </a:r>
-            <a:endParaRPr lang="en-US" sz="1300" dirty="0"/>
-          </a:p>
-        </p:txBody>
-      </p:sp>
-      <p:sp>
-        <p:nvSpPr>
-          <p:cNvPr id="31" name="lane-2-chip-2"/>
-          <p:cNvSpPr txBox="1"/>
-          <p:nvPr/>
-        </p:nvSpPr>
-        <p:spPr>
-          <a:xfrm>
-            <a:off x="5303520" y="2647188"/>
-            <a:ext cx="246888" cy="246888"/>
+            <a:schemeClr val="bg2"/>
+          </a:solidFill>
+          <a:ln/>
+        </p:spPr>
+      </p:sp>
+      <p:pic>
+        <p:nvPicPr>
+          <p:cNvPr id="19" name="lane-1-chip-1" descr="/Users/a/MAI/DID/presentation/assets/logos/gemini.png">    </p:cNvPr>
+          <p:cNvPicPr>
+            <a:picLocks noChangeAspect="1"/>
+          </p:cNvPicPr>
+          <p:nvPr/>
+        </p:nvPicPr>
+        <p:blipFill>
+          <a:blip r:embed="rId4"/>
+          <a:stretch>
+            <a:fillRect/>
+          </a:stretch>
+        </p:blipFill>
+        <p:spPr>
+          <a:xfrm>
+            <a:off x="4293108" y="2176272"/>
+            <a:ext cx="173736" cy="173736"/>
+          </a:xfrm>
+          <a:prstGeom prst="rect">
+            <a:avLst/>
+          </a:prstGeom>
+        </p:spPr>
+      </p:pic>
+      <p:sp>
+        <p:nvSpPr>
+          <p:cNvPr id="20" name="lane-1-chip-2-tile"/>
+          <p:cNvSpPr/>
+          <p:nvPr/>
+        </p:nvSpPr>
+        <p:spPr>
+          <a:xfrm>
+            <a:off x="4544568" y="2135124"/>
+            <a:ext cx="256032" cy="256032"/>
           </a:xfrm>
           <a:prstGeom prst="roundRect">
             <a:avLst>
-              <a:gd name="adj" fmla="val 14815"/>
+              <a:gd name="adj" fmla="val 14286"/>
             </a:avLst>
           </a:prstGeom>
           <a:solidFill>
-            <a:schemeClr val="accent5"/>
-          </a:solidFill>
-          <a:ln/>
-        </p:spPr>
-        <p:txBody>
-          <a:bodyPr wrap="square" lIns="0" tIns="0" rIns="0" bIns="0" rtlCol="0" anchor="ctr"/>
-          <a:lstStyle/>
-          <a:p>
-            <a:pPr algn="ctr" indent="0" marL="0">
-              <a:buNone/>
-            </a:pPr>
-            <a:r>
-              <a:rPr lang="en-US" sz="1300" b="1" dirty="0">
-                <a:solidFill>
-                  <a:schemeClr val="bg1"/>
-                </a:solidFill>
-              </a:rPr>
-              <a:t>И</a:t>
-            </a:r>
-            <a:endParaRPr lang="en-US" sz="1300" dirty="0"/>
-          </a:p>
-        </p:txBody>
-      </p:sp>
-      <p:sp>
-        <p:nvSpPr>
-          <p:cNvPr id="32" name="lane-2-chip-3"/>
-          <p:cNvSpPr txBox="1"/>
-          <p:nvPr/>
-        </p:nvSpPr>
-        <p:spPr>
-          <a:xfrm>
-            <a:off x="5586984" y="2647188"/>
-            <a:ext cx="246888" cy="246888"/>
+            <a:schemeClr val="bg2"/>
+          </a:solidFill>
+          <a:ln/>
+        </p:spPr>
+      </p:sp>
+      <p:pic>
+        <p:nvPicPr>
+          <p:cNvPr id="21" name="lane-1-chip-2" descr="/Users/a/MAI/DID/presentation/assets/logos/openai.png">    </p:cNvPr>
+          <p:cNvPicPr>
+            <a:picLocks noChangeAspect="1"/>
+          </p:cNvPicPr>
+          <p:nvPr/>
+        </p:nvPicPr>
+        <p:blipFill>
+          <a:blip r:embed="rId5"/>
+          <a:stretch>
+            <a:fillRect/>
+          </a:stretch>
+        </p:blipFill>
+        <p:spPr>
+          <a:xfrm>
+            <a:off x="4585716" y="2176272"/>
+            <a:ext cx="173736" cy="173736"/>
+          </a:xfrm>
+          <a:prstGeom prst="rect">
+            <a:avLst/>
+          </a:prstGeom>
+        </p:spPr>
+      </p:pic>
+      <p:sp>
+        <p:nvSpPr>
+          <p:cNvPr id="22" name="lane-1-chip-3-tile"/>
+          <p:cNvSpPr/>
+          <p:nvPr/>
+        </p:nvSpPr>
+        <p:spPr>
+          <a:xfrm>
+            <a:off x="4837176" y="2135124"/>
+            <a:ext cx="256032" cy="256032"/>
           </a:xfrm>
           <a:prstGeom prst="roundRect">
             <a:avLst>
-              <a:gd name="adj" fmla="val 14815"/>
+              <a:gd name="adj" fmla="val 14286"/>
             </a:avLst>
           </a:prstGeom>
           <a:solidFill>
-            <a:schemeClr val="accent6"/>
-          </a:solidFill>
-          <a:ln/>
-        </p:spPr>
-        <p:txBody>
-          <a:bodyPr wrap="square" lIns="0" tIns="0" rIns="0" bIns="0" rtlCol="0" anchor="ctr"/>
-          <a:lstStyle/>
-          <a:p>
-            <a:pPr algn="ctr" indent="0" marL="0">
-              <a:buNone/>
-            </a:pPr>
-            <a:r>
-              <a:rPr lang="en-US" sz="1300" b="1" dirty="0">
-                <a:solidFill>
-                  <a:schemeClr val="bg1"/>
-                </a:solidFill>
-              </a:rPr>
-              <a:t>Р</a:t>
-            </a:r>
-            <a:endParaRPr lang="en-US" sz="1300" dirty="0"/>
-          </a:p>
-        </p:txBody>
-      </p:sp>
-      <p:sp>
-        <p:nvSpPr>
-          <p:cNvPr id="33" name="lane-2-chip-4"/>
-          <p:cNvSpPr txBox="1"/>
-          <p:nvPr/>
-        </p:nvSpPr>
-        <p:spPr>
-          <a:xfrm>
-            <a:off x="5870448" y="2647188"/>
-            <a:ext cx="246888" cy="246888"/>
+            <a:schemeClr val="bg2"/>
+          </a:solidFill>
+          <a:ln/>
+        </p:spPr>
+      </p:sp>
+      <p:pic>
+        <p:nvPicPr>
+          <p:cNvPr id="23" name="lane-1-chip-3" descr="/Users/a/MAI/DID/presentation/assets/logos/claude.png">    </p:cNvPr>
+          <p:cNvPicPr>
+            <a:picLocks noChangeAspect="1"/>
+          </p:cNvPicPr>
+          <p:nvPr/>
+        </p:nvPicPr>
+        <p:blipFill>
+          <a:blip r:embed="rId6"/>
+          <a:stretch>
+            <a:fillRect/>
+          </a:stretch>
+        </p:blipFill>
+        <p:spPr>
+          <a:xfrm>
+            <a:off x="4878324" y="2176272"/>
+            <a:ext cx="173736" cy="173736"/>
+          </a:xfrm>
+          <a:prstGeom prst="rect">
+            <a:avLst/>
+          </a:prstGeom>
+        </p:spPr>
+      </p:pic>
+      <p:sp>
+        <p:nvSpPr>
+          <p:cNvPr id="24" name="lane-1-chip-4-tile"/>
+          <p:cNvSpPr/>
+          <p:nvPr/>
+        </p:nvSpPr>
+        <p:spPr>
+          <a:xfrm>
+            <a:off x="5129784" y="2135124"/>
+            <a:ext cx="256032" cy="256032"/>
           </a:xfrm>
           <a:prstGeom prst="roundRect">
             <a:avLst>
-              <a:gd name="adj" fmla="val 14815"/>
+              <a:gd name="adj" fmla="val 14286"/>
             </a:avLst>
           </a:prstGeom>
           <a:solidFill>
-            <a:schemeClr val="accent5"/>
-          </a:solidFill>
-          <a:ln/>
-        </p:spPr>
-        <p:txBody>
-          <a:bodyPr wrap="square" lIns="0" tIns="0" rIns="0" bIns="0" rtlCol="0" anchor="ctr"/>
-          <a:lstStyle/>
-          <a:p>
-            <a:pPr algn="ctr" indent="0" marL="0">
-              <a:buNone/>
-            </a:pPr>
-            <a:r>
-              <a:rPr lang="en-US" sz="1300" b="1" dirty="0">
-                <a:solidFill>
-                  <a:schemeClr val="bg1"/>
-                </a:solidFill>
-              </a:rPr>
-              <a:t>И</a:t>
-            </a:r>
-            <a:endParaRPr lang="en-US" sz="1300" dirty="0"/>
-          </a:p>
-        </p:txBody>
-      </p:sp>
-      <p:sp>
-        <p:nvSpPr>
-          <p:cNvPr id="34" name="lane-2-chip-5"/>
-          <p:cNvSpPr txBox="1"/>
-          <p:nvPr/>
-        </p:nvSpPr>
-        <p:spPr>
-          <a:xfrm>
-            <a:off x="6153912" y="2647188"/>
-            <a:ext cx="246888" cy="246888"/>
+            <a:schemeClr val="bg2"/>
+          </a:solidFill>
+          <a:ln/>
+        </p:spPr>
+      </p:sp>
+      <p:pic>
+        <p:nvPicPr>
+          <p:cNvPr id="25" name="lane-1-chip-4" descr="/Users/a/MAI/DID/presentation/assets/logos/openai.png">    </p:cNvPr>
+          <p:cNvPicPr>
+            <a:picLocks noChangeAspect="1"/>
+          </p:cNvPicPr>
+          <p:nvPr/>
+        </p:nvPicPr>
+        <p:blipFill>
+          <a:blip r:embed="rId7"/>
+          <a:stretch>
+            <a:fillRect/>
+          </a:stretch>
+        </p:blipFill>
+        <p:spPr>
+          <a:xfrm>
+            <a:off x="5170932" y="2176272"/>
+            <a:ext cx="173736" cy="173736"/>
+          </a:xfrm>
+          <a:prstGeom prst="rect">
+            <a:avLst/>
+          </a:prstGeom>
+        </p:spPr>
+      </p:pic>
+      <p:sp>
+        <p:nvSpPr>
+          <p:cNvPr id="26" name="lane-1-chip-5-tile"/>
+          <p:cNvSpPr/>
+          <p:nvPr/>
+        </p:nvSpPr>
+        <p:spPr>
+          <a:xfrm>
+            <a:off x="5422392" y="2135124"/>
+            <a:ext cx="256032" cy="256032"/>
           </a:xfrm>
           <a:prstGeom prst="roundRect">
             <a:avLst>
-              <a:gd name="adj" fmla="val 14815"/>
+              <a:gd name="adj" fmla="val 14286"/>
             </a:avLst>
           </a:prstGeom>
           <a:solidFill>
+            <a:schemeClr val="bg2"/>
+          </a:solidFill>
+          <a:ln/>
+        </p:spPr>
+      </p:sp>
+      <p:pic>
+        <p:nvPicPr>
+          <p:cNvPr id="27" name="lane-1-chip-5" descr="/Users/a/MAI/DID/presentation/assets/logos/claude.png">    </p:cNvPr>
+          <p:cNvPicPr>
+            <a:picLocks noChangeAspect="1"/>
+          </p:cNvPicPr>
+          <p:nvPr/>
+        </p:nvPicPr>
+        <p:blipFill>
+          <a:blip r:embed="rId8"/>
+          <a:stretch>
+            <a:fillRect/>
+          </a:stretch>
+        </p:blipFill>
+        <p:spPr>
+          <a:xfrm>
+            <a:off x="5463540" y="2176272"/>
+            <a:ext cx="173736" cy="173736"/>
+          </a:xfrm>
+          <a:prstGeom prst="rect">
+            <a:avLst/>
+          </a:prstGeom>
+        </p:spPr>
+      </p:pic>
+      <p:sp>
+        <p:nvSpPr>
+          <p:cNvPr id="28" name="lane-1-chip-6-tile"/>
+          <p:cNvSpPr/>
+          <p:nvPr/>
+        </p:nvSpPr>
+        <p:spPr>
+          <a:xfrm>
+            <a:off x="5715000" y="2135124"/>
+            <a:ext cx="256032" cy="256032"/>
+          </a:xfrm>
+          <a:prstGeom prst="roundRect">
+            <a:avLst>
+              <a:gd name="adj" fmla="val 14286"/>
+            </a:avLst>
+          </a:prstGeom>
+          <a:solidFill>
+            <a:schemeClr val="bg2"/>
+          </a:solidFill>
+          <a:ln/>
+        </p:spPr>
+      </p:sp>
+      <p:pic>
+        <p:nvPicPr>
+          <p:cNvPr id="29" name="lane-1-chip-6" descr="/Users/a/MAI/DID/presentation/assets/logos/openai.png">    </p:cNvPr>
+          <p:cNvPicPr>
+            <a:picLocks noChangeAspect="1"/>
+          </p:cNvPicPr>
+          <p:nvPr/>
+        </p:nvPicPr>
+        <p:blipFill>
+          <a:blip r:embed="rId9"/>
+          <a:stretch>
+            <a:fillRect/>
+          </a:stretch>
+        </p:blipFill>
+        <p:spPr>
+          <a:xfrm>
+            <a:off x="5756148" y="2176272"/>
+            <a:ext cx="173736" cy="173736"/>
+          </a:xfrm>
+          <a:prstGeom prst="rect">
+            <a:avLst/>
+          </a:prstGeom>
+        </p:spPr>
+      </p:pic>
+      <p:sp>
+        <p:nvSpPr>
+          <p:cNvPr id="30" name="lane-1-chip-7-tile"/>
+          <p:cNvSpPr/>
+          <p:nvPr/>
+        </p:nvSpPr>
+        <p:spPr>
+          <a:xfrm>
+            <a:off x="6007608" y="2135124"/>
+            <a:ext cx="256032" cy="256032"/>
+          </a:xfrm>
+          <a:prstGeom prst="roundRect">
+            <a:avLst>
+              <a:gd name="adj" fmla="val 14286"/>
+            </a:avLst>
+          </a:prstGeom>
+          <a:solidFill>
+            <a:schemeClr val="bg2"/>
+          </a:solidFill>
+          <a:ln/>
+        </p:spPr>
+      </p:sp>
+      <p:pic>
+        <p:nvPicPr>
+          <p:cNvPr id="31" name="lane-1-chip-7" descr="/Users/a/MAI/DID/presentation/assets/logos/claude.png">    </p:cNvPr>
+          <p:cNvPicPr>
+            <a:picLocks noChangeAspect="1"/>
+          </p:cNvPicPr>
+          <p:nvPr/>
+        </p:nvPicPr>
+        <p:blipFill>
+          <a:blip r:embed="rId10"/>
+          <a:stretch>
+            <a:fillRect/>
+          </a:stretch>
+        </p:blipFill>
+        <p:spPr>
+          <a:xfrm>
+            <a:off x="6048756" y="2176272"/>
+            <a:ext cx="173736" cy="173736"/>
+          </a:xfrm>
+          <a:prstGeom prst="rect">
+            <a:avLst/>
+          </a:prstGeom>
+        </p:spPr>
+      </p:pic>
+      <p:sp>
+        <p:nvSpPr>
+          <p:cNvPr id="32" name="lane-1-chip-8-tile"/>
+          <p:cNvSpPr/>
+          <p:nvPr/>
+        </p:nvSpPr>
+        <p:spPr>
+          <a:xfrm>
+            <a:off x="6300216" y="2135124"/>
+            <a:ext cx="256032" cy="256032"/>
+          </a:xfrm>
+          <a:prstGeom prst="roundRect">
+            <a:avLst>
+              <a:gd name="adj" fmla="val 14286"/>
+            </a:avLst>
+          </a:prstGeom>
+          <a:solidFill>
+            <a:schemeClr val="bg2"/>
+          </a:solidFill>
+          <a:ln/>
+        </p:spPr>
+      </p:sp>
+      <p:pic>
+        <p:nvPicPr>
+          <p:cNvPr id="33" name="lane-1-chip-8" descr="/Users/a/MAI/DID/presentation/assets/logos/openai.png">    </p:cNvPr>
+          <p:cNvPicPr>
+            <a:picLocks noChangeAspect="1"/>
+          </p:cNvPicPr>
+          <p:nvPr/>
+        </p:nvPicPr>
+        <p:blipFill>
+          <a:blip r:embed="rId11"/>
+          <a:stretch>
+            <a:fillRect/>
+          </a:stretch>
+        </p:blipFill>
+        <p:spPr>
+          <a:xfrm>
+            <a:off x="6341364" y="2176272"/>
+            <a:ext cx="173736" cy="173736"/>
+          </a:xfrm>
+          <a:prstGeom prst="rect">
+            <a:avLst/>
+          </a:prstGeom>
+        </p:spPr>
+      </p:pic>
+      <p:sp>
+        <p:nvSpPr>
+          <p:cNvPr id="34" name="lane-1-chip-9-tile"/>
+          <p:cNvSpPr/>
+          <p:nvPr/>
+        </p:nvSpPr>
+        <p:spPr>
+          <a:xfrm>
+            <a:off x="6592824" y="2135124"/>
+            <a:ext cx="256032" cy="256032"/>
+          </a:xfrm>
+          <a:prstGeom prst="roundRect">
+            <a:avLst>
+              <a:gd name="adj" fmla="val 14286"/>
+            </a:avLst>
+          </a:prstGeom>
+          <a:solidFill>
+            <a:schemeClr val="bg2"/>
+          </a:solidFill>
+          <a:ln/>
+        </p:spPr>
+      </p:sp>
+      <p:pic>
+        <p:nvPicPr>
+          <p:cNvPr id="35" name="lane-1-chip-9" descr="/Users/a/MAI/DID/presentation/assets/logos/claude.png">    </p:cNvPr>
+          <p:cNvPicPr>
+            <a:picLocks noChangeAspect="1"/>
+          </p:cNvPicPr>
+          <p:nvPr/>
+        </p:nvPicPr>
+        <p:blipFill>
+          <a:blip r:embed="rId12"/>
+          <a:stretch>
+            <a:fillRect/>
+          </a:stretch>
+        </p:blipFill>
+        <p:spPr>
+          <a:xfrm>
+            <a:off x="6633972" y="2176272"/>
+            <a:ext cx="173736" cy="173736"/>
+          </a:xfrm>
+          <a:prstGeom prst="rect">
+            <a:avLst/>
+          </a:prstGeom>
+        </p:spPr>
+      </p:pic>
+      <p:sp>
+        <p:nvSpPr>
+          <p:cNvPr id="36" name="lane-1-chip-10"/>
+          <p:cNvSpPr txBox="1"/>
+          <p:nvPr/>
+        </p:nvSpPr>
+        <p:spPr>
+          <a:xfrm>
+            <a:off x="6885432" y="2135124"/>
+            <a:ext cx="256032" cy="256032"/>
+          </a:xfrm>
+          <a:prstGeom prst="roundRect">
+            <a:avLst>
+              <a:gd name="adj" fmla="val 14286"/>
+            </a:avLst>
+          </a:prstGeom>
+          <a:solidFill>
             <a:schemeClr val="accent3"/>
           </a:solidFill>
           <a:ln/>
@@ -4715,50 +4543,50 @@
       </p:sp>
       <p:sp>
         <p:nvSpPr>
-          <p:cNvPr id="35" name="lane-2-result"/>
+          <p:cNvPr id="37" name="lane-1-result"/>
           <p:cNvSpPr txBox="1"/>
           <p:nvPr/>
         </p:nvSpPr>
         <p:spPr>
           <a:xfrm>
-            <a:off x="548640" y="2894076"/>
-            <a:ext cx="5852160" cy="246888"/>
-          </a:xfrm>
-          <a:prstGeom prst="rect">
-            <a:avLst/>
-          </a:prstGeom>
-          <a:noFill/>
-          <a:ln/>
-        </p:spPr>
-        <p:txBody>
-          <a:bodyPr wrap="square" lIns="0" tIns="0" rIns="0" bIns="0" rtlCol="0" anchor="ctr"/>
+            <a:off x="7315200" y="2093976"/>
+            <a:ext cx="4325112" cy="338328"/>
+          </a:xfrm>
+          <a:prstGeom prst="rect">
+            <a:avLst/>
+          </a:prstGeom>
+          <a:noFill/>
+          <a:ln/>
+        </p:spPr>
+        <p:txBody>
+          <a:bodyPr wrap="none" lIns="0" tIns="0" rIns="0" bIns="0" rtlCol="0" anchor="ctr"/>
           <a:lstStyle/>
           <a:p>
             <a:pPr algn="l" indent="0" marL="0">
               <a:buNone/>
             </a:pPr>
             <a:r>
-              <a:rPr lang="en-US" sz="1600" dirty="0">
+              <a:rPr lang="en-US" sz="1400" dirty="0">
                 <a:solidFill>
                   <a:schemeClr val="tx2"/>
                 </a:solidFill>
               </a:rPr>
-              <a:t>модель выполняет миссию 6 из 6, правило — 0 из 6</a:t>
-            </a:r>
-            <a:endParaRPr lang="en-US" sz="1600" dirty="0"/>
-          </a:p>
-        </p:txBody>
-      </p:sp>
-      <p:sp>
-        <p:nvSpPr>
-          <p:cNvPr id="36" name="lane-3-rule"/>
-          <p:cNvSpPr/>
-          <p:nvPr/>
-        </p:nvSpPr>
-        <p:spPr>
-          <a:xfrm>
-            <a:off x="548640" y="3182112"/>
-            <a:ext cx="5852160" cy="0"/>
+              <a:t>7 ошибок найдено, два вывода перевёрнуты</a:t>
+            </a:r>
+            <a:endParaRPr lang="en-US" sz="1400" dirty="0"/>
+          </a:p>
+        </p:txBody>
+      </p:sp>
+      <p:sp>
+        <p:nvSpPr>
+          <p:cNvPr id="38" name="lane-2-rule"/>
+          <p:cNvSpPr/>
+          <p:nvPr/>
+        </p:nvSpPr>
+        <p:spPr>
+          <a:xfrm>
+            <a:off x="548640" y="2432304"/>
+            <a:ext cx="11091672" cy="0"/>
           </a:xfrm>
           <a:prstGeom prst="line">
             <a:avLst/>
@@ -4774,23 +4602,23 @@
       </p:sp>
       <p:sp>
         <p:nvSpPr>
-          <p:cNvPr id="37" name="lane-3-name"/>
+          <p:cNvPr id="39" name="lane-2-name"/>
           <p:cNvSpPr txBox="1"/>
           <p:nvPr/>
         </p:nvSpPr>
         <p:spPr>
           <a:xfrm>
-            <a:off x="548640" y="3209544"/>
-            <a:ext cx="4617720" cy="256032"/>
-          </a:xfrm>
-          <a:prstGeom prst="rect">
-            <a:avLst/>
-          </a:prstGeom>
-          <a:noFill/>
-          <a:ln/>
-        </p:spPr>
-        <p:txBody>
-          <a:bodyPr wrap="square" lIns="0" tIns="0" rIns="0" bIns="0" rtlCol="0" anchor="ctr"/>
+            <a:off x="548640" y="2432304"/>
+            <a:ext cx="3611880" cy="338328"/>
+          </a:xfrm>
+          <a:prstGeom prst="rect">
+            <a:avLst/>
+          </a:prstGeom>
+          <a:noFill/>
+          <a:ln/>
+        </p:spPr>
+        <p:txBody>
+          <a:bodyPr wrap="none" lIns="0" tIns="0" rIns="0" bIns="0" rtlCol="0" anchor="ctr"/>
           <a:lstStyle/>
           <a:p>
             <a:pPr algn="l" indent="0" marL="0">
@@ -4802,7 +4630,7 @@
                   <a:schemeClr val="tx1"/>
                 </a:solidFill>
               </a:rPr>
-              <a:t>G2. Потеря положения в Gazebo</a:t>
+              <a:t>K1–K4. Обзоры литературы</a:t>
             </a:r>
             <a:endParaRPr lang="en-US" sz="1600" dirty="0"/>
           </a:p>
@@ -4810,141 +4638,251 @@
       </p:sp>
       <p:sp>
         <p:nvSpPr>
-          <p:cNvPr id="38" name="lane-3-chip-1"/>
-          <p:cNvSpPr txBox="1"/>
-          <p:nvPr/>
-        </p:nvSpPr>
-        <p:spPr>
-          <a:xfrm>
-            <a:off x="5303520" y="3214116"/>
-            <a:ext cx="246888" cy="246888"/>
+          <p:cNvPr id="40" name="lane-2-chip-1-tile"/>
+          <p:cNvSpPr/>
+          <p:nvPr/>
+        </p:nvSpPr>
+        <p:spPr>
+          <a:xfrm>
+            <a:off x="4251960" y="2473452"/>
+            <a:ext cx="256032" cy="256032"/>
           </a:xfrm>
           <a:prstGeom prst="roundRect">
             <a:avLst>
-              <a:gd name="adj" fmla="val 14815"/>
+              <a:gd name="adj" fmla="val 14286"/>
             </a:avLst>
           </a:prstGeom>
           <a:solidFill>
-            <a:schemeClr val="accent5"/>
-          </a:solidFill>
-          <a:ln/>
-        </p:spPr>
-        <p:txBody>
-          <a:bodyPr wrap="square" lIns="0" tIns="0" rIns="0" bIns="0" rtlCol="0" anchor="ctr"/>
-          <a:lstStyle/>
-          <a:p>
-            <a:pPr algn="ctr" indent="0" marL="0">
-              <a:buNone/>
-            </a:pPr>
-            <a:r>
-              <a:rPr lang="en-US" sz="1300" b="1" dirty="0">
-                <a:solidFill>
-                  <a:schemeClr val="bg1"/>
-                </a:solidFill>
-              </a:rPr>
-              <a:t>И</a:t>
-            </a:r>
-            <a:endParaRPr lang="en-US" sz="1300" dirty="0"/>
-          </a:p>
-        </p:txBody>
-      </p:sp>
-      <p:sp>
-        <p:nvSpPr>
-          <p:cNvPr id="39" name="lane-3-chip-2"/>
-          <p:cNvSpPr txBox="1"/>
-          <p:nvPr/>
-        </p:nvSpPr>
-        <p:spPr>
-          <a:xfrm>
-            <a:off x="5586984" y="3214116"/>
-            <a:ext cx="246888" cy="246888"/>
+            <a:schemeClr val="bg2"/>
+          </a:solidFill>
+          <a:ln/>
+        </p:spPr>
+      </p:sp>
+      <p:pic>
+        <p:nvPicPr>
+          <p:cNvPr id="41" name="lane-2-chip-1" descr="/Users/a/MAI/DID/presentation/assets/logos/gemini.png">    </p:cNvPr>
+          <p:cNvPicPr>
+            <a:picLocks noChangeAspect="1"/>
+          </p:cNvPicPr>
+          <p:nvPr/>
+        </p:nvPicPr>
+        <p:blipFill>
+          <a:blip r:embed="rId13"/>
+          <a:stretch>
+            <a:fillRect/>
+          </a:stretch>
+        </p:blipFill>
+        <p:spPr>
+          <a:xfrm>
+            <a:off x="4293108" y="2514600"/>
+            <a:ext cx="173736" cy="173736"/>
+          </a:xfrm>
+          <a:prstGeom prst="rect">
+            <a:avLst/>
+          </a:prstGeom>
+        </p:spPr>
+      </p:pic>
+      <p:sp>
+        <p:nvSpPr>
+          <p:cNvPr id="42" name="lane-2-chip-2-tile"/>
+          <p:cNvSpPr/>
+          <p:nvPr/>
+        </p:nvSpPr>
+        <p:spPr>
+          <a:xfrm>
+            <a:off x="4544568" y="2473452"/>
+            <a:ext cx="256032" cy="256032"/>
           </a:xfrm>
           <a:prstGeom prst="roundRect">
             <a:avLst>
-              <a:gd name="adj" fmla="val 14815"/>
+              <a:gd name="adj" fmla="val 14286"/>
             </a:avLst>
           </a:prstGeom>
           <a:solidFill>
-            <a:schemeClr val="accent6"/>
-          </a:solidFill>
-          <a:ln/>
-        </p:spPr>
-        <p:txBody>
-          <a:bodyPr wrap="square" lIns="0" tIns="0" rIns="0" bIns="0" rtlCol="0" anchor="ctr"/>
-          <a:lstStyle/>
-          <a:p>
-            <a:pPr algn="ctr" indent="0" marL="0">
-              <a:buNone/>
-            </a:pPr>
-            <a:r>
-              <a:rPr lang="en-US" sz="1300" b="1" dirty="0">
-                <a:solidFill>
-                  <a:schemeClr val="bg1"/>
-                </a:solidFill>
-              </a:rPr>
-              <a:t>Р</a:t>
-            </a:r>
-            <a:endParaRPr lang="en-US" sz="1300" dirty="0"/>
-          </a:p>
-        </p:txBody>
-      </p:sp>
-      <p:sp>
-        <p:nvSpPr>
-          <p:cNvPr id="40" name="lane-3-chip-3"/>
-          <p:cNvSpPr txBox="1"/>
-          <p:nvPr/>
-        </p:nvSpPr>
-        <p:spPr>
-          <a:xfrm>
-            <a:off x="5870448" y="3214116"/>
-            <a:ext cx="246888" cy="246888"/>
+            <a:schemeClr val="bg2"/>
+          </a:solidFill>
+          <a:ln/>
+        </p:spPr>
+      </p:sp>
+      <p:pic>
+        <p:nvPicPr>
+          <p:cNvPr id="43" name="lane-2-chip-2" descr="/Users/a/MAI/DID/presentation/assets/logos/gemini.png">    </p:cNvPr>
+          <p:cNvPicPr>
+            <a:picLocks noChangeAspect="1"/>
+          </p:cNvPicPr>
+          <p:nvPr/>
+        </p:nvPicPr>
+        <p:blipFill>
+          <a:blip r:embed="rId14"/>
+          <a:stretch>
+            <a:fillRect/>
+          </a:stretch>
+        </p:blipFill>
+        <p:spPr>
+          <a:xfrm>
+            <a:off x="4585716" y="2514600"/>
+            <a:ext cx="173736" cy="173736"/>
+          </a:xfrm>
+          <a:prstGeom prst="rect">
+            <a:avLst/>
+          </a:prstGeom>
+        </p:spPr>
+      </p:pic>
+      <p:sp>
+        <p:nvSpPr>
+          <p:cNvPr id="44" name="lane-2-chip-3-tile"/>
+          <p:cNvSpPr/>
+          <p:nvPr/>
+        </p:nvSpPr>
+        <p:spPr>
+          <a:xfrm>
+            <a:off x="4837176" y="2473452"/>
+            <a:ext cx="256032" cy="256032"/>
           </a:xfrm>
           <a:prstGeom prst="roundRect">
             <a:avLst>
-              <a:gd name="adj" fmla="val 14815"/>
+              <a:gd name="adj" fmla="val 14286"/>
             </a:avLst>
           </a:prstGeom>
           <a:solidFill>
-            <a:schemeClr val="accent5"/>
-          </a:solidFill>
-          <a:ln/>
-        </p:spPr>
-        <p:txBody>
-          <a:bodyPr wrap="square" lIns="0" tIns="0" rIns="0" bIns="0" rtlCol="0" anchor="ctr"/>
-          <a:lstStyle/>
-          <a:p>
-            <a:pPr algn="ctr" indent="0" marL="0">
-              <a:buNone/>
-            </a:pPr>
-            <a:r>
-              <a:rPr lang="en-US" sz="1300" b="1" dirty="0">
-                <a:solidFill>
-                  <a:schemeClr val="bg1"/>
-                </a:solidFill>
-              </a:rPr>
-              <a:t>И</a:t>
-            </a:r>
-            <a:endParaRPr lang="en-US" sz="1300" dirty="0"/>
-          </a:p>
-        </p:txBody>
-      </p:sp>
-      <p:sp>
-        <p:nvSpPr>
-          <p:cNvPr id="41" name="lane-3-chip-4"/>
-          <p:cNvSpPr txBox="1"/>
-          <p:nvPr/>
-        </p:nvSpPr>
-        <p:spPr>
-          <a:xfrm>
-            <a:off x="6153912" y="3214116"/>
-            <a:ext cx="246888" cy="246888"/>
+            <a:schemeClr val="bg2"/>
+          </a:solidFill>
+          <a:ln/>
+        </p:spPr>
+      </p:sp>
+      <p:pic>
+        <p:nvPicPr>
+          <p:cNvPr id="45" name="lane-2-chip-3" descr="/Users/a/MAI/DID/presentation/assets/logos/gemini.png">    </p:cNvPr>
+          <p:cNvPicPr>
+            <a:picLocks noChangeAspect="1"/>
+          </p:cNvPicPr>
+          <p:nvPr/>
+        </p:nvPicPr>
+        <p:blipFill>
+          <a:blip r:embed="rId15"/>
+          <a:stretch>
+            <a:fillRect/>
+          </a:stretch>
+        </p:blipFill>
+        <p:spPr>
+          <a:xfrm>
+            <a:off x="4878324" y="2514600"/>
+            <a:ext cx="173736" cy="173736"/>
+          </a:xfrm>
+          <a:prstGeom prst="rect">
+            <a:avLst/>
+          </a:prstGeom>
+        </p:spPr>
+      </p:pic>
+      <p:sp>
+        <p:nvSpPr>
+          <p:cNvPr id="46" name="lane-2-chip-4-tile"/>
+          <p:cNvSpPr/>
+          <p:nvPr/>
+        </p:nvSpPr>
+        <p:spPr>
+          <a:xfrm>
+            <a:off x="5129784" y="2473452"/>
+            <a:ext cx="256032" cy="256032"/>
           </a:xfrm>
           <a:prstGeom prst="roundRect">
             <a:avLst>
-              <a:gd name="adj" fmla="val 14815"/>
+              <a:gd name="adj" fmla="val 14286"/>
             </a:avLst>
           </a:prstGeom>
           <a:solidFill>
+            <a:schemeClr val="bg2"/>
+          </a:solidFill>
+          <a:ln/>
+        </p:spPr>
+      </p:sp>
+      <p:pic>
+        <p:nvPicPr>
+          <p:cNvPr id="47" name="lane-2-chip-4" descr="/Users/a/MAI/DID/presentation/assets/logos/gemini.png">    </p:cNvPr>
+          <p:cNvPicPr>
+            <a:picLocks noChangeAspect="1"/>
+          </p:cNvPicPr>
+          <p:nvPr/>
+        </p:nvPicPr>
+        <p:blipFill>
+          <a:blip r:embed="rId16"/>
+          <a:stretch>
+            <a:fillRect/>
+          </a:stretch>
+        </p:blipFill>
+        <p:spPr>
+          <a:xfrm>
+            <a:off x="5170932" y="2514600"/>
+            <a:ext cx="173736" cy="173736"/>
+          </a:xfrm>
+          <a:prstGeom prst="rect">
+            <a:avLst/>
+          </a:prstGeom>
+        </p:spPr>
+      </p:pic>
+      <p:sp>
+        <p:nvSpPr>
+          <p:cNvPr id="48" name="lane-2-chip-5-tile"/>
+          <p:cNvSpPr/>
+          <p:nvPr/>
+        </p:nvSpPr>
+        <p:spPr>
+          <a:xfrm>
+            <a:off x="5422392" y="2473452"/>
+            <a:ext cx="256032" cy="256032"/>
+          </a:xfrm>
+          <a:prstGeom prst="roundRect">
+            <a:avLst>
+              <a:gd name="adj" fmla="val 14286"/>
+            </a:avLst>
+          </a:prstGeom>
+          <a:solidFill>
+            <a:schemeClr val="bg2"/>
+          </a:solidFill>
+          <a:ln/>
+        </p:spPr>
+      </p:sp>
+      <p:pic>
+        <p:nvPicPr>
+          <p:cNvPr id="49" name="lane-2-chip-5" descr="/Users/a/MAI/DID/presentation/assets/logos/claude.png">    </p:cNvPr>
+          <p:cNvPicPr>
+            <a:picLocks noChangeAspect="1"/>
+          </p:cNvPicPr>
+          <p:nvPr/>
+        </p:nvPicPr>
+        <p:blipFill>
+          <a:blip r:embed="rId17"/>
+          <a:stretch>
+            <a:fillRect/>
+          </a:stretch>
+        </p:blipFill>
+        <p:spPr>
+          <a:xfrm>
+            <a:off x="5463540" y="2514600"/>
+            <a:ext cx="173736" cy="173736"/>
+          </a:xfrm>
+          <a:prstGeom prst="rect">
+            <a:avLst/>
+          </a:prstGeom>
+        </p:spPr>
+      </p:pic>
+      <p:sp>
+        <p:nvSpPr>
+          <p:cNvPr id="50" name="lane-2-chip-6"/>
+          <p:cNvSpPr txBox="1"/>
+          <p:nvPr/>
+        </p:nvSpPr>
+        <p:spPr>
+          <a:xfrm>
+            <a:off x="5715000" y="2473452"/>
+            <a:ext cx="256032" cy="256032"/>
+          </a:xfrm>
+          <a:prstGeom prst="roundRect">
+            <a:avLst>
+              <a:gd name="adj" fmla="val 14286"/>
+            </a:avLst>
+          </a:prstGeom>
+          <a:solidFill>
             <a:schemeClr val="accent3"/>
           </a:solidFill>
           <a:ln/>
@@ -4970,50 +4908,50 @@
       </p:sp>
       <p:sp>
         <p:nvSpPr>
-          <p:cNvPr id="42" name="lane-3-result"/>
+          <p:cNvPr id="51" name="lane-2-result"/>
           <p:cNvSpPr txBox="1"/>
           <p:nvPr/>
         </p:nvSpPr>
         <p:spPr>
           <a:xfrm>
-            <a:off x="548640" y="3461004"/>
-            <a:ext cx="5852160" cy="246888"/>
-          </a:xfrm>
-          <a:prstGeom prst="rect">
-            <a:avLst/>
-          </a:prstGeom>
-          <a:noFill/>
-          <a:ln/>
-        </p:spPr>
-        <p:txBody>
-          <a:bodyPr wrap="square" lIns="0" tIns="0" rIns="0" bIns="0" rtlCol="0" anchor="ctr"/>
+            <a:off x="7315200" y="2432304"/>
+            <a:ext cx="4325112" cy="338328"/>
+          </a:xfrm>
+          <a:prstGeom prst="rect">
+            <a:avLst/>
+          </a:prstGeom>
+          <a:noFill/>
+          <a:ln/>
+        </p:spPr>
+        <p:txBody>
+          <a:bodyPr wrap="none" lIns="0" tIns="0" rIns="0" bIns="0" rtlCol="0" anchor="ctr"/>
           <a:lstStyle/>
           <a:p>
             <a:pPr algn="l" indent="0" marL="0">
               <a:buNone/>
             </a:pPr>
             <a:r>
-              <a:rPr lang="en-US" sz="1600" dirty="0">
+              <a:rPr lang="en-US" sz="1400" dirty="0">
                 <a:solidFill>
                   <a:schemeClr val="tx2"/>
                 </a:solidFill>
               </a:rPr>
-              <a:t>возврат на базу в Gazebo: 8 из 9 → 7 из 7</a:t>
-            </a:r>
-            <a:endParaRPr lang="en-US" sz="1600" dirty="0"/>
-          </a:p>
-        </p:txBody>
-      </p:sp>
-      <p:sp>
-        <p:nvSpPr>
-          <p:cNvPr id="43" name="lane-4-rule"/>
-          <p:cNvSpPr/>
-          <p:nvPr/>
-        </p:nvSpPr>
-        <p:spPr>
-          <a:xfrm>
-            <a:off x="548640" y="3749040"/>
-            <a:ext cx="5852160" cy="0"/>
+              <a:t>проверка нашла две выдуманные ссылки</a:t>
+            </a:r>
+            <a:endParaRPr lang="en-US" sz="1400" dirty="0"/>
+          </a:p>
+        </p:txBody>
+      </p:sp>
+      <p:sp>
+        <p:nvSpPr>
+          <p:cNvPr id="52" name="lane-3-rule"/>
+          <p:cNvSpPr/>
+          <p:nvPr/>
+        </p:nvSpPr>
+        <p:spPr>
+          <a:xfrm>
+            <a:off x="548640" y="2770632"/>
+            <a:ext cx="11091672" cy="0"/>
           </a:xfrm>
           <a:prstGeom prst="line">
             <a:avLst/>
@@ -5029,23 +4967,23 @@
       </p:sp>
       <p:sp>
         <p:nvSpPr>
-          <p:cNvPr id="44" name="lane-4-name"/>
+          <p:cNvPr id="53" name="lane-3-name"/>
           <p:cNvSpPr txBox="1"/>
           <p:nvPr/>
         </p:nvSpPr>
         <p:spPr>
           <a:xfrm>
-            <a:off x="548640" y="3776472"/>
-            <a:ext cx="4334256" cy="256032"/>
-          </a:xfrm>
-          <a:prstGeom prst="rect">
-            <a:avLst/>
-          </a:prstGeom>
-          <a:noFill/>
-          <a:ln/>
-        </p:spPr>
-        <p:txBody>
-          <a:bodyPr wrap="square" lIns="0" tIns="0" rIns="0" bIns="0" rtlCol="0" anchor="ctr"/>
+            <a:off x="548640" y="2770632"/>
+            <a:ext cx="3611880" cy="338328"/>
+          </a:xfrm>
+          <a:prstGeom prst="rect">
+            <a:avLst/>
+          </a:prstGeom>
+          <a:noFill/>
+          <a:ln/>
+        </p:spPr>
+        <p:txBody>
+          <a:bodyPr wrap="none" lIns="0" tIns="0" rIns="0" bIns="0" rtlCol="0" anchor="ctr"/>
           <a:lstStyle/>
           <a:p>
             <a:pPr algn="l" indent="0" marL="0">
@@ -5057,7 +4995,7 @@
                   <a:schemeClr val="tx1"/>
                 </a:solidFill>
               </a:rPr>
-              <a:t>P1. Где робот теряет очки</a:t>
+              <a:t>R13. Миссия, заданная словами</a:t>
             </a:r>
             <a:endParaRPr lang="en-US" sz="1600" dirty="0"/>
           </a:p>
@@ -5065,178 +5003,202 @@
       </p:sp>
       <p:sp>
         <p:nvSpPr>
-          <p:cNvPr id="45" name="lane-4-chip-1"/>
-          <p:cNvSpPr txBox="1"/>
-          <p:nvPr/>
-        </p:nvSpPr>
-        <p:spPr>
-          <a:xfrm>
-            <a:off x="5020056" y="3781044"/>
-            <a:ext cx="246888" cy="246888"/>
+          <p:cNvPr id="54" name="lane-3-chip-1-tile"/>
+          <p:cNvSpPr/>
+          <p:nvPr/>
+        </p:nvSpPr>
+        <p:spPr>
+          <a:xfrm>
+            <a:off x="4251960" y="2811780"/>
+            <a:ext cx="256032" cy="256032"/>
           </a:xfrm>
           <a:prstGeom prst="roundRect">
             <a:avLst>
-              <a:gd name="adj" fmla="val 14815"/>
+              <a:gd name="adj" fmla="val 14286"/>
             </a:avLst>
           </a:prstGeom>
           <a:solidFill>
-            <a:schemeClr val="accent1"/>
-          </a:solidFill>
-          <a:ln/>
-        </p:spPr>
-        <p:txBody>
-          <a:bodyPr wrap="square" lIns="0" tIns="0" rIns="0" bIns="0" rtlCol="0" anchor="ctr"/>
-          <a:lstStyle/>
-          <a:p>
-            <a:pPr algn="ctr" indent="0" marL="0">
-              <a:buNone/>
-            </a:pPr>
-            <a:r>
-              <a:rPr lang="en-US" sz="1300" b="1" dirty="0">
-                <a:solidFill>
-                  <a:schemeClr val="bg1"/>
-                </a:solidFill>
-              </a:rPr>
-              <a:t>Ч</a:t>
-            </a:r>
-            <a:endParaRPr lang="en-US" sz="1300" dirty="0"/>
-          </a:p>
-        </p:txBody>
-      </p:sp>
-      <p:sp>
-        <p:nvSpPr>
-          <p:cNvPr id="46" name="lane-4-chip-2"/>
-          <p:cNvSpPr txBox="1"/>
-          <p:nvPr/>
-        </p:nvSpPr>
-        <p:spPr>
-          <a:xfrm>
-            <a:off x="5303520" y="3781044"/>
-            <a:ext cx="246888" cy="246888"/>
+            <a:schemeClr val="bg2"/>
+          </a:solidFill>
+          <a:ln/>
+        </p:spPr>
+      </p:sp>
+      <p:pic>
+        <p:nvPicPr>
+          <p:cNvPr id="55" name="lane-3-chip-1" descr="/Users/a/MAI/DID/presentation/assets/logos/gemini.png">    </p:cNvPr>
+          <p:cNvPicPr>
+            <a:picLocks noChangeAspect="1"/>
+          </p:cNvPicPr>
+          <p:nvPr/>
+        </p:nvPicPr>
+        <p:blipFill>
+          <a:blip r:embed="rId18"/>
+          <a:stretch>
+            <a:fillRect/>
+          </a:stretch>
+        </p:blipFill>
+        <p:spPr>
+          <a:xfrm>
+            <a:off x="4293108" y="2852928"/>
+            <a:ext cx="173736" cy="173736"/>
+          </a:xfrm>
+          <a:prstGeom prst="rect">
+            <a:avLst/>
+          </a:prstGeom>
+        </p:spPr>
+      </p:pic>
+      <p:sp>
+        <p:nvSpPr>
+          <p:cNvPr id="56" name="lane-3-chip-2-tile"/>
+          <p:cNvSpPr/>
+          <p:nvPr/>
+        </p:nvSpPr>
+        <p:spPr>
+          <a:xfrm>
+            <a:off x="4544568" y="2811780"/>
+            <a:ext cx="256032" cy="256032"/>
           </a:xfrm>
           <a:prstGeom prst="roundRect">
             <a:avLst>
-              <a:gd name="adj" fmla="val 14815"/>
+              <a:gd name="adj" fmla="val 14286"/>
             </a:avLst>
           </a:prstGeom>
           <a:solidFill>
-            <a:schemeClr val="accent5"/>
-          </a:solidFill>
-          <a:ln/>
-        </p:spPr>
-        <p:txBody>
-          <a:bodyPr wrap="square" lIns="0" tIns="0" rIns="0" bIns="0" rtlCol="0" anchor="ctr"/>
-          <a:lstStyle/>
-          <a:p>
-            <a:pPr algn="ctr" indent="0" marL="0">
-              <a:buNone/>
-            </a:pPr>
-            <a:r>
-              <a:rPr lang="en-US" sz="1300" b="1" dirty="0">
-                <a:solidFill>
-                  <a:schemeClr val="bg1"/>
-                </a:solidFill>
-              </a:rPr>
-              <a:t>И</a:t>
-            </a:r>
-            <a:endParaRPr lang="en-US" sz="1300" dirty="0"/>
-          </a:p>
-        </p:txBody>
-      </p:sp>
-      <p:sp>
-        <p:nvSpPr>
-          <p:cNvPr id="47" name="lane-4-chip-3"/>
-          <p:cNvSpPr txBox="1"/>
-          <p:nvPr/>
-        </p:nvSpPr>
-        <p:spPr>
-          <a:xfrm>
-            <a:off x="5586984" y="3781044"/>
-            <a:ext cx="246888" cy="246888"/>
+            <a:schemeClr val="bg2"/>
+          </a:solidFill>
+          <a:ln/>
+        </p:spPr>
+      </p:sp>
+      <p:pic>
+        <p:nvPicPr>
+          <p:cNvPr id="57" name="lane-3-chip-2" descr="/Users/a/MAI/DID/presentation/assets/logos/claude.png">    </p:cNvPr>
+          <p:cNvPicPr>
+            <a:picLocks noChangeAspect="1"/>
+          </p:cNvPicPr>
+          <p:nvPr/>
+        </p:nvPicPr>
+        <p:blipFill>
+          <a:blip r:embed="rId19"/>
+          <a:stretch>
+            <a:fillRect/>
+          </a:stretch>
+        </p:blipFill>
+        <p:spPr>
+          <a:xfrm>
+            <a:off x="4585716" y="2852928"/>
+            <a:ext cx="173736" cy="173736"/>
+          </a:xfrm>
+          <a:prstGeom prst="rect">
+            <a:avLst/>
+          </a:prstGeom>
+        </p:spPr>
+      </p:pic>
+      <p:sp>
+        <p:nvSpPr>
+          <p:cNvPr id="58" name="lane-3-chip-3-tile"/>
+          <p:cNvSpPr/>
+          <p:nvPr/>
+        </p:nvSpPr>
+        <p:spPr>
+          <a:xfrm>
+            <a:off x="4837176" y="2811780"/>
+            <a:ext cx="256032" cy="256032"/>
           </a:xfrm>
           <a:prstGeom prst="roundRect">
             <a:avLst>
-              <a:gd name="adj" fmla="val 14815"/>
+              <a:gd name="adj" fmla="val 14286"/>
             </a:avLst>
           </a:prstGeom>
           <a:solidFill>
-            <a:schemeClr val="accent6"/>
-          </a:solidFill>
-          <a:ln/>
-        </p:spPr>
-        <p:txBody>
-          <a:bodyPr wrap="square" lIns="0" tIns="0" rIns="0" bIns="0" rtlCol="0" anchor="ctr"/>
-          <a:lstStyle/>
-          <a:p>
-            <a:pPr algn="ctr" indent="0" marL="0">
-              <a:buNone/>
-            </a:pPr>
-            <a:r>
-              <a:rPr lang="en-US" sz="1300" b="1" dirty="0">
-                <a:solidFill>
-                  <a:schemeClr val="bg1"/>
-                </a:solidFill>
-              </a:rPr>
-              <a:t>Р</a:t>
-            </a:r>
-            <a:endParaRPr lang="en-US" sz="1300" dirty="0"/>
-          </a:p>
-        </p:txBody>
-      </p:sp>
-      <p:sp>
-        <p:nvSpPr>
-          <p:cNvPr id="48" name="lane-4-chip-4"/>
-          <p:cNvSpPr txBox="1"/>
-          <p:nvPr/>
-        </p:nvSpPr>
-        <p:spPr>
-          <a:xfrm>
-            <a:off x="5870448" y="3781044"/>
-            <a:ext cx="246888" cy="246888"/>
+            <a:schemeClr val="bg2"/>
+          </a:solidFill>
+          <a:ln/>
+        </p:spPr>
+      </p:sp>
+      <p:pic>
+        <p:nvPicPr>
+          <p:cNvPr id="59" name="lane-3-chip-3" descr="/Users/a/MAI/DID/presentation/assets/logos/openai.png">    </p:cNvPr>
+          <p:cNvPicPr>
+            <a:picLocks noChangeAspect="1"/>
+          </p:cNvPicPr>
+          <p:nvPr/>
+        </p:nvPicPr>
+        <p:blipFill>
+          <a:blip r:embed="rId20"/>
+          <a:stretch>
+            <a:fillRect/>
+          </a:stretch>
+        </p:blipFill>
+        <p:spPr>
+          <a:xfrm>
+            <a:off x="4878324" y="2852928"/>
+            <a:ext cx="173736" cy="173736"/>
+          </a:xfrm>
+          <a:prstGeom prst="rect">
+            <a:avLst/>
+          </a:prstGeom>
+        </p:spPr>
+      </p:pic>
+      <p:sp>
+        <p:nvSpPr>
+          <p:cNvPr id="60" name="lane-3-chip-4-tile"/>
+          <p:cNvSpPr/>
+          <p:nvPr/>
+        </p:nvSpPr>
+        <p:spPr>
+          <a:xfrm>
+            <a:off x="5129784" y="2811780"/>
+            <a:ext cx="256032" cy="256032"/>
           </a:xfrm>
           <a:prstGeom prst="roundRect">
             <a:avLst>
-              <a:gd name="adj" fmla="val 14815"/>
+              <a:gd name="adj" fmla="val 14286"/>
             </a:avLst>
           </a:prstGeom>
           <a:solidFill>
-            <a:schemeClr val="accent5"/>
-          </a:solidFill>
-          <a:ln/>
-        </p:spPr>
-        <p:txBody>
-          <a:bodyPr wrap="square" lIns="0" tIns="0" rIns="0" bIns="0" rtlCol="0" anchor="ctr"/>
-          <a:lstStyle/>
-          <a:p>
-            <a:pPr algn="ctr" indent="0" marL="0">
-              <a:buNone/>
-            </a:pPr>
-            <a:r>
-              <a:rPr lang="en-US" sz="1300" b="1" dirty="0">
-                <a:solidFill>
-                  <a:schemeClr val="bg1"/>
-                </a:solidFill>
-              </a:rPr>
-              <a:t>И</a:t>
-            </a:r>
-            <a:endParaRPr lang="en-US" sz="1300" dirty="0"/>
-          </a:p>
-        </p:txBody>
-      </p:sp>
-      <p:sp>
-        <p:nvSpPr>
-          <p:cNvPr id="49" name="lane-4-chip-5"/>
+            <a:schemeClr val="bg2"/>
+          </a:solidFill>
+          <a:ln/>
+        </p:spPr>
+      </p:sp>
+      <p:pic>
+        <p:nvPicPr>
+          <p:cNvPr id="61" name="lane-3-chip-4" descr="/Users/a/MAI/DID/presentation/assets/logos/claude.png">    </p:cNvPr>
+          <p:cNvPicPr>
+            <a:picLocks noChangeAspect="1"/>
+          </p:cNvPicPr>
+          <p:nvPr/>
+        </p:nvPicPr>
+        <p:blipFill>
+          <a:blip r:embed="rId21"/>
+          <a:stretch>
+            <a:fillRect/>
+          </a:stretch>
+        </p:blipFill>
+        <p:spPr>
+          <a:xfrm>
+            <a:off x="5170932" y="2852928"/>
+            <a:ext cx="173736" cy="173736"/>
+          </a:xfrm>
+          <a:prstGeom prst="rect">
+            <a:avLst/>
+          </a:prstGeom>
+        </p:spPr>
+      </p:pic>
+      <p:sp>
+        <p:nvSpPr>
+          <p:cNvPr id="62" name="lane-3-chip-5"/>
           <p:cNvSpPr txBox="1"/>
           <p:nvPr/>
         </p:nvSpPr>
         <p:spPr>
           <a:xfrm>
-            <a:off x="6153912" y="3781044"/>
-            <a:ext cx="246888" cy="246888"/>
+            <a:off x="5422392" y="2811780"/>
+            <a:ext cx="256032" cy="256032"/>
           </a:xfrm>
           <a:prstGeom prst="roundRect">
             <a:avLst>
-              <a:gd name="adj" fmla="val 14815"/>
+              <a:gd name="adj" fmla="val 14286"/>
             </a:avLst>
           </a:prstGeom>
           <a:solidFill>
@@ -5265,50 +5227,50 @@
       </p:sp>
       <p:sp>
         <p:nvSpPr>
-          <p:cNvPr id="50" name="lane-4-result"/>
+          <p:cNvPr id="63" name="lane-3-result"/>
           <p:cNvSpPr txBox="1"/>
           <p:nvPr/>
         </p:nvSpPr>
         <p:spPr>
           <a:xfrm>
-            <a:off x="548640" y="4027932"/>
-            <a:ext cx="5852160" cy="246888"/>
-          </a:xfrm>
-          <a:prstGeom prst="rect">
-            <a:avLst/>
-          </a:prstGeom>
-          <a:noFill/>
-          <a:ln/>
-        </p:spPr>
-        <p:txBody>
-          <a:bodyPr wrap="square" lIns="0" tIns="0" rIns="0" bIns="0" rtlCol="0" anchor="ctr"/>
+            <a:off x="7315200" y="2770632"/>
+            <a:ext cx="4325112" cy="338328"/>
+          </a:xfrm>
+          <a:prstGeom prst="rect">
+            <a:avLst/>
+          </a:prstGeom>
+          <a:noFill/>
+          <a:ln/>
+        </p:spPr>
+        <p:txBody>
+          <a:bodyPr wrap="none" lIns="0" tIns="0" rIns="0" bIns="0" rtlCol="0" anchor="ctr"/>
           <a:lstStyle/>
           <a:p>
             <a:pPr algn="l" indent="0" marL="0">
               <a:buNone/>
             </a:pPr>
             <a:r>
-              <a:rPr lang="en-US" sz="1600" dirty="0">
+              <a:rPr lang="en-US" sz="1400" dirty="0">
                 <a:solidFill>
                   <a:schemeClr val="tx2"/>
                 </a:solidFill>
               </a:rPr>
-              <a:t>пережидание сбоя датчика: +6,4 очка на трудном уровне</a:t>
-            </a:r>
-            <a:endParaRPr lang="en-US" sz="1600" dirty="0"/>
-          </a:p>
-        </p:txBody>
-      </p:sp>
-      <p:sp>
-        <p:nvSpPr>
-          <p:cNvPr id="51" name="lane-5-rule"/>
-          <p:cNvSpPr/>
-          <p:nvPr/>
-        </p:nvSpPr>
-        <p:spPr>
-          <a:xfrm>
-            <a:off x="548640" y="4315968"/>
-            <a:ext cx="5852160" cy="0"/>
+              <a:t>модель — миссия 6 из 6, правило — 0 из 6</a:t>
+            </a:r>
+            <a:endParaRPr lang="en-US" sz="1400" dirty="0"/>
+          </a:p>
+        </p:txBody>
+      </p:sp>
+      <p:sp>
+        <p:nvSpPr>
+          <p:cNvPr id="64" name="lane-4-rule"/>
+          <p:cNvSpPr/>
+          <p:nvPr/>
+        </p:nvSpPr>
+        <p:spPr>
+          <a:xfrm>
+            <a:off x="548640" y="3108960"/>
+            <a:ext cx="11091672" cy="0"/>
           </a:xfrm>
           <a:prstGeom prst="line">
             <a:avLst/>
@@ -5324,23 +5286,23 @@
       </p:sp>
       <p:sp>
         <p:nvSpPr>
-          <p:cNvPr id="52" name="lane-5-name"/>
+          <p:cNvPr id="65" name="lane-4-name"/>
           <p:cNvSpPr txBox="1"/>
           <p:nvPr/>
         </p:nvSpPr>
         <p:spPr>
           <a:xfrm>
-            <a:off x="548640" y="4343400"/>
-            <a:ext cx="4050792" cy="256032"/>
-          </a:xfrm>
-          <a:prstGeom prst="rect">
-            <a:avLst/>
-          </a:prstGeom>
-          <a:noFill/>
-          <a:ln/>
-        </p:spPr>
-        <p:txBody>
-          <a:bodyPr wrap="square" lIns="0" tIns="0" rIns="0" bIns="0" rtlCol="0" anchor="ctr"/>
+            <a:off x="548640" y="3108960"/>
+            <a:ext cx="3611880" cy="338328"/>
+          </a:xfrm>
+          <a:prstGeom prst="rect">
+            <a:avLst/>
+          </a:prstGeom>
+          <a:noFill/>
+          <a:ln/>
+        </p:spPr>
+        <p:txBody>
+          <a:bodyPr wrap="none" lIns="0" tIns="0" rIns="0" bIns="0" rtlCol="0" anchor="ctr"/>
           <a:lstStyle/>
           <a:p>
             <a:pPr algn="l" indent="0" marL="0">
@@ -5360,138 +5322,156 @@
       </p:sp>
       <p:sp>
         <p:nvSpPr>
-          <p:cNvPr id="53" name="lane-5-chip-1"/>
-          <p:cNvSpPr txBox="1"/>
-          <p:nvPr/>
-        </p:nvSpPr>
-        <p:spPr>
-          <a:xfrm>
-            <a:off x="4736592" y="4347972"/>
-            <a:ext cx="246888" cy="246888"/>
+          <p:cNvPr id="66" name="lane-4-chip-1-tile"/>
+          <p:cNvSpPr/>
+          <p:nvPr/>
+        </p:nvSpPr>
+        <p:spPr>
+          <a:xfrm>
+            <a:off x="4251960" y="3150108"/>
+            <a:ext cx="256032" cy="256032"/>
           </a:xfrm>
           <a:prstGeom prst="roundRect">
             <a:avLst>
-              <a:gd name="adj" fmla="val 14815"/>
+              <a:gd name="adj" fmla="val 14286"/>
             </a:avLst>
           </a:prstGeom>
           <a:solidFill>
-            <a:schemeClr val="accent2"/>
-          </a:solidFill>
-          <a:ln/>
-        </p:spPr>
-        <p:txBody>
-          <a:bodyPr wrap="square" lIns="0" tIns="0" rIns="0" bIns="0" rtlCol="0" anchor="ctr"/>
-          <a:lstStyle/>
-          <a:p>
-            <a:pPr algn="ctr" indent="0" marL="0">
-              <a:buNone/>
-            </a:pPr>
-            <a:r>
-              <a:rPr lang="en-US" sz="1300" b="1" dirty="0">
-                <a:solidFill>
-                  <a:schemeClr val="bg1"/>
-                </a:solidFill>
-              </a:rPr>
-              <a:t>Г</a:t>
-            </a:r>
-            <a:endParaRPr lang="en-US" sz="1300" dirty="0"/>
-          </a:p>
-        </p:txBody>
-      </p:sp>
-      <p:sp>
-        <p:nvSpPr>
-          <p:cNvPr id="54" name="lane-5-chip-2"/>
-          <p:cNvSpPr txBox="1"/>
-          <p:nvPr/>
-        </p:nvSpPr>
-        <p:spPr>
-          <a:xfrm>
-            <a:off x="5020056" y="4347972"/>
-            <a:ext cx="246888" cy="246888"/>
+            <a:schemeClr val="bg2"/>
+          </a:solidFill>
+          <a:ln/>
+        </p:spPr>
+      </p:sp>
+      <p:pic>
+        <p:nvPicPr>
+          <p:cNvPr id="67" name="lane-4-chip-1" descr="/Users/a/MAI/DID/presentation/assets/logos/gemini.png">    </p:cNvPr>
+          <p:cNvPicPr>
+            <a:picLocks noChangeAspect="1"/>
+          </p:cNvPicPr>
+          <p:nvPr/>
+        </p:nvPicPr>
+        <p:blipFill>
+          <a:blip r:embed="rId22"/>
+          <a:stretch>
+            <a:fillRect/>
+          </a:stretch>
+        </p:blipFill>
+        <p:spPr>
+          <a:xfrm>
+            <a:off x="4293108" y="3191256"/>
+            <a:ext cx="173736" cy="173736"/>
+          </a:xfrm>
+          <a:prstGeom prst="rect">
+            <a:avLst/>
+          </a:prstGeom>
+        </p:spPr>
+      </p:pic>
+      <p:sp>
+        <p:nvSpPr>
+          <p:cNvPr id="68" name="lane-4-chip-2-tile"/>
+          <p:cNvSpPr/>
+          <p:nvPr/>
+        </p:nvSpPr>
+        <p:spPr>
+          <a:xfrm>
+            <a:off x="4544568" y="3150108"/>
+            <a:ext cx="256032" cy="256032"/>
           </a:xfrm>
           <a:prstGeom prst="roundRect">
             <a:avLst>
-              <a:gd name="adj" fmla="val 14815"/>
+              <a:gd name="adj" fmla="val 14286"/>
             </a:avLst>
           </a:prstGeom>
           <a:solidFill>
-            <a:schemeClr val="accent5"/>
-          </a:solidFill>
-          <a:ln/>
-        </p:spPr>
-        <p:txBody>
-          <a:bodyPr wrap="square" lIns="0" tIns="0" rIns="0" bIns="0" rtlCol="0" anchor="ctr"/>
-          <a:lstStyle/>
-          <a:p>
-            <a:pPr algn="ctr" indent="0" marL="0">
-              <a:buNone/>
-            </a:pPr>
-            <a:r>
-              <a:rPr lang="en-US" sz="1300" b="1" dirty="0">
-                <a:solidFill>
-                  <a:schemeClr val="bg1"/>
-                </a:solidFill>
-              </a:rPr>
-              <a:t>И</a:t>
-            </a:r>
-            <a:endParaRPr lang="en-US" sz="1300" dirty="0"/>
-          </a:p>
-        </p:txBody>
-      </p:sp>
-      <p:sp>
-        <p:nvSpPr>
-          <p:cNvPr id="55" name="lane-5-chip-3"/>
-          <p:cNvSpPr txBox="1"/>
-          <p:nvPr/>
-        </p:nvSpPr>
-        <p:spPr>
-          <a:xfrm>
-            <a:off x="5303520" y="4347972"/>
-            <a:ext cx="246888" cy="246888"/>
+            <a:schemeClr val="bg2"/>
+          </a:solidFill>
+          <a:ln/>
+        </p:spPr>
+      </p:sp>
+      <p:pic>
+        <p:nvPicPr>
+          <p:cNvPr id="69" name="lane-4-chip-2" descr="/Users/a/MAI/DID/presentation/assets/logos/claude.png">    </p:cNvPr>
+          <p:cNvPicPr>
+            <a:picLocks noChangeAspect="1"/>
+          </p:cNvPicPr>
+          <p:nvPr/>
+        </p:nvPicPr>
+        <p:blipFill>
+          <a:blip r:embed="rId23"/>
+          <a:stretch>
+            <a:fillRect/>
+          </a:stretch>
+        </p:blipFill>
+        <p:spPr>
+          <a:xfrm>
+            <a:off x="4585716" y="3191256"/>
+            <a:ext cx="173736" cy="173736"/>
+          </a:xfrm>
+          <a:prstGeom prst="rect">
+            <a:avLst/>
+          </a:prstGeom>
+        </p:spPr>
+      </p:pic>
+      <p:sp>
+        <p:nvSpPr>
+          <p:cNvPr id="70" name="lane-4-chip-3-tile"/>
+          <p:cNvSpPr/>
+          <p:nvPr/>
+        </p:nvSpPr>
+        <p:spPr>
+          <a:xfrm>
+            <a:off x="4837176" y="3150108"/>
+            <a:ext cx="256032" cy="256032"/>
           </a:xfrm>
           <a:prstGeom prst="roundRect">
             <a:avLst>
-              <a:gd name="adj" fmla="val 14815"/>
+              <a:gd name="adj" fmla="val 14286"/>
             </a:avLst>
           </a:prstGeom>
           <a:solidFill>
-            <a:schemeClr val="accent5"/>
-          </a:solidFill>
-          <a:ln/>
-        </p:spPr>
-        <p:txBody>
-          <a:bodyPr wrap="square" lIns="0" tIns="0" rIns="0" bIns="0" rtlCol="0" anchor="ctr"/>
-          <a:lstStyle/>
-          <a:p>
-            <a:pPr algn="ctr" indent="0" marL="0">
-              <a:buNone/>
-            </a:pPr>
-            <a:r>
-              <a:rPr lang="en-US" sz="1300" b="1" dirty="0">
-                <a:solidFill>
-                  <a:schemeClr val="bg1"/>
-                </a:solidFill>
-              </a:rPr>
-              <a:t>И</a:t>
-            </a:r>
-            <a:endParaRPr lang="en-US" sz="1300" dirty="0"/>
-          </a:p>
-        </p:txBody>
-      </p:sp>
-      <p:sp>
-        <p:nvSpPr>
-          <p:cNvPr id="56" name="lane-5-chip-4"/>
+            <a:schemeClr val="bg2"/>
+          </a:solidFill>
+          <a:ln/>
+        </p:spPr>
+      </p:sp>
+      <p:pic>
+        <p:nvPicPr>
+          <p:cNvPr id="71" name="lane-4-chip-3" descr="/Users/a/MAI/DID/presentation/assets/logos/claude.png">    </p:cNvPr>
+          <p:cNvPicPr>
+            <a:picLocks noChangeAspect="1"/>
+          </p:cNvPicPr>
+          <p:nvPr/>
+        </p:nvPicPr>
+        <p:blipFill>
+          <a:blip r:embed="rId24"/>
+          <a:stretch>
+            <a:fillRect/>
+          </a:stretch>
+        </p:blipFill>
+        <p:spPr>
+          <a:xfrm>
+            <a:off x="4878324" y="3191256"/>
+            <a:ext cx="173736" cy="173736"/>
+          </a:xfrm>
+          <a:prstGeom prst="rect">
+            <a:avLst/>
+          </a:prstGeom>
+        </p:spPr>
+      </p:pic>
+      <p:sp>
+        <p:nvSpPr>
+          <p:cNvPr id="72" name="lane-4-chip-4"/>
           <p:cNvSpPr txBox="1"/>
           <p:nvPr/>
         </p:nvSpPr>
         <p:spPr>
           <a:xfrm>
-            <a:off x="5586984" y="4347972"/>
-            <a:ext cx="246888" cy="246888"/>
+            <a:off x="5129784" y="3150108"/>
+            <a:ext cx="256032" cy="256032"/>
           </a:xfrm>
           <a:prstGeom prst="roundRect">
             <a:avLst>
-              <a:gd name="adj" fmla="val 14815"/>
+              <a:gd name="adj" fmla="val 14286"/>
             </a:avLst>
           </a:prstGeom>
           <a:solidFill>
@@ -5520,14 +5500,14 @@
       </p:sp>
       <p:sp>
         <p:nvSpPr>
-          <p:cNvPr id="57" name="lane-5-next"/>
+          <p:cNvPr id="73" name="lane-4-next"/>
           <p:cNvSpPr txBox="1"/>
           <p:nvPr/>
         </p:nvSpPr>
         <p:spPr>
           <a:xfrm>
-            <a:off x="5870448" y="4343400"/>
-            <a:ext cx="246888" cy="256032"/>
+            <a:off x="5422392" y="3108960"/>
+            <a:ext cx="256032" cy="338328"/>
           </a:xfrm>
           <a:prstGeom prst="rect">
             <a:avLst/>
@@ -5556,90 +5536,142 @@
       </p:sp>
       <p:sp>
         <p:nvSpPr>
-          <p:cNvPr id="58" name="lane-5-chip-6"/>
-          <p:cNvSpPr txBox="1"/>
-          <p:nvPr/>
-        </p:nvSpPr>
-        <p:spPr>
-          <a:xfrm>
-            <a:off x="6153912" y="4347972"/>
-            <a:ext cx="246888" cy="246888"/>
+          <p:cNvPr id="74" name="lane-4-chip-6-tile"/>
+          <p:cNvSpPr/>
+          <p:nvPr/>
+        </p:nvSpPr>
+        <p:spPr>
+          <a:xfrm>
+            <a:off x="5715000" y="3150108"/>
+            <a:ext cx="256032" cy="256032"/>
           </a:xfrm>
           <a:prstGeom prst="roundRect">
             <a:avLst>
-              <a:gd name="adj" fmla="val 14815"/>
+              <a:gd name="adj" fmla="val 14286"/>
             </a:avLst>
           </a:prstGeom>
           <a:solidFill>
-            <a:schemeClr val="accent5"/>
-          </a:solidFill>
-          <a:ln/>
-        </p:spPr>
-        <p:txBody>
-          <a:bodyPr wrap="square" lIns="0" tIns="0" rIns="0" bIns="0" rtlCol="0" anchor="ctr"/>
-          <a:lstStyle/>
-          <a:p>
-            <a:pPr algn="ctr" indent="0" marL="0">
-              <a:buNone/>
-            </a:pPr>
-            <a:r>
-              <a:rPr lang="en-US" sz="1300" b="1" dirty="0">
-                <a:solidFill>
-                  <a:schemeClr val="bg1"/>
-                </a:solidFill>
-              </a:rPr>
-              <a:t>И</a:t>
-            </a:r>
-            <a:endParaRPr lang="en-US" sz="1300" dirty="0"/>
-          </a:p>
-        </p:txBody>
-      </p:sp>
-      <p:sp>
-        <p:nvSpPr>
-          <p:cNvPr id="59" name="lane-5-result"/>
+            <a:schemeClr val="bg2"/>
+          </a:solidFill>
+          <a:ln/>
+        </p:spPr>
+      </p:sp>
+      <p:pic>
+        <p:nvPicPr>
+          <p:cNvPr id="75" name="lane-4-chip-6" descr="/Users/a/MAI/DID/presentation/assets/logos/claude.png">    </p:cNvPr>
+          <p:cNvPicPr>
+            <a:picLocks noChangeAspect="1"/>
+          </p:cNvPicPr>
+          <p:nvPr/>
+        </p:nvPicPr>
+        <p:blipFill>
+          <a:blip r:embed="rId25"/>
+          <a:stretch>
+            <a:fillRect/>
+          </a:stretch>
+        </p:blipFill>
+        <p:spPr>
+          <a:xfrm>
+            <a:off x="5756148" y="3191256"/>
+            <a:ext cx="173736" cy="173736"/>
+          </a:xfrm>
+          <a:prstGeom prst="rect">
+            <a:avLst/>
+          </a:prstGeom>
+        </p:spPr>
+      </p:pic>
+      <p:sp>
+        <p:nvSpPr>
+          <p:cNvPr id="76" name="lane-4-chip-7-tile"/>
+          <p:cNvSpPr/>
+          <p:nvPr/>
+        </p:nvSpPr>
+        <p:spPr>
+          <a:xfrm>
+            <a:off x="6007608" y="3150108"/>
+            <a:ext cx="256032" cy="256032"/>
+          </a:xfrm>
+          <a:prstGeom prst="roundRect">
+            <a:avLst>
+              <a:gd name="adj" fmla="val 14286"/>
+            </a:avLst>
+          </a:prstGeom>
+          <a:solidFill>
+            <a:schemeClr val="bg2"/>
+          </a:solidFill>
+          <a:ln/>
+        </p:spPr>
+      </p:sp>
+      <p:pic>
+        <p:nvPicPr>
+          <p:cNvPr id="77" name="lane-4-chip-7" descr="/Users/a/MAI/DID/presentation/assets/logos/openai.png">    </p:cNvPr>
+          <p:cNvPicPr>
+            <a:picLocks noChangeAspect="1"/>
+          </p:cNvPicPr>
+          <p:nvPr/>
+        </p:nvPicPr>
+        <p:blipFill>
+          <a:blip r:embed="rId26"/>
+          <a:stretch>
+            <a:fillRect/>
+          </a:stretch>
+        </p:blipFill>
+        <p:spPr>
+          <a:xfrm>
+            <a:off x="6048756" y="3191256"/>
+            <a:ext cx="173736" cy="173736"/>
+          </a:xfrm>
+          <a:prstGeom prst="rect">
+            <a:avLst/>
+          </a:prstGeom>
+        </p:spPr>
+      </p:pic>
+      <p:sp>
+        <p:nvSpPr>
+          <p:cNvPr id="78" name="lane-4-result"/>
           <p:cNvSpPr txBox="1"/>
           <p:nvPr/>
         </p:nvSpPr>
         <p:spPr>
           <a:xfrm>
-            <a:off x="548640" y="4594860"/>
-            <a:ext cx="5852160" cy="246888"/>
-          </a:xfrm>
-          <a:prstGeom prst="rect">
-            <a:avLst/>
-          </a:prstGeom>
-          <a:noFill/>
-          <a:ln/>
-        </p:spPr>
-        <p:txBody>
-          <a:bodyPr wrap="square" lIns="0" tIns="0" rIns="0" bIns="0" rtlCol="0" anchor="ctr"/>
+            <a:off x="7315200" y="3108960"/>
+            <a:ext cx="4325112" cy="338328"/>
+          </a:xfrm>
+          <a:prstGeom prst="rect">
+            <a:avLst/>
+          </a:prstGeom>
+          <a:noFill/>
+          <a:ln/>
+        </p:spPr>
+        <p:txBody>
+          <a:bodyPr wrap="none" lIns="0" tIns="0" rIns="0" bIns="0" rtlCol="0" anchor="ctr"/>
           <a:lstStyle/>
           <a:p>
             <a:pPr algn="l" indent="0" marL="0">
               <a:buNone/>
             </a:pPr>
             <a:r>
-              <a:rPr lang="en-US" sz="1600" dirty="0">
+              <a:rPr lang="en-US" sz="1400" dirty="0">
                 <a:solidFill>
                   <a:schemeClr val="tx2"/>
                 </a:solidFill>
               </a:rPr>
-              <a:t>ждать модель — минус 73 очка → ехать, пока думает: +42</a:t>
-            </a:r>
-            <a:endParaRPr lang="en-US" sz="1600" dirty="0"/>
-          </a:p>
-        </p:txBody>
-      </p:sp>
-      <p:sp>
-        <p:nvSpPr>
-          <p:cNvPr id="60" name="lane-6-rule"/>
-          <p:cNvSpPr/>
-          <p:nvPr/>
-        </p:nvSpPr>
-        <p:spPr>
-          <a:xfrm>
-            <a:off x="548640" y="4882896"/>
-            <a:ext cx="5852160" cy="0"/>
+              <a:t>ждать — минус 73 очка; ехать, пока думает: +42</a:t>
+            </a:r>
+            <a:endParaRPr lang="en-US" sz="1400" dirty="0"/>
+          </a:p>
+        </p:txBody>
+      </p:sp>
+      <p:sp>
+        <p:nvSpPr>
+          <p:cNvPr id="79" name="lane-5-rule"/>
+          <p:cNvSpPr/>
+          <p:nvPr/>
+        </p:nvSpPr>
+        <p:spPr>
+          <a:xfrm>
+            <a:off x="548640" y="3447288"/>
+            <a:ext cx="11091672" cy="0"/>
           </a:xfrm>
           <a:prstGeom prst="line">
             <a:avLst/>
@@ -5655,23 +5687,23 @@
       </p:sp>
       <p:sp>
         <p:nvSpPr>
-          <p:cNvPr id="61" name="lane-6-name"/>
+          <p:cNvPr id="80" name="lane-5-name"/>
           <p:cNvSpPr txBox="1"/>
           <p:nvPr/>
         </p:nvSpPr>
         <p:spPr>
           <a:xfrm>
-            <a:off x="548640" y="4910328"/>
-            <a:ext cx="4334256" cy="256032"/>
-          </a:xfrm>
-          <a:prstGeom prst="rect">
-            <a:avLst/>
-          </a:prstGeom>
-          <a:noFill/>
-          <a:ln/>
-        </p:spPr>
-        <p:txBody>
-          <a:bodyPr wrap="square" lIns="0" tIns="0" rIns="0" bIns="0" rtlCol="0" anchor="ctr"/>
+            <a:off x="548640" y="3447288"/>
+            <a:ext cx="3611880" cy="338328"/>
+          </a:xfrm>
+          <a:prstGeom prst="rect">
+            <a:avLst/>
+          </a:prstGeom>
+          <a:noFill/>
+          <a:ln/>
+        </p:spPr>
+        <p:txBody>
+          <a:bodyPr wrap="none" lIns="0" tIns="0" rIns="0" bIns="0" rtlCol="0" anchor="ctr"/>
           <a:lstStyle/>
           <a:p>
             <a:pPr algn="l" indent="0" marL="0">
@@ -5691,178 +5723,202 @@
       </p:sp>
       <p:sp>
         <p:nvSpPr>
-          <p:cNvPr id="62" name="lane-6-chip-1"/>
-          <p:cNvSpPr txBox="1"/>
-          <p:nvPr/>
-        </p:nvSpPr>
-        <p:spPr>
-          <a:xfrm>
-            <a:off x="5020056" y="4914900"/>
-            <a:ext cx="246888" cy="246888"/>
+          <p:cNvPr id="81" name="lane-5-chip-1-tile"/>
+          <p:cNvSpPr/>
+          <p:nvPr/>
+        </p:nvSpPr>
+        <p:spPr>
+          <a:xfrm>
+            <a:off x="4251960" y="3488436"/>
+            <a:ext cx="256032" cy="256032"/>
           </a:xfrm>
           <a:prstGeom prst="roundRect">
             <a:avLst>
-              <a:gd name="adj" fmla="val 14815"/>
+              <a:gd name="adj" fmla="val 14286"/>
             </a:avLst>
           </a:prstGeom>
           <a:solidFill>
-            <a:schemeClr val="accent5"/>
-          </a:solidFill>
-          <a:ln/>
-        </p:spPr>
-        <p:txBody>
-          <a:bodyPr wrap="square" lIns="0" tIns="0" rIns="0" bIns="0" rtlCol="0" anchor="ctr"/>
-          <a:lstStyle/>
-          <a:p>
-            <a:pPr algn="ctr" indent="0" marL="0">
-              <a:buNone/>
-            </a:pPr>
-            <a:r>
-              <a:rPr lang="en-US" sz="1300" b="1" dirty="0">
-                <a:solidFill>
-                  <a:schemeClr val="bg1"/>
-                </a:solidFill>
-              </a:rPr>
-              <a:t>И</a:t>
-            </a:r>
-            <a:endParaRPr lang="en-US" sz="1300" dirty="0"/>
-          </a:p>
-        </p:txBody>
-      </p:sp>
-      <p:sp>
-        <p:nvSpPr>
-          <p:cNvPr id="63" name="lane-6-chip-2"/>
-          <p:cNvSpPr txBox="1"/>
-          <p:nvPr/>
-        </p:nvSpPr>
-        <p:spPr>
-          <a:xfrm>
-            <a:off x="5303520" y="4914900"/>
-            <a:ext cx="246888" cy="246888"/>
+            <a:schemeClr val="bg2"/>
+          </a:solidFill>
+          <a:ln/>
+        </p:spPr>
+      </p:sp>
+      <p:pic>
+        <p:nvPicPr>
+          <p:cNvPr id="82" name="lane-5-chip-1" descr="/Users/a/MAI/DID/presentation/assets/logos/claude.png">    </p:cNvPr>
+          <p:cNvPicPr>
+            <a:picLocks noChangeAspect="1"/>
+          </p:cNvPicPr>
+          <p:nvPr/>
+        </p:nvPicPr>
+        <p:blipFill>
+          <a:blip r:embed="rId27"/>
+          <a:stretch>
+            <a:fillRect/>
+          </a:stretch>
+        </p:blipFill>
+        <p:spPr>
+          <a:xfrm>
+            <a:off x="4293108" y="3529584"/>
+            <a:ext cx="173736" cy="173736"/>
+          </a:xfrm>
+          <a:prstGeom prst="rect">
+            <a:avLst/>
+          </a:prstGeom>
+        </p:spPr>
+      </p:pic>
+      <p:sp>
+        <p:nvSpPr>
+          <p:cNvPr id="83" name="lane-5-chip-2-tile"/>
+          <p:cNvSpPr/>
+          <p:nvPr/>
+        </p:nvSpPr>
+        <p:spPr>
+          <a:xfrm>
+            <a:off x="4544568" y="3488436"/>
+            <a:ext cx="256032" cy="256032"/>
           </a:xfrm>
           <a:prstGeom prst="roundRect">
             <a:avLst>
-              <a:gd name="adj" fmla="val 14815"/>
+              <a:gd name="adj" fmla="val 14286"/>
             </a:avLst>
           </a:prstGeom>
           <a:solidFill>
-            <a:schemeClr val="accent6"/>
-          </a:solidFill>
-          <a:ln/>
-        </p:spPr>
-        <p:txBody>
-          <a:bodyPr wrap="square" lIns="0" tIns="0" rIns="0" bIns="0" rtlCol="0" anchor="ctr"/>
-          <a:lstStyle/>
-          <a:p>
-            <a:pPr algn="ctr" indent="0" marL="0">
-              <a:buNone/>
-            </a:pPr>
-            <a:r>
-              <a:rPr lang="en-US" sz="1300" b="1" dirty="0">
-                <a:solidFill>
-                  <a:schemeClr val="bg1"/>
-                </a:solidFill>
-              </a:rPr>
-              <a:t>Р</a:t>
-            </a:r>
-            <a:endParaRPr lang="en-US" sz="1300" dirty="0"/>
-          </a:p>
-        </p:txBody>
-      </p:sp>
-      <p:sp>
-        <p:nvSpPr>
-          <p:cNvPr id="64" name="lane-6-chip-3"/>
-          <p:cNvSpPr txBox="1"/>
-          <p:nvPr/>
-        </p:nvSpPr>
-        <p:spPr>
-          <a:xfrm>
-            <a:off x="5586984" y="4914900"/>
-            <a:ext cx="246888" cy="246888"/>
+            <a:schemeClr val="bg2"/>
+          </a:solidFill>
+          <a:ln/>
+        </p:spPr>
+      </p:sp>
+      <p:pic>
+        <p:nvPicPr>
+          <p:cNvPr id="84" name="lane-5-chip-2" descr="/Users/a/MAI/DID/presentation/assets/logos/openai.png">    </p:cNvPr>
+          <p:cNvPicPr>
+            <a:picLocks noChangeAspect="1"/>
+          </p:cNvPicPr>
+          <p:nvPr/>
+        </p:nvPicPr>
+        <p:blipFill>
+          <a:blip r:embed="rId28"/>
+          <a:stretch>
+            <a:fillRect/>
+          </a:stretch>
+        </p:blipFill>
+        <p:spPr>
+          <a:xfrm>
+            <a:off x="4585716" y="3529584"/>
+            <a:ext cx="173736" cy="173736"/>
+          </a:xfrm>
+          <a:prstGeom prst="rect">
+            <a:avLst/>
+          </a:prstGeom>
+        </p:spPr>
+      </p:pic>
+      <p:sp>
+        <p:nvSpPr>
+          <p:cNvPr id="85" name="lane-5-chip-3-tile"/>
+          <p:cNvSpPr/>
+          <p:nvPr/>
+        </p:nvSpPr>
+        <p:spPr>
+          <a:xfrm>
+            <a:off x="4837176" y="3488436"/>
+            <a:ext cx="256032" cy="256032"/>
           </a:xfrm>
           <a:prstGeom prst="roundRect">
             <a:avLst>
-              <a:gd name="adj" fmla="val 14815"/>
+              <a:gd name="adj" fmla="val 14286"/>
             </a:avLst>
           </a:prstGeom>
           <a:solidFill>
-            <a:schemeClr val="accent5"/>
-          </a:solidFill>
-          <a:ln/>
-        </p:spPr>
-        <p:txBody>
-          <a:bodyPr wrap="square" lIns="0" tIns="0" rIns="0" bIns="0" rtlCol="0" anchor="ctr"/>
-          <a:lstStyle/>
-          <a:p>
-            <a:pPr algn="ctr" indent="0" marL="0">
-              <a:buNone/>
-            </a:pPr>
-            <a:r>
-              <a:rPr lang="en-US" sz="1300" b="1" dirty="0">
-                <a:solidFill>
-                  <a:schemeClr val="bg1"/>
-                </a:solidFill>
-              </a:rPr>
-              <a:t>И</a:t>
-            </a:r>
-            <a:endParaRPr lang="en-US" sz="1300" dirty="0"/>
-          </a:p>
-        </p:txBody>
-      </p:sp>
-      <p:sp>
-        <p:nvSpPr>
-          <p:cNvPr id="65" name="lane-6-chip-4"/>
-          <p:cNvSpPr txBox="1"/>
-          <p:nvPr/>
-        </p:nvSpPr>
-        <p:spPr>
-          <a:xfrm>
-            <a:off x="5870448" y="4914900"/>
-            <a:ext cx="246888" cy="246888"/>
+            <a:schemeClr val="bg2"/>
+          </a:solidFill>
+          <a:ln/>
+        </p:spPr>
+      </p:sp>
+      <p:pic>
+        <p:nvPicPr>
+          <p:cNvPr id="86" name="lane-5-chip-3" descr="/Users/a/MAI/DID/presentation/assets/logos/claude.png">    </p:cNvPr>
+          <p:cNvPicPr>
+            <a:picLocks noChangeAspect="1"/>
+          </p:cNvPicPr>
+          <p:nvPr/>
+        </p:nvPicPr>
+        <p:blipFill>
+          <a:blip r:embed="rId29"/>
+          <a:stretch>
+            <a:fillRect/>
+          </a:stretch>
+        </p:blipFill>
+        <p:spPr>
+          <a:xfrm>
+            <a:off x="4878324" y="3529584"/>
+            <a:ext cx="173736" cy="173736"/>
+          </a:xfrm>
+          <a:prstGeom prst="rect">
+            <a:avLst/>
+          </a:prstGeom>
+        </p:spPr>
+      </p:pic>
+      <p:sp>
+        <p:nvSpPr>
+          <p:cNvPr id="87" name="lane-5-chip-4-tile"/>
+          <p:cNvSpPr/>
+          <p:nvPr/>
+        </p:nvSpPr>
+        <p:spPr>
+          <a:xfrm>
+            <a:off x="5129784" y="3488436"/>
+            <a:ext cx="256032" cy="256032"/>
           </a:xfrm>
           <a:prstGeom prst="roundRect">
             <a:avLst>
-              <a:gd name="adj" fmla="val 14815"/>
+              <a:gd name="adj" fmla="val 14286"/>
             </a:avLst>
           </a:prstGeom>
           <a:solidFill>
-            <a:schemeClr val="accent6"/>
-          </a:solidFill>
-          <a:ln/>
-        </p:spPr>
-        <p:txBody>
-          <a:bodyPr wrap="square" lIns="0" tIns="0" rIns="0" bIns="0" rtlCol="0" anchor="ctr"/>
-          <a:lstStyle/>
-          <a:p>
-            <a:pPr algn="ctr" indent="0" marL="0">
-              <a:buNone/>
-            </a:pPr>
-            <a:r>
-              <a:rPr lang="en-US" sz="1300" b="1" dirty="0">
-                <a:solidFill>
-                  <a:schemeClr val="bg1"/>
-                </a:solidFill>
-              </a:rPr>
-              <a:t>Р</a:t>
-            </a:r>
-            <a:endParaRPr lang="en-US" sz="1300" dirty="0"/>
-          </a:p>
-        </p:txBody>
-      </p:sp>
-      <p:sp>
-        <p:nvSpPr>
-          <p:cNvPr id="66" name="lane-6-chip-5"/>
+            <a:schemeClr val="bg2"/>
+          </a:solidFill>
+          <a:ln/>
+        </p:spPr>
+      </p:sp>
+      <p:pic>
+        <p:nvPicPr>
+          <p:cNvPr id="88" name="lane-5-chip-4" descr="/Users/a/MAI/DID/presentation/assets/logos/openai.png">    </p:cNvPr>
+          <p:cNvPicPr>
+            <a:picLocks noChangeAspect="1"/>
+          </p:cNvPicPr>
+          <p:nvPr/>
+        </p:nvPicPr>
+        <p:blipFill>
+          <a:blip r:embed="rId30"/>
+          <a:stretch>
+            <a:fillRect/>
+          </a:stretch>
+        </p:blipFill>
+        <p:spPr>
+          <a:xfrm>
+            <a:off x="5170932" y="3529584"/>
+            <a:ext cx="173736" cy="173736"/>
+          </a:xfrm>
+          <a:prstGeom prst="rect">
+            <a:avLst/>
+          </a:prstGeom>
+        </p:spPr>
+      </p:pic>
+      <p:sp>
+        <p:nvSpPr>
+          <p:cNvPr id="89" name="lane-5-chip-5"/>
           <p:cNvSpPr txBox="1"/>
           <p:nvPr/>
         </p:nvSpPr>
         <p:spPr>
           <a:xfrm>
-            <a:off x="6153912" y="4914900"/>
-            <a:ext cx="246888" cy="246888"/>
+            <a:off x="5422392" y="3488436"/>
+            <a:ext cx="256032" cy="256032"/>
           </a:xfrm>
           <a:prstGeom prst="roundRect">
             <a:avLst>
-              <a:gd name="adj" fmla="val 14815"/>
+              <a:gd name="adj" fmla="val 14286"/>
             </a:avLst>
           </a:prstGeom>
           <a:solidFill>
@@ -5891,35 +5947,94 @@
       </p:sp>
       <p:sp>
         <p:nvSpPr>
-          <p:cNvPr id="67" name="lane-6-result"/>
+          <p:cNvPr id="90" name="lane-5-result"/>
           <p:cNvSpPr txBox="1"/>
           <p:nvPr/>
         </p:nvSpPr>
         <p:spPr>
           <a:xfrm>
-            <a:off x="548640" y="5161788"/>
-            <a:ext cx="5852160" cy="246888"/>
-          </a:xfrm>
-          <a:prstGeom prst="rect">
-            <a:avLst/>
-          </a:prstGeom>
-          <a:noFill/>
-          <a:ln/>
-        </p:spPr>
-        <p:txBody>
-          <a:bodyPr wrap="square" lIns="0" tIns="0" rIns="0" bIns="0" rtlCol="0" anchor="ctr"/>
+            <a:off x="7315200" y="3447288"/>
+            <a:ext cx="4325112" cy="338328"/>
+          </a:xfrm>
+          <a:prstGeom prst="rect">
+            <a:avLst/>
+          </a:prstGeom>
+          <a:noFill/>
+          <a:ln/>
+        </p:spPr>
+        <p:txBody>
+          <a:bodyPr wrap="none" lIns="0" tIns="0" rIns="0" bIns="0" rtlCol="0" anchor="ctr"/>
           <a:lstStyle/>
           <a:p>
             <a:pPr algn="l" indent="0" marL="0">
               <a:buNone/>
             </a:pPr>
             <a:r>
-              <a:rPr lang="en-US" sz="1600" dirty="0">
+              <a:rPr lang="en-US" sz="1400" dirty="0">
                 <a:solidFill>
                   <a:schemeClr val="tx2"/>
                 </a:solidFill>
               </a:rPr>
-              <a:t>выигрыш не показан — честный отрицательный результат</a:t>
+              <a:t>выигрыш не показан — так и записано</a:t>
+            </a:r>
+            <a:endParaRPr lang="en-US" sz="1400" dirty="0"/>
+          </a:p>
+        </p:txBody>
+      </p:sp>
+      <p:sp>
+        <p:nvSpPr>
+          <p:cNvPr id="91" name="lane-6-rule"/>
+          <p:cNvSpPr/>
+          <p:nvPr/>
+        </p:nvSpPr>
+        <p:spPr>
+          <a:xfrm>
+            <a:off x="548640" y="3785616"/>
+            <a:ext cx="11091672" cy="0"/>
+          </a:xfrm>
+          <a:prstGeom prst="line">
+            <a:avLst/>
+          </a:prstGeom>
+          <a:noFill/>
+          <a:ln w="12700">
+            <a:solidFill>
+              <a:schemeClr val="bg2"/>
+            </a:solidFill>
+            <a:prstDash val="solid"/>
+          </a:ln>
+        </p:spPr>
+      </p:sp>
+      <p:sp>
+        <p:nvSpPr>
+          <p:cNvPr id="92" name="lane-6-name"/>
+          <p:cNvSpPr txBox="1"/>
+          <p:nvPr/>
+        </p:nvSpPr>
+        <p:spPr>
+          <a:xfrm>
+            <a:off x="548640" y="3785616"/>
+            <a:ext cx="3611880" cy="338328"/>
+          </a:xfrm>
+          <a:prstGeom prst="rect">
+            <a:avLst/>
+          </a:prstGeom>
+          <a:noFill/>
+          <a:ln/>
+        </p:spPr>
+        <p:txBody>
+          <a:bodyPr wrap="none" lIns="0" tIns="0" rIns="0" bIns="0" rtlCol="0" anchor="ctr"/>
+          <a:lstStyle/>
+          <a:p>
+            <a:pPr algn="l" indent="0" marL="0">
+              <a:buNone/>
+            </a:pPr>
+            <a:r>
+              <a:rPr lang="en-US" sz="1600" b="1" dirty="0">
+                <a:solidFill>
+                  <a:schemeClr val="tx1"/>
+                </a:solidFill>
+              </a:rPr>
+              <a:t>G2. Потеря положения в Gazebo</a:t>
             </a:r>
             <a:endParaRPr lang="en-US" sz="1600" dirty="0"/>
           </a:p>
@@ -5927,394 +6042,160 @@
       </p:sp>
       <p:sp>
         <p:nvSpPr>
-          <p:cNvPr id="68" name="decisions-head"/>
-          <p:cNvSpPr txBox="1"/>
-          <p:nvPr/>
-        </p:nvSpPr>
-        <p:spPr>
-          <a:xfrm>
-            <a:off x="6675120" y="1691640"/>
-            <a:ext cx="4965192" cy="274320"/>
-          </a:xfrm>
-          <a:prstGeom prst="rect">
-            <a:avLst/>
-          </a:prstGeom>
-          <a:noFill/>
-          <a:ln/>
-        </p:spPr>
-        <p:txBody>
-          <a:bodyPr wrap="square" lIns="0" tIns="0" rIns="0" bIns="0" rtlCol="0" anchor="ctr"/>
-          <a:lstStyle/>
-          <a:p>
-            <a:pPr algn="l" indent="0" marL="0">
-              <a:buNone/>
-            </a:pPr>
-            <a:r>
-              <a:rPr lang="en-US" sz="1600" b="1" dirty="0">
-                <a:solidFill>
-                  <a:schemeClr val="tx1"/>
-                </a:solidFill>
-              </a:rPr>
-              <a:t>Решения людей</a:t>
-            </a:r>
-            <a:endParaRPr lang="en-US" sz="1600" dirty="0"/>
-          </a:p>
-        </p:txBody>
-      </p:sp>
-      <p:sp>
-        <p:nvSpPr>
-          <p:cNvPr id="69" name="decision-1-chip"/>
-          <p:cNvSpPr txBox="1"/>
-          <p:nvPr/>
-        </p:nvSpPr>
-        <p:spPr>
-          <a:xfrm>
-            <a:off x="6675120" y="2080260"/>
-            <a:ext cx="246888" cy="246888"/>
+          <p:cNvPr id="93" name="lane-6-chip-1-tile"/>
+          <p:cNvSpPr/>
+          <p:nvPr/>
+        </p:nvSpPr>
+        <p:spPr>
+          <a:xfrm>
+            <a:off x="4251960" y="3826764"/>
+            <a:ext cx="256032" cy="256032"/>
           </a:xfrm>
           <a:prstGeom prst="roundRect">
             <a:avLst>
-              <a:gd name="adj" fmla="val 14815"/>
+              <a:gd name="adj" fmla="val 14286"/>
             </a:avLst>
           </a:prstGeom>
           <a:solidFill>
-            <a:schemeClr val="accent1"/>
-          </a:solidFill>
-          <a:ln/>
-        </p:spPr>
-        <p:txBody>
-          <a:bodyPr wrap="square" lIns="0" tIns="0" rIns="0" bIns="0" rtlCol="0" anchor="ctr"/>
-          <a:lstStyle/>
-          <a:p>
-            <a:pPr algn="ctr" indent="0" marL="0">
-              <a:buNone/>
-            </a:pPr>
-            <a:r>
-              <a:rPr lang="en-US" sz="1300" b="1" dirty="0">
-                <a:solidFill>
-                  <a:schemeClr val="bg1"/>
-                </a:solidFill>
-              </a:rPr>
-              <a:t>Ч</a:t>
-            </a:r>
-            <a:endParaRPr lang="en-US" sz="1300" dirty="0"/>
-          </a:p>
-        </p:txBody>
-      </p:sp>
-      <p:sp>
-        <p:nvSpPr>
-          <p:cNvPr id="70" name="decision-1-quote"/>
-          <p:cNvSpPr txBox="1"/>
-          <p:nvPr/>
-        </p:nvSpPr>
-        <p:spPr>
-          <a:xfrm>
-            <a:off x="7031736" y="2075688"/>
-            <a:ext cx="4608576" cy="493776"/>
-          </a:xfrm>
-          <a:prstGeom prst="rect">
-            <a:avLst/>
-          </a:prstGeom>
-          <a:noFill/>
-          <a:ln/>
-        </p:spPr>
-        <p:txBody>
-          <a:bodyPr wrap="square" lIns="0" tIns="0" rIns="0" bIns="0" rtlCol="0" anchor="ctr"/>
-          <a:lstStyle/>
-          <a:p>
-            <a:pPr algn="l" indent="0" marL="0">
-              <a:buNone/>
-            </a:pPr>
-            <a:r>
-              <a:rPr lang="en-US" sz="1600" b="1" dirty="0">
-                <a:solidFill>
-                  <a:schemeClr val="tx1"/>
-                </a:solidFill>
-              </a:rPr>
-              <a:t>«У нас не MVP, делаем в самом амбициозном виде»</a:t>
-            </a:r>
-            <a:endParaRPr lang="en-US" sz="1600" dirty="0"/>
-          </a:p>
-        </p:txBody>
-      </p:sp>
-      <p:sp>
-        <p:nvSpPr>
-          <p:cNvPr id="71" name="decision-1-out"/>
-          <p:cNvSpPr txBox="1"/>
-          <p:nvPr/>
-        </p:nvSpPr>
-        <p:spPr>
-          <a:xfrm>
-            <a:off x="7031736" y="2569464"/>
-            <a:ext cx="4608576" cy="219456"/>
-          </a:xfrm>
-          <a:prstGeom prst="rect">
-            <a:avLst/>
-          </a:prstGeom>
-          <a:noFill/>
-          <a:ln/>
-        </p:spPr>
-        <p:txBody>
-          <a:bodyPr wrap="square" lIns="0" tIns="0" rIns="0" bIns="0" rtlCol="0" anchor="ctr"/>
-          <a:lstStyle/>
-          <a:p>
-            <a:pPr algn="l" indent="0" marL="0">
-              <a:buNone/>
-            </a:pPr>
-            <a:r>
-              <a:rPr lang="en-US" sz="1300" dirty="0">
-                <a:solidFill>
-                  <a:schemeClr val="tx2"/>
-                </a:solidFill>
-              </a:rPr>
-              <a:t>не минимальная версия: два симулятора, 20+ опытов</a:t>
-            </a:r>
-            <a:endParaRPr lang="en-US" sz="1300" dirty="0"/>
-          </a:p>
-        </p:txBody>
-      </p:sp>
-      <p:sp>
-        <p:nvSpPr>
-          <p:cNvPr id="72" name="decision-2-chip"/>
-          <p:cNvSpPr txBox="1"/>
-          <p:nvPr/>
-        </p:nvSpPr>
-        <p:spPr>
-          <a:xfrm>
-            <a:off x="6675120" y="2899562"/>
-            <a:ext cx="246888" cy="246888"/>
+            <a:schemeClr val="bg2"/>
+          </a:solidFill>
+          <a:ln/>
+        </p:spPr>
+      </p:sp>
+      <p:pic>
+        <p:nvPicPr>
+          <p:cNvPr id="94" name="lane-6-chip-1" descr="/Users/a/MAI/DID/presentation/assets/logos/claude.png">    </p:cNvPr>
+          <p:cNvPicPr>
+            <a:picLocks noChangeAspect="1"/>
+          </p:cNvPicPr>
+          <p:nvPr/>
+        </p:nvPicPr>
+        <p:blipFill>
+          <a:blip r:embed="rId31"/>
+          <a:stretch>
+            <a:fillRect/>
+          </a:stretch>
+        </p:blipFill>
+        <p:spPr>
+          <a:xfrm>
+            <a:off x="4293108" y="3867912"/>
+            <a:ext cx="173736" cy="173736"/>
+          </a:xfrm>
+          <a:prstGeom prst="rect">
+            <a:avLst/>
+          </a:prstGeom>
+        </p:spPr>
+      </p:pic>
+      <p:sp>
+        <p:nvSpPr>
+          <p:cNvPr id="95" name="lane-6-chip-2-tile"/>
+          <p:cNvSpPr/>
+          <p:nvPr/>
+        </p:nvSpPr>
+        <p:spPr>
+          <a:xfrm>
+            <a:off x="4544568" y="3826764"/>
+            <a:ext cx="256032" cy="256032"/>
           </a:xfrm>
           <a:prstGeom prst="roundRect">
             <a:avLst>
-              <a:gd name="adj" fmla="val 14815"/>
+              <a:gd name="adj" fmla="val 14286"/>
             </a:avLst>
           </a:prstGeom>
           <a:solidFill>
-            <a:schemeClr val="accent1"/>
-          </a:solidFill>
-          <a:ln/>
-        </p:spPr>
-        <p:txBody>
-          <a:bodyPr wrap="square" lIns="0" tIns="0" rIns="0" bIns="0" rtlCol="0" anchor="ctr"/>
-          <a:lstStyle/>
-          <a:p>
-            <a:pPr algn="ctr" indent="0" marL="0">
-              <a:buNone/>
-            </a:pPr>
-            <a:r>
-              <a:rPr lang="en-US" sz="1300" b="1" dirty="0">
-                <a:solidFill>
-                  <a:schemeClr val="bg1"/>
-                </a:solidFill>
-              </a:rPr>
-              <a:t>Ч</a:t>
-            </a:r>
-            <a:endParaRPr lang="en-US" sz="1300" dirty="0"/>
-          </a:p>
-        </p:txBody>
-      </p:sp>
-      <p:sp>
-        <p:nvSpPr>
-          <p:cNvPr id="73" name="decision-2-quote"/>
-          <p:cNvSpPr txBox="1"/>
-          <p:nvPr/>
-        </p:nvSpPr>
-        <p:spPr>
-          <a:xfrm>
-            <a:off x="7031736" y="2894990"/>
-            <a:ext cx="4608576" cy="256032"/>
-          </a:xfrm>
-          <a:prstGeom prst="rect">
-            <a:avLst/>
-          </a:prstGeom>
-          <a:noFill/>
-          <a:ln/>
-        </p:spPr>
-        <p:txBody>
-          <a:bodyPr wrap="square" lIns="0" tIns="0" rIns="0" bIns="0" rtlCol="0" anchor="ctr"/>
-          <a:lstStyle/>
-          <a:p>
-            <a:pPr algn="l" indent="0" marL="0">
-              <a:buNone/>
-            </a:pPr>
-            <a:r>
-              <a:rPr lang="en-US" sz="1600" b="1" dirty="0">
-                <a:solidFill>
-                  <a:schemeClr val="tx1"/>
-                </a:solidFill>
-              </a:rPr>
-              <a:t>«Робот-учёный» — идея коллеги</a:t>
-            </a:r>
-            <a:endParaRPr lang="en-US" sz="1600" dirty="0"/>
-          </a:p>
-        </p:txBody>
-      </p:sp>
-      <p:sp>
-        <p:nvSpPr>
-          <p:cNvPr id="74" name="decision-2-out"/>
-          <p:cNvSpPr txBox="1"/>
-          <p:nvPr/>
-        </p:nvSpPr>
-        <p:spPr>
-          <a:xfrm>
-            <a:off x="7031736" y="3151022"/>
-            <a:ext cx="4608576" cy="219456"/>
-          </a:xfrm>
-          <a:prstGeom prst="rect">
-            <a:avLst/>
-          </a:prstGeom>
-          <a:noFill/>
-          <a:ln/>
-        </p:spPr>
-        <p:txBody>
-          <a:bodyPr wrap="square" lIns="0" tIns="0" rIns="0" bIns="0" rtlCol="0" anchor="ctr"/>
-          <a:lstStyle/>
-          <a:p>
-            <a:pPr algn="l" indent="0" marL="0">
-              <a:buNone/>
-            </a:pPr>
-            <a:r>
-              <a:rPr lang="en-US" sz="1300" dirty="0">
-                <a:solidFill>
-                  <a:schemeClr val="tx2"/>
-                </a:solidFill>
-              </a:rPr>
-              <a:t>верных выводов робота — 98,5%</a:t>
-            </a:r>
-            <a:endParaRPr lang="en-US" sz="1300" dirty="0"/>
-          </a:p>
-        </p:txBody>
-      </p:sp>
-      <p:sp>
-        <p:nvSpPr>
-          <p:cNvPr id="75" name="decision-3-chip"/>
-          <p:cNvSpPr txBox="1"/>
-          <p:nvPr/>
-        </p:nvSpPr>
-        <p:spPr>
-          <a:xfrm>
-            <a:off x="6675120" y="3481121"/>
-            <a:ext cx="246888" cy="246888"/>
+            <a:schemeClr val="bg2"/>
+          </a:solidFill>
+          <a:ln/>
+        </p:spPr>
+      </p:sp>
+      <p:pic>
+        <p:nvPicPr>
+          <p:cNvPr id="96" name="lane-6-chip-2" descr="/Users/a/MAI/DID/presentation/assets/logos/openai.png">    </p:cNvPr>
+          <p:cNvPicPr>
+            <a:picLocks noChangeAspect="1"/>
+          </p:cNvPicPr>
+          <p:nvPr/>
+        </p:nvPicPr>
+        <p:blipFill>
+          <a:blip r:embed="rId32"/>
+          <a:stretch>
+            <a:fillRect/>
+          </a:stretch>
+        </p:blipFill>
+        <p:spPr>
+          <a:xfrm>
+            <a:off x="4585716" y="3867912"/>
+            <a:ext cx="173736" cy="173736"/>
+          </a:xfrm>
+          <a:prstGeom prst="rect">
+            <a:avLst/>
+          </a:prstGeom>
+        </p:spPr>
+      </p:pic>
+      <p:sp>
+        <p:nvSpPr>
+          <p:cNvPr id="97" name="lane-6-chip-3-tile"/>
+          <p:cNvSpPr/>
+          <p:nvPr/>
+        </p:nvSpPr>
+        <p:spPr>
+          <a:xfrm>
+            <a:off x="4837176" y="3826764"/>
+            <a:ext cx="256032" cy="256032"/>
           </a:xfrm>
           <a:prstGeom prst="roundRect">
             <a:avLst>
-              <a:gd name="adj" fmla="val 14815"/>
+              <a:gd name="adj" fmla="val 14286"/>
             </a:avLst>
           </a:prstGeom>
           <a:solidFill>
-            <a:schemeClr val="accent1"/>
-          </a:solidFill>
-          <a:ln/>
-        </p:spPr>
-        <p:txBody>
-          <a:bodyPr wrap="square" lIns="0" tIns="0" rIns="0" bIns="0" rtlCol="0" anchor="ctr"/>
-          <a:lstStyle/>
-          <a:p>
-            <a:pPr algn="ctr" indent="0" marL="0">
-              <a:buNone/>
-            </a:pPr>
-            <a:r>
-              <a:rPr lang="en-US" sz="1300" b="1" dirty="0">
-                <a:solidFill>
-                  <a:schemeClr val="bg1"/>
-                </a:solidFill>
-              </a:rPr>
-              <a:t>Ч</a:t>
-            </a:r>
-            <a:endParaRPr lang="en-US" sz="1300" dirty="0"/>
-          </a:p>
-        </p:txBody>
-      </p:sp>
-      <p:sp>
-        <p:nvSpPr>
-          <p:cNvPr id="76" name="decision-3-quote"/>
+            <a:schemeClr val="bg2"/>
+          </a:solidFill>
+          <a:ln/>
+        </p:spPr>
+      </p:sp>
+      <p:pic>
+        <p:nvPicPr>
+          <p:cNvPr id="98" name="lane-6-chip-3" descr="/Users/a/MAI/DID/presentation/assets/logos/claude.png">    </p:cNvPr>
+          <p:cNvPicPr>
+            <a:picLocks noChangeAspect="1"/>
+          </p:cNvPicPr>
+          <p:nvPr/>
+        </p:nvPicPr>
+        <p:blipFill>
+          <a:blip r:embed="rId33"/>
+          <a:stretch>
+            <a:fillRect/>
+          </a:stretch>
+        </p:blipFill>
+        <p:spPr>
+          <a:xfrm>
+            <a:off x="4878324" y="3867912"/>
+            <a:ext cx="173736" cy="173736"/>
+          </a:xfrm>
+          <a:prstGeom prst="rect">
+            <a:avLst/>
+          </a:prstGeom>
+        </p:spPr>
+      </p:pic>
+      <p:sp>
+        <p:nvSpPr>
+          <p:cNvPr id="99" name="lane-6-chip-4"/>
           <p:cNvSpPr txBox="1"/>
           <p:nvPr/>
         </p:nvSpPr>
         <p:spPr>
           <a:xfrm>
-            <a:off x="7031736" y="3476549"/>
-            <a:ext cx="4608576" cy="256032"/>
-          </a:xfrm>
-          <a:prstGeom prst="rect">
-            <a:avLst/>
-          </a:prstGeom>
-          <a:noFill/>
-          <a:ln/>
-        </p:spPr>
-        <p:txBody>
-          <a:bodyPr wrap="square" lIns="0" tIns="0" rIns="0" bIns="0" rtlCol="0" anchor="ctr"/>
-          <a:lstStyle/>
-          <a:p>
-            <a:pPr algn="l" indent="0" marL="0">
-              <a:buNone/>
-            </a:pPr>
-            <a:r>
-              <a:rPr lang="en-US" sz="1600" b="1" dirty="0">
-                <a:solidFill>
-                  <a:schemeClr val="tx1"/>
-                </a:solidFill>
-              </a:rPr>
-              <a:t>«Исследователи не пишут код»</a:t>
-            </a:r>
-            <a:endParaRPr lang="en-US" sz="1600" dirty="0"/>
-          </a:p>
-        </p:txBody>
-      </p:sp>
-      <p:sp>
-        <p:nvSpPr>
-          <p:cNvPr id="77" name="decision-3-out"/>
-          <p:cNvSpPr txBox="1"/>
-          <p:nvPr/>
-        </p:nvSpPr>
-        <p:spPr>
-          <a:xfrm>
-            <a:off x="7031736" y="3732581"/>
-            <a:ext cx="4608576" cy="219456"/>
-          </a:xfrm>
-          <a:prstGeom prst="rect">
-            <a:avLst/>
-          </a:prstGeom>
-          <a:noFill/>
-          <a:ln/>
-        </p:spPr>
-        <p:txBody>
-          <a:bodyPr wrap="square" lIns="0" tIns="0" rIns="0" bIns="0" rtlCol="0" anchor="ctr"/>
-          <a:lstStyle/>
-          <a:p>
-            <a:pPr algn="l" indent="0" marL="0">
-              <a:buNone/>
-            </a:pPr>
-            <a:r>
-              <a:rPr lang="en-US" sz="1300" dirty="0">
-                <a:solidFill>
-                  <a:schemeClr val="tx2"/>
-                </a:solidFill>
-              </a:rPr>
-              <a:t>в их коде ревью нашло 7 ошибок</a:t>
-            </a:r>
-            <a:endParaRPr lang="en-US" sz="1300" dirty="0"/>
-          </a:p>
-        </p:txBody>
-      </p:sp>
-      <p:sp>
-        <p:nvSpPr>
-          <p:cNvPr id="78" name="decision-4-chip"/>
-          <p:cNvSpPr txBox="1"/>
-          <p:nvPr/>
-        </p:nvSpPr>
-        <p:spPr>
-          <a:xfrm>
-            <a:off x="6675120" y="4062679"/>
-            <a:ext cx="246888" cy="246888"/>
+            <a:off x="5129784" y="3826764"/>
+            <a:ext cx="256032" cy="256032"/>
           </a:xfrm>
           <a:prstGeom prst="roundRect">
             <a:avLst>
-              <a:gd name="adj" fmla="val 14815"/>
+              <a:gd name="adj" fmla="val 14286"/>
             </a:avLst>
           </a:prstGeom>
           <a:solidFill>
-            <a:schemeClr val="accent1"/>
+            <a:schemeClr val="accent3"/>
           </a:solidFill>
           <a:ln/>
         </p:spPr>
@@ -6331,7 +6212,7 @@
                   <a:schemeClr val="bg1"/>
                 </a:solidFill>
               </a:rPr>
-              <a:t>Ч</a:t>
+              <a:t>✓</a:t>
             </a:r>
             <a:endParaRPr lang="en-US" sz="1300" dirty="0"/>
           </a:p>
@@ -6339,35 +6220,94 @@
       </p:sp>
       <p:sp>
         <p:nvSpPr>
-          <p:cNvPr id="79" name="decision-4-quote"/>
+          <p:cNvPr id="100" name="lane-6-result"/>
           <p:cNvSpPr txBox="1"/>
           <p:nvPr/>
         </p:nvSpPr>
         <p:spPr>
           <a:xfrm>
-            <a:off x="7031736" y="4058107"/>
-            <a:ext cx="4608576" cy="256032"/>
-          </a:xfrm>
-          <a:prstGeom prst="rect">
-            <a:avLst/>
-          </a:prstGeom>
-          <a:noFill/>
-          <a:ln/>
-        </p:spPr>
-        <p:txBody>
-          <a:bodyPr wrap="square" lIns="0" tIns="0" rIns="0" bIns="0" rtlCol="0" anchor="ctr"/>
+            <a:off x="7315200" y="3785616"/>
+            <a:ext cx="4325112" cy="338328"/>
+          </a:xfrm>
+          <a:prstGeom prst="rect">
+            <a:avLst/>
+          </a:prstGeom>
+          <a:noFill/>
+          <a:ln/>
+        </p:spPr>
+        <p:txBody>
+          <a:bodyPr wrap="none" lIns="0" tIns="0" rIns="0" bIns="0" rtlCol="0" anchor="ctr"/>
           <a:lstStyle/>
           <a:p>
             <a:pPr algn="l" indent="0" marL="0">
               <a:buNone/>
             </a:pPr>
             <a:r>
+              <a:rPr lang="en-US" sz="1400" dirty="0">
+                <a:solidFill>
+                  <a:schemeClr val="tx2"/>
+                </a:solidFill>
+              </a:rPr>
+              <a:t>возврат на базу в Gazebo: 8 из 9 → 7 из 7</a:t>
+            </a:r>
+            <a:endParaRPr lang="en-US" sz="1400" dirty="0"/>
+          </a:p>
+        </p:txBody>
+      </p:sp>
+      <p:sp>
+        <p:nvSpPr>
+          <p:cNvPr id="101" name="lane-7-rule"/>
+          <p:cNvSpPr/>
+          <p:nvPr/>
+        </p:nvSpPr>
+        <p:spPr>
+          <a:xfrm>
+            <a:off x="548640" y="4123944"/>
+            <a:ext cx="11091672" cy="0"/>
+          </a:xfrm>
+          <a:prstGeom prst="line">
+            <a:avLst/>
+          </a:prstGeom>
+          <a:noFill/>
+          <a:ln w="12700">
+            <a:solidFill>
+              <a:schemeClr val="bg2"/>
+            </a:solidFill>
+            <a:prstDash val="solid"/>
+          </a:ln>
+        </p:spPr>
+      </p:sp>
+      <p:sp>
+        <p:nvSpPr>
+          <p:cNvPr id="102" name="lane-7-name"/>
+          <p:cNvSpPr txBox="1"/>
+          <p:nvPr/>
+        </p:nvSpPr>
+        <p:spPr>
+          <a:xfrm>
+            <a:off x="548640" y="4123944"/>
+            <a:ext cx="3611880" cy="338328"/>
+          </a:xfrm>
+          <a:prstGeom prst="rect">
+            <a:avLst/>
+          </a:prstGeom>
+          <a:noFill/>
+          <a:ln/>
+        </p:spPr>
+        <p:txBody>
+          <a:bodyPr wrap="none" lIns="0" tIns="0" rIns="0" bIns="0" rtlCol="0" anchor="ctr"/>
+          <a:lstStyle/>
+          <a:p>
+            <a:pPr algn="l" indent="0" marL="0">
+              <a:buNone/>
+            </a:pPr>
+            <a:r>
               <a:rPr lang="en-US" sz="1600" b="1" dirty="0">
                 <a:solidFill>
                   <a:schemeClr val="tx1"/>
                 </a:solidFill>
               </a:rPr>
-              <a:t>«Главная цель — результативный робот»</a:t>
+              <a:t>P1. Где робот теряет очки</a:t>
             </a:r>
             <a:endParaRPr lang="en-US" sz="1600" dirty="0"/>
           </a:p>
@@ -6375,170 +6315,160 @@
       </p:sp>
       <p:sp>
         <p:nvSpPr>
-          <p:cNvPr id="80" name="decision-4-out"/>
-          <p:cNvSpPr txBox="1"/>
-          <p:nvPr/>
-        </p:nvSpPr>
-        <p:spPr>
-          <a:xfrm>
-            <a:off x="7031736" y="4314139"/>
-            <a:ext cx="4608576" cy="219456"/>
-          </a:xfrm>
-          <a:prstGeom prst="rect">
-            <a:avLst/>
-          </a:prstGeom>
-          <a:noFill/>
-          <a:ln/>
-        </p:spPr>
-        <p:txBody>
-          <a:bodyPr wrap="square" lIns="0" tIns="0" rIns="0" bIns="0" rtlCol="0" anchor="ctr"/>
-          <a:lstStyle/>
-          <a:p>
-            <a:pPr algn="l" indent="0" marL="0">
-              <a:buNone/>
-            </a:pPr>
-            <a:r>
-              <a:rPr lang="en-US" sz="1300" dirty="0">
-                <a:solidFill>
-                  <a:schemeClr val="tx2"/>
-                </a:solidFill>
-              </a:rPr>
-              <a:t>разбор потерь очков: +6 очков на трудном уровне</a:t>
-            </a:r>
-            <a:endParaRPr lang="en-US" sz="1300" dirty="0"/>
-          </a:p>
-        </p:txBody>
-      </p:sp>
-      <p:sp>
-        <p:nvSpPr>
-          <p:cNvPr id="81" name="decision-5-chip"/>
-          <p:cNvSpPr txBox="1"/>
-          <p:nvPr/>
-        </p:nvSpPr>
-        <p:spPr>
-          <a:xfrm>
-            <a:off x="6675120" y="4644238"/>
-            <a:ext cx="246888" cy="246888"/>
+          <p:cNvPr id="103" name="lane-7-chip-1-tile"/>
+          <p:cNvSpPr/>
+          <p:nvPr/>
+        </p:nvSpPr>
+        <p:spPr>
+          <a:xfrm>
+            <a:off x="4251960" y="4165092"/>
+            <a:ext cx="256032" cy="256032"/>
           </a:xfrm>
           <a:prstGeom prst="roundRect">
             <a:avLst>
-              <a:gd name="adj" fmla="val 14815"/>
+              <a:gd name="adj" fmla="val 14286"/>
             </a:avLst>
           </a:prstGeom>
           <a:solidFill>
-            <a:schemeClr val="accent1"/>
-          </a:solidFill>
-          <a:ln/>
-        </p:spPr>
-        <p:txBody>
-          <a:bodyPr wrap="square" lIns="0" tIns="0" rIns="0" bIns="0" rtlCol="0" anchor="ctr"/>
-          <a:lstStyle/>
-          <a:p>
-            <a:pPr algn="ctr" indent="0" marL="0">
-              <a:buNone/>
-            </a:pPr>
-            <a:r>
-              <a:rPr lang="en-US" sz="1300" b="1" dirty="0">
-                <a:solidFill>
-                  <a:schemeClr val="bg1"/>
-                </a:solidFill>
-              </a:rPr>
-              <a:t>Ч</a:t>
-            </a:r>
-            <a:endParaRPr lang="en-US" sz="1300" dirty="0"/>
-          </a:p>
-        </p:txBody>
-      </p:sp>
-      <p:sp>
-        <p:nvSpPr>
-          <p:cNvPr id="82" name="decision-5-quote"/>
-          <p:cNvSpPr txBox="1"/>
-          <p:nvPr/>
-        </p:nvSpPr>
-        <p:spPr>
-          <a:xfrm>
-            <a:off x="7031736" y="4639666"/>
-            <a:ext cx="4608576" cy="256032"/>
-          </a:xfrm>
-          <a:prstGeom prst="rect">
-            <a:avLst/>
-          </a:prstGeom>
-          <a:noFill/>
-          <a:ln/>
-        </p:spPr>
-        <p:txBody>
-          <a:bodyPr wrap="square" lIns="0" tIns="0" rIns="0" bIns="0" rtlCol="0" anchor="ctr"/>
-          <a:lstStyle/>
-          <a:p>
-            <a:pPr algn="l" indent="0" marL="0">
-              <a:buNone/>
-            </a:pPr>
-            <a:r>
-              <a:rPr lang="en-US" sz="1600" b="1" dirty="0">
-                <a:solidFill>
-                  <a:schemeClr val="tx1"/>
-                </a:solidFill>
-              </a:rPr>
-              <a:t>«Не два варианта агента, а больше»</a:t>
-            </a:r>
-            <a:endParaRPr lang="en-US" sz="1600" dirty="0"/>
-          </a:p>
-        </p:txBody>
-      </p:sp>
-      <p:sp>
-        <p:nvSpPr>
-          <p:cNvPr id="83" name="decision-5-out"/>
-          <p:cNvSpPr txBox="1"/>
-          <p:nvPr/>
-        </p:nvSpPr>
-        <p:spPr>
-          <a:xfrm>
-            <a:off x="7031736" y="4895698"/>
-            <a:ext cx="4608576" cy="219456"/>
-          </a:xfrm>
-          <a:prstGeom prst="rect">
-            <a:avLst/>
-          </a:prstGeom>
-          <a:noFill/>
-          <a:ln/>
-        </p:spPr>
-        <p:txBody>
-          <a:bodyPr wrap="square" lIns="0" tIns="0" rIns="0" bIns="0" rtlCol="0" anchor="ctr"/>
-          <a:lstStyle/>
-          <a:p>
-            <a:pPr algn="l" indent="0" marL="0">
-              <a:buNone/>
-            </a:pPr>
-            <a:r>
-              <a:rPr lang="en-US" sz="1300" dirty="0">
-                <a:solidFill>
-                  <a:schemeClr val="tx2"/>
-                </a:solidFill>
-              </a:rPr>
-              <a:t>шесть устройств агента и потолок 92,5 очка</a:t>
-            </a:r>
-            <a:endParaRPr lang="en-US" sz="1300" dirty="0"/>
-          </a:p>
-        </p:txBody>
-      </p:sp>
-      <p:sp>
-        <p:nvSpPr>
-          <p:cNvPr id="84" name="decision-6-chip"/>
-          <p:cNvSpPr txBox="1"/>
-          <p:nvPr/>
-        </p:nvSpPr>
-        <p:spPr>
-          <a:xfrm>
-            <a:off x="6675120" y="5225796"/>
-            <a:ext cx="246888" cy="246888"/>
+            <a:schemeClr val="bg2"/>
+          </a:solidFill>
+          <a:ln/>
+        </p:spPr>
+      </p:sp>
+      <p:pic>
+        <p:nvPicPr>
+          <p:cNvPr id="104" name="lane-7-chip-1" descr="/Users/a/MAI/DID/presentation/assets/logos/claude.png">    </p:cNvPr>
+          <p:cNvPicPr>
+            <a:picLocks noChangeAspect="1"/>
+          </p:cNvPicPr>
+          <p:nvPr/>
+        </p:nvPicPr>
+        <p:blipFill>
+          <a:blip r:embed="rId34"/>
+          <a:stretch>
+            <a:fillRect/>
+          </a:stretch>
+        </p:blipFill>
+        <p:spPr>
+          <a:xfrm>
+            <a:off x="4293108" y="4206240"/>
+            <a:ext cx="173736" cy="173736"/>
+          </a:xfrm>
+          <a:prstGeom prst="rect">
+            <a:avLst/>
+          </a:prstGeom>
+        </p:spPr>
+      </p:pic>
+      <p:sp>
+        <p:nvSpPr>
+          <p:cNvPr id="105" name="lane-7-chip-2-tile"/>
+          <p:cNvSpPr/>
+          <p:nvPr/>
+        </p:nvSpPr>
+        <p:spPr>
+          <a:xfrm>
+            <a:off x="4544568" y="4165092"/>
+            <a:ext cx="256032" cy="256032"/>
           </a:xfrm>
           <a:prstGeom prst="roundRect">
             <a:avLst>
-              <a:gd name="adj" fmla="val 14815"/>
+              <a:gd name="adj" fmla="val 14286"/>
             </a:avLst>
           </a:prstGeom>
           <a:solidFill>
-            <a:schemeClr val="accent1"/>
+            <a:schemeClr val="bg2"/>
+          </a:solidFill>
+          <a:ln/>
+        </p:spPr>
+      </p:sp>
+      <p:pic>
+        <p:nvPicPr>
+          <p:cNvPr id="106" name="lane-7-chip-2" descr="/Users/a/MAI/DID/presentation/assets/logos/openai.png">    </p:cNvPr>
+          <p:cNvPicPr>
+            <a:picLocks noChangeAspect="1"/>
+          </p:cNvPicPr>
+          <p:nvPr/>
+        </p:nvPicPr>
+        <p:blipFill>
+          <a:blip r:embed="rId35"/>
+          <a:stretch>
+            <a:fillRect/>
+          </a:stretch>
+        </p:blipFill>
+        <p:spPr>
+          <a:xfrm>
+            <a:off x="4585716" y="4206240"/>
+            <a:ext cx="173736" cy="173736"/>
+          </a:xfrm>
+          <a:prstGeom prst="rect">
+            <a:avLst/>
+          </a:prstGeom>
+        </p:spPr>
+      </p:pic>
+      <p:sp>
+        <p:nvSpPr>
+          <p:cNvPr id="107" name="lane-7-chip-3-tile"/>
+          <p:cNvSpPr/>
+          <p:nvPr/>
+        </p:nvSpPr>
+        <p:spPr>
+          <a:xfrm>
+            <a:off x="4837176" y="4165092"/>
+            <a:ext cx="256032" cy="256032"/>
+          </a:xfrm>
+          <a:prstGeom prst="roundRect">
+            <a:avLst>
+              <a:gd name="adj" fmla="val 14286"/>
+            </a:avLst>
+          </a:prstGeom>
+          <a:solidFill>
+            <a:schemeClr val="bg2"/>
+          </a:solidFill>
+          <a:ln/>
+        </p:spPr>
+      </p:sp>
+      <p:pic>
+        <p:nvPicPr>
+          <p:cNvPr id="108" name="lane-7-chip-3" descr="/Users/a/MAI/DID/presentation/assets/logos/claude.png">    </p:cNvPr>
+          <p:cNvPicPr>
+            <a:picLocks noChangeAspect="1"/>
+          </p:cNvPicPr>
+          <p:nvPr/>
+        </p:nvPicPr>
+        <p:blipFill>
+          <a:blip r:embed="rId36"/>
+          <a:stretch>
+            <a:fillRect/>
+          </a:stretch>
+        </p:blipFill>
+        <p:spPr>
+          <a:xfrm>
+            <a:off x="4878324" y="4206240"/>
+            <a:ext cx="173736" cy="173736"/>
+          </a:xfrm>
+          <a:prstGeom prst="rect">
+            <a:avLst/>
+          </a:prstGeom>
+        </p:spPr>
+      </p:pic>
+      <p:sp>
+        <p:nvSpPr>
+          <p:cNvPr id="109" name="lane-7-chip-4"/>
+          <p:cNvSpPr txBox="1"/>
+          <p:nvPr/>
+        </p:nvSpPr>
+        <p:spPr>
+          <a:xfrm>
+            <a:off x="5129784" y="4165092"/>
+            <a:ext cx="256032" cy="256032"/>
+          </a:xfrm>
+          <a:prstGeom prst="roundRect">
+            <a:avLst>
+              <a:gd name="adj" fmla="val 14286"/>
+            </a:avLst>
+          </a:prstGeom>
+          <a:solidFill>
+            <a:schemeClr val="accent3"/>
           </a:solidFill>
           <a:ln/>
         </p:spPr>
@@ -6555,7 +6485,7 @@
                   <a:schemeClr val="bg1"/>
                 </a:solidFill>
               </a:rPr>
-              <a:t>Ч</a:t>
+              <a:t>✓</a:t>
             </a:r>
             <a:endParaRPr lang="en-US" sz="1300" dirty="0"/>
           </a:p>
@@ -6563,35 +6493,367 @@
       </p:sp>
       <p:sp>
         <p:nvSpPr>
-          <p:cNvPr id="85" name="decision-6-quote"/>
+          <p:cNvPr id="110" name="lane-7-result"/>
           <p:cNvSpPr txBox="1"/>
           <p:nvPr/>
         </p:nvSpPr>
         <p:spPr>
           <a:xfrm>
-            <a:off x="7031736" y="5221224"/>
-            <a:ext cx="4608576" cy="256032"/>
-          </a:xfrm>
-          <a:prstGeom prst="rect">
-            <a:avLst/>
-          </a:prstGeom>
-          <a:noFill/>
+            <a:off x="7315200" y="4123944"/>
+            <a:ext cx="4325112" cy="338328"/>
+          </a:xfrm>
+          <a:prstGeom prst="rect">
+            <a:avLst/>
+          </a:prstGeom>
+          <a:noFill/>
+          <a:ln/>
+        </p:spPr>
+        <p:txBody>
+          <a:bodyPr wrap="none" lIns="0" tIns="0" rIns="0" bIns="0" rtlCol="0" anchor="ctr"/>
+          <a:lstStyle/>
+          <a:p>
+            <a:pPr algn="l" indent="0" marL="0">
+              <a:buNone/>
+            </a:pPr>
+            <a:r>
+              <a:rPr lang="en-US" sz="1400" dirty="0">
+                <a:solidFill>
+                  <a:schemeClr val="tx2"/>
+                </a:solidFill>
+              </a:rPr>
+              <a:t>пережидает сбой датчика: +6,4 очка</a:t>
+            </a:r>
+            <a:endParaRPr lang="en-US" sz="1400" dirty="0"/>
+          </a:p>
+        </p:txBody>
+      </p:sp>
+      <p:sp>
+        <p:nvSpPr>
+          <p:cNvPr id="111" name="lane-8-rule"/>
+          <p:cNvSpPr/>
+          <p:nvPr/>
+        </p:nvSpPr>
+        <p:spPr>
+          <a:xfrm>
+            <a:off x="548640" y="4462272"/>
+            <a:ext cx="11091672" cy="0"/>
+          </a:xfrm>
+          <a:prstGeom prst="line">
+            <a:avLst/>
+          </a:prstGeom>
+          <a:noFill/>
+          <a:ln w="12700">
+            <a:solidFill>
+              <a:schemeClr val="bg2"/>
+            </a:solidFill>
+            <a:prstDash val="solid"/>
+          </a:ln>
+        </p:spPr>
+      </p:sp>
+      <p:sp>
+        <p:nvSpPr>
+          <p:cNvPr id="112" name="lane-8-name"/>
+          <p:cNvSpPr txBox="1"/>
+          <p:nvPr/>
+        </p:nvSpPr>
+        <p:spPr>
+          <a:xfrm>
+            <a:off x="548640" y="4462272"/>
+            <a:ext cx="3611880" cy="338328"/>
+          </a:xfrm>
+          <a:prstGeom prst="rect">
+            <a:avLst/>
+          </a:prstGeom>
+          <a:noFill/>
+          <a:ln/>
+        </p:spPr>
+        <p:txBody>
+          <a:bodyPr wrap="none" lIns="0" tIns="0" rIns="0" bIns="0" rtlCol="0" anchor="ctr"/>
+          <a:lstStyle/>
+          <a:p>
+            <a:pPr algn="l" indent="0" marL="0">
+              <a:buNone/>
+            </a:pPr>
+            <a:r>
+              <a:rPr lang="en-US" sz="1600" b="1" dirty="0">
+                <a:solidFill>
+                  <a:schemeClr val="tx1"/>
+                </a:solidFill>
+              </a:rPr>
+              <a:t>A1. Новые схемы агента</a:t>
+            </a:r>
+            <a:endParaRPr lang="en-US" sz="1600" dirty="0"/>
+          </a:p>
+        </p:txBody>
+      </p:sp>
+      <p:sp>
+        <p:nvSpPr>
+          <p:cNvPr id="113" name="lane-8-chip-1-tile"/>
+          <p:cNvSpPr/>
+          <p:nvPr/>
+        </p:nvSpPr>
+        <p:spPr>
+          <a:xfrm>
+            <a:off x="4251960" y="4503420"/>
+            <a:ext cx="256032" cy="256032"/>
+          </a:xfrm>
+          <a:prstGeom prst="roundRect">
+            <a:avLst>
+              <a:gd name="adj" fmla="val 14286"/>
+            </a:avLst>
+          </a:prstGeom>
+          <a:solidFill>
+            <a:schemeClr val="bg2"/>
+          </a:solidFill>
+          <a:ln/>
+        </p:spPr>
+      </p:sp>
+      <p:pic>
+        <p:nvPicPr>
+          <p:cNvPr id="114" name="lane-8-chip-1" descr="/Users/a/MAI/DID/presentation/assets/logos/claude.png">    </p:cNvPr>
+          <p:cNvPicPr>
+            <a:picLocks noChangeAspect="1"/>
+          </p:cNvPicPr>
+          <p:nvPr/>
+        </p:nvPicPr>
+        <p:blipFill>
+          <a:blip r:embed="rId37"/>
+          <a:stretch>
+            <a:fillRect/>
+          </a:stretch>
+        </p:blipFill>
+        <p:spPr>
+          <a:xfrm>
+            <a:off x="4293108" y="4544568"/>
+            <a:ext cx="173736" cy="173736"/>
+          </a:xfrm>
+          <a:prstGeom prst="rect">
+            <a:avLst/>
+          </a:prstGeom>
+        </p:spPr>
+      </p:pic>
+      <p:sp>
+        <p:nvSpPr>
+          <p:cNvPr id="115" name="lane-8-chip-2-tile"/>
+          <p:cNvSpPr/>
+          <p:nvPr/>
+        </p:nvSpPr>
+        <p:spPr>
+          <a:xfrm>
+            <a:off x="4544568" y="4503420"/>
+            <a:ext cx="256032" cy="256032"/>
+          </a:xfrm>
+          <a:prstGeom prst="roundRect">
+            <a:avLst>
+              <a:gd name="adj" fmla="val 14286"/>
+            </a:avLst>
+          </a:prstGeom>
+          <a:solidFill>
+            <a:schemeClr val="bg2"/>
+          </a:solidFill>
+          <a:ln/>
+        </p:spPr>
+      </p:sp>
+      <p:pic>
+        <p:nvPicPr>
+          <p:cNvPr id="116" name="lane-8-chip-2" descr="/Users/a/MAI/DID/presentation/assets/logos/openai.png">    </p:cNvPr>
+          <p:cNvPicPr>
+            <a:picLocks noChangeAspect="1"/>
+          </p:cNvPicPr>
+          <p:nvPr/>
+        </p:nvPicPr>
+        <p:blipFill>
+          <a:blip r:embed="rId38"/>
+          <a:stretch>
+            <a:fillRect/>
+          </a:stretch>
+        </p:blipFill>
+        <p:spPr>
+          <a:xfrm>
+            <a:off x="4585716" y="4544568"/>
+            <a:ext cx="173736" cy="173736"/>
+          </a:xfrm>
+          <a:prstGeom prst="rect">
+            <a:avLst/>
+          </a:prstGeom>
+        </p:spPr>
+      </p:pic>
+      <p:sp>
+        <p:nvSpPr>
+          <p:cNvPr id="117" name="lane-8-chip-3-tile"/>
+          <p:cNvSpPr/>
+          <p:nvPr/>
+        </p:nvSpPr>
+        <p:spPr>
+          <a:xfrm>
+            <a:off x="4837176" y="4503420"/>
+            <a:ext cx="256032" cy="256032"/>
+          </a:xfrm>
+          <a:prstGeom prst="roundRect">
+            <a:avLst>
+              <a:gd name="adj" fmla="val 14286"/>
+            </a:avLst>
+          </a:prstGeom>
+          <a:solidFill>
+            <a:schemeClr val="bg2"/>
+          </a:solidFill>
+          <a:ln/>
+        </p:spPr>
+      </p:sp>
+      <p:pic>
+        <p:nvPicPr>
+          <p:cNvPr id="118" name="lane-8-chip-3" descr="/Users/a/MAI/DID/presentation/assets/logos/claude.png">    </p:cNvPr>
+          <p:cNvPicPr>
+            <a:picLocks noChangeAspect="1"/>
+          </p:cNvPicPr>
+          <p:nvPr/>
+        </p:nvPicPr>
+        <p:blipFill>
+          <a:blip r:embed="rId39"/>
+          <a:stretch>
+            <a:fillRect/>
+          </a:stretch>
+        </p:blipFill>
+        <p:spPr>
+          <a:xfrm>
+            <a:off x="4878324" y="4544568"/>
+            <a:ext cx="173736" cy="173736"/>
+          </a:xfrm>
+          <a:prstGeom prst="rect">
+            <a:avLst/>
+          </a:prstGeom>
+        </p:spPr>
+      </p:pic>
+      <p:sp>
+        <p:nvSpPr>
+          <p:cNvPr id="119" name="lane-8-chip-4"/>
+          <p:cNvSpPr txBox="1"/>
+          <p:nvPr/>
+        </p:nvSpPr>
+        <p:spPr>
+          <a:xfrm>
+            <a:off x="5129784" y="4503420"/>
+            <a:ext cx="256032" cy="256032"/>
+          </a:xfrm>
+          <a:prstGeom prst="roundRect">
+            <a:avLst>
+              <a:gd name="adj" fmla="val 14286"/>
+            </a:avLst>
+          </a:prstGeom>
+          <a:solidFill>
+            <a:schemeClr val="accent3"/>
+          </a:solidFill>
           <a:ln/>
         </p:spPr>
         <p:txBody>
           <a:bodyPr wrap="square" lIns="0" tIns="0" rIns="0" bIns="0" rtlCol="0" anchor="ctr"/>
           <a:lstStyle/>
           <a:p>
+            <a:pPr algn="ctr" indent="0" marL="0">
+              <a:buNone/>
+            </a:pPr>
+            <a:r>
+              <a:rPr lang="en-US" sz="1300" b="1" dirty="0">
+                <a:solidFill>
+                  <a:schemeClr val="bg1"/>
+                </a:solidFill>
+              </a:rPr>
+              <a:t>✓</a:t>
+            </a:r>
+            <a:endParaRPr lang="en-US" sz="1300" dirty="0"/>
+          </a:p>
+        </p:txBody>
+      </p:sp>
+      <p:sp>
+        <p:nvSpPr>
+          <p:cNvPr id="120" name="lane-8-result"/>
+          <p:cNvSpPr txBox="1"/>
+          <p:nvPr/>
+        </p:nvSpPr>
+        <p:spPr>
+          <a:xfrm>
+            <a:off x="7315200" y="4462272"/>
+            <a:ext cx="4325112" cy="338328"/>
+          </a:xfrm>
+          <a:prstGeom prst="rect">
+            <a:avLst/>
+          </a:prstGeom>
+          <a:noFill/>
+          <a:ln/>
+        </p:spPr>
+        <p:txBody>
+          <a:bodyPr wrap="none" lIns="0" tIns="0" rIns="0" bIns="0" rtlCol="0" anchor="ctr"/>
+          <a:lstStyle/>
+          <a:p>
             <a:pPr algn="l" indent="0" marL="0">
               <a:buNone/>
             </a:pPr>
             <a:r>
+              <a:rPr lang="en-US" sz="1400" dirty="0">
+                <a:solidFill>
+                  <a:schemeClr val="tx2"/>
+                </a:solidFill>
+              </a:rPr>
+              <a:t>не лучше нынешней; потолок — 92,5 очка</a:t>
+            </a:r>
+            <a:endParaRPr lang="en-US" sz="1400" dirty="0"/>
+          </a:p>
+        </p:txBody>
+      </p:sp>
+      <p:sp>
+        <p:nvSpPr>
+          <p:cNvPr id="121" name="lane-9-rule"/>
+          <p:cNvSpPr/>
+          <p:nvPr/>
+        </p:nvSpPr>
+        <p:spPr>
+          <a:xfrm>
+            <a:off x="548640" y="4800600"/>
+            <a:ext cx="11091672" cy="0"/>
+          </a:xfrm>
+          <a:prstGeom prst="line">
+            <a:avLst/>
+          </a:prstGeom>
+          <a:noFill/>
+          <a:ln w="12700">
+            <a:solidFill>
+              <a:schemeClr val="bg2"/>
+            </a:solidFill>
+            <a:prstDash val="solid"/>
+          </a:ln>
+        </p:spPr>
+      </p:sp>
+      <p:sp>
+        <p:nvSpPr>
+          <p:cNvPr id="122" name="lane-9-name"/>
+          <p:cNvSpPr txBox="1"/>
+          <p:nvPr/>
+        </p:nvSpPr>
+        <p:spPr>
+          <a:xfrm>
+            <a:off x="548640" y="4800600"/>
+            <a:ext cx="3611880" cy="338328"/>
+          </a:xfrm>
+          <a:prstGeom prst="rect">
+            <a:avLst/>
+          </a:prstGeom>
+          <a:noFill/>
+          <a:ln/>
+        </p:spPr>
+        <p:txBody>
+          <a:bodyPr wrap="none" lIns="0" tIns="0" rIns="0" bIns="0" rtlCol="0" anchor="ctr"/>
+          <a:lstStyle/>
+          <a:p>
+            <a:pPr algn="l" indent="0" marL="0">
+              <a:buNone/>
+            </a:pPr>
+            <a:r>
               <a:rPr lang="en-US" sz="1600" b="1" dirty="0">
                 <a:solidFill>
                   <a:schemeClr val="tx1"/>
                 </a:solidFill>
               </a:rPr>
-              <a:t>«Никакого маршрутизатора моделей»</a:t>
+              <a:t>R14. Самокалибровка датчика</a:t>
             </a:r>
             <a:endParaRPr lang="en-US" sz="1600" dirty="0"/>
           </a:p>
@@ -6599,7 +6861,414 @@
       </p:sp>
       <p:sp>
         <p:nvSpPr>
-          <p:cNvPr id="86" name="conclusion-card"/>
+          <p:cNvPr id="123" name="lane-9-chip-1-tile"/>
+          <p:cNvSpPr/>
+          <p:nvPr/>
+        </p:nvSpPr>
+        <p:spPr>
+          <a:xfrm>
+            <a:off x="4251960" y="4841748"/>
+            <a:ext cx="256032" cy="256032"/>
+          </a:xfrm>
+          <a:prstGeom prst="roundRect">
+            <a:avLst>
+              <a:gd name="adj" fmla="val 14286"/>
+            </a:avLst>
+          </a:prstGeom>
+          <a:solidFill>
+            <a:schemeClr val="bg2"/>
+          </a:solidFill>
+          <a:ln/>
+        </p:spPr>
+      </p:sp>
+      <p:pic>
+        <p:nvPicPr>
+          <p:cNvPr id="124" name="lane-9-chip-1" descr="/Users/a/MAI/DID/presentation/assets/logos/claude.png">    </p:cNvPr>
+          <p:cNvPicPr>
+            <a:picLocks noChangeAspect="1"/>
+          </p:cNvPicPr>
+          <p:nvPr/>
+        </p:nvPicPr>
+        <p:blipFill>
+          <a:blip r:embed="rId40"/>
+          <a:stretch>
+            <a:fillRect/>
+          </a:stretch>
+        </p:blipFill>
+        <p:spPr>
+          <a:xfrm>
+            <a:off x="4293108" y="4882896"/>
+            <a:ext cx="173736" cy="173736"/>
+          </a:xfrm>
+          <a:prstGeom prst="rect">
+            <a:avLst/>
+          </a:prstGeom>
+        </p:spPr>
+      </p:pic>
+      <p:sp>
+        <p:nvSpPr>
+          <p:cNvPr id="125" name="lane-9-chip-2-tile"/>
+          <p:cNvSpPr/>
+          <p:nvPr/>
+        </p:nvSpPr>
+        <p:spPr>
+          <a:xfrm>
+            <a:off x="4544568" y="4841748"/>
+            <a:ext cx="256032" cy="256032"/>
+          </a:xfrm>
+          <a:prstGeom prst="roundRect">
+            <a:avLst>
+              <a:gd name="adj" fmla="val 14286"/>
+            </a:avLst>
+          </a:prstGeom>
+          <a:solidFill>
+            <a:schemeClr val="bg2"/>
+          </a:solidFill>
+          <a:ln/>
+        </p:spPr>
+      </p:sp>
+      <p:pic>
+        <p:nvPicPr>
+          <p:cNvPr id="126" name="lane-9-chip-2" descr="/Users/a/MAI/DID/presentation/assets/logos/openai.png">    </p:cNvPr>
+          <p:cNvPicPr>
+            <a:picLocks noChangeAspect="1"/>
+          </p:cNvPicPr>
+          <p:nvPr/>
+        </p:nvPicPr>
+        <p:blipFill>
+          <a:blip r:embed="rId41"/>
+          <a:stretch>
+            <a:fillRect/>
+          </a:stretch>
+        </p:blipFill>
+        <p:spPr>
+          <a:xfrm>
+            <a:off x="4585716" y="4882896"/>
+            <a:ext cx="173736" cy="173736"/>
+          </a:xfrm>
+          <a:prstGeom prst="rect">
+            <a:avLst/>
+          </a:prstGeom>
+        </p:spPr>
+      </p:pic>
+      <p:sp>
+        <p:nvSpPr>
+          <p:cNvPr id="127" name="lane-9-result"/>
+          <p:cNvSpPr txBox="1"/>
+          <p:nvPr/>
+        </p:nvSpPr>
+        <p:spPr>
+          <a:xfrm>
+            <a:off x="7315200" y="4800600"/>
+            <a:ext cx="4325112" cy="338328"/>
+          </a:xfrm>
+          <a:prstGeom prst="rect">
+            <a:avLst/>
+          </a:prstGeom>
+          <a:noFill/>
+          <a:ln/>
+        </p:spPr>
+        <p:txBody>
+          <a:bodyPr wrap="none" lIns="0" tIns="0" rIns="0" bIns="0" rtlCol="0" anchor="ctr"/>
+          <a:lstStyle/>
+          <a:p>
+            <a:pPr algn="l" indent="0" marL="0">
+              <a:buNone/>
+            </a:pPr>
+            <a:r>
+              <a:rPr lang="en-US" sz="1400" dirty="0">
+                <a:solidFill>
+                  <a:schemeClr val="tx2"/>
+                </a:solidFill>
+              </a:rPr>
+              <a:t>ревью вернуло работу; отложена</a:t>
+            </a:r>
+            <a:endParaRPr lang="en-US" sz="1400" dirty="0"/>
+          </a:p>
+        </p:txBody>
+      </p:sp>
+      <p:sp>
+        <p:nvSpPr>
+          <p:cNvPr id="128" name="lane-10-rule"/>
+          <p:cNvSpPr/>
+          <p:nvPr/>
+        </p:nvSpPr>
+        <p:spPr>
+          <a:xfrm>
+            <a:off x="548640" y="5138928"/>
+            <a:ext cx="11091672" cy="0"/>
+          </a:xfrm>
+          <a:prstGeom prst="line">
+            <a:avLst/>
+          </a:prstGeom>
+          <a:noFill/>
+          <a:ln w="12700">
+            <a:solidFill>
+              <a:schemeClr val="bg2"/>
+            </a:solidFill>
+            <a:prstDash val="solid"/>
+          </a:ln>
+        </p:spPr>
+      </p:sp>
+      <p:sp>
+        <p:nvSpPr>
+          <p:cNvPr id="129" name="lane-10-name"/>
+          <p:cNvSpPr txBox="1"/>
+          <p:nvPr/>
+        </p:nvSpPr>
+        <p:spPr>
+          <a:xfrm>
+            <a:off x="548640" y="5138928"/>
+            <a:ext cx="3611880" cy="338328"/>
+          </a:xfrm>
+          <a:prstGeom prst="rect">
+            <a:avLst/>
+          </a:prstGeom>
+          <a:noFill/>
+          <a:ln/>
+        </p:spPr>
+        <p:txBody>
+          <a:bodyPr wrap="none" lIns="0" tIns="0" rIns="0" bIns="0" rtlCol="0" anchor="ctr"/>
+          <a:lstStyle/>
+          <a:p>
+            <a:pPr algn="l" indent="0" marL="0">
+              <a:buNone/>
+            </a:pPr>
+            <a:r>
+              <a:rPr lang="en-US" sz="1600" b="1" dirty="0">
+                <a:solidFill>
+                  <a:schemeClr val="tx1"/>
+                </a:solidFill>
+              </a:rPr>
+              <a:t>F2. SLAM вместо готовой карты</a:t>
+            </a:r>
+            <a:endParaRPr lang="en-US" sz="1600" dirty="0"/>
+          </a:p>
+        </p:txBody>
+      </p:sp>
+      <p:sp>
+        <p:nvSpPr>
+          <p:cNvPr id="130" name="lane-10-chip-1-tile"/>
+          <p:cNvSpPr/>
+          <p:nvPr/>
+        </p:nvSpPr>
+        <p:spPr>
+          <a:xfrm>
+            <a:off x="4251960" y="5180076"/>
+            <a:ext cx="256032" cy="256032"/>
+          </a:xfrm>
+          <a:prstGeom prst="roundRect">
+            <a:avLst>
+              <a:gd name="adj" fmla="val 14286"/>
+            </a:avLst>
+          </a:prstGeom>
+          <a:solidFill>
+            <a:schemeClr val="bg2"/>
+          </a:solidFill>
+          <a:ln/>
+        </p:spPr>
+      </p:sp>
+      <p:pic>
+        <p:nvPicPr>
+          <p:cNvPr id="131" name="lane-10-chip-1" descr="/Users/a/MAI/DID/presentation/assets/logos/gemini.png">    </p:cNvPr>
+          <p:cNvPicPr>
+            <a:picLocks noChangeAspect="1"/>
+          </p:cNvPicPr>
+          <p:nvPr/>
+        </p:nvPicPr>
+        <p:blipFill>
+          <a:blip r:embed="rId42"/>
+          <a:stretch>
+            <a:fillRect/>
+          </a:stretch>
+        </p:blipFill>
+        <p:spPr>
+          <a:xfrm>
+            <a:off x="4293108" y="5221224"/>
+            <a:ext cx="173736" cy="173736"/>
+          </a:xfrm>
+          <a:prstGeom prst="rect">
+            <a:avLst/>
+          </a:prstGeom>
+        </p:spPr>
+      </p:pic>
+      <p:sp>
+        <p:nvSpPr>
+          <p:cNvPr id="132" name="lane-10-chip-2-tile"/>
+          <p:cNvSpPr/>
+          <p:nvPr/>
+        </p:nvSpPr>
+        <p:spPr>
+          <a:xfrm>
+            <a:off x="4544568" y="5180076"/>
+            <a:ext cx="256032" cy="256032"/>
+          </a:xfrm>
+          <a:prstGeom prst="roundRect">
+            <a:avLst>
+              <a:gd name="adj" fmla="val 14286"/>
+            </a:avLst>
+          </a:prstGeom>
+          <a:solidFill>
+            <a:schemeClr val="bg2"/>
+          </a:solidFill>
+          <a:ln/>
+        </p:spPr>
+      </p:sp>
+      <p:pic>
+        <p:nvPicPr>
+          <p:cNvPr id="133" name="lane-10-chip-2" descr="/Users/a/MAI/DID/presentation/assets/logos/claude.png">    </p:cNvPr>
+          <p:cNvPicPr>
+            <a:picLocks noChangeAspect="1"/>
+          </p:cNvPicPr>
+          <p:nvPr/>
+        </p:nvPicPr>
+        <p:blipFill>
+          <a:blip r:embed="rId43"/>
+          <a:stretch>
+            <a:fillRect/>
+          </a:stretch>
+        </p:blipFill>
+        <p:spPr>
+          <a:xfrm>
+            <a:off x="4585716" y="5221224"/>
+            <a:ext cx="173736" cy="173736"/>
+          </a:xfrm>
+          <a:prstGeom prst="rect">
+            <a:avLst/>
+          </a:prstGeom>
+        </p:spPr>
+      </p:pic>
+      <p:sp>
+        <p:nvSpPr>
+          <p:cNvPr id="134" name="lane-10-chip-3-tile"/>
+          <p:cNvSpPr/>
+          <p:nvPr/>
+        </p:nvSpPr>
+        <p:spPr>
+          <a:xfrm>
+            <a:off x="4837176" y="5180076"/>
+            <a:ext cx="256032" cy="256032"/>
+          </a:xfrm>
+          <a:prstGeom prst="roundRect">
+            <a:avLst>
+              <a:gd name="adj" fmla="val 14286"/>
+            </a:avLst>
+          </a:prstGeom>
+          <a:solidFill>
+            <a:schemeClr val="bg2"/>
+          </a:solidFill>
+          <a:ln/>
+        </p:spPr>
+      </p:sp>
+      <p:pic>
+        <p:nvPicPr>
+          <p:cNvPr id="135" name="lane-10-chip-3" descr="/Users/a/MAI/DID/presentation/assets/logos/openai.png">    </p:cNvPr>
+          <p:cNvPicPr>
+            <a:picLocks noChangeAspect="1"/>
+          </p:cNvPicPr>
+          <p:nvPr/>
+        </p:nvPicPr>
+        <p:blipFill>
+          <a:blip r:embed="rId44"/>
+          <a:stretch>
+            <a:fillRect/>
+          </a:stretch>
+        </p:blipFill>
+        <p:spPr>
+          <a:xfrm>
+            <a:off x="4878324" y="5221224"/>
+            <a:ext cx="173736" cy="173736"/>
+          </a:xfrm>
+          <a:prstGeom prst="rect">
+            <a:avLst/>
+          </a:prstGeom>
+        </p:spPr>
+      </p:pic>
+      <p:sp>
+        <p:nvSpPr>
+          <p:cNvPr id="136" name="lane-10-chip-4-tile"/>
+          <p:cNvSpPr/>
+          <p:nvPr/>
+        </p:nvSpPr>
+        <p:spPr>
+          <a:xfrm>
+            <a:off x="5129784" y="5180076"/>
+            <a:ext cx="256032" cy="256032"/>
+          </a:xfrm>
+          <a:prstGeom prst="roundRect">
+            <a:avLst>
+              <a:gd name="adj" fmla="val 14286"/>
+            </a:avLst>
+          </a:prstGeom>
+          <a:solidFill>
+            <a:schemeClr val="bg2"/>
+          </a:solidFill>
+          <a:ln/>
+        </p:spPr>
+      </p:sp>
+      <p:pic>
+        <p:nvPicPr>
+          <p:cNvPr id="137" name="lane-10-chip-4" descr="/Users/a/MAI/DID/presentation/assets/logos/claude.png">    </p:cNvPr>
+          <p:cNvPicPr>
+            <a:picLocks noChangeAspect="1"/>
+          </p:cNvPicPr>
+          <p:nvPr/>
+        </p:nvPicPr>
+        <p:blipFill>
+          <a:blip r:embed="rId45"/>
+          <a:stretch>
+            <a:fillRect/>
+          </a:stretch>
+        </p:blipFill>
+        <p:spPr>
+          <a:xfrm>
+            <a:off x="5170932" y="5221224"/>
+            <a:ext cx="173736" cy="173736"/>
+          </a:xfrm>
+          <a:prstGeom prst="rect">
+            <a:avLst/>
+          </a:prstGeom>
+        </p:spPr>
+      </p:pic>
+      <p:sp>
+        <p:nvSpPr>
+          <p:cNvPr id="138" name="lane-10-result"/>
+          <p:cNvSpPr txBox="1"/>
+          <p:nvPr/>
+        </p:nvSpPr>
+        <p:spPr>
+          <a:xfrm>
+            <a:off x="7315200" y="5138928"/>
+            <a:ext cx="4325112" cy="338328"/>
+          </a:xfrm>
+          <a:prstGeom prst="rect">
+            <a:avLst/>
+          </a:prstGeom>
+          <a:noFill/>
+          <a:ln/>
+        </p:spPr>
+        <p:txBody>
+          <a:bodyPr wrap="none" lIns="0" tIns="0" rIns="0" bIns="0" rtlCol="0" anchor="ctr"/>
+          <a:lstStyle/>
+          <a:p>
+            <a:pPr algn="l" indent="0" marL="0">
+              <a:buNone/>
+            </a:pPr>
+            <a:r>
+              <a:rPr lang="en-US" sz="1400" dirty="0">
+                <a:solidFill>
+                  <a:schemeClr val="tx2"/>
+                </a:solidFill>
+              </a:rPr>
+              <a:t>совпадение с готовой картой 96–99%; правки идут</a:t>
+            </a:r>
+            <a:endParaRPr lang="en-US" sz="1400" dirty="0"/>
+          </a:p>
+        </p:txBody>
+      </p:sp>
+      <p:sp>
+        <p:nvSpPr>
+          <p:cNvPr id="139" name="conclusion-card"/>
           <p:cNvSpPr/>
           <p:nvPr/>
         </p:nvSpPr>
@@ -6621,7 +7290,7 @@
       </p:sp>
       <p:sp>
         <p:nvSpPr>
-          <p:cNvPr id="87" name="conclusion-text"/>
+          <p:cNvPr id="140" name="conclusion-text"/>
           <p:cNvSpPr txBox="1"/>
           <p:nvPr/>
         </p:nvSpPr>

--- a/presentation/ai_process.pptx
+++ b/presentation/ai_process.pptx
@@ -108,7 +108,7 @@
   <p:extLst>
     <p:ext uri="{521415D9-36F7-43E2-AB2F-B90AF26B5E84}">
       <p14:sectionLst xmlns:p14="http://schemas.microsoft.com/office/powerpoint/2010/main">
-        <p14:section name="Как работали" id="{58730f8d-cd08-0e41-e768-b8ae628e89fa}">
+        <p14:section name="Как работали" id="{d277bfb9-86d9-2c3b-f4d2-cf72bf7ecda5}">
           <p14:sldIdLst>
             <p14:sldId id="256"/>
             <p14:sldId id="257"/>
@@ -7232,7 +7232,139 @@
       </p:pic>
       <p:sp>
         <p:nvSpPr>
-          <p:cNvPr id="138" name="lane-10-result"/>
+          <p:cNvPr id="138" name="lane-10-chip-5-tile"/>
+          <p:cNvSpPr/>
+          <p:nvPr/>
+        </p:nvSpPr>
+        <p:spPr>
+          <a:xfrm>
+            <a:off x="5422392" y="5180076"/>
+            <a:ext cx="256032" cy="256032"/>
+          </a:xfrm>
+          <a:prstGeom prst="roundRect">
+            <a:avLst>
+              <a:gd name="adj" fmla="val 14286"/>
+            </a:avLst>
+          </a:prstGeom>
+          <a:solidFill>
+            <a:schemeClr val="bg2"/>
+          </a:solidFill>
+          <a:ln/>
+        </p:spPr>
+      </p:sp>
+      <p:pic>
+        <p:nvPicPr>
+          <p:cNvPr id="139" name="lane-10-chip-5" descr="/Users/a/MAI/DID/presentation/assets/logos/openai.png">    </p:cNvPr>
+          <p:cNvPicPr>
+            <a:picLocks noChangeAspect="1"/>
+          </p:cNvPicPr>
+          <p:nvPr/>
+        </p:nvPicPr>
+        <p:blipFill>
+          <a:blip r:embed="rId46"/>
+          <a:stretch>
+            <a:fillRect/>
+          </a:stretch>
+        </p:blipFill>
+        <p:spPr>
+          <a:xfrm>
+            <a:off x="5463540" y="5221224"/>
+            <a:ext cx="173736" cy="173736"/>
+          </a:xfrm>
+          <a:prstGeom prst="rect">
+            <a:avLst/>
+          </a:prstGeom>
+        </p:spPr>
+      </p:pic>
+      <p:sp>
+        <p:nvSpPr>
+          <p:cNvPr id="140" name="lane-10-chip-6-tile"/>
+          <p:cNvSpPr/>
+          <p:nvPr/>
+        </p:nvSpPr>
+        <p:spPr>
+          <a:xfrm>
+            <a:off x="5715000" y="5180076"/>
+            <a:ext cx="256032" cy="256032"/>
+          </a:xfrm>
+          <a:prstGeom prst="roundRect">
+            <a:avLst>
+              <a:gd name="adj" fmla="val 14286"/>
+            </a:avLst>
+          </a:prstGeom>
+          <a:solidFill>
+            <a:schemeClr val="bg2"/>
+          </a:solidFill>
+          <a:ln/>
+        </p:spPr>
+      </p:sp>
+      <p:pic>
+        <p:nvPicPr>
+          <p:cNvPr id="141" name="lane-10-chip-6" descr="/Users/a/MAI/DID/presentation/assets/logos/claude.png">    </p:cNvPr>
+          <p:cNvPicPr>
+            <a:picLocks noChangeAspect="1"/>
+          </p:cNvPicPr>
+          <p:nvPr/>
+        </p:nvPicPr>
+        <p:blipFill>
+          <a:blip r:embed="rId47"/>
+          <a:stretch>
+            <a:fillRect/>
+          </a:stretch>
+        </p:blipFill>
+        <p:spPr>
+          <a:xfrm>
+            <a:off x="5756148" y="5221224"/>
+            <a:ext cx="173736" cy="173736"/>
+          </a:xfrm>
+          <a:prstGeom prst="rect">
+            <a:avLst/>
+          </a:prstGeom>
+        </p:spPr>
+      </p:pic>
+      <p:sp>
+        <p:nvSpPr>
+          <p:cNvPr id="142" name="lane-10-chip-7"/>
+          <p:cNvSpPr txBox="1"/>
+          <p:nvPr/>
+        </p:nvSpPr>
+        <p:spPr>
+          <a:xfrm>
+            <a:off x="6007608" y="5180076"/>
+            <a:ext cx="256032" cy="256032"/>
+          </a:xfrm>
+          <a:prstGeom prst="roundRect">
+            <a:avLst>
+              <a:gd name="adj" fmla="val 14286"/>
+            </a:avLst>
+          </a:prstGeom>
+          <a:solidFill>
+            <a:schemeClr val="accent3"/>
+          </a:solidFill>
+          <a:ln/>
+        </p:spPr>
+        <p:txBody>
+          <a:bodyPr wrap="square" lIns="0" tIns="0" rIns="0" bIns="0" rtlCol="0" anchor="ctr"/>
+          <a:lstStyle/>
+          <a:p>
+            <a:pPr algn="ctr" indent="0" marL="0">
+              <a:buNone/>
+            </a:pPr>
+            <a:r>
+              <a:rPr lang="en-US" sz="1300" b="1" dirty="0">
+                <a:solidFill>
+                  <a:schemeClr val="bg1"/>
+                </a:solidFill>
+              </a:rPr>
+              <a:t>✓</a:t>
+            </a:r>
+            <a:endParaRPr lang="en-US" sz="1300" dirty="0"/>
+          </a:p>
+        </p:txBody>
+      </p:sp>
+      <p:sp>
+        <p:nvSpPr>
+          <p:cNvPr id="143" name="lane-10-result"/>
           <p:cNvSpPr txBox="1"/>
           <p:nvPr/>
         </p:nvSpPr>
@@ -7260,7 +7392,7 @@
                   <a:schemeClr val="tx2"/>
                 </a:solidFill>
               </a:rPr>
-              <a:t>совпадение с готовой картой 96–99%; правки идут</a:t>
+              <a:t>карта робота совпала с готовой на 96–99%</a:t>
             </a:r>
             <a:endParaRPr lang="en-US" sz="1400" dirty="0"/>
           </a:p>
@@ -7268,7 +7400,7 @@
       </p:sp>
       <p:sp>
         <p:nvSpPr>
-          <p:cNvPr id="139" name="conclusion-card"/>
+          <p:cNvPr id="144" name="conclusion-card"/>
           <p:cNvSpPr/>
           <p:nvPr/>
         </p:nvSpPr>
@@ -7290,7 +7422,7 @@
       </p:sp>
       <p:sp>
         <p:nvSpPr>
-          <p:cNvPr id="140" name="conclusion-text"/>
+          <p:cNvPr id="145" name="conclusion-text"/>
           <p:cNvSpPr txBox="1"/>
           <p:nvPr/>
         </p:nvSpPr>

--- a/presentation/ai_process.pptx
+++ b/presentation/ai_process.pptx
@@ -108,7 +108,7 @@
   <p:extLst>
     <p:ext uri="{521415D9-36F7-43E2-AB2F-B90AF26B5E84}">
       <p14:sectionLst xmlns:p14="http://schemas.microsoft.com/office/powerpoint/2010/main">
-        <p14:section name="Как работали" id="{d277bfb9-86d9-2c3b-f4d2-cf72bf7ecda5}">
+        <p14:section name="Как работали" id="{4c6ca5f3-111e-a6dd-1e0b-1129f93ab671}">
           <p14:sldIdLst>
             <p14:sldId id="256"/>
             <p14:sldId id="257"/>
@@ -4060,7 +4060,7 @@
         <p:spPr>
           <a:xfrm>
             <a:off x="548640" y="2093976"/>
-            <a:ext cx="3611880" cy="338328"/>
+            <a:ext cx="3611880" cy="307571"/>
           </a:xfrm>
           <a:prstGeom prst="rect">
             <a:avLst/>
@@ -4095,7 +4095,7 @@
         </p:nvSpPr>
         <p:spPr>
           <a:xfrm>
-            <a:off x="4251960" y="2135124"/>
+            <a:off x="4251960" y="2119745"/>
             <a:ext cx="256032" cy="256032"/>
           </a:xfrm>
           <a:prstGeom prst="roundRect">
@@ -4125,7 +4125,7 @@
         </p:blipFill>
         <p:spPr>
           <a:xfrm>
-            <a:off x="4293108" y="2176272"/>
+            <a:off x="4293108" y="2160893"/>
             <a:ext cx="173736" cy="173736"/>
           </a:xfrm>
           <a:prstGeom prst="rect">
@@ -4141,7 +4141,7 @@
         </p:nvSpPr>
         <p:spPr>
           <a:xfrm>
-            <a:off x="4544568" y="2135124"/>
+            <a:off x="4544568" y="2119745"/>
             <a:ext cx="256032" cy="256032"/>
           </a:xfrm>
           <a:prstGeom prst="roundRect">
@@ -4171,7 +4171,7 @@
         </p:blipFill>
         <p:spPr>
           <a:xfrm>
-            <a:off x="4585716" y="2176272"/>
+            <a:off x="4585716" y="2160893"/>
             <a:ext cx="173736" cy="173736"/>
           </a:xfrm>
           <a:prstGeom prst="rect">
@@ -4187,7 +4187,7 @@
         </p:nvSpPr>
         <p:spPr>
           <a:xfrm>
-            <a:off x="4837176" y="2135124"/>
+            <a:off x="4837176" y="2119745"/>
             <a:ext cx="256032" cy="256032"/>
           </a:xfrm>
           <a:prstGeom prst="roundRect">
@@ -4217,7 +4217,7 @@
         </p:blipFill>
         <p:spPr>
           <a:xfrm>
-            <a:off x="4878324" y="2176272"/>
+            <a:off x="4878324" y="2160893"/>
             <a:ext cx="173736" cy="173736"/>
           </a:xfrm>
           <a:prstGeom prst="rect">
@@ -4233,7 +4233,7 @@
         </p:nvSpPr>
         <p:spPr>
           <a:xfrm>
-            <a:off x="5129784" y="2135124"/>
+            <a:off x="5129784" y="2119745"/>
             <a:ext cx="256032" cy="256032"/>
           </a:xfrm>
           <a:prstGeom prst="roundRect">
@@ -4263,7 +4263,7 @@
         </p:blipFill>
         <p:spPr>
           <a:xfrm>
-            <a:off x="5170932" y="2176272"/>
+            <a:off x="5170932" y="2160893"/>
             <a:ext cx="173736" cy="173736"/>
           </a:xfrm>
           <a:prstGeom prst="rect">
@@ -4279,7 +4279,7 @@
         </p:nvSpPr>
         <p:spPr>
           <a:xfrm>
-            <a:off x="5422392" y="2135124"/>
+            <a:off x="5422392" y="2119745"/>
             <a:ext cx="256032" cy="256032"/>
           </a:xfrm>
           <a:prstGeom prst="roundRect">
@@ -4309,7 +4309,7 @@
         </p:blipFill>
         <p:spPr>
           <a:xfrm>
-            <a:off x="5463540" y="2176272"/>
+            <a:off x="5463540" y="2160893"/>
             <a:ext cx="173736" cy="173736"/>
           </a:xfrm>
           <a:prstGeom prst="rect">
@@ -4325,7 +4325,7 @@
         </p:nvSpPr>
         <p:spPr>
           <a:xfrm>
-            <a:off x="5715000" y="2135124"/>
+            <a:off x="5715000" y="2119745"/>
             <a:ext cx="256032" cy="256032"/>
           </a:xfrm>
           <a:prstGeom prst="roundRect">
@@ -4355,7 +4355,7 @@
         </p:blipFill>
         <p:spPr>
           <a:xfrm>
-            <a:off x="5756148" y="2176272"/>
+            <a:off x="5756148" y="2160893"/>
             <a:ext cx="173736" cy="173736"/>
           </a:xfrm>
           <a:prstGeom prst="rect">
@@ -4371,7 +4371,7 @@
         </p:nvSpPr>
         <p:spPr>
           <a:xfrm>
-            <a:off x="6007608" y="2135124"/>
+            <a:off x="6007608" y="2119745"/>
             <a:ext cx="256032" cy="256032"/>
           </a:xfrm>
           <a:prstGeom prst="roundRect">
@@ -4401,7 +4401,7 @@
         </p:blipFill>
         <p:spPr>
           <a:xfrm>
-            <a:off x="6048756" y="2176272"/>
+            <a:off x="6048756" y="2160893"/>
             <a:ext cx="173736" cy="173736"/>
           </a:xfrm>
           <a:prstGeom prst="rect">
@@ -4417,7 +4417,7 @@
         </p:nvSpPr>
         <p:spPr>
           <a:xfrm>
-            <a:off x="6300216" y="2135124"/>
+            <a:off x="6300216" y="2119745"/>
             <a:ext cx="256032" cy="256032"/>
           </a:xfrm>
           <a:prstGeom prst="roundRect">
@@ -4447,7 +4447,7 @@
         </p:blipFill>
         <p:spPr>
           <a:xfrm>
-            <a:off x="6341364" y="2176272"/>
+            <a:off x="6341364" y="2160893"/>
             <a:ext cx="173736" cy="173736"/>
           </a:xfrm>
           <a:prstGeom prst="rect">
@@ -4463,7 +4463,7 @@
         </p:nvSpPr>
         <p:spPr>
           <a:xfrm>
-            <a:off x="6592824" y="2135124"/>
+            <a:off x="6592824" y="2119745"/>
             <a:ext cx="256032" cy="256032"/>
           </a:xfrm>
           <a:prstGeom prst="roundRect">
@@ -4493,7 +4493,7 @@
         </p:blipFill>
         <p:spPr>
           <a:xfrm>
-            <a:off x="6633972" y="2176272"/>
+            <a:off x="6633972" y="2160893"/>
             <a:ext cx="173736" cy="173736"/>
           </a:xfrm>
           <a:prstGeom prst="rect">
@@ -4509,7 +4509,7 @@
         </p:nvSpPr>
         <p:spPr>
           <a:xfrm>
-            <a:off x="6885432" y="2135124"/>
+            <a:off x="6885432" y="2119745"/>
             <a:ext cx="256032" cy="256032"/>
           </a:xfrm>
           <a:prstGeom prst="roundRect">
@@ -4550,7 +4550,7 @@
         <p:spPr>
           <a:xfrm>
             <a:off x="7315200" y="2093976"/>
-            <a:ext cx="4325112" cy="338328"/>
+            <a:ext cx="4325112" cy="307571"/>
           </a:xfrm>
           <a:prstGeom prst="rect">
             <a:avLst/>
@@ -4585,7 +4585,7 @@
         </p:nvSpPr>
         <p:spPr>
           <a:xfrm>
-            <a:off x="548640" y="2432304"/>
+            <a:off x="548640" y="2401547"/>
             <a:ext cx="11091672" cy="0"/>
           </a:xfrm>
           <a:prstGeom prst="line">
@@ -4608,8 +4608,8 @@
         </p:nvSpPr>
         <p:spPr>
           <a:xfrm>
-            <a:off x="548640" y="2432304"/>
-            <a:ext cx="3611880" cy="338328"/>
+            <a:off x="548640" y="2401547"/>
+            <a:ext cx="3611880" cy="307571"/>
           </a:xfrm>
           <a:prstGeom prst="rect">
             <a:avLst/>
@@ -4644,7 +4644,7 @@
         </p:nvSpPr>
         <p:spPr>
           <a:xfrm>
-            <a:off x="4251960" y="2473452"/>
+            <a:off x="4251960" y="2427316"/>
             <a:ext cx="256032" cy="256032"/>
           </a:xfrm>
           <a:prstGeom prst="roundRect">
@@ -4674,7 +4674,7 @@
         </p:blipFill>
         <p:spPr>
           <a:xfrm>
-            <a:off x="4293108" y="2514600"/>
+            <a:off x="4293108" y="2468464"/>
             <a:ext cx="173736" cy="173736"/>
           </a:xfrm>
           <a:prstGeom prst="rect">
@@ -4690,7 +4690,7 @@
         </p:nvSpPr>
         <p:spPr>
           <a:xfrm>
-            <a:off x="4544568" y="2473452"/>
+            <a:off x="4544568" y="2427316"/>
             <a:ext cx="256032" cy="256032"/>
           </a:xfrm>
           <a:prstGeom prst="roundRect">
@@ -4720,7 +4720,7 @@
         </p:blipFill>
         <p:spPr>
           <a:xfrm>
-            <a:off x="4585716" y="2514600"/>
+            <a:off x="4585716" y="2468464"/>
             <a:ext cx="173736" cy="173736"/>
           </a:xfrm>
           <a:prstGeom prst="rect">
@@ -4736,7 +4736,7 @@
         </p:nvSpPr>
         <p:spPr>
           <a:xfrm>
-            <a:off x="4837176" y="2473452"/>
+            <a:off x="4837176" y="2427316"/>
             <a:ext cx="256032" cy="256032"/>
           </a:xfrm>
           <a:prstGeom prst="roundRect">
@@ -4766,7 +4766,7 @@
         </p:blipFill>
         <p:spPr>
           <a:xfrm>
-            <a:off x="4878324" y="2514600"/>
+            <a:off x="4878324" y="2468464"/>
             <a:ext cx="173736" cy="173736"/>
           </a:xfrm>
           <a:prstGeom prst="rect">
@@ -4782,7 +4782,7 @@
         </p:nvSpPr>
         <p:spPr>
           <a:xfrm>
-            <a:off x="5129784" y="2473452"/>
+            <a:off x="5129784" y="2427316"/>
             <a:ext cx="256032" cy="256032"/>
           </a:xfrm>
           <a:prstGeom prst="roundRect">
@@ -4812,7 +4812,7 @@
         </p:blipFill>
         <p:spPr>
           <a:xfrm>
-            <a:off x="5170932" y="2514600"/>
+            <a:off x="5170932" y="2468464"/>
             <a:ext cx="173736" cy="173736"/>
           </a:xfrm>
           <a:prstGeom prst="rect">
@@ -4828,7 +4828,7 @@
         </p:nvSpPr>
         <p:spPr>
           <a:xfrm>
-            <a:off x="5422392" y="2473452"/>
+            <a:off x="5422392" y="2427316"/>
             <a:ext cx="256032" cy="256032"/>
           </a:xfrm>
           <a:prstGeom prst="roundRect">
@@ -4858,7 +4858,7 @@
         </p:blipFill>
         <p:spPr>
           <a:xfrm>
-            <a:off x="5463540" y="2514600"/>
+            <a:off x="5463540" y="2468464"/>
             <a:ext cx="173736" cy="173736"/>
           </a:xfrm>
           <a:prstGeom prst="rect">
@@ -4874,7 +4874,7 @@
         </p:nvSpPr>
         <p:spPr>
           <a:xfrm>
-            <a:off x="5715000" y="2473452"/>
+            <a:off x="5715000" y="2427316"/>
             <a:ext cx="256032" cy="256032"/>
           </a:xfrm>
           <a:prstGeom prst="roundRect">
@@ -4914,8 +4914,8 @@
         </p:nvSpPr>
         <p:spPr>
           <a:xfrm>
-            <a:off x="7315200" y="2432304"/>
-            <a:ext cx="4325112" cy="338328"/>
+            <a:off x="7315200" y="2401547"/>
+            <a:ext cx="4325112" cy="307571"/>
           </a:xfrm>
           <a:prstGeom prst="rect">
             <a:avLst/>
@@ -4950,7 +4950,7 @@
         </p:nvSpPr>
         <p:spPr>
           <a:xfrm>
-            <a:off x="548640" y="2770632"/>
+            <a:off x="548640" y="2709118"/>
             <a:ext cx="11091672" cy="0"/>
           </a:xfrm>
           <a:prstGeom prst="line">
@@ -4973,8 +4973,8 @@
         </p:nvSpPr>
         <p:spPr>
           <a:xfrm>
-            <a:off x="548640" y="2770632"/>
-            <a:ext cx="3611880" cy="338328"/>
+            <a:off x="548640" y="2709118"/>
+            <a:ext cx="3611880" cy="307571"/>
           </a:xfrm>
           <a:prstGeom prst="rect">
             <a:avLst/>
@@ -5009,7 +5009,7 @@
         </p:nvSpPr>
         <p:spPr>
           <a:xfrm>
-            <a:off x="4251960" y="2811780"/>
+            <a:off x="4251960" y="2734887"/>
             <a:ext cx="256032" cy="256032"/>
           </a:xfrm>
           <a:prstGeom prst="roundRect">
@@ -5039,7 +5039,7 @@
         </p:blipFill>
         <p:spPr>
           <a:xfrm>
-            <a:off x="4293108" y="2852928"/>
+            <a:off x="4293108" y="2776035"/>
             <a:ext cx="173736" cy="173736"/>
           </a:xfrm>
           <a:prstGeom prst="rect">
@@ -5055,7 +5055,7 @@
         </p:nvSpPr>
         <p:spPr>
           <a:xfrm>
-            <a:off x="4544568" y="2811780"/>
+            <a:off x="4544568" y="2734887"/>
             <a:ext cx="256032" cy="256032"/>
           </a:xfrm>
           <a:prstGeom prst="roundRect">
@@ -5085,7 +5085,7 @@
         </p:blipFill>
         <p:spPr>
           <a:xfrm>
-            <a:off x="4585716" y="2852928"/>
+            <a:off x="4585716" y="2776035"/>
             <a:ext cx="173736" cy="173736"/>
           </a:xfrm>
           <a:prstGeom prst="rect">
@@ -5101,7 +5101,7 @@
         </p:nvSpPr>
         <p:spPr>
           <a:xfrm>
-            <a:off x="4837176" y="2811780"/>
+            <a:off x="4837176" y="2734887"/>
             <a:ext cx="256032" cy="256032"/>
           </a:xfrm>
           <a:prstGeom prst="roundRect">
@@ -5131,7 +5131,7 @@
         </p:blipFill>
         <p:spPr>
           <a:xfrm>
-            <a:off x="4878324" y="2852928"/>
+            <a:off x="4878324" y="2776035"/>
             <a:ext cx="173736" cy="173736"/>
           </a:xfrm>
           <a:prstGeom prst="rect">
@@ -5147,7 +5147,7 @@
         </p:nvSpPr>
         <p:spPr>
           <a:xfrm>
-            <a:off x="5129784" y="2811780"/>
+            <a:off x="5129784" y="2734887"/>
             <a:ext cx="256032" cy="256032"/>
           </a:xfrm>
           <a:prstGeom prst="roundRect">
@@ -5177,7 +5177,7 @@
         </p:blipFill>
         <p:spPr>
           <a:xfrm>
-            <a:off x="5170932" y="2852928"/>
+            <a:off x="5170932" y="2776035"/>
             <a:ext cx="173736" cy="173736"/>
           </a:xfrm>
           <a:prstGeom prst="rect">
@@ -5193,7 +5193,7 @@
         </p:nvSpPr>
         <p:spPr>
           <a:xfrm>
-            <a:off x="5422392" y="2811780"/>
+            <a:off x="5422392" y="2734887"/>
             <a:ext cx="256032" cy="256032"/>
           </a:xfrm>
           <a:prstGeom prst="roundRect">
@@ -5233,8 +5233,8 @@
         </p:nvSpPr>
         <p:spPr>
           <a:xfrm>
-            <a:off x="7315200" y="2770632"/>
-            <a:ext cx="4325112" cy="338328"/>
+            <a:off x="7315200" y="2709118"/>
+            <a:ext cx="4325112" cy="307571"/>
           </a:xfrm>
           <a:prstGeom prst="rect">
             <a:avLst/>
@@ -5269,7 +5269,7 @@
         </p:nvSpPr>
         <p:spPr>
           <a:xfrm>
-            <a:off x="548640" y="3108960"/>
+            <a:off x="548640" y="3016689"/>
             <a:ext cx="11091672" cy="0"/>
           </a:xfrm>
           <a:prstGeom prst="line">
@@ -5292,8 +5292,8 @@
         </p:nvSpPr>
         <p:spPr>
           <a:xfrm>
-            <a:off x="548640" y="3108960"/>
-            <a:ext cx="3611880" cy="338328"/>
+            <a:off x="548640" y="3016689"/>
+            <a:ext cx="3611880" cy="307571"/>
           </a:xfrm>
           <a:prstGeom prst="rect">
             <a:avLst/>
@@ -5328,7 +5328,7 @@
         </p:nvSpPr>
         <p:spPr>
           <a:xfrm>
-            <a:off x="4251960" y="3150108"/>
+            <a:off x="4251960" y="3042458"/>
             <a:ext cx="256032" cy="256032"/>
           </a:xfrm>
           <a:prstGeom prst="roundRect">
@@ -5358,7 +5358,7 @@
         </p:blipFill>
         <p:spPr>
           <a:xfrm>
-            <a:off x="4293108" y="3191256"/>
+            <a:off x="4293108" y="3083606"/>
             <a:ext cx="173736" cy="173736"/>
           </a:xfrm>
           <a:prstGeom prst="rect">
@@ -5374,7 +5374,7 @@
         </p:nvSpPr>
         <p:spPr>
           <a:xfrm>
-            <a:off x="4544568" y="3150108"/>
+            <a:off x="4544568" y="3042458"/>
             <a:ext cx="256032" cy="256032"/>
           </a:xfrm>
           <a:prstGeom prst="roundRect">
@@ -5404,7 +5404,7 @@
         </p:blipFill>
         <p:spPr>
           <a:xfrm>
-            <a:off x="4585716" y="3191256"/>
+            <a:off x="4585716" y="3083606"/>
             <a:ext cx="173736" cy="173736"/>
           </a:xfrm>
           <a:prstGeom prst="rect">
@@ -5420,7 +5420,7 @@
         </p:nvSpPr>
         <p:spPr>
           <a:xfrm>
-            <a:off x="4837176" y="3150108"/>
+            <a:off x="4837176" y="3042458"/>
             <a:ext cx="256032" cy="256032"/>
           </a:xfrm>
           <a:prstGeom prst="roundRect">
@@ -5450,7 +5450,7 @@
         </p:blipFill>
         <p:spPr>
           <a:xfrm>
-            <a:off x="4878324" y="3191256"/>
+            <a:off x="4878324" y="3083606"/>
             <a:ext cx="173736" cy="173736"/>
           </a:xfrm>
           <a:prstGeom prst="rect">
@@ -5466,7 +5466,7 @@
         </p:nvSpPr>
         <p:spPr>
           <a:xfrm>
-            <a:off x="5129784" y="3150108"/>
+            <a:off x="5129784" y="3042458"/>
             <a:ext cx="256032" cy="256032"/>
           </a:xfrm>
           <a:prstGeom prst="roundRect">
@@ -5506,8 +5506,8 @@
         </p:nvSpPr>
         <p:spPr>
           <a:xfrm>
-            <a:off x="5422392" y="3108960"/>
-            <a:ext cx="256032" cy="338328"/>
+            <a:off x="5422392" y="3016689"/>
+            <a:ext cx="256032" cy="307571"/>
           </a:xfrm>
           <a:prstGeom prst="rect">
             <a:avLst/>
@@ -5542,7 +5542,7 @@
         </p:nvSpPr>
         <p:spPr>
           <a:xfrm>
-            <a:off x="5715000" y="3150108"/>
+            <a:off x="5715000" y="3042458"/>
             <a:ext cx="256032" cy="256032"/>
           </a:xfrm>
           <a:prstGeom prst="roundRect">
@@ -5572,7 +5572,7 @@
         </p:blipFill>
         <p:spPr>
           <a:xfrm>
-            <a:off x="5756148" y="3191256"/>
+            <a:off x="5756148" y="3083606"/>
             <a:ext cx="173736" cy="173736"/>
           </a:xfrm>
           <a:prstGeom prst="rect">
@@ -5588,7 +5588,7 @@
         </p:nvSpPr>
         <p:spPr>
           <a:xfrm>
-            <a:off x="6007608" y="3150108"/>
+            <a:off x="6007608" y="3042458"/>
             <a:ext cx="256032" cy="256032"/>
           </a:xfrm>
           <a:prstGeom prst="roundRect">
@@ -5618,7 +5618,7 @@
         </p:blipFill>
         <p:spPr>
           <a:xfrm>
-            <a:off x="6048756" y="3191256"/>
+            <a:off x="6048756" y="3083606"/>
             <a:ext cx="173736" cy="173736"/>
           </a:xfrm>
           <a:prstGeom prst="rect">
@@ -5634,8 +5634,8 @@
         </p:nvSpPr>
         <p:spPr>
           <a:xfrm>
-            <a:off x="7315200" y="3108960"/>
-            <a:ext cx="4325112" cy="338328"/>
+            <a:off x="7315200" y="3016689"/>
+            <a:ext cx="4325112" cy="307571"/>
           </a:xfrm>
           <a:prstGeom prst="rect">
             <a:avLst/>
@@ -5670,7 +5670,7 @@
         </p:nvSpPr>
         <p:spPr>
           <a:xfrm>
-            <a:off x="548640" y="3447288"/>
+            <a:off x="548640" y="3324260"/>
             <a:ext cx="11091672" cy="0"/>
           </a:xfrm>
           <a:prstGeom prst="line">
@@ -5693,8 +5693,8 @@
         </p:nvSpPr>
         <p:spPr>
           <a:xfrm>
-            <a:off x="548640" y="3447288"/>
-            <a:ext cx="3611880" cy="338328"/>
+            <a:off x="548640" y="3324260"/>
+            <a:ext cx="3611880" cy="307571"/>
           </a:xfrm>
           <a:prstGeom prst="rect">
             <a:avLst/>
@@ -5729,7 +5729,7 @@
         </p:nvSpPr>
         <p:spPr>
           <a:xfrm>
-            <a:off x="4251960" y="3488436"/>
+            <a:off x="4251960" y="3350029"/>
             <a:ext cx="256032" cy="256032"/>
           </a:xfrm>
           <a:prstGeom prst="roundRect">
@@ -5759,7 +5759,7 @@
         </p:blipFill>
         <p:spPr>
           <a:xfrm>
-            <a:off x="4293108" y="3529584"/>
+            <a:off x="4293108" y="3391177"/>
             <a:ext cx="173736" cy="173736"/>
           </a:xfrm>
           <a:prstGeom prst="rect">
@@ -5775,7 +5775,7 @@
         </p:nvSpPr>
         <p:spPr>
           <a:xfrm>
-            <a:off x="4544568" y="3488436"/>
+            <a:off x="4544568" y="3350029"/>
             <a:ext cx="256032" cy="256032"/>
           </a:xfrm>
           <a:prstGeom prst="roundRect">
@@ -5805,7 +5805,7 @@
         </p:blipFill>
         <p:spPr>
           <a:xfrm>
-            <a:off x="4585716" y="3529584"/>
+            <a:off x="4585716" y="3391177"/>
             <a:ext cx="173736" cy="173736"/>
           </a:xfrm>
           <a:prstGeom prst="rect">
@@ -5821,7 +5821,7 @@
         </p:nvSpPr>
         <p:spPr>
           <a:xfrm>
-            <a:off x="4837176" y="3488436"/>
+            <a:off x="4837176" y="3350029"/>
             <a:ext cx="256032" cy="256032"/>
           </a:xfrm>
           <a:prstGeom prst="roundRect">
@@ -5851,7 +5851,7 @@
         </p:blipFill>
         <p:spPr>
           <a:xfrm>
-            <a:off x="4878324" y="3529584"/>
+            <a:off x="4878324" y="3391177"/>
             <a:ext cx="173736" cy="173736"/>
           </a:xfrm>
           <a:prstGeom prst="rect">
@@ -5867,7 +5867,7 @@
         </p:nvSpPr>
         <p:spPr>
           <a:xfrm>
-            <a:off x="5129784" y="3488436"/>
+            <a:off x="5129784" y="3350029"/>
             <a:ext cx="256032" cy="256032"/>
           </a:xfrm>
           <a:prstGeom prst="roundRect">
@@ -5897,7 +5897,7 @@
         </p:blipFill>
         <p:spPr>
           <a:xfrm>
-            <a:off x="5170932" y="3529584"/>
+            <a:off x="5170932" y="3391177"/>
             <a:ext cx="173736" cy="173736"/>
           </a:xfrm>
           <a:prstGeom prst="rect">
@@ -5913,7 +5913,7 @@
         </p:nvSpPr>
         <p:spPr>
           <a:xfrm>
-            <a:off x="5422392" y="3488436"/>
+            <a:off x="5422392" y="3350029"/>
             <a:ext cx="256032" cy="256032"/>
           </a:xfrm>
           <a:prstGeom prst="roundRect">
@@ -5953,8 +5953,8 @@
         </p:nvSpPr>
         <p:spPr>
           <a:xfrm>
-            <a:off x="7315200" y="3447288"/>
-            <a:ext cx="4325112" cy="338328"/>
+            <a:off x="7315200" y="3324260"/>
+            <a:ext cx="4325112" cy="307571"/>
           </a:xfrm>
           <a:prstGeom prst="rect">
             <a:avLst/>
@@ -5989,7 +5989,7 @@
         </p:nvSpPr>
         <p:spPr>
           <a:xfrm>
-            <a:off x="548640" y="3785616"/>
+            <a:off x="548640" y="3631831"/>
             <a:ext cx="11091672" cy="0"/>
           </a:xfrm>
           <a:prstGeom prst="line">
@@ -6012,8 +6012,8 @@
         </p:nvSpPr>
         <p:spPr>
           <a:xfrm>
-            <a:off x="548640" y="3785616"/>
-            <a:ext cx="3611880" cy="338328"/>
+            <a:off x="548640" y="3631831"/>
+            <a:ext cx="3611880" cy="307571"/>
           </a:xfrm>
           <a:prstGeom prst="rect">
             <a:avLst/>
@@ -6048,7 +6048,7 @@
         </p:nvSpPr>
         <p:spPr>
           <a:xfrm>
-            <a:off x="4251960" y="3826764"/>
+            <a:off x="4251960" y="3657600"/>
             <a:ext cx="256032" cy="256032"/>
           </a:xfrm>
           <a:prstGeom prst="roundRect">
@@ -6078,7 +6078,7 @@
         </p:blipFill>
         <p:spPr>
           <a:xfrm>
-            <a:off x="4293108" y="3867912"/>
+            <a:off x="4293108" y="3698748"/>
             <a:ext cx="173736" cy="173736"/>
           </a:xfrm>
           <a:prstGeom prst="rect">
@@ -6094,7 +6094,7 @@
         </p:nvSpPr>
         <p:spPr>
           <a:xfrm>
-            <a:off x="4544568" y="3826764"/>
+            <a:off x="4544568" y="3657600"/>
             <a:ext cx="256032" cy="256032"/>
           </a:xfrm>
           <a:prstGeom prst="roundRect">
@@ -6124,7 +6124,7 @@
         </p:blipFill>
         <p:spPr>
           <a:xfrm>
-            <a:off x="4585716" y="3867912"/>
+            <a:off x="4585716" y="3698748"/>
             <a:ext cx="173736" cy="173736"/>
           </a:xfrm>
           <a:prstGeom prst="rect">
@@ -6140,7 +6140,7 @@
         </p:nvSpPr>
         <p:spPr>
           <a:xfrm>
-            <a:off x="4837176" y="3826764"/>
+            <a:off x="4837176" y="3657600"/>
             <a:ext cx="256032" cy="256032"/>
           </a:xfrm>
           <a:prstGeom prst="roundRect">
@@ -6170,7 +6170,7 @@
         </p:blipFill>
         <p:spPr>
           <a:xfrm>
-            <a:off x="4878324" y="3867912"/>
+            <a:off x="4878324" y="3698748"/>
             <a:ext cx="173736" cy="173736"/>
           </a:xfrm>
           <a:prstGeom prst="rect">
@@ -6186,7 +6186,7 @@
         </p:nvSpPr>
         <p:spPr>
           <a:xfrm>
-            <a:off x="5129784" y="3826764"/>
+            <a:off x="5129784" y="3657600"/>
             <a:ext cx="256032" cy="256032"/>
           </a:xfrm>
           <a:prstGeom prst="roundRect">
@@ -6226,8 +6226,8 @@
         </p:nvSpPr>
         <p:spPr>
           <a:xfrm>
-            <a:off x="7315200" y="3785616"/>
-            <a:ext cx="4325112" cy="338328"/>
+            <a:off x="7315200" y="3631831"/>
+            <a:ext cx="4325112" cy="307571"/>
           </a:xfrm>
           <a:prstGeom prst="rect">
             <a:avLst/>
@@ -6262,7 +6262,7 @@
         </p:nvSpPr>
         <p:spPr>
           <a:xfrm>
-            <a:off x="548640" y="4123944"/>
+            <a:off x="548640" y="3939401"/>
             <a:ext cx="11091672" cy="0"/>
           </a:xfrm>
           <a:prstGeom prst="line">
@@ -6285,8 +6285,8 @@
         </p:nvSpPr>
         <p:spPr>
           <a:xfrm>
-            <a:off x="548640" y="4123944"/>
-            <a:ext cx="3611880" cy="338328"/>
+            <a:off x="548640" y="3939401"/>
+            <a:ext cx="3611880" cy="307571"/>
           </a:xfrm>
           <a:prstGeom prst="rect">
             <a:avLst/>
@@ -6321,7 +6321,7 @@
         </p:nvSpPr>
         <p:spPr>
           <a:xfrm>
-            <a:off x="4251960" y="4165092"/>
+            <a:off x="4251960" y="3965171"/>
             <a:ext cx="256032" cy="256032"/>
           </a:xfrm>
           <a:prstGeom prst="roundRect">
@@ -6351,7 +6351,7 @@
         </p:blipFill>
         <p:spPr>
           <a:xfrm>
-            <a:off x="4293108" y="4206240"/>
+            <a:off x="4293108" y="4006319"/>
             <a:ext cx="173736" cy="173736"/>
           </a:xfrm>
           <a:prstGeom prst="rect">
@@ -6367,7 +6367,7 @@
         </p:nvSpPr>
         <p:spPr>
           <a:xfrm>
-            <a:off x="4544568" y="4165092"/>
+            <a:off x="4544568" y="3965171"/>
             <a:ext cx="256032" cy="256032"/>
           </a:xfrm>
           <a:prstGeom prst="roundRect">
@@ -6397,7 +6397,7 @@
         </p:blipFill>
         <p:spPr>
           <a:xfrm>
-            <a:off x="4585716" y="4206240"/>
+            <a:off x="4585716" y="4006319"/>
             <a:ext cx="173736" cy="173736"/>
           </a:xfrm>
           <a:prstGeom prst="rect">
@@ -6413,7 +6413,7 @@
         </p:nvSpPr>
         <p:spPr>
           <a:xfrm>
-            <a:off x="4837176" y="4165092"/>
+            <a:off x="4837176" y="3965171"/>
             <a:ext cx="256032" cy="256032"/>
           </a:xfrm>
           <a:prstGeom prst="roundRect">
@@ -6443,7 +6443,7 @@
         </p:blipFill>
         <p:spPr>
           <a:xfrm>
-            <a:off x="4878324" y="4206240"/>
+            <a:off x="4878324" y="4006319"/>
             <a:ext cx="173736" cy="173736"/>
           </a:xfrm>
           <a:prstGeom prst="rect">
@@ -6459,7 +6459,7 @@
         </p:nvSpPr>
         <p:spPr>
           <a:xfrm>
-            <a:off x="5129784" y="4165092"/>
+            <a:off x="5129784" y="3965171"/>
             <a:ext cx="256032" cy="256032"/>
           </a:xfrm>
           <a:prstGeom prst="roundRect">
@@ -6499,8 +6499,8 @@
         </p:nvSpPr>
         <p:spPr>
           <a:xfrm>
-            <a:off x="7315200" y="4123944"/>
-            <a:ext cx="4325112" cy="338328"/>
+            <a:off x="7315200" y="3939401"/>
+            <a:ext cx="4325112" cy="307571"/>
           </a:xfrm>
           <a:prstGeom prst="rect">
             <a:avLst/>
@@ -6535,7 +6535,7 @@
         </p:nvSpPr>
         <p:spPr>
           <a:xfrm>
-            <a:off x="548640" y="4462272"/>
+            <a:off x="548640" y="4246972"/>
             <a:ext cx="11091672" cy="0"/>
           </a:xfrm>
           <a:prstGeom prst="line">
@@ -6558,8 +6558,8 @@
         </p:nvSpPr>
         <p:spPr>
           <a:xfrm>
-            <a:off x="548640" y="4462272"/>
-            <a:ext cx="3611880" cy="338328"/>
+            <a:off x="548640" y="4246972"/>
+            <a:ext cx="3611880" cy="307571"/>
           </a:xfrm>
           <a:prstGeom prst="rect">
             <a:avLst/>
@@ -6594,7 +6594,7 @@
         </p:nvSpPr>
         <p:spPr>
           <a:xfrm>
-            <a:off x="4251960" y="4503420"/>
+            <a:off x="4251960" y="4272742"/>
             <a:ext cx="256032" cy="256032"/>
           </a:xfrm>
           <a:prstGeom prst="roundRect">
@@ -6624,7 +6624,7 @@
         </p:blipFill>
         <p:spPr>
           <a:xfrm>
-            <a:off x="4293108" y="4544568"/>
+            <a:off x="4293108" y="4313890"/>
             <a:ext cx="173736" cy="173736"/>
           </a:xfrm>
           <a:prstGeom prst="rect">
@@ -6640,7 +6640,7 @@
         </p:nvSpPr>
         <p:spPr>
           <a:xfrm>
-            <a:off x="4544568" y="4503420"/>
+            <a:off x="4544568" y="4272742"/>
             <a:ext cx="256032" cy="256032"/>
           </a:xfrm>
           <a:prstGeom prst="roundRect">
@@ -6670,7 +6670,7 @@
         </p:blipFill>
         <p:spPr>
           <a:xfrm>
-            <a:off x="4585716" y="4544568"/>
+            <a:off x="4585716" y="4313890"/>
             <a:ext cx="173736" cy="173736"/>
           </a:xfrm>
           <a:prstGeom prst="rect">
@@ -6686,7 +6686,7 @@
         </p:nvSpPr>
         <p:spPr>
           <a:xfrm>
-            <a:off x="4837176" y="4503420"/>
+            <a:off x="4837176" y="4272742"/>
             <a:ext cx="256032" cy="256032"/>
           </a:xfrm>
           <a:prstGeom prst="roundRect">
@@ -6716,7 +6716,7 @@
         </p:blipFill>
         <p:spPr>
           <a:xfrm>
-            <a:off x="4878324" y="4544568"/>
+            <a:off x="4878324" y="4313890"/>
             <a:ext cx="173736" cy="173736"/>
           </a:xfrm>
           <a:prstGeom prst="rect">
@@ -6732,7 +6732,7 @@
         </p:nvSpPr>
         <p:spPr>
           <a:xfrm>
-            <a:off x="5129784" y="4503420"/>
+            <a:off x="5129784" y="4272742"/>
             <a:ext cx="256032" cy="256032"/>
           </a:xfrm>
           <a:prstGeom prst="roundRect">
@@ -6772,8 +6772,8 @@
         </p:nvSpPr>
         <p:spPr>
           <a:xfrm>
-            <a:off x="7315200" y="4462272"/>
-            <a:ext cx="4325112" cy="338328"/>
+            <a:off x="7315200" y="4246972"/>
+            <a:ext cx="4325112" cy="307571"/>
           </a:xfrm>
           <a:prstGeom prst="rect">
             <a:avLst/>
@@ -6808,7 +6808,7 @@
         </p:nvSpPr>
         <p:spPr>
           <a:xfrm>
-            <a:off x="548640" y="4800600"/>
+            <a:off x="548640" y="4554543"/>
             <a:ext cx="11091672" cy="0"/>
           </a:xfrm>
           <a:prstGeom prst="line">
@@ -6831,8 +6831,8 @@
         </p:nvSpPr>
         <p:spPr>
           <a:xfrm>
-            <a:off x="548640" y="4800600"/>
-            <a:ext cx="3611880" cy="338328"/>
+            <a:off x="548640" y="4554543"/>
+            <a:ext cx="3611880" cy="307571"/>
           </a:xfrm>
           <a:prstGeom prst="rect">
             <a:avLst/>
@@ -6853,7 +6853,7 @@
                   <a:schemeClr val="tx1"/>
                 </a:solidFill>
               </a:rPr>
-              <a:t>R14. Самокалибровка датчика</a:t>
+              <a:t>M1. Два робота с координацией</a:t>
             </a:r>
             <a:endParaRPr lang="en-US" sz="1600" dirty="0"/>
           </a:p>
@@ -6867,7 +6867,7 @@
         </p:nvSpPr>
         <p:spPr>
           <a:xfrm>
-            <a:off x="4251960" y="4841748"/>
+            <a:off x="4251960" y="4580313"/>
             <a:ext cx="256032" cy="256032"/>
           </a:xfrm>
           <a:prstGeom prst="roundRect">
@@ -6897,7 +6897,7 @@
         </p:blipFill>
         <p:spPr>
           <a:xfrm>
-            <a:off x="4293108" y="4882896"/>
+            <a:off x="4293108" y="4621461"/>
             <a:ext cx="173736" cy="173736"/>
           </a:xfrm>
           <a:prstGeom prst="rect">
@@ -6913,7 +6913,7 @@
         </p:nvSpPr>
         <p:spPr>
           <a:xfrm>
-            <a:off x="4544568" y="4841748"/>
+            <a:off x="4544568" y="4580313"/>
             <a:ext cx="256032" cy="256032"/>
           </a:xfrm>
           <a:prstGeom prst="roundRect">
@@ -6943,7 +6943,7 @@
         </p:blipFill>
         <p:spPr>
           <a:xfrm>
-            <a:off x="4585716" y="4882896"/>
+            <a:off x="4585716" y="4621461"/>
             <a:ext cx="173736" cy="173736"/>
           </a:xfrm>
           <a:prstGeom prst="rect">
@@ -6953,108 +6953,13 @@
       </p:pic>
       <p:sp>
         <p:nvSpPr>
-          <p:cNvPr id="127" name="lane-9-result"/>
-          <p:cNvSpPr txBox="1"/>
-          <p:nvPr/>
-        </p:nvSpPr>
-        <p:spPr>
-          <a:xfrm>
-            <a:off x="7315200" y="4800600"/>
-            <a:ext cx="4325112" cy="338328"/>
-          </a:xfrm>
-          <a:prstGeom prst="rect">
-            <a:avLst/>
-          </a:prstGeom>
-          <a:noFill/>
-          <a:ln/>
-        </p:spPr>
-        <p:txBody>
-          <a:bodyPr wrap="none" lIns="0" tIns="0" rIns="0" bIns="0" rtlCol="0" anchor="ctr"/>
-          <a:lstStyle/>
-          <a:p>
-            <a:pPr algn="l" indent="0" marL="0">
-              <a:buNone/>
-            </a:pPr>
-            <a:r>
-              <a:rPr lang="en-US" sz="1400" dirty="0">
-                <a:solidFill>
-                  <a:schemeClr val="tx2"/>
-                </a:solidFill>
-              </a:rPr>
-              <a:t>ревью вернуло работу; отложена</a:t>
-            </a:r>
-            <a:endParaRPr lang="en-US" sz="1400" dirty="0"/>
-          </a:p>
-        </p:txBody>
-      </p:sp>
-      <p:sp>
-        <p:nvSpPr>
-          <p:cNvPr id="128" name="lane-10-rule"/>
-          <p:cNvSpPr/>
-          <p:nvPr/>
-        </p:nvSpPr>
-        <p:spPr>
-          <a:xfrm>
-            <a:off x="548640" y="5138928"/>
-            <a:ext cx="11091672" cy="0"/>
-          </a:xfrm>
-          <a:prstGeom prst="line">
-            <a:avLst/>
-          </a:prstGeom>
-          <a:noFill/>
-          <a:ln w="12700">
-            <a:solidFill>
-              <a:schemeClr val="bg2"/>
-            </a:solidFill>
-            <a:prstDash val="solid"/>
-          </a:ln>
-        </p:spPr>
-      </p:sp>
-      <p:sp>
-        <p:nvSpPr>
-          <p:cNvPr id="129" name="lane-10-name"/>
-          <p:cNvSpPr txBox="1"/>
-          <p:nvPr/>
-        </p:nvSpPr>
-        <p:spPr>
-          <a:xfrm>
-            <a:off x="548640" y="5138928"/>
-            <a:ext cx="3611880" cy="338328"/>
-          </a:xfrm>
-          <a:prstGeom prst="rect">
-            <a:avLst/>
-          </a:prstGeom>
-          <a:noFill/>
-          <a:ln/>
-        </p:spPr>
-        <p:txBody>
-          <a:bodyPr wrap="none" lIns="0" tIns="0" rIns="0" bIns="0" rtlCol="0" anchor="ctr"/>
-          <a:lstStyle/>
-          <a:p>
-            <a:pPr algn="l" indent="0" marL="0">
-              <a:buNone/>
-            </a:pPr>
-            <a:r>
-              <a:rPr lang="en-US" sz="1600" b="1" dirty="0">
-                <a:solidFill>
-                  <a:schemeClr val="tx1"/>
-                </a:solidFill>
-              </a:rPr>
-              <a:t>F2. SLAM вместо готовой карты</a:t>
-            </a:r>
-            <a:endParaRPr lang="en-US" sz="1600" dirty="0"/>
-          </a:p>
-        </p:txBody>
-      </p:sp>
-      <p:sp>
-        <p:nvSpPr>
-          <p:cNvPr id="130" name="lane-10-chip-1-tile"/>
-          <p:cNvSpPr/>
-          <p:nvPr/>
-        </p:nvSpPr>
-        <p:spPr>
-          <a:xfrm>
-            <a:off x="4251960" y="5180076"/>
+          <p:cNvPr id="127" name="lane-9-chip-3-tile"/>
+          <p:cNvSpPr/>
+          <p:nvPr/>
+        </p:nvSpPr>
+        <p:spPr>
+          <a:xfrm>
+            <a:off x="4837176" y="4580313"/>
             <a:ext cx="256032" cy="256032"/>
           </a:xfrm>
           <a:prstGeom prst="roundRect">
@@ -7070,7 +6975,7 @@
       </p:sp>
       <p:pic>
         <p:nvPicPr>
-          <p:cNvPr id="131" name="lane-10-chip-1" descr="/Users/a/MAI/DID/presentation/assets/logos/gemini.png">    </p:cNvPr>
+          <p:cNvPr id="128" name="lane-9-chip-3" descr="/Users/a/MAI/DID/presentation/assets/logos/claude.png">    </p:cNvPr>
           <p:cNvPicPr>
             <a:picLocks noChangeAspect="1"/>
           </p:cNvPicPr>
@@ -7084,7 +6989,7 @@
         </p:blipFill>
         <p:spPr>
           <a:xfrm>
-            <a:off x="4293108" y="5221224"/>
+            <a:off x="4878324" y="4621461"/>
             <a:ext cx="173736" cy="173736"/>
           </a:xfrm>
           <a:prstGeom prst="rect">
@@ -7094,13 +6999,13 @@
       </p:pic>
       <p:sp>
         <p:nvSpPr>
-          <p:cNvPr id="132" name="lane-10-chip-2-tile"/>
-          <p:cNvSpPr/>
-          <p:nvPr/>
-        </p:nvSpPr>
-        <p:spPr>
-          <a:xfrm>
-            <a:off x="4544568" y="5180076"/>
+          <p:cNvPr id="129" name="lane-9-chip-4"/>
+          <p:cNvSpPr txBox="1"/>
+          <p:nvPr/>
+        </p:nvSpPr>
+        <p:spPr>
+          <a:xfrm>
+            <a:off x="5129784" y="4580313"/>
             <a:ext cx="256032" cy="256032"/>
           </a:xfrm>
           <a:prstGeom prst="roundRect">
@@ -7109,6 +7014,141 @@
             </a:avLst>
           </a:prstGeom>
           <a:solidFill>
+            <a:schemeClr val="accent3"/>
+          </a:solidFill>
+          <a:ln/>
+        </p:spPr>
+        <p:txBody>
+          <a:bodyPr wrap="square" lIns="0" tIns="0" rIns="0" bIns="0" rtlCol="0" anchor="ctr"/>
+          <a:lstStyle/>
+          <a:p>
+            <a:pPr algn="ctr" indent="0" marL="0">
+              <a:buNone/>
+            </a:pPr>
+            <a:r>
+              <a:rPr lang="en-US" sz="1300" b="1" dirty="0">
+                <a:solidFill>
+                  <a:schemeClr val="bg1"/>
+                </a:solidFill>
+              </a:rPr>
+              <a:t>✓</a:t>
+            </a:r>
+            <a:endParaRPr lang="en-US" sz="1300" dirty="0"/>
+          </a:p>
+        </p:txBody>
+      </p:sp>
+      <p:sp>
+        <p:nvSpPr>
+          <p:cNvPr id="130" name="lane-9-result"/>
+          <p:cNvSpPr txBox="1"/>
+          <p:nvPr/>
+        </p:nvSpPr>
+        <p:spPr>
+          <a:xfrm>
+            <a:off x="7315200" y="4554543"/>
+            <a:ext cx="4325112" cy="307571"/>
+          </a:xfrm>
+          <a:prstGeom prst="rect">
+            <a:avLst/>
+          </a:prstGeom>
+          <a:noFill/>
+          <a:ln/>
+        </p:spPr>
+        <p:txBody>
+          <a:bodyPr wrap="none" lIns="0" tIns="0" rIns="0" bIns="0" rtlCol="0" anchor="ctr"/>
+          <a:lstStyle/>
+          <a:p>
+            <a:pPr algn="l" indent="0" marL="0">
+              <a:buNone/>
+            </a:pPr>
+            <a:r>
+              <a:rPr lang="en-US" sz="1400" dirty="0">
+                <a:solidFill>
+                  <a:schemeClr val="tx2"/>
+                </a:solidFill>
+              </a:rPr>
+              <a:t>прогон короче на 31 с, заряда на четверть меньше</a:t>
+            </a:r>
+            <a:endParaRPr lang="en-US" sz="1400" dirty="0"/>
+          </a:p>
+        </p:txBody>
+      </p:sp>
+      <p:sp>
+        <p:nvSpPr>
+          <p:cNvPr id="131" name="lane-10-rule"/>
+          <p:cNvSpPr/>
+          <p:nvPr/>
+        </p:nvSpPr>
+        <p:spPr>
+          <a:xfrm>
+            <a:off x="548640" y="4862114"/>
+            <a:ext cx="11091672" cy="0"/>
+          </a:xfrm>
+          <a:prstGeom prst="line">
+            <a:avLst/>
+          </a:prstGeom>
+          <a:noFill/>
+          <a:ln w="12700">
+            <a:solidFill>
+              <a:schemeClr val="bg2"/>
+            </a:solidFill>
+            <a:prstDash val="solid"/>
+          </a:ln>
+        </p:spPr>
+      </p:sp>
+      <p:sp>
+        <p:nvSpPr>
+          <p:cNvPr id="132" name="lane-10-name"/>
+          <p:cNvSpPr txBox="1"/>
+          <p:nvPr/>
+        </p:nvSpPr>
+        <p:spPr>
+          <a:xfrm>
+            <a:off x="548640" y="4862114"/>
+            <a:ext cx="3611880" cy="307571"/>
+          </a:xfrm>
+          <a:prstGeom prst="rect">
+            <a:avLst/>
+          </a:prstGeom>
+          <a:noFill/>
+          <a:ln/>
+        </p:spPr>
+        <p:txBody>
+          <a:bodyPr wrap="none" lIns="0" tIns="0" rIns="0" bIns="0" rtlCol="0" anchor="ctr"/>
+          <a:lstStyle/>
+          <a:p>
+            <a:pPr algn="l" indent="0" marL="0">
+              <a:buNone/>
+            </a:pPr>
+            <a:r>
+              <a:rPr lang="en-US" sz="1600" b="1" dirty="0">
+                <a:solidFill>
+                  <a:schemeClr val="tx1"/>
+                </a:solidFill>
+              </a:rPr>
+              <a:t>R14. Самокалибровка датчика</a:t>
+            </a:r>
+            <a:endParaRPr lang="en-US" sz="1600" dirty="0"/>
+          </a:p>
+        </p:txBody>
+      </p:sp>
+      <p:sp>
+        <p:nvSpPr>
+          <p:cNvPr id="133" name="lane-10-chip-1-tile"/>
+          <p:cNvSpPr/>
+          <p:nvPr/>
+        </p:nvSpPr>
+        <p:spPr>
+          <a:xfrm>
+            <a:off x="4251960" y="4887884"/>
+            <a:ext cx="256032" cy="256032"/>
+          </a:xfrm>
+          <a:prstGeom prst="roundRect">
+            <a:avLst>
+              <a:gd name="adj" fmla="val 14286"/>
+            </a:avLst>
+          </a:prstGeom>
+          <a:solidFill>
             <a:schemeClr val="bg2"/>
           </a:solidFill>
           <a:ln/>
@@ -7116,7 +7156,7 @@
       </p:sp>
       <p:pic>
         <p:nvPicPr>
-          <p:cNvPr id="133" name="lane-10-chip-2" descr="/Users/a/MAI/DID/presentation/assets/logos/claude.png">    </p:cNvPr>
+          <p:cNvPr id="134" name="lane-10-chip-1" descr="/Users/a/MAI/DID/presentation/assets/logos/claude.png">    </p:cNvPr>
           <p:cNvPicPr>
             <a:picLocks noChangeAspect="1"/>
           </p:cNvPicPr>
@@ -7130,7 +7170,7 @@
         </p:blipFill>
         <p:spPr>
           <a:xfrm>
-            <a:off x="4585716" y="5221224"/>
+            <a:off x="4293108" y="4929032"/>
             <a:ext cx="173736" cy="173736"/>
           </a:xfrm>
           <a:prstGeom prst="rect">
@@ -7140,13 +7180,13 @@
       </p:pic>
       <p:sp>
         <p:nvSpPr>
-          <p:cNvPr id="134" name="lane-10-chip-3-tile"/>
-          <p:cNvSpPr/>
-          <p:nvPr/>
-        </p:nvSpPr>
-        <p:spPr>
-          <a:xfrm>
-            <a:off x="4837176" y="5180076"/>
+          <p:cNvPr id="135" name="lane-10-chip-2-tile"/>
+          <p:cNvSpPr/>
+          <p:nvPr/>
+        </p:nvSpPr>
+        <p:spPr>
+          <a:xfrm>
+            <a:off x="4544568" y="4887884"/>
             <a:ext cx="256032" cy="256032"/>
           </a:xfrm>
           <a:prstGeom prst="roundRect">
@@ -7162,7 +7202,7 @@
       </p:sp>
       <p:pic>
         <p:nvPicPr>
-          <p:cNvPr id="135" name="lane-10-chip-3" descr="/Users/a/MAI/DID/presentation/assets/logos/openai.png">    </p:cNvPr>
+          <p:cNvPr id="136" name="lane-10-chip-2" descr="/Users/a/MAI/DID/presentation/assets/logos/openai.png">    </p:cNvPr>
           <p:cNvPicPr>
             <a:picLocks noChangeAspect="1"/>
           </p:cNvPicPr>
@@ -7176,7 +7216,7 @@
         </p:blipFill>
         <p:spPr>
           <a:xfrm>
-            <a:off x="4878324" y="5221224"/>
+            <a:off x="4585716" y="4929032"/>
             <a:ext cx="173736" cy="173736"/>
           </a:xfrm>
           <a:prstGeom prst="rect">
@@ -7186,13 +7226,108 @@
       </p:pic>
       <p:sp>
         <p:nvSpPr>
-          <p:cNvPr id="136" name="lane-10-chip-4-tile"/>
-          <p:cNvSpPr/>
-          <p:nvPr/>
-        </p:nvSpPr>
-        <p:spPr>
-          <a:xfrm>
-            <a:off x="5129784" y="5180076"/>
+          <p:cNvPr id="137" name="lane-10-result"/>
+          <p:cNvSpPr txBox="1"/>
+          <p:nvPr/>
+        </p:nvSpPr>
+        <p:spPr>
+          <a:xfrm>
+            <a:off x="7315200" y="4862114"/>
+            <a:ext cx="4325112" cy="307571"/>
+          </a:xfrm>
+          <a:prstGeom prst="rect">
+            <a:avLst/>
+          </a:prstGeom>
+          <a:noFill/>
+          <a:ln/>
+        </p:spPr>
+        <p:txBody>
+          <a:bodyPr wrap="none" lIns="0" tIns="0" rIns="0" bIns="0" rtlCol="0" anchor="ctr"/>
+          <a:lstStyle/>
+          <a:p>
+            <a:pPr algn="l" indent="0" marL="0">
+              <a:buNone/>
+            </a:pPr>
+            <a:r>
+              <a:rPr lang="en-US" sz="1400" dirty="0">
+                <a:solidFill>
+                  <a:schemeClr val="tx2"/>
+                </a:solidFill>
+              </a:rPr>
+              <a:t>ревью вернуло работу; отложена</a:t>
+            </a:r>
+            <a:endParaRPr lang="en-US" sz="1400" dirty="0"/>
+          </a:p>
+        </p:txBody>
+      </p:sp>
+      <p:sp>
+        <p:nvSpPr>
+          <p:cNvPr id="138" name="lane-11-rule"/>
+          <p:cNvSpPr/>
+          <p:nvPr/>
+        </p:nvSpPr>
+        <p:spPr>
+          <a:xfrm>
+            <a:off x="548640" y="5169685"/>
+            <a:ext cx="11091672" cy="0"/>
+          </a:xfrm>
+          <a:prstGeom prst="line">
+            <a:avLst/>
+          </a:prstGeom>
+          <a:noFill/>
+          <a:ln w="12700">
+            <a:solidFill>
+              <a:schemeClr val="bg2"/>
+            </a:solidFill>
+            <a:prstDash val="solid"/>
+          </a:ln>
+        </p:spPr>
+      </p:sp>
+      <p:sp>
+        <p:nvSpPr>
+          <p:cNvPr id="139" name="lane-11-name"/>
+          <p:cNvSpPr txBox="1"/>
+          <p:nvPr/>
+        </p:nvSpPr>
+        <p:spPr>
+          <a:xfrm>
+            <a:off x="548640" y="5169685"/>
+            <a:ext cx="3611880" cy="307571"/>
+          </a:xfrm>
+          <a:prstGeom prst="rect">
+            <a:avLst/>
+          </a:prstGeom>
+          <a:noFill/>
+          <a:ln/>
+        </p:spPr>
+        <p:txBody>
+          <a:bodyPr wrap="none" lIns="0" tIns="0" rIns="0" bIns="0" rtlCol="0" anchor="ctr"/>
+          <a:lstStyle/>
+          <a:p>
+            <a:pPr algn="l" indent="0" marL="0">
+              <a:buNone/>
+            </a:pPr>
+            <a:r>
+              <a:rPr lang="en-US" sz="1600" b="1" dirty="0">
+                <a:solidFill>
+                  <a:schemeClr val="tx1"/>
+                </a:solidFill>
+              </a:rPr>
+              <a:t>F2. SLAM вместо готовой карты</a:t>
+            </a:r>
+            <a:endParaRPr lang="en-US" sz="1600" dirty="0"/>
+          </a:p>
+        </p:txBody>
+      </p:sp>
+      <p:sp>
+        <p:nvSpPr>
+          <p:cNvPr id="140" name="lane-11-chip-1-tile"/>
+          <p:cNvSpPr/>
+          <p:nvPr/>
+        </p:nvSpPr>
+        <p:spPr>
+          <a:xfrm>
+            <a:off x="4251960" y="5195455"/>
             <a:ext cx="256032" cy="256032"/>
           </a:xfrm>
           <a:prstGeom prst="roundRect">
@@ -7208,7 +7343,7 @@
       </p:sp>
       <p:pic>
         <p:nvPicPr>
-          <p:cNvPr id="137" name="lane-10-chip-4" descr="/Users/a/MAI/DID/presentation/assets/logos/claude.png">    </p:cNvPr>
+          <p:cNvPr id="141" name="lane-11-chip-1" descr="/Users/a/MAI/DID/presentation/assets/logos/gemini.png">    </p:cNvPr>
           <p:cNvPicPr>
             <a:picLocks noChangeAspect="1"/>
           </p:cNvPicPr>
@@ -7222,7 +7357,7 @@
         </p:blipFill>
         <p:spPr>
           <a:xfrm>
-            <a:off x="5170932" y="5221224"/>
+            <a:off x="4293108" y="5236603"/>
             <a:ext cx="173736" cy="173736"/>
           </a:xfrm>
           <a:prstGeom prst="rect">
@@ -7232,13 +7367,13 @@
       </p:pic>
       <p:sp>
         <p:nvSpPr>
-          <p:cNvPr id="138" name="lane-10-chip-5-tile"/>
-          <p:cNvSpPr/>
-          <p:nvPr/>
-        </p:nvSpPr>
-        <p:spPr>
-          <a:xfrm>
-            <a:off x="5422392" y="5180076"/>
+          <p:cNvPr id="142" name="lane-11-chip-2-tile"/>
+          <p:cNvSpPr/>
+          <p:nvPr/>
+        </p:nvSpPr>
+        <p:spPr>
+          <a:xfrm>
+            <a:off x="4544568" y="5195455"/>
             <a:ext cx="256032" cy="256032"/>
           </a:xfrm>
           <a:prstGeom prst="roundRect">
@@ -7254,7 +7389,7 @@
       </p:sp>
       <p:pic>
         <p:nvPicPr>
-          <p:cNvPr id="139" name="lane-10-chip-5" descr="/Users/a/MAI/DID/presentation/assets/logos/openai.png">    </p:cNvPr>
+          <p:cNvPr id="143" name="lane-11-chip-2" descr="/Users/a/MAI/DID/presentation/assets/logos/claude.png">    </p:cNvPr>
           <p:cNvPicPr>
             <a:picLocks noChangeAspect="1"/>
           </p:cNvPicPr>
@@ -7268,7 +7403,7 @@
         </p:blipFill>
         <p:spPr>
           <a:xfrm>
-            <a:off x="5463540" y="5221224"/>
+            <a:off x="4585716" y="5236603"/>
             <a:ext cx="173736" cy="173736"/>
           </a:xfrm>
           <a:prstGeom prst="rect">
@@ -7278,13 +7413,13 @@
       </p:pic>
       <p:sp>
         <p:nvSpPr>
-          <p:cNvPr id="140" name="lane-10-chip-6-tile"/>
-          <p:cNvSpPr/>
-          <p:nvPr/>
-        </p:nvSpPr>
-        <p:spPr>
-          <a:xfrm>
-            <a:off x="5715000" y="5180076"/>
+          <p:cNvPr id="144" name="lane-11-chip-3-tile"/>
+          <p:cNvSpPr/>
+          <p:nvPr/>
+        </p:nvSpPr>
+        <p:spPr>
+          <a:xfrm>
+            <a:off x="4837176" y="5195455"/>
             <a:ext cx="256032" cy="256032"/>
           </a:xfrm>
           <a:prstGeom prst="roundRect">
@@ -7300,7 +7435,7 @@
       </p:sp>
       <p:pic>
         <p:nvPicPr>
-          <p:cNvPr id="141" name="lane-10-chip-6" descr="/Users/a/MAI/DID/presentation/assets/logos/claude.png">    </p:cNvPr>
+          <p:cNvPr id="145" name="lane-11-chip-3" descr="/Users/a/MAI/DID/presentation/assets/logos/openai.png">    </p:cNvPr>
           <p:cNvPicPr>
             <a:picLocks noChangeAspect="1"/>
           </p:cNvPicPr>
@@ -7314,7 +7449,7 @@
         </p:blipFill>
         <p:spPr>
           <a:xfrm>
-            <a:off x="5756148" y="5221224"/>
+            <a:off x="4878324" y="5236603"/>
             <a:ext cx="173736" cy="173736"/>
           </a:xfrm>
           <a:prstGeom prst="rect">
@@ -7324,13 +7459,13 @@
       </p:pic>
       <p:sp>
         <p:nvSpPr>
-          <p:cNvPr id="142" name="lane-10-chip-7"/>
-          <p:cNvSpPr txBox="1"/>
-          <p:nvPr/>
-        </p:nvSpPr>
-        <p:spPr>
-          <a:xfrm>
-            <a:off x="6007608" y="5180076"/>
+          <p:cNvPr id="146" name="lane-11-chip-4-tile"/>
+          <p:cNvSpPr/>
+          <p:nvPr/>
+        </p:nvSpPr>
+        <p:spPr>
+          <a:xfrm>
+            <a:off x="5129784" y="5195455"/>
             <a:ext cx="256032" cy="256032"/>
           </a:xfrm>
           <a:prstGeom prst="roundRect">
@@ -7339,6 +7474,144 @@
             </a:avLst>
           </a:prstGeom>
           <a:solidFill>
+            <a:schemeClr val="bg2"/>
+          </a:solidFill>
+          <a:ln/>
+        </p:spPr>
+      </p:sp>
+      <p:pic>
+        <p:nvPicPr>
+          <p:cNvPr id="147" name="lane-11-chip-4" descr="/Users/a/MAI/DID/presentation/assets/logos/claude.png">    </p:cNvPr>
+          <p:cNvPicPr>
+            <a:picLocks noChangeAspect="1"/>
+          </p:cNvPicPr>
+          <p:nvPr/>
+        </p:nvPicPr>
+        <p:blipFill>
+          <a:blip r:embed="rId48"/>
+          <a:stretch>
+            <a:fillRect/>
+          </a:stretch>
+        </p:blipFill>
+        <p:spPr>
+          <a:xfrm>
+            <a:off x="5170932" y="5236603"/>
+            <a:ext cx="173736" cy="173736"/>
+          </a:xfrm>
+          <a:prstGeom prst="rect">
+            <a:avLst/>
+          </a:prstGeom>
+        </p:spPr>
+      </p:pic>
+      <p:sp>
+        <p:nvSpPr>
+          <p:cNvPr id="148" name="lane-11-chip-5-tile"/>
+          <p:cNvSpPr/>
+          <p:nvPr/>
+        </p:nvSpPr>
+        <p:spPr>
+          <a:xfrm>
+            <a:off x="5422392" y="5195455"/>
+            <a:ext cx="256032" cy="256032"/>
+          </a:xfrm>
+          <a:prstGeom prst="roundRect">
+            <a:avLst>
+              <a:gd name="adj" fmla="val 14286"/>
+            </a:avLst>
+          </a:prstGeom>
+          <a:solidFill>
+            <a:schemeClr val="bg2"/>
+          </a:solidFill>
+          <a:ln/>
+        </p:spPr>
+      </p:sp>
+      <p:pic>
+        <p:nvPicPr>
+          <p:cNvPr id="149" name="lane-11-chip-5" descr="/Users/a/MAI/DID/presentation/assets/logos/openai.png">    </p:cNvPr>
+          <p:cNvPicPr>
+            <a:picLocks noChangeAspect="1"/>
+          </p:cNvPicPr>
+          <p:nvPr/>
+        </p:nvPicPr>
+        <p:blipFill>
+          <a:blip r:embed="rId49"/>
+          <a:stretch>
+            <a:fillRect/>
+          </a:stretch>
+        </p:blipFill>
+        <p:spPr>
+          <a:xfrm>
+            <a:off x="5463540" y="5236603"/>
+            <a:ext cx="173736" cy="173736"/>
+          </a:xfrm>
+          <a:prstGeom prst="rect">
+            <a:avLst/>
+          </a:prstGeom>
+        </p:spPr>
+      </p:pic>
+      <p:sp>
+        <p:nvSpPr>
+          <p:cNvPr id="150" name="lane-11-chip-6-tile"/>
+          <p:cNvSpPr/>
+          <p:nvPr/>
+        </p:nvSpPr>
+        <p:spPr>
+          <a:xfrm>
+            <a:off x="5715000" y="5195455"/>
+            <a:ext cx="256032" cy="256032"/>
+          </a:xfrm>
+          <a:prstGeom prst="roundRect">
+            <a:avLst>
+              <a:gd name="adj" fmla="val 14286"/>
+            </a:avLst>
+          </a:prstGeom>
+          <a:solidFill>
+            <a:schemeClr val="bg2"/>
+          </a:solidFill>
+          <a:ln/>
+        </p:spPr>
+      </p:sp>
+      <p:pic>
+        <p:nvPicPr>
+          <p:cNvPr id="151" name="lane-11-chip-6" descr="/Users/a/MAI/DID/presentation/assets/logos/claude.png">    </p:cNvPr>
+          <p:cNvPicPr>
+            <a:picLocks noChangeAspect="1"/>
+          </p:cNvPicPr>
+          <p:nvPr/>
+        </p:nvPicPr>
+        <p:blipFill>
+          <a:blip r:embed="rId50"/>
+          <a:stretch>
+            <a:fillRect/>
+          </a:stretch>
+        </p:blipFill>
+        <p:spPr>
+          <a:xfrm>
+            <a:off x="5756148" y="5236603"/>
+            <a:ext cx="173736" cy="173736"/>
+          </a:xfrm>
+          <a:prstGeom prst="rect">
+            <a:avLst/>
+          </a:prstGeom>
+        </p:spPr>
+      </p:pic>
+      <p:sp>
+        <p:nvSpPr>
+          <p:cNvPr id="152" name="lane-11-chip-7"/>
+          <p:cNvSpPr txBox="1"/>
+          <p:nvPr/>
+        </p:nvSpPr>
+        <p:spPr>
+          <a:xfrm>
+            <a:off x="6007608" y="5195455"/>
+            <a:ext cx="256032" cy="256032"/>
+          </a:xfrm>
+          <a:prstGeom prst="roundRect">
+            <a:avLst>
+              <a:gd name="adj" fmla="val 14286"/>
+            </a:avLst>
+          </a:prstGeom>
+          <a:solidFill>
             <a:schemeClr val="accent3"/>
           </a:solidFill>
           <a:ln/>
@@ -7364,14 +7637,14 @@
       </p:sp>
       <p:sp>
         <p:nvSpPr>
-          <p:cNvPr id="143" name="lane-10-result"/>
+          <p:cNvPr id="153" name="lane-11-result"/>
           <p:cNvSpPr txBox="1"/>
           <p:nvPr/>
         </p:nvSpPr>
         <p:spPr>
           <a:xfrm>
-            <a:off x="7315200" y="5138928"/>
-            <a:ext cx="4325112" cy="338328"/>
+            <a:off x="7315200" y="5169685"/>
+            <a:ext cx="4325112" cy="307571"/>
           </a:xfrm>
           <a:prstGeom prst="rect">
             <a:avLst/>
@@ -7400,7 +7673,7 @@
       </p:sp>
       <p:sp>
         <p:nvSpPr>
-          <p:cNvPr id="144" name="conclusion-card"/>
+          <p:cNvPr id="154" name="conclusion-card"/>
           <p:cNvSpPr/>
           <p:nvPr/>
         </p:nvSpPr>
@@ -7422,7 +7695,7 @@
       </p:sp>
       <p:sp>
         <p:nvSpPr>
-          <p:cNvPr id="145" name="conclusion-text"/>
+          <p:cNvPr id="155" name="conclusion-text"/>
           <p:cNvSpPr txBox="1"/>
           <p:nvPr/>
         </p:nvSpPr>

--- a/presentation/ai_process.pptx
+++ b/presentation/ai_process.pptx
@@ -108,7 +108,7 @@
   <p:extLst>
     <p:ext uri="{521415D9-36F7-43E2-AB2F-B90AF26B5E84}">
       <p14:sectionLst xmlns:p14="http://schemas.microsoft.com/office/powerpoint/2010/main">
-        <p14:section name="Как работали" id="{4c6ca5f3-111e-a6dd-1e0b-1129f93ab671}">
+        <p14:section name="Как работали" id="{aad8fc0c-15e0-dcd3-4643-3a4f83df7e6e}">
           <p14:sldIdLst>
             <p14:sldId id="256"/>
             <p14:sldId id="257"/>
@@ -518,7 +518,7 @@
           <a:p>
             <a:r>
               <a:rPr lang="en-US" dirty="0"/>
-              <a:t>С ИИ-агентами мы работали как в лаборатории: человек ею руководит, агенты в ней работают. Человек задаёт цель, роли и ограничения и принимает решения на развилках. Ведущий агент ведёт план, пишет задания остальным, сводит их работу в общий код и сам пересчитывает числа. Исследователи читают литературу и кода не пишут. Инженеры пишут код и ставят опыты, каждый в своей копии кода. Отдельная модель-ревьюер читает каждую правку до вливания и ищет ошибки. Советников зовём редко, на развилках. Каждое исследование идёт по одному кругу: вопрос и гипотеза, задание, код и опыт, независимое ревью, исправления, вливание, пересчёт чисел. За сутки — 45 поручений агентам, и все 11 ревью вернули работу на доработку: ни одна не прошла с первого раза. Агенты работали часами без участия человека, но направление, роли и приоритеты задавал человек.</a:t>
+              <a:t>С ИИ-агентами мы работали как в лаборатории: человек ею руководит, агенты в ней работают. Человек задаёт цель, роли и ограничения и принимает решения на развилках. Ведущий агент ведёт план, пишет задания остальным, сводит их работу в общий код и сам пересчитывает числа. Исследователи читают литературу и кода не пишут. Инженеры пишут код и ставят опыты, каждый в своей копии кода. Отдельная модель-ревьюер читает каждую правку до вливания и ищет ошибки. Советников зовём редко, на развилках. Каждое исследование идёт по одному кругу: вопрос и гипотеза, задание, код и опыт, независимое ревью, исправления, вливание, пересчёт чисел. Больше 45 поручений агентам, и первые 11 ревью подряд вернули работу на доработку: ни одна не прошла с первого раза. Агенты работали часами без участия человека, но направление, роли и приоритеты задавал человек.</a:t>
             </a:r>
             <a:endParaRPr lang="en-US" dirty="0"/>
           </a:p>
@@ -3186,7 +3186,7 @@
                   <a:schemeClr val="tx1"/>
                 </a:solidFill>
               </a:rPr>
-              <a:t>45</a:t>
+              <a:t>45+</a:t>
             </a:r>
             <a:endParaRPr lang="en-US" sz="2800" dirty="0"/>
           </a:p>
@@ -3316,7 +3316,7 @@
                   <a:schemeClr val="tx2"/>
                 </a:solidFill>
               </a:rPr>
-              <a:t>ревью вернули работу на доработку</a:t>
+              <a:t>первых ревью вернули работу на доработку</a:t>
             </a:r>
             <a:endParaRPr lang="en-US" sz="1300" dirty="0"/>
           </a:p>
@@ -3374,7 +3374,7 @@
                   <a:schemeClr val="tx1"/>
                 </a:solidFill>
               </a:rPr>
-              <a:t>104</a:t>
+              <a:t>176</a:t>
             </a:r>
             <a:endParaRPr lang="en-US" sz="2800" dirty="0"/>
           </a:p>
@@ -3410,7 +3410,7 @@
                   <a:schemeClr val="tx2"/>
                 </a:solidFill>
               </a:rPr>
-              <a:t>правки кода (коммита)</a:t>
+              <a:t>правок кода (коммитов)</a:t>
             </a:r>
             <a:endParaRPr lang="en-US" sz="1300" dirty="0"/>
           </a:p>
@@ -3446,7 +3446,7 @@
                   <a:schemeClr val="tx1"/>
                 </a:solidFill>
               </a:rPr>
-              <a:t>600+</a:t>
+              <a:t>740+</a:t>
             </a:r>
             <a:endParaRPr lang="en-US" sz="2800" dirty="0"/>
           </a:p>
@@ -3518,7 +3518,7 @@
                   <a:schemeClr val="tx1"/>
                 </a:solidFill>
               </a:rPr>
-              <a:t>7 500</a:t>
+              <a:t>13 300</a:t>
             </a:r>
             <a:endParaRPr lang="en-US" sz="2800" dirty="0"/>
           </a:p>

--- a/presentation/ai_process.pptx
+++ b/presentation/ai_process.pptx
@@ -108,7 +108,7 @@
   <p:extLst>
     <p:ext uri="{521415D9-36F7-43E2-AB2F-B90AF26B5E84}">
       <p14:sectionLst xmlns:p14="http://schemas.microsoft.com/office/powerpoint/2010/main">
-        <p14:section name="Как работали" id="{aad8fc0c-15e0-dcd3-4643-3a4f83df7e6e}">
+        <p14:section name="Как работали" id="{ef62e5d6-37a1-8558-4bed-993734af016e}">
           <p14:sldIdLst>
             <p14:sldId id="256"/>
             <p14:sldId id="257"/>
@@ -7067,7 +7067,7 @@
                   <a:schemeClr val="tx2"/>
                 </a:solidFill>
               </a:rPr>
-              <a:t>прогон короче на 31 с, заряда на четверть меньше</a:t>
+              <a:t>прогон короче на 26 с, заряда на четверть меньше</a:t>
             </a:r>
             <a:endParaRPr lang="en-US" sz="1400" dirty="0"/>
           </a:p>

--- a/presentation/ai_process.pptx
+++ b/presentation/ai_process.pptx
@@ -108,7 +108,7 @@
   <p:extLst>
     <p:ext uri="{521415D9-36F7-43E2-AB2F-B90AF26B5E84}">
       <p14:sectionLst xmlns:p14="http://schemas.microsoft.com/office/powerpoint/2010/main">
-        <p14:section name="Как работали" id="{ef62e5d6-37a1-8558-4bed-993734af016e}">
+        <p14:section name="Как работали" id="{1b2214fc-a13d-9cf9-2c1e-8d529efd69aa}">
           <p14:sldIdLst>
             <p14:sldId id="256"/>
             <p14:sldId id="257"/>
@@ -518,7 +518,7 @@
           <a:p>
             <a:r>
               <a:rPr lang="en-US" dirty="0"/>
-              <a:t>С ИИ-агентами мы работали как в лаборатории: человек ею руководит, агенты в ней работают. Человек задаёт цель, роли и ограничения и принимает решения на развилках. Ведущий агент ведёт план, пишет задания остальным, сводит их работу в общий код и сам пересчитывает числа. Исследователи читают литературу и кода не пишут. Инженеры пишут код и ставят опыты, каждый в своей копии кода. Отдельная модель-ревьюер читает каждую правку до вливания и ищет ошибки. Советников зовём редко, на развилках. Каждое исследование идёт по одному кругу: вопрос и гипотеза, задание, код и опыт, независимое ревью, исправления, вливание, пересчёт чисел. Больше 45 поручений агентам, и первые 11 ревью подряд вернули работу на доработку: ни одна не прошла с первого раза. Агенты работали часами без участия человека, но направление, роли и приоритеты задавал человек.</a:t>
+              <a:t>С ИИ-агентами мы работали как в лаборатории: человек ею руководит, агенты в ней работают. Человек задаёт цель, роли и ограничения и принимает решения на развилках. Ведущий агент ведёт план, пишет задания остальным, сводит их работу в общий код и сам пересчитывает числа. Исследователи читают литературу и кода не пишут. Инженеры пишут код и ставят опыты, каждый в своей копии кода. Отдельная модель-ревьюер читает каждую работу и ищет ошибки. Советников зовём редко, на развилках. Каждое исследование идёт по одному кругу: вопрос и гипотеза, задание, код и опыт, независимое ревью, исправления, вливание, пересчёт чисел. Больше 75 поручений агентам и 27 кругов ревью: ни одна из 15 работ не прошла ревью с первого раза. Агенты работали часами без участия человека, но направление, роли и приоритеты задавал человек.</a:t>
             </a:r>
             <a:endParaRPr lang="en-US" dirty="0"/>
           </a:p>
@@ -606,7 +606,7 @@
           <a:p>
             <a:r>
               <a:rPr lang="en-US" dirty="0"/>
-              <a:t>Каждая строка — одно исследование, каждый значок — один шаг: обзор исследователя, работа инженера или ревью. Галочка — работа принята. В первых двух исследованиях ревью нашло 7 ошибок, и два вывода пришлось перевернуть. В обзорах литературы проверка нашла две выдуманные ссылки. Робот с языковой моделью выполнил миссию, заданную словами, 6 из 6; робот с простым правилом — ни разу. Ожидание ответа модели стоило 73 очка; если робот едет, пока модель думает, возвращается 42 — эту работу ревью вернуло, она ещё не принята. В Gazebo робот вернулся на базу в прогонах 8 из 9, после правки — 7 из 7. Разбор потерь дал плюс шесть очков на трудном уровне. Не всё закончилось выигрышем: один опыт его не показал, новые схемы агента оказались не лучше нынешней, одну работу ревью вернуло, и мы её отложили. Качество держится на устройстве процесса, а не на вере в один ответ модели.</a:t>
+              <a:t>Каждая строка — одно исследование, каждый значок — один шаг: обзор исследователя, работа инженера или ревью. Галочка — работа принята. В первых двух исследованиях ревью нашло 7 ошибок, и два вывода пришлось перевернуть. В обзорах литературы проверка нашла две выдуманные ссылки. Робот с языковой моделью выполнил миссии, заданные словами, в 45–46 из 48 прогонов на каждой из трёх моделей; робот с правилом, которое текст не читает, — ни разу. Ожидание ответа модели стоило 73 очка; если робот едет по правилу, пока модель думает, возвращается 42 — это измерено на имитаторе модели, режим по умолчанию выключен. В Gazebo робот вернулся на базу в прогонах 8 из 9, после правки — 7 из 7. Разбор потерь дал плюс шесть очков на трудном уровне. Не всё закончилось выигрышем: реакция на смену грунта очков не дала, новые схемы агента оказались не лучше нынешней, пять правок по разбору потерь ничего не прибавили. Это записано как результаты. Качество держится на устройстве процесса, а не на вере в один ответ модели.</a:t>
             </a:r>
             <a:endParaRPr lang="en-US" dirty="0"/>
           </a:p>
@@ -1467,7 +1467,7 @@
                   <a:schemeClr val="bg2"/>
                 </a:solidFill>
               </a:rPr>
-              <a:t>около 40 сообщений за сутки</a:t>
+              <a:t>около 70 сообщений за 1,5 суток</a:t>
             </a:r>
             <a:endParaRPr lang="en-US" sz="1200" dirty="0"/>
           </a:p>
@@ -3092,7 +3092,7 @@
                   <a:schemeClr val="tx1"/>
                 </a:solidFill>
               </a:rPr>
-              <a:t>24 часа</a:t>
+              <a:t>1,5 суток</a:t>
             </a:r>
             <a:endParaRPr lang="en-US" sz="2800" dirty="0"/>
           </a:p>
@@ -3186,7 +3186,7 @@
                   <a:schemeClr val="tx1"/>
                 </a:solidFill>
               </a:rPr>
-              <a:t>45+</a:t>
+              <a:t>75+</a:t>
             </a:r>
             <a:endParaRPr lang="en-US" sz="2800" dirty="0"/>
           </a:p>
@@ -3280,7 +3280,7 @@
                   <a:schemeClr val="tx1"/>
                 </a:solidFill>
               </a:rPr>
-              <a:t>11 из 11</a:t>
+              <a:t>15 из 15</a:t>
             </a:r>
             <a:endParaRPr lang="en-US" sz="2800" dirty="0"/>
           </a:p>
@@ -3316,7 +3316,7 @@
                   <a:schemeClr val="tx2"/>
                 </a:solidFill>
               </a:rPr>
-              <a:t>первых ревью вернули работу на доработку</a:t>
+              <a:t>работ не прошли ревью с первого раза</a:t>
             </a:r>
             <a:endParaRPr lang="en-US" sz="1300" dirty="0"/>
           </a:p>
@@ -3353,7 +3353,7 @@
         <p:spPr>
           <a:xfrm>
             <a:off x="7516368" y="5294376"/>
-            <a:ext cx="1188720" cy="420624"/>
+            <a:ext cx="1005840" cy="420624"/>
           </a:xfrm>
           <a:prstGeom prst="rect">
             <a:avLst/>
@@ -3374,7 +3374,7 @@
                   <a:schemeClr val="tx1"/>
                 </a:solidFill>
               </a:rPr>
-              <a:t>176</a:t>
+              <a:t>241</a:t>
             </a:r>
             <a:endParaRPr lang="en-US" sz="2800" dirty="0"/>
           </a:p>
@@ -3389,7 +3389,7 @@
         <p:spPr>
           <a:xfrm>
             <a:off x="7516368" y="5724144"/>
-            <a:ext cx="1188720" cy="448056"/>
+            <a:ext cx="1005840" cy="448056"/>
           </a:xfrm>
           <a:prstGeom prst="rect">
             <a:avLst/>
@@ -3424,8 +3424,8 @@
         </p:nvSpPr>
         <p:spPr>
           <a:xfrm>
-            <a:off x="8796528" y="5294376"/>
-            <a:ext cx="1417320" cy="420624"/>
+            <a:off x="8613648" y="5294376"/>
+            <a:ext cx="1234440" cy="420624"/>
           </a:xfrm>
           <a:prstGeom prst="rect">
             <a:avLst/>
@@ -3446,7 +3446,7 @@
                   <a:schemeClr val="tx1"/>
                 </a:solidFill>
               </a:rPr>
-              <a:t>740+</a:t>
+              <a:t>982</a:t>
             </a:r>
             <a:endParaRPr lang="en-US" sz="2800" dirty="0"/>
           </a:p>
@@ -3460,8 +3460,8 @@
         </p:nvSpPr>
         <p:spPr>
           <a:xfrm>
-            <a:off x="8796528" y="5724144"/>
-            <a:ext cx="1417320" cy="448056"/>
+            <a:off x="8613648" y="5724144"/>
+            <a:ext cx="1234440" cy="448056"/>
           </a:xfrm>
           <a:prstGeom prst="rect">
             <a:avLst/>
@@ -3496,8 +3496,8 @@
         </p:nvSpPr>
         <p:spPr>
           <a:xfrm>
-            <a:off x="10305288" y="5294376"/>
-            <a:ext cx="1097280" cy="420624"/>
+            <a:off x="9939528" y="5294376"/>
+            <a:ext cx="1463040" cy="420624"/>
           </a:xfrm>
           <a:prstGeom prst="rect">
             <a:avLst/>
@@ -3518,7 +3518,7 @@
                   <a:schemeClr val="tx1"/>
                 </a:solidFill>
               </a:rPr>
-              <a:t>13 300</a:t>
+              <a:t>24 000+</a:t>
             </a:r>
             <a:endParaRPr lang="en-US" sz="2800" dirty="0"/>
           </a:p>
@@ -3532,8 +3532,8 @@
         </p:nvSpPr>
         <p:spPr>
           <a:xfrm>
-            <a:off x="10305288" y="5724144"/>
-            <a:ext cx="1097280" cy="448056"/>
+            <a:off x="9939528" y="5724144"/>
+            <a:ext cx="1463040" cy="448056"/>
           </a:xfrm>
           <a:prstGeom prst="rect">
             <a:avLst/>
@@ -3715,11 +3715,11 @@
         <p:spPr>
           <a:xfrm>
             <a:off x="548640" y="1700784"/>
-            <a:ext cx="256032" cy="256032"/>
-          </a:xfrm>
-          <a:prstGeom prst="roundRect">
-            <a:avLst>
-              <a:gd name="adj" fmla="val 14286"/>
+            <a:ext cx="237744" cy="237744"/>
+          </a:xfrm>
+          <a:prstGeom prst="roundRect">
+            <a:avLst>
+              <a:gd name="adj" fmla="val 15385"/>
             </a:avLst>
           </a:prstGeom>
           <a:solidFill>
@@ -3745,7 +3745,7 @@
         <p:spPr>
           <a:xfrm>
             <a:off x="589788" y="1741932"/>
-            <a:ext cx="173736" cy="173736"/>
+            <a:ext cx="155448" cy="155448"/>
           </a:xfrm>
           <a:prstGeom prst="rect">
             <a:avLst/>
@@ -3760,7 +3760,7 @@
         </p:nvSpPr>
         <p:spPr>
           <a:xfrm>
-            <a:off x="877824" y="1691640"/>
+            <a:off x="859536" y="1691640"/>
             <a:ext cx="2787091" cy="274320"/>
           </a:xfrm>
           <a:prstGeom prst="rect">
@@ -3796,12 +3796,12 @@
         </p:nvSpPr>
         <p:spPr>
           <a:xfrm>
-            <a:off x="3866083" y="1700784"/>
-            <a:ext cx="256032" cy="256032"/>
-          </a:xfrm>
-          <a:prstGeom prst="roundRect">
-            <a:avLst>
-              <a:gd name="adj" fmla="val 14286"/>
+            <a:off x="3847795" y="1700784"/>
+            <a:ext cx="237744" cy="237744"/>
+          </a:xfrm>
+          <a:prstGeom prst="roundRect">
+            <a:avLst>
+              <a:gd name="adj" fmla="val 15385"/>
             </a:avLst>
           </a:prstGeom>
           <a:solidFill>
@@ -3826,8 +3826,8 @@
         </p:blipFill>
         <p:spPr>
           <a:xfrm>
-            <a:off x="3907231" y="1741932"/>
-            <a:ext cx="173736" cy="173736"/>
+            <a:off x="3888943" y="1741932"/>
+            <a:ext cx="155448" cy="155448"/>
           </a:xfrm>
           <a:prstGeom prst="rect">
             <a:avLst/>
@@ -3842,7 +3842,7 @@
         </p:nvSpPr>
         <p:spPr>
           <a:xfrm>
-            <a:off x="4195267" y="1691640"/>
+            <a:off x="4158691" y="1691640"/>
             <a:ext cx="2185416" cy="274320"/>
           </a:xfrm>
           <a:prstGeom prst="rect">
@@ -3878,12 +3878,12 @@
         </p:nvSpPr>
         <p:spPr>
           <a:xfrm>
-            <a:off x="6581851" y="1700784"/>
-            <a:ext cx="256032" cy="256032"/>
-          </a:xfrm>
-          <a:prstGeom prst="roundRect">
-            <a:avLst>
-              <a:gd name="adj" fmla="val 14286"/>
+            <a:off x="6545275" y="1700784"/>
+            <a:ext cx="237744" cy="237744"/>
+          </a:xfrm>
+          <a:prstGeom prst="roundRect">
+            <a:avLst>
+              <a:gd name="adj" fmla="val 15385"/>
             </a:avLst>
           </a:prstGeom>
           <a:solidFill>
@@ -3908,8 +3908,8 @@
         </p:blipFill>
         <p:spPr>
           <a:xfrm>
-            <a:off x="6622999" y="1741932"/>
-            <a:ext cx="173736" cy="173736"/>
+            <a:off x="6586423" y="1741932"/>
+            <a:ext cx="155448" cy="155448"/>
           </a:xfrm>
           <a:prstGeom prst="rect">
             <a:avLst/>
@@ -3924,7 +3924,7 @@
         </p:nvSpPr>
         <p:spPr>
           <a:xfrm>
-            <a:off x="6911035" y="1691640"/>
+            <a:off x="6856171" y="1691640"/>
             <a:ext cx="1841602" cy="274320"/>
           </a:xfrm>
           <a:prstGeom prst="rect">
@@ -3960,12 +3960,12 @@
         </p:nvSpPr>
         <p:spPr>
           <a:xfrm>
-            <a:off x="8953805" y="1700784"/>
-            <a:ext cx="256032" cy="256032"/>
-          </a:xfrm>
-          <a:prstGeom prst="roundRect">
-            <a:avLst>
-              <a:gd name="adj" fmla="val 14286"/>
+            <a:off x="8898941" y="1700784"/>
+            <a:ext cx="237744" cy="237744"/>
+          </a:xfrm>
+          <a:prstGeom prst="roundRect">
+            <a:avLst>
+              <a:gd name="adj" fmla="val 15385"/>
             </a:avLst>
           </a:prstGeom>
           <a:solidFill>
@@ -4000,7 +4000,7 @@
         </p:nvSpPr>
         <p:spPr>
           <a:xfrm>
-            <a:off x="9282989" y="1691640"/>
+            <a:off x="9209837" y="1691640"/>
             <a:ext cx="1239926" cy="274320"/>
           </a:xfrm>
           <a:prstGeom prst="rect">
@@ -4036,7 +4036,7 @@
         </p:nvSpPr>
         <p:spPr>
           <a:xfrm>
-            <a:off x="548640" y="2093976"/>
+            <a:off x="548640" y="2057400"/>
             <a:ext cx="11091672" cy="0"/>
           </a:xfrm>
           <a:prstGeom prst="line">
@@ -4059,8 +4059,8 @@
         </p:nvSpPr>
         <p:spPr>
           <a:xfrm>
-            <a:off x="548640" y="2093976"/>
-            <a:ext cx="3611880" cy="307571"/>
+            <a:off x="548640" y="2057400"/>
+            <a:ext cx="3611880" cy="279244"/>
           </a:xfrm>
           <a:prstGeom prst="rect">
             <a:avLst/>
@@ -4095,12 +4095,12 @@
         </p:nvSpPr>
         <p:spPr>
           <a:xfrm>
-            <a:off x="4251960" y="2119745"/>
-            <a:ext cx="256032" cy="256032"/>
-          </a:xfrm>
-          <a:prstGeom prst="roundRect">
-            <a:avLst>
-              <a:gd name="adj" fmla="val 14286"/>
+            <a:off x="4251960" y="2078150"/>
+            <a:ext cx="237744" cy="237744"/>
+          </a:xfrm>
+          <a:prstGeom prst="roundRect">
+            <a:avLst>
+              <a:gd name="adj" fmla="val 15385"/>
             </a:avLst>
           </a:prstGeom>
           <a:solidFill>
@@ -4125,8 +4125,8 @@
         </p:blipFill>
         <p:spPr>
           <a:xfrm>
-            <a:off x="4293108" y="2160893"/>
-            <a:ext cx="173736" cy="173736"/>
+            <a:off x="4293108" y="2119298"/>
+            <a:ext cx="155448" cy="155448"/>
           </a:xfrm>
           <a:prstGeom prst="rect">
             <a:avLst/>
@@ -4141,12 +4141,12 @@
         </p:nvSpPr>
         <p:spPr>
           <a:xfrm>
-            <a:off x="4544568" y="2119745"/>
-            <a:ext cx="256032" cy="256032"/>
-          </a:xfrm>
-          <a:prstGeom prst="roundRect">
-            <a:avLst>
-              <a:gd name="adj" fmla="val 14286"/>
+            <a:off x="4526280" y="2078150"/>
+            <a:ext cx="237744" cy="237744"/>
+          </a:xfrm>
+          <a:prstGeom prst="roundRect">
+            <a:avLst>
+              <a:gd name="adj" fmla="val 15385"/>
             </a:avLst>
           </a:prstGeom>
           <a:solidFill>
@@ -4171,8 +4171,8 @@
         </p:blipFill>
         <p:spPr>
           <a:xfrm>
-            <a:off x="4585716" y="2160893"/>
-            <a:ext cx="173736" cy="173736"/>
+            <a:off x="4567428" y="2119298"/>
+            <a:ext cx="155448" cy="155448"/>
           </a:xfrm>
           <a:prstGeom prst="rect">
             <a:avLst/>
@@ -4187,12 +4187,12 @@
         </p:nvSpPr>
         <p:spPr>
           <a:xfrm>
-            <a:off x="4837176" y="2119745"/>
-            <a:ext cx="256032" cy="256032"/>
-          </a:xfrm>
-          <a:prstGeom prst="roundRect">
-            <a:avLst>
-              <a:gd name="adj" fmla="val 14286"/>
+            <a:off x="4800600" y="2078150"/>
+            <a:ext cx="237744" cy="237744"/>
+          </a:xfrm>
+          <a:prstGeom prst="roundRect">
+            <a:avLst>
+              <a:gd name="adj" fmla="val 15385"/>
             </a:avLst>
           </a:prstGeom>
           <a:solidFill>
@@ -4217,8 +4217,8 @@
         </p:blipFill>
         <p:spPr>
           <a:xfrm>
-            <a:off x="4878324" y="2160893"/>
-            <a:ext cx="173736" cy="173736"/>
+            <a:off x="4841748" y="2119298"/>
+            <a:ext cx="155448" cy="155448"/>
           </a:xfrm>
           <a:prstGeom prst="rect">
             <a:avLst/>
@@ -4233,12 +4233,12 @@
         </p:nvSpPr>
         <p:spPr>
           <a:xfrm>
-            <a:off x="5129784" y="2119745"/>
-            <a:ext cx="256032" cy="256032"/>
-          </a:xfrm>
-          <a:prstGeom prst="roundRect">
-            <a:avLst>
-              <a:gd name="adj" fmla="val 14286"/>
+            <a:off x="5074920" y="2078150"/>
+            <a:ext cx="237744" cy="237744"/>
+          </a:xfrm>
+          <a:prstGeom prst="roundRect">
+            <a:avLst>
+              <a:gd name="adj" fmla="val 15385"/>
             </a:avLst>
           </a:prstGeom>
           <a:solidFill>
@@ -4263,8 +4263,8 @@
         </p:blipFill>
         <p:spPr>
           <a:xfrm>
-            <a:off x="5170932" y="2160893"/>
-            <a:ext cx="173736" cy="173736"/>
+            <a:off x="5116068" y="2119298"/>
+            <a:ext cx="155448" cy="155448"/>
           </a:xfrm>
           <a:prstGeom prst="rect">
             <a:avLst/>
@@ -4279,12 +4279,12 @@
         </p:nvSpPr>
         <p:spPr>
           <a:xfrm>
-            <a:off x="5422392" y="2119745"/>
-            <a:ext cx="256032" cy="256032"/>
-          </a:xfrm>
-          <a:prstGeom prst="roundRect">
-            <a:avLst>
-              <a:gd name="adj" fmla="val 14286"/>
+            <a:off x="5349240" y="2078150"/>
+            <a:ext cx="237744" cy="237744"/>
+          </a:xfrm>
+          <a:prstGeom prst="roundRect">
+            <a:avLst>
+              <a:gd name="adj" fmla="val 15385"/>
             </a:avLst>
           </a:prstGeom>
           <a:solidFill>
@@ -4309,8 +4309,8 @@
         </p:blipFill>
         <p:spPr>
           <a:xfrm>
-            <a:off x="5463540" y="2160893"/>
-            <a:ext cx="173736" cy="173736"/>
+            <a:off x="5390388" y="2119298"/>
+            <a:ext cx="155448" cy="155448"/>
           </a:xfrm>
           <a:prstGeom prst="rect">
             <a:avLst/>
@@ -4325,12 +4325,12 @@
         </p:nvSpPr>
         <p:spPr>
           <a:xfrm>
-            <a:off x="5715000" y="2119745"/>
-            <a:ext cx="256032" cy="256032"/>
-          </a:xfrm>
-          <a:prstGeom prst="roundRect">
-            <a:avLst>
-              <a:gd name="adj" fmla="val 14286"/>
+            <a:off x="5623560" y="2078150"/>
+            <a:ext cx="237744" cy="237744"/>
+          </a:xfrm>
+          <a:prstGeom prst="roundRect">
+            <a:avLst>
+              <a:gd name="adj" fmla="val 15385"/>
             </a:avLst>
           </a:prstGeom>
           <a:solidFill>
@@ -4355,8 +4355,8 @@
         </p:blipFill>
         <p:spPr>
           <a:xfrm>
-            <a:off x="5756148" y="2160893"/>
-            <a:ext cx="173736" cy="173736"/>
+            <a:off x="5664708" y="2119298"/>
+            <a:ext cx="155448" cy="155448"/>
           </a:xfrm>
           <a:prstGeom prst="rect">
             <a:avLst/>
@@ -4371,12 +4371,12 @@
         </p:nvSpPr>
         <p:spPr>
           <a:xfrm>
-            <a:off x="6007608" y="2119745"/>
-            <a:ext cx="256032" cy="256032"/>
-          </a:xfrm>
-          <a:prstGeom prst="roundRect">
-            <a:avLst>
-              <a:gd name="adj" fmla="val 14286"/>
+            <a:off x="5897880" y="2078150"/>
+            <a:ext cx="237744" cy="237744"/>
+          </a:xfrm>
+          <a:prstGeom prst="roundRect">
+            <a:avLst>
+              <a:gd name="adj" fmla="val 15385"/>
             </a:avLst>
           </a:prstGeom>
           <a:solidFill>
@@ -4401,8 +4401,8 @@
         </p:blipFill>
         <p:spPr>
           <a:xfrm>
-            <a:off x="6048756" y="2160893"/>
-            <a:ext cx="173736" cy="173736"/>
+            <a:off x="5939028" y="2119298"/>
+            <a:ext cx="155448" cy="155448"/>
           </a:xfrm>
           <a:prstGeom prst="rect">
             <a:avLst/>
@@ -4417,12 +4417,12 @@
         </p:nvSpPr>
         <p:spPr>
           <a:xfrm>
-            <a:off x="6300216" y="2119745"/>
-            <a:ext cx="256032" cy="256032"/>
-          </a:xfrm>
-          <a:prstGeom prst="roundRect">
-            <a:avLst>
-              <a:gd name="adj" fmla="val 14286"/>
+            <a:off x="6172200" y="2078150"/>
+            <a:ext cx="237744" cy="237744"/>
+          </a:xfrm>
+          <a:prstGeom prst="roundRect">
+            <a:avLst>
+              <a:gd name="adj" fmla="val 15385"/>
             </a:avLst>
           </a:prstGeom>
           <a:solidFill>
@@ -4447,8 +4447,8 @@
         </p:blipFill>
         <p:spPr>
           <a:xfrm>
-            <a:off x="6341364" y="2160893"/>
-            <a:ext cx="173736" cy="173736"/>
+            <a:off x="6213348" y="2119298"/>
+            <a:ext cx="155448" cy="155448"/>
           </a:xfrm>
           <a:prstGeom prst="rect">
             <a:avLst/>
@@ -4463,12 +4463,12 @@
         </p:nvSpPr>
         <p:spPr>
           <a:xfrm>
-            <a:off x="6592824" y="2119745"/>
-            <a:ext cx="256032" cy="256032"/>
-          </a:xfrm>
-          <a:prstGeom prst="roundRect">
-            <a:avLst>
-              <a:gd name="adj" fmla="val 14286"/>
+            <a:off x="6446520" y="2078150"/>
+            <a:ext cx="237744" cy="237744"/>
+          </a:xfrm>
+          <a:prstGeom prst="roundRect">
+            <a:avLst>
+              <a:gd name="adj" fmla="val 15385"/>
             </a:avLst>
           </a:prstGeom>
           <a:solidFill>
@@ -4493,8 +4493,8 @@
         </p:blipFill>
         <p:spPr>
           <a:xfrm>
-            <a:off x="6633972" y="2160893"/>
-            <a:ext cx="173736" cy="173736"/>
+            <a:off x="6487668" y="2119298"/>
+            <a:ext cx="155448" cy="155448"/>
           </a:xfrm>
           <a:prstGeom prst="rect">
             <a:avLst/>
@@ -4509,12 +4509,12 @@
         </p:nvSpPr>
         <p:spPr>
           <a:xfrm>
-            <a:off x="6885432" y="2119745"/>
-            <a:ext cx="256032" cy="256032"/>
-          </a:xfrm>
-          <a:prstGeom prst="roundRect">
-            <a:avLst>
-              <a:gd name="adj" fmla="val 14286"/>
+            <a:off x="6720840" y="2078150"/>
+            <a:ext cx="237744" cy="237744"/>
+          </a:xfrm>
+          <a:prstGeom prst="roundRect">
+            <a:avLst>
+              <a:gd name="adj" fmla="val 15385"/>
             </a:avLst>
           </a:prstGeom>
           <a:solidFill>
@@ -4549,8 +4549,8 @@
         </p:nvSpPr>
         <p:spPr>
           <a:xfrm>
-            <a:off x="7315200" y="2093976"/>
-            <a:ext cx="4325112" cy="307571"/>
+            <a:off x="7132320" y="2057400"/>
+            <a:ext cx="4507992" cy="279244"/>
           </a:xfrm>
           <a:prstGeom prst="rect">
             <a:avLst/>
@@ -4585,7 +4585,7 @@
         </p:nvSpPr>
         <p:spPr>
           <a:xfrm>
-            <a:off x="548640" y="2401547"/>
+            <a:off x="548640" y="2336644"/>
             <a:ext cx="11091672" cy="0"/>
           </a:xfrm>
           <a:prstGeom prst="line">
@@ -4608,8 +4608,8 @@
         </p:nvSpPr>
         <p:spPr>
           <a:xfrm>
-            <a:off x="548640" y="2401547"/>
-            <a:ext cx="3611880" cy="307571"/>
+            <a:off x="548640" y="2336644"/>
+            <a:ext cx="3611880" cy="279244"/>
           </a:xfrm>
           <a:prstGeom prst="rect">
             <a:avLst/>
@@ -4644,12 +4644,12 @@
         </p:nvSpPr>
         <p:spPr>
           <a:xfrm>
-            <a:off x="4251960" y="2427316"/>
-            <a:ext cx="256032" cy="256032"/>
-          </a:xfrm>
-          <a:prstGeom prst="roundRect">
-            <a:avLst>
-              <a:gd name="adj" fmla="val 14286"/>
+            <a:off x="4251960" y="2357394"/>
+            <a:ext cx="237744" cy="237744"/>
+          </a:xfrm>
+          <a:prstGeom prst="roundRect">
+            <a:avLst>
+              <a:gd name="adj" fmla="val 15385"/>
             </a:avLst>
           </a:prstGeom>
           <a:solidFill>
@@ -4674,8 +4674,8 @@
         </p:blipFill>
         <p:spPr>
           <a:xfrm>
-            <a:off x="4293108" y="2468464"/>
-            <a:ext cx="173736" cy="173736"/>
+            <a:off x="4293108" y="2398542"/>
+            <a:ext cx="155448" cy="155448"/>
           </a:xfrm>
           <a:prstGeom prst="rect">
             <a:avLst/>
@@ -4690,12 +4690,12 @@
         </p:nvSpPr>
         <p:spPr>
           <a:xfrm>
-            <a:off x="4544568" y="2427316"/>
-            <a:ext cx="256032" cy="256032"/>
-          </a:xfrm>
-          <a:prstGeom prst="roundRect">
-            <a:avLst>
-              <a:gd name="adj" fmla="val 14286"/>
+            <a:off x="4526280" y="2357394"/>
+            <a:ext cx="237744" cy="237744"/>
+          </a:xfrm>
+          <a:prstGeom prst="roundRect">
+            <a:avLst>
+              <a:gd name="adj" fmla="val 15385"/>
             </a:avLst>
           </a:prstGeom>
           <a:solidFill>
@@ -4720,8 +4720,8 @@
         </p:blipFill>
         <p:spPr>
           <a:xfrm>
-            <a:off x="4585716" y="2468464"/>
-            <a:ext cx="173736" cy="173736"/>
+            <a:off x="4567428" y="2398542"/>
+            <a:ext cx="155448" cy="155448"/>
           </a:xfrm>
           <a:prstGeom prst="rect">
             <a:avLst/>
@@ -4736,12 +4736,12 @@
         </p:nvSpPr>
         <p:spPr>
           <a:xfrm>
-            <a:off x="4837176" y="2427316"/>
-            <a:ext cx="256032" cy="256032"/>
-          </a:xfrm>
-          <a:prstGeom prst="roundRect">
-            <a:avLst>
-              <a:gd name="adj" fmla="val 14286"/>
+            <a:off x="4800600" y="2357394"/>
+            <a:ext cx="237744" cy="237744"/>
+          </a:xfrm>
+          <a:prstGeom prst="roundRect">
+            <a:avLst>
+              <a:gd name="adj" fmla="val 15385"/>
             </a:avLst>
           </a:prstGeom>
           <a:solidFill>
@@ -4766,8 +4766,8 @@
         </p:blipFill>
         <p:spPr>
           <a:xfrm>
-            <a:off x="4878324" y="2468464"/>
-            <a:ext cx="173736" cy="173736"/>
+            <a:off x="4841748" y="2398542"/>
+            <a:ext cx="155448" cy="155448"/>
           </a:xfrm>
           <a:prstGeom prst="rect">
             <a:avLst/>
@@ -4782,12 +4782,12 @@
         </p:nvSpPr>
         <p:spPr>
           <a:xfrm>
-            <a:off x="5129784" y="2427316"/>
-            <a:ext cx="256032" cy="256032"/>
-          </a:xfrm>
-          <a:prstGeom prst="roundRect">
-            <a:avLst>
-              <a:gd name="adj" fmla="val 14286"/>
+            <a:off x="5074920" y="2357394"/>
+            <a:ext cx="237744" cy="237744"/>
+          </a:xfrm>
+          <a:prstGeom prst="roundRect">
+            <a:avLst>
+              <a:gd name="adj" fmla="val 15385"/>
             </a:avLst>
           </a:prstGeom>
           <a:solidFill>
@@ -4812,8 +4812,8 @@
         </p:blipFill>
         <p:spPr>
           <a:xfrm>
-            <a:off x="5170932" y="2468464"/>
-            <a:ext cx="173736" cy="173736"/>
+            <a:off x="5116068" y="2398542"/>
+            <a:ext cx="155448" cy="155448"/>
           </a:xfrm>
           <a:prstGeom prst="rect">
             <a:avLst/>
@@ -4828,12 +4828,12 @@
         </p:nvSpPr>
         <p:spPr>
           <a:xfrm>
-            <a:off x="5422392" y="2427316"/>
-            <a:ext cx="256032" cy="256032"/>
-          </a:xfrm>
-          <a:prstGeom prst="roundRect">
-            <a:avLst>
-              <a:gd name="adj" fmla="val 14286"/>
+            <a:off x="5349240" y="2357394"/>
+            <a:ext cx="237744" cy="237744"/>
+          </a:xfrm>
+          <a:prstGeom prst="roundRect">
+            <a:avLst>
+              <a:gd name="adj" fmla="val 15385"/>
             </a:avLst>
           </a:prstGeom>
           <a:solidFill>
@@ -4858,8 +4858,8 @@
         </p:blipFill>
         <p:spPr>
           <a:xfrm>
-            <a:off x="5463540" y="2468464"/>
-            <a:ext cx="173736" cy="173736"/>
+            <a:off x="5390388" y="2398542"/>
+            <a:ext cx="155448" cy="155448"/>
           </a:xfrm>
           <a:prstGeom prst="rect">
             <a:avLst/>
@@ -4874,12 +4874,12 @@
         </p:nvSpPr>
         <p:spPr>
           <a:xfrm>
-            <a:off x="5715000" y="2427316"/>
-            <a:ext cx="256032" cy="256032"/>
-          </a:xfrm>
-          <a:prstGeom prst="roundRect">
-            <a:avLst>
-              <a:gd name="adj" fmla="val 14286"/>
+            <a:off x="5623560" y="2357394"/>
+            <a:ext cx="237744" cy="237744"/>
+          </a:xfrm>
+          <a:prstGeom prst="roundRect">
+            <a:avLst>
+              <a:gd name="adj" fmla="val 15385"/>
             </a:avLst>
           </a:prstGeom>
           <a:solidFill>
@@ -4914,8 +4914,8 @@
         </p:nvSpPr>
         <p:spPr>
           <a:xfrm>
-            <a:off x="7315200" y="2401547"/>
-            <a:ext cx="4325112" cy="307571"/>
+            <a:off x="7132320" y="2336644"/>
+            <a:ext cx="4507992" cy="279244"/>
           </a:xfrm>
           <a:prstGeom prst="rect">
             <a:avLst/>
@@ -4950,7 +4950,7 @@
         </p:nvSpPr>
         <p:spPr>
           <a:xfrm>
-            <a:off x="548640" y="2709118"/>
+            <a:off x="548640" y="2615887"/>
             <a:ext cx="11091672" cy="0"/>
           </a:xfrm>
           <a:prstGeom prst="line">
@@ -4973,8 +4973,8 @@
         </p:nvSpPr>
         <p:spPr>
           <a:xfrm>
-            <a:off x="548640" y="2709118"/>
-            <a:ext cx="3611880" cy="307571"/>
+            <a:off x="548640" y="2615887"/>
+            <a:ext cx="3611880" cy="279244"/>
           </a:xfrm>
           <a:prstGeom prst="rect">
             <a:avLst/>
@@ -4995,7 +4995,7 @@
                   <a:schemeClr val="tx1"/>
                 </a:solidFill>
               </a:rPr>
-              <a:t>R13. Миссия, заданная словами</a:t>
+              <a:t>R13 → L3. Миссия словами</a:t>
             </a:r>
             <a:endParaRPr lang="en-US" sz="1600" dirty="0"/>
           </a:p>
@@ -5009,12 +5009,12 @@
         </p:nvSpPr>
         <p:spPr>
           <a:xfrm>
-            <a:off x="4251960" y="2734887"/>
-            <a:ext cx="256032" cy="256032"/>
-          </a:xfrm>
-          <a:prstGeom prst="roundRect">
-            <a:avLst>
-              <a:gd name="adj" fmla="val 14286"/>
+            <a:off x="4251960" y="2636637"/>
+            <a:ext cx="237744" cy="237744"/>
+          </a:xfrm>
+          <a:prstGeom prst="roundRect">
+            <a:avLst>
+              <a:gd name="adj" fmla="val 15385"/>
             </a:avLst>
           </a:prstGeom>
           <a:solidFill>
@@ -5039,8 +5039,8 @@
         </p:blipFill>
         <p:spPr>
           <a:xfrm>
-            <a:off x="4293108" y="2776035"/>
-            <a:ext cx="173736" cy="173736"/>
+            <a:off x="4293108" y="2677785"/>
+            <a:ext cx="155448" cy="155448"/>
           </a:xfrm>
           <a:prstGeom prst="rect">
             <a:avLst/>
@@ -5055,12 +5055,12 @@
         </p:nvSpPr>
         <p:spPr>
           <a:xfrm>
-            <a:off x="4544568" y="2734887"/>
-            <a:ext cx="256032" cy="256032"/>
-          </a:xfrm>
-          <a:prstGeom prst="roundRect">
-            <a:avLst>
-              <a:gd name="adj" fmla="val 14286"/>
+            <a:off x="4526280" y="2636637"/>
+            <a:ext cx="237744" cy="237744"/>
+          </a:xfrm>
+          <a:prstGeom prst="roundRect">
+            <a:avLst>
+              <a:gd name="adj" fmla="val 15385"/>
             </a:avLst>
           </a:prstGeom>
           <a:solidFill>
@@ -5085,8 +5085,8 @@
         </p:blipFill>
         <p:spPr>
           <a:xfrm>
-            <a:off x="4585716" y="2776035"/>
-            <a:ext cx="173736" cy="173736"/>
+            <a:off x="4567428" y="2677785"/>
+            <a:ext cx="155448" cy="155448"/>
           </a:xfrm>
           <a:prstGeom prst="rect">
             <a:avLst/>
@@ -5101,12 +5101,12 @@
         </p:nvSpPr>
         <p:spPr>
           <a:xfrm>
-            <a:off x="4837176" y="2734887"/>
-            <a:ext cx="256032" cy="256032"/>
-          </a:xfrm>
-          <a:prstGeom prst="roundRect">
-            <a:avLst>
-              <a:gd name="adj" fmla="val 14286"/>
+            <a:off x="4800600" y="2636637"/>
+            <a:ext cx="237744" cy="237744"/>
+          </a:xfrm>
+          <a:prstGeom prst="roundRect">
+            <a:avLst>
+              <a:gd name="adj" fmla="val 15385"/>
             </a:avLst>
           </a:prstGeom>
           <a:solidFill>
@@ -5131,8 +5131,8 @@
         </p:blipFill>
         <p:spPr>
           <a:xfrm>
-            <a:off x="4878324" y="2776035"/>
-            <a:ext cx="173736" cy="173736"/>
+            <a:off x="4841748" y="2677785"/>
+            <a:ext cx="155448" cy="155448"/>
           </a:xfrm>
           <a:prstGeom prst="rect">
             <a:avLst/>
@@ -5147,12 +5147,12 @@
         </p:nvSpPr>
         <p:spPr>
           <a:xfrm>
-            <a:off x="5129784" y="2734887"/>
-            <a:ext cx="256032" cy="256032"/>
-          </a:xfrm>
-          <a:prstGeom prst="roundRect">
-            <a:avLst>
-              <a:gd name="adj" fmla="val 14286"/>
+            <a:off x="5074920" y="2636637"/>
+            <a:ext cx="237744" cy="237744"/>
+          </a:xfrm>
+          <a:prstGeom prst="roundRect">
+            <a:avLst>
+              <a:gd name="adj" fmla="val 15385"/>
             </a:avLst>
           </a:prstGeom>
           <a:solidFill>
@@ -5177,8 +5177,8 @@
         </p:blipFill>
         <p:spPr>
           <a:xfrm>
-            <a:off x="5170932" y="2776035"/>
-            <a:ext cx="173736" cy="173736"/>
+            <a:off x="5116068" y="2677785"/>
+            <a:ext cx="155448" cy="155448"/>
           </a:xfrm>
           <a:prstGeom prst="rect">
             <a:avLst/>
@@ -5193,12 +5193,12 @@
         </p:nvSpPr>
         <p:spPr>
           <a:xfrm>
-            <a:off x="5422392" y="2734887"/>
-            <a:ext cx="256032" cy="256032"/>
-          </a:xfrm>
-          <a:prstGeom prst="roundRect">
-            <a:avLst>
-              <a:gd name="adj" fmla="val 14286"/>
+            <a:off x="5349240" y="2636637"/>
+            <a:ext cx="237744" cy="237744"/>
+          </a:xfrm>
+          <a:prstGeom prst="roundRect">
+            <a:avLst>
+              <a:gd name="adj" fmla="val 15385"/>
             </a:avLst>
           </a:prstGeom>
           <a:solidFill>
@@ -5227,35 +5227,35 @@
       </p:sp>
       <p:sp>
         <p:nvSpPr>
-          <p:cNvPr id="63" name="lane-3-result"/>
+          <p:cNvPr id="63" name="lane-3-next"/>
           <p:cNvSpPr txBox="1"/>
           <p:nvPr/>
         </p:nvSpPr>
         <p:spPr>
           <a:xfrm>
-            <a:off x="7315200" y="2709118"/>
-            <a:ext cx="4325112" cy="307571"/>
-          </a:xfrm>
-          <a:prstGeom prst="rect">
-            <a:avLst/>
-          </a:prstGeom>
-          <a:noFill/>
-          <a:ln/>
-        </p:spPr>
-        <p:txBody>
-          <a:bodyPr wrap="none" lIns="0" tIns="0" rIns="0" bIns="0" rtlCol="0" anchor="ctr"/>
-          <a:lstStyle/>
-          <a:p>
-            <a:pPr algn="l" indent="0" marL="0">
-              <a:buNone/>
-            </a:pPr>
-            <a:r>
-              <a:rPr lang="en-US" sz="1400" dirty="0">
-                <a:solidFill>
-                  <a:schemeClr val="tx2"/>
-                </a:solidFill>
-              </a:rPr>
-              <a:t>модель — миссия 6 из 6, правило — 0 из 6</a:t>
+            <a:off x="5623560" y="2615887"/>
+            <a:ext cx="237744" cy="279244"/>
+          </a:xfrm>
+          <a:prstGeom prst="rect">
+            <a:avLst/>
+          </a:prstGeom>
+          <a:noFill/>
+          <a:ln/>
+        </p:spPr>
+        <p:txBody>
+          <a:bodyPr wrap="square" lIns="0" tIns="0" rIns="0" bIns="0" rtlCol="0" anchor="ctr"/>
+          <a:lstStyle/>
+          <a:p>
+            <a:pPr algn="ctr" indent="0" marL="0">
+              <a:buNone/>
+            </a:pPr>
+            <a:r>
+              <a:rPr lang="en-US" sz="1400" b="1" dirty="0">
+                <a:solidFill>
+                  <a:schemeClr val="accent5"/>
+                </a:solidFill>
+              </a:rPr>
+              <a:t>→</a:t>
             </a:r>
             <a:endParaRPr lang="en-US" sz="1400" dirty="0"/>
           </a:p>
@@ -5263,77 +5263,18 @@
       </p:sp>
       <p:sp>
         <p:nvSpPr>
-          <p:cNvPr id="64" name="lane-4-rule"/>
-          <p:cNvSpPr/>
-          <p:nvPr/>
-        </p:nvSpPr>
-        <p:spPr>
-          <a:xfrm>
-            <a:off x="548640" y="3016689"/>
-            <a:ext cx="11091672" cy="0"/>
-          </a:xfrm>
-          <a:prstGeom prst="line">
-            <a:avLst/>
-          </a:prstGeom>
-          <a:noFill/>
-          <a:ln w="12700">
-            <a:solidFill>
-              <a:schemeClr val="bg2"/>
-            </a:solidFill>
-            <a:prstDash val="solid"/>
-          </a:ln>
-        </p:spPr>
-      </p:sp>
-      <p:sp>
-        <p:nvSpPr>
-          <p:cNvPr id="65" name="lane-4-name"/>
-          <p:cNvSpPr txBox="1"/>
-          <p:nvPr/>
-        </p:nvSpPr>
-        <p:spPr>
-          <a:xfrm>
-            <a:off x="548640" y="3016689"/>
-            <a:ext cx="3611880" cy="307571"/>
-          </a:xfrm>
-          <a:prstGeom prst="rect">
-            <a:avLst/>
-          </a:prstGeom>
-          <a:noFill/>
-          <a:ln/>
-        </p:spPr>
-        <p:txBody>
-          <a:bodyPr wrap="none" lIns="0" tIns="0" rIns="0" bIns="0" rtlCol="0" anchor="ctr"/>
-          <a:lstStyle/>
-          <a:p>
-            <a:pPr algn="l" indent="0" marL="0">
-              <a:buNone/>
-            </a:pPr>
-            <a:r>
-              <a:rPr lang="en-US" sz="1600" b="1" dirty="0">
-                <a:solidFill>
-                  <a:schemeClr val="tx1"/>
-                </a:solidFill>
-              </a:rPr>
-              <a:t>R3 → R16. Цена ожидания модели</a:t>
-            </a:r>
-            <a:endParaRPr lang="en-US" sz="1600" dirty="0"/>
-          </a:p>
-        </p:txBody>
-      </p:sp>
-      <p:sp>
-        <p:nvSpPr>
-          <p:cNvPr id="66" name="lane-4-chip-1-tile"/>
-          <p:cNvSpPr/>
-          <p:nvPr/>
-        </p:nvSpPr>
-        <p:spPr>
-          <a:xfrm>
-            <a:off x="4251960" y="3042458"/>
-            <a:ext cx="256032" cy="256032"/>
-          </a:xfrm>
-          <a:prstGeom prst="roundRect">
-            <a:avLst>
-              <a:gd name="adj" fmla="val 14286"/>
+          <p:cNvPr id="64" name="lane-3-chip-7-tile"/>
+          <p:cNvSpPr/>
+          <p:nvPr/>
+        </p:nvSpPr>
+        <p:spPr>
+          <a:xfrm>
+            <a:off x="5897880" y="2636637"/>
+            <a:ext cx="237744" cy="237744"/>
+          </a:xfrm>
+          <a:prstGeom prst="roundRect">
+            <a:avLst>
+              <a:gd name="adj" fmla="val 15385"/>
             </a:avLst>
           </a:prstGeom>
           <a:solidFill>
@@ -5344,7 +5285,7 @@
       </p:sp>
       <p:pic>
         <p:nvPicPr>
-          <p:cNvPr id="67" name="lane-4-chip-1" descr="/Users/a/MAI/DID/presentation/assets/logos/gemini.png">    </p:cNvPr>
+          <p:cNvPr id="65" name="lane-3-chip-7" descr="/Users/a/MAI/DID/presentation/assets/logos/claude.png">    </p:cNvPr>
           <p:cNvPicPr>
             <a:picLocks noChangeAspect="1"/>
           </p:cNvPicPr>
@@ -5358,8 +5299,8 @@
         </p:blipFill>
         <p:spPr>
           <a:xfrm>
-            <a:off x="4293108" y="3083606"/>
-            <a:ext cx="173736" cy="173736"/>
+            <a:off x="5939028" y="2677785"/>
+            <a:ext cx="155448" cy="155448"/>
           </a:xfrm>
           <a:prstGeom prst="rect">
             <a:avLst/>
@@ -5368,18 +5309,18 @@
       </p:pic>
       <p:sp>
         <p:nvSpPr>
-          <p:cNvPr id="68" name="lane-4-chip-2-tile"/>
-          <p:cNvSpPr/>
-          <p:nvPr/>
-        </p:nvSpPr>
-        <p:spPr>
-          <a:xfrm>
-            <a:off x="4544568" y="3042458"/>
-            <a:ext cx="256032" cy="256032"/>
-          </a:xfrm>
-          <a:prstGeom prst="roundRect">
-            <a:avLst>
-              <a:gd name="adj" fmla="val 14286"/>
+          <p:cNvPr id="66" name="lane-3-chip-8-tile"/>
+          <p:cNvSpPr/>
+          <p:nvPr/>
+        </p:nvSpPr>
+        <p:spPr>
+          <a:xfrm>
+            <a:off x="6172200" y="2636637"/>
+            <a:ext cx="237744" cy="237744"/>
+          </a:xfrm>
+          <a:prstGeom prst="roundRect">
+            <a:avLst>
+              <a:gd name="adj" fmla="val 15385"/>
             </a:avLst>
           </a:prstGeom>
           <a:solidFill>
@@ -5390,7 +5331,7 @@
       </p:sp>
       <p:pic>
         <p:nvPicPr>
-          <p:cNvPr id="69" name="lane-4-chip-2" descr="/Users/a/MAI/DID/presentation/assets/logos/claude.png">    </p:cNvPr>
+          <p:cNvPr id="67" name="lane-3-chip-8" descr="/Users/a/MAI/DID/presentation/assets/logos/openai.png">    </p:cNvPr>
           <p:cNvPicPr>
             <a:picLocks noChangeAspect="1"/>
           </p:cNvPicPr>
@@ -5404,8 +5345,8 @@
         </p:blipFill>
         <p:spPr>
           <a:xfrm>
-            <a:off x="4585716" y="3083606"/>
-            <a:ext cx="173736" cy="173736"/>
+            <a:off x="6213348" y="2677785"/>
+            <a:ext cx="155448" cy="155448"/>
           </a:xfrm>
           <a:prstGeom prst="rect">
             <a:avLst/>
@@ -5414,18 +5355,18 @@
       </p:pic>
       <p:sp>
         <p:nvSpPr>
-          <p:cNvPr id="70" name="lane-4-chip-3-tile"/>
-          <p:cNvSpPr/>
-          <p:nvPr/>
-        </p:nvSpPr>
-        <p:spPr>
-          <a:xfrm>
-            <a:off x="4837176" y="3042458"/>
-            <a:ext cx="256032" cy="256032"/>
-          </a:xfrm>
-          <a:prstGeom prst="roundRect">
-            <a:avLst>
-              <a:gd name="adj" fmla="val 14286"/>
+          <p:cNvPr id="68" name="lane-3-chip-9-tile"/>
+          <p:cNvSpPr/>
+          <p:nvPr/>
+        </p:nvSpPr>
+        <p:spPr>
+          <a:xfrm>
+            <a:off x="6446520" y="2636637"/>
+            <a:ext cx="237744" cy="237744"/>
+          </a:xfrm>
+          <a:prstGeom prst="roundRect">
+            <a:avLst>
+              <a:gd name="adj" fmla="val 15385"/>
             </a:avLst>
           </a:prstGeom>
           <a:solidFill>
@@ -5436,7 +5377,7 @@
       </p:sp>
       <p:pic>
         <p:nvPicPr>
-          <p:cNvPr id="71" name="lane-4-chip-3" descr="/Users/a/MAI/DID/presentation/assets/logos/claude.png">    </p:cNvPr>
+          <p:cNvPr id="69" name="lane-3-chip-9" descr="/Users/a/MAI/DID/presentation/assets/logos/claude.png">    </p:cNvPr>
           <p:cNvPicPr>
             <a:picLocks noChangeAspect="1"/>
           </p:cNvPicPr>
@@ -5450,8 +5391,8 @@
         </p:blipFill>
         <p:spPr>
           <a:xfrm>
-            <a:off x="4878324" y="3083606"/>
-            <a:ext cx="173736" cy="173736"/>
+            <a:off x="6487668" y="2677785"/>
+            <a:ext cx="155448" cy="155448"/>
           </a:xfrm>
           <a:prstGeom prst="rect">
             <a:avLst/>
@@ -5460,18 +5401,18 @@
       </p:pic>
       <p:sp>
         <p:nvSpPr>
-          <p:cNvPr id="72" name="lane-4-chip-4"/>
+          <p:cNvPr id="70" name="lane-3-chip-10"/>
           <p:cNvSpPr txBox="1"/>
           <p:nvPr/>
         </p:nvSpPr>
         <p:spPr>
           <a:xfrm>
-            <a:off x="5129784" y="3042458"/>
-            <a:ext cx="256032" cy="256032"/>
-          </a:xfrm>
-          <a:prstGeom prst="roundRect">
-            <a:avLst>
-              <a:gd name="adj" fmla="val 14286"/>
+            <a:off x="6720840" y="2636637"/>
+            <a:ext cx="237744" cy="237744"/>
+          </a:xfrm>
+          <a:prstGeom prst="roundRect">
+            <a:avLst>
+              <a:gd name="adj" fmla="val 15385"/>
             </a:avLst>
           </a:prstGeom>
           <a:solidFill>
@@ -5500,35 +5441,35 @@
       </p:sp>
       <p:sp>
         <p:nvSpPr>
-          <p:cNvPr id="73" name="lane-4-next"/>
+          <p:cNvPr id="71" name="lane-3-result"/>
           <p:cNvSpPr txBox="1"/>
           <p:nvPr/>
         </p:nvSpPr>
         <p:spPr>
           <a:xfrm>
-            <a:off x="5422392" y="3016689"/>
-            <a:ext cx="256032" cy="307571"/>
-          </a:xfrm>
-          <a:prstGeom prst="rect">
-            <a:avLst/>
-          </a:prstGeom>
-          <a:noFill/>
-          <a:ln/>
-        </p:spPr>
-        <p:txBody>
-          <a:bodyPr wrap="square" lIns="0" tIns="0" rIns="0" bIns="0" rtlCol="0" anchor="ctr"/>
-          <a:lstStyle/>
-          <a:p>
-            <a:pPr algn="ctr" indent="0" marL="0">
-              <a:buNone/>
-            </a:pPr>
-            <a:r>
-              <a:rPr lang="en-US" sz="1400" b="1" dirty="0">
-                <a:solidFill>
-                  <a:schemeClr val="accent5"/>
-                </a:solidFill>
-              </a:rPr>
-              <a:t>→</a:t>
+            <a:off x="7132320" y="2615887"/>
+            <a:ext cx="4507992" cy="279244"/>
+          </a:xfrm>
+          <a:prstGeom prst="rect">
+            <a:avLst/>
+          </a:prstGeom>
+          <a:noFill/>
+          <a:ln/>
+        </p:spPr>
+        <p:txBody>
+          <a:bodyPr wrap="none" lIns="0" tIns="0" rIns="0" bIns="0" rtlCol="0" anchor="ctr"/>
+          <a:lstStyle/>
+          <a:p>
+            <a:pPr algn="l" indent="0" marL="0">
+              <a:buNone/>
+            </a:pPr>
+            <a:r>
+              <a:rPr lang="en-US" sz="1400" dirty="0">
+                <a:solidFill>
+                  <a:schemeClr val="tx2"/>
+                </a:solidFill>
+              </a:rPr>
+              <a:t>модель — 45–46 из 48 прогонов, правило — 0 из 48</a:t>
             </a:r>
             <a:endParaRPr lang="en-US" sz="1400" dirty="0"/>
           </a:p>
@@ -5536,18 +5477,77 @@
       </p:sp>
       <p:sp>
         <p:nvSpPr>
-          <p:cNvPr id="74" name="lane-4-chip-6-tile"/>
-          <p:cNvSpPr/>
-          <p:nvPr/>
-        </p:nvSpPr>
-        <p:spPr>
-          <a:xfrm>
-            <a:off x="5715000" y="3042458"/>
-            <a:ext cx="256032" cy="256032"/>
-          </a:xfrm>
-          <a:prstGeom prst="roundRect">
-            <a:avLst>
-              <a:gd name="adj" fmla="val 14286"/>
+          <p:cNvPr id="72" name="lane-4-rule"/>
+          <p:cNvSpPr/>
+          <p:nvPr/>
+        </p:nvSpPr>
+        <p:spPr>
+          <a:xfrm>
+            <a:off x="548640" y="2895131"/>
+            <a:ext cx="11091672" cy="0"/>
+          </a:xfrm>
+          <a:prstGeom prst="line">
+            <a:avLst/>
+          </a:prstGeom>
+          <a:noFill/>
+          <a:ln w="12700">
+            <a:solidFill>
+              <a:schemeClr val="bg2"/>
+            </a:solidFill>
+            <a:prstDash val="solid"/>
+          </a:ln>
+        </p:spPr>
+      </p:sp>
+      <p:sp>
+        <p:nvSpPr>
+          <p:cNvPr id="73" name="lane-4-name"/>
+          <p:cNvSpPr txBox="1"/>
+          <p:nvPr/>
+        </p:nvSpPr>
+        <p:spPr>
+          <a:xfrm>
+            <a:off x="548640" y="2895131"/>
+            <a:ext cx="3611880" cy="279244"/>
+          </a:xfrm>
+          <a:prstGeom prst="rect">
+            <a:avLst/>
+          </a:prstGeom>
+          <a:noFill/>
+          <a:ln/>
+        </p:spPr>
+        <p:txBody>
+          <a:bodyPr wrap="none" lIns="0" tIns="0" rIns="0" bIns="0" rtlCol="0" anchor="ctr"/>
+          <a:lstStyle/>
+          <a:p>
+            <a:pPr algn="l" indent="0" marL="0">
+              <a:buNone/>
+            </a:pPr>
+            <a:r>
+              <a:rPr lang="en-US" sz="1600" b="1" dirty="0">
+                <a:solidFill>
+                  <a:schemeClr val="tx1"/>
+                </a:solidFill>
+              </a:rPr>
+              <a:t>R16. Ехать, пока модель думает</a:t>
+            </a:r>
+            <a:endParaRPr lang="en-US" sz="1600" dirty="0"/>
+          </a:p>
+        </p:txBody>
+      </p:sp>
+      <p:sp>
+        <p:nvSpPr>
+          <p:cNvPr id="74" name="lane-4-chip-1-tile"/>
+          <p:cNvSpPr/>
+          <p:nvPr/>
+        </p:nvSpPr>
+        <p:spPr>
+          <a:xfrm>
+            <a:off x="4251960" y="2915881"/>
+            <a:ext cx="237744" cy="237744"/>
+          </a:xfrm>
+          <a:prstGeom prst="roundRect">
+            <a:avLst>
+              <a:gd name="adj" fmla="val 15385"/>
             </a:avLst>
           </a:prstGeom>
           <a:solidFill>
@@ -5558,7 +5558,7 @@
       </p:sp>
       <p:pic>
         <p:nvPicPr>
-          <p:cNvPr id="75" name="lane-4-chip-6" descr="/Users/a/MAI/DID/presentation/assets/logos/claude.png">    </p:cNvPr>
+          <p:cNvPr id="75" name="lane-4-chip-1" descr="/Users/a/MAI/DID/presentation/assets/logos/claude.png">    </p:cNvPr>
           <p:cNvPicPr>
             <a:picLocks noChangeAspect="1"/>
           </p:cNvPicPr>
@@ -5572,8 +5572,8 @@
         </p:blipFill>
         <p:spPr>
           <a:xfrm>
-            <a:off x="5756148" y="3083606"/>
-            <a:ext cx="173736" cy="173736"/>
+            <a:off x="4293108" y="2957029"/>
+            <a:ext cx="155448" cy="155448"/>
           </a:xfrm>
           <a:prstGeom prst="rect">
             <a:avLst/>
@@ -5582,18 +5582,18 @@
       </p:pic>
       <p:sp>
         <p:nvSpPr>
-          <p:cNvPr id="76" name="lane-4-chip-7-tile"/>
-          <p:cNvSpPr/>
-          <p:nvPr/>
-        </p:nvSpPr>
-        <p:spPr>
-          <a:xfrm>
-            <a:off x="6007608" y="3042458"/>
-            <a:ext cx="256032" cy="256032"/>
-          </a:xfrm>
-          <a:prstGeom prst="roundRect">
-            <a:avLst>
-              <a:gd name="adj" fmla="val 14286"/>
+          <p:cNvPr id="76" name="lane-4-chip-2-tile"/>
+          <p:cNvSpPr/>
+          <p:nvPr/>
+        </p:nvSpPr>
+        <p:spPr>
+          <a:xfrm>
+            <a:off x="4526280" y="2915881"/>
+            <a:ext cx="237744" cy="237744"/>
+          </a:xfrm>
+          <a:prstGeom prst="roundRect">
+            <a:avLst>
+              <a:gd name="adj" fmla="val 15385"/>
             </a:avLst>
           </a:prstGeom>
           <a:solidFill>
@@ -5604,7 +5604,7 @@
       </p:sp>
       <p:pic>
         <p:nvPicPr>
-          <p:cNvPr id="77" name="lane-4-chip-7" descr="/Users/a/MAI/DID/presentation/assets/logos/openai.png">    </p:cNvPr>
+          <p:cNvPr id="77" name="lane-4-chip-2" descr="/Users/a/MAI/DID/presentation/assets/logos/openai.png">    </p:cNvPr>
           <p:cNvPicPr>
             <a:picLocks noChangeAspect="1"/>
           </p:cNvPicPr>
@@ -5618,8 +5618,8 @@
         </p:blipFill>
         <p:spPr>
           <a:xfrm>
-            <a:off x="6048756" y="3083606"/>
-            <a:ext cx="173736" cy="173736"/>
+            <a:off x="4567428" y="2957029"/>
+            <a:ext cx="155448" cy="155448"/>
           </a:xfrm>
           <a:prstGeom prst="rect">
             <a:avLst/>
@@ -5628,113 +5628,18 @@
       </p:pic>
       <p:sp>
         <p:nvSpPr>
-          <p:cNvPr id="78" name="lane-4-result"/>
-          <p:cNvSpPr txBox="1"/>
-          <p:nvPr/>
-        </p:nvSpPr>
-        <p:spPr>
-          <a:xfrm>
-            <a:off x="7315200" y="3016689"/>
-            <a:ext cx="4325112" cy="307571"/>
-          </a:xfrm>
-          <a:prstGeom prst="rect">
-            <a:avLst/>
-          </a:prstGeom>
-          <a:noFill/>
-          <a:ln/>
-        </p:spPr>
-        <p:txBody>
-          <a:bodyPr wrap="none" lIns="0" tIns="0" rIns="0" bIns="0" rtlCol="0" anchor="ctr"/>
-          <a:lstStyle/>
-          <a:p>
-            <a:pPr algn="l" indent="0" marL="0">
-              <a:buNone/>
-            </a:pPr>
-            <a:r>
-              <a:rPr lang="en-US" sz="1400" dirty="0">
-                <a:solidFill>
-                  <a:schemeClr val="tx2"/>
-                </a:solidFill>
-              </a:rPr>
-              <a:t>ждать — минус 73 очка; ехать, пока думает: +42</a:t>
-            </a:r>
-            <a:endParaRPr lang="en-US" sz="1400" dirty="0"/>
-          </a:p>
-        </p:txBody>
-      </p:sp>
-      <p:sp>
-        <p:nvSpPr>
-          <p:cNvPr id="79" name="lane-5-rule"/>
-          <p:cNvSpPr/>
-          <p:nvPr/>
-        </p:nvSpPr>
-        <p:spPr>
-          <a:xfrm>
-            <a:off x="548640" y="3324260"/>
-            <a:ext cx="11091672" cy="0"/>
-          </a:xfrm>
-          <a:prstGeom prst="line">
-            <a:avLst/>
-          </a:prstGeom>
-          <a:noFill/>
-          <a:ln w="12700">
-            <a:solidFill>
-              <a:schemeClr val="bg2"/>
-            </a:solidFill>
-            <a:prstDash val="solid"/>
-          </a:ln>
-        </p:spPr>
-      </p:sp>
-      <p:sp>
-        <p:nvSpPr>
-          <p:cNvPr id="80" name="lane-5-name"/>
-          <p:cNvSpPr txBox="1"/>
-          <p:nvPr/>
-        </p:nvSpPr>
-        <p:spPr>
-          <a:xfrm>
-            <a:off x="548640" y="3324260"/>
-            <a:ext cx="3611880" cy="307571"/>
-          </a:xfrm>
-          <a:prstGeom prst="rect">
-            <a:avLst/>
-          </a:prstGeom>
-          <a:noFill/>
-          <a:ln/>
-        </p:spPr>
-        <p:txBody>
-          <a:bodyPr wrap="none" lIns="0" tIns="0" rIns="0" bIns="0" rtlCol="0" anchor="ctr"/>
-          <a:lstStyle/>
-          <a:p>
-            <a:pPr algn="l" indent="0" marL="0">
-              <a:buNone/>
-            </a:pPr>
-            <a:r>
-              <a:rPr lang="en-US" sz="1600" b="1" dirty="0">
-                <a:solidFill>
-                  <a:schemeClr val="tx1"/>
-                </a:solidFill>
-              </a:rPr>
-              <a:t>R10. Смена грунта на пути</a:t>
-            </a:r>
-            <a:endParaRPr lang="en-US" sz="1600" dirty="0"/>
-          </a:p>
-        </p:txBody>
-      </p:sp>
-      <p:sp>
-        <p:nvSpPr>
-          <p:cNvPr id="81" name="lane-5-chip-1-tile"/>
-          <p:cNvSpPr/>
-          <p:nvPr/>
-        </p:nvSpPr>
-        <p:spPr>
-          <a:xfrm>
-            <a:off x="4251960" y="3350029"/>
-            <a:ext cx="256032" cy="256032"/>
-          </a:xfrm>
-          <a:prstGeom prst="roundRect">
-            <a:avLst>
-              <a:gd name="adj" fmla="val 14286"/>
+          <p:cNvPr id="78" name="lane-4-chip-3-tile"/>
+          <p:cNvSpPr/>
+          <p:nvPr/>
+        </p:nvSpPr>
+        <p:spPr>
+          <a:xfrm>
+            <a:off x="4800600" y="2915881"/>
+            <a:ext cx="237744" cy="237744"/>
+          </a:xfrm>
+          <a:prstGeom prst="roundRect">
+            <a:avLst>
+              <a:gd name="adj" fmla="val 15385"/>
             </a:avLst>
           </a:prstGeom>
           <a:solidFill>
@@ -5745,7 +5650,7 @@
       </p:sp>
       <p:pic>
         <p:nvPicPr>
-          <p:cNvPr id="82" name="lane-5-chip-1" descr="/Users/a/MAI/DID/presentation/assets/logos/claude.png">    </p:cNvPr>
+          <p:cNvPr id="79" name="lane-4-chip-3" descr="/Users/a/MAI/DID/presentation/assets/logos/claude.png">    </p:cNvPr>
           <p:cNvPicPr>
             <a:picLocks noChangeAspect="1"/>
           </p:cNvPicPr>
@@ -5759,8 +5664,8 @@
         </p:blipFill>
         <p:spPr>
           <a:xfrm>
-            <a:off x="4293108" y="3391177"/>
-            <a:ext cx="173736" cy="173736"/>
+            <a:off x="4841748" y="2957029"/>
+            <a:ext cx="155448" cy="155448"/>
           </a:xfrm>
           <a:prstGeom prst="rect">
             <a:avLst/>
@@ -5769,18 +5674,18 @@
       </p:pic>
       <p:sp>
         <p:nvSpPr>
-          <p:cNvPr id="83" name="lane-5-chip-2-tile"/>
-          <p:cNvSpPr/>
-          <p:nvPr/>
-        </p:nvSpPr>
-        <p:spPr>
-          <a:xfrm>
-            <a:off x="4544568" y="3350029"/>
-            <a:ext cx="256032" cy="256032"/>
-          </a:xfrm>
-          <a:prstGeom prst="roundRect">
-            <a:avLst>
-              <a:gd name="adj" fmla="val 14286"/>
+          <p:cNvPr id="80" name="lane-4-chip-4-tile"/>
+          <p:cNvSpPr/>
+          <p:nvPr/>
+        </p:nvSpPr>
+        <p:spPr>
+          <a:xfrm>
+            <a:off x="5074920" y="2915881"/>
+            <a:ext cx="237744" cy="237744"/>
+          </a:xfrm>
+          <a:prstGeom prst="roundRect">
+            <a:avLst>
+              <a:gd name="adj" fmla="val 15385"/>
             </a:avLst>
           </a:prstGeom>
           <a:solidFill>
@@ -5791,7 +5696,7 @@
       </p:sp>
       <p:pic>
         <p:nvPicPr>
-          <p:cNvPr id="84" name="lane-5-chip-2" descr="/Users/a/MAI/DID/presentation/assets/logos/openai.png">    </p:cNvPr>
+          <p:cNvPr id="81" name="lane-4-chip-4" descr="/Users/a/MAI/DID/presentation/assets/logos/openai.png">    </p:cNvPr>
           <p:cNvPicPr>
             <a:picLocks noChangeAspect="1"/>
           </p:cNvPicPr>
@@ -5805,8 +5710,8 @@
         </p:blipFill>
         <p:spPr>
           <a:xfrm>
-            <a:off x="4585716" y="3391177"/>
-            <a:ext cx="173736" cy="173736"/>
+            <a:off x="5116068" y="2957029"/>
+            <a:ext cx="155448" cy="155448"/>
           </a:xfrm>
           <a:prstGeom prst="rect">
             <a:avLst/>
@@ -5815,18 +5720,18 @@
       </p:pic>
       <p:sp>
         <p:nvSpPr>
-          <p:cNvPr id="85" name="lane-5-chip-3-tile"/>
-          <p:cNvSpPr/>
-          <p:nvPr/>
-        </p:nvSpPr>
-        <p:spPr>
-          <a:xfrm>
-            <a:off x="4837176" y="3350029"/>
-            <a:ext cx="256032" cy="256032"/>
-          </a:xfrm>
-          <a:prstGeom prst="roundRect">
-            <a:avLst>
-              <a:gd name="adj" fmla="val 14286"/>
+          <p:cNvPr id="82" name="lane-4-chip-5-tile"/>
+          <p:cNvSpPr/>
+          <p:nvPr/>
+        </p:nvSpPr>
+        <p:spPr>
+          <a:xfrm>
+            <a:off x="5349240" y="2915881"/>
+            <a:ext cx="237744" cy="237744"/>
+          </a:xfrm>
+          <a:prstGeom prst="roundRect">
+            <a:avLst>
+              <a:gd name="adj" fmla="val 15385"/>
             </a:avLst>
           </a:prstGeom>
           <a:solidFill>
@@ -5837,7 +5742,7 @@
       </p:sp>
       <p:pic>
         <p:nvPicPr>
-          <p:cNvPr id="86" name="lane-5-chip-3" descr="/Users/a/MAI/DID/presentation/assets/logos/claude.png">    </p:cNvPr>
+          <p:cNvPr id="83" name="lane-4-chip-5" descr="/Users/a/MAI/DID/presentation/assets/logos/claude.png">    </p:cNvPr>
           <p:cNvPicPr>
             <a:picLocks noChangeAspect="1"/>
           </p:cNvPicPr>
@@ -5851,8 +5756,8 @@
         </p:blipFill>
         <p:spPr>
           <a:xfrm>
-            <a:off x="4878324" y="3391177"/>
-            <a:ext cx="173736" cy="173736"/>
+            <a:off x="5390388" y="2957029"/>
+            <a:ext cx="155448" cy="155448"/>
           </a:xfrm>
           <a:prstGeom prst="rect">
             <a:avLst/>
@@ -5861,18 +5766,153 @@
       </p:pic>
       <p:sp>
         <p:nvSpPr>
-          <p:cNvPr id="87" name="lane-5-chip-4-tile"/>
-          <p:cNvSpPr/>
-          <p:nvPr/>
-        </p:nvSpPr>
-        <p:spPr>
-          <a:xfrm>
-            <a:off x="5129784" y="3350029"/>
-            <a:ext cx="256032" cy="256032"/>
-          </a:xfrm>
-          <a:prstGeom prst="roundRect">
-            <a:avLst>
-              <a:gd name="adj" fmla="val 14286"/>
+          <p:cNvPr id="84" name="lane-4-chip-6"/>
+          <p:cNvSpPr txBox="1"/>
+          <p:nvPr/>
+        </p:nvSpPr>
+        <p:spPr>
+          <a:xfrm>
+            <a:off x="5623560" y="2915881"/>
+            <a:ext cx="237744" cy="237744"/>
+          </a:xfrm>
+          <a:prstGeom prst="roundRect">
+            <a:avLst>
+              <a:gd name="adj" fmla="val 15385"/>
+            </a:avLst>
+          </a:prstGeom>
+          <a:solidFill>
+            <a:schemeClr val="accent3"/>
+          </a:solidFill>
+          <a:ln/>
+        </p:spPr>
+        <p:txBody>
+          <a:bodyPr wrap="square" lIns="0" tIns="0" rIns="0" bIns="0" rtlCol="0" anchor="ctr"/>
+          <a:lstStyle/>
+          <a:p>
+            <a:pPr algn="ctr" indent="0" marL="0">
+              <a:buNone/>
+            </a:pPr>
+            <a:r>
+              <a:rPr lang="en-US" sz="1300" b="1" dirty="0">
+                <a:solidFill>
+                  <a:schemeClr val="bg1"/>
+                </a:solidFill>
+              </a:rPr>
+              <a:t>✓</a:t>
+            </a:r>
+            <a:endParaRPr lang="en-US" sz="1300" dirty="0"/>
+          </a:p>
+        </p:txBody>
+      </p:sp>
+      <p:sp>
+        <p:nvSpPr>
+          <p:cNvPr id="85" name="lane-4-result"/>
+          <p:cNvSpPr txBox="1"/>
+          <p:nvPr/>
+        </p:nvSpPr>
+        <p:spPr>
+          <a:xfrm>
+            <a:off x="7132320" y="2895131"/>
+            <a:ext cx="4507992" cy="279244"/>
+          </a:xfrm>
+          <a:prstGeom prst="rect">
+            <a:avLst/>
+          </a:prstGeom>
+          <a:noFill/>
+          <a:ln/>
+        </p:spPr>
+        <p:txBody>
+          <a:bodyPr wrap="none" lIns="0" tIns="0" rIns="0" bIns="0" rtlCol="0" anchor="ctr"/>
+          <a:lstStyle/>
+          <a:p>
+            <a:pPr algn="l" indent="0" marL="0">
+              <a:buNone/>
+            </a:pPr>
+            <a:r>
+              <a:rPr lang="en-US" sz="1400" dirty="0">
+                <a:solidFill>
+                  <a:schemeClr val="tx2"/>
+                </a:solidFill>
+              </a:rPr>
+              <a:t>ждать: −73 очка; ехать по правилу: +42 (имитатор)</a:t>
+            </a:r>
+            <a:endParaRPr lang="en-US" sz="1400" dirty="0"/>
+          </a:p>
+        </p:txBody>
+      </p:sp>
+      <p:sp>
+        <p:nvSpPr>
+          <p:cNvPr id="86" name="lane-5-rule"/>
+          <p:cNvSpPr/>
+          <p:nvPr/>
+        </p:nvSpPr>
+        <p:spPr>
+          <a:xfrm>
+            <a:off x="548640" y="3174375"/>
+            <a:ext cx="11091672" cy="0"/>
+          </a:xfrm>
+          <a:prstGeom prst="line">
+            <a:avLst/>
+          </a:prstGeom>
+          <a:noFill/>
+          <a:ln w="12700">
+            <a:solidFill>
+              <a:schemeClr val="bg2"/>
+            </a:solidFill>
+            <a:prstDash val="solid"/>
+          </a:ln>
+        </p:spPr>
+      </p:sp>
+      <p:sp>
+        <p:nvSpPr>
+          <p:cNvPr id="87" name="lane-5-name"/>
+          <p:cNvSpPr txBox="1"/>
+          <p:nvPr/>
+        </p:nvSpPr>
+        <p:spPr>
+          <a:xfrm>
+            <a:off x="548640" y="3174375"/>
+            <a:ext cx="3611880" cy="279244"/>
+          </a:xfrm>
+          <a:prstGeom prst="rect">
+            <a:avLst/>
+          </a:prstGeom>
+          <a:noFill/>
+          <a:ln/>
+        </p:spPr>
+        <p:txBody>
+          <a:bodyPr wrap="none" lIns="0" tIns="0" rIns="0" bIns="0" rtlCol="0" anchor="ctr"/>
+          <a:lstStyle/>
+          <a:p>
+            <a:pPr algn="l" indent="0" marL="0">
+              <a:buNone/>
+            </a:pPr>
+            <a:r>
+              <a:rPr lang="en-US" sz="1600" b="1" dirty="0">
+                <a:solidFill>
+                  <a:schemeClr val="tx1"/>
+                </a:solidFill>
+              </a:rPr>
+              <a:t>R10. Смена грунта на пути</a:t>
+            </a:r>
+            <a:endParaRPr lang="en-US" sz="1600" dirty="0"/>
+          </a:p>
+        </p:txBody>
+      </p:sp>
+      <p:sp>
+        <p:nvSpPr>
+          <p:cNvPr id="88" name="lane-5-chip-1-tile"/>
+          <p:cNvSpPr/>
+          <p:nvPr/>
+        </p:nvSpPr>
+        <p:spPr>
+          <a:xfrm>
+            <a:off x="4251960" y="3195125"/>
+            <a:ext cx="237744" cy="237744"/>
+          </a:xfrm>
+          <a:prstGeom prst="roundRect">
+            <a:avLst>
+              <a:gd name="adj" fmla="val 15385"/>
             </a:avLst>
           </a:prstGeom>
           <a:solidFill>
@@ -5883,7 +5923,7 @@
       </p:sp>
       <p:pic>
         <p:nvPicPr>
-          <p:cNvPr id="88" name="lane-5-chip-4" descr="/Users/a/MAI/DID/presentation/assets/logos/openai.png">    </p:cNvPr>
+          <p:cNvPr id="89" name="lane-5-chip-1" descr="/Users/a/MAI/DID/presentation/assets/logos/claude.png">    </p:cNvPr>
           <p:cNvPicPr>
             <a:picLocks noChangeAspect="1"/>
           </p:cNvPicPr>
@@ -5897,8 +5937,8 @@
         </p:blipFill>
         <p:spPr>
           <a:xfrm>
-            <a:off x="5170932" y="3391177"/>
-            <a:ext cx="173736" cy="173736"/>
+            <a:off x="4293108" y="3236273"/>
+            <a:ext cx="155448" cy="155448"/>
           </a:xfrm>
           <a:prstGeom prst="rect">
             <a:avLst/>
@@ -5907,153 +5947,18 @@
       </p:pic>
       <p:sp>
         <p:nvSpPr>
-          <p:cNvPr id="89" name="lane-5-chip-5"/>
-          <p:cNvSpPr txBox="1"/>
-          <p:nvPr/>
-        </p:nvSpPr>
-        <p:spPr>
-          <a:xfrm>
-            <a:off x="5422392" y="3350029"/>
-            <a:ext cx="256032" cy="256032"/>
-          </a:xfrm>
-          <a:prstGeom prst="roundRect">
-            <a:avLst>
-              <a:gd name="adj" fmla="val 14286"/>
-            </a:avLst>
-          </a:prstGeom>
-          <a:solidFill>
-            <a:schemeClr val="accent3"/>
-          </a:solidFill>
-          <a:ln/>
-        </p:spPr>
-        <p:txBody>
-          <a:bodyPr wrap="square" lIns="0" tIns="0" rIns="0" bIns="0" rtlCol="0" anchor="ctr"/>
-          <a:lstStyle/>
-          <a:p>
-            <a:pPr algn="ctr" indent="0" marL="0">
-              <a:buNone/>
-            </a:pPr>
-            <a:r>
-              <a:rPr lang="en-US" sz="1300" b="1" dirty="0">
-                <a:solidFill>
-                  <a:schemeClr val="bg1"/>
-                </a:solidFill>
-              </a:rPr>
-              <a:t>✓</a:t>
-            </a:r>
-            <a:endParaRPr lang="en-US" sz="1300" dirty="0"/>
-          </a:p>
-        </p:txBody>
-      </p:sp>
-      <p:sp>
-        <p:nvSpPr>
-          <p:cNvPr id="90" name="lane-5-result"/>
-          <p:cNvSpPr txBox="1"/>
-          <p:nvPr/>
-        </p:nvSpPr>
-        <p:spPr>
-          <a:xfrm>
-            <a:off x="7315200" y="3324260"/>
-            <a:ext cx="4325112" cy="307571"/>
-          </a:xfrm>
-          <a:prstGeom prst="rect">
-            <a:avLst/>
-          </a:prstGeom>
-          <a:noFill/>
-          <a:ln/>
-        </p:spPr>
-        <p:txBody>
-          <a:bodyPr wrap="none" lIns="0" tIns="0" rIns="0" bIns="0" rtlCol="0" anchor="ctr"/>
-          <a:lstStyle/>
-          <a:p>
-            <a:pPr algn="l" indent="0" marL="0">
-              <a:buNone/>
-            </a:pPr>
-            <a:r>
-              <a:rPr lang="en-US" sz="1400" dirty="0">
-                <a:solidFill>
-                  <a:schemeClr val="tx2"/>
-                </a:solidFill>
-              </a:rPr>
-              <a:t>выигрыш не показан — так и записано</a:t>
-            </a:r>
-            <a:endParaRPr lang="en-US" sz="1400" dirty="0"/>
-          </a:p>
-        </p:txBody>
-      </p:sp>
-      <p:sp>
-        <p:nvSpPr>
-          <p:cNvPr id="91" name="lane-6-rule"/>
-          <p:cNvSpPr/>
-          <p:nvPr/>
-        </p:nvSpPr>
-        <p:spPr>
-          <a:xfrm>
-            <a:off x="548640" y="3631831"/>
-            <a:ext cx="11091672" cy="0"/>
-          </a:xfrm>
-          <a:prstGeom prst="line">
-            <a:avLst/>
-          </a:prstGeom>
-          <a:noFill/>
-          <a:ln w="12700">
-            <a:solidFill>
-              <a:schemeClr val="bg2"/>
-            </a:solidFill>
-            <a:prstDash val="solid"/>
-          </a:ln>
-        </p:spPr>
-      </p:sp>
-      <p:sp>
-        <p:nvSpPr>
-          <p:cNvPr id="92" name="lane-6-name"/>
-          <p:cNvSpPr txBox="1"/>
-          <p:nvPr/>
-        </p:nvSpPr>
-        <p:spPr>
-          <a:xfrm>
-            <a:off x="548640" y="3631831"/>
-            <a:ext cx="3611880" cy="307571"/>
-          </a:xfrm>
-          <a:prstGeom prst="rect">
-            <a:avLst/>
-          </a:prstGeom>
-          <a:noFill/>
-          <a:ln/>
-        </p:spPr>
-        <p:txBody>
-          <a:bodyPr wrap="none" lIns="0" tIns="0" rIns="0" bIns="0" rtlCol="0" anchor="ctr"/>
-          <a:lstStyle/>
-          <a:p>
-            <a:pPr algn="l" indent="0" marL="0">
-              <a:buNone/>
-            </a:pPr>
-            <a:r>
-              <a:rPr lang="en-US" sz="1600" b="1" dirty="0">
-                <a:solidFill>
-                  <a:schemeClr val="tx1"/>
-                </a:solidFill>
-              </a:rPr>
-              <a:t>G2. Потеря положения в Gazebo</a:t>
-            </a:r>
-            <a:endParaRPr lang="en-US" sz="1600" dirty="0"/>
-          </a:p>
-        </p:txBody>
-      </p:sp>
-      <p:sp>
-        <p:nvSpPr>
-          <p:cNvPr id="93" name="lane-6-chip-1-tile"/>
-          <p:cNvSpPr/>
-          <p:nvPr/>
-        </p:nvSpPr>
-        <p:spPr>
-          <a:xfrm>
-            <a:off x="4251960" y="3657600"/>
-            <a:ext cx="256032" cy="256032"/>
-          </a:xfrm>
-          <a:prstGeom prst="roundRect">
-            <a:avLst>
-              <a:gd name="adj" fmla="val 14286"/>
+          <p:cNvPr id="90" name="lane-5-chip-2-tile"/>
+          <p:cNvSpPr/>
+          <p:nvPr/>
+        </p:nvSpPr>
+        <p:spPr>
+          <a:xfrm>
+            <a:off x="4526280" y="3195125"/>
+            <a:ext cx="237744" cy="237744"/>
+          </a:xfrm>
+          <a:prstGeom prst="roundRect">
+            <a:avLst>
+              <a:gd name="adj" fmla="val 15385"/>
             </a:avLst>
           </a:prstGeom>
           <a:solidFill>
@@ -6064,7 +5969,7 @@
       </p:sp>
       <p:pic>
         <p:nvPicPr>
-          <p:cNvPr id="94" name="lane-6-chip-1" descr="/Users/a/MAI/DID/presentation/assets/logos/claude.png">    </p:cNvPr>
+          <p:cNvPr id="91" name="lane-5-chip-2" descr="/Users/a/MAI/DID/presentation/assets/logos/openai.png">    </p:cNvPr>
           <p:cNvPicPr>
             <a:picLocks noChangeAspect="1"/>
           </p:cNvPicPr>
@@ -6078,8 +5983,8 @@
         </p:blipFill>
         <p:spPr>
           <a:xfrm>
-            <a:off x="4293108" y="3698748"/>
-            <a:ext cx="173736" cy="173736"/>
+            <a:off x="4567428" y="3236273"/>
+            <a:ext cx="155448" cy="155448"/>
           </a:xfrm>
           <a:prstGeom prst="rect">
             <a:avLst/>
@@ -6088,18 +5993,18 @@
       </p:pic>
       <p:sp>
         <p:nvSpPr>
-          <p:cNvPr id="95" name="lane-6-chip-2-tile"/>
-          <p:cNvSpPr/>
-          <p:nvPr/>
-        </p:nvSpPr>
-        <p:spPr>
-          <a:xfrm>
-            <a:off x="4544568" y="3657600"/>
-            <a:ext cx="256032" cy="256032"/>
-          </a:xfrm>
-          <a:prstGeom prst="roundRect">
-            <a:avLst>
-              <a:gd name="adj" fmla="val 14286"/>
+          <p:cNvPr id="92" name="lane-5-chip-3-tile"/>
+          <p:cNvSpPr/>
+          <p:nvPr/>
+        </p:nvSpPr>
+        <p:spPr>
+          <a:xfrm>
+            <a:off x="4800600" y="3195125"/>
+            <a:ext cx="237744" cy="237744"/>
+          </a:xfrm>
+          <a:prstGeom prst="roundRect">
+            <a:avLst>
+              <a:gd name="adj" fmla="val 15385"/>
             </a:avLst>
           </a:prstGeom>
           <a:solidFill>
@@ -6110,7 +6015,7 @@
       </p:sp>
       <p:pic>
         <p:nvPicPr>
-          <p:cNvPr id="96" name="lane-6-chip-2" descr="/Users/a/MAI/DID/presentation/assets/logos/openai.png">    </p:cNvPr>
+          <p:cNvPr id="93" name="lane-5-chip-3" descr="/Users/a/MAI/DID/presentation/assets/logos/claude.png">    </p:cNvPr>
           <p:cNvPicPr>
             <a:picLocks noChangeAspect="1"/>
           </p:cNvPicPr>
@@ -6124,8 +6029,8 @@
         </p:blipFill>
         <p:spPr>
           <a:xfrm>
-            <a:off x="4585716" y="3698748"/>
-            <a:ext cx="173736" cy="173736"/>
+            <a:off x="4841748" y="3236273"/>
+            <a:ext cx="155448" cy="155448"/>
           </a:xfrm>
           <a:prstGeom prst="rect">
             <a:avLst/>
@@ -6134,18 +6039,18 @@
       </p:pic>
       <p:sp>
         <p:nvSpPr>
-          <p:cNvPr id="97" name="lane-6-chip-3-tile"/>
-          <p:cNvSpPr/>
-          <p:nvPr/>
-        </p:nvSpPr>
-        <p:spPr>
-          <a:xfrm>
-            <a:off x="4837176" y="3657600"/>
-            <a:ext cx="256032" cy="256032"/>
-          </a:xfrm>
-          <a:prstGeom prst="roundRect">
-            <a:avLst>
-              <a:gd name="adj" fmla="val 14286"/>
+          <p:cNvPr id="94" name="lane-5-chip-4-tile"/>
+          <p:cNvSpPr/>
+          <p:nvPr/>
+        </p:nvSpPr>
+        <p:spPr>
+          <a:xfrm>
+            <a:off x="5074920" y="3195125"/>
+            <a:ext cx="237744" cy="237744"/>
+          </a:xfrm>
+          <a:prstGeom prst="roundRect">
+            <a:avLst>
+              <a:gd name="adj" fmla="val 15385"/>
             </a:avLst>
           </a:prstGeom>
           <a:solidFill>
@@ -6156,7 +6061,7 @@
       </p:sp>
       <p:pic>
         <p:nvPicPr>
-          <p:cNvPr id="98" name="lane-6-chip-3" descr="/Users/a/MAI/DID/presentation/assets/logos/claude.png">    </p:cNvPr>
+          <p:cNvPr id="95" name="lane-5-chip-4" descr="/Users/a/MAI/DID/presentation/assets/logos/openai.png">    </p:cNvPr>
           <p:cNvPicPr>
             <a:picLocks noChangeAspect="1"/>
           </p:cNvPicPr>
@@ -6170,8 +6075,8 @@
         </p:blipFill>
         <p:spPr>
           <a:xfrm>
-            <a:off x="4878324" y="3698748"/>
-            <a:ext cx="173736" cy="173736"/>
+            <a:off x="5116068" y="3236273"/>
+            <a:ext cx="155448" cy="155448"/>
           </a:xfrm>
           <a:prstGeom prst="rect">
             <a:avLst/>
@@ -6180,18 +6085,18 @@
       </p:pic>
       <p:sp>
         <p:nvSpPr>
-          <p:cNvPr id="99" name="lane-6-chip-4"/>
+          <p:cNvPr id="96" name="lane-5-chip-5"/>
           <p:cNvSpPr txBox="1"/>
           <p:nvPr/>
         </p:nvSpPr>
         <p:spPr>
           <a:xfrm>
-            <a:off x="5129784" y="3657600"/>
-            <a:ext cx="256032" cy="256032"/>
-          </a:xfrm>
-          <a:prstGeom prst="roundRect">
-            <a:avLst>
-              <a:gd name="adj" fmla="val 14286"/>
+            <a:off x="5349240" y="3195125"/>
+            <a:ext cx="237744" cy="237744"/>
+          </a:xfrm>
+          <a:prstGeom prst="roundRect">
+            <a:avLst>
+              <a:gd name="adj" fmla="val 15385"/>
             </a:avLst>
           </a:prstGeom>
           <a:solidFill>
@@ -6220,14 +6125,14 @@
       </p:sp>
       <p:sp>
         <p:nvSpPr>
-          <p:cNvPr id="100" name="lane-6-result"/>
+          <p:cNvPr id="97" name="lane-5-result"/>
           <p:cNvSpPr txBox="1"/>
           <p:nvPr/>
         </p:nvSpPr>
         <p:spPr>
           <a:xfrm>
-            <a:off x="7315200" y="3631831"/>
-            <a:ext cx="4325112" cy="307571"/>
+            <a:off x="7132320" y="3174375"/>
+            <a:ext cx="4507992" cy="279244"/>
           </a:xfrm>
           <a:prstGeom prst="rect">
             <a:avLst/>
@@ -6248,7 +6153,7 @@
                   <a:schemeClr val="tx2"/>
                 </a:solidFill>
               </a:rPr>
-              <a:t>возврат на базу в Gazebo: 8 из 9 → 7 из 7</a:t>
+              <a:t>выигрыш не показан — так и записано</a:t>
             </a:r>
             <a:endParaRPr lang="en-US" sz="1400" dirty="0"/>
           </a:p>
@@ -6256,13 +6161,13 @@
       </p:sp>
       <p:sp>
         <p:nvSpPr>
-          <p:cNvPr id="101" name="lane-7-rule"/>
-          <p:cNvSpPr/>
-          <p:nvPr/>
-        </p:nvSpPr>
-        <p:spPr>
-          <a:xfrm>
-            <a:off x="548640" y="3939401"/>
+          <p:cNvPr id="98" name="lane-6-rule"/>
+          <p:cNvSpPr/>
+          <p:nvPr/>
+        </p:nvSpPr>
+        <p:spPr>
+          <a:xfrm>
+            <a:off x="548640" y="3453618"/>
             <a:ext cx="11091672" cy="0"/>
           </a:xfrm>
           <a:prstGeom prst="line">
@@ -6279,14 +6184,14 @@
       </p:sp>
       <p:sp>
         <p:nvSpPr>
-          <p:cNvPr id="102" name="lane-7-name"/>
+          <p:cNvPr id="99" name="lane-6-name"/>
           <p:cNvSpPr txBox="1"/>
           <p:nvPr/>
         </p:nvSpPr>
         <p:spPr>
           <a:xfrm>
-            <a:off x="548640" y="3939401"/>
-            <a:ext cx="3611880" cy="307571"/>
+            <a:off x="548640" y="3453618"/>
+            <a:ext cx="3611880" cy="279244"/>
           </a:xfrm>
           <a:prstGeom prst="rect">
             <a:avLst/>
@@ -6307,7 +6212,7 @@
                   <a:schemeClr val="tx1"/>
                 </a:solidFill>
               </a:rPr>
-              <a:t>P1. Где робот теряет очки</a:t>
+              <a:t>G2 → G3. Положение и сторожа</a:t>
             </a:r>
             <a:endParaRPr lang="en-US" sz="1600" dirty="0"/>
           </a:p>
@@ -6315,18 +6220,18 @@
       </p:sp>
       <p:sp>
         <p:nvSpPr>
-          <p:cNvPr id="103" name="lane-7-chip-1-tile"/>
-          <p:cNvSpPr/>
-          <p:nvPr/>
-        </p:nvSpPr>
-        <p:spPr>
-          <a:xfrm>
-            <a:off x="4251960" y="3965171"/>
-            <a:ext cx="256032" cy="256032"/>
-          </a:xfrm>
-          <a:prstGeom prst="roundRect">
-            <a:avLst>
-              <a:gd name="adj" fmla="val 14286"/>
+          <p:cNvPr id="100" name="lane-6-chip-1-tile"/>
+          <p:cNvSpPr/>
+          <p:nvPr/>
+        </p:nvSpPr>
+        <p:spPr>
+          <a:xfrm>
+            <a:off x="4251960" y="3474368"/>
+            <a:ext cx="237744" cy="237744"/>
+          </a:xfrm>
+          <a:prstGeom prst="roundRect">
+            <a:avLst>
+              <a:gd name="adj" fmla="val 15385"/>
             </a:avLst>
           </a:prstGeom>
           <a:solidFill>
@@ -6337,7 +6242,7 @@
       </p:sp>
       <p:pic>
         <p:nvPicPr>
-          <p:cNvPr id="104" name="lane-7-chip-1" descr="/Users/a/MAI/DID/presentation/assets/logos/claude.png">    </p:cNvPr>
+          <p:cNvPr id="101" name="lane-6-chip-1" descr="/Users/a/MAI/DID/presentation/assets/logos/claude.png">    </p:cNvPr>
           <p:cNvPicPr>
             <a:picLocks noChangeAspect="1"/>
           </p:cNvPicPr>
@@ -6351,8 +6256,8 @@
         </p:blipFill>
         <p:spPr>
           <a:xfrm>
-            <a:off x="4293108" y="4006319"/>
-            <a:ext cx="173736" cy="173736"/>
+            <a:off x="4293108" y="3515516"/>
+            <a:ext cx="155448" cy="155448"/>
           </a:xfrm>
           <a:prstGeom prst="rect">
             <a:avLst/>
@@ -6361,18 +6266,18 @@
       </p:pic>
       <p:sp>
         <p:nvSpPr>
-          <p:cNvPr id="105" name="lane-7-chip-2-tile"/>
-          <p:cNvSpPr/>
-          <p:nvPr/>
-        </p:nvSpPr>
-        <p:spPr>
-          <a:xfrm>
-            <a:off x="4544568" y="3965171"/>
-            <a:ext cx="256032" cy="256032"/>
-          </a:xfrm>
-          <a:prstGeom prst="roundRect">
-            <a:avLst>
-              <a:gd name="adj" fmla="val 14286"/>
+          <p:cNvPr id="102" name="lane-6-chip-2-tile"/>
+          <p:cNvSpPr/>
+          <p:nvPr/>
+        </p:nvSpPr>
+        <p:spPr>
+          <a:xfrm>
+            <a:off x="4526280" y="3474368"/>
+            <a:ext cx="237744" cy="237744"/>
+          </a:xfrm>
+          <a:prstGeom prst="roundRect">
+            <a:avLst>
+              <a:gd name="adj" fmla="val 15385"/>
             </a:avLst>
           </a:prstGeom>
           <a:solidFill>
@@ -6383,7 +6288,7 @@
       </p:sp>
       <p:pic>
         <p:nvPicPr>
-          <p:cNvPr id="106" name="lane-7-chip-2" descr="/Users/a/MAI/DID/presentation/assets/logos/openai.png">    </p:cNvPr>
+          <p:cNvPr id="103" name="lane-6-chip-2" descr="/Users/a/MAI/DID/presentation/assets/logos/openai.png">    </p:cNvPr>
           <p:cNvPicPr>
             <a:picLocks noChangeAspect="1"/>
           </p:cNvPicPr>
@@ -6397,8 +6302,8 @@
         </p:blipFill>
         <p:spPr>
           <a:xfrm>
-            <a:off x="4585716" y="4006319"/>
-            <a:ext cx="173736" cy="173736"/>
+            <a:off x="4567428" y="3515516"/>
+            <a:ext cx="155448" cy="155448"/>
           </a:xfrm>
           <a:prstGeom prst="rect">
             <a:avLst/>
@@ -6407,18 +6312,18 @@
       </p:pic>
       <p:sp>
         <p:nvSpPr>
-          <p:cNvPr id="107" name="lane-7-chip-3-tile"/>
-          <p:cNvSpPr/>
-          <p:nvPr/>
-        </p:nvSpPr>
-        <p:spPr>
-          <a:xfrm>
-            <a:off x="4837176" y="3965171"/>
-            <a:ext cx="256032" cy="256032"/>
-          </a:xfrm>
-          <a:prstGeom prst="roundRect">
-            <a:avLst>
-              <a:gd name="adj" fmla="val 14286"/>
+          <p:cNvPr id="104" name="lane-6-chip-3-tile"/>
+          <p:cNvSpPr/>
+          <p:nvPr/>
+        </p:nvSpPr>
+        <p:spPr>
+          <a:xfrm>
+            <a:off x="4800600" y="3474368"/>
+            <a:ext cx="237744" cy="237744"/>
+          </a:xfrm>
+          <a:prstGeom prst="roundRect">
+            <a:avLst>
+              <a:gd name="adj" fmla="val 15385"/>
             </a:avLst>
           </a:prstGeom>
           <a:solidFill>
@@ -6429,7 +6334,7 @@
       </p:sp>
       <p:pic>
         <p:nvPicPr>
-          <p:cNvPr id="108" name="lane-7-chip-3" descr="/Users/a/MAI/DID/presentation/assets/logos/claude.png">    </p:cNvPr>
+          <p:cNvPr id="105" name="lane-6-chip-3" descr="/Users/a/MAI/DID/presentation/assets/logos/claude.png">    </p:cNvPr>
           <p:cNvPicPr>
             <a:picLocks noChangeAspect="1"/>
           </p:cNvPicPr>
@@ -6443,8 +6348,8 @@
         </p:blipFill>
         <p:spPr>
           <a:xfrm>
-            <a:off x="4878324" y="4006319"/>
-            <a:ext cx="173736" cy="173736"/>
+            <a:off x="4841748" y="3515516"/>
+            <a:ext cx="155448" cy="155448"/>
           </a:xfrm>
           <a:prstGeom prst="rect">
             <a:avLst/>
@@ -6453,18 +6358,18 @@
       </p:pic>
       <p:sp>
         <p:nvSpPr>
-          <p:cNvPr id="109" name="lane-7-chip-4"/>
+          <p:cNvPr id="106" name="lane-6-chip-4"/>
           <p:cNvSpPr txBox="1"/>
           <p:nvPr/>
         </p:nvSpPr>
         <p:spPr>
           <a:xfrm>
-            <a:off x="5129784" y="3965171"/>
-            <a:ext cx="256032" cy="256032"/>
-          </a:xfrm>
-          <a:prstGeom prst="roundRect">
-            <a:avLst>
-              <a:gd name="adj" fmla="val 14286"/>
+            <a:off x="5074920" y="3474368"/>
+            <a:ext cx="237744" cy="237744"/>
+          </a:xfrm>
+          <a:prstGeom prst="roundRect">
+            <a:avLst>
+              <a:gd name="adj" fmla="val 15385"/>
             </a:avLst>
           </a:prstGeom>
           <a:solidFill>
@@ -6493,35 +6398,35 @@
       </p:sp>
       <p:sp>
         <p:nvSpPr>
-          <p:cNvPr id="110" name="lane-7-result"/>
+          <p:cNvPr id="107" name="lane-6-next"/>
           <p:cNvSpPr txBox="1"/>
           <p:nvPr/>
         </p:nvSpPr>
         <p:spPr>
           <a:xfrm>
-            <a:off x="7315200" y="3939401"/>
-            <a:ext cx="4325112" cy="307571"/>
-          </a:xfrm>
-          <a:prstGeom prst="rect">
-            <a:avLst/>
-          </a:prstGeom>
-          <a:noFill/>
-          <a:ln/>
-        </p:spPr>
-        <p:txBody>
-          <a:bodyPr wrap="none" lIns="0" tIns="0" rIns="0" bIns="0" rtlCol="0" anchor="ctr"/>
-          <a:lstStyle/>
-          <a:p>
-            <a:pPr algn="l" indent="0" marL="0">
-              <a:buNone/>
-            </a:pPr>
-            <a:r>
-              <a:rPr lang="en-US" sz="1400" dirty="0">
-                <a:solidFill>
-                  <a:schemeClr val="tx2"/>
-                </a:solidFill>
-              </a:rPr>
-              <a:t>пережидает сбой датчика: +6,4 очка</a:t>
+            <a:off x="5349240" y="3453618"/>
+            <a:ext cx="237744" cy="279244"/>
+          </a:xfrm>
+          <a:prstGeom prst="rect">
+            <a:avLst/>
+          </a:prstGeom>
+          <a:noFill/>
+          <a:ln/>
+        </p:spPr>
+        <p:txBody>
+          <a:bodyPr wrap="square" lIns="0" tIns="0" rIns="0" bIns="0" rtlCol="0" anchor="ctr"/>
+          <a:lstStyle/>
+          <a:p>
+            <a:pPr algn="ctr" indent="0" marL="0">
+              <a:buNone/>
+            </a:pPr>
+            <a:r>
+              <a:rPr lang="en-US" sz="1400" b="1" dirty="0">
+                <a:solidFill>
+                  <a:schemeClr val="accent5"/>
+                </a:solidFill>
+              </a:rPr>
+              <a:t>→</a:t>
             </a:r>
             <a:endParaRPr lang="en-US" sz="1400" dirty="0"/>
           </a:p>
@@ -6529,77 +6434,18 @@
       </p:sp>
       <p:sp>
         <p:nvSpPr>
-          <p:cNvPr id="111" name="lane-8-rule"/>
-          <p:cNvSpPr/>
-          <p:nvPr/>
-        </p:nvSpPr>
-        <p:spPr>
-          <a:xfrm>
-            <a:off x="548640" y="4246972"/>
-            <a:ext cx="11091672" cy="0"/>
-          </a:xfrm>
-          <a:prstGeom prst="line">
-            <a:avLst/>
-          </a:prstGeom>
-          <a:noFill/>
-          <a:ln w="12700">
-            <a:solidFill>
-              <a:schemeClr val="bg2"/>
-            </a:solidFill>
-            <a:prstDash val="solid"/>
-          </a:ln>
-        </p:spPr>
-      </p:sp>
-      <p:sp>
-        <p:nvSpPr>
-          <p:cNvPr id="112" name="lane-8-name"/>
-          <p:cNvSpPr txBox="1"/>
-          <p:nvPr/>
-        </p:nvSpPr>
-        <p:spPr>
-          <a:xfrm>
-            <a:off x="548640" y="4246972"/>
-            <a:ext cx="3611880" cy="307571"/>
-          </a:xfrm>
-          <a:prstGeom prst="rect">
-            <a:avLst/>
-          </a:prstGeom>
-          <a:noFill/>
-          <a:ln/>
-        </p:spPr>
-        <p:txBody>
-          <a:bodyPr wrap="none" lIns="0" tIns="0" rIns="0" bIns="0" rtlCol="0" anchor="ctr"/>
-          <a:lstStyle/>
-          <a:p>
-            <a:pPr algn="l" indent="0" marL="0">
-              <a:buNone/>
-            </a:pPr>
-            <a:r>
-              <a:rPr lang="en-US" sz="1600" b="1" dirty="0">
-                <a:solidFill>
-                  <a:schemeClr val="tx1"/>
-                </a:solidFill>
-              </a:rPr>
-              <a:t>A1. Новые схемы агента</a:t>
-            </a:r>
-            <a:endParaRPr lang="en-US" sz="1600" dirty="0"/>
-          </a:p>
-        </p:txBody>
-      </p:sp>
-      <p:sp>
-        <p:nvSpPr>
-          <p:cNvPr id="113" name="lane-8-chip-1-tile"/>
-          <p:cNvSpPr/>
-          <p:nvPr/>
-        </p:nvSpPr>
-        <p:spPr>
-          <a:xfrm>
-            <a:off x="4251960" y="4272742"/>
-            <a:ext cx="256032" cy="256032"/>
-          </a:xfrm>
-          <a:prstGeom prst="roundRect">
-            <a:avLst>
-              <a:gd name="adj" fmla="val 14286"/>
+          <p:cNvPr id="108" name="lane-6-chip-6-tile"/>
+          <p:cNvSpPr/>
+          <p:nvPr/>
+        </p:nvSpPr>
+        <p:spPr>
+          <a:xfrm>
+            <a:off x="5623560" y="3474368"/>
+            <a:ext cx="237744" cy="237744"/>
+          </a:xfrm>
+          <a:prstGeom prst="roundRect">
+            <a:avLst>
+              <a:gd name="adj" fmla="val 15385"/>
             </a:avLst>
           </a:prstGeom>
           <a:solidFill>
@@ -6610,7 +6456,7 @@
       </p:sp>
       <p:pic>
         <p:nvPicPr>
-          <p:cNvPr id="114" name="lane-8-chip-1" descr="/Users/a/MAI/DID/presentation/assets/logos/claude.png">    </p:cNvPr>
+          <p:cNvPr id="109" name="lane-6-chip-6" descr="/Users/a/MAI/DID/presentation/assets/logos/claude.png">    </p:cNvPr>
           <p:cNvPicPr>
             <a:picLocks noChangeAspect="1"/>
           </p:cNvPicPr>
@@ -6624,8 +6470,8 @@
         </p:blipFill>
         <p:spPr>
           <a:xfrm>
-            <a:off x="4293108" y="4313890"/>
-            <a:ext cx="173736" cy="173736"/>
+            <a:off x="5664708" y="3515516"/>
+            <a:ext cx="155448" cy="155448"/>
           </a:xfrm>
           <a:prstGeom prst="rect">
             <a:avLst/>
@@ -6634,18 +6480,18 @@
       </p:pic>
       <p:sp>
         <p:nvSpPr>
-          <p:cNvPr id="115" name="lane-8-chip-2-tile"/>
-          <p:cNvSpPr/>
-          <p:nvPr/>
-        </p:nvSpPr>
-        <p:spPr>
-          <a:xfrm>
-            <a:off x="4544568" y="4272742"/>
-            <a:ext cx="256032" cy="256032"/>
-          </a:xfrm>
-          <a:prstGeom prst="roundRect">
-            <a:avLst>
-              <a:gd name="adj" fmla="val 14286"/>
+          <p:cNvPr id="110" name="lane-6-chip-7-tile"/>
+          <p:cNvSpPr/>
+          <p:nvPr/>
+        </p:nvSpPr>
+        <p:spPr>
+          <a:xfrm>
+            <a:off x="5897880" y="3474368"/>
+            <a:ext cx="237744" cy="237744"/>
+          </a:xfrm>
+          <a:prstGeom prst="roundRect">
+            <a:avLst>
+              <a:gd name="adj" fmla="val 15385"/>
             </a:avLst>
           </a:prstGeom>
           <a:solidFill>
@@ -6656,7 +6502,7 @@
       </p:sp>
       <p:pic>
         <p:nvPicPr>
-          <p:cNvPr id="116" name="lane-8-chip-2" descr="/Users/a/MAI/DID/presentation/assets/logos/openai.png">    </p:cNvPr>
+          <p:cNvPr id="111" name="lane-6-chip-7" descr="/Users/a/MAI/DID/presentation/assets/logos/openai.png">    </p:cNvPr>
           <p:cNvPicPr>
             <a:picLocks noChangeAspect="1"/>
           </p:cNvPicPr>
@@ -6670,8 +6516,8 @@
         </p:blipFill>
         <p:spPr>
           <a:xfrm>
-            <a:off x="4585716" y="4313890"/>
-            <a:ext cx="173736" cy="173736"/>
+            <a:off x="5939028" y="3515516"/>
+            <a:ext cx="155448" cy="155448"/>
           </a:xfrm>
           <a:prstGeom prst="rect">
             <a:avLst/>
@@ -6680,18 +6526,18 @@
       </p:pic>
       <p:sp>
         <p:nvSpPr>
-          <p:cNvPr id="117" name="lane-8-chip-3-tile"/>
-          <p:cNvSpPr/>
-          <p:nvPr/>
-        </p:nvSpPr>
-        <p:spPr>
-          <a:xfrm>
-            <a:off x="4837176" y="4272742"/>
-            <a:ext cx="256032" cy="256032"/>
-          </a:xfrm>
-          <a:prstGeom prst="roundRect">
-            <a:avLst>
-              <a:gd name="adj" fmla="val 14286"/>
+          <p:cNvPr id="112" name="lane-6-chip-8-tile"/>
+          <p:cNvSpPr/>
+          <p:nvPr/>
+        </p:nvSpPr>
+        <p:spPr>
+          <a:xfrm>
+            <a:off x="6172200" y="3474368"/>
+            <a:ext cx="237744" cy="237744"/>
+          </a:xfrm>
+          <a:prstGeom prst="roundRect">
+            <a:avLst>
+              <a:gd name="adj" fmla="val 15385"/>
             </a:avLst>
           </a:prstGeom>
           <a:solidFill>
@@ -6702,7 +6548,7 @@
       </p:sp>
       <p:pic>
         <p:nvPicPr>
-          <p:cNvPr id="118" name="lane-8-chip-3" descr="/Users/a/MAI/DID/presentation/assets/logos/claude.png">    </p:cNvPr>
+          <p:cNvPr id="113" name="lane-6-chip-8" descr="/Users/a/MAI/DID/presentation/assets/logos/claude.png">    </p:cNvPr>
           <p:cNvPicPr>
             <a:picLocks noChangeAspect="1"/>
           </p:cNvPicPr>
@@ -6716,8 +6562,8 @@
         </p:blipFill>
         <p:spPr>
           <a:xfrm>
-            <a:off x="4878324" y="4313890"/>
-            <a:ext cx="173736" cy="173736"/>
+            <a:off x="6213348" y="3515516"/>
+            <a:ext cx="155448" cy="155448"/>
           </a:xfrm>
           <a:prstGeom prst="rect">
             <a:avLst/>
@@ -6726,153 +6572,18 @@
       </p:pic>
       <p:sp>
         <p:nvSpPr>
-          <p:cNvPr id="119" name="lane-8-chip-4"/>
-          <p:cNvSpPr txBox="1"/>
-          <p:nvPr/>
-        </p:nvSpPr>
-        <p:spPr>
-          <a:xfrm>
-            <a:off x="5129784" y="4272742"/>
-            <a:ext cx="256032" cy="256032"/>
-          </a:xfrm>
-          <a:prstGeom prst="roundRect">
-            <a:avLst>
-              <a:gd name="adj" fmla="val 14286"/>
-            </a:avLst>
-          </a:prstGeom>
-          <a:solidFill>
-            <a:schemeClr val="accent3"/>
-          </a:solidFill>
-          <a:ln/>
-        </p:spPr>
-        <p:txBody>
-          <a:bodyPr wrap="square" lIns="0" tIns="0" rIns="0" bIns="0" rtlCol="0" anchor="ctr"/>
-          <a:lstStyle/>
-          <a:p>
-            <a:pPr algn="ctr" indent="0" marL="0">
-              <a:buNone/>
-            </a:pPr>
-            <a:r>
-              <a:rPr lang="en-US" sz="1300" b="1" dirty="0">
-                <a:solidFill>
-                  <a:schemeClr val="bg1"/>
-                </a:solidFill>
-              </a:rPr>
-              <a:t>✓</a:t>
-            </a:r>
-            <a:endParaRPr lang="en-US" sz="1300" dirty="0"/>
-          </a:p>
-        </p:txBody>
-      </p:sp>
-      <p:sp>
-        <p:nvSpPr>
-          <p:cNvPr id="120" name="lane-8-result"/>
-          <p:cNvSpPr txBox="1"/>
-          <p:nvPr/>
-        </p:nvSpPr>
-        <p:spPr>
-          <a:xfrm>
-            <a:off x="7315200" y="4246972"/>
-            <a:ext cx="4325112" cy="307571"/>
-          </a:xfrm>
-          <a:prstGeom prst="rect">
-            <a:avLst/>
-          </a:prstGeom>
-          <a:noFill/>
-          <a:ln/>
-        </p:spPr>
-        <p:txBody>
-          <a:bodyPr wrap="none" lIns="0" tIns="0" rIns="0" bIns="0" rtlCol="0" anchor="ctr"/>
-          <a:lstStyle/>
-          <a:p>
-            <a:pPr algn="l" indent="0" marL="0">
-              <a:buNone/>
-            </a:pPr>
-            <a:r>
-              <a:rPr lang="en-US" sz="1400" dirty="0">
-                <a:solidFill>
-                  <a:schemeClr val="tx2"/>
-                </a:solidFill>
-              </a:rPr>
-              <a:t>не лучше нынешней; потолок — 92,5 очка</a:t>
-            </a:r>
-            <a:endParaRPr lang="en-US" sz="1400" dirty="0"/>
-          </a:p>
-        </p:txBody>
-      </p:sp>
-      <p:sp>
-        <p:nvSpPr>
-          <p:cNvPr id="121" name="lane-9-rule"/>
-          <p:cNvSpPr/>
-          <p:nvPr/>
-        </p:nvSpPr>
-        <p:spPr>
-          <a:xfrm>
-            <a:off x="548640" y="4554543"/>
-            <a:ext cx="11091672" cy="0"/>
-          </a:xfrm>
-          <a:prstGeom prst="line">
-            <a:avLst/>
-          </a:prstGeom>
-          <a:noFill/>
-          <a:ln w="12700">
-            <a:solidFill>
-              <a:schemeClr val="bg2"/>
-            </a:solidFill>
-            <a:prstDash val="solid"/>
-          </a:ln>
-        </p:spPr>
-      </p:sp>
-      <p:sp>
-        <p:nvSpPr>
-          <p:cNvPr id="122" name="lane-9-name"/>
-          <p:cNvSpPr txBox="1"/>
-          <p:nvPr/>
-        </p:nvSpPr>
-        <p:spPr>
-          <a:xfrm>
-            <a:off x="548640" y="4554543"/>
-            <a:ext cx="3611880" cy="307571"/>
-          </a:xfrm>
-          <a:prstGeom prst="rect">
-            <a:avLst/>
-          </a:prstGeom>
-          <a:noFill/>
-          <a:ln/>
-        </p:spPr>
-        <p:txBody>
-          <a:bodyPr wrap="none" lIns="0" tIns="0" rIns="0" bIns="0" rtlCol="0" anchor="ctr"/>
-          <a:lstStyle/>
-          <a:p>
-            <a:pPr algn="l" indent="0" marL="0">
-              <a:buNone/>
-            </a:pPr>
-            <a:r>
-              <a:rPr lang="en-US" sz="1600" b="1" dirty="0">
-                <a:solidFill>
-                  <a:schemeClr val="tx1"/>
-                </a:solidFill>
-              </a:rPr>
-              <a:t>M1. Два робота с координацией</a:t>
-            </a:r>
-            <a:endParaRPr lang="en-US" sz="1600" dirty="0"/>
-          </a:p>
-        </p:txBody>
-      </p:sp>
-      <p:sp>
-        <p:nvSpPr>
-          <p:cNvPr id="123" name="lane-9-chip-1-tile"/>
-          <p:cNvSpPr/>
-          <p:nvPr/>
-        </p:nvSpPr>
-        <p:spPr>
-          <a:xfrm>
-            <a:off x="4251960" y="4580313"/>
-            <a:ext cx="256032" cy="256032"/>
-          </a:xfrm>
-          <a:prstGeom prst="roundRect">
-            <a:avLst>
-              <a:gd name="adj" fmla="val 14286"/>
+          <p:cNvPr id="114" name="lane-6-chip-9-tile"/>
+          <p:cNvSpPr/>
+          <p:nvPr/>
+        </p:nvSpPr>
+        <p:spPr>
+          <a:xfrm>
+            <a:off x="6446520" y="3474368"/>
+            <a:ext cx="237744" cy="237744"/>
+          </a:xfrm>
+          <a:prstGeom prst="roundRect">
+            <a:avLst>
+              <a:gd name="adj" fmla="val 15385"/>
             </a:avLst>
           </a:prstGeom>
           <a:solidFill>
@@ -6883,7 +6594,7 @@
       </p:sp>
       <p:pic>
         <p:nvPicPr>
-          <p:cNvPr id="124" name="lane-9-chip-1" descr="/Users/a/MAI/DID/presentation/assets/logos/claude.png">    </p:cNvPr>
+          <p:cNvPr id="115" name="lane-6-chip-9" descr="/Users/a/MAI/DID/presentation/assets/logos/openai.png">    </p:cNvPr>
           <p:cNvPicPr>
             <a:picLocks noChangeAspect="1"/>
           </p:cNvPicPr>
@@ -6897,8 +6608,8 @@
         </p:blipFill>
         <p:spPr>
           <a:xfrm>
-            <a:off x="4293108" y="4621461"/>
-            <a:ext cx="173736" cy="173736"/>
+            <a:off x="6487668" y="3515516"/>
+            <a:ext cx="155448" cy="155448"/>
           </a:xfrm>
           <a:prstGeom prst="rect">
             <a:avLst/>
@@ -6907,18 +6618,153 @@
       </p:pic>
       <p:sp>
         <p:nvSpPr>
-          <p:cNvPr id="125" name="lane-9-chip-2-tile"/>
-          <p:cNvSpPr/>
-          <p:nvPr/>
-        </p:nvSpPr>
-        <p:spPr>
-          <a:xfrm>
-            <a:off x="4544568" y="4580313"/>
-            <a:ext cx="256032" cy="256032"/>
-          </a:xfrm>
-          <a:prstGeom prst="roundRect">
-            <a:avLst>
-              <a:gd name="adj" fmla="val 14286"/>
+          <p:cNvPr id="116" name="lane-6-chip-10"/>
+          <p:cNvSpPr txBox="1"/>
+          <p:nvPr/>
+        </p:nvSpPr>
+        <p:spPr>
+          <a:xfrm>
+            <a:off x="6720840" y="3474368"/>
+            <a:ext cx="237744" cy="237744"/>
+          </a:xfrm>
+          <a:prstGeom prst="roundRect">
+            <a:avLst>
+              <a:gd name="adj" fmla="val 15385"/>
+            </a:avLst>
+          </a:prstGeom>
+          <a:solidFill>
+            <a:schemeClr val="accent3"/>
+          </a:solidFill>
+          <a:ln/>
+        </p:spPr>
+        <p:txBody>
+          <a:bodyPr wrap="square" lIns="0" tIns="0" rIns="0" bIns="0" rtlCol="0" anchor="ctr"/>
+          <a:lstStyle/>
+          <a:p>
+            <a:pPr algn="ctr" indent="0" marL="0">
+              <a:buNone/>
+            </a:pPr>
+            <a:r>
+              <a:rPr lang="en-US" sz="1300" b="1" dirty="0">
+                <a:solidFill>
+                  <a:schemeClr val="bg1"/>
+                </a:solidFill>
+              </a:rPr>
+              <a:t>✓</a:t>
+            </a:r>
+            <a:endParaRPr lang="en-US" sz="1300" dirty="0"/>
+          </a:p>
+        </p:txBody>
+      </p:sp>
+      <p:sp>
+        <p:nvSpPr>
+          <p:cNvPr id="117" name="lane-6-result"/>
+          <p:cNvSpPr txBox="1"/>
+          <p:nvPr/>
+        </p:nvSpPr>
+        <p:spPr>
+          <a:xfrm>
+            <a:off x="7132320" y="3453618"/>
+            <a:ext cx="4507992" cy="279244"/>
+          </a:xfrm>
+          <a:prstGeom prst="rect">
+            <a:avLst/>
+          </a:prstGeom>
+          <a:noFill/>
+          <a:ln/>
+        </p:spPr>
+        <p:txBody>
+          <a:bodyPr wrap="none" lIns="0" tIns="0" rIns="0" bIns="0" rtlCol="0" anchor="ctr"/>
+          <a:lstStyle/>
+          <a:p>
+            <a:pPr algn="l" indent="0" marL="0">
+              <a:buNone/>
+            </a:pPr>
+            <a:r>
+              <a:rPr lang="en-US" sz="1400" dirty="0">
+                <a:solidFill>
+                  <a:schemeClr val="tx2"/>
+                </a:solidFill>
+              </a:rPr>
+              <a:t>возврат на базу в Gazebo: 8 из 9 → 7 из 7</a:t>
+            </a:r>
+            <a:endParaRPr lang="en-US" sz="1400" dirty="0"/>
+          </a:p>
+        </p:txBody>
+      </p:sp>
+      <p:sp>
+        <p:nvSpPr>
+          <p:cNvPr id="118" name="lane-7-rule"/>
+          <p:cNvSpPr/>
+          <p:nvPr/>
+        </p:nvSpPr>
+        <p:spPr>
+          <a:xfrm>
+            <a:off x="548640" y="3732862"/>
+            <a:ext cx="11091672" cy="0"/>
+          </a:xfrm>
+          <a:prstGeom prst="line">
+            <a:avLst/>
+          </a:prstGeom>
+          <a:noFill/>
+          <a:ln w="12700">
+            <a:solidFill>
+              <a:schemeClr val="bg2"/>
+            </a:solidFill>
+            <a:prstDash val="solid"/>
+          </a:ln>
+        </p:spPr>
+      </p:sp>
+      <p:sp>
+        <p:nvSpPr>
+          <p:cNvPr id="119" name="lane-7-name"/>
+          <p:cNvSpPr txBox="1"/>
+          <p:nvPr/>
+        </p:nvSpPr>
+        <p:spPr>
+          <a:xfrm>
+            <a:off x="548640" y="3732862"/>
+            <a:ext cx="3611880" cy="279244"/>
+          </a:xfrm>
+          <a:prstGeom prst="rect">
+            <a:avLst/>
+          </a:prstGeom>
+          <a:noFill/>
+          <a:ln/>
+        </p:spPr>
+        <p:txBody>
+          <a:bodyPr wrap="none" lIns="0" tIns="0" rIns="0" bIns="0" rtlCol="0" anchor="ctr"/>
+          <a:lstStyle/>
+          <a:p>
+            <a:pPr algn="l" indent="0" marL="0">
+              <a:buNone/>
+            </a:pPr>
+            <a:r>
+              <a:rPr lang="en-US" sz="1600" b="1" dirty="0">
+                <a:solidFill>
+                  <a:schemeClr val="tx1"/>
+                </a:solidFill>
+              </a:rPr>
+              <a:t>P1 → P2. Где робот теряет очки</a:t>
+            </a:r>
+            <a:endParaRPr lang="en-US" sz="1600" dirty="0"/>
+          </a:p>
+        </p:txBody>
+      </p:sp>
+      <p:sp>
+        <p:nvSpPr>
+          <p:cNvPr id="120" name="lane-7-chip-1-tile"/>
+          <p:cNvSpPr/>
+          <p:nvPr/>
+        </p:nvSpPr>
+        <p:spPr>
+          <a:xfrm>
+            <a:off x="4251960" y="3753612"/>
+            <a:ext cx="237744" cy="237744"/>
+          </a:xfrm>
+          <a:prstGeom prst="roundRect">
+            <a:avLst>
+              <a:gd name="adj" fmla="val 15385"/>
             </a:avLst>
           </a:prstGeom>
           <a:solidFill>
@@ -6929,7 +6775,7 @@
       </p:sp>
       <p:pic>
         <p:nvPicPr>
-          <p:cNvPr id="126" name="lane-9-chip-2" descr="/Users/a/MAI/DID/presentation/assets/logos/openai.png">    </p:cNvPr>
+          <p:cNvPr id="121" name="lane-7-chip-1" descr="/Users/a/MAI/DID/presentation/assets/logos/claude.png">    </p:cNvPr>
           <p:cNvPicPr>
             <a:picLocks noChangeAspect="1"/>
           </p:cNvPicPr>
@@ -6943,8 +6789,8 @@
         </p:blipFill>
         <p:spPr>
           <a:xfrm>
-            <a:off x="4585716" y="4621461"/>
-            <a:ext cx="173736" cy="173736"/>
+            <a:off x="4293108" y="3794760"/>
+            <a:ext cx="155448" cy="155448"/>
           </a:xfrm>
           <a:prstGeom prst="rect">
             <a:avLst/>
@@ -6953,18 +6799,18 @@
       </p:pic>
       <p:sp>
         <p:nvSpPr>
-          <p:cNvPr id="127" name="lane-9-chip-3-tile"/>
-          <p:cNvSpPr/>
-          <p:nvPr/>
-        </p:nvSpPr>
-        <p:spPr>
-          <a:xfrm>
-            <a:off x="4837176" y="4580313"/>
-            <a:ext cx="256032" cy="256032"/>
-          </a:xfrm>
-          <a:prstGeom prst="roundRect">
-            <a:avLst>
-              <a:gd name="adj" fmla="val 14286"/>
+          <p:cNvPr id="122" name="lane-7-chip-2-tile"/>
+          <p:cNvSpPr/>
+          <p:nvPr/>
+        </p:nvSpPr>
+        <p:spPr>
+          <a:xfrm>
+            <a:off x="4526280" y="3753612"/>
+            <a:ext cx="237744" cy="237744"/>
+          </a:xfrm>
+          <a:prstGeom prst="roundRect">
+            <a:avLst>
+              <a:gd name="adj" fmla="val 15385"/>
             </a:avLst>
           </a:prstGeom>
           <a:solidFill>
@@ -6975,7 +6821,7 @@
       </p:sp>
       <p:pic>
         <p:nvPicPr>
-          <p:cNvPr id="128" name="lane-9-chip-3" descr="/Users/a/MAI/DID/presentation/assets/logos/claude.png">    </p:cNvPr>
+          <p:cNvPr id="123" name="lane-7-chip-2" descr="/Users/a/MAI/DID/presentation/assets/logos/openai.png">    </p:cNvPr>
           <p:cNvPicPr>
             <a:picLocks noChangeAspect="1"/>
           </p:cNvPicPr>
@@ -6989,8 +6835,8 @@
         </p:blipFill>
         <p:spPr>
           <a:xfrm>
-            <a:off x="4878324" y="4621461"/>
-            <a:ext cx="173736" cy="173736"/>
+            <a:off x="4567428" y="3794760"/>
+            <a:ext cx="155448" cy="155448"/>
           </a:xfrm>
           <a:prstGeom prst="rect">
             <a:avLst/>
@@ -6999,153 +6845,18 @@
       </p:pic>
       <p:sp>
         <p:nvSpPr>
-          <p:cNvPr id="129" name="lane-9-chip-4"/>
-          <p:cNvSpPr txBox="1"/>
-          <p:nvPr/>
-        </p:nvSpPr>
-        <p:spPr>
-          <a:xfrm>
-            <a:off x="5129784" y="4580313"/>
-            <a:ext cx="256032" cy="256032"/>
-          </a:xfrm>
-          <a:prstGeom prst="roundRect">
-            <a:avLst>
-              <a:gd name="adj" fmla="val 14286"/>
-            </a:avLst>
-          </a:prstGeom>
-          <a:solidFill>
-            <a:schemeClr val="accent3"/>
-          </a:solidFill>
-          <a:ln/>
-        </p:spPr>
-        <p:txBody>
-          <a:bodyPr wrap="square" lIns="0" tIns="0" rIns="0" bIns="0" rtlCol="0" anchor="ctr"/>
-          <a:lstStyle/>
-          <a:p>
-            <a:pPr algn="ctr" indent="0" marL="0">
-              <a:buNone/>
-            </a:pPr>
-            <a:r>
-              <a:rPr lang="en-US" sz="1300" b="1" dirty="0">
-                <a:solidFill>
-                  <a:schemeClr val="bg1"/>
-                </a:solidFill>
-              </a:rPr>
-              <a:t>✓</a:t>
-            </a:r>
-            <a:endParaRPr lang="en-US" sz="1300" dirty="0"/>
-          </a:p>
-        </p:txBody>
-      </p:sp>
-      <p:sp>
-        <p:nvSpPr>
-          <p:cNvPr id="130" name="lane-9-result"/>
-          <p:cNvSpPr txBox="1"/>
-          <p:nvPr/>
-        </p:nvSpPr>
-        <p:spPr>
-          <a:xfrm>
-            <a:off x="7315200" y="4554543"/>
-            <a:ext cx="4325112" cy="307571"/>
-          </a:xfrm>
-          <a:prstGeom prst="rect">
-            <a:avLst/>
-          </a:prstGeom>
-          <a:noFill/>
-          <a:ln/>
-        </p:spPr>
-        <p:txBody>
-          <a:bodyPr wrap="none" lIns="0" tIns="0" rIns="0" bIns="0" rtlCol="0" anchor="ctr"/>
-          <a:lstStyle/>
-          <a:p>
-            <a:pPr algn="l" indent="0" marL="0">
-              <a:buNone/>
-            </a:pPr>
-            <a:r>
-              <a:rPr lang="en-US" sz="1400" dirty="0">
-                <a:solidFill>
-                  <a:schemeClr val="tx2"/>
-                </a:solidFill>
-              </a:rPr>
-              <a:t>прогон короче на 26 с, заряда на четверть меньше</a:t>
-            </a:r>
-            <a:endParaRPr lang="en-US" sz="1400" dirty="0"/>
-          </a:p>
-        </p:txBody>
-      </p:sp>
-      <p:sp>
-        <p:nvSpPr>
-          <p:cNvPr id="131" name="lane-10-rule"/>
-          <p:cNvSpPr/>
-          <p:nvPr/>
-        </p:nvSpPr>
-        <p:spPr>
-          <a:xfrm>
-            <a:off x="548640" y="4862114"/>
-            <a:ext cx="11091672" cy="0"/>
-          </a:xfrm>
-          <a:prstGeom prst="line">
-            <a:avLst/>
-          </a:prstGeom>
-          <a:noFill/>
-          <a:ln w="12700">
-            <a:solidFill>
-              <a:schemeClr val="bg2"/>
-            </a:solidFill>
-            <a:prstDash val="solid"/>
-          </a:ln>
-        </p:spPr>
-      </p:sp>
-      <p:sp>
-        <p:nvSpPr>
-          <p:cNvPr id="132" name="lane-10-name"/>
-          <p:cNvSpPr txBox="1"/>
-          <p:nvPr/>
-        </p:nvSpPr>
-        <p:spPr>
-          <a:xfrm>
-            <a:off x="548640" y="4862114"/>
-            <a:ext cx="3611880" cy="307571"/>
-          </a:xfrm>
-          <a:prstGeom prst="rect">
-            <a:avLst/>
-          </a:prstGeom>
-          <a:noFill/>
-          <a:ln/>
-        </p:spPr>
-        <p:txBody>
-          <a:bodyPr wrap="none" lIns="0" tIns="0" rIns="0" bIns="0" rtlCol="0" anchor="ctr"/>
-          <a:lstStyle/>
-          <a:p>
-            <a:pPr algn="l" indent="0" marL="0">
-              <a:buNone/>
-            </a:pPr>
-            <a:r>
-              <a:rPr lang="en-US" sz="1600" b="1" dirty="0">
-                <a:solidFill>
-                  <a:schemeClr val="tx1"/>
-                </a:solidFill>
-              </a:rPr>
-              <a:t>R14. Самокалибровка датчика</a:t>
-            </a:r>
-            <a:endParaRPr lang="en-US" sz="1600" dirty="0"/>
-          </a:p>
-        </p:txBody>
-      </p:sp>
-      <p:sp>
-        <p:nvSpPr>
-          <p:cNvPr id="133" name="lane-10-chip-1-tile"/>
-          <p:cNvSpPr/>
-          <p:nvPr/>
-        </p:nvSpPr>
-        <p:spPr>
-          <a:xfrm>
-            <a:off x="4251960" y="4887884"/>
-            <a:ext cx="256032" cy="256032"/>
-          </a:xfrm>
-          <a:prstGeom prst="roundRect">
-            <a:avLst>
-              <a:gd name="adj" fmla="val 14286"/>
+          <p:cNvPr id="124" name="lane-7-chip-3-tile"/>
+          <p:cNvSpPr/>
+          <p:nvPr/>
+        </p:nvSpPr>
+        <p:spPr>
+          <a:xfrm>
+            <a:off x="4800600" y="3753612"/>
+            <a:ext cx="237744" cy="237744"/>
+          </a:xfrm>
+          <a:prstGeom prst="roundRect">
+            <a:avLst>
+              <a:gd name="adj" fmla="val 15385"/>
             </a:avLst>
           </a:prstGeom>
           <a:solidFill>
@@ -7156,7 +6867,7 @@
       </p:sp>
       <p:pic>
         <p:nvPicPr>
-          <p:cNvPr id="134" name="lane-10-chip-1" descr="/Users/a/MAI/DID/presentation/assets/logos/claude.png">    </p:cNvPr>
+          <p:cNvPr id="125" name="lane-7-chip-3" descr="/Users/a/MAI/DID/presentation/assets/logos/claude.png">    </p:cNvPr>
           <p:cNvPicPr>
             <a:picLocks noChangeAspect="1"/>
           </p:cNvPicPr>
@@ -7170,8 +6881,8 @@
         </p:blipFill>
         <p:spPr>
           <a:xfrm>
-            <a:off x="4293108" y="4929032"/>
-            <a:ext cx="173736" cy="173736"/>
+            <a:off x="4841748" y="3794760"/>
+            <a:ext cx="155448" cy="155448"/>
           </a:xfrm>
           <a:prstGeom prst="rect">
             <a:avLst/>
@@ -7180,18 +6891,18 @@
       </p:pic>
       <p:sp>
         <p:nvSpPr>
-          <p:cNvPr id="135" name="lane-10-chip-2-tile"/>
-          <p:cNvSpPr/>
-          <p:nvPr/>
-        </p:nvSpPr>
-        <p:spPr>
-          <a:xfrm>
-            <a:off x="4544568" y="4887884"/>
-            <a:ext cx="256032" cy="256032"/>
-          </a:xfrm>
-          <a:prstGeom prst="roundRect">
-            <a:avLst>
-              <a:gd name="adj" fmla="val 14286"/>
+          <p:cNvPr id="126" name="lane-7-chip-4-tile"/>
+          <p:cNvSpPr/>
+          <p:nvPr/>
+        </p:nvSpPr>
+        <p:spPr>
+          <a:xfrm>
+            <a:off x="5074920" y="3753612"/>
+            <a:ext cx="237744" cy="237744"/>
+          </a:xfrm>
+          <a:prstGeom prst="roundRect">
+            <a:avLst>
+              <a:gd name="adj" fmla="val 15385"/>
             </a:avLst>
           </a:prstGeom>
           <a:solidFill>
@@ -7202,7 +6913,7 @@
       </p:sp>
       <p:pic>
         <p:nvPicPr>
-          <p:cNvPr id="136" name="lane-10-chip-2" descr="/Users/a/MAI/DID/presentation/assets/logos/openai.png">    </p:cNvPr>
+          <p:cNvPr id="127" name="lane-7-chip-4" descr="/Users/a/MAI/DID/presentation/assets/logos/openai.png">    </p:cNvPr>
           <p:cNvPicPr>
             <a:picLocks noChangeAspect="1"/>
           </p:cNvPicPr>
@@ -7216,8 +6927,8 @@
         </p:blipFill>
         <p:spPr>
           <a:xfrm>
-            <a:off x="4585716" y="4929032"/>
-            <a:ext cx="173736" cy="173736"/>
+            <a:off x="5116068" y="3794760"/>
+            <a:ext cx="155448" cy="155448"/>
           </a:xfrm>
           <a:prstGeom prst="rect">
             <a:avLst/>
@@ -7226,35 +6937,75 @@
       </p:pic>
       <p:sp>
         <p:nvSpPr>
-          <p:cNvPr id="137" name="lane-10-result"/>
+          <p:cNvPr id="128" name="lane-7-chip-5"/>
           <p:cNvSpPr txBox="1"/>
           <p:nvPr/>
         </p:nvSpPr>
         <p:spPr>
           <a:xfrm>
-            <a:off x="7315200" y="4862114"/>
-            <a:ext cx="4325112" cy="307571"/>
-          </a:xfrm>
-          <a:prstGeom prst="rect">
-            <a:avLst/>
-          </a:prstGeom>
-          <a:noFill/>
-          <a:ln/>
-        </p:spPr>
-        <p:txBody>
-          <a:bodyPr wrap="none" lIns="0" tIns="0" rIns="0" bIns="0" rtlCol="0" anchor="ctr"/>
-          <a:lstStyle/>
-          <a:p>
-            <a:pPr algn="l" indent="0" marL="0">
-              <a:buNone/>
-            </a:pPr>
-            <a:r>
-              <a:rPr lang="en-US" sz="1400" dirty="0">
-                <a:solidFill>
-                  <a:schemeClr val="tx2"/>
-                </a:solidFill>
-              </a:rPr>
-              <a:t>ревью вернуло работу; отложена</a:t>
+            <a:off x="5349240" y="3753612"/>
+            <a:ext cx="237744" cy="237744"/>
+          </a:xfrm>
+          <a:prstGeom prst="roundRect">
+            <a:avLst>
+              <a:gd name="adj" fmla="val 15385"/>
+            </a:avLst>
+          </a:prstGeom>
+          <a:solidFill>
+            <a:schemeClr val="accent3"/>
+          </a:solidFill>
+          <a:ln/>
+        </p:spPr>
+        <p:txBody>
+          <a:bodyPr wrap="square" lIns="0" tIns="0" rIns="0" bIns="0" rtlCol="0" anchor="ctr"/>
+          <a:lstStyle/>
+          <a:p>
+            <a:pPr algn="ctr" indent="0" marL="0">
+              <a:buNone/>
+            </a:pPr>
+            <a:r>
+              <a:rPr lang="en-US" sz="1300" b="1" dirty="0">
+                <a:solidFill>
+                  <a:schemeClr val="bg1"/>
+                </a:solidFill>
+              </a:rPr>
+              <a:t>✓</a:t>
+            </a:r>
+            <a:endParaRPr lang="en-US" sz="1300" dirty="0"/>
+          </a:p>
+        </p:txBody>
+      </p:sp>
+      <p:sp>
+        <p:nvSpPr>
+          <p:cNvPr id="129" name="lane-7-next"/>
+          <p:cNvSpPr txBox="1"/>
+          <p:nvPr/>
+        </p:nvSpPr>
+        <p:spPr>
+          <a:xfrm>
+            <a:off x="5623560" y="3732862"/>
+            <a:ext cx="237744" cy="279244"/>
+          </a:xfrm>
+          <a:prstGeom prst="rect">
+            <a:avLst/>
+          </a:prstGeom>
+          <a:noFill/>
+          <a:ln/>
+        </p:spPr>
+        <p:txBody>
+          <a:bodyPr wrap="square" lIns="0" tIns="0" rIns="0" bIns="0" rtlCol="0" anchor="ctr"/>
+          <a:lstStyle/>
+          <a:p>
+            <a:pPr algn="ctr" indent="0" marL="0">
+              <a:buNone/>
+            </a:pPr>
+            <a:r>
+              <a:rPr lang="en-US" sz="1400" b="1" dirty="0">
+                <a:solidFill>
+                  <a:schemeClr val="accent5"/>
+                </a:solidFill>
+              </a:rPr>
+              <a:t>→</a:t>
             </a:r>
             <a:endParaRPr lang="en-US" sz="1400" dirty="0"/>
           </a:p>
@@ -7262,77 +7013,18 @@
       </p:sp>
       <p:sp>
         <p:nvSpPr>
-          <p:cNvPr id="138" name="lane-11-rule"/>
-          <p:cNvSpPr/>
-          <p:nvPr/>
-        </p:nvSpPr>
-        <p:spPr>
-          <a:xfrm>
-            <a:off x="548640" y="5169685"/>
-            <a:ext cx="11091672" cy="0"/>
-          </a:xfrm>
-          <a:prstGeom prst="line">
-            <a:avLst/>
-          </a:prstGeom>
-          <a:noFill/>
-          <a:ln w="12700">
-            <a:solidFill>
-              <a:schemeClr val="bg2"/>
-            </a:solidFill>
-            <a:prstDash val="solid"/>
-          </a:ln>
-        </p:spPr>
-      </p:sp>
-      <p:sp>
-        <p:nvSpPr>
-          <p:cNvPr id="139" name="lane-11-name"/>
-          <p:cNvSpPr txBox="1"/>
-          <p:nvPr/>
-        </p:nvSpPr>
-        <p:spPr>
-          <a:xfrm>
-            <a:off x="548640" y="5169685"/>
-            <a:ext cx="3611880" cy="307571"/>
-          </a:xfrm>
-          <a:prstGeom prst="rect">
-            <a:avLst/>
-          </a:prstGeom>
-          <a:noFill/>
-          <a:ln/>
-        </p:spPr>
-        <p:txBody>
-          <a:bodyPr wrap="none" lIns="0" tIns="0" rIns="0" bIns="0" rtlCol="0" anchor="ctr"/>
-          <a:lstStyle/>
-          <a:p>
-            <a:pPr algn="l" indent="0" marL="0">
-              <a:buNone/>
-            </a:pPr>
-            <a:r>
-              <a:rPr lang="en-US" sz="1600" b="1" dirty="0">
-                <a:solidFill>
-                  <a:schemeClr val="tx1"/>
-                </a:solidFill>
-              </a:rPr>
-              <a:t>F2. SLAM вместо готовой карты</a:t>
-            </a:r>
-            <a:endParaRPr lang="en-US" sz="1600" dirty="0"/>
-          </a:p>
-        </p:txBody>
-      </p:sp>
-      <p:sp>
-        <p:nvSpPr>
-          <p:cNvPr id="140" name="lane-11-chip-1-tile"/>
-          <p:cNvSpPr/>
-          <p:nvPr/>
-        </p:nvSpPr>
-        <p:spPr>
-          <a:xfrm>
-            <a:off x="4251960" y="5195455"/>
-            <a:ext cx="256032" cy="256032"/>
-          </a:xfrm>
-          <a:prstGeom prst="roundRect">
-            <a:avLst>
-              <a:gd name="adj" fmla="val 14286"/>
+          <p:cNvPr id="130" name="lane-7-chip-7-tile"/>
+          <p:cNvSpPr/>
+          <p:nvPr/>
+        </p:nvSpPr>
+        <p:spPr>
+          <a:xfrm>
+            <a:off x="5897880" y="3753612"/>
+            <a:ext cx="237744" cy="237744"/>
+          </a:xfrm>
+          <a:prstGeom prst="roundRect">
+            <a:avLst>
+              <a:gd name="adj" fmla="val 15385"/>
             </a:avLst>
           </a:prstGeom>
           <a:solidFill>
@@ -7343,7 +7035,7 @@
       </p:sp>
       <p:pic>
         <p:nvPicPr>
-          <p:cNvPr id="141" name="lane-11-chip-1" descr="/Users/a/MAI/DID/presentation/assets/logos/gemini.png">    </p:cNvPr>
+          <p:cNvPr id="131" name="lane-7-chip-7" descr="/Users/a/MAI/DID/presentation/assets/logos/claude.png">    </p:cNvPr>
           <p:cNvPicPr>
             <a:picLocks noChangeAspect="1"/>
           </p:cNvPicPr>
@@ -7357,8 +7049,8 @@
         </p:blipFill>
         <p:spPr>
           <a:xfrm>
-            <a:off x="4293108" y="5236603"/>
-            <a:ext cx="173736" cy="173736"/>
+            <a:off x="5939028" y="3794760"/>
+            <a:ext cx="155448" cy="155448"/>
           </a:xfrm>
           <a:prstGeom prst="rect">
             <a:avLst/>
@@ -7367,18 +7059,18 @@
       </p:pic>
       <p:sp>
         <p:nvSpPr>
-          <p:cNvPr id="142" name="lane-11-chip-2-tile"/>
-          <p:cNvSpPr/>
-          <p:nvPr/>
-        </p:nvSpPr>
-        <p:spPr>
-          <a:xfrm>
-            <a:off x="4544568" y="5195455"/>
-            <a:ext cx="256032" cy="256032"/>
-          </a:xfrm>
-          <a:prstGeom prst="roundRect">
-            <a:avLst>
-              <a:gd name="adj" fmla="val 14286"/>
+          <p:cNvPr id="132" name="lane-7-chip-8-tile"/>
+          <p:cNvSpPr/>
+          <p:nvPr/>
+        </p:nvSpPr>
+        <p:spPr>
+          <a:xfrm>
+            <a:off x="6172200" y="3753612"/>
+            <a:ext cx="237744" cy="237744"/>
+          </a:xfrm>
+          <a:prstGeom prst="roundRect">
+            <a:avLst>
+              <a:gd name="adj" fmla="val 15385"/>
             </a:avLst>
           </a:prstGeom>
           <a:solidFill>
@@ -7389,7 +7081,7 @@
       </p:sp>
       <p:pic>
         <p:nvPicPr>
-          <p:cNvPr id="143" name="lane-11-chip-2" descr="/Users/a/MAI/DID/presentation/assets/logos/claude.png">    </p:cNvPr>
+          <p:cNvPr id="133" name="lane-7-chip-8" descr="/Users/a/MAI/DID/presentation/assets/logos/openai.png">    </p:cNvPr>
           <p:cNvPicPr>
             <a:picLocks noChangeAspect="1"/>
           </p:cNvPicPr>
@@ -7403,8 +7095,8 @@
         </p:blipFill>
         <p:spPr>
           <a:xfrm>
-            <a:off x="4585716" y="5236603"/>
-            <a:ext cx="173736" cy="173736"/>
+            <a:off x="6213348" y="3794760"/>
+            <a:ext cx="155448" cy="155448"/>
           </a:xfrm>
           <a:prstGeom prst="rect">
             <a:avLst/>
@@ -7413,18 +7105,18 @@
       </p:pic>
       <p:sp>
         <p:nvSpPr>
-          <p:cNvPr id="144" name="lane-11-chip-3-tile"/>
-          <p:cNvSpPr/>
-          <p:nvPr/>
-        </p:nvSpPr>
-        <p:spPr>
-          <a:xfrm>
-            <a:off x="4837176" y="5195455"/>
-            <a:ext cx="256032" cy="256032"/>
-          </a:xfrm>
-          <a:prstGeom prst="roundRect">
-            <a:avLst>
-              <a:gd name="adj" fmla="val 14286"/>
+          <p:cNvPr id="134" name="lane-7-chip-9-tile"/>
+          <p:cNvSpPr/>
+          <p:nvPr/>
+        </p:nvSpPr>
+        <p:spPr>
+          <a:xfrm>
+            <a:off x="6446520" y="3753612"/>
+            <a:ext cx="237744" cy="237744"/>
+          </a:xfrm>
+          <a:prstGeom prst="roundRect">
+            <a:avLst>
+              <a:gd name="adj" fmla="val 15385"/>
             </a:avLst>
           </a:prstGeom>
           <a:solidFill>
@@ -7435,7 +7127,7 @@
       </p:sp>
       <p:pic>
         <p:nvPicPr>
-          <p:cNvPr id="145" name="lane-11-chip-3" descr="/Users/a/MAI/DID/presentation/assets/logos/openai.png">    </p:cNvPr>
+          <p:cNvPr id="135" name="lane-7-chip-9" descr="/Users/a/MAI/DID/presentation/assets/logos/claude.png">    </p:cNvPr>
           <p:cNvPicPr>
             <a:picLocks noChangeAspect="1"/>
           </p:cNvPicPr>
@@ -7449,8 +7141,8 @@
         </p:blipFill>
         <p:spPr>
           <a:xfrm>
-            <a:off x="4878324" y="5236603"/>
-            <a:ext cx="173736" cy="173736"/>
+            <a:off x="6487668" y="3794760"/>
+            <a:ext cx="155448" cy="155448"/>
           </a:xfrm>
           <a:prstGeom prst="rect">
             <a:avLst/>
@@ -7459,18 +7151,153 @@
       </p:pic>
       <p:sp>
         <p:nvSpPr>
-          <p:cNvPr id="146" name="lane-11-chip-4-tile"/>
-          <p:cNvSpPr/>
-          <p:nvPr/>
-        </p:nvSpPr>
-        <p:spPr>
-          <a:xfrm>
-            <a:off x="5129784" y="5195455"/>
-            <a:ext cx="256032" cy="256032"/>
-          </a:xfrm>
-          <a:prstGeom prst="roundRect">
-            <a:avLst>
-              <a:gd name="adj" fmla="val 14286"/>
+          <p:cNvPr id="136" name="lane-7-chip-10"/>
+          <p:cNvSpPr txBox="1"/>
+          <p:nvPr/>
+        </p:nvSpPr>
+        <p:spPr>
+          <a:xfrm>
+            <a:off x="6720840" y="3753612"/>
+            <a:ext cx="237744" cy="237744"/>
+          </a:xfrm>
+          <a:prstGeom prst="roundRect">
+            <a:avLst>
+              <a:gd name="adj" fmla="val 15385"/>
+            </a:avLst>
+          </a:prstGeom>
+          <a:solidFill>
+            <a:schemeClr val="accent3"/>
+          </a:solidFill>
+          <a:ln/>
+        </p:spPr>
+        <p:txBody>
+          <a:bodyPr wrap="square" lIns="0" tIns="0" rIns="0" bIns="0" rtlCol="0" anchor="ctr"/>
+          <a:lstStyle/>
+          <a:p>
+            <a:pPr algn="ctr" indent="0" marL="0">
+              <a:buNone/>
+            </a:pPr>
+            <a:r>
+              <a:rPr lang="en-US" sz="1300" b="1" dirty="0">
+                <a:solidFill>
+                  <a:schemeClr val="bg1"/>
+                </a:solidFill>
+              </a:rPr>
+              <a:t>✓</a:t>
+            </a:r>
+            <a:endParaRPr lang="en-US" sz="1300" dirty="0"/>
+          </a:p>
+        </p:txBody>
+      </p:sp>
+      <p:sp>
+        <p:nvSpPr>
+          <p:cNvPr id="137" name="lane-7-result"/>
+          <p:cNvSpPr txBox="1"/>
+          <p:nvPr/>
+        </p:nvSpPr>
+        <p:spPr>
+          <a:xfrm>
+            <a:off x="7132320" y="3732862"/>
+            <a:ext cx="4507992" cy="279244"/>
+          </a:xfrm>
+          <a:prstGeom prst="rect">
+            <a:avLst/>
+          </a:prstGeom>
+          <a:noFill/>
+          <a:ln/>
+        </p:spPr>
+        <p:txBody>
+          <a:bodyPr wrap="none" lIns="0" tIns="0" rIns="0" bIns="0" rtlCol="0" anchor="ctr"/>
+          <a:lstStyle/>
+          <a:p>
+            <a:pPr algn="l" indent="0" marL="0">
+              <a:buNone/>
+            </a:pPr>
+            <a:r>
+              <a:rPr lang="en-US" sz="1400" dirty="0">
+                <a:solidFill>
+                  <a:schemeClr val="tx2"/>
+                </a:solidFill>
+              </a:rPr>
+              <a:t>сбой датчика: +6,4 очка; ещё пять правок: 0</a:t>
+            </a:r>
+            <a:endParaRPr lang="en-US" sz="1400" dirty="0"/>
+          </a:p>
+        </p:txBody>
+      </p:sp>
+      <p:sp>
+        <p:nvSpPr>
+          <p:cNvPr id="138" name="lane-8-rule"/>
+          <p:cNvSpPr/>
+          <p:nvPr/>
+        </p:nvSpPr>
+        <p:spPr>
+          <a:xfrm>
+            <a:off x="548640" y="4012106"/>
+            <a:ext cx="11091672" cy="0"/>
+          </a:xfrm>
+          <a:prstGeom prst="line">
+            <a:avLst/>
+          </a:prstGeom>
+          <a:noFill/>
+          <a:ln w="12700">
+            <a:solidFill>
+              <a:schemeClr val="bg2"/>
+            </a:solidFill>
+            <a:prstDash val="solid"/>
+          </a:ln>
+        </p:spPr>
+      </p:sp>
+      <p:sp>
+        <p:nvSpPr>
+          <p:cNvPr id="139" name="lane-8-name"/>
+          <p:cNvSpPr txBox="1"/>
+          <p:nvPr/>
+        </p:nvSpPr>
+        <p:spPr>
+          <a:xfrm>
+            <a:off x="548640" y="4012106"/>
+            <a:ext cx="3611880" cy="279244"/>
+          </a:xfrm>
+          <a:prstGeom prst="rect">
+            <a:avLst/>
+          </a:prstGeom>
+          <a:noFill/>
+          <a:ln/>
+        </p:spPr>
+        <p:txBody>
+          <a:bodyPr wrap="none" lIns="0" tIns="0" rIns="0" bIns="0" rtlCol="0" anchor="ctr"/>
+          <a:lstStyle/>
+          <a:p>
+            <a:pPr algn="l" indent="0" marL="0">
+              <a:buNone/>
+            </a:pPr>
+            <a:r>
+              <a:rPr lang="en-US" sz="1600" b="1" dirty="0">
+                <a:solidFill>
+                  <a:schemeClr val="tx1"/>
+                </a:solidFill>
+              </a:rPr>
+              <a:t>A1. Новые схемы агента</a:t>
+            </a:r>
+            <a:endParaRPr lang="en-US" sz="1600" dirty="0"/>
+          </a:p>
+        </p:txBody>
+      </p:sp>
+      <p:sp>
+        <p:nvSpPr>
+          <p:cNvPr id="140" name="lane-8-chip-1-tile"/>
+          <p:cNvSpPr/>
+          <p:nvPr/>
+        </p:nvSpPr>
+        <p:spPr>
+          <a:xfrm>
+            <a:off x="4251960" y="4032856"/>
+            <a:ext cx="237744" cy="237744"/>
+          </a:xfrm>
+          <a:prstGeom prst="roundRect">
+            <a:avLst>
+              <a:gd name="adj" fmla="val 15385"/>
             </a:avLst>
           </a:prstGeom>
           <a:solidFill>
@@ -7481,7 +7308,7 @@
       </p:sp>
       <p:pic>
         <p:nvPicPr>
-          <p:cNvPr id="147" name="lane-11-chip-4" descr="/Users/a/MAI/DID/presentation/assets/logos/claude.png">    </p:cNvPr>
+          <p:cNvPr id="141" name="lane-8-chip-1" descr="/Users/a/MAI/DID/presentation/assets/logos/claude.png">    </p:cNvPr>
           <p:cNvPicPr>
             <a:picLocks noChangeAspect="1"/>
           </p:cNvPicPr>
@@ -7495,8 +7322,8 @@
         </p:blipFill>
         <p:spPr>
           <a:xfrm>
-            <a:off x="5170932" y="5236603"/>
-            <a:ext cx="173736" cy="173736"/>
+            <a:off x="4293108" y="4074004"/>
+            <a:ext cx="155448" cy="155448"/>
           </a:xfrm>
           <a:prstGeom prst="rect">
             <a:avLst/>
@@ -7505,18 +7332,18 @@
       </p:pic>
       <p:sp>
         <p:nvSpPr>
-          <p:cNvPr id="148" name="lane-11-chip-5-tile"/>
-          <p:cNvSpPr/>
-          <p:nvPr/>
-        </p:nvSpPr>
-        <p:spPr>
-          <a:xfrm>
-            <a:off x="5422392" y="5195455"/>
-            <a:ext cx="256032" cy="256032"/>
-          </a:xfrm>
-          <a:prstGeom prst="roundRect">
-            <a:avLst>
-              <a:gd name="adj" fmla="val 14286"/>
+          <p:cNvPr id="142" name="lane-8-chip-2-tile"/>
+          <p:cNvSpPr/>
+          <p:nvPr/>
+        </p:nvSpPr>
+        <p:spPr>
+          <a:xfrm>
+            <a:off x="4526280" y="4032856"/>
+            <a:ext cx="237744" cy="237744"/>
+          </a:xfrm>
+          <a:prstGeom prst="roundRect">
+            <a:avLst>
+              <a:gd name="adj" fmla="val 15385"/>
             </a:avLst>
           </a:prstGeom>
           <a:solidFill>
@@ -7527,7 +7354,7 @@
       </p:sp>
       <p:pic>
         <p:nvPicPr>
-          <p:cNvPr id="149" name="lane-11-chip-5" descr="/Users/a/MAI/DID/presentation/assets/logos/openai.png">    </p:cNvPr>
+          <p:cNvPr id="143" name="lane-8-chip-2" descr="/Users/a/MAI/DID/presentation/assets/logos/openai.png">    </p:cNvPr>
           <p:cNvPicPr>
             <a:picLocks noChangeAspect="1"/>
           </p:cNvPicPr>
@@ -7541,8 +7368,8 @@
         </p:blipFill>
         <p:spPr>
           <a:xfrm>
-            <a:off x="5463540" y="5236603"/>
-            <a:ext cx="173736" cy="173736"/>
+            <a:off x="4567428" y="4074004"/>
+            <a:ext cx="155448" cy="155448"/>
           </a:xfrm>
           <a:prstGeom prst="rect">
             <a:avLst/>
@@ -7551,18 +7378,18 @@
       </p:pic>
       <p:sp>
         <p:nvSpPr>
-          <p:cNvPr id="150" name="lane-11-chip-6-tile"/>
-          <p:cNvSpPr/>
-          <p:nvPr/>
-        </p:nvSpPr>
-        <p:spPr>
-          <a:xfrm>
-            <a:off x="5715000" y="5195455"/>
-            <a:ext cx="256032" cy="256032"/>
-          </a:xfrm>
-          <a:prstGeom prst="roundRect">
-            <a:avLst>
-              <a:gd name="adj" fmla="val 14286"/>
+          <p:cNvPr id="144" name="lane-8-chip-3-tile"/>
+          <p:cNvSpPr/>
+          <p:nvPr/>
+        </p:nvSpPr>
+        <p:spPr>
+          <a:xfrm>
+            <a:off x="4800600" y="4032856"/>
+            <a:ext cx="237744" cy="237744"/>
+          </a:xfrm>
+          <a:prstGeom prst="roundRect">
+            <a:avLst>
+              <a:gd name="adj" fmla="val 15385"/>
             </a:avLst>
           </a:prstGeom>
           <a:solidFill>
@@ -7573,7 +7400,7 @@
       </p:sp>
       <p:pic>
         <p:nvPicPr>
-          <p:cNvPr id="151" name="lane-11-chip-6" descr="/Users/a/MAI/DID/presentation/assets/logos/claude.png">    </p:cNvPr>
+          <p:cNvPr id="145" name="lane-8-chip-3" descr="/Users/a/MAI/DID/presentation/assets/logos/claude.png">    </p:cNvPr>
           <p:cNvPicPr>
             <a:picLocks noChangeAspect="1"/>
           </p:cNvPicPr>
@@ -7587,8 +7414,8 @@
         </p:blipFill>
         <p:spPr>
           <a:xfrm>
-            <a:off x="5756148" y="5236603"/>
-            <a:ext cx="173736" cy="173736"/>
+            <a:off x="4841748" y="4074004"/>
+            <a:ext cx="155448" cy="155448"/>
           </a:xfrm>
           <a:prstGeom prst="rect">
             <a:avLst/>
@@ -7597,18 +7424,18 @@
       </p:pic>
       <p:sp>
         <p:nvSpPr>
-          <p:cNvPr id="152" name="lane-11-chip-7"/>
+          <p:cNvPr id="146" name="lane-8-chip-4"/>
           <p:cNvSpPr txBox="1"/>
           <p:nvPr/>
         </p:nvSpPr>
         <p:spPr>
           <a:xfrm>
-            <a:off x="6007608" y="5195455"/>
-            <a:ext cx="256032" cy="256032"/>
-          </a:xfrm>
-          <a:prstGeom prst="roundRect">
-            <a:avLst>
-              <a:gd name="adj" fmla="val 14286"/>
+            <a:off x="5074920" y="4032856"/>
+            <a:ext cx="237744" cy="237744"/>
+          </a:xfrm>
+          <a:prstGeom prst="roundRect">
+            <a:avLst>
+              <a:gd name="adj" fmla="val 15385"/>
             </a:avLst>
           </a:prstGeom>
           <a:solidFill>
@@ -7637,14 +7464,14 @@
       </p:sp>
       <p:sp>
         <p:nvSpPr>
-          <p:cNvPr id="153" name="lane-11-result"/>
+          <p:cNvPr id="147" name="lane-8-result"/>
           <p:cNvSpPr txBox="1"/>
           <p:nvPr/>
         </p:nvSpPr>
         <p:spPr>
           <a:xfrm>
-            <a:off x="7315200" y="5169685"/>
-            <a:ext cx="4325112" cy="307571"/>
+            <a:off x="7132320" y="4012106"/>
+            <a:ext cx="4507992" cy="279244"/>
           </a:xfrm>
           <a:prstGeom prst="rect">
             <a:avLst/>
@@ -7665,6 +7492,1831 @@
                   <a:schemeClr val="tx2"/>
                 </a:solidFill>
               </a:rPr>
+              <a:t>не лучше нынешней; потолок — 92,5 очка</a:t>
+            </a:r>
+            <a:endParaRPr lang="en-US" sz="1400" dirty="0"/>
+          </a:p>
+        </p:txBody>
+      </p:sp>
+      <p:sp>
+        <p:nvSpPr>
+          <p:cNvPr id="148" name="lane-9-rule"/>
+          <p:cNvSpPr/>
+          <p:nvPr/>
+        </p:nvSpPr>
+        <p:spPr>
+          <a:xfrm>
+            <a:off x="548640" y="4291350"/>
+            <a:ext cx="11091672" cy="0"/>
+          </a:xfrm>
+          <a:prstGeom prst="line">
+            <a:avLst/>
+          </a:prstGeom>
+          <a:noFill/>
+          <a:ln w="12700">
+            <a:solidFill>
+              <a:schemeClr val="bg2"/>
+            </a:solidFill>
+            <a:prstDash val="solid"/>
+          </a:ln>
+        </p:spPr>
+      </p:sp>
+      <p:sp>
+        <p:nvSpPr>
+          <p:cNvPr id="149" name="lane-9-name"/>
+          <p:cNvSpPr txBox="1"/>
+          <p:nvPr/>
+        </p:nvSpPr>
+        <p:spPr>
+          <a:xfrm>
+            <a:off x="548640" y="4291350"/>
+            <a:ext cx="3611880" cy="279244"/>
+          </a:xfrm>
+          <a:prstGeom prst="rect">
+            <a:avLst/>
+          </a:prstGeom>
+          <a:noFill/>
+          <a:ln/>
+        </p:spPr>
+        <p:txBody>
+          <a:bodyPr wrap="none" lIns="0" tIns="0" rIns="0" bIns="0" rtlCol="0" anchor="ctr"/>
+          <a:lstStyle/>
+          <a:p>
+            <a:pPr algn="l" indent="0" marL="0">
+              <a:buNone/>
+            </a:pPr>
+            <a:r>
+              <a:rPr lang="en-US" sz="1600" b="1" dirty="0">
+                <a:solidFill>
+                  <a:schemeClr val="tx1"/>
+                </a:solidFill>
+              </a:rPr>
+              <a:t>R12. Выбор опыта с учётом цены</a:t>
+            </a:r>
+            <a:endParaRPr lang="en-US" sz="1600" dirty="0"/>
+          </a:p>
+        </p:txBody>
+      </p:sp>
+      <p:sp>
+        <p:nvSpPr>
+          <p:cNvPr id="150" name="lane-9-chip-1-tile"/>
+          <p:cNvSpPr/>
+          <p:nvPr/>
+        </p:nvSpPr>
+        <p:spPr>
+          <a:xfrm>
+            <a:off x="4251960" y="4312099"/>
+            <a:ext cx="237744" cy="237744"/>
+          </a:xfrm>
+          <a:prstGeom prst="roundRect">
+            <a:avLst>
+              <a:gd name="adj" fmla="val 15385"/>
+            </a:avLst>
+          </a:prstGeom>
+          <a:solidFill>
+            <a:schemeClr val="bg2"/>
+          </a:solidFill>
+          <a:ln/>
+        </p:spPr>
+      </p:sp>
+      <p:pic>
+        <p:nvPicPr>
+          <p:cNvPr id="151" name="lane-9-chip-1" descr="/Users/a/MAI/DID/presentation/assets/logos/claude.png">    </p:cNvPr>
+          <p:cNvPicPr>
+            <a:picLocks noChangeAspect="1"/>
+          </p:cNvPicPr>
+          <p:nvPr/>
+        </p:nvPicPr>
+        <p:blipFill>
+          <a:blip r:embed="rId51"/>
+          <a:stretch>
+            <a:fillRect/>
+          </a:stretch>
+        </p:blipFill>
+        <p:spPr>
+          <a:xfrm>
+            <a:off x="4293108" y="4353247"/>
+            <a:ext cx="155448" cy="155448"/>
+          </a:xfrm>
+          <a:prstGeom prst="rect">
+            <a:avLst/>
+          </a:prstGeom>
+        </p:spPr>
+      </p:pic>
+      <p:sp>
+        <p:nvSpPr>
+          <p:cNvPr id="152" name="lane-9-chip-2-tile"/>
+          <p:cNvSpPr/>
+          <p:nvPr/>
+        </p:nvSpPr>
+        <p:spPr>
+          <a:xfrm>
+            <a:off x="4526280" y="4312099"/>
+            <a:ext cx="237744" cy="237744"/>
+          </a:xfrm>
+          <a:prstGeom prst="roundRect">
+            <a:avLst>
+              <a:gd name="adj" fmla="val 15385"/>
+            </a:avLst>
+          </a:prstGeom>
+          <a:solidFill>
+            <a:schemeClr val="bg2"/>
+          </a:solidFill>
+          <a:ln/>
+        </p:spPr>
+      </p:sp>
+      <p:pic>
+        <p:nvPicPr>
+          <p:cNvPr id="153" name="lane-9-chip-2" descr="/Users/a/MAI/DID/presentation/assets/logos/openai.png">    </p:cNvPr>
+          <p:cNvPicPr>
+            <a:picLocks noChangeAspect="1"/>
+          </p:cNvPicPr>
+          <p:nvPr/>
+        </p:nvPicPr>
+        <p:blipFill>
+          <a:blip r:embed="rId52"/>
+          <a:stretch>
+            <a:fillRect/>
+          </a:stretch>
+        </p:blipFill>
+        <p:spPr>
+          <a:xfrm>
+            <a:off x="4567428" y="4353247"/>
+            <a:ext cx="155448" cy="155448"/>
+          </a:xfrm>
+          <a:prstGeom prst="rect">
+            <a:avLst/>
+          </a:prstGeom>
+        </p:spPr>
+      </p:pic>
+      <p:sp>
+        <p:nvSpPr>
+          <p:cNvPr id="154" name="lane-9-chip-3-tile"/>
+          <p:cNvSpPr/>
+          <p:nvPr/>
+        </p:nvSpPr>
+        <p:spPr>
+          <a:xfrm>
+            <a:off x="4800600" y="4312099"/>
+            <a:ext cx="237744" cy="237744"/>
+          </a:xfrm>
+          <a:prstGeom prst="roundRect">
+            <a:avLst>
+              <a:gd name="adj" fmla="val 15385"/>
+            </a:avLst>
+          </a:prstGeom>
+          <a:solidFill>
+            <a:schemeClr val="bg2"/>
+          </a:solidFill>
+          <a:ln/>
+        </p:spPr>
+      </p:sp>
+      <p:pic>
+        <p:nvPicPr>
+          <p:cNvPr id="155" name="lane-9-chip-3" descr="/Users/a/MAI/DID/presentation/assets/logos/claude.png">    </p:cNvPr>
+          <p:cNvPicPr>
+            <a:picLocks noChangeAspect="1"/>
+          </p:cNvPicPr>
+          <p:nvPr/>
+        </p:nvPicPr>
+        <p:blipFill>
+          <a:blip r:embed="rId53"/>
+          <a:stretch>
+            <a:fillRect/>
+          </a:stretch>
+        </p:blipFill>
+        <p:spPr>
+          <a:xfrm>
+            <a:off x="4841748" y="4353247"/>
+            <a:ext cx="155448" cy="155448"/>
+          </a:xfrm>
+          <a:prstGeom prst="rect">
+            <a:avLst/>
+          </a:prstGeom>
+        </p:spPr>
+      </p:pic>
+      <p:sp>
+        <p:nvSpPr>
+          <p:cNvPr id="156" name="lane-9-chip-4"/>
+          <p:cNvSpPr txBox="1"/>
+          <p:nvPr/>
+        </p:nvSpPr>
+        <p:spPr>
+          <a:xfrm>
+            <a:off x="5074920" y="4312099"/>
+            <a:ext cx="237744" cy="237744"/>
+          </a:xfrm>
+          <a:prstGeom prst="roundRect">
+            <a:avLst>
+              <a:gd name="adj" fmla="val 15385"/>
+            </a:avLst>
+          </a:prstGeom>
+          <a:solidFill>
+            <a:schemeClr val="accent3"/>
+          </a:solidFill>
+          <a:ln/>
+        </p:spPr>
+        <p:txBody>
+          <a:bodyPr wrap="square" lIns="0" tIns="0" rIns="0" bIns="0" rtlCol="0" anchor="ctr"/>
+          <a:lstStyle/>
+          <a:p>
+            <a:pPr algn="ctr" indent="0" marL="0">
+              <a:buNone/>
+            </a:pPr>
+            <a:r>
+              <a:rPr lang="en-US" sz="1300" b="1" dirty="0">
+                <a:solidFill>
+                  <a:schemeClr val="bg1"/>
+                </a:solidFill>
+              </a:rPr>
+              <a:t>✓</a:t>
+            </a:r>
+            <a:endParaRPr lang="en-US" sz="1300" dirty="0"/>
+          </a:p>
+        </p:txBody>
+      </p:sp>
+      <p:sp>
+        <p:nvSpPr>
+          <p:cNvPr id="157" name="lane-9-result"/>
+          <p:cNvSpPr txBox="1"/>
+          <p:nvPr/>
+        </p:nvSpPr>
+        <p:spPr>
+          <a:xfrm>
+            <a:off x="7132320" y="4291350"/>
+            <a:ext cx="4507992" cy="279244"/>
+          </a:xfrm>
+          <a:prstGeom prst="rect">
+            <a:avLst/>
+          </a:prstGeom>
+          <a:noFill/>
+          <a:ln/>
+        </p:spPr>
+        <p:txBody>
+          <a:bodyPr wrap="none" lIns="0" tIns="0" rIns="0" bIns="0" rtlCol="0" anchor="ctr"/>
+          <a:lstStyle/>
+          <a:p>
+            <a:pPr algn="l" indent="0" marL="0">
+              <a:buNone/>
+            </a:pPr>
+            <a:r>
+              <a:rPr lang="en-US" sz="1400" dirty="0">
+                <a:solidFill>
+                  <a:schemeClr val="tx2"/>
+                </a:solidFill>
+              </a:rPr>
+              <a:t>расход на расследование: 0,54 → 0,08</a:t>
+            </a:r>
+            <a:endParaRPr lang="en-US" sz="1400" dirty="0"/>
+          </a:p>
+        </p:txBody>
+      </p:sp>
+      <p:sp>
+        <p:nvSpPr>
+          <p:cNvPr id="158" name="lane-10-rule"/>
+          <p:cNvSpPr/>
+          <p:nvPr/>
+        </p:nvSpPr>
+        <p:spPr>
+          <a:xfrm>
+            <a:off x="548640" y="4570593"/>
+            <a:ext cx="11091672" cy="0"/>
+          </a:xfrm>
+          <a:prstGeom prst="line">
+            <a:avLst/>
+          </a:prstGeom>
+          <a:noFill/>
+          <a:ln w="12700">
+            <a:solidFill>
+              <a:schemeClr val="bg2"/>
+            </a:solidFill>
+            <a:prstDash val="solid"/>
+          </a:ln>
+        </p:spPr>
+      </p:sp>
+      <p:sp>
+        <p:nvSpPr>
+          <p:cNvPr id="159" name="lane-10-name"/>
+          <p:cNvSpPr txBox="1"/>
+          <p:nvPr/>
+        </p:nvSpPr>
+        <p:spPr>
+          <a:xfrm>
+            <a:off x="548640" y="4570593"/>
+            <a:ext cx="3611880" cy="279244"/>
+          </a:xfrm>
+          <a:prstGeom prst="rect">
+            <a:avLst/>
+          </a:prstGeom>
+          <a:noFill/>
+          <a:ln/>
+        </p:spPr>
+        <p:txBody>
+          <a:bodyPr wrap="none" lIns="0" tIns="0" rIns="0" bIns="0" rtlCol="0" anchor="ctr"/>
+          <a:lstStyle/>
+          <a:p>
+            <a:pPr algn="l" indent="0" marL="0">
+              <a:buNone/>
+            </a:pPr>
+            <a:r>
+              <a:rPr lang="en-US" sz="1600" b="1" dirty="0">
+                <a:solidFill>
+                  <a:schemeClr val="tx1"/>
+                </a:solidFill>
+              </a:rPr>
+              <a:t>R14. Самокалибровка датчика</a:t>
+            </a:r>
+            <a:endParaRPr lang="en-US" sz="1600" dirty="0"/>
+          </a:p>
+        </p:txBody>
+      </p:sp>
+      <p:sp>
+        <p:nvSpPr>
+          <p:cNvPr id="160" name="lane-10-chip-1-tile"/>
+          <p:cNvSpPr/>
+          <p:nvPr/>
+        </p:nvSpPr>
+        <p:spPr>
+          <a:xfrm>
+            <a:off x="4251960" y="4591343"/>
+            <a:ext cx="237744" cy="237744"/>
+          </a:xfrm>
+          <a:prstGeom prst="roundRect">
+            <a:avLst>
+              <a:gd name="adj" fmla="val 15385"/>
+            </a:avLst>
+          </a:prstGeom>
+          <a:solidFill>
+            <a:schemeClr val="bg2"/>
+          </a:solidFill>
+          <a:ln/>
+        </p:spPr>
+      </p:sp>
+      <p:pic>
+        <p:nvPicPr>
+          <p:cNvPr id="161" name="lane-10-chip-1" descr="/Users/a/MAI/DID/presentation/assets/logos/claude.png">    </p:cNvPr>
+          <p:cNvPicPr>
+            <a:picLocks noChangeAspect="1"/>
+          </p:cNvPicPr>
+          <p:nvPr/>
+        </p:nvPicPr>
+        <p:blipFill>
+          <a:blip r:embed="rId54"/>
+          <a:stretch>
+            <a:fillRect/>
+          </a:stretch>
+        </p:blipFill>
+        <p:spPr>
+          <a:xfrm>
+            <a:off x="4293108" y="4632491"/>
+            <a:ext cx="155448" cy="155448"/>
+          </a:xfrm>
+          <a:prstGeom prst="rect">
+            <a:avLst/>
+          </a:prstGeom>
+        </p:spPr>
+      </p:pic>
+      <p:sp>
+        <p:nvSpPr>
+          <p:cNvPr id="162" name="lane-10-chip-2-tile"/>
+          <p:cNvSpPr/>
+          <p:nvPr/>
+        </p:nvSpPr>
+        <p:spPr>
+          <a:xfrm>
+            <a:off x="4526280" y="4591343"/>
+            <a:ext cx="237744" cy="237744"/>
+          </a:xfrm>
+          <a:prstGeom prst="roundRect">
+            <a:avLst>
+              <a:gd name="adj" fmla="val 15385"/>
+            </a:avLst>
+          </a:prstGeom>
+          <a:solidFill>
+            <a:schemeClr val="bg2"/>
+          </a:solidFill>
+          <a:ln/>
+        </p:spPr>
+      </p:sp>
+      <p:pic>
+        <p:nvPicPr>
+          <p:cNvPr id="163" name="lane-10-chip-2" descr="/Users/a/MAI/DID/presentation/assets/logos/openai.png">    </p:cNvPr>
+          <p:cNvPicPr>
+            <a:picLocks noChangeAspect="1"/>
+          </p:cNvPicPr>
+          <p:nvPr/>
+        </p:nvPicPr>
+        <p:blipFill>
+          <a:blip r:embed="rId55"/>
+          <a:stretch>
+            <a:fillRect/>
+          </a:stretch>
+        </p:blipFill>
+        <p:spPr>
+          <a:xfrm>
+            <a:off x="4567428" y="4632491"/>
+            <a:ext cx="155448" cy="155448"/>
+          </a:xfrm>
+          <a:prstGeom prst="rect">
+            <a:avLst/>
+          </a:prstGeom>
+        </p:spPr>
+      </p:pic>
+      <p:sp>
+        <p:nvSpPr>
+          <p:cNvPr id="164" name="lane-10-chip-3-tile"/>
+          <p:cNvSpPr/>
+          <p:nvPr/>
+        </p:nvSpPr>
+        <p:spPr>
+          <a:xfrm>
+            <a:off x="4800600" y="4591343"/>
+            <a:ext cx="237744" cy="237744"/>
+          </a:xfrm>
+          <a:prstGeom prst="roundRect">
+            <a:avLst>
+              <a:gd name="adj" fmla="val 15385"/>
+            </a:avLst>
+          </a:prstGeom>
+          <a:solidFill>
+            <a:schemeClr val="bg2"/>
+          </a:solidFill>
+          <a:ln/>
+        </p:spPr>
+      </p:sp>
+      <p:pic>
+        <p:nvPicPr>
+          <p:cNvPr id="165" name="lane-10-chip-3" descr="/Users/a/MAI/DID/presentation/assets/logos/claude.png">    </p:cNvPr>
+          <p:cNvPicPr>
+            <a:picLocks noChangeAspect="1"/>
+          </p:cNvPicPr>
+          <p:nvPr/>
+        </p:nvPicPr>
+        <p:blipFill>
+          <a:blip r:embed="rId56"/>
+          <a:stretch>
+            <a:fillRect/>
+          </a:stretch>
+        </p:blipFill>
+        <p:spPr>
+          <a:xfrm>
+            <a:off x="4841748" y="4632491"/>
+            <a:ext cx="155448" cy="155448"/>
+          </a:xfrm>
+          <a:prstGeom prst="rect">
+            <a:avLst/>
+          </a:prstGeom>
+        </p:spPr>
+      </p:pic>
+      <p:sp>
+        <p:nvSpPr>
+          <p:cNvPr id="166" name="lane-10-chip-4-tile"/>
+          <p:cNvSpPr/>
+          <p:nvPr/>
+        </p:nvSpPr>
+        <p:spPr>
+          <a:xfrm>
+            <a:off x="5074920" y="4591343"/>
+            <a:ext cx="237744" cy="237744"/>
+          </a:xfrm>
+          <a:prstGeom prst="roundRect">
+            <a:avLst>
+              <a:gd name="adj" fmla="val 15385"/>
+            </a:avLst>
+          </a:prstGeom>
+          <a:solidFill>
+            <a:schemeClr val="bg2"/>
+          </a:solidFill>
+          <a:ln/>
+        </p:spPr>
+      </p:sp>
+      <p:pic>
+        <p:nvPicPr>
+          <p:cNvPr id="167" name="lane-10-chip-4" descr="/Users/a/MAI/DID/presentation/assets/logos/openai.png">    </p:cNvPr>
+          <p:cNvPicPr>
+            <a:picLocks noChangeAspect="1"/>
+          </p:cNvPicPr>
+          <p:nvPr/>
+        </p:nvPicPr>
+        <p:blipFill>
+          <a:blip r:embed="rId57"/>
+          <a:stretch>
+            <a:fillRect/>
+          </a:stretch>
+        </p:blipFill>
+        <p:spPr>
+          <a:xfrm>
+            <a:off x="5116068" y="4632491"/>
+            <a:ext cx="155448" cy="155448"/>
+          </a:xfrm>
+          <a:prstGeom prst="rect">
+            <a:avLst/>
+          </a:prstGeom>
+        </p:spPr>
+      </p:pic>
+      <p:sp>
+        <p:nvSpPr>
+          <p:cNvPr id="168" name="lane-10-chip-5-tile"/>
+          <p:cNvSpPr/>
+          <p:nvPr/>
+        </p:nvSpPr>
+        <p:spPr>
+          <a:xfrm>
+            <a:off x="5349240" y="4591343"/>
+            <a:ext cx="237744" cy="237744"/>
+          </a:xfrm>
+          <a:prstGeom prst="roundRect">
+            <a:avLst>
+              <a:gd name="adj" fmla="val 15385"/>
+            </a:avLst>
+          </a:prstGeom>
+          <a:solidFill>
+            <a:schemeClr val="bg2"/>
+          </a:solidFill>
+          <a:ln/>
+        </p:spPr>
+      </p:sp>
+      <p:pic>
+        <p:nvPicPr>
+          <p:cNvPr id="169" name="lane-10-chip-5" descr="/Users/a/MAI/DID/presentation/assets/logos/claude.png">    </p:cNvPr>
+          <p:cNvPicPr>
+            <a:picLocks noChangeAspect="1"/>
+          </p:cNvPicPr>
+          <p:nvPr/>
+        </p:nvPicPr>
+        <p:blipFill>
+          <a:blip r:embed="rId58"/>
+          <a:stretch>
+            <a:fillRect/>
+          </a:stretch>
+        </p:blipFill>
+        <p:spPr>
+          <a:xfrm>
+            <a:off x="5390388" y="4632491"/>
+            <a:ext cx="155448" cy="155448"/>
+          </a:xfrm>
+          <a:prstGeom prst="rect">
+            <a:avLst/>
+          </a:prstGeom>
+        </p:spPr>
+      </p:pic>
+      <p:sp>
+        <p:nvSpPr>
+          <p:cNvPr id="170" name="lane-10-chip-6"/>
+          <p:cNvSpPr txBox="1"/>
+          <p:nvPr/>
+        </p:nvSpPr>
+        <p:spPr>
+          <a:xfrm>
+            <a:off x="5623560" y="4591343"/>
+            <a:ext cx="237744" cy="237744"/>
+          </a:xfrm>
+          <a:prstGeom prst="roundRect">
+            <a:avLst>
+              <a:gd name="adj" fmla="val 15385"/>
+            </a:avLst>
+          </a:prstGeom>
+          <a:solidFill>
+            <a:schemeClr val="accent3"/>
+          </a:solidFill>
+          <a:ln/>
+        </p:spPr>
+        <p:txBody>
+          <a:bodyPr wrap="square" lIns="0" tIns="0" rIns="0" bIns="0" rtlCol="0" anchor="ctr"/>
+          <a:lstStyle/>
+          <a:p>
+            <a:pPr algn="ctr" indent="0" marL="0">
+              <a:buNone/>
+            </a:pPr>
+            <a:r>
+              <a:rPr lang="en-US" sz="1300" b="1" dirty="0">
+                <a:solidFill>
+                  <a:schemeClr val="bg1"/>
+                </a:solidFill>
+              </a:rPr>
+              <a:t>✓</a:t>
+            </a:r>
+            <a:endParaRPr lang="en-US" sz="1300" dirty="0"/>
+          </a:p>
+        </p:txBody>
+      </p:sp>
+      <p:sp>
+        <p:nvSpPr>
+          <p:cNvPr id="171" name="lane-10-result"/>
+          <p:cNvSpPr txBox="1"/>
+          <p:nvPr/>
+        </p:nvSpPr>
+        <p:spPr>
+          <a:xfrm>
+            <a:off x="7132320" y="4570593"/>
+            <a:ext cx="4507992" cy="279244"/>
+          </a:xfrm>
+          <a:prstGeom prst="rect">
+            <a:avLst/>
+          </a:prstGeom>
+          <a:noFill/>
+          <a:ln/>
+        </p:spPr>
+        <p:txBody>
+          <a:bodyPr wrap="none" lIns="0" tIns="0" rIns="0" bIns="0" rtlCol="0" anchor="ctr"/>
+          <a:lstStyle/>
+          <a:p>
+            <a:pPr algn="l" indent="0" marL="0">
+              <a:buNone/>
+            </a:pPr>
+            <a:r>
+              <a:rPr lang="en-US" sz="1400" dirty="0">
+                <a:solidFill>
+                  <a:schemeClr val="tx2"/>
+                </a:solidFill>
+              </a:rPr>
+              <a:t>неверный закон датчика: 1% → 71% образцов</a:t>
+            </a:r>
+            <a:endParaRPr lang="en-US" sz="1400" dirty="0"/>
+          </a:p>
+        </p:txBody>
+      </p:sp>
+      <p:sp>
+        <p:nvSpPr>
+          <p:cNvPr id="172" name="lane-11-rule"/>
+          <p:cNvSpPr/>
+          <p:nvPr/>
+        </p:nvSpPr>
+        <p:spPr>
+          <a:xfrm>
+            <a:off x="548640" y="4849837"/>
+            <a:ext cx="11091672" cy="0"/>
+          </a:xfrm>
+          <a:prstGeom prst="line">
+            <a:avLst/>
+          </a:prstGeom>
+          <a:noFill/>
+          <a:ln w="12700">
+            <a:solidFill>
+              <a:schemeClr val="bg2"/>
+            </a:solidFill>
+            <a:prstDash val="solid"/>
+          </a:ln>
+        </p:spPr>
+      </p:sp>
+      <p:sp>
+        <p:nvSpPr>
+          <p:cNvPr id="173" name="lane-11-name"/>
+          <p:cNvSpPr txBox="1"/>
+          <p:nvPr/>
+        </p:nvSpPr>
+        <p:spPr>
+          <a:xfrm>
+            <a:off x="548640" y="4849837"/>
+            <a:ext cx="3611880" cy="279244"/>
+          </a:xfrm>
+          <a:prstGeom prst="rect">
+            <a:avLst/>
+          </a:prstGeom>
+          <a:noFill/>
+          <a:ln/>
+        </p:spPr>
+        <p:txBody>
+          <a:bodyPr wrap="none" lIns="0" tIns="0" rIns="0" bIns="0" rtlCol="0" anchor="ctr"/>
+          <a:lstStyle/>
+          <a:p>
+            <a:pPr algn="l" indent="0" marL="0">
+              <a:buNone/>
+            </a:pPr>
+            <a:r>
+              <a:rPr lang="en-US" sz="1600" b="1" dirty="0">
+                <a:solidFill>
+                  <a:schemeClr val="tx1"/>
+                </a:solidFill>
+              </a:rPr>
+              <a:t>J1. Быстрая модель-сторож</a:t>
+            </a:r>
+            <a:endParaRPr lang="en-US" sz="1600" dirty="0"/>
+          </a:p>
+        </p:txBody>
+      </p:sp>
+      <p:sp>
+        <p:nvSpPr>
+          <p:cNvPr id="174" name="lane-11-chip-1-tile"/>
+          <p:cNvSpPr/>
+          <p:nvPr/>
+        </p:nvSpPr>
+        <p:spPr>
+          <a:xfrm>
+            <a:off x="4251960" y="4870587"/>
+            <a:ext cx="237744" cy="237744"/>
+          </a:xfrm>
+          <a:prstGeom prst="roundRect">
+            <a:avLst>
+              <a:gd name="adj" fmla="val 15385"/>
+            </a:avLst>
+          </a:prstGeom>
+          <a:solidFill>
+            <a:schemeClr val="bg2"/>
+          </a:solidFill>
+          <a:ln/>
+        </p:spPr>
+      </p:sp>
+      <p:pic>
+        <p:nvPicPr>
+          <p:cNvPr id="175" name="lane-11-chip-1" descr="/Users/a/MAI/DID/presentation/assets/logos/claude.png">    </p:cNvPr>
+          <p:cNvPicPr>
+            <a:picLocks noChangeAspect="1"/>
+          </p:cNvPicPr>
+          <p:nvPr/>
+        </p:nvPicPr>
+        <p:blipFill>
+          <a:blip r:embed="rId59"/>
+          <a:stretch>
+            <a:fillRect/>
+          </a:stretch>
+        </p:blipFill>
+        <p:spPr>
+          <a:xfrm>
+            <a:off x="4293108" y="4911735"/>
+            <a:ext cx="155448" cy="155448"/>
+          </a:xfrm>
+          <a:prstGeom prst="rect">
+            <a:avLst/>
+          </a:prstGeom>
+        </p:spPr>
+      </p:pic>
+      <p:sp>
+        <p:nvSpPr>
+          <p:cNvPr id="176" name="lane-11-chip-2-tile"/>
+          <p:cNvSpPr/>
+          <p:nvPr/>
+        </p:nvSpPr>
+        <p:spPr>
+          <a:xfrm>
+            <a:off x="4526280" y="4870587"/>
+            <a:ext cx="237744" cy="237744"/>
+          </a:xfrm>
+          <a:prstGeom prst="roundRect">
+            <a:avLst>
+              <a:gd name="adj" fmla="val 15385"/>
+            </a:avLst>
+          </a:prstGeom>
+          <a:solidFill>
+            <a:schemeClr val="bg2"/>
+          </a:solidFill>
+          <a:ln/>
+        </p:spPr>
+      </p:sp>
+      <p:pic>
+        <p:nvPicPr>
+          <p:cNvPr id="177" name="lane-11-chip-2" descr="/Users/a/MAI/DID/presentation/assets/logos/openai.png">    </p:cNvPr>
+          <p:cNvPicPr>
+            <a:picLocks noChangeAspect="1"/>
+          </p:cNvPicPr>
+          <p:nvPr/>
+        </p:nvPicPr>
+        <p:blipFill>
+          <a:blip r:embed="rId60"/>
+          <a:stretch>
+            <a:fillRect/>
+          </a:stretch>
+        </p:blipFill>
+        <p:spPr>
+          <a:xfrm>
+            <a:off x="4567428" y="4911735"/>
+            <a:ext cx="155448" cy="155448"/>
+          </a:xfrm>
+          <a:prstGeom prst="rect">
+            <a:avLst/>
+          </a:prstGeom>
+        </p:spPr>
+      </p:pic>
+      <p:sp>
+        <p:nvSpPr>
+          <p:cNvPr id="178" name="lane-11-chip-3-tile"/>
+          <p:cNvSpPr/>
+          <p:nvPr/>
+        </p:nvSpPr>
+        <p:spPr>
+          <a:xfrm>
+            <a:off x="4800600" y="4870587"/>
+            <a:ext cx="237744" cy="237744"/>
+          </a:xfrm>
+          <a:prstGeom prst="roundRect">
+            <a:avLst>
+              <a:gd name="adj" fmla="val 15385"/>
+            </a:avLst>
+          </a:prstGeom>
+          <a:solidFill>
+            <a:schemeClr val="bg2"/>
+          </a:solidFill>
+          <a:ln/>
+        </p:spPr>
+      </p:sp>
+      <p:pic>
+        <p:nvPicPr>
+          <p:cNvPr id="179" name="lane-11-chip-3" descr="/Users/a/MAI/DID/presentation/assets/logos/claude.png">    </p:cNvPr>
+          <p:cNvPicPr>
+            <a:picLocks noChangeAspect="1"/>
+          </p:cNvPicPr>
+          <p:nvPr/>
+        </p:nvPicPr>
+        <p:blipFill>
+          <a:blip r:embed="rId61"/>
+          <a:stretch>
+            <a:fillRect/>
+          </a:stretch>
+        </p:blipFill>
+        <p:spPr>
+          <a:xfrm>
+            <a:off x="4841748" y="4911735"/>
+            <a:ext cx="155448" cy="155448"/>
+          </a:xfrm>
+          <a:prstGeom prst="rect">
+            <a:avLst/>
+          </a:prstGeom>
+        </p:spPr>
+      </p:pic>
+      <p:sp>
+        <p:nvSpPr>
+          <p:cNvPr id="180" name="lane-11-chip-4-tile"/>
+          <p:cNvSpPr/>
+          <p:nvPr/>
+        </p:nvSpPr>
+        <p:spPr>
+          <a:xfrm>
+            <a:off x="5074920" y="4870587"/>
+            <a:ext cx="237744" cy="237744"/>
+          </a:xfrm>
+          <a:prstGeom prst="roundRect">
+            <a:avLst>
+              <a:gd name="adj" fmla="val 15385"/>
+            </a:avLst>
+          </a:prstGeom>
+          <a:solidFill>
+            <a:schemeClr val="bg2"/>
+          </a:solidFill>
+          <a:ln/>
+        </p:spPr>
+      </p:sp>
+      <p:pic>
+        <p:nvPicPr>
+          <p:cNvPr id="181" name="lane-11-chip-4" descr="/Users/a/MAI/DID/presentation/assets/logos/claude.png">    </p:cNvPr>
+          <p:cNvPicPr>
+            <a:picLocks noChangeAspect="1"/>
+          </p:cNvPicPr>
+          <p:nvPr/>
+        </p:nvPicPr>
+        <p:blipFill>
+          <a:blip r:embed="rId62"/>
+          <a:stretch>
+            <a:fillRect/>
+          </a:stretch>
+        </p:blipFill>
+        <p:spPr>
+          <a:xfrm>
+            <a:off x="5116068" y="4911735"/>
+            <a:ext cx="155448" cy="155448"/>
+          </a:xfrm>
+          <a:prstGeom prst="rect">
+            <a:avLst/>
+          </a:prstGeom>
+        </p:spPr>
+      </p:pic>
+      <p:sp>
+        <p:nvSpPr>
+          <p:cNvPr id="182" name="lane-11-chip-5-tile"/>
+          <p:cNvSpPr/>
+          <p:nvPr/>
+        </p:nvSpPr>
+        <p:spPr>
+          <a:xfrm>
+            <a:off x="5349240" y="4870587"/>
+            <a:ext cx="237744" cy="237744"/>
+          </a:xfrm>
+          <a:prstGeom prst="roundRect">
+            <a:avLst>
+              <a:gd name="adj" fmla="val 15385"/>
+            </a:avLst>
+          </a:prstGeom>
+          <a:solidFill>
+            <a:schemeClr val="bg2"/>
+          </a:solidFill>
+          <a:ln/>
+        </p:spPr>
+      </p:sp>
+      <p:pic>
+        <p:nvPicPr>
+          <p:cNvPr id="183" name="lane-11-chip-5" descr="/Users/a/MAI/DID/presentation/assets/logos/openai.png">    </p:cNvPr>
+          <p:cNvPicPr>
+            <a:picLocks noChangeAspect="1"/>
+          </p:cNvPicPr>
+          <p:nvPr/>
+        </p:nvPicPr>
+        <p:blipFill>
+          <a:blip r:embed="rId63"/>
+          <a:stretch>
+            <a:fillRect/>
+          </a:stretch>
+        </p:blipFill>
+        <p:spPr>
+          <a:xfrm>
+            <a:off x="5390388" y="4911735"/>
+            <a:ext cx="155448" cy="155448"/>
+          </a:xfrm>
+          <a:prstGeom prst="rect">
+            <a:avLst/>
+          </a:prstGeom>
+        </p:spPr>
+      </p:pic>
+      <p:sp>
+        <p:nvSpPr>
+          <p:cNvPr id="184" name="lane-11-chip-6"/>
+          <p:cNvSpPr txBox="1"/>
+          <p:nvPr/>
+        </p:nvSpPr>
+        <p:spPr>
+          <a:xfrm>
+            <a:off x="5623560" y="4870587"/>
+            <a:ext cx="237744" cy="237744"/>
+          </a:xfrm>
+          <a:prstGeom prst="roundRect">
+            <a:avLst>
+              <a:gd name="adj" fmla="val 15385"/>
+            </a:avLst>
+          </a:prstGeom>
+          <a:solidFill>
+            <a:schemeClr val="accent3"/>
+          </a:solidFill>
+          <a:ln/>
+        </p:spPr>
+        <p:txBody>
+          <a:bodyPr wrap="square" lIns="0" tIns="0" rIns="0" bIns="0" rtlCol="0" anchor="ctr"/>
+          <a:lstStyle/>
+          <a:p>
+            <a:pPr algn="ctr" indent="0" marL="0">
+              <a:buNone/>
+            </a:pPr>
+            <a:r>
+              <a:rPr lang="en-US" sz="1300" b="1" dirty="0">
+                <a:solidFill>
+                  <a:schemeClr val="bg1"/>
+                </a:solidFill>
+              </a:rPr>
+              <a:t>✓</a:t>
+            </a:r>
+            <a:endParaRPr lang="en-US" sz="1300" dirty="0"/>
+          </a:p>
+        </p:txBody>
+      </p:sp>
+      <p:sp>
+        <p:nvSpPr>
+          <p:cNvPr id="185" name="lane-11-result"/>
+          <p:cNvSpPr txBox="1"/>
+          <p:nvPr/>
+        </p:nvSpPr>
+        <p:spPr>
+          <a:xfrm>
+            <a:off x="7132320" y="4849837"/>
+            <a:ext cx="4507992" cy="279244"/>
+          </a:xfrm>
+          <a:prstGeom prst="rect">
+            <a:avLst/>
+          </a:prstGeom>
+          <a:noFill/>
+          <a:ln/>
+        </p:spPr>
+        <p:txBody>
+          <a:bodyPr wrap="none" lIns="0" tIns="0" rIns="0" bIns="0" rtlCol="0" anchor="ctr"/>
+          <a:lstStyle/>
+          <a:p>
+            <a:pPr algn="l" indent="0" marL="0">
+              <a:buNone/>
+            </a:pPr>
+            <a:r>
+              <a:rPr lang="en-US" sz="1400" dirty="0">
+                <a:solidFill>
+                  <a:schemeClr val="tx2"/>
+                </a:solidFill>
+              </a:rPr>
+              <a:t>миссия «ровно два образца»: 20 из 20</a:t>
+            </a:r>
+            <a:endParaRPr lang="en-US" sz="1400" dirty="0"/>
+          </a:p>
+        </p:txBody>
+      </p:sp>
+      <p:sp>
+        <p:nvSpPr>
+          <p:cNvPr id="186" name="lane-12-rule"/>
+          <p:cNvSpPr/>
+          <p:nvPr/>
+        </p:nvSpPr>
+        <p:spPr>
+          <a:xfrm>
+            <a:off x="548640" y="5129081"/>
+            <a:ext cx="11091672" cy="0"/>
+          </a:xfrm>
+          <a:prstGeom prst="line">
+            <a:avLst/>
+          </a:prstGeom>
+          <a:noFill/>
+          <a:ln w="12700">
+            <a:solidFill>
+              <a:schemeClr val="bg2"/>
+            </a:solidFill>
+            <a:prstDash val="solid"/>
+          </a:ln>
+        </p:spPr>
+      </p:sp>
+      <p:sp>
+        <p:nvSpPr>
+          <p:cNvPr id="187" name="lane-12-name"/>
+          <p:cNvSpPr txBox="1"/>
+          <p:nvPr/>
+        </p:nvSpPr>
+        <p:spPr>
+          <a:xfrm>
+            <a:off x="548640" y="5129081"/>
+            <a:ext cx="3611880" cy="279244"/>
+          </a:xfrm>
+          <a:prstGeom prst="rect">
+            <a:avLst/>
+          </a:prstGeom>
+          <a:noFill/>
+          <a:ln/>
+        </p:spPr>
+        <p:txBody>
+          <a:bodyPr wrap="none" lIns="0" tIns="0" rIns="0" bIns="0" rtlCol="0" anchor="ctr"/>
+          <a:lstStyle/>
+          <a:p>
+            <a:pPr algn="l" indent="0" marL="0">
+              <a:buNone/>
+            </a:pPr>
+            <a:r>
+              <a:rPr lang="en-US" sz="1600" b="1" dirty="0">
+                <a:solidFill>
+                  <a:schemeClr val="tx1"/>
+                </a:solidFill>
+              </a:rPr>
+              <a:t>M1. Два робота с координацией</a:t>
+            </a:r>
+            <a:endParaRPr lang="en-US" sz="1600" dirty="0"/>
+          </a:p>
+        </p:txBody>
+      </p:sp>
+      <p:sp>
+        <p:nvSpPr>
+          <p:cNvPr id="188" name="lane-12-chip-1-tile"/>
+          <p:cNvSpPr/>
+          <p:nvPr/>
+        </p:nvSpPr>
+        <p:spPr>
+          <a:xfrm>
+            <a:off x="4251960" y="5149830"/>
+            <a:ext cx="237744" cy="237744"/>
+          </a:xfrm>
+          <a:prstGeom prst="roundRect">
+            <a:avLst>
+              <a:gd name="adj" fmla="val 15385"/>
+            </a:avLst>
+          </a:prstGeom>
+          <a:solidFill>
+            <a:schemeClr val="bg2"/>
+          </a:solidFill>
+          <a:ln/>
+        </p:spPr>
+      </p:sp>
+      <p:pic>
+        <p:nvPicPr>
+          <p:cNvPr id="189" name="lane-12-chip-1" descr="/Users/a/MAI/DID/presentation/assets/logos/claude.png">    </p:cNvPr>
+          <p:cNvPicPr>
+            <a:picLocks noChangeAspect="1"/>
+          </p:cNvPicPr>
+          <p:nvPr/>
+        </p:nvPicPr>
+        <p:blipFill>
+          <a:blip r:embed="rId64"/>
+          <a:stretch>
+            <a:fillRect/>
+          </a:stretch>
+        </p:blipFill>
+        <p:spPr>
+          <a:xfrm>
+            <a:off x="4293108" y="5190978"/>
+            <a:ext cx="155448" cy="155448"/>
+          </a:xfrm>
+          <a:prstGeom prst="rect">
+            <a:avLst/>
+          </a:prstGeom>
+        </p:spPr>
+      </p:pic>
+      <p:sp>
+        <p:nvSpPr>
+          <p:cNvPr id="190" name="lane-12-chip-2-tile"/>
+          <p:cNvSpPr/>
+          <p:nvPr/>
+        </p:nvSpPr>
+        <p:spPr>
+          <a:xfrm>
+            <a:off x="4526280" y="5149830"/>
+            <a:ext cx="237744" cy="237744"/>
+          </a:xfrm>
+          <a:prstGeom prst="roundRect">
+            <a:avLst>
+              <a:gd name="adj" fmla="val 15385"/>
+            </a:avLst>
+          </a:prstGeom>
+          <a:solidFill>
+            <a:schemeClr val="bg2"/>
+          </a:solidFill>
+          <a:ln/>
+        </p:spPr>
+      </p:sp>
+      <p:pic>
+        <p:nvPicPr>
+          <p:cNvPr id="191" name="lane-12-chip-2" descr="/Users/a/MAI/DID/presentation/assets/logos/openai.png">    </p:cNvPr>
+          <p:cNvPicPr>
+            <a:picLocks noChangeAspect="1"/>
+          </p:cNvPicPr>
+          <p:nvPr/>
+        </p:nvPicPr>
+        <p:blipFill>
+          <a:blip r:embed="rId65"/>
+          <a:stretch>
+            <a:fillRect/>
+          </a:stretch>
+        </p:blipFill>
+        <p:spPr>
+          <a:xfrm>
+            <a:off x="4567428" y="5190978"/>
+            <a:ext cx="155448" cy="155448"/>
+          </a:xfrm>
+          <a:prstGeom prst="rect">
+            <a:avLst/>
+          </a:prstGeom>
+        </p:spPr>
+      </p:pic>
+      <p:sp>
+        <p:nvSpPr>
+          <p:cNvPr id="192" name="lane-12-chip-3-tile"/>
+          <p:cNvSpPr/>
+          <p:nvPr/>
+        </p:nvSpPr>
+        <p:spPr>
+          <a:xfrm>
+            <a:off x="4800600" y="5149830"/>
+            <a:ext cx="237744" cy="237744"/>
+          </a:xfrm>
+          <a:prstGeom prst="roundRect">
+            <a:avLst>
+              <a:gd name="adj" fmla="val 15385"/>
+            </a:avLst>
+          </a:prstGeom>
+          <a:solidFill>
+            <a:schemeClr val="bg2"/>
+          </a:solidFill>
+          <a:ln/>
+        </p:spPr>
+      </p:sp>
+      <p:pic>
+        <p:nvPicPr>
+          <p:cNvPr id="193" name="lane-12-chip-3" descr="/Users/a/MAI/DID/presentation/assets/logos/claude.png">    </p:cNvPr>
+          <p:cNvPicPr>
+            <a:picLocks noChangeAspect="1"/>
+          </p:cNvPicPr>
+          <p:nvPr/>
+        </p:nvPicPr>
+        <p:blipFill>
+          <a:blip r:embed="rId66"/>
+          <a:stretch>
+            <a:fillRect/>
+          </a:stretch>
+        </p:blipFill>
+        <p:spPr>
+          <a:xfrm>
+            <a:off x="4841748" y="5190978"/>
+            <a:ext cx="155448" cy="155448"/>
+          </a:xfrm>
+          <a:prstGeom prst="rect">
+            <a:avLst/>
+          </a:prstGeom>
+        </p:spPr>
+      </p:pic>
+      <p:sp>
+        <p:nvSpPr>
+          <p:cNvPr id="194" name="lane-12-chip-4-tile"/>
+          <p:cNvSpPr/>
+          <p:nvPr/>
+        </p:nvSpPr>
+        <p:spPr>
+          <a:xfrm>
+            <a:off x="5074920" y="5149830"/>
+            <a:ext cx="237744" cy="237744"/>
+          </a:xfrm>
+          <a:prstGeom prst="roundRect">
+            <a:avLst>
+              <a:gd name="adj" fmla="val 15385"/>
+            </a:avLst>
+          </a:prstGeom>
+          <a:solidFill>
+            <a:schemeClr val="bg2"/>
+          </a:solidFill>
+          <a:ln/>
+        </p:spPr>
+      </p:sp>
+      <p:pic>
+        <p:nvPicPr>
+          <p:cNvPr id="195" name="lane-12-chip-4" descr="/Users/a/MAI/DID/presentation/assets/logos/openai.png">    </p:cNvPr>
+          <p:cNvPicPr>
+            <a:picLocks noChangeAspect="1"/>
+          </p:cNvPicPr>
+          <p:nvPr/>
+        </p:nvPicPr>
+        <p:blipFill>
+          <a:blip r:embed="rId67"/>
+          <a:stretch>
+            <a:fillRect/>
+          </a:stretch>
+        </p:blipFill>
+        <p:spPr>
+          <a:xfrm>
+            <a:off x="5116068" y="5190978"/>
+            <a:ext cx="155448" cy="155448"/>
+          </a:xfrm>
+          <a:prstGeom prst="rect">
+            <a:avLst/>
+          </a:prstGeom>
+        </p:spPr>
+      </p:pic>
+      <p:sp>
+        <p:nvSpPr>
+          <p:cNvPr id="196" name="lane-12-chip-5-tile"/>
+          <p:cNvSpPr/>
+          <p:nvPr/>
+        </p:nvSpPr>
+        <p:spPr>
+          <a:xfrm>
+            <a:off x="5349240" y="5149830"/>
+            <a:ext cx="237744" cy="237744"/>
+          </a:xfrm>
+          <a:prstGeom prst="roundRect">
+            <a:avLst>
+              <a:gd name="adj" fmla="val 15385"/>
+            </a:avLst>
+          </a:prstGeom>
+          <a:solidFill>
+            <a:schemeClr val="bg2"/>
+          </a:solidFill>
+          <a:ln/>
+        </p:spPr>
+      </p:sp>
+      <p:pic>
+        <p:nvPicPr>
+          <p:cNvPr id="197" name="lane-12-chip-5" descr="/Users/a/MAI/DID/presentation/assets/logos/claude.png">    </p:cNvPr>
+          <p:cNvPicPr>
+            <a:picLocks noChangeAspect="1"/>
+          </p:cNvPicPr>
+          <p:nvPr/>
+        </p:nvPicPr>
+        <p:blipFill>
+          <a:blip r:embed="rId68"/>
+          <a:stretch>
+            <a:fillRect/>
+          </a:stretch>
+        </p:blipFill>
+        <p:spPr>
+          <a:xfrm>
+            <a:off x="5390388" y="5190978"/>
+            <a:ext cx="155448" cy="155448"/>
+          </a:xfrm>
+          <a:prstGeom prst="rect">
+            <a:avLst/>
+          </a:prstGeom>
+        </p:spPr>
+      </p:pic>
+      <p:sp>
+        <p:nvSpPr>
+          <p:cNvPr id="198" name="lane-12-chip-6"/>
+          <p:cNvSpPr txBox="1"/>
+          <p:nvPr/>
+        </p:nvSpPr>
+        <p:spPr>
+          <a:xfrm>
+            <a:off x="5623560" y="5149830"/>
+            <a:ext cx="237744" cy="237744"/>
+          </a:xfrm>
+          <a:prstGeom prst="roundRect">
+            <a:avLst>
+              <a:gd name="adj" fmla="val 15385"/>
+            </a:avLst>
+          </a:prstGeom>
+          <a:solidFill>
+            <a:schemeClr val="accent3"/>
+          </a:solidFill>
+          <a:ln/>
+        </p:spPr>
+        <p:txBody>
+          <a:bodyPr wrap="square" lIns="0" tIns="0" rIns="0" bIns="0" rtlCol="0" anchor="ctr"/>
+          <a:lstStyle/>
+          <a:p>
+            <a:pPr algn="ctr" indent="0" marL="0">
+              <a:buNone/>
+            </a:pPr>
+            <a:r>
+              <a:rPr lang="en-US" sz="1300" b="1" dirty="0">
+                <a:solidFill>
+                  <a:schemeClr val="bg1"/>
+                </a:solidFill>
+              </a:rPr>
+              <a:t>✓</a:t>
+            </a:r>
+            <a:endParaRPr lang="en-US" sz="1300" dirty="0"/>
+          </a:p>
+        </p:txBody>
+      </p:sp>
+      <p:sp>
+        <p:nvSpPr>
+          <p:cNvPr id="199" name="lane-12-result"/>
+          <p:cNvSpPr txBox="1"/>
+          <p:nvPr/>
+        </p:nvSpPr>
+        <p:spPr>
+          <a:xfrm>
+            <a:off x="7132320" y="5129081"/>
+            <a:ext cx="4507992" cy="279244"/>
+          </a:xfrm>
+          <a:prstGeom prst="rect">
+            <a:avLst/>
+          </a:prstGeom>
+          <a:noFill/>
+          <a:ln/>
+        </p:spPr>
+        <p:txBody>
+          <a:bodyPr wrap="none" lIns="0" tIns="0" rIns="0" bIns="0" rtlCol="0" anchor="ctr"/>
+          <a:lstStyle/>
+          <a:p>
+            <a:pPr algn="l" indent="0" marL="0">
+              <a:buNone/>
+            </a:pPr>
+            <a:r>
+              <a:rPr lang="en-US" sz="1400" dirty="0">
+                <a:solidFill>
+                  <a:schemeClr val="tx2"/>
+                </a:solidFill>
+              </a:rPr>
+              <a:t>прогон короче на 26 с, заряда на четверть меньше</a:t>
+            </a:r>
+            <a:endParaRPr lang="en-US" sz="1400" dirty="0"/>
+          </a:p>
+        </p:txBody>
+      </p:sp>
+      <p:sp>
+        <p:nvSpPr>
+          <p:cNvPr id="200" name="lane-13-rule"/>
+          <p:cNvSpPr/>
+          <p:nvPr/>
+        </p:nvSpPr>
+        <p:spPr>
+          <a:xfrm>
+            <a:off x="548640" y="5408324"/>
+            <a:ext cx="11091672" cy="0"/>
+          </a:xfrm>
+          <a:prstGeom prst="line">
+            <a:avLst/>
+          </a:prstGeom>
+          <a:noFill/>
+          <a:ln w="12700">
+            <a:solidFill>
+              <a:schemeClr val="bg2"/>
+            </a:solidFill>
+            <a:prstDash val="solid"/>
+          </a:ln>
+        </p:spPr>
+      </p:sp>
+      <p:sp>
+        <p:nvSpPr>
+          <p:cNvPr id="201" name="lane-13-name"/>
+          <p:cNvSpPr txBox="1"/>
+          <p:nvPr/>
+        </p:nvSpPr>
+        <p:spPr>
+          <a:xfrm>
+            <a:off x="548640" y="5408324"/>
+            <a:ext cx="3611880" cy="279244"/>
+          </a:xfrm>
+          <a:prstGeom prst="rect">
+            <a:avLst/>
+          </a:prstGeom>
+          <a:noFill/>
+          <a:ln/>
+        </p:spPr>
+        <p:txBody>
+          <a:bodyPr wrap="none" lIns="0" tIns="0" rIns="0" bIns="0" rtlCol="0" anchor="ctr"/>
+          <a:lstStyle/>
+          <a:p>
+            <a:pPr algn="l" indent="0" marL="0">
+              <a:buNone/>
+            </a:pPr>
+            <a:r>
+              <a:rPr lang="en-US" sz="1600" b="1" dirty="0">
+                <a:solidFill>
+                  <a:schemeClr val="tx1"/>
+                </a:solidFill>
+              </a:rPr>
+              <a:t>F2. SLAM вместо готовой карты</a:t>
+            </a:r>
+            <a:endParaRPr lang="en-US" sz="1600" dirty="0"/>
+          </a:p>
+        </p:txBody>
+      </p:sp>
+      <p:sp>
+        <p:nvSpPr>
+          <p:cNvPr id="202" name="lane-13-chip-1-tile"/>
+          <p:cNvSpPr/>
+          <p:nvPr/>
+        </p:nvSpPr>
+        <p:spPr>
+          <a:xfrm>
+            <a:off x="4251960" y="5429074"/>
+            <a:ext cx="237744" cy="237744"/>
+          </a:xfrm>
+          <a:prstGeom prst="roundRect">
+            <a:avLst>
+              <a:gd name="adj" fmla="val 15385"/>
+            </a:avLst>
+          </a:prstGeom>
+          <a:solidFill>
+            <a:schemeClr val="bg2"/>
+          </a:solidFill>
+          <a:ln/>
+        </p:spPr>
+      </p:sp>
+      <p:pic>
+        <p:nvPicPr>
+          <p:cNvPr id="203" name="lane-13-chip-1" descr="/Users/a/MAI/DID/presentation/assets/logos/gemini.png">    </p:cNvPr>
+          <p:cNvPicPr>
+            <a:picLocks noChangeAspect="1"/>
+          </p:cNvPicPr>
+          <p:nvPr/>
+        </p:nvPicPr>
+        <p:blipFill>
+          <a:blip r:embed="rId69"/>
+          <a:stretch>
+            <a:fillRect/>
+          </a:stretch>
+        </p:blipFill>
+        <p:spPr>
+          <a:xfrm>
+            <a:off x="4293108" y="5470222"/>
+            <a:ext cx="155448" cy="155448"/>
+          </a:xfrm>
+          <a:prstGeom prst="rect">
+            <a:avLst/>
+          </a:prstGeom>
+        </p:spPr>
+      </p:pic>
+      <p:sp>
+        <p:nvSpPr>
+          <p:cNvPr id="204" name="lane-13-chip-2-tile"/>
+          <p:cNvSpPr/>
+          <p:nvPr/>
+        </p:nvSpPr>
+        <p:spPr>
+          <a:xfrm>
+            <a:off x="4526280" y="5429074"/>
+            <a:ext cx="237744" cy="237744"/>
+          </a:xfrm>
+          <a:prstGeom prst="roundRect">
+            <a:avLst>
+              <a:gd name="adj" fmla="val 15385"/>
+            </a:avLst>
+          </a:prstGeom>
+          <a:solidFill>
+            <a:schemeClr val="bg2"/>
+          </a:solidFill>
+          <a:ln/>
+        </p:spPr>
+      </p:sp>
+      <p:pic>
+        <p:nvPicPr>
+          <p:cNvPr id="205" name="lane-13-chip-2" descr="/Users/a/MAI/DID/presentation/assets/logos/claude.png">    </p:cNvPr>
+          <p:cNvPicPr>
+            <a:picLocks noChangeAspect="1"/>
+          </p:cNvPicPr>
+          <p:nvPr/>
+        </p:nvPicPr>
+        <p:blipFill>
+          <a:blip r:embed="rId70"/>
+          <a:stretch>
+            <a:fillRect/>
+          </a:stretch>
+        </p:blipFill>
+        <p:spPr>
+          <a:xfrm>
+            <a:off x="4567428" y="5470222"/>
+            <a:ext cx="155448" cy="155448"/>
+          </a:xfrm>
+          <a:prstGeom prst="rect">
+            <a:avLst/>
+          </a:prstGeom>
+        </p:spPr>
+      </p:pic>
+      <p:sp>
+        <p:nvSpPr>
+          <p:cNvPr id="206" name="lane-13-chip-3-tile"/>
+          <p:cNvSpPr/>
+          <p:nvPr/>
+        </p:nvSpPr>
+        <p:spPr>
+          <a:xfrm>
+            <a:off x="4800600" y="5429074"/>
+            <a:ext cx="237744" cy="237744"/>
+          </a:xfrm>
+          <a:prstGeom prst="roundRect">
+            <a:avLst>
+              <a:gd name="adj" fmla="val 15385"/>
+            </a:avLst>
+          </a:prstGeom>
+          <a:solidFill>
+            <a:schemeClr val="bg2"/>
+          </a:solidFill>
+          <a:ln/>
+        </p:spPr>
+      </p:sp>
+      <p:pic>
+        <p:nvPicPr>
+          <p:cNvPr id="207" name="lane-13-chip-3" descr="/Users/a/MAI/DID/presentation/assets/logos/openai.png">    </p:cNvPr>
+          <p:cNvPicPr>
+            <a:picLocks noChangeAspect="1"/>
+          </p:cNvPicPr>
+          <p:nvPr/>
+        </p:nvPicPr>
+        <p:blipFill>
+          <a:blip r:embed="rId71"/>
+          <a:stretch>
+            <a:fillRect/>
+          </a:stretch>
+        </p:blipFill>
+        <p:spPr>
+          <a:xfrm>
+            <a:off x="4841748" y="5470222"/>
+            <a:ext cx="155448" cy="155448"/>
+          </a:xfrm>
+          <a:prstGeom prst="rect">
+            <a:avLst/>
+          </a:prstGeom>
+        </p:spPr>
+      </p:pic>
+      <p:sp>
+        <p:nvSpPr>
+          <p:cNvPr id="208" name="lane-13-chip-4-tile"/>
+          <p:cNvSpPr/>
+          <p:nvPr/>
+        </p:nvSpPr>
+        <p:spPr>
+          <a:xfrm>
+            <a:off x="5074920" y="5429074"/>
+            <a:ext cx="237744" cy="237744"/>
+          </a:xfrm>
+          <a:prstGeom prst="roundRect">
+            <a:avLst>
+              <a:gd name="adj" fmla="val 15385"/>
+            </a:avLst>
+          </a:prstGeom>
+          <a:solidFill>
+            <a:schemeClr val="bg2"/>
+          </a:solidFill>
+          <a:ln/>
+        </p:spPr>
+      </p:sp>
+      <p:pic>
+        <p:nvPicPr>
+          <p:cNvPr id="209" name="lane-13-chip-4" descr="/Users/a/MAI/DID/presentation/assets/logos/claude.png">    </p:cNvPr>
+          <p:cNvPicPr>
+            <a:picLocks noChangeAspect="1"/>
+          </p:cNvPicPr>
+          <p:nvPr/>
+        </p:nvPicPr>
+        <p:blipFill>
+          <a:blip r:embed="rId72"/>
+          <a:stretch>
+            <a:fillRect/>
+          </a:stretch>
+        </p:blipFill>
+        <p:spPr>
+          <a:xfrm>
+            <a:off x="5116068" y="5470222"/>
+            <a:ext cx="155448" cy="155448"/>
+          </a:xfrm>
+          <a:prstGeom prst="rect">
+            <a:avLst/>
+          </a:prstGeom>
+        </p:spPr>
+      </p:pic>
+      <p:sp>
+        <p:nvSpPr>
+          <p:cNvPr id="210" name="lane-13-chip-5-tile"/>
+          <p:cNvSpPr/>
+          <p:nvPr/>
+        </p:nvSpPr>
+        <p:spPr>
+          <a:xfrm>
+            <a:off x="5349240" y="5429074"/>
+            <a:ext cx="237744" cy="237744"/>
+          </a:xfrm>
+          <a:prstGeom prst="roundRect">
+            <a:avLst>
+              <a:gd name="adj" fmla="val 15385"/>
+            </a:avLst>
+          </a:prstGeom>
+          <a:solidFill>
+            <a:schemeClr val="bg2"/>
+          </a:solidFill>
+          <a:ln/>
+        </p:spPr>
+      </p:sp>
+      <p:pic>
+        <p:nvPicPr>
+          <p:cNvPr id="211" name="lane-13-chip-5" descr="/Users/a/MAI/DID/presentation/assets/logos/openai.png">    </p:cNvPr>
+          <p:cNvPicPr>
+            <a:picLocks noChangeAspect="1"/>
+          </p:cNvPicPr>
+          <p:nvPr/>
+        </p:nvPicPr>
+        <p:blipFill>
+          <a:blip r:embed="rId73"/>
+          <a:stretch>
+            <a:fillRect/>
+          </a:stretch>
+        </p:blipFill>
+        <p:spPr>
+          <a:xfrm>
+            <a:off x="5390388" y="5470222"/>
+            <a:ext cx="155448" cy="155448"/>
+          </a:xfrm>
+          <a:prstGeom prst="rect">
+            <a:avLst/>
+          </a:prstGeom>
+        </p:spPr>
+      </p:pic>
+      <p:sp>
+        <p:nvSpPr>
+          <p:cNvPr id="212" name="lane-13-chip-6-tile"/>
+          <p:cNvSpPr/>
+          <p:nvPr/>
+        </p:nvSpPr>
+        <p:spPr>
+          <a:xfrm>
+            <a:off x="5623560" y="5429074"/>
+            <a:ext cx="237744" cy="237744"/>
+          </a:xfrm>
+          <a:prstGeom prst="roundRect">
+            <a:avLst>
+              <a:gd name="adj" fmla="val 15385"/>
+            </a:avLst>
+          </a:prstGeom>
+          <a:solidFill>
+            <a:schemeClr val="bg2"/>
+          </a:solidFill>
+          <a:ln/>
+        </p:spPr>
+      </p:sp>
+      <p:pic>
+        <p:nvPicPr>
+          <p:cNvPr id="213" name="lane-13-chip-6" descr="/Users/a/MAI/DID/presentation/assets/logos/claude.png">    </p:cNvPr>
+          <p:cNvPicPr>
+            <a:picLocks noChangeAspect="1"/>
+          </p:cNvPicPr>
+          <p:nvPr/>
+        </p:nvPicPr>
+        <p:blipFill>
+          <a:blip r:embed="rId74"/>
+          <a:stretch>
+            <a:fillRect/>
+          </a:stretch>
+        </p:blipFill>
+        <p:spPr>
+          <a:xfrm>
+            <a:off x="5664708" y="5470222"/>
+            <a:ext cx="155448" cy="155448"/>
+          </a:xfrm>
+          <a:prstGeom prst="rect">
+            <a:avLst/>
+          </a:prstGeom>
+        </p:spPr>
+      </p:pic>
+      <p:sp>
+        <p:nvSpPr>
+          <p:cNvPr id="214" name="lane-13-chip-7-tile"/>
+          <p:cNvSpPr/>
+          <p:nvPr/>
+        </p:nvSpPr>
+        <p:spPr>
+          <a:xfrm>
+            <a:off x="5897880" y="5429074"/>
+            <a:ext cx="237744" cy="237744"/>
+          </a:xfrm>
+          <a:prstGeom prst="roundRect">
+            <a:avLst>
+              <a:gd name="adj" fmla="val 15385"/>
+            </a:avLst>
+          </a:prstGeom>
+          <a:solidFill>
+            <a:schemeClr val="bg2"/>
+          </a:solidFill>
+          <a:ln/>
+        </p:spPr>
+      </p:sp>
+      <p:pic>
+        <p:nvPicPr>
+          <p:cNvPr id="215" name="lane-13-chip-7" descr="/Users/a/MAI/DID/presentation/assets/logos/openai.png">    </p:cNvPr>
+          <p:cNvPicPr>
+            <a:picLocks noChangeAspect="1"/>
+          </p:cNvPicPr>
+          <p:nvPr/>
+        </p:nvPicPr>
+        <p:blipFill>
+          <a:blip r:embed="rId75"/>
+          <a:stretch>
+            <a:fillRect/>
+          </a:stretch>
+        </p:blipFill>
+        <p:spPr>
+          <a:xfrm>
+            <a:off x="5939028" y="5470222"/>
+            <a:ext cx="155448" cy="155448"/>
+          </a:xfrm>
+          <a:prstGeom prst="rect">
+            <a:avLst/>
+          </a:prstGeom>
+        </p:spPr>
+      </p:pic>
+      <p:sp>
+        <p:nvSpPr>
+          <p:cNvPr id="216" name="lane-13-chip-8"/>
+          <p:cNvSpPr txBox="1"/>
+          <p:nvPr/>
+        </p:nvSpPr>
+        <p:spPr>
+          <a:xfrm>
+            <a:off x="6172200" y="5429074"/>
+            <a:ext cx="237744" cy="237744"/>
+          </a:xfrm>
+          <a:prstGeom prst="roundRect">
+            <a:avLst>
+              <a:gd name="adj" fmla="val 15385"/>
+            </a:avLst>
+          </a:prstGeom>
+          <a:solidFill>
+            <a:schemeClr val="accent3"/>
+          </a:solidFill>
+          <a:ln/>
+        </p:spPr>
+        <p:txBody>
+          <a:bodyPr wrap="square" lIns="0" tIns="0" rIns="0" bIns="0" rtlCol="0" anchor="ctr"/>
+          <a:lstStyle/>
+          <a:p>
+            <a:pPr algn="ctr" indent="0" marL="0">
+              <a:buNone/>
+            </a:pPr>
+            <a:r>
+              <a:rPr lang="en-US" sz="1300" b="1" dirty="0">
+                <a:solidFill>
+                  <a:schemeClr val="bg1"/>
+                </a:solidFill>
+              </a:rPr>
+              <a:t>✓</a:t>
+            </a:r>
+            <a:endParaRPr lang="en-US" sz="1300" dirty="0"/>
+          </a:p>
+        </p:txBody>
+      </p:sp>
+      <p:sp>
+        <p:nvSpPr>
+          <p:cNvPr id="217" name="lane-13-result"/>
+          <p:cNvSpPr txBox="1"/>
+          <p:nvPr/>
+        </p:nvSpPr>
+        <p:spPr>
+          <a:xfrm>
+            <a:off x="7132320" y="5408324"/>
+            <a:ext cx="4507992" cy="279244"/>
+          </a:xfrm>
+          <a:prstGeom prst="rect">
+            <a:avLst/>
+          </a:prstGeom>
+          <a:noFill/>
+          <a:ln/>
+        </p:spPr>
+        <p:txBody>
+          <a:bodyPr wrap="none" lIns="0" tIns="0" rIns="0" bIns="0" rtlCol="0" anchor="ctr"/>
+          <a:lstStyle/>
+          <a:p>
+            <a:pPr algn="l" indent="0" marL="0">
+              <a:buNone/>
+            </a:pPr>
+            <a:r>
+              <a:rPr lang="en-US" sz="1400" dirty="0">
+                <a:solidFill>
+                  <a:schemeClr val="tx2"/>
+                </a:solidFill>
+              </a:rPr>
               <a:t>карта робота совпала с готовой на 96–99%</a:t>
             </a:r>
             <a:endParaRPr lang="en-US" sz="1400" dirty="0"/>
@@ -7673,18 +9325,18 @@
       </p:sp>
       <p:sp>
         <p:nvSpPr>
-          <p:cNvPr id="154" name="conclusion-card"/>
-          <p:cNvSpPr/>
-          <p:nvPr/>
-        </p:nvSpPr>
-        <p:spPr>
-          <a:xfrm>
-            <a:off x="548640" y="5577840"/>
-            <a:ext cx="11091672" cy="640080"/>
-          </a:xfrm>
-          <a:prstGeom prst="roundRect">
-            <a:avLst>
-              <a:gd name="adj" fmla="val 11429"/>
+          <p:cNvPr id="218" name="conclusion-card"/>
+          <p:cNvSpPr/>
+          <p:nvPr/>
+        </p:nvSpPr>
+        <p:spPr>
+          <a:xfrm>
+            <a:off x="548640" y="5760720"/>
+            <a:ext cx="11091672" cy="457200"/>
+          </a:xfrm>
+          <a:prstGeom prst="roundRect">
+            <a:avLst>
+              <a:gd name="adj" fmla="val 16000"/>
             </a:avLst>
           </a:prstGeom>
           <a:solidFill>
@@ -7695,14 +9347,14 @@
       </p:sp>
       <p:sp>
         <p:nvSpPr>
-          <p:cNvPr id="155" name="conclusion-text"/>
+          <p:cNvPr id="219" name="conclusion-text"/>
           <p:cNvSpPr txBox="1"/>
           <p:nvPr/>
         </p:nvSpPr>
         <p:spPr>
           <a:xfrm>
-            <a:off x="822960" y="5577840"/>
-            <a:ext cx="10543032" cy="640080"/>
+            <a:off x="822960" y="5760720"/>
+            <a:ext cx="10543032" cy="457200"/>
           </a:xfrm>
           <a:prstGeom prst="rect">
             <a:avLst/>
@@ -7734,7 +9386,7 @@
                   <a:schemeClr val="bg1"/>
                 </a:solidFill>
               </a:rPr>
-              <a:t>Качество держится на устройстве процесса — отдельная ветка, независимое ревью, пересчёт чисел, — а не на вере в один ответ модели.</a:t>
+              <a:t>Качество держится на устройстве процесса, а не на вере в один ответ модели.</a:t>
             </a:r>
             <a:endParaRPr lang="en-US" sz="1600" dirty="0"/>
           </a:p>

--- a/presentation/ai_process.pptx
+++ b/presentation/ai_process.pptx
@@ -108,7 +108,7 @@
   <p:extLst>
     <p:ext uri="{521415D9-36F7-43E2-AB2F-B90AF26B5E84}">
       <p14:sectionLst xmlns:p14="http://schemas.microsoft.com/office/powerpoint/2010/main">
-        <p14:section name="Как работали" id="{1b2214fc-a13d-9cf9-2c1e-8d529efd69aa}">
+        <p14:section name="Как работали" id="{d9100d93-d33a-22d9-6ebb-5a582e984e63}">
           <p14:sldIdLst>
             <p14:sldId id="256"/>
             <p14:sldId id="257"/>
@@ -606,7 +606,7 @@
           <a:p>
             <a:r>
               <a:rPr lang="en-US" dirty="0"/>
-              <a:t>Каждая строка — одно исследование, каждый значок — один шаг: обзор исследователя, работа инженера или ревью. Галочка — работа принята. В первых двух исследованиях ревью нашло 7 ошибок, и два вывода пришлось перевернуть. В обзорах литературы проверка нашла две выдуманные ссылки. Робот с языковой моделью выполнил миссии, заданные словами, в 45–46 из 48 прогонов на каждой из трёх моделей; робот с правилом, которое текст не читает, — ни разу. Ожидание ответа модели стоило 73 очка; если робот едет по правилу, пока модель думает, возвращается 42 — это измерено на имитаторе модели, режим по умолчанию выключен. В Gazebo робот вернулся на базу в прогонах 8 из 9, после правки — 7 из 7. Разбор потерь дал плюс шесть очков на трудном уровне. Не всё закончилось выигрышем: реакция на смену грунта очков не дала, новые схемы агента оказались не лучше нынешней, пять правок по разбору потерь ничего не прибавили. Это записано как результаты. Качество держится на устройстве процесса, а не на вере в один ответ модели.</a:t>
+              <a:t>Каждая строка — одно исследование, каждый значок — один шаг: обзор исследователя, работа инженера или ревью. Галочка — работа принята. В первых двух исследованиях ревью нашло 7 ошибок, и два вывода пришлось перевернуть. В обзорах литературы проверка нашла две выдуманные ссылки. Робот с языковой моделью выполнил миссии, заданные словами, в 45–46 из 48 прогонов на каждой из трёх моделей; робот с правилом, которое текст не читает, — ни разу. На имитаторе модели с задержкой 15 секунд ожидание ответа стоило 73 очка; если робот в это время едет по правилу, возвращается 42. Режим по умолчанию выключен. В Gazebo робот вернулся на базу в прогонах 8 из 9, после правки — 7 из 7. Разбор потерь дал плюс шесть очков на трудном уровне. Не всё закончилось выигрышем: для реакции на смену грунта, новых схем агента и пяти правок по разбору потерь выигрыш не показан. Это записано как результаты. Качество держится на устройстве процесса, а не на вере в один ответ модели.</a:t>
             </a:r>
             <a:endParaRPr lang="en-US" dirty="0"/>
           </a:p>
@@ -5834,7 +5834,7 @@
                   <a:schemeClr val="tx2"/>
                 </a:solidFill>
               </a:rPr>
-              <a:t>ждать: −73 очка; ехать по правилу: +42 (имитатор)</a:t>
+              <a:t>на имитаторе: ждать −73 очка, ехать по правилу +42</a:t>
             </a:r>
             <a:endParaRPr lang="en-US" sz="1400" dirty="0"/>
           </a:p>
@@ -7219,7 +7219,7 @@
                   <a:schemeClr val="tx2"/>
                 </a:solidFill>
               </a:rPr>
-              <a:t>сбой датчика: +6,4 очка; ещё пять правок: 0</a:t>
+              <a:t>сбой датчика: +6,4; пять правок: не показано</a:t>
             </a:r>
             <a:endParaRPr lang="en-US" sz="1400" dirty="0"/>
           </a:p>
@@ -7492,7 +7492,7 @@
                   <a:schemeClr val="tx2"/>
                 </a:solidFill>
               </a:rPr>
-              <a:t>не лучше нынешней; потолок — 92,5 очка</a:t>
+              <a:t>не лучше нынешней; с подсказками — 92,5 очка</a:t>
             </a:r>
             <a:endParaRPr lang="en-US" sz="1400" dirty="0"/>
           </a:p>

--- a/presentation/ai_process.pptx
+++ b/presentation/ai_process.pptx
@@ -108,7 +108,7 @@
   <p:extLst>
     <p:ext uri="{521415D9-36F7-43E2-AB2F-B90AF26B5E84}">
       <p14:sectionLst xmlns:p14="http://schemas.microsoft.com/office/powerpoint/2010/main">
-        <p14:section name="Как работали" id="{d9100d93-d33a-22d9-6ebb-5a582e984e63}">
+        <p14:section name="Как работали" id="{8e2b27e4-7454-4044-d58b-f88d3ea2e44c}">
           <p14:sldIdLst>
             <p14:sldId id="256"/>
             <p14:sldId id="257"/>
@@ -518,7 +518,7 @@
           <a:p>
             <a:r>
               <a:rPr lang="en-US" dirty="0"/>
-              <a:t>С ИИ-агентами мы работали как в лаборатории: человек ею руководит, агенты в ней работают. Человек задаёт цель, роли и ограничения и принимает решения на развилках. Ведущий агент ведёт план, пишет задания остальным, сводит их работу в общий код и сам пересчитывает числа. Исследователи читают литературу и кода не пишут. Инженеры пишут код и ставят опыты, каждый в своей копии кода. Отдельная модель-ревьюер читает каждую работу и ищет ошибки. Советников зовём редко, на развилках. Каждое исследование идёт по одному кругу: вопрос и гипотеза, задание, код и опыт, независимое ревью, исправления, вливание, пересчёт чисел. Больше 75 поручений агентам и 27 кругов ревью: ни одна из 15 работ не прошла ревью с первого раза. Агенты работали часами без участия человека, но направление, роли и приоритеты задавал человек.</a:t>
+              <a:t>С ИИ-агентами мы работали как в лаборатории: человек ею руководит, агенты в ней работают. Человек задаёт цель, роли и ограничения и принимает решения на развилках. Ведущий агент ведёт план, пишет задания остальным, сводит их работу в общий код и сам пересчитывает числа. Исследователи читают литературу и кода не пишут. Инженеры пишут код и ставят опыты, каждый в своей копии кода. Отдельная модель-ревьюер читает каждую работу и ищет ошибки. Советников зовём редко, на развилках. Каждое исследование идёт по одному кругу: вопрос и гипотеза, задание, код и опыт, независимое ревью, исправления, вливание, пересчёт чисел. Больше 85 поручений агентам и 32 круга ревью: 19 работ из 20 ревью вернуло на исправления. Агенты работали часами без участия человека, но направление, роли и приоритеты задавал человек.</a:t>
             </a:r>
             <a:endParaRPr lang="en-US" dirty="0"/>
           </a:p>
@@ -606,7 +606,7 @@
           <a:p>
             <a:r>
               <a:rPr lang="en-US" dirty="0"/>
-              <a:t>Каждая строка — одно исследование, каждый значок — один шаг: обзор исследователя, работа инженера или ревью. Галочка — работа принята. В первых двух исследованиях ревью нашло 7 ошибок, и два вывода пришлось перевернуть. В обзорах литературы проверка нашла две выдуманные ссылки. Робот с языковой моделью выполнил миссии, заданные словами, в 45–46 из 48 прогонов на каждой из трёх моделей; робот с правилом, которое текст не читает, — ни разу. На имитаторе модели с задержкой 15 секунд ожидание ответа стоило 73 очка; если робот в это время едет по правилу, возвращается 42. Режим по умолчанию выключен. В Gazebo робот вернулся на базу в прогонах 8 из 9, после правки — 7 из 7. Разбор потерь дал плюс шесть очков на трудном уровне. Не всё закончилось выигрышем: для реакции на смену грунта, новых схем агента и пяти правок по разбору потерь выигрыш не показан. Это записано как результаты. Качество держится на устройстве процесса, а не на вере в один ответ модели.</a:t>
+              <a:t>Каждая строка — одно исследование, каждый значок — один шаг: обзор исследователя, работа инженера или ревью. Галочка — работа принята. В первых двух исследованиях ревью нашло 7 ошибок, и два вывода пришлось перевернуть. В обзорах литературы проверка нашла две выдуманные ссылки. Робот с языковой моделью выполнил миссии, заданные словами, в 45–46 из 48 прогонов на каждой из трёх моделей; робот с правилом, которое текст не читает, — ни разу. На имитаторе модели с задержкой 15 секунд ожидание ответа стоило 73 очка; если робот в это время едет по правилу, возвращается 42. На настоящей модели на десяти трудных сценариях то же: стоять — 34,7 очка, ехать по правилу — 73,2. Режим по умолчанию выключен. В Gazebo робот вернулся на базу в прогонах 8 из 9, после правки — 7 из 7. Разбор потерь дал плюс шесть очков на трудном уровне. Не всё закончилось выигрышем: для реакции на смену грунта, новых схем агента и пяти правок по разбору потерь выигрыш не показан. Это записано как результаты. Качество держится на устройстве процесса, а не на вере в один ответ модели.</a:t>
             </a:r>
             <a:endParaRPr lang="en-US" dirty="0"/>
           </a:p>
@@ -3186,7 +3186,7 @@
                   <a:schemeClr val="tx1"/>
                 </a:solidFill>
               </a:rPr>
-              <a:t>75+</a:t>
+              <a:t>85+</a:t>
             </a:r>
             <a:endParaRPr lang="en-US" sz="2800" dirty="0"/>
           </a:p>
@@ -3280,7 +3280,7 @@
                   <a:schemeClr val="tx1"/>
                 </a:solidFill>
               </a:rPr>
-              <a:t>15 из 15</a:t>
+              <a:t>19 из 20</a:t>
             </a:r>
             <a:endParaRPr lang="en-US" sz="2800" dirty="0"/>
           </a:p>
@@ -3316,7 +3316,7 @@
                   <a:schemeClr val="tx2"/>
                 </a:solidFill>
               </a:rPr>
-              <a:t>работ не прошли ревью с первого раза</a:t>
+              <a:t>работ ревью вернуло на исправления</a:t>
             </a:r>
             <a:endParaRPr lang="en-US" sz="1300" dirty="0"/>
           </a:p>
@@ -3374,7 +3374,7 @@
                   <a:schemeClr val="tx1"/>
                 </a:solidFill>
               </a:rPr>
-              <a:t>241</a:t>
+              <a:t>260</a:t>
             </a:r>
             <a:endParaRPr lang="en-US" sz="2800" dirty="0"/>
           </a:p>
@@ -5806,35 +5806,35 @@
       </p:sp>
       <p:sp>
         <p:nvSpPr>
-          <p:cNvPr id="85" name="lane-4-result"/>
+          <p:cNvPr id="85" name="lane-4-next"/>
           <p:cNvSpPr txBox="1"/>
           <p:nvPr/>
         </p:nvSpPr>
         <p:spPr>
           <a:xfrm>
-            <a:off x="7132320" y="2895131"/>
-            <a:ext cx="4507992" cy="279244"/>
-          </a:xfrm>
-          <a:prstGeom prst="rect">
-            <a:avLst/>
-          </a:prstGeom>
-          <a:noFill/>
-          <a:ln/>
-        </p:spPr>
-        <p:txBody>
-          <a:bodyPr wrap="none" lIns="0" tIns="0" rIns="0" bIns="0" rtlCol="0" anchor="ctr"/>
-          <a:lstStyle/>
-          <a:p>
-            <a:pPr algn="l" indent="0" marL="0">
-              <a:buNone/>
-            </a:pPr>
-            <a:r>
-              <a:rPr lang="en-US" sz="1400" dirty="0">
-                <a:solidFill>
-                  <a:schemeClr val="tx2"/>
-                </a:solidFill>
-              </a:rPr>
-              <a:t>на имитаторе: ждать −73 очка, ехать по правилу +42</a:t>
+            <a:off x="5897880" y="2895131"/>
+            <a:ext cx="237744" cy="279244"/>
+          </a:xfrm>
+          <a:prstGeom prst="rect">
+            <a:avLst/>
+          </a:prstGeom>
+          <a:noFill/>
+          <a:ln/>
+        </p:spPr>
+        <p:txBody>
+          <a:bodyPr wrap="square" lIns="0" tIns="0" rIns="0" bIns="0" rtlCol="0" anchor="ctr"/>
+          <a:lstStyle/>
+          <a:p>
+            <a:pPr algn="ctr" indent="0" marL="0">
+              <a:buNone/>
+            </a:pPr>
+            <a:r>
+              <a:rPr lang="en-US" sz="1400" b="1" dirty="0">
+                <a:solidFill>
+                  <a:schemeClr val="accent5"/>
+                </a:solidFill>
+              </a:rPr>
+              <a:t>→</a:t>
             </a:r>
             <a:endParaRPr lang="en-US" sz="1400" dirty="0"/>
           </a:p>
@@ -5842,72 +5842,13 @@
       </p:sp>
       <p:sp>
         <p:nvSpPr>
-          <p:cNvPr id="86" name="lane-5-rule"/>
-          <p:cNvSpPr/>
-          <p:nvPr/>
-        </p:nvSpPr>
-        <p:spPr>
-          <a:xfrm>
-            <a:off x="548640" y="3174375"/>
-            <a:ext cx="11091672" cy="0"/>
-          </a:xfrm>
-          <a:prstGeom prst="line">
-            <a:avLst/>
-          </a:prstGeom>
-          <a:noFill/>
-          <a:ln w="12700">
-            <a:solidFill>
-              <a:schemeClr val="bg2"/>
-            </a:solidFill>
-            <a:prstDash val="solid"/>
-          </a:ln>
-        </p:spPr>
-      </p:sp>
-      <p:sp>
-        <p:nvSpPr>
-          <p:cNvPr id="87" name="lane-5-name"/>
-          <p:cNvSpPr txBox="1"/>
-          <p:nvPr/>
-        </p:nvSpPr>
-        <p:spPr>
-          <a:xfrm>
-            <a:off x="548640" y="3174375"/>
-            <a:ext cx="3611880" cy="279244"/>
-          </a:xfrm>
-          <a:prstGeom prst="rect">
-            <a:avLst/>
-          </a:prstGeom>
-          <a:noFill/>
-          <a:ln/>
-        </p:spPr>
-        <p:txBody>
-          <a:bodyPr wrap="none" lIns="0" tIns="0" rIns="0" bIns="0" rtlCol="0" anchor="ctr"/>
-          <a:lstStyle/>
-          <a:p>
-            <a:pPr algn="l" indent="0" marL="0">
-              <a:buNone/>
-            </a:pPr>
-            <a:r>
-              <a:rPr lang="en-US" sz="1600" b="1" dirty="0">
-                <a:solidFill>
-                  <a:schemeClr val="tx1"/>
-                </a:solidFill>
-              </a:rPr>
-              <a:t>R10. Смена грунта на пути</a:t>
-            </a:r>
-            <a:endParaRPr lang="en-US" sz="1600" dirty="0"/>
-          </a:p>
-        </p:txBody>
-      </p:sp>
-      <p:sp>
-        <p:nvSpPr>
-          <p:cNvPr id="88" name="lane-5-chip-1-tile"/>
-          <p:cNvSpPr/>
-          <p:nvPr/>
-        </p:nvSpPr>
-        <p:spPr>
-          <a:xfrm>
-            <a:off x="4251960" y="3195125"/>
+          <p:cNvPr id="86" name="lane-4-chip-8-tile"/>
+          <p:cNvSpPr/>
+          <p:nvPr/>
+        </p:nvSpPr>
+        <p:spPr>
+          <a:xfrm>
+            <a:off x="6172200" y="2915881"/>
             <a:ext cx="237744" cy="237744"/>
           </a:xfrm>
           <a:prstGeom prst="roundRect">
@@ -5923,7 +5864,7 @@
       </p:sp>
       <p:pic>
         <p:nvPicPr>
-          <p:cNvPr id="89" name="lane-5-chip-1" descr="/Users/a/MAI/DID/presentation/assets/logos/claude.png">    </p:cNvPr>
+          <p:cNvPr id="87" name="lane-4-chip-8" descr="/Users/a/MAI/DID/presentation/assets/logos/claude.png">    </p:cNvPr>
           <p:cNvPicPr>
             <a:picLocks noChangeAspect="1"/>
           </p:cNvPicPr>
@@ -5937,7 +5878,7 @@
         </p:blipFill>
         <p:spPr>
           <a:xfrm>
-            <a:off x="4293108" y="3236273"/>
+            <a:off x="6213348" y="2957029"/>
             <a:ext cx="155448" cy="155448"/>
           </a:xfrm>
           <a:prstGeom prst="rect">
@@ -5947,13 +5888,13 @@
       </p:pic>
       <p:sp>
         <p:nvSpPr>
-          <p:cNvPr id="90" name="lane-5-chip-2-tile"/>
-          <p:cNvSpPr/>
-          <p:nvPr/>
-        </p:nvSpPr>
-        <p:spPr>
-          <a:xfrm>
-            <a:off x="4526280" y="3195125"/>
+          <p:cNvPr id="88" name="lane-4-chip-9-tile"/>
+          <p:cNvSpPr/>
+          <p:nvPr/>
+        </p:nvSpPr>
+        <p:spPr>
+          <a:xfrm>
+            <a:off x="6446520" y="2915881"/>
             <a:ext cx="237744" cy="237744"/>
           </a:xfrm>
           <a:prstGeom prst="roundRect">
@@ -5969,7 +5910,7 @@
       </p:sp>
       <p:pic>
         <p:nvPicPr>
-          <p:cNvPr id="91" name="lane-5-chip-2" descr="/Users/a/MAI/DID/presentation/assets/logos/openai.png">    </p:cNvPr>
+          <p:cNvPr id="89" name="lane-4-chip-9" descr="/Users/a/MAI/DID/presentation/assets/logos/openai.png">    </p:cNvPr>
           <p:cNvPicPr>
             <a:picLocks noChangeAspect="1"/>
           </p:cNvPicPr>
@@ -5983,7 +5924,7 @@
         </p:blipFill>
         <p:spPr>
           <a:xfrm>
-            <a:off x="4567428" y="3236273"/>
+            <a:off x="6487668" y="2957029"/>
             <a:ext cx="155448" cy="155448"/>
           </a:xfrm>
           <a:prstGeom prst="rect">
@@ -5993,13 +5934,148 @@
       </p:pic>
       <p:sp>
         <p:nvSpPr>
-          <p:cNvPr id="92" name="lane-5-chip-3-tile"/>
-          <p:cNvSpPr/>
-          <p:nvPr/>
-        </p:nvSpPr>
-        <p:spPr>
-          <a:xfrm>
-            <a:off x="4800600" y="3195125"/>
+          <p:cNvPr id="90" name="lane-4-chip-10"/>
+          <p:cNvSpPr txBox="1"/>
+          <p:nvPr/>
+        </p:nvSpPr>
+        <p:spPr>
+          <a:xfrm>
+            <a:off x="6720840" y="2915881"/>
+            <a:ext cx="237744" cy="237744"/>
+          </a:xfrm>
+          <a:prstGeom prst="roundRect">
+            <a:avLst>
+              <a:gd name="adj" fmla="val 15385"/>
+            </a:avLst>
+          </a:prstGeom>
+          <a:solidFill>
+            <a:schemeClr val="accent3"/>
+          </a:solidFill>
+          <a:ln/>
+        </p:spPr>
+        <p:txBody>
+          <a:bodyPr wrap="square" lIns="0" tIns="0" rIns="0" bIns="0" rtlCol="0" anchor="ctr"/>
+          <a:lstStyle/>
+          <a:p>
+            <a:pPr algn="ctr" indent="0" marL="0">
+              <a:buNone/>
+            </a:pPr>
+            <a:r>
+              <a:rPr lang="en-US" sz="1300" b="1" dirty="0">
+                <a:solidFill>
+                  <a:schemeClr val="bg1"/>
+                </a:solidFill>
+              </a:rPr>
+              <a:t>✓</a:t>
+            </a:r>
+            <a:endParaRPr lang="en-US" sz="1300" dirty="0"/>
+          </a:p>
+        </p:txBody>
+      </p:sp>
+      <p:sp>
+        <p:nvSpPr>
+          <p:cNvPr id="91" name="lane-4-result"/>
+          <p:cNvSpPr txBox="1"/>
+          <p:nvPr/>
+        </p:nvSpPr>
+        <p:spPr>
+          <a:xfrm>
+            <a:off x="7132320" y="2895131"/>
+            <a:ext cx="4507992" cy="279244"/>
+          </a:xfrm>
+          <a:prstGeom prst="rect">
+            <a:avLst/>
+          </a:prstGeom>
+          <a:noFill/>
+          <a:ln/>
+        </p:spPr>
+        <p:txBody>
+          <a:bodyPr wrap="none" lIns="0" tIns="0" rIns="0" bIns="0" rtlCol="0" anchor="ctr"/>
+          <a:lstStyle/>
+          <a:p>
+            <a:pPr algn="l" indent="0" marL="0">
+              <a:buNone/>
+            </a:pPr>
+            <a:r>
+              <a:rPr lang="en-US" sz="1400" dirty="0">
+                <a:solidFill>
+                  <a:schemeClr val="tx2"/>
+                </a:solidFill>
+              </a:rPr>
+              <a:t>на настоящей модели: стоять 34,7 → ехать 73,2 очка</a:t>
+            </a:r>
+            <a:endParaRPr lang="en-US" sz="1400" dirty="0"/>
+          </a:p>
+        </p:txBody>
+      </p:sp>
+      <p:sp>
+        <p:nvSpPr>
+          <p:cNvPr id="92" name="lane-5-rule"/>
+          <p:cNvSpPr/>
+          <p:nvPr/>
+        </p:nvSpPr>
+        <p:spPr>
+          <a:xfrm>
+            <a:off x="548640" y="3174375"/>
+            <a:ext cx="11091672" cy="0"/>
+          </a:xfrm>
+          <a:prstGeom prst="line">
+            <a:avLst/>
+          </a:prstGeom>
+          <a:noFill/>
+          <a:ln w="12700">
+            <a:solidFill>
+              <a:schemeClr val="bg2"/>
+            </a:solidFill>
+            <a:prstDash val="solid"/>
+          </a:ln>
+        </p:spPr>
+      </p:sp>
+      <p:sp>
+        <p:nvSpPr>
+          <p:cNvPr id="93" name="lane-5-name"/>
+          <p:cNvSpPr txBox="1"/>
+          <p:nvPr/>
+        </p:nvSpPr>
+        <p:spPr>
+          <a:xfrm>
+            <a:off x="548640" y="3174375"/>
+            <a:ext cx="3611880" cy="279244"/>
+          </a:xfrm>
+          <a:prstGeom prst="rect">
+            <a:avLst/>
+          </a:prstGeom>
+          <a:noFill/>
+          <a:ln/>
+        </p:spPr>
+        <p:txBody>
+          <a:bodyPr wrap="none" lIns="0" tIns="0" rIns="0" bIns="0" rtlCol="0" anchor="ctr"/>
+          <a:lstStyle/>
+          <a:p>
+            <a:pPr algn="l" indent="0" marL="0">
+              <a:buNone/>
+            </a:pPr>
+            <a:r>
+              <a:rPr lang="en-US" sz="1600" b="1" dirty="0">
+                <a:solidFill>
+                  <a:schemeClr val="tx1"/>
+                </a:solidFill>
+              </a:rPr>
+              <a:t>R10. Смена грунта на пути</a:t>
+            </a:r>
+            <a:endParaRPr lang="en-US" sz="1600" dirty="0"/>
+          </a:p>
+        </p:txBody>
+      </p:sp>
+      <p:sp>
+        <p:nvSpPr>
+          <p:cNvPr id="94" name="lane-5-chip-1-tile"/>
+          <p:cNvSpPr/>
+          <p:nvPr/>
+        </p:nvSpPr>
+        <p:spPr>
+          <a:xfrm>
+            <a:off x="4251960" y="3195125"/>
             <a:ext cx="237744" cy="237744"/>
           </a:xfrm>
           <a:prstGeom prst="roundRect">
@@ -6015,7 +6091,7 @@
       </p:sp>
       <p:pic>
         <p:nvPicPr>
-          <p:cNvPr id="93" name="lane-5-chip-3" descr="/Users/a/MAI/DID/presentation/assets/logos/claude.png">    </p:cNvPr>
+          <p:cNvPr id="95" name="lane-5-chip-1" descr="/Users/a/MAI/DID/presentation/assets/logos/claude.png">    </p:cNvPr>
           <p:cNvPicPr>
             <a:picLocks noChangeAspect="1"/>
           </p:cNvPicPr>
@@ -6029,7 +6105,7 @@
         </p:blipFill>
         <p:spPr>
           <a:xfrm>
-            <a:off x="4841748" y="3236273"/>
+            <a:off x="4293108" y="3236273"/>
             <a:ext cx="155448" cy="155448"/>
           </a:xfrm>
           <a:prstGeom prst="rect">
@@ -6039,13 +6115,13 @@
       </p:pic>
       <p:sp>
         <p:nvSpPr>
-          <p:cNvPr id="94" name="lane-5-chip-4-tile"/>
-          <p:cNvSpPr/>
-          <p:nvPr/>
-        </p:nvSpPr>
-        <p:spPr>
-          <a:xfrm>
-            <a:off x="5074920" y="3195125"/>
+          <p:cNvPr id="96" name="lane-5-chip-2-tile"/>
+          <p:cNvSpPr/>
+          <p:nvPr/>
+        </p:nvSpPr>
+        <p:spPr>
+          <a:xfrm>
+            <a:off x="4526280" y="3195125"/>
             <a:ext cx="237744" cy="237744"/>
           </a:xfrm>
           <a:prstGeom prst="roundRect">
@@ -6061,7 +6137,7 @@
       </p:sp>
       <p:pic>
         <p:nvPicPr>
-          <p:cNvPr id="95" name="lane-5-chip-4" descr="/Users/a/MAI/DID/presentation/assets/logos/openai.png">    </p:cNvPr>
+          <p:cNvPr id="97" name="lane-5-chip-2" descr="/Users/a/MAI/DID/presentation/assets/logos/openai.png">    </p:cNvPr>
           <p:cNvPicPr>
             <a:picLocks noChangeAspect="1"/>
           </p:cNvPicPr>
@@ -6075,7 +6151,7 @@
         </p:blipFill>
         <p:spPr>
           <a:xfrm>
-            <a:off x="5116068" y="3236273"/>
+            <a:off x="4567428" y="3236273"/>
             <a:ext cx="155448" cy="155448"/>
           </a:xfrm>
           <a:prstGeom prst="rect">
@@ -6085,148 +6161,13 @@
       </p:pic>
       <p:sp>
         <p:nvSpPr>
-          <p:cNvPr id="96" name="lane-5-chip-5"/>
-          <p:cNvSpPr txBox="1"/>
-          <p:nvPr/>
-        </p:nvSpPr>
-        <p:spPr>
-          <a:xfrm>
-            <a:off x="5349240" y="3195125"/>
-            <a:ext cx="237744" cy="237744"/>
-          </a:xfrm>
-          <a:prstGeom prst="roundRect">
-            <a:avLst>
-              <a:gd name="adj" fmla="val 15385"/>
-            </a:avLst>
-          </a:prstGeom>
-          <a:solidFill>
-            <a:schemeClr val="accent3"/>
-          </a:solidFill>
-          <a:ln/>
-        </p:spPr>
-        <p:txBody>
-          <a:bodyPr wrap="square" lIns="0" tIns="0" rIns="0" bIns="0" rtlCol="0" anchor="ctr"/>
-          <a:lstStyle/>
-          <a:p>
-            <a:pPr algn="ctr" indent="0" marL="0">
-              <a:buNone/>
-            </a:pPr>
-            <a:r>
-              <a:rPr lang="en-US" sz="1300" b="1" dirty="0">
-                <a:solidFill>
-                  <a:schemeClr val="bg1"/>
-                </a:solidFill>
-              </a:rPr>
-              <a:t>✓</a:t>
-            </a:r>
-            <a:endParaRPr lang="en-US" sz="1300" dirty="0"/>
-          </a:p>
-        </p:txBody>
-      </p:sp>
-      <p:sp>
-        <p:nvSpPr>
-          <p:cNvPr id="97" name="lane-5-result"/>
-          <p:cNvSpPr txBox="1"/>
-          <p:nvPr/>
-        </p:nvSpPr>
-        <p:spPr>
-          <a:xfrm>
-            <a:off x="7132320" y="3174375"/>
-            <a:ext cx="4507992" cy="279244"/>
-          </a:xfrm>
-          <a:prstGeom prst="rect">
-            <a:avLst/>
-          </a:prstGeom>
-          <a:noFill/>
-          <a:ln/>
-        </p:spPr>
-        <p:txBody>
-          <a:bodyPr wrap="none" lIns="0" tIns="0" rIns="0" bIns="0" rtlCol="0" anchor="ctr"/>
-          <a:lstStyle/>
-          <a:p>
-            <a:pPr algn="l" indent="0" marL="0">
-              <a:buNone/>
-            </a:pPr>
-            <a:r>
-              <a:rPr lang="en-US" sz="1400" dirty="0">
-                <a:solidFill>
-                  <a:schemeClr val="tx2"/>
-                </a:solidFill>
-              </a:rPr>
-              <a:t>выигрыш не показан — так и записано</a:t>
-            </a:r>
-            <a:endParaRPr lang="en-US" sz="1400" dirty="0"/>
-          </a:p>
-        </p:txBody>
-      </p:sp>
-      <p:sp>
-        <p:nvSpPr>
-          <p:cNvPr id="98" name="lane-6-rule"/>
-          <p:cNvSpPr/>
-          <p:nvPr/>
-        </p:nvSpPr>
-        <p:spPr>
-          <a:xfrm>
-            <a:off x="548640" y="3453618"/>
-            <a:ext cx="11091672" cy="0"/>
-          </a:xfrm>
-          <a:prstGeom prst="line">
-            <a:avLst/>
-          </a:prstGeom>
-          <a:noFill/>
-          <a:ln w="12700">
-            <a:solidFill>
-              <a:schemeClr val="bg2"/>
-            </a:solidFill>
-            <a:prstDash val="solid"/>
-          </a:ln>
-        </p:spPr>
-      </p:sp>
-      <p:sp>
-        <p:nvSpPr>
-          <p:cNvPr id="99" name="lane-6-name"/>
-          <p:cNvSpPr txBox="1"/>
-          <p:nvPr/>
-        </p:nvSpPr>
-        <p:spPr>
-          <a:xfrm>
-            <a:off x="548640" y="3453618"/>
-            <a:ext cx="3611880" cy="279244"/>
-          </a:xfrm>
-          <a:prstGeom prst="rect">
-            <a:avLst/>
-          </a:prstGeom>
-          <a:noFill/>
-          <a:ln/>
-        </p:spPr>
-        <p:txBody>
-          <a:bodyPr wrap="none" lIns="0" tIns="0" rIns="0" bIns="0" rtlCol="0" anchor="ctr"/>
-          <a:lstStyle/>
-          <a:p>
-            <a:pPr algn="l" indent="0" marL="0">
-              <a:buNone/>
-            </a:pPr>
-            <a:r>
-              <a:rPr lang="en-US" sz="1600" b="1" dirty="0">
-                <a:solidFill>
-                  <a:schemeClr val="tx1"/>
-                </a:solidFill>
-              </a:rPr>
-              <a:t>G2 → G3. Положение и сторожа</a:t>
-            </a:r>
-            <a:endParaRPr lang="en-US" sz="1600" dirty="0"/>
-          </a:p>
-        </p:txBody>
-      </p:sp>
-      <p:sp>
-        <p:nvSpPr>
-          <p:cNvPr id="100" name="lane-6-chip-1-tile"/>
-          <p:cNvSpPr/>
-          <p:nvPr/>
-        </p:nvSpPr>
-        <p:spPr>
-          <a:xfrm>
-            <a:off x="4251960" y="3474368"/>
+          <p:cNvPr id="98" name="lane-5-chip-3-tile"/>
+          <p:cNvSpPr/>
+          <p:nvPr/>
+        </p:nvSpPr>
+        <p:spPr>
+          <a:xfrm>
+            <a:off x="4800600" y="3195125"/>
             <a:ext cx="237744" cy="237744"/>
           </a:xfrm>
           <a:prstGeom prst="roundRect">
@@ -6242,7 +6183,7 @@
       </p:sp>
       <p:pic>
         <p:nvPicPr>
-          <p:cNvPr id="101" name="lane-6-chip-1" descr="/Users/a/MAI/DID/presentation/assets/logos/claude.png">    </p:cNvPr>
+          <p:cNvPr id="99" name="lane-5-chip-3" descr="/Users/a/MAI/DID/presentation/assets/logos/claude.png">    </p:cNvPr>
           <p:cNvPicPr>
             <a:picLocks noChangeAspect="1"/>
           </p:cNvPicPr>
@@ -6256,7 +6197,7 @@
         </p:blipFill>
         <p:spPr>
           <a:xfrm>
-            <a:off x="4293108" y="3515516"/>
+            <a:off x="4841748" y="3236273"/>
             <a:ext cx="155448" cy="155448"/>
           </a:xfrm>
           <a:prstGeom prst="rect">
@@ -6266,13 +6207,13 @@
       </p:pic>
       <p:sp>
         <p:nvSpPr>
-          <p:cNvPr id="102" name="lane-6-chip-2-tile"/>
-          <p:cNvSpPr/>
-          <p:nvPr/>
-        </p:nvSpPr>
-        <p:spPr>
-          <a:xfrm>
-            <a:off x="4526280" y="3474368"/>
+          <p:cNvPr id="100" name="lane-5-chip-4-tile"/>
+          <p:cNvSpPr/>
+          <p:nvPr/>
+        </p:nvSpPr>
+        <p:spPr>
+          <a:xfrm>
+            <a:off x="5074920" y="3195125"/>
             <a:ext cx="237744" cy="237744"/>
           </a:xfrm>
           <a:prstGeom prst="roundRect">
@@ -6288,7 +6229,7 @@
       </p:sp>
       <p:pic>
         <p:nvPicPr>
-          <p:cNvPr id="103" name="lane-6-chip-2" descr="/Users/a/MAI/DID/presentation/assets/logos/openai.png">    </p:cNvPr>
+          <p:cNvPr id="101" name="lane-5-chip-4" descr="/Users/a/MAI/DID/presentation/assets/logos/openai.png">    </p:cNvPr>
           <p:cNvPicPr>
             <a:picLocks noChangeAspect="1"/>
           </p:cNvPicPr>
@@ -6302,7 +6243,7 @@
         </p:blipFill>
         <p:spPr>
           <a:xfrm>
-            <a:off x="4567428" y="3515516"/>
+            <a:off x="5116068" y="3236273"/>
             <a:ext cx="155448" cy="155448"/>
           </a:xfrm>
           <a:prstGeom prst="rect">
@@ -6312,13 +6253,148 @@
       </p:pic>
       <p:sp>
         <p:nvSpPr>
-          <p:cNvPr id="104" name="lane-6-chip-3-tile"/>
-          <p:cNvSpPr/>
-          <p:nvPr/>
-        </p:nvSpPr>
-        <p:spPr>
-          <a:xfrm>
-            <a:off x="4800600" y="3474368"/>
+          <p:cNvPr id="102" name="lane-5-chip-5"/>
+          <p:cNvSpPr txBox="1"/>
+          <p:nvPr/>
+        </p:nvSpPr>
+        <p:spPr>
+          <a:xfrm>
+            <a:off x="5349240" y="3195125"/>
+            <a:ext cx="237744" cy="237744"/>
+          </a:xfrm>
+          <a:prstGeom prst="roundRect">
+            <a:avLst>
+              <a:gd name="adj" fmla="val 15385"/>
+            </a:avLst>
+          </a:prstGeom>
+          <a:solidFill>
+            <a:schemeClr val="accent3"/>
+          </a:solidFill>
+          <a:ln/>
+        </p:spPr>
+        <p:txBody>
+          <a:bodyPr wrap="square" lIns="0" tIns="0" rIns="0" bIns="0" rtlCol="0" anchor="ctr"/>
+          <a:lstStyle/>
+          <a:p>
+            <a:pPr algn="ctr" indent="0" marL="0">
+              <a:buNone/>
+            </a:pPr>
+            <a:r>
+              <a:rPr lang="en-US" sz="1300" b="1" dirty="0">
+                <a:solidFill>
+                  <a:schemeClr val="bg1"/>
+                </a:solidFill>
+              </a:rPr>
+              <a:t>✓</a:t>
+            </a:r>
+            <a:endParaRPr lang="en-US" sz="1300" dirty="0"/>
+          </a:p>
+        </p:txBody>
+      </p:sp>
+      <p:sp>
+        <p:nvSpPr>
+          <p:cNvPr id="103" name="lane-5-result"/>
+          <p:cNvSpPr txBox="1"/>
+          <p:nvPr/>
+        </p:nvSpPr>
+        <p:spPr>
+          <a:xfrm>
+            <a:off x="7132320" y="3174375"/>
+            <a:ext cx="4507992" cy="279244"/>
+          </a:xfrm>
+          <a:prstGeom prst="rect">
+            <a:avLst/>
+          </a:prstGeom>
+          <a:noFill/>
+          <a:ln/>
+        </p:spPr>
+        <p:txBody>
+          <a:bodyPr wrap="none" lIns="0" tIns="0" rIns="0" bIns="0" rtlCol="0" anchor="ctr"/>
+          <a:lstStyle/>
+          <a:p>
+            <a:pPr algn="l" indent="0" marL="0">
+              <a:buNone/>
+            </a:pPr>
+            <a:r>
+              <a:rPr lang="en-US" sz="1400" dirty="0">
+                <a:solidFill>
+                  <a:schemeClr val="tx2"/>
+                </a:solidFill>
+              </a:rPr>
+              <a:t>выигрыш не показан — так и записано</a:t>
+            </a:r>
+            <a:endParaRPr lang="en-US" sz="1400" dirty="0"/>
+          </a:p>
+        </p:txBody>
+      </p:sp>
+      <p:sp>
+        <p:nvSpPr>
+          <p:cNvPr id="104" name="lane-6-rule"/>
+          <p:cNvSpPr/>
+          <p:nvPr/>
+        </p:nvSpPr>
+        <p:spPr>
+          <a:xfrm>
+            <a:off x="548640" y="3453618"/>
+            <a:ext cx="11091672" cy="0"/>
+          </a:xfrm>
+          <a:prstGeom prst="line">
+            <a:avLst/>
+          </a:prstGeom>
+          <a:noFill/>
+          <a:ln w="12700">
+            <a:solidFill>
+              <a:schemeClr val="bg2"/>
+            </a:solidFill>
+            <a:prstDash val="solid"/>
+          </a:ln>
+        </p:spPr>
+      </p:sp>
+      <p:sp>
+        <p:nvSpPr>
+          <p:cNvPr id="105" name="lane-6-name"/>
+          <p:cNvSpPr txBox="1"/>
+          <p:nvPr/>
+        </p:nvSpPr>
+        <p:spPr>
+          <a:xfrm>
+            <a:off x="548640" y="3453618"/>
+            <a:ext cx="3611880" cy="279244"/>
+          </a:xfrm>
+          <a:prstGeom prst="rect">
+            <a:avLst/>
+          </a:prstGeom>
+          <a:noFill/>
+          <a:ln/>
+        </p:spPr>
+        <p:txBody>
+          <a:bodyPr wrap="none" lIns="0" tIns="0" rIns="0" bIns="0" rtlCol="0" anchor="ctr"/>
+          <a:lstStyle/>
+          <a:p>
+            <a:pPr algn="l" indent="0" marL="0">
+              <a:buNone/>
+            </a:pPr>
+            <a:r>
+              <a:rPr lang="en-US" sz="1600" b="1" dirty="0">
+                <a:solidFill>
+                  <a:schemeClr val="tx1"/>
+                </a:solidFill>
+              </a:rPr>
+              <a:t>G2 → G3. Положение и сторожа</a:t>
+            </a:r>
+            <a:endParaRPr lang="en-US" sz="1600" dirty="0"/>
+          </a:p>
+        </p:txBody>
+      </p:sp>
+      <p:sp>
+        <p:nvSpPr>
+          <p:cNvPr id="106" name="lane-6-chip-1-tile"/>
+          <p:cNvSpPr/>
+          <p:nvPr/>
+        </p:nvSpPr>
+        <p:spPr>
+          <a:xfrm>
+            <a:off x="4251960" y="3474368"/>
             <a:ext cx="237744" cy="237744"/>
           </a:xfrm>
           <a:prstGeom prst="roundRect">
@@ -6334,7 +6410,7 @@
       </p:sp>
       <p:pic>
         <p:nvPicPr>
-          <p:cNvPr id="105" name="lane-6-chip-3" descr="/Users/a/MAI/DID/presentation/assets/logos/claude.png">    </p:cNvPr>
+          <p:cNvPr id="107" name="lane-6-chip-1" descr="/Users/a/MAI/DID/presentation/assets/logos/claude.png">    </p:cNvPr>
           <p:cNvPicPr>
             <a:picLocks noChangeAspect="1"/>
           </p:cNvPicPr>
@@ -6348,7 +6424,7 @@
         </p:blipFill>
         <p:spPr>
           <a:xfrm>
-            <a:off x="4841748" y="3515516"/>
+            <a:off x="4293108" y="3515516"/>
             <a:ext cx="155448" cy="155448"/>
           </a:xfrm>
           <a:prstGeom prst="rect">
@@ -6358,89 +6434,13 @@
       </p:pic>
       <p:sp>
         <p:nvSpPr>
-          <p:cNvPr id="106" name="lane-6-chip-4"/>
-          <p:cNvSpPr txBox="1"/>
-          <p:nvPr/>
-        </p:nvSpPr>
-        <p:spPr>
-          <a:xfrm>
-            <a:off x="5074920" y="3474368"/>
-            <a:ext cx="237744" cy="237744"/>
-          </a:xfrm>
-          <a:prstGeom prst="roundRect">
-            <a:avLst>
-              <a:gd name="adj" fmla="val 15385"/>
-            </a:avLst>
-          </a:prstGeom>
-          <a:solidFill>
-            <a:schemeClr val="accent3"/>
-          </a:solidFill>
-          <a:ln/>
-        </p:spPr>
-        <p:txBody>
-          <a:bodyPr wrap="square" lIns="0" tIns="0" rIns="0" bIns="0" rtlCol="0" anchor="ctr"/>
-          <a:lstStyle/>
-          <a:p>
-            <a:pPr algn="ctr" indent="0" marL="0">
-              <a:buNone/>
-            </a:pPr>
-            <a:r>
-              <a:rPr lang="en-US" sz="1300" b="1" dirty="0">
-                <a:solidFill>
-                  <a:schemeClr val="bg1"/>
-                </a:solidFill>
-              </a:rPr>
-              <a:t>✓</a:t>
-            </a:r>
-            <a:endParaRPr lang="en-US" sz="1300" dirty="0"/>
-          </a:p>
-        </p:txBody>
-      </p:sp>
-      <p:sp>
-        <p:nvSpPr>
-          <p:cNvPr id="107" name="lane-6-next"/>
-          <p:cNvSpPr txBox="1"/>
-          <p:nvPr/>
-        </p:nvSpPr>
-        <p:spPr>
-          <a:xfrm>
-            <a:off x="5349240" y="3453618"/>
-            <a:ext cx="237744" cy="279244"/>
-          </a:xfrm>
-          <a:prstGeom prst="rect">
-            <a:avLst/>
-          </a:prstGeom>
-          <a:noFill/>
-          <a:ln/>
-        </p:spPr>
-        <p:txBody>
-          <a:bodyPr wrap="square" lIns="0" tIns="0" rIns="0" bIns="0" rtlCol="0" anchor="ctr"/>
-          <a:lstStyle/>
-          <a:p>
-            <a:pPr algn="ctr" indent="0" marL="0">
-              <a:buNone/>
-            </a:pPr>
-            <a:r>
-              <a:rPr lang="en-US" sz="1400" b="1" dirty="0">
-                <a:solidFill>
-                  <a:schemeClr val="accent5"/>
-                </a:solidFill>
-              </a:rPr>
-              <a:t>→</a:t>
-            </a:r>
-            <a:endParaRPr lang="en-US" sz="1400" dirty="0"/>
-          </a:p>
-        </p:txBody>
-      </p:sp>
-      <p:sp>
-        <p:nvSpPr>
-          <p:cNvPr id="108" name="lane-6-chip-6-tile"/>
-          <p:cNvSpPr/>
-          <p:nvPr/>
-        </p:nvSpPr>
-        <p:spPr>
-          <a:xfrm>
-            <a:off x="5623560" y="3474368"/>
+          <p:cNvPr id="108" name="lane-6-chip-2-tile"/>
+          <p:cNvSpPr/>
+          <p:nvPr/>
+        </p:nvSpPr>
+        <p:spPr>
+          <a:xfrm>
+            <a:off x="4526280" y="3474368"/>
             <a:ext cx="237744" cy="237744"/>
           </a:xfrm>
           <a:prstGeom prst="roundRect">
@@ -6456,7 +6456,7 @@
       </p:sp>
       <p:pic>
         <p:nvPicPr>
-          <p:cNvPr id="109" name="lane-6-chip-6" descr="/Users/a/MAI/DID/presentation/assets/logos/claude.png">    </p:cNvPr>
+          <p:cNvPr id="109" name="lane-6-chip-2" descr="/Users/a/MAI/DID/presentation/assets/logos/openai.png">    </p:cNvPr>
           <p:cNvPicPr>
             <a:picLocks noChangeAspect="1"/>
           </p:cNvPicPr>
@@ -6470,7 +6470,7 @@
         </p:blipFill>
         <p:spPr>
           <a:xfrm>
-            <a:off x="5664708" y="3515516"/>
+            <a:off x="4567428" y="3515516"/>
             <a:ext cx="155448" cy="155448"/>
           </a:xfrm>
           <a:prstGeom prst="rect">
@@ -6480,13 +6480,13 @@
       </p:pic>
       <p:sp>
         <p:nvSpPr>
-          <p:cNvPr id="110" name="lane-6-chip-7-tile"/>
-          <p:cNvSpPr/>
-          <p:nvPr/>
-        </p:nvSpPr>
-        <p:spPr>
-          <a:xfrm>
-            <a:off x="5897880" y="3474368"/>
+          <p:cNvPr id="110" name="lane-6-chip-3-tile"/>
+          <p:cNvSpPr/>
+          <p:nvPr/>
+        </p:nvSpPr>
+        <p:spPr>
+          <a:xfrm>
+            <a:off x="4800600" y="3474368"/>
             <a:ext cx="237744" cy="237744"/>
           </a:xfrm>
           <a:prstGeom prst="roundRect">
@@ -6502,7 +6502,7 @@
       </p:sp>
       <p:pic>
         <p:nvPicPr>
-          <p:cNvPr id="111" name="lane-6-chip-7" descr="/Users/a/MAI/DID/presentation/assets/logos/openai.png">    </p:cNvPr>
+          <p:cNvPr id="111" name="lane-6-chip-3" descr="/Users/a/MAI/DID/presentation/assets/logos/claude.png">    </p:cNvPr>
           <p:cNvPicPr>
             <a:picLocks noChangeAspect="1"/>
           </p:cNvPicPr>
@@ -6516,7 +6516,7 @@
         </p:blipFill>
         <p:spPr>
           <a:xfrm>
-            <a:off x="5939028" y="3515516"/>
+            <a:off x="4841748" y="3515516"/>
             <a:ext cx="155448" cy="155448"/>
           </a:xfrm>
           <a:prstGeom prst="rect">
@@ -6526,13 +6526,89 @@
       </p:pic>
       <p:sp>
         <p:nvSpPr>
-          <p:cNvPr id="112" name="lane-6-chip-8-tile"/>
-          <p:cNvSpPr/>
-          <p:nvPr/>
-        </p:nvSpPr>
-        <p:spPr>
-          <a:xfrm>
-            <a:off x="6172200" y="3474368"/>
+          <p:cNvPr id="112" name="lane-6-chip-4"/>
+          <p:cNvSpPr txBox="1"/>
+          <p:nvPr/>
+        </p:nvSpPr>
+        <p:spPr>
+          <a:xfrm>
+            <a:off x="5074920" y="3474368"/>
+            <a:ext cx="237744" cy="237744"/>
+          </a:xfrm>
+          <a:prstGeom prst="roundRect">
+            <a:avLst>
+              <a:gd name="adj" fmla="val 15385"/>
+            </a:avLst>
+          </a:prstGeom>
+          <a:solidFill>
+            <a:schemeClr val="accent3"/>
+          </a:solidFill>
+          <a:ln/>
+        </p:spPr>
+        <p:txBody>
+          <a:bodyPr wrap="square" lIns="0" tIns="0" rIns="0" bIns="0" rtlCol="0" anchor="ctr"/>
+          <a:lstStyle/>
+          <a:p>
+            <a:pPr algn="ctr" indent="0" marL="0">
+              <a:buNone/>
+            </a:pPr>
+            <a:r>
+              <a:rPr lang="en-US" sz="1300" b="1" dirty="0">
+                <a:solidFill>
+                  <a:schemeClr val="bg1"/>
+                </a:solidFill>
+              </a:rPr>
+              <a:t>✓</a:t>
+            </a:r>
+            <a:endParaRPr lang="en-US" sz="1300" dirty="0"/>
+          </a:p>
+        </p:txBody>
+      </p:sp>
+      <p:sp>
+        <p:nvSpPr>
+          <p:cNvPr id="113" name="lane-6-next"/>
+          <p:cNvSpPr txBox="1"/>
+          <p:nvPr/>
+        </p:nvSpPr>
+        <p:spPr>
+          <a:xfrm>
+            <a:off x="5349240" y="3453618"/>
+            <a:ext cx="237744" cy="279244"/>
+          </a:xfrm>
+          <a:prstGeom prst="rect">
+            <a:avLst/>
+          </a:prstGeom>
+          <a:noFill/>
+          <a:ln/>
+        </p:spPr>
+        <p:txBody>
+          <a:bodyPr wrap="square" lIns="0" tIns="0" rIns="0" bIns="0" rtlCol="0" anchor="ctr"/>
+          <a:lstStyle/>
+          <a:p>
+            <a:pPr algn="ctr" indent="0" marL="0">
+              <a:buNone/>
+            </a:pPr>
+            <a:r>
+              <a:rPr lang="en-US" sz="1400" b="1" dirty="0">
+                <a:solidFill>
+                  <a:schemeClr val="accent5"/>
+                </a:solidFill>
+              </a:rPr>
+              <a:t>→</a:t>
+            </a:r>
+            <a:endParaRPr lang="en-US" sz="1400" dirty="0"/>
+          </a:p>
+        </p:txBody>
+      </p:sp>
+      <p:sp>
+        <p:nvSpPr>
+          <p:cNvPr id="114" name="lane-6-chip-6-tile"/>
+          <p:cNvSpPr/>
+          <p:nvPr/>
+        </p:nvSpPr>
+        <p:spPr>
+          <a:xfrm>
+            <a:off x="5623560" y="3474368"/>
             <a:ext cx="237744" cy="237744"/>
           </a:xfrm>
           <a:prstGeom prst="roundRect">
@@ -6548,7 +6624,7 @@
       </p:sp>
       <p:pic>
         <p:nvPicPr>
-          <p:cNvPr id="113" name="lane-6-chip-8" descr="/Users/a/MAI/DID/presentation/assets/logos/claude.png">    </p:cNvPr>
+          <p:cNvPr id="115" name="lane-6-chip-6" descr="/Users/a/MAI/DID/presentation/assets/logos/claude.png">    </p:cNvPr>
           <p:cNvPicPr>
             <a:picLocks noChangeAspect="1"/>
           </p:cNvPicPr>
@@ -6562,7 +6638,7 @@
         </p:blipFill>
         <p:spPr>
           <a:xfrm>
-            <a:off x="6213348" y="3515516"/>
+            <a:off x="5664708" y="3515516"/>
             <a:ext cx="155448" cy="155448"/>
           </a:xfrm>
           <a:prstGeom prst="rect">
@@ -6572,13 +6648,13 @@
       </p:pic>
       <p:sp>
         <p:nvSpPr>
-          <p:cNvPr id="114" name="lane-6-chip-9-tile"/>
-          <p:cNvSpPr/>
-          <p:nvPr/>
-        </p:nvSpPr>
-        <p:spPr>
-          <a:xfrm>
-            <a:off x="6446520" y="3474368"/>
+          <p:cNvPr id="116" name="lane-6-chip-7-tile"/>
+          <p:cNvSpPr/>
+          <p:nvPr/>
+        </p:nvSpPr>
+        <p:spPr>
+          <a:xfrm>
+            <a:off x="5897880" y="3474368"/>
             <a:ext cx="237744" cy="237744"/>
           </a:xfrm>
           <a:prstGeom prst="roundRect">
@@ -6594,7 +6670,7 @@
       </p:sp>
       <p:pic>
         <p:nvPicPr>
-          <p:cNvPr id="115" name="lane-6-chip-9" descr="/Users/a/MAI/DID/presentation/assets/logos/openai.png">    </p:cNvPr>
+          <p:cNvPr id="117" name="lane-6-chip-7" descr="/Users/a/MAI/DID/presentation/assets/logos/openai.png">    </p:cNvPr>
           <p:cNvPicPr>
             <a:picLocks noChangeAspect="1"/>
           </p:cNvPicPr>
@@ -6608,7 +6684,7 @@
         </p:blipFill>
         <p:spPr>
           <a:xfrm>
-            <a:off x="6487668" y="3515516"/>
+            <a:off x="5939028" y="3515516"/>
             <a:ext cx="155448" cy="155448"/>
           </a:xfrm>
           <a:prstGeom prst="rect">
@@ -6618,148 +6694,13 @@
       </p:pic>
       <p:sp>
         <p:nvSpPr>
-          <p:cNvPr id="116" name="lane-6-chip-10"/>
-          <p:cNvSpPr txBox="1"/>
-          <p:nvPr/>
-        </p:nvSpPr>
-        <p:spPr>
-          <a:xfrm>
-            <a:off x="6720840" y="3474368"/>
-            <a:ext cx="237744" cy="237744"/>
-          </a:xfrm>
-          <a:prstGeom prst="roundRect">
-            <a:avLst>
-              <a:gd name="adj" fmla="val 15385"/>
-            </a:avLst>
-          </a:prstGeom>
-          <a:solidFill>
-            <a:schemeClr val="accent3"/>
-          </a:solidFill>
-          <a:ln/>
-        </p:spPr>
-        <p:txBody>
-          <a:bodyPr wrap="square" lIns="0" tIns="0" rIns="0" bIns="0" rtlCol="0" anchor="ctr"/>
-          <a:lstStyle/>
-          <a:p>
-            <a:pPr algn="ctr" indent="0" marL="0">
-              <a:buNone/>
-            </a:pPr>
-            <a:r>
-              <a:rPr lang="en-US" sz="1300" b="1" dirty="0">
-                <a:solidFill>
-                  <a:schemeClr val="bg1"/>
-                </a:solidFill>
-              </a:rPr>
-              <a:t>✓</a:t>
-            </a:r>
-            <a:endParaRPr lang="en-US" sz="1300" dirty="0"/>
-          </a:p>
-        </p:txBody>
-      </p:sp>
-      <p:sp>
-        <p:nvSpPr>
-          <p:cNvPr id="117" name="lane-6-result"/>
-          <p:cNvSpPr txBox="1"/>
-          <p:nvPr/>
-        </p:nvSpPr>
-        <p:spPr>
-          <a:xfrm>
-            <a:off x="7132320" y="3453618"/>
-            <a:ext cx="4507992" cy="279244"/>
-          </a:xfrm>
-          <a:prstGeom prst="rect">
-            <a:avLst/>
-          </a:prstGeom>
-          <a:noFill/>
-          <a:ln/>
-        </p:spPr>
-        <p:txBody>
-          <a:bodyPr wrap="none" lIns="0" tIns="0" rIns="0" bIns="0" rtlCol="0" anchor="ctr"/>
-          <a:lstStyle/>
-          <a:p>
-            <a:pPr algn="l" indent="0" marL="0">
-              <a:buNone/>
-            </a:pPr>
-            <a:r>
-              <a:rPr lang="en-US" sz="1400" dirty="0">
-                <a:solidFill>
-                  <a:schemeClr val="tx2"/>
-                </a:solidFill>
-              </a:rPr>
-              <a:t>возврат на базу в Gazebo: 8 из 9 → 7 из 7</a:t>
-            </a:r>
-            <a:endParaRPr lang="en-US" sz="1400" dirty="0"/>
-          </a:p>
-        </p:txBody>
-      </p:sp>
-      <p:sp>
-        <p:nvSpPr>
-          <p:cNvPr id="118" name="lane-7-rule"/>
-          <p:cNvSpPr/>
-          <p:nvPr/>
-        </p:nvSpPr>
-        <p:spPr>
-          <a:xfrm>
-            <a:off x="548640" y="3732862"/>
-            <a:ext cx="11091672" cy="0"/>
-          </a:xfrm>
-          <a:prstGeom prst="line">
-            <a:avLst/>
-          </a:prstGeom>
-          <a:noFill/>
-          <a:ln w="12700">
-            <a:solidFill>
-              <a:schemeClr val="bg2"/>
-            </a:solidFill>
-            <a:prstDash val="solid"/>
-          </a:ln>
-        </p:spPr>
-      </p:sp>
-      <p:sp>
-        <p:nvSpPr>
-          <p:cNvPr id="119" name="lane-7-name"/>
-          <p:cNvSpPr txBox="1"/>
-          <p:nvPr/>
-        </p:nvSpPr>
-        <p:spPr>
-          <a:xfrm>
-            <a:off x="548640" y="3732862"/>
-            <a:ext cx="3611880" cy="279244"/>
-          </a:xfrm>
-          <a:prstGeom prst="rect">
-            <a:avLst/>
-          </a:prstGeom>
-          <a:noFill/>
-          <a:ln/>
-        </p:spPr>
-        <p:txBody>
-          <a:bodyPr wrap="none" lIns="0" tIns="0" rIns="0" bIns="0" rtlCol="0" anchor="ctr"/>
-          <a:lstStyle/>
-          <a:p>
-            <a:pPr algn="l" indent="0" marL="0">
-              <a:buNone/>
-            </a:pPr>
-            <a:r>
-              <a:rPr lang="en-US" sz="1600" b="1" dirty="0">
-                <a:solidFill>
-                  <a:schemeClr val="tx1"/>
-                </a:solidFill>
-              </a:rPr>
-              <a:t>P1 → P2. Где робот теряет очки</a:t>
-            </a:r>
-            <a:endParaRPr lang="en-US" sz="1600" dirty="0"/>
-          </a:p>
-        </p:txBody>
-      </p:sp>
-      <p:sp>
-        <p:nvSpPr>
-          <p:cNvPr id="120" name="lane-7-chip-1-tile"/>
-          <p:cNvSpPr/>
-          <p:nvPr/>
-        </p:nvSpPr>
-        <p:spPr>
-          <a:xfrm>
-            <a:off x="4251960" y="3753612"/>
+          <p:cNvPr id="118" name="lane-6-chip-8-tile"/>
+          <p:cNvSpPr/>
+          <p:nvPr/>
+        </p:nvSpPr>
+        <p:spPr>
+          <a:xfrm>
+            <a:off x="6172200" y="3474368"/>
             <a:ext cx="237744" cy="237744"/>
           </a:xfrm>
           <a:prstGeom prst="roundRect">
@@ -6775,7 +6716,7 @@
       </p:sp>
       <p:pic>
         <p:nvPicPr>
-          <p:cNvPr id="121" name="lane-7-chip-1" descr="/Users/a/MAI/DID/presentation/assets/logos/claude.png">    </p:cNvPr>
+          <p:cNvPr id="119" name="lane-6-chip-8" descr="/Users/a/MAI/DID/presentation/assets/logos/claude.png">    </p:cNvPr>
           <p:cNvPicPr>
             <a:picLocks noChangeAspect="1"/>
           </p:cNvPicPr>
@@ -6789,7 +6730,7 @@
         </p:blipFill>
         <p:spPr>
           <a:xfrm>
-            <a:off x="4293108" y="3794760"/>
+            <a:off x="6213348" y="3515516"/>
             <a:ext cx="155448" cy="155448"/>
           </a:xfrm>
           <a:prstGeom prst="rect">
@@ -6799,13 +6740,13 @@
       </p:pic>
       <p:sp>
         <p:nvSpPr>
-          <p:cNvPr id="122" name="lane-7-chip-2-tile"/>
-          <p:cNvSpPr/>
-          <p:nvPr/>
-        </p:nvSpPr>
-        <p:spPr>
-          <a:xfrm>
-            <a:off x="4526280" y="3753612"/>
+          <p:cNvPr id="120" name="lane-6-chip-9-tile"/>
+          <p:cNvSpPr/>
+          <p:nvPr/>
+        </p:nvSpPr>
+        <p:spPr>
+          <a:xfrm>
+            <a:off x="6446520" y="3474368"/>
             <a:ext cx="237744" cy="237744"/>
           </a:xfrm>
           <a:prstGeom prst="roundRect">
@@ -6821,7 +6762,7 @@
       </p:sp>
       <p:pic>
         <p:nvPicPr>
-          <p:cNvPr id="123" name="lane-7-chip-2" descr="/Users/a/MAI/DID/presentation/assets/logos/openai.png">    </p:cNvPr>
+          <p:cNvPr id="121" name="lane-6-chip-9" descr="/Users/a/MAI/DID/presentation/assets/logos/openai.png">    </p:cNvPr>
           <p:cNvPicPr>
             <a:picLocks noChangeAspect="1"/>
           </p:cNvPicPr>
@@ -6835,7 +6776,7 @@
         </p:blipFill>
         <p:spPr>
           <a:xfrm>
-            <a:off x="4567428" y="3794760"/>
+            <a:off x="6487668" y="3515516"/>
             <a:ext cx="155448" cy="155448"/>
           </a:xfrm>
           <a:prstGeom prst="rect">
@@ -6845,13 +6786,148 @@
       </p:pic>
       <p:sp>
         <p:nvSpPr>
-          <p:cNvPr id="124" name="lane-7-chip-3-tile"/>
-          <p:cNvSpPr/>
-          <p:nvPr/>
-        </p:nvSpPr>
-        <p:spPr>
-          <a:xfrm>
-            <a:off x="4800600" y="3753612"/>
+          <p:cNvPr id="122" name="lane-6-chip-10"/>
+          <p:cNvSpPr txBox="1"/>
+          <p:nvPr/>
+        </p:nvSpPr>
+        <p:spPr>
+          <a:xfrm>
+            <a:off x="6720840" y="3474368"/>
+            <a:ext cx="237744" cy="237744"/>
+          </a:xfrm>
+          <a:prstGeom prst="roundRect">
+            <a:avLst>
+              <a:gd name="adj" fmla="val 15385"/>
+            </a:avLst>
+          </a:prstGeom>
+          <a:solidFill>
+            <a:schemeClr val="accent3"/>
+          </a:solidFill>
+          <a:ln/>
+        </p:spPr>
+        <p:txBody>
+          <a:bodyPr wrap="square" lIns="0" tIns="0" rIns="0" bIns="0" rtlCol="0" anchor="ctr"/>
+          <a:lstStyle/>
+          <a:p>
+            <a:pPr algn="ctr" indent="0" marL="0">
+              <a:buNone/>
+            </a:pPr>
+            <a:r>
+              <a:rPr lang="en-US" sz="1300" b="1" dirty="0">
+                <a:solidFill>
+                  <a:schemeClr val="bg1"/>
+                </a:solidFill>
+              </a:rPr>
+              <a:t>✓</a:t>
+            </a:r>
+            <a:endParaRPr lang="en-US" sz="1300" dirty="0"/>
+          </a:p>
+        </p:txBody>
+      </p:sp>
+      <p:sp>
+        <p:nvSpPr>
+          <p:cNvPr id="123" name="lane-6-result"/>
+          <p:cNvSpPr txBox="1"/>
+          <p:nvPr/>
+        </p:nvSpPr>
+        <p:spPr>
+          <a:xfrm>
+            <a:off x="7132320" y="3453618"/>
+            <a:ext cx="4507992" cy="279244"/>
+          </a:xfrm>
+          <a:prstGeom prst="rect">
+            <a:avLst/>
+          </a:prstGeom>
+          <a:noFill/>
+          <a:ln/>
+        </p:spPr>
+        <p:txBody>
+          <a:bodyPr wrap="none" lIns="0" tIns="0" rIns="0" bIns="0" rtlCol="0" anchor="ctr"/>
+          <a:lstStyle/>
+          <a:p>
+            <a:pPr algn="l" indent="0" marL="0">
+              <a:buNone/>
+            </a:pPr>
+            <a:r>
+              <a:rPr lang="en-US" sz="1400" dirty="0">
+                <a:solidFill>
+                  <a:schemeClr val="tx2"/>
+                </a:solidFill>
+              </a:rPr>
+              <a:t>возврат на базу в Gazebo: 8 из 9 → 7 из 7</a:t>
+            </a:r>
+            <a:endParaRPr lang="en-US" sz="1400" dirty="0"/>
+          </a:p>
+        </p:txBody>
+      </p:sp>
+      <p:sp>
+        <p:nvSpPr>
+          <p:cNvPr id="124" name="lane-7-rule"/>
+          <p:cNvSpPr/>
+          <p:nvPr/>
+        </p:nvSpPr>
+        <p:spPr>
+          <a:xfrm>
+            <a:off x="548640" y="3732862"/>
+            <a:ext cx="11091672" cy="0"/>
+          </a:xfrm>
+          <a:prstGeom prst="line">
+            <a:avLst/>
+          </a:prstGeom>
+          <a:noFill/>
+          <a:ln w="12700">
+            <a:solidFill>
+              <a:schemeClr val="bg2"/>
+            </a:solidFill>
+            <a:prstDash val="solid"/>
+          </a:ln>
+        </p:spPr>
+      </p:sp>
+      <p:sp>
+        <p:nvSpPr>
+          <p:cNvPr id="125" name="lane-7-name"/>
+          <p:cNvSpPr txBox="1"/>
+          <p:nvPr/>
+        </p:nvSpPr>
+        <p:spPr>
+          <a:xfrm>
+            <a:off x="548640" y="3732862"/>
+            <a:ext cx="3611880" cy="279244"/>
+          </a:xfrm>
+          <a:prstGeom prst="rect">
+            <a:avLst/>
+          </a:prstGeom>
+          <a:noFill/>
+          <a:ln/>
+        </p:spPr>
+        <p:txBody>
+          <a:bodyPr wrap="none" lIns="0" tIns="0" rIns="0" bIns="0" rtlCol="0" anchor="ctr"/>
+          <a:lstStyle/>
+          <a:p>
+            <a:pPr algn="l" indent="0" marL="0">
+              <a:buNone/>
+            </a:pPr>
+            <a:r>
+              <a:rPr lang="en-US" sz="1600" b="1" dirty="0">
+                <a:solidFill>
+                  <a:schemeClr val="tx1"/>
+                </a:solidFill>
+              </a:rPr>
+              <a:t>P1 → P2. Где робот теряет очки</a:t>
+            </a:r>
+            <a:endParaRPr lang="en-US" sz="1600" dirty="0"/>
+          </a:p>
+        </p:txBody>
+      </p:sp>
+      <p:sp>
+        <p:nvSpPr>
+          <p:cNvPr id="126" name="lane-7-chip-1-tile"/>
+          <p:cNvSpPr/>
+          <p:nvPr/>
+        </p:nvSpPr>
+        <p:spPr>
+          <a:xfrm>
+            <a:off x="4251960" y="3753612"/>
             <a:ext cx="237744" cy="237744"/>
           </a:xfrm>
           <a:prstGeom prst="roundRect">
@@ -6867,7 +6943,7 @@
       </p:sp>
       <p:pic>
         <p:nvPicPr>
-          <p:cNvPr id="125" name="lane-7-chip-3" descr="/Users/a/MAI/DID/presentation/assets/logos/claude.png">    </p:cNvPr>
+          <p:cNvPr id="127" name="lane-7-chip-1" descr="/Users/a/MAI/DID/presentation/assets/logos/claude.png">    </p:cNvPr>
           <p:cNvPicPr>
             <a:picLocks noChangeAspect="1"/>
           </p:cNvPicPr>
@@ -6881,7 +6957,7 @@
         </p:blipFill>
         <p:spPr>
           <a:xfrm>
-            <a:off x="4841748" y="3794760"/>
+            <a:off x="4293108" y="3794760"/>
             <a:ext cx="155448" cy="155448"/>
           </a:xfrm>
           <a:prstGeom prst="rect">
@@ -6891,13 +6967,13 @@
       </p:pic>
       <p:sp>
         <p:nvSpPr>
-          <p:cNvPr id="126" name="lane-7-chip-4-tile"/>
-          <p:cNvSpPr/>
-          <p:nvPr/>
-        </p:nvSpPr>
-        <p:spPr>
-          <a:xfrm>
-            <a:off x="5074920" y="3753612"/>
+          <p:cNvPr id="128" name="lane-7-chip-2-tile"/>
+          <p:cNvSpPr/>
+          <p:nvPr/>
+        </p:nvSpPr>
+        <p:spPr>
+          <a:xfrm>
+            <a:off x="4526280" y="3753612"/>
             <a:ext cx="237744" cy="237744"/>
           </a:xfrm>
           <a:prstGeom prst="roundRect">
@@ -6913,7 +6989,7 @@
       </p:sp>
       <p:pic>
         <p:nvPicPr>
-          <p:cNvPr id="127" name="lane-7-chip-4" descr="/Users/a/MAI/DID/presentation/assets/logos/openai.png">    </p:cNvPr>
+          <p:cNvPr id="129" name="lane-7-chip-2" descr="/Users/a/MAI/DID/presentation/assets/logos/openai.png">    </p:cNvPr>
           <p:cNvPicPr>
             <a:picLocks noChangeAspect="1"/>
           </p:cNvPicPr>
@@ -6927,7 +7003,7 @@
         </p:blipFill>
         <p:spPr>
           <a:xfrm>
-            <a:off x="5116068" y="3794760"/>
+            <a:off x="4567428" y="3794760"/>
             <a:ext cx="155448" cy="155448"/>
           </a:xfrm>
           <a:prstGeom prst="rect">
@@ -6937,89 +7013,13 @@
       </p:pic>
       <p:sp>
         <p:nvSpPr>
-          <p:cNvPr id="128" name="lane-7-chip-5"/>
-          <p:cNvSpPr txBox="1"/>
-          <p:nvPr/>
-        </p:nvSpPr>
-        <p:spPr>
-          <a:xfrm>
-            <a:off x="5349240" y="3753612"/>
-            <a:ext cx="237744" cy="237744"/>
-          </a:xfrm>
-          <a:prstGeom prst="roundRect">
-            <a:avLst>
-              <a:gd name="adj" fmla="val 15385"/>
-            </a:avLst>
-          </a:prstGeom>
-          <a:solidFill>
-            <a:schemeClr val="accent3"/>
-          </a:solidFill>
-          <a:ln/>
-        </p:spPr>
-        <p:txBody>
-          <a:bodyPr wrap="square" lIns="0" tIns="0" rIns="0" bIns="0" rtlCol="0" anchor="ctr"/>
-          <a:lstStyle/>
-          <a:p>
-            <a:pPr algn="ctr" indent="0" marL="0">
-              <a:buNone/>
-            </a:pPr>
-            <a:r>
-              <a:rPr lang="en-US" sz="1300" b="1" dirty="0">
-                <a:solidFill>
-                  <a:schemeClr val="bg1"/>
-                </a:solidFill>
-              </a:rPr>
-              <a:t>✓</a:t>
-            </a:r>
-            <a:endParaRPr lang="en-US" sz="1300" dirty="0"/>
-          </a:p>
-        </p:txBody>
-      </p:sp>
-      <p:sp>
-        <p:nvSpPr>
-          <p:cNvPr id="129" name="lane-7-next"/>
-          <p:cNvSpPr txBox="1"/>
-          <p:nvPr/>
-        </p:nvSpPr>
-        <p:spPr>
-          <a:xfrm>
-            <a:off x="5623560" y="3732862"/>
-            <a:ext cx="237744" cy="279244"/>
-          </a:xfrm>
-          <a:prstGeom prst="rect">
-            <a:avLst/>
-          </a:prstGeom>
-          <a:noFill/>
-          <a:ln/>
-        </p:spPr>
-        <p:txBody>
-          <a:bodyPr wrap="square" lIns="0" tIns="0" rIns="0" bIns="0" rtlCol="0" anchor="ctr"/>
-          <a:lstStyle/>
-          <a:p>
-            <a:pPr algn="ctr" indent="0" marL="0">
-              <a:buNone/>
-            </a:pPr>
-            <a:r>
-              <a:rPr lang="en-US" sz="1400" b="1" dirty="0">
-                <a:solidFill>
-                  <a:schemeClr val="accent5"/>
-                </a:solidFill>
-              </a:rPr>
-              <a:t>→</a:t>
-            </a:r>
-            <a:endParaRPr lang="en-US" sz="1400" dirty="0"/>
-          </a:p>
-        </p:txBody>
-      </p:sp>
-      <p:sp>
-        <p:nvSpPr>
-          <p:cNvPr id="130" name="lane-7-chip-7-tile"/>
-          <p:cNvSpPr/>
-          <p:nvPr/>
-        </p:nvSpPr>
-        <p:spPr>
-          <a:xfrm>
-            <a:off x="5897880" y="3753612"/>
+          <p:cNvPr id="130" name="lane-7-chip-3-tile"/>
+          <p:cNvSpPr/>
+          <p:nvPr/>
+        </p:nvSpPr>
+        <p:spPr>
+          <a:xfrm>
+            <a:off x="4800600" y="3753612"/>
             <a:ext cx="237744" cy="237744"/>
           </a:xfrm>
           <a:prstGeom prst="roundRect">
@@ -7035,7 +7035,7 @@
       </p:sp>
       <p:pic>
         <p:nvPicPr>
-          <p:cNvPr id="131" name="lane-7-chip-7" descr="/Users/a/MAI/DID/presentation/assets/logos/claude.png">    </p:cNvPr>
+          <p:cNvPr id="131" name="lane-7-chip-3" descr="/Users/a/MAI/DID/presentation/assets/logos/claude.png">    </p:cNvPr>
           <p:cNvPicPr>
             <a:picLocks noChangeAspect="1"/>
           </p:cNvPicPr>
@@ -7049,7 +7049,7 @@
         </p:blipFill>
         <p:spPr>
           <a:xfrm>
-            <a:off x="5939028" y="3794760"/>
+            <a:off x="4841748" y="3794760"/>
             <a:ext cx="155448" cy="155448"/>
           </a:xfrm>
           <a:prstGeom prst="rect">
@@ -7059,13 +7059,13 @@
       </p:pic>
       <p:sp>
         <p:nvSpPr>
-          <p:cNvPr id="132" name="lane-7-chip-8-tile"/>
-          <p:cNvSpPr/>
-          <p:nvPr/>
-        </p:nvSpPr>
-        <p:spPr>
-          <a:xfrm>
-            <a:off x="6172200" y="3753612"/>
+          <p:cNvPr id="132" name="lane-7-chip-4-tile"/>
+          <p:cNvSpPr/>
+          <p:nvPr/>
+        </p:nvSpPr>
+        <p:spPr>
+          <a:xfrm>
+            <a:off x="5074920" y="3753612"/>
             <a:ext cx="237744" cy="237744"/>
           </a:xfrm>
           <a:prstGeom prst="roundRect">
@@ -7081,7 +7081,7 @@
       </p:sp>
       <p:pic>
         <p:nvPicPr>
-          <p:cNvPr id="133" name="lane-7-chip-8" descr="/Users/a/MAI/DID/presentation/assets/logos/openai.png">    </p:cNvPr>
+          <p:cNvPr id="133" name="lane-7-chip-4" descr="/Users/a/MAI/DID/presentation/assets/logos/openai.png">    </p:cNvPr>
           <p:cNvPicPr>
             <a:picLocks noChangeAspect="1"/>
           </p:cNvPicPr>
@@ -7095,7 +7095,7 @@
         </p:blipFill>
         <p:spPr>
           <a:xfrm>
-            <a:off x="6213348" y="3794760"/>
+            <a:off x="5116068" y="3794760"/>
             <a:ext cx="155448" cy="155448"/>
           </a:xfrm>
           <a:prstGeom prst="rect">
@@ -7105,13 +7105,89 @@
       </p:pic>
       <p:sp>
         <p:nvSpPr>
-          <p:cNvPr id="134" name="lane-7-chip-9-tile"/>
-          <p:cNvSpPr/>
-          <p:nvPr/>
-        </p:nvSpPr>
-        <p:spPr>
-          <a:xfrm>
-            <a:off x="6446520" y="3753612"/>
+          <p:cNvPr id="134" name="lane-7-chip-5"/>
+          <p:cNvSpPr txBox="1"/>
+          <p:nvPr/>
+        </p:nvSpPr>
+        <p:spPr>
+          <a:xfrm>
+            <a:off x="5349240" y="3753612"/>
+            <a:ext cx="237744" cy="237744"/>
+          </a:xfrm>
+          <a:prstGeom prst="roundRect">
+            <a:avLst>
+              <a:gd name="adj" fmla="val 15385"/>
+            </a:avLst>
+          </a:prstGeom>
+          <a:solidFill>
+            <a:schemeClr val="accent3"/>
+          </a:solidFill>
+          <a:ln/>
+        </p:spPr>
+        <p:txBody>
+          <a:bodyPr wrap="square" lIns="0" tIns="0" rIns="0" bIns="0" rtlCol="0" anchor="ctr"/>
+          <a:lstStyle/>
+          <a:p>
+            <a:pPr algn="ctr" indent="0" marL="0">
+              <a:buNone/>
+            </a:pPr>
+            <a:r>
+              <a:rPr lang="en-US" sz="1300" b="1" dirty="0">
+                <a:solidFill>
+                  <a:schemeClr val="bg1"/>
+                </a:solidFill>
+              </a:rPr>
+              <a:t>✓</a:t>
+            </a:r>
+            <a:endParaRPr lang="en-US" sz="1300" dirty="0"/>
+          </a:p>
+        </p:txBody>
+      </p:sp>
+      <p:sp>
+        <p:nvSpPr>
+          <p:cNvPr id="135" name="lane-7-next"/>
+          <p:cNvSpPr txBox="1"/>
+          <p:nvPr/>
+        </p:nvSpPr>
+        <p:spPr>
+          <a:xfrm>
+            <a:off x="5623560" y="3732862"/>
+            <a:ext cx="237744" cy="279244"/>
+          </a:xfrm>
+          <a:prstGeom prst="rect">
+            <a:avLst/>
+          </a:prstGeom>
+          <a:noFill/>
+          <a:ln/>
+        </p:spPr>
+        <p:txBody>
+          <a:bodyPr wrap="square" lIns="0" tIns="0" rIns="0" bIns="0" rtlCol="0" anchor="ctr"/>
+          <a:lstStyle/>
+          <a:p>
+            <a:pPr algn="ctr" indent="0" marL="0">
+              <a:buNone/>
+            </a:pPr>
+            <a:r>
+              <a:rPr lang="en-US" sz="1400" b="1" dirty="0">
+                <a:solidFill>
+                  <a:schemeClr val="accent5"/>
+                </a:solidFill>
+              </a:rPr>
+              <a:t>→</a:t>
+            </a:r>
+            <a:endParaRPr lang="en-US" sz="1400" dirty="0"/>
+          </a:p>
+        </p:txBody>
+      </p:sp>
+      <p:sp>
+        <p:nvSpPr>
+          <p:cNvPr id="136" name="lane-7-chip-7-tile"/>
+          <p:cNvSpPr/>
+          <p:nvPr/>
+        </p:nvSpPr>
+        <p:spPr>
+          <a:xfrm>
+            <a:off x="5897880" y="3753612"/>
             <a:ext cx="237744" cy="237744"/>
           </a:xfrm>
           <a:prstGeom prst="roundRect">
@@ -7127,7 +7203,7 @@
       </p:sp>
       <p:pic>
         <p:nvPicPr>
-          <p:cNvPr id="135" name="lane-7-chip-9" descr="/Users/a/MAI/DID/presentation/assets/logos/claude.png">    </p:cNvPr>
+          <p:cNvPr id="137" name="lane-7-chip-7" descr="/Users/a/MAI/DID/presentation/assets/logos/claude.png">    </p:cNvPr>
           <p:cNvPicPr>
             <a:picLocks noChangeAspect="1"/>
           </p:cNvPicPr>
@@ -7141,7 +7217,7 @@
         </p:blipFill>
         <p:spPr>
           <a:xfrm>
-            <a:off x="6487668" y="3794760"/>
+            <a:off x="5939028" y="3794760"/>
             <a:ext cx="155448" cy="155448"/>
           </a:xfrm>
           <a:prstGeom prst="rect">
@@ -7151,148 +7227,13 @@
       </p:pic>
       <p:sp>
         <p:nvSpPr>
-          <p:cNvPr id="136" name="lane-7-chip-10"/>
-          <p:cNvSpPr txBox="1"/>
-          <p:nvPr/>
-        </p:nvSpPr>
-        <p:spPr>
-          <a:xfrm>
-            <a:off x="6720840" y="3753612"/>
-            <a:ext cx="237744" cy="237744"/>
-          </a:xfrm>
-          <a:prstGeom prst="roundRect">
-            <a:avLst>
-              <a:gd name="adj" fmla="val 15385"/>
-            </a:avLst>
-          </a:prstGeom>
-          <a:solidFill>
-            <a:schemeClr val="accent3"/>
-          </a:solidFill>
-          <a:ln/>
-        </p:spPr>
-        <p:txBody>
-          <a:bodyPr wrap="square" lIns="0" tIns="0" rIns="0" bIns="0" rtlCol="0" anchor="ctr"/>
-          <a:lstStyle/>
-          <a:p>
-            <a:pPr algn="ctr" indent="0" marL="0">
-              <a:buNone/>
-            </a:pPr>
-            <a:r>
-              <a:rPr lang="en-US" sz="1300" b="1" dirty="0">
-                <a:solidFill>
-                  <a:schemeClr val="bg1"/>
-                </a:solidFill>
-              </a:rPr>
-              <a:t>✓</a:t>
-            </a:r>
-            <a:endParaRPr lang="en-US" sz="1300" dirty="0"/>
-          </a:p>
-        </p:txBody>
-      </p:sp>
-      <p:sp>
-        <p:nvSpPr>
-          <p:cNvPr id="137" name="lane-7-result"/>
-          <p:cNvSpPr txBox="1"/>
-          <p:nvPr/>
-        </p:nvSpPr>
-        <p:spPr>
-          <a:xfrm>
-            <a:off x="7132320" y="3732862"/>
-            <a:ext cx="4507992" cy="279244"/>
-          </a:xfrm>
-          <a:prstGeom prst="rect">
-            <a:avLst/>
-          </a:prstGeom>
-          <a:noFill/>
-          <a:ln/>
-        </p:spPr>
-        <p:txBody>
-          <a:bodyPr wrap="none" lIns="0" tIns="0" rIns="0" bIns="0" rtlCol="0" anchor="ctr"/>
-          <a:lstStyle/>
-          <a:p>
-            <a:pPr algn="l" indent="0" marL="0">
-              <a:buNone/>
-            </a:pPr>
-            <a:r>
-              <a:rPr lang="en-US" sz="1400" dirty="0">
-                <a:solidFill>
-                  <a:schemeClr val="tx2"/>
-                </a:solidFill>
-              </a:rPr>
-              <a:t>сбой датчика: +6,4; пять правок: не показано</a:t>
-            </a:r>
-            <a:endParaRPr lang="en-US" sz="1400" dirty="0"/>
-          </a:p>
-        </p:txBody>
-      </p:sp>
-      <p:sp>
-        <p:nvSpPr>
-          <p:cNvPr id="138" name="lane-8-rule"/>
-          <p:cNvSpPr/>
-          <p:nvPr/>
-        </p:nvSpPr>
-        <p:spPr>
-          <a:xfrm>
-            <a:off x="548640" y="4012106"/>
-            <a:ext cx="11091672" cy="0"/>
-          </a:xfrm>
-          <a:prstGeom prst="line">
-            <a:avLst/>
-          </a:prstGeom>
-          <a:noFill/>
-          <a:ln w="12700">
-            <a:solidFill>
-              <a:schemeClr val="bg2"/>
-            </a:solidFill>
-            <a:prstDash val="solid"/>
-          </a:ln>
-        </p:spPr>
-      </p:sp>
-      <p:sp>
-        <p:nvSpPr>
-          <p:cNvPr id="139" name="lane-8-name"/>
-          <p:cNvSpPr txBox="1"/>
-          <p:nvPr/>
-        </p:nvSpPr>
-        <p:spPr>
-          <a:xfrm>
-            <a:off x="548640" y="4012106"/>
-            <a:ext cx="3611880" cy="279244"/>
-          </a:xfrm>
-          <a:prstGeom prst="rect">
-            <a:avLst/>
-          </a:prstGeom>
-          <a:noFill/>
-          <a:ln/>
-        </p:spPr>
-        <p:txBody>
-          <a:bodyPr wrap="none" lIns="0" tIns="0" rIns="0" bIns="0" rtlCol="0" anchor="ctr"/>
-          <a:lstStyle/>
-          <a:p>
-            <a:pPr algn="l" indent="0" marL="0">
-              <a:buNone/>
-            </a:pPr>
-            <a:r>
-              <a:rPr lang="en-US" sz="1600" b="1" dirty="0">
-                <a:solidFill>
-                  <a:schemeClr val="tx1"/>
-                </a:solidFill>
-              </a:rPr>
-              <a:t>A1. Новые схемы агента</a:t>
-            </a:r>
-            <a:endParaRPr lang="en-US" sz="1600" dirty="0"/>
-          </a:p>
-        </p:txBody>
-      </p:sp>
-      <p:sp>
-        <p:nvSpPr>
-          <p:cNvPr id="140" name="lane-8-chip-1-tile"/>
-          <p:cNvSpPr/>
-          <p:nvPr/>
-        </p:nvSpPr>
-        <p:spPr>
-          <a:xfrm>
-            <a:off x="4251960" y="4032856"/>
+          <p:cNvPr id="138" name="lane-7-chip-8-tile"/>
+          <p:cNvSpPr/>
+          <p:nvPr/>
+        </p:nvSpPr>
+        <p:spPr>
+          <a:xfrm>
+            <a:off x="6172200" y="3753612"/>
             <a:ext cx="237744" cy="237744"/>
           </a:xfrm>
           <a:prstGeom prst="roundRect">
@@ -7308,7 +7249,7 @@
       </p:sp>
       <p:pic>
         <p:nvPicPr>
-          <p:cNvPr id="141" name="lane-8-chip-1" descr="/Users/a/MAI/DID/presentation/assets/logos/claude.png">    </p:cNvPr>
+          <p:cNvPr id="139" name="lane-7-chip-8" descr="/Users/a/MAI/DID/presentation/assets/logos/openai.png">    </p:cNvPr>
           <p:cNvPicPr>
             <a:picLocks noChangeAspect="1"/>
           </p:cNvPicPr>
@@ -7322,7 +7263,7 @@
         </p:blipFill>
         <p:spPr>
           <a:xfrm>
-            <a:off x="4293108" y="4074004"/>
+            <a:off x="6213348" y="3794760"/>
             <a:ext cx="155448" cy="155448"/>
           </a:xfrm>
           <a:prstGeom prst="rect">
@@ -7332,13 +7273,13 @@
       </p:pic>
       <p:sp>
         <p:nvSpPr>
-          <p:cNvPr id="142" name="lane-8-chip-2-tile"/>
-          <p:cNvSpPr/>
-          <p:nvPr/>
-        </p:nvSpPr>
-        <p:spPr>
-          <a:xfrm>
-            <a:off x="4526280" y="4032856"/>
+          <p:cNvPr id="140" name="lane-7-chip-9-tile"/>
+          <p:cNvSpPr/>
+          <p:nvPr/>
+        </p:nvSpPr>
+        <p:spPr>
+          <a:xfrm>
+            <a:off x="6446520" y="3753612"/>
             <a:ext cx="237744" cy="237744"/>
           </a:xfrm>
           <a:prstGeom prst="roundRect">
@@ -7354,7 +7295,7 @@
       </p:sp>
       <p:pic>
         <p:nvPicPr>
-          <p:cNvPr id="143" name="lane-8-chip-2" descr="/Users/a/MAI/DID/presentation/assets/logos/openai.png">    </p:cNvPr>
+          <p:cNvPr id="141" name="lane-7-chip-9" descr="/Users/a/MAI/DID/presentation/assets/logos/claude.png">    </p:cNvPr>
           <p:cNvPicPr>
             <a:picLocks noChangeAspect="1"/>
           </p:cNvPicPr>
@@ -7368,7 +7309,7 @@
         </p:blipFill>
         <p:spPr>
           <a:xfrm>
-            <a:off x="4567428" y="4074004"/>
+            <a:off x="6487668" y="3794760"/>
             <a:ext cx="155448" cy="155448"/>
           </a:xfrm>
           <a:prstGeom prst="rect">
@@ -7378,13 +7319,148 @@
       </p:pic>
       <p:sp>
         <p:nvSpPr>
-          <p:cNvPr id="144" name="lane-8-chip-3-tile"/>
-          <p:cNvSpPr/>
-          <p:nvPr/>
-        </p:nvSpPr>
-        <p:spPr>
-          <a:xfrm>
-            <a:off x="4800600" y="4032856"/>
+          <p:cNvPr id="142" name="lane-7-chip-10"/>
+          <p:cNvSpPr txBox="1"/>
+          <p:nvPr/>
+        </p:nvSpPr>
+        <p:spPr>
+          <a:xfrm>
+            <a:off x="6720840" y="3753612"/>
+            <a:ext cx="237744" cy="237744"/>
+          </a:xfrm>
+          <a:prstGeom prst="roundRect">
+            <a:avLst>
+              <a:gd name="adj" fmla="val 15385"/>
+            </a:avLst>
+          </a:prstGeom>
+          <a:solidFill>
+            <a:schemeClr val="accent3"/>
+          </a:solidFill>
+          <a:ln/>
+        </p:spPr>
+        <p:txBody>
+          <a:bodyPr wrap="square" lIns="0" tIns="0" rIns="0" bIns="0" rtlCol="0" anchor="ctr"/>
+          <a:lstStyle/>
+          <a:p>
+            <a:pPr algn="ctr" indent="0" marL="0">
+              <a:buNone/>
+            </a:pPr>
+            <a:r>
+              <a:rPr lang="en-US" sz="1300" b="1" dirty="0">
+                <a:solidFill>
+                  <a:schemeClr val="bg1"/>
+                </a:solidFill>
+              </a:rPr>
+              <a:t>✓</a:t>
+            </a:r>
+            <a:endParaRPr lang="en-US" sz="1300" dirty="0"/>
+          </a:p>
+        </p:txBody>
+      </p:sp>
+      <p:sp>
+        <p:nvSpPr>
+          <p:cNvPr id="143" name="lane-7-result"/>
+          <p:cNvSpPr txBox="1"/>
+          <p:nvPr/>
+        </p:nvSpPr>
+        <p:spPr>
+          <a:xfrm>
+            <a:off x="7132320" y="3732862"/>
+            <a:ext cx="4507992" cy="279244"/>
+          </a:xfrm>
+          <a:prstGeom prst="rect">
+            <a:avLst/>
+          </a:prstGeom>
+          <a:noFill/>
+          <a:ln/>
+        </p:spPr>
+        <p:txBody>
+          <a:bodyPr wrap="none" lIns="0" tIns="0" rIns="0" bIns="0" rtlCol="0" anchor="ctr"/>
+          <a:lstStyle/>
+          <a:p>
+            <a:pPr algn="l" indent="0" marL="0">
+              <a:buNone/>
+            </a:pPr>
+            <a:r>
+              <a:rPr lang="en-US" sz="1400" dirty="0">
+                <a:solidFill>
+                  <a:schemeClr val="tx2"/>
+                </a:solidFill>
+              </a:rPr>
+              <a:t>сбой датчика: +6,4; пять правок: не показано</a:t>
+            </a:r>
+            <a:endParaRPr lang="en-US" sz="1400" dirty="0"/>
+          </a:p>
+        </p:txBody>
+      </p:sp>
+      <p:sp>
+        <p:nvSpPr>
+          <p:cNvPr id="144" name="lane-8-rule"/>
+          <p:cNvSpPr/>
+          <p:nvPr/>
+        </p:nvSpPr>
+        <p:spPr>
+          <a:xfrm>
+            <a:off x="548640" y="4012106"/>
+            <a:ext cx="11091672" cy="0"/>
+          </a:xfrm>
+          <a:prstGeom prst="line">
+            <a:avLst/>
+          </a:prstGeom>
+          <a:noFill/>
+          <a:ln w="12700">
+            <a:solidFill>
+              <a:schemeClr val="bg2"/>
+            </a:solidFill>
+            <a:prstDash val="solid"/>
+          </a:ln>
+        </p:spPr>
+      </p:sp>
+      <p:sp>
+        <p:nvSpPr>
+          <p:cNvPr id="145" name="lane-8-name"/>
+          <p:cNvSpPr txBox="1"/>
+          <p:nvPr/>
+        </p:nvSpPr>
+        <p:spPr>
+          <a:xfrm>
+            <a:off x="548640" y="4012106"/>
+            <a:ext cx="3611880" cy="279244"/>
+          </a:xfrm>
+          <a:prstGeom prst="rect">
+            <a:avLst/>
+          </a:prstGeom>
+          <a:noFill/>
+          <a:ln/>
+        </p:spPr>
+        <p:txBody>
+          <a:bodyPr wrap="none" lIns="0" tIns="0" rIns="0" bIns="0" rtlCol="0" anchor="ctr"/>
+          <a:lstStyle/>
+          <a:p>
+            <a:pPr algn="l" indent="0" marL="0">
+              <a:buNone/>
+            </a:pPr>
+            <a:r>
+              <a:rPr lang="en-US" sz="1600" b="1" dirty="0">
+                <a:solidFill>
+                  <a:schemeClr val="tx1"/>
+                </a:solidFill>
+              </a:rPr>
+              <a:t>A1. Новые схемы агента</a:t>
+            </a:r>
+            <a:endParaRPr lang="en-US" sz="1600" dirty="0"/>
+          </a:p>
+        </p:txBody>
+      </p:sp>
+      <p:sp>
+        <p:nvSpPr>
+          <p:cNvPr id="146" name="lane-8-chip-1-tile"/>
+          <p:cNvSpPr/>
+          <p:nvPr/>
+        </p:nvSpPr>
+        <p:spPr>
+          <a:xfrm>
+            <a:off x="4251960" y="4032856"/>
             <a:ext cx="237744" cy="237744"/>
           </a:xfrm>
           <a:prstGeom prst="roundRect">
@@ -7400,7 +7476,7 @@
       </p:sp>
       <p:pic>
         <p:nvPicPr>
-          <p:cNvPr id="145" name="lane-8-chip-3" descr="/Users/a/MAI/DID/presentation/assets/logos/claude.png">    </p:cNvPr>
+          <p:cNvPr id="147" name="lane-8-chip-1" descr="/Users/a/MAI/DID/presentation/assets/logos/claude.png">    </p:cNvPr>
           <p:cNvPicPr>
             <a:picLocks noChangeAspect="1"/>
           </p:cNvPicPr>
@@ -7414,7 +7490,7 @@
         </p:blipFill>
         <p:spPr>
           <a:xfrm>
-            <a:off x="4841748" y="4074004"/>
+            <a:off x="4293108" y="4074004"/>
             <a:ext cx="155448" cy="155448"/>
           </a:xfrm>
           <a:prstGeom prst="rect">
@@ -7424,148 +7500,13 @@
       </p:pic>
       <p:sp>
         <p:nvSpPr>
-          <p:cNvPr id="146" name="lane-8-chip-4"/>
-          <p:cNvSpPr txBox="1"/>
-          <p:nvPr/>
-        </p:nvSpPr>
-        <p:spPr>
-          <a:xfrm>
-            <a:off x="5074920" y="4032856"/>
-            <a:ext cx="237744" cy="237744"/>
-          </a:xfrm>
-          <a:prstGeom prst="roundRect">
-            <a:avLst>
-              <a:gd name="adj" fmla="val 15385"/>
-            </a:avLst>
-          </a:prstGeom>
-          <a:solidFill>
-            <a:schemeClr val="accent3"/>
-          </a:solidFill>
-          <a:ln/>
-        </p:spPr>
-        <p:txBody>
-          <a:bodyPr wrap="square" lIns="0" tIns="0" rIns="0" bIns="0" rtlCol="0" anchor="ctr"/>
-          <a:lstStyle/>
-          <a:p>
-            <a:pPr algn="ctr" indent="0" marL="0">
-              <a:buNone/>
-            </a:pPr>
-            <a:r>
-              <a:rPr lang="en-US" sz="1300" b="1" dirty="0">
-                <a:solidFill>
-                  <a:schemeClr val="bg1"/>
-                </a:solidFill>
-              </a:rPr>
-              <a:t>✓</a:t>
-            </a:r>
-            <a:endParaRPr lang="en-US" sz="1300" dirty="0"/>
-          </a:p>
-        </p:txBody>
-      </p:sp>
-      <p:sp>
-        <p:nvSpPr>
-          <p:cNvPr id="147" name="lane-8-result"/>
-          <p:cNvSpPr txBox="1"/>
-          <p:nvPr/>
-        </p:nvSpPr>
-        <p:spPr>
-          <a:xfrm>
-            <a:off x="7132320" y="4012106"/>
-            <a:ext cx="4507992" cy="279244"/>
-          </a:xfrm>
-          <a:prstGeom prst="rect">
-            <a:avLst/>
-          </a:prstGeom>
-          <a:noFill/>
-          <a:ln/>
-        </p:spPr>
-        <p:txBody>
-          <a:bodyPr wrap="none" lIns="0" tIns="0" rIns="0" bIns="0" rtlCol="0" anchor="ctr"/>
-          <a:lstStyle/>
-          <a:p>
-            <a:pPr algn="l" indent="0" marL="0">
-              <a:buNone/>
-            </a:pPr>
-            <a:r>
-              <a:rPr lang="en-US" sz="1400" dirty="0">
-                <a:solidFill>
-                  <a:schemeClr val="tx2"/>
-                </a:solidFill>
-              </a:rPr>
-              <a:t>не лучше нынешней; с подсказками — 92,5 очка</a:t>
-            </a:r>
-            <a:endParaRPr lang="en-US" sz="1400" dirty="0"/>
-          </a:p>
-        </p:txBody>
-      </p:sp>
-      <p:sp>
-        <p:nvSpPr>
-          <p:cNvPr id="148" name="lane-9-rule"/>
-          <p:cNvSpPr/>
-          <p:nvPr/>
-        </p:nvSpPr>
-        <p:spPr>
-          <a:xfrm>
-            <a:off x="548640" y="4291350"/>
-            <a:ext cx="11091672" cy="0"/>
-          </a:xfrm>
-          <a:prstGeom prst="line">
-            <a:avLst/>
-          </a:prstGeom>
-          <a:noFill/>
-          <a:ln w="12700">
-            <a:solidFill>
-              <a:schemeClr val="bg2"/>
-            </a:solidFill>
-            <a:prstDash val="solid"/>
-          </a:ln>
-        </p:spPr>
-      </p:sp>
-      <p:sp>
-        <p:nvSpPr>
-          <p:cNvPr id="149" name="lane-9-name"/>
-          <p:cNvSpPr txBox="1"/>
-          <p:nvPr/>
-        </p:nvSpPr>
-        <p:spPr>
-          <a:xfrm>
-            <a:off x="548640" y="4291350"/>
-            <a:ext cx="3611880" cy="279244"/>
-          </a:xfrm>
-          <a:prstGeom prst="rect">
-            <a:avLst/>
-          </a:prstGeom>
-          <a:noFill/>
-          <a:ln/>
-        </p:spPr>
-        <p:txBody>
-          <a:bodyPr wrap="none" lIns="0" tIns="0" rIns="0" bIns="0" rtlCol="0" anchor="ctr"/>
-          <a:lstStyle/>
-          <a:p>
-            <a:pPr algn="l" indent="0" marL="0">
-              <a:buNone/>
-            </a:pPr>
-            <a:r>
-              <a:rPr lang="en-US" sz="1600" b="1" dirty="0">
-                <a:solidFill>
-                  <a:schemeClr val="tx1"/>
-                </a:solidFill>
-              </a:rPr>
-              <a:t>R12. Выбор опыта с учётом цены</a:t>
-            </a:r>
-            <a:endParaRPr lang="en-US" sz="1600" dirty="0"/>
-          </a:p>
-        </p:txBody>
-      </p:sp>
-      <p:sp>
-        <p:nvSpPr>
-          <p:cNvPr id="150" name="lane-9-chip-1-tile"/>
-          <p:cNvSpPr/>
-          <p:nvPr/>
-        </p:nvSpPr>
-        <p:spPr>
-          <a:xfrm>
-            <a:off x="4251960" y="4312099"/>
+          <p:cNvPr id="148" name="lane-8-chip-2-tile"/>
+          <p:cNvSpPr/>
+          <p:nvPr/>
+        </p:nvSpPr>
+        <p:spPr>
+          <a:xfrm>
+            <a:off x="4526280" y="4032856"/>
             <a:ext cx="237744" cy="237744"/>
           </a:xfrm>
           <a:prstGeom prst="roundRect">
@@ -7581,7 +7522,7 @@
       </p:sp>
       <p:pic>
         <p:nvPicPr>
-          <p:cNvPr id="151" name="lane-9-chip-1" descr="/Users/a/MAI/DID/presentation/assets/logos/claude.png">    </p:cNvPr>
+          <p:cNvPr id="149" name="lane-8-chip-2" descr="/Users/a/MAI/DID/presentation/assets/logos/openai.png">    </p:cNvPr>
           <p:cNvPicPr>
             <a:picLocks noChangeAspect="1"/>
           </p:cNvPicPr>
@@ -7595,7 +7536,7 @@
         </p:blipFill>
         <p:spPr>
           <a:xfrm>
-            <a:off x="4293108" y="4353247"/>
+            <a:off x="4567428" y="4074004"/>
             <a:ext cx="155448" cy="155448"/>
           </a:xfrm>
           <a:prstGeom prst="rect">
@@ -7605,13 +7546,13 @@
       </p:pic>
       <p:sp>
         <p:nvSpPr>
-          <p:cNvPr id="152" name="lane-9-chip-2-tile"/>
-          <p:cNvSpPr/>
-          <p:nvPr/>
-        </p:nvSpPr>
-        <p:spPr>
-          <a:xfrm>
-            <a:off x="4526280" y="4312099"/>
+          <p:cNvPr id="150" name="lane-8-chip-3-tile"/>
+          <p:cNvSpPr/>
+          <p:nvPr/>
+        </p:nvSpPr>
+        <p:spPr>
+          <a:xfrm>
+            <a:off x="4800600" y="4032856"/>
             <a:ext cx="237744" cy="237744"/>
           </a:xfrm>
           <a:prstGeom prst="roundRect">
@@ -7627,7 +7568,7 @@
       </p:sp>
       <p:pic>
         <p:nvPicPr>
-          <p:cNvPr id="153" name="lane-9-chip-2" descr="/Users/a/MAI/DID/presentation/assets/logos/openai.png">    </p:cNvPr>
+          <p:cNvPr id="151" name="lane-8-chip-3" descr="/Users/a/MAI/DID/presentation/assets/logos/claude.png">    </p:cNvPr>
           <p:cNvPicPr>
             <a:picLocks noChangeAspect="1"/>
           </p:cNvPicPr>
@@ -7641,7 +7582,7 @@
         </p:blipFill>
         <p:spPr>
           <a:xfrm>
-            <a:off x="4567428" y="4353247"/>
+            <a:off x="4841748" y="4074004"/>
             <a:ext cx="155448" cy="155448"/>
           </a:xfrm>
           <a:prstGeom prst="rect">
@@ -7651,13 +7592,148 @@
       </p:pic>
       <p:sp>
         <p:nvSpPr>
-          <p:cNvPr id="154" name="lane-9-chip-3-tile"/>
-          <p:cNvSpPr/>
-          <p:nvPr/>
-        </p:nvSpPr>
-        <p:spPr>
-          <a:xfrm>
-            <a:off x="4800600" y="4312099"/>
+          <p:cNvPr id="152" name="lane-8-chip-4"/>
+          <p:cNvSpPr txBox="1"/>
+          <p:nvPr/>
+        </p:nvSpPr>
+        <p:spPr>
+          <a:xfrm>
+            <a:off x="5074920" y="4032856"/>
+            <a:ext cx="237744" cy="237744"/>
+          </a:xfrm>
+          <a:prstGeom prst="roundRect">
+            <a:avLst>
+              <a:gd name="adj" fmla="val 15385"/>
+            </a:avLst>
+          </a:prstGeom>
+          <a:solidFill>
+            <a:schemeClr val="accent3"/>
+          </a:solidFill>
+          <a:ln/>
+        </p:spPr>
+        <p:txBody>
+          <a:bodyPr wrap="square" lIns="0" tIns="0" rIns="0" bIns="0" rtlCol="0" anchor="ctr"/>
+          <a:lstStyle/>
+          <a:p>
+            <a:pPr algn="ctr" indent="0" marL="0">
+              <a:buNone/>
+            </a:pPr>
+            <a:r>
+              <a:rPr lang="en-US" sz="1300" b="1" dirty="0">
+                <a:solidFill>
+                  <a:schemeClr val="bg1"/>
+                </a:solidFill>
+              </a:rPr>
+              <a:t>✓</a:t>
+            </a:r>
+            <a:endParaRPr lang="en-US" sz="1300" dirty="0"/>
+          </a:p>
+        </p:txBody>
+      </p:sp>
+      <p:sp>
+        <p:nvSpPr>
+          <p:cNvPr id="153" name="lane-8-result"/>
+          <p:cNvSpPr txBox="1"/>
+          <p:nvPr/>
+        </p:nvSpPr>
+        <p:spPr>
+          <a:xfrm>
+            <a:off x="7132320" y="4012106"/>
+            <a:ext cx="4507992" cy="279244"/>
+          </a:xfrm>
+          <a:prstGeom prst="rect">
+            <a:avLst/>
+          </a:prstGeom>
+          <a:noFill/>
+          <a:ln/>
+        </p:spPr>
+        <p:txBody>
+          <a:bodyPr wrap="none" lIns="0" tIns="0" rIns="0" bIns="0" rtlCol="0" anchor="ctr"/>
+          <a:lstStyle/>
+          <a:p>
+            <a:pPr algn="l" indent="0" marL="0">
+              <a:buNone/>
+            </a:pPr>
+            <a:r>
+              <a:rPr lang="en-US" sz="1400" dirty="0">
+                <a:solidFill>
+                  <a:schemeClr val="tx2"/>
+                </a:solidFill>
+              </a:rPr>
+              <a:t>не лучше нынешней; с подсказками — 92,5 очка</a:t>
+            </a:r>
+            <a:endParaRPr lang="en-US" sz="1400" dirty="0"/>
+          </a:p>
+        </p:txBody>
+      </p:sp>
+      <p:sp>
+        <p:nvSpPr>
+          <p:cNvPr id="154" name="lane-9-rule"/>
+          <p:cNvSpPr/>
+          <p:nvPr/>
+        </p:nvSpPr>
+        <p:spPr>
+          <a:xfrm>
+            <a:off x="548640" y="4291350"/>
+            <a:ext cx="11091672" cy="0"/>
+          </a:xfrm>
+          <a:prstGeom prst="line">
+            <a:avLst/>
+          </a:prstGeom>
+          <a:noFill/>
+          <a:ln w="12700">
+            <a:solidFill>
+              <a:schemeClr val="bg2"/>
+            </a:solidFill>
+            <a:prstDash val="solid"/>
+          </a:ln>
+        </p:spPr>
+      </p:sp>
+      <p:sp>
+        <p:nvSpPr>
+          <p:cNvPr id="155" name="lane-9-name"/>
+          <p:cNvSpPr txBox="1"/>
+          <p:nvPr/>
+        </p:nvSpPr>
+        <p:spPr>
+          <a:xfrm>
+            <a:off x="548640" y="4291350"/>
+            <a:ext cx="3611880" cy="279244"/>
+          </a:xfrm>
+          <a:prstGeom prst="rect">
+            <a:avLst/>
+          </a:prstGeom>
+          <a:noFill/>
+          <a:ln/>
+        </p:spPr>
+        <p:txBody>
+          <a:bodyPr wrap="none" lIns="0" tIns="0" rIns="0" bIns="0" rtlCol="0" anchor="ctr"/>
+          <a:lstStyle/>
+          <a:p>
+            <a:pPr algn="l" indent="0" marL="0">
+              <a:buNone/>
+            </a:pPr>
+            <a:r>
+              <a:rPr lang="en-US" sz="1600" b="1" dirty="0">
+                <a:solidFill>
+                  <a:schemeClr val="tx1"/>
+                </a:solidFill>
+              </a:rPr>
+              <a:t>R12. Выбор опыта с учётом цены</a:t>
+            </a:r>
+            <a:endParaRPr lang="en-US" sz="1600" dirty="0"/>
+          </a:p>
+        </p:txBody>
+      </p:sp>
+      <p:sp>
+        <p:nvSpPr>
+          <p:cNvPr id="156" name="lane-9-chip-1-tile"/>
+          <p:cNvSpPr/>
+          <p:nvPr/>
+        </p:nvSpPr>
+        <p:spPr>
+          <a:xfrm>
+            <a:off x="4251960" y="4312099"/>
             <a:ext cx="237744" cy="237744"/>
           </a:xfrm>
           <a:prstGeom prst="roundRect">
@@ -7673,7 +7749,7 @@
       </p:sp>
       <p:pic>
         <p:nvPicPr>
-          <p:cNvPr id="155" name="lane-9-chip-3" descr="/Users/a/MAI/DID/presentation/assets/logos/claude.png">    </p:cNvPr>
+          <p:cNvPr id="157" name="lane-9-chip-1" descr="/Users/a/MAI/DID/presentation/assets/logos/claude.png">    </p:cNvPr>
           <p:cNvPicPr>
             <a:picLocks noChangeAspect="1"/>
           </p:cNvPicPr>
@@ -7687,7 +7763,7 @@
         </p:blipFill>
         <p:spPr>
           <a:xfrm>
-            <a:off x="4841748" y="4353247"/>
+            <a:off x="4293108" y="4353247"/>
             <a:ext cx="155448" cy="155448"/>
           </a:xfrm>
           <a:prstGeom prst="rect">
@@ -7697,148 +7773,13 @@
       </p:pic>
       <p:sp>
         <p:nvSpPr>
-          <p:cNvPr id="156" name="lane-9-chip-4"/>
-          <p:cNvSpPr txBox="1"/>
-          <p:nvPr/>
-        </p:nvSpPr>
-        <p:spPr>
-          <a:xfrm>
-            <a:off x="5074920" y="4312099"/>
-            <a:ext cx="237744" cy="237744"/>
-          </a:xfrm>
-          <a:prstGeom prst="roundRect">
-            <a:avLst>
-              <a:gd name="adj" fmla="val 15385"/>
-            </a:avLst>
-          </a:prstGeom>
-          <a:solidFill>
-            <a:schemeClr val="accent3"/>
-          </a:solidFill>
-          <a:ln/>
-        </p:spPr>
-        <p:txBody>
-          <a:bodyPr wrap="square" lIns="0" tIns="0" rIns="0" bIns="0" rtlCol="0" anchor="ctr"/>
-          <a:lstStyle/>
-          <a:p>
-            <a:pPr algn="ctr" indent="0" marL="0">
-              <a:buNone/>
-            </a:pPr>
-            <a:r>
-              <a:rPr lang="en-US" sz="1300" b="1" dirty="0">
-                <a:solidFill>
-                  <a:schemeClr val="bg1"/>
-                </a:solidFill>
-              </a:rPr>
-              <a:t>✓</a:t>
-            </a:r>
-            <a:endParaRPr lang="en-US" sz="1300" dirty="0"/>
-          </a:p>
-        </p:txBody>
-      </p:sp>
-      <p:sp>
-        <p:nvSpPr>
-          <p:cNvPr id="157" name="lane-9-result"/>
-          <p:cNvSpPr txBox="1"/>
-          <p:nvPr/>
-        </p:nvSpPr>
-        <p:spPr>
-          <a:xfrm>
-            <a:off x="7132320" y="4291350"/>
-            <a:ext cx="4507992" cy="279244"/>
-          </a:xfrm>
-          <a:prstGeom prst="rect">
-            <a:avLst/>
-          </a:prstGeom>
-          <a:noFill/>
-          <a:ln/>
-        </p:spPr>
-        <p:txBody>
-          <a:bodyPr wrap="none" lIns="0" tIns="0" rIns="0" bIns="0" rtlCol="0" anchor="ctr"/>
-          <a:lstStyle/>
-          <a:p>
-            <a:pPr algn="l" indent="0" marL="0">
-              <a:buNone/>
-            </a:pPr>
-            <a:r>
-              <a:rPr lang="en-US" sz="1400" dirty="0">
-                <a:solidFill>
-                  <a:schemeClr val="tx2"/>
-                </a:solidFill>
-              </a:rPr>
-              <a:t>расход на расследование: 0,54 → 0,08</a:t>
-            </a:r>
-            <a:endParaRPr lang="en-US" sz="1400" dirty="0"/>
-          </a:p>
-        </p:txBody>
-      </p:sp>
-      <p:sp>
-        <p:nvSpPr>
-          <p:cNvPr id="158" name="lane-10-rule"/>
-          <p:cNvSpPr/>
-          <p:nvPr/>
-        </p:nvSpPr>
-        <p:spPr>
-          <a:xfrm>
-            <a:off x="548640" y="4570593"/>
-            <a:ext cx="11091672" cy="0"/>
-          </a:xfrm>
-          <a:prstGeom prst="line">
-            <a:avLst/>
-          </a:prstGeom>
-          <a:noFill/>
-          <a:ln w="12700">
-            <a:solidFill>
-              <a:schemeClr val="bg2"/>
-            </a:solidFill>
-            <a:prstDash val="solid"/>
-          </a:ln>
-        </p:spPr>
-      </p:sp>
-      <p:sp>
-        <p:nvSpPr>
-          <p:cNvPr id="159" name="lane-10-name"/>
-          <p:cNvSpPr txBox="1"/>
-          <p:nvPr/>
-        </p:nvSpPr>
-        <p:spPr>
-          <a:xfrm>
-            <a:off x="548640" y="4570593"/>
-            <a:ext cx="3611880" cy="279244"/>
-          </a:xfrm>
-          <a:prstGeom prst="rect">
-            <a:avLst/>
-          </a:prstGeom>
-          <a:noFill/>
-          <a:ln/>
-        </p:spPr>
-        <p:txBody>
-          <a:bodyPr wrap="none" lIns="0" tIns="0" rIns="0" bIns="0" rtlCol="0" anchor="ctr"/>
-          <a:lstStyle/>
-          <a:p>
-            <a:pPr algn="l" indent="0" marL="0">
-              <a:buNone/>
-            </a:pPr>
-            <a:r>
-              <a:rPr lang="en-US" sz="1600" b="1" dirty="0">
-                <a:solidFill>
-                  <a:schemeClr val="tx1"/>
-                </a:solidFill>
-              </a:rPr>
-              <a:t>R14. Самокалибровка датчика</a:t>
-            </a:r>
-            <a:endParaRPr lang="en-US" sz="1600" dirty="0"/>
-          </a:p>
-        </p:txBody>
-      </p:sp>
-      <p:sp>
-        <p:nvSpPr>
-          <p:cNvPr id="160" name="lane-10-chip-1-tile"/>
-          <p:cNvSpPr/>
-          <p:nvPr/>
-        </p:nvSpPr>
-        <p:spPr>
-          <a:xfrm>
-            <a:off x="4251960" y="4591343"/>
+          <p:cNvPr id="158" name="lane-9-chip-2-tile"/>
+          <p:cNvSpPr/>
+          <p:nvPr/>
+        </p:nvSpPr>
+        <p:spPr>
+          <a:xfrm>
+            <a:off x="4526280" y="4312099"/>
             <a:ext cx="237744" cy="237744"/>
           </a:xfrm>
           <a:prstGeom prst="roundRect">
@@ -7854,7 +7795,7 @@
       </p:sp>
       <p:pic>
         <p:nvPicPr>
-          <p:cNvPr id="161" name="lane-10-chip-1" descr="/Users/a/MAI/DID/presentation/assets/logos/claude.png">    </p:cNvPr>
+          <p:cNvPr id="159" name="lane-9-chip-2" descr="/Users/a/MAI/DID/presentation/assets/logos/openai.png">    </p:cNvPr>
           <p:cNvPicPr>
             <a:picLocks noChangeAspect="1"/>
           </p:cNvPicPr>
@@ -7868,7 +7809,7 @@
         </p:blipFill>
         <p:spPr>
           <a:xfrm>
-            <a:off x="4293108" y="4632491"/>
+            <a:off x="4567428" y="4353247"/>
             <a:ext cx="155448" cy="155448"/>
           </a:xfrm>
           <a:prstGeom prst="rect">
@@ -7878,13 +7819,13 @@
       </p:pic>
       <p:sp>
         <p:nvSpPr>
-          <p:cNvPr id="162" name="lane-10-chip-2-tile"/>
-          <p:cNvSpPr/>
-          <p:nvPr/>
-        </p:nvSpPr>
-        <p:spPr>
-          <a:xfrm>
-            <a:off x="4526280" y="4591343"/>
+          <p:cNvPr id="160" name="lane-9-chip-3-tile"/>
+          <p:cNvSpPr/>
+          <p:nvPr/>
+        </p:nvSpPr>
+        <p:spPr>
+          <a:xfrm>
+            <a:off x="4800600" y="4312099"/>
             <a:ext cx="237744" cy="237744"/>
           </a:xfrm>
           <a:prstGeom prst="roundRect">
@@ -7900,7 +7841,7 @@
       </p:sp>
       <p:pic>
         <p:nvPicPr>
-          <p:cNvPr id="163" name="lane-10-chip-2" descr="/Users/a/MAI/DID/presentation/assets/logos/openai.png">    </p:cNvPr>
+          <p:cNvPr id="161" name="lane-9-chip-3" descr="/Users/a/MAI/DID/presentation/assets/logos/claude.png">    </p:cNvPr>
           <p:cNvPicPr>
             <a:picLocks noChangeAspect="1"/>
           </p:cNvPicPr>
@@ -7914,7 +7855,7 @@
         </p:blipFill>
         <p:spPr>
           <a:xfrm>
-            <a:off x="4567428" y="4632491"/>
+            <a:off x="4841748" y="4353247"/>
             <a:ext cx="155448" cy="155448"/>
           </a:xfrm>
           <a:prstGeom prst="rect">
@@ -7924,13 +7865,148 @@
       </p:pic>
       <p:sp>
         <p:nvSpPr>
-          <p:cNvPr id="164" name="lane-10-chip-3-tile"/>
-          <p:cNvSpPr/>
-          <p:nvPr/>
-        </p:nvSpPr>
-        <p:spPr>
-          <a:xfrm>
-            <a:off x="4800600" y="4591343"/>
+          <p:cNvPr id="162" name="lane-9-chip-4"/>
+          <p:cNvSpPr txBox="1"/>
+          <p:nvPr/>
+        </p:nvSpPr>
+        <p:spPr>
+          <a:xfrm>
+            <a:off x="5074920" y="4312099"/>
+            <a:ext cx="237744" cy="237744"/>
+          </a:xfrm>
+          <a:prstGeom prst="roundRect">
+            <a:avLst>
+              <a:gd name="adj" fmla="val 15385"/>
+            </a:avLst>
+          </a:prstGeom>
+          <a:solidFill>
+            <a:schemeClr val="accent3"/>
+          </a:solidFill>
+          <a:ln/>
+        </p:spPr>
+        <p:txBody>
+          <a:bodyPr wrap="square" lIns="0" tIns="0" rIns="0" bIns="0" rtlCol="0" anchor="ctr"/>
+          <a:lstStyle/>
+          <a:p>
+            <a:pPr algn="ctr" indent="0" marL="0">
+              <a:buNone/>
+            </a:pPr>
+            <a:r>
+              <a:rPr lang="en-US" sz="1300" b="1" dirty="0">
+                <a:solidFill>
+                  <a:schemeClr val="bg1"/>
+                </a:solidFill>
+              </a:rPr>
+              <a:t>✓</a:t>
+            </a:r>
+            <a:endParaRPr lang="en-US" sz="1300" dirty="0"/>
+          </a:p>
+        </p:txBody>
+      </p:sp>
+      <p:sp>
+        <p:nvSpPr>
+          <p:cNvPr id="163" name="lane-9-result"/>
+          <p:cNvSpPr txBox="1"/>
+          <p:nvPr/>
+        </p:nvSpPr>
+        <p:spPr>
+          <a:xfrm>
+            <a:off x="7132320" y="4291350"/>
+            <a:ext cx="4507992" cy="279244"/>
+          </a:xfrm>
+          <a:prstGeom prst="rect">
+            <a:avLst/>
+          </a:prstGeom>
+          <a:noFill/>
+          <a:ln/>
+        </p:spPr>
+        <p:txBody>
+          <a:bodyPr wrap="none" lIns="0" tIns="0" rIns="0" bIns="0" rtlCol="0" anchor="ctr"/>
+          <a:lstStyle/>
+          <a:p>
+            <a:pPr algn="l" indent="0" marL="0">
+              <a:buNone/>
+            </a:pPr>
+            <a:r>
+              <a:rPr lang="en-US" sz="1400" dirty="0">
+                <a:solidFill>
+                  <a:schemeClr val="tx2"/>
+                </a:solidFill>
+              </a:rPr>
+              <a:t>расход на расследование: 0,54 → 0,08</a:t>
+            </a:r>
+            <a:endParaRPr lang="en-US" sz="1400" dirty="0"/>
+          </a:p>
+        </p:txBody>
+      </p:sp>
+      <p:sp>
+        <p:nvSpPr>
+          <p:cNvPr id="164" name="lane-10-rule"/>
+          <p:cNvSpPr/>
+          <p:nvPr/>
+        </p:nvSpPr>
+        <p:spPr>
+          <a:xfrm>
+            <a:off x="548640" y="4570593"/>
+            <a:ext cx="11091672" cy="0"/>
+          </a:xfrm>
+          <a:prstGeom prst="line">
+            <a:avLst/>
+          </a:prstGeom>
+          <a:noFill/>
+          <a:ln w="12700">
+            <a:solidFill>
+              <a:schemeClr val="bg2"/>
+            </a:solidFill>
+            <a:prstDash val="solid"/>
+          </a:ln>
+        </p:spPr>
+      </p:sp>
+      <p:sp>
+        <p:nvSpPr>
+          <p:cNvPr id="165" name="lane-10-name"/>
+          <p:cNvSpPr txBox="1"/>
+          <p:nvPr/>
+        </p:nvSpPr>
+        <p:spPr>
+          <a:xfrm>
+            <a:off x="548640" y="4570593"/>
+            <a:ext cx="3611880" cy="279244"/>
+          </a:xfrm>
+          <a:prstGeom prst="rect">
+            <a:avLst/>
+          </a:prstGeom>
+          <a:noFill/>
+          <a:ln/>
+        </p:spPr>
+        <p:txBody>
+          <a:bodyPr wrap="none" lIns="0" tIns="0" rIns="0" bIns="0" rtlCol="0" anchor="ctr"/>
+          <a:lstStyle/>
+          <a:p>
+            <a:pPr algn="l" indent="0" marL="0">
+              <a:buNone/>
+            </a:pPr>
+            <a:r>
+              <a:rPr lang="en-US" sz="1600" b="1" dirty="0">
+                <a:solidFill>
+                  <a:schemeClr val="tx1"/>
+                </a:solidFill>
+              </a:rPr>
+              <a:t>R14. Самокалибровка датчика</a:t>
+            </a:r>
+            <a:endParaRPr lang="en-US" sz="1600" dirty="0"/>
+          </a:p>
+        </p:txBody>
+      </p:sp>
+      <p:sp>
+        <p:nvSpPr>
+          <p:cNvPr id="166" name="lane-10-chip-1-tile"/>
+          <p:cNvSpPr/>
+          <p:nvPr/>
+        </p:nvSpPr>
+        <p:spPr>
+          <a:xfrm>
+            <a:off x="4251960" y="4591343"/>
             <a:ext cx="237744" cy="237744"/>
           </a:xfrm>
           <a:prstGeom prst="roundRect">
@@ -7946,7 +8022,7 @@
       </p:sp>
       <p:pic>
         <p:nvPicPr>
-          <p:cNvPr id="165" name="lane-10-chip-3" descr="/Users/a/MAI/DID/presentation/assets/logos/claude.png">    </p:cNvPr>
+          <p:cNvPr id="167" name="lane-10-chip-1" descr="/Users/a/MAI/DID/presentation/assets/logos/claude.png">    </p:cNvPr>
           <p:cNvPicPr>
             <a:picLocks noChangeAspect="1"/>
           </p:cNvPicPr>
@@ -7960,7 +8036,7 @@
         </p:blipFill>
         <p:spPr>
           <a:xfrm>
-            <a:off x="4841748" y="4632491"/>
+            <a:off x="4293108" y="4632491"/>
             <a:ext cx="155448" cy="155448"/>
           </a:xfrm>
           <a:prstGeom prst="rect">
@@ -7970,13 +8046,13 @@
       </p:pic>
       <p:sp>
         <p:nvSpPr>
-          <p:cNvPr id="166" name="lane-10-chip-4-tile"/>
-          <p:cNvSpPr/>
-          <p:nvPr/>
-        </p:nvSpPr>
-        <p:spPr>
-          <a:xfrm>
-            <a:off x="5074920" y="4591343"/>
+          <p:cNvPr id="168" name="lane-10-chip-2-tile"/>
+          <p:cNvSpPr/>
+          <p:nvPr/>
+        </p:nvSpPr>
+        <p:spPr>
+          <a:xfrm>
+            <a:off x="4526280" y="4591343"/>
             <a:ext cx="237744" cy="237744"/>
           </a:xfrm>
           <a:prstGeom prst="roundRect">
@@ -7992,7 +8068,7 @@
       </p:sp>
       <p:pic>
         <p:nvPicPr>
-          <p:cNvPr id="167" name="lane-10-chip-4" descr="/Users/a/MAI/DID/presentation/assets/logos/openai.png">    </p:cNvPr>
+          <p:cNvPr id="169" name="lane-10-chip-2" descr="/Users/a/MAI/DID/presentation/assets/logos/openai.png">    </p:cNvPr>
           <p:cNvPicPr>
             <a:picLocks noChangeAspect="1"/>
           </p:cNvPicPr>
@@ -8006,7 +8082,7 @@
         </p:blipFill>
         <p:spPr>
           <a:xfrm>
-            <a:off x="5116068" y="4632491"/>
+            <a:off x="4567428" y="4632491"/>
             <a:ext cx="155448" cy="155448"/>
           </a:xfrm>
           <a:prstGeom prst="rect">
@@ -8016,13 +8092,13 @@
       </p:pic>
       <p:sp>
         <p:nvSpPr>
-          <p:cNvPr id="168" name="lane-10-chip-5-tile"/>
-          <p:cNvSpPr/>
-          <p:nvPr/>
-        </p:nvSpPr>
-        <p:spPr>
-          <a:xfrm>
-            <a:off x="5349240" y="4591343"/>
+          <p:cNvPr id="170" name="lane-10-chip-3-tile"/>
+          <p:cNvSpPr/>
+          <p:nvPr/>
+        </p:nvSpPr>
+        <p:spPr>
+          <a:xfrm>
+            <a:off x="4800600" y="4591343"/>
             <a:ext cx="237744" cy="237744"/>
           </a:xfrm>
           <a:prstGeom prst="roundRect">
@@ -8038,7 +8114,7 @@
       </p:sp>
       <p:pic>
         <p:nvPicPr>
-          <p:cNvPr id="169" name="lane-10-chip-5" descr="/Users/a/MAI/DID/presentation/assets/logos/claude.png">    </p:cNvPr>
+          <p:cNvPr id="171" name="lane-10-chip-3" descr="/Users/a/MAI/DID/presentation/assets/logos/claude.png">    </p:cNvPr>
           <p:cNvPicPr>
             <a:picLocks noChangeAspect="1"/>
           </p:cNvPicPr>
@@ -8052,7 +8128,7 @@
         </p:blipFill>
         <p:spPr>
           <a:xfrm>
-            <a:off x="5390388" y="4632491"/>
+            <a:off x="4841748" y="4632491"/>
             <a:ext cx="155448" cy="155448"/>
           </a:xfrm>
           <a:prstGeom prst="rect">
@@ -8062,148 +8138,13 @@
       </p:pic>
       <p:sp>
         <p:nvSpPr>
-          <p:cNvPr id="170" name="lane-10-chip-6"/>
-          <p:cNvSpPr txBox="1"/>
-          <p:nvPr/>
-        </p:nvSpPr>
-        <p:spPr>
-          <a:xfrm>
-            <a:off x="5623560" y="4591343"/>
-            <a:ext cx="237744" cy="237744"/>
-          </a:xfrm>
-          <a:prstGeom prst="roundRect">
-            <a:avLst>
-              <a:gd name="adj" fmla="val 15385"/>
-            </a:avLst>
-          </a:prstGeom>
-          <a:solidFill>
-            <a:schemeClr val="accent3"/>
-          </a:solidFill>
-          <a:ln/>
-        </p:spPr>
-        <p:txBody>
-          <a:bodyPr wrap="square" lIns="0" tIns="0" rIns="0" bIns="0" rtlCol="0" anchor="ctr"/>
-          <a:lstStyle/>
-          <a:p>
-            <a:pPr algn="ctr" indent="0" marL="0">
-              <a:buNone/>
-            </a:pPr>
-            <a:r>
-              <a:rPr lang="en-US" sz="1300" b="1" dirty="0">
-                <a:solidFill>
-                  <a:schemeClr val="bg1"/>
-                </a:solidFill>
-              </a:rPr>
-              <a:t>✓</a:t>
-            </a:r>
-            <a:endParaRPr lang="en-US" sz="1300" dirty="0"/>
-          </a:p>
-        </p:txBody>
-      </p:sp>
-      <p:sp>
-        <p:nvSpPr>
-          <p:cNvPr id="171" name="lane-10-result"/>
-          <p:cNvSpPr txBox="1"/>
-          <p:nvPr/>
-        </p:nvSpPr>
-        <p:spPr>
-          <a:xfrm>
-            <a:off x="7132320" y="4570593"/>
-            <a:ext cx="4507992" cy="279244"/>
-          </a:xfrm>
-          <a:prstGeom prst="rect">
-            <a:avLst/>
-          </a:prstGeom>
-          <a:noFill/>
-          <a:ln/>
-        </p:spPr>
-        <p:txBody>
-          <a:bodyPr wrap="none" lIns="0" tIns="0" rIns="0" bIns="0" rtlCol="0" anchor="ctr"/>
-          <a:lstStyle/>
-          <a:p>
-            <a:pPr algn="l" indent="0" marL="0">
-              <a:buNone/>
-            </a:pPr>
-            <a:r>
-              <a:rPr lang="en-US" sz="1400" dirty="0">
-                <a:solidFill>
-                  <a:schemeClr val="tx2"/>
-                </a:solidFill>
-              </a:rPr>
-              <a:t>неверный закон датчика: 1% → 71% образцов</a:t>
-            </a:r>
-            <a:endParaRPr lang="en-US" sz="1400" dirty="0"/>
-          </a:p>
-        </p:txBody>
-      </p:sp>
-      <p:sp>
-        <p:nvSpPr>
-          <p:cNvPr id="172" name="lane-11-rule"/>
-          <p:cNvSpPr/>
-          <p:nvPr/>
-        </p:nvSpPr>
-        <p:spPr>
-          <a:xfrm>
-            <a:off x="548640" y="4849837"/>
-            <a:ext cx="11091672" cy="0"/>
-          </a:xfrm>
-          <a:prstGeom prst="line">
-            <a:avLst/>
-          </a:prstGeom>
-          <a:noFill/>
-          <a:ln w="12700">
-            <a:solidFill>
-              <a:schemeClr val="bg2"/>
-            </a:solidFill>
-            <a:prstDash val="solid"/>
-          </a:ln>
-        </p:spPr>
-      </p:sp>
-      <p:sp>
-        <p:nvSpPr>
-          <p:cNvPr id="173" name="lane-11-name"/>
-          <p:cNvSpPr txBox="1"/>
-          <p:nvPr/>
-        </p:nvSpPr>
-        <p:spPr>
-          <a:xfrm>
-            <a:off x="548640" y="4849837"/>
-            <a:ext cx="3611880" cy="279244"/>
-          </a:xfrm>
-          <a:prstGeom prst="rect">
-            <a:avLst/>
-          </a:prstGeom>
-          <a:noFill/>
-          <a:ln/>
-        </p:spPr>
-        <p:txBody>
-          <a:bodyPr wrap="none" lIns="0" tIns="0" rIns="0" bIns="0" rtlCol="0" anchor="ctr"/>
-          <a:lstStyle/>
-          <a:p>
-            <a:pPr algn="l" indent="0" marL="0">
-              <a:buNone/>
-            </a:pPr>
-            <a:r>
-              <a:rPr lang="en-US" sz="1600" b="1" dirty="0">
-                <a:solidFill>
-                  <a:schemeClr val="tx1"/>
-                </a:solidFill>
-              </a:rPr>
-              <a:t>J1. Быстрая модель-сторож</a:t>
-            </a:r>
-            <a:endParaRPr lang="en-US" sz="1600" dirty="0"/>
-          </a:p>
-        </p:txBody>
-      </p:sp>
-      <p:sp>
-        <p:nvSpPr>
-          <p:cNvPr id="174" name="lane-11-chip-1-tile"/>
-          <p:cNvSpPr/>
-          <p:nvPr/>
-        </p:nvSpPr>
-        <p:spPr>
-          <a:xfrm>
-            <a:off x="4251960" y="4870587"/>
+          <p:cNvPr id="172" name="lane-10-chip-4-tile"/>
+          <p:cNvSpPr/>
+          <p:nvPr/>
+        </p:nvSpPr>
+        <p:spPr>
+          <a:xfrm>
+            <a:off x="5074920" y="4591343"/>
             <a:ext cx="237744" cy="237744"/>
           </a:xfrm>
           <a:prstGeom prst="roundRect">
@@ -8219,7 +8160,7 @@
       </p:sp>
       <p:pic>
         <p:nvPicPr>
-          <p:cNvPr id="175" name="lane-11-chip-1" descr="/Users/a/MAI/DID/presentation/assets/logos/claude.png">    </p:cNvPr>
+          <p:cNvPr id="173" name="lane-10-chip-4" descr="/Users/a/MAI/DID/presentation/assets/logos/openai.png">    </p:cNvPr>
           <p:cNvPicPr>
             <a:picLocks noChangeAspect="1"/>
           </p:cNvPicPr>
@@ -8233,7 +8174,7 @@
         </p:blipFill>
         <p:spPr>
           <a:xfrm>
-            <a:off x="4293108" y="4911735"/>
+            <a:off x="5116068" y="4632491"/>
             <a:ext cx="155448" cy="155448"/>
           </a:xfrm>
           <a:prstGeom prst="rect">
@@ -8243,13 +8184,13 @@
       </p:pic>
       <p:sp>
         <p:nvSpPr>
-          <p:cNvPr id="176" name="lane-11-chip-2-tile"/>
-          <p:cNvSpPr/>
-          <p:nvPr/>
-        </p:nvSpPr>
-        <p:spPr>
-          <a:xfrm>
-            <a:off x="4526280" y="4870587"/>
+          <p:cNvPr id="174" name="lane-10-chip-5-tile"/>
+          <p:cNvSpPr/>
+          <p:nvPr/>
+        </p:nvSpPr>
+        <p:spPr>
+          <a:xfrm>
+            <a:off x="5349240" y="4591343"/>
             <a:ext cx="237744" cy="237744"/>
           </a:xfrm>
           <a:prstGeom prst="roundRect">
@@ -8265,7 +8206,7 @@
       </p:sp>
       <p:pic>
         <p:nvPicPr>
-          <p:cNvPr id="177" name="lane-11-chip-2" descr="/Users/a/MAI/DID/presentation/assets/logos/openai.png">    </p:cNvPr>
+          <p:cNvPr id="175" name="lane-10-chip-5" descr="/Users/a/MAI/DID/presentation/assets/logos/claude.png">    </p:cNvPr>
           <p:cNvPicPr>
             <a:picLocks noChangeAspect="1"/>
           </p:cNvPicPr>
@@ -8279,7 +8220,7 @@
         </p:blipFill>
         <p:spPr>
           <a:xfrm>
-            <a:off x="4567428" y="4911735"/>
+            <a:off x="5390388" y="4632491"/>
             <a:ext cx="155448" cy="155448"/>
           </a:xfrm>
           <a:prstGeom prst="rect">
@@ -8289,13 +8230,148 @@
       </p:pic>
       <p:sp>
         <p:nvSpPr>
-          <p:cNvPr id="178" name="lane-11-chip-3-tile"/>
-          <p:cNvSpPr/>
-          <p:nvPr/>
-        </p:nvSpPr>
-        <p:spPr>
-          <a:xfrm>
-            <a:off x="4800600" y="4870587"/>
+          <p:cNvPr id="176" name="lane-10-chip-6"/>
+          <p:cNvSpPr txBox="1"/>
+          <p:nvPr/>
+        </p:nvSpPr>
+        <p:spPr>
+          <a:xfrm>
+            <a:off x="5623560" y="4591343"/>
+            <a:ext cx="237744" cy="237744"/>
+          </a:xfrm>
+          <a:prstGeom prst="roundRect">
+            <a:avLst>
+              <a:gd name="adj" fmla="val 15385"/>
+            </a:avLst>
+          </a:prstGeom>
+          <a:solidFill>
+            <a:schemeClr val="accent3"/>
+          </a:solidFill>
+          <a:ln/>
+        </p:spPr>
+        <p:txBody>
+          <a:bodyPr wrap="square" lIns="0" tIns="0" rIns="0" bIns="0" rtlCol="0" anchor="ctr"/>
+          <a:lstStyle/>
+          <a:p>
+            <a:pPr algn="ctr" indent="0" marL="0">
+              <a:buNone/>
+            </a:pPr>
+            <a:r>
+              <a:rPr lang="en-US" sz="1300" b="1" dirty="0">
+                <a:solidFill>
+                  <a:schemeClr val="bg1"/>
+                </a:solidFill>
+              </a:rPr>
+              <a:t>✓</a:t>
+            </a:r>
+            <a:endParaRPr lang="en-US" sz="1300" dirty="0"/>
+          </a:p>
+        </p:txBody>
+      </p:sp>
+      <p:sp>
+        <p:nvSpPr>
+          <p:cNvPr id="177" name="lane-10-result"/>
+          <p:cNvSpPr txBox="1"/>
+          <p:nvPr/>
+        </p:nvSpPr>
+        <p:spPr>
+          <a:xfrm>
+            <a:off x="7132320" y="4570593"/>
+            <a:ext cx="4507992" cy="279244"/>
+          </a:xfrm>
+          <a:prstGeom prst="rect">
+            <a:avLst/>
+          </a:prstGeom>
+          <a:noFill/>
+          <a:ln/>
+        </p:spPr>
+        <p:txBody>
+          <a:bodyPr wrap="none" lIns="0" tIns="0" rIns="0" bIns="0" rtlCol="0" anchor="ctr"/>
+          <a:lstStyle/>
+          <a:p>
+            <a:pPr algn="l" indent="0" marL="0">
+              <a:buNone/>
+            </a:pPr>
+            <a:r>
+              <a:rPr lang="en-US" sz="1400" dirty="0">
+                <a:solidFill>
+                  <a:schemeClr val="tx2"/>
+                </a:solidFill>
+              </a:rPr>
+              <a:t>неверный закон датчика: 1% → 71% образцов</a:t>
+            </a:r>
+            <a:endParaRPr lang="en-US" sz="1400" dirty="0"/>
+          </a:p>
+        </p:txBody>
+      </p:sp>
+      <p:sp>
+        <p:nvSpPr>
+          <p:cNvPr id="178" name="lane-11-rule"/>
+          <p:cNvSpPr/>
+          <p:nvPr/>
+        </p:nvSpPr>
+        <p:spPr>
+          <a:xfrm>
+            <a:off x="548640" y="4849837"/>
+            <a:ext cx="11091672" cy="0"/>
+          </a:xfrm>
+          <a:prstGeom prst="line">
+            <a:avLst/>
+          </a:prstGeom>
+          <a:noFill/>
+          <a:ln w="12700">
+            <a:solidFill>
+              <a:schemeClr val="bg2"/>
+            </a:solidFill>
+            <a:prstDash val="solid"/>
+          </a:ln>
+        </p:spPr>
+      </p:sp>
+      <p:sp>
+        <p:nvSpPr>
+          <p:cNvPr id="179" name="lane-11-name"/>
+          <p:cNvSpPr txBox="1"/>
+          <p:nvPr/>
+        </p:nvSpPr>
+        <p:spPr>
+          <a:xfrm>
+            <a:off x="548640" y="4849837"/>
+            <a:ext cx="3611880" cy="279244"/>
+          </a:xfrm>
+          <a:prstGeom prst="rect">
+            <a:avLst/>
+          </a:prstGeom>
+          <a:noFill/>
+          <a:ln/>
+        </p:spPr>
+        <p:txBody>
+          <a:bodyPr wrap="none" lIns="0" tIns="0" rIns="0" bIns="0" rtlCol="0" anchor="ctr"/>
+          <a:lstStyle/>
+          <a:p>
+            <a:pPr algn="l" indent="0" marL="0">
+              <a:buNone/>
+            </a:pPr>
+            <a:r>
+              <a:rPr lang="en-US" sz="1600" b="1" dirty="0">
+                <a:solidFill>
+                  <a:schemeClr val="tx1"/>
+                </a:solidFill>
+              </a:rPr>
+              <a:t>J1. Быстрая модель-сторож</a:t>
+            </a:r>
+            <a:endParaRPr lang="en-US" sz="1600" dirty="0"/>
+          </a:p>
+        </p:txBody>
+      </p:sp>
+      <p:sp>
+        <p:nvSpPr>
+          <p:cNvPr id="180" name="lane-11-chip-1-tile"/>
+          <p:cNvSpPr/>
+          <p:nvPr/>
+        </p:nvSpPr>
+        <p:spPr>
+          <a:xfrm>
+            <a:off x="4251960" y="4870587"/>
             <a:ext cx="237744" cy="237744"/>
           </a:xfrm>
           <a:prstGeom prst="roundRect">
@@ -8311,7 +8387,7 @@
       </p:sp>
       <p:pic>
         <p:nvPicPr>
-          <p:cNvPr id="179" name="lane-11-chip-3" descr="/Users/a/MAI/DID/presentation/assets/logos/claude.png">    </p:cNvPr>
+          <p:cNvPr id="181" name="lane-11-chip-1" descr="/Users/a/MAI/DID/presentation/assets/logos/claude.png">    </p:cNvPr>
           <p:cNvPicPr>
             <a:picLocks noChangeAspect="1"/>
           </p:cNvPicPr>
@@ -8325,7 +8401,7 @@
         </p:blipFill>
         <p:spPr>
           <a:xfrm>
-            <a:off x="4841748" y="4911735"/>
+            <a:off x="4293108" y="4911735"/>
             <a:ext cx="155448" cy="155448"/>
           </a:xfrm>
           <a:prstGeom prst="rect">
@@ -8335,13 +8411,13 @@
       </p:pic>
       <p:sp>
         <p:nvSpPr>
-          <p:cNvPr id="180" name="lane-11-chip-4-tile"/>
-          <p:cNvSpPr/>
-          <p:nvPr/>
-        </p:nvSpPr>
-        <p:spPr>
-          <a:xfrm>
-            <a:off x="5074920" y="4870587"/>
+          <p:cNvPr id="182" name="lane-11-chip-2-tile"/>
+          <p:cNvSpPr/>
+          <p:nvPr/>
+        </p:nvSpPr>
+        <p:spPr>
+          <a:xfrm>
+            <a:off x="4526280" y="4870587"/>
             <a:ext cx="237744" cy="237744"/>
           </a:xfrm>
           <a:prstGeom prst="roundRect">
@@ -8357,7 +8433,7 @@
       </p:sp>
       <p:pic>
         <p:nvPicPr>
-          <p:cNvPr id="181" name="lane-11-chip-4" descr="/Users/a/MAI/DID/presentation/assets/logos/claude.png">    </p:cNvPr>
+          <p:cNvPr id="183" name="lane-11-chip-2" descr="/Users/a/MAI/DID/presentation/assets/logos/openai.png">    </p:cNvPr>
           <p:cNvPicPr>
             <a:picLocks noChangeAspect="1"/>
           </p:cNvPicPr>
@@ -8371,7 +8447,7 @@
         </p:blipFill>
         <p:spPr>
           <a:xfrm>
-            <a:off x="5116068" y="4911735"/>
+            <a:off x="4567428" y="4911735"/>
             <a:ext cx="155448" cy="155448"/>
           </a:xfrm>
           <a:prstGeom prst="rect">
@@ -8381,13 +8457,13 @@
       </p:pic>
       <p:sp>
         <p:nvSpPr>
-          <p:cNvPr id="182" name="lane-11-chip-5-tile"/>
-          <p:cNvSpPr/>
-          <p:nvPr/>
-        </p:nvSpPr>
-        <p:spPr>
-          <a:xfrm>
-            <a:off x="5349240" y="4870587"/>
+          <p:cNvPr id="184" name="lane-11-chip-3-tile"/>
+          <p:cNvSpPr/>
+          <p:nvPr/>
+        </p:nvSpPr>
+        <p:spPr>
+          <a:xfrm>
+            <a:off x="4800600" y="4870587"/>
             <a:ext cx="237744" cy="237744"/>
           </a:xfrm>
           <a:prstGeom prst="roundRect">
@@ -8403,7 +8479,7 @@
       </p:sp>
       <p:pic>
         <p:nvPicPr>
-          <p:cNvPr id="183" name="lane-11-chip-5" descr="/Users/a/MAI/DID/presentation/assets/logos/openai.png">    </p:cNvPr>
+          <p:cNvPr id="185" name="lane-11-chip-3" descr="/Users/a/MAI/DID/presentation/assets/logos/claude.png">    </p:cNvPr>
           <p:cNvPicPr>
             <a:picLocks noChangeAspect="1"/>
           </p:cNvPicPr>
@@ -8417,7 +8493,7 @@
         </p:blipFill>
         <p:spPr>
           <a:xfrm>
-            <a:off x="5390388" y="4911735"/>
+            <a:off x="4841748" y="4911735"/>
             <a:ext cx="155448" cy="155448"/>
           </a:xfrm>
           <a:prstGeom prst="rect">
@@ -8427,148 +8503,13 @@
       </p:pic>
       <p:sp>
         <p:nvSpPr>
-          <p:cNvPr id="184" name="lane-11-chip-6"/>
-          <p:cNvSpPr txBox="1"/>
-          <p:nvPr/>
-        </p:nvSpPr>
-        <p:spPr>
-          <a:xfrm>
-            <a:off x="5623560" y="4870587"/>
-            <a:ext cx="237744" cy="237744"/>
-          </a:xfrm>
-          <a:prstGeom prst="roundRect">
-            <a:avLst>
-              <a:gd name="adj" fmla="val 15385"/>
-            </a:avLst>
-          </a:prstGeom>
-          <a:solidFill>
-            <a:schemeClr val="accent3"/>
-          </a:solidFill>
-          <a:ln/>
-        </p:spPr>
-        <p:txBody>
-          <a:bodyPr wrap="square" lIns="0" tIns="0" rIns="0" bIns="0" rtlCol="0" anchor="ctr"/>
-          <a:lstStyle/>
-          <a:p>
-            <a:pPr algn="ctr" indent="0" marL="0">
-              <a:buNone/>
-            </a:pPr>
-            <a:r>
-              <a:rPr lang="en-US" sz="1300" b="1" dirty="0">
-                <a:solidFill>
-                  <a:schemeClr val="bg1"/>
-                </a:solidFill>
-              </a:rPr>
-              <a:t>✓</a:t>
-            </a:r>
-            <a:endParaRPr lang="en-US" sz="1300" dirty="0"/>
-          </a:p>
-        </p:txBody>
-      </p:sp>
-      <p:sp>
-        <p:nvSpPr>
-          <p:cNvPr id="185" name="lane-11-result"/>
-          <p:cNvSpPr txBox="1"/>
-          <p:nvPr/>
-        </p:nvSpPr>
-        <p:spPr>
-          <a:xfrm>
-            <a:off x="7132320" y="4849837"/>
-            <a:ext cx="4507992" cy="279244"/>
-          </a:xfrm>
-          <a:prstGeom prst="rect">
-            <a:avLst/>
-          </a:prstGeom>
-          <a:noFill/>
-          <a:ln/>
-        </p:spPr>
-        <p:txBody>
-          <a:bodyPr wrap="none" lIns="0" tIns="0" rIns="0" bIns="0" rtlCol="0" anchor="ctr"/>
-          <a:lstStyle/>
-          <a:p>
-            <a:pPr algn="l" indent="0" marL="0">
-              <a:buNone/>
-            </a:pPr>
-            <a:r>
-              <a:rPr lang="en-US" sz="1400" dirty="0">
-                <a:solidFill>
-                  <a:schemeClr val="tx2"/>
-                </a:solidFill>
-              </a:rPr>
-              <a:t>миссия «ровно два образца»: 20 из 20</a:t>
-            </a:r>
-            <a:endParaRPr lang="en-US" sz="1400" dirty="0"/>
-          </a:p>
-        </p:txBody>
-      </p:sp>
-      <p:sp>
-        <p:nvSpPr>
-          <p:cNvPr id="186" name="lane-12-rule"/>
-          <p:cNvSpPr/>
-          <p:nvPr/>
-        </p:nvSpPr>
-        <p:spPr>
-          <a:xfrm>
-            <a:off x="548640" y="5129081"/>
-            <a:ext cx="11091672" cy="0"/>
-          </a:xfrm>
-          <a:prstGeom prst="line">
-            <a:avLst/>
-          </a:prstGeom>
-          <a:noFill/>
-          <a:ln w="12700">
-            <a:solidFill>
-              <a:schemeClr val="bg2"/>
-            </a:solidFill>
-            <a:prstDash val="solid"/>
-          </a:ln>
-        </p:spPr>
-      </p:sp>
-      <p:sp>
-        <p:nvSpPr>
-          <p:cNvPr id="187" name="lane-12-name"/>
-          <p:cNvSpPr txBox="1"/>
-          <p:nvPr/>
-        </p:nvSpPr>
-        <p:spPr>
-          <a:xfrm>
-            <a:off x="548640" y="5129081"/>
-            <a:ext cx="3611880" cy="279244"/>
-          </a:xfrm>
-          <a:prstGeom prst="rect">
-            <a:avLst/>
-          </a:prstGeom>
-          <a:noFill/>
-          <a:ln/>
-        </p:spPr>
-        <p:txBody>
-          <a:bodyPr wrap="none" lIns="0" tIns="0" rIns="0" bIns="0" rtlCol="0" anchor="ctr"/>
-          <a:lstStyle/>
-          <a:p>
-            <a:pPr algn="l" indent="0" marL="0">
-              <a:buNone/>
-            </a:pPr>
-            <a:r>
-              <a:rPr lang="en-US" sz="1600" b="1" dirty="0">
-                <a:solidFill>
-                  <a:schemeClr val="tx1"/>
-                </a:solidFill>
-              </a:rPr>
-              <a:t>M1. Два робота с координацией</a:t>
-            </a:r>
-            <a:endParaRPr lang="en-US" sz="1600" dirty="0"/>
-          </a:p>
-        </p:txBody>
-      </p:sp>
-      <p:sp>
-        <p:nvSpPr>
-          <p:cNvPr id="188" name="lane-12-chip-1-tile"/>
-          <p:cNvSpPr/>
-          <p:nvPr/>
-        </p:nvSpPr>
-        <p:spPr>
-          <a:xfrm>
-            <a:off x="4251960" y="5149830"/>
+          <p:cNvPr id="186" name="lane-11-chip-4-tile"/>
+          <p:cNvSpPr/>
+          <p:nvPr/>
+        </p:nvSpPr>
+        <p:spPr>
+          <a:xfrm>
+            <a:off x="5074920" y="4870587"/>
             <a:ext cx="237744" cy="237744"/>
           </a:xfrm>
           <a:prstGeom prst="roundRect">
@@ -8584,7 +8525,7 @@
       </p:sp>
       <p:pic>
         <p:nvPicPr>
-          <p:cNvPr id="189" name="lane-12-chip-1" descr="/Users/a/MAI/DID/presentation/assets/logos/claude.png">    </p:cNvPr>
+          <p:cNvPr id="187" name="lane-11-chip-4" descr="/Users/a/MAI/DID/presentation/assets/logos/claude.png">    </p:cNvPr>
           <p:cNvPicPr>
             <a:picLocks noChangeAspect="1"/>
           </p:cNvPicPr>
@@ -8598,7 +8539,7 @@
         </p:blipFill>
         <p:spPr>
           <a:xfrm>
-            <a:off x="4293108" y="5190978"/>
+            <a:off x="5116068" y="4911735"/>
             <a:ext cx="155448" cy="155448"/>
           </a:xfrm>
           <a:prstGeom prst="rect">
@@ -8608,13 +8549,13 @@
       </p:pic>
       <p:sp>
         <p:nvSpPr>
-          <p:cNvPr id="190" name="lane-12-chip-2-tile"/>
-          <p:cNvSpPr/>
-          <p:nvPr/>
-        </p:nvSpPr>
-        <p:spPr>
-          <a:xfrm>
-            <a:off x="4526280" y="5149830"/>
+          <p:cNvPr id="188" name="lane-11-chip-5-tile"/>
+          <p:cNvSpPr/>
+          <p:nvPr/>
+        </p:nvSpPr>
+        <p:spPr>
+          <a:xfrm>
+            <a:off x="5349240" y="4870587"/>
             <a:ext cx="237744" cy="237744"/>
           </a:xfrm>
           <a:prstGeom prst="roundRect">
@@ -8630,7 +8571,7 @@
       </p:sp>
       <p:pic>
         <p:nvPicPr>
-          <p:cNvPr id="191" name="lane-12-chip-2" descr="/Users/a/MAI/DID/presentation/assets/logos/openai.png">    </p:cNvPr>
+          <p:cNvPr id="189" name="lane-11-chip-5" descr="/Users/a/MAI/DID/presentation/assets/logos/openai.png">    </p:cNvPr>
           <p:cNvPicPr>
             <a:picLocks noChangeAspect="1"/>
           </p:cNvPicPr>
@@ -8644,7 +8585,7 @@
         </p:blipFill>
         <p:spPr>
           <a:xfrm>
-            <a:off x="4567428" y="5190978"/>
+            <a:off x="5390388" y="4911735"/>
             <a:ext cx="155448" cy="155448"/>
           </a:xfrm>
           <a:prstGeom prst="rect">
@@ -8654,13 +8595,148 @@
       </p:pic>
       <p:sp>
         <p:nvSpPr>
-          <p:cNvPr id="192" name="lane-12-chip-3-tile"/>
-          <p:cNvSpPr/>
-          <p:nvPr/>
-        </p:nvSpPr>
-        <p:spPr>
-          <a:xfrm>
-            <a:off x="4800600" y="5149830"/>
+          <p:cNvPr id="190" name="lane-11-chip-6"/>
+          <p:cNvSpPr txBox="1"/>
+          <p:nvPr/>
+        </p:nvSpPr>
+        <p:spPr>
+          <a:xfrm>
+            <a:off x="5623560" y="4870587"/>
+            <a:ext cx="237744" cy="237744"/>
+          </a:xfrm>
+          <a:prstGeom prst="roundRect">
+            <a:avLst>
+              <a:gd name="adj" fmla="val 15385"/>
+            </a:avLst>
+          </a:prstGeom>
+          <a:solidFill>
+            <a:schemeClr val="accent3"/>
+          </a:solidFill>
+          <a:ln/>
+        </p:spPr>
+        <p:txBody>
+          <a:bodyPr wrap="square" lIns="0" tIns="0" rIns="0" bIns="0" rtlCol="0" anchor="ctr"/>
+          <a:lstStyle/>
+          <a:p>
+            <a:pPr algn="ctr" indent="0" marL="0">
+              <a:buNone/>
+            </a:pPr>
+            <a:r>
+              <a:rPr lang="en-US" sz="1300" b="1" dirty="0">
+                <a:solidFill>
+                  <a:schemeClr val="bg1"/>
+                </a:solidFill>
+              </a:rPr>
+              <a:t>✓</a:t>
+            </a:r>
+            <a:endParaRPr lang="en-US" sz="1300" dirty="0"/>
+          </a:p>
+        </p:txBody>
+      </p:sp>
+      <p:sp>
+        <p:nvSpPr>
+          <p:cNvPr id="191" name="lane-11-result"/>
+          <p:cNvSpPr txBox="1"/>
+          <p:nvPr/>
+        </p:nvSpPr>
+        <p:spPr>
+          <a:xfrm>
+            <a:off x="7132320" y="4849837"/>
+            <a:ext cx="4507992" cy="279244"/>
+          </a:xfrm>
+          <a:prstGeom prst="rect">
+            <a:avLst/>
+          </a:prstGeom>
+          <a:noFill/>
+          <a:ln/>
+        </p:spPr>
+        <p:txBody>
+          <a:bodyPr wrap="none" lIns="0" tIns="0" rIns="0" bIns="0" rtlCol="0" anchor="ctr"/>
+          <a:lstStyle/>
+          <a:p>
+            <a:pPr algn="l" indent="0" marL="0">
+              <a:buNone/>
+            </a:pPr>
+            <a:r>
+              <a:rPr lang="en-US" sz="1400" dirty="0">
+                <a:solidFill>
+                  <a:schemeClr val="tx2"/>
+                </a:solidFill>
+              </a:rPr>
+              <a:t>миссия «ровно два образца»: 20 из 20</a:t>
+            </a:r>
+            <a:endParaRPr lang="en-US" sz="1400" dirty="0"/>
+          </a:p>
+        </p:txBody>
+      </p:sp>
+      <p:sp>
+        <p:nvSpPr>
+          <p:cNvPr id="192" name="lane-12-rule"/>
+          <p:cNvSpPr/>
+          <p:nvPr/>
+        </p:nvSpPr>
+        <p:spPr>
+          <a:xfrm>
+            <a:off x="548640" y="5129081"/>
+            <a:ext cx="11091672" cy="0"/>
+          </a:xfrm>
+          <a:prstGeom prst="line">
+            <a:avLst/>
+          </a:prstGeom>
+          <a:noFill/>
+          <a:ln w="12700">
+            <a:solidFill>
+              <a:schemeClr val="bg2"/>
+            </a:solidFill>
+            <a:prstDash val="solid"/>
+          </a:ln>
+        </p:spPr>
+      </p:sp>
+      <p:sp>
+        <p:nvSpPr>
+          <p:cNvPr id="193" name="lane-12-name"/>
+          <p:cNvSpPr txBox="1"/>
+          <p:nvPr/>
+        </p:nvSpPr>
+        <p:spPr>
+          <a:xfrm>
+            <a:off x="548640" y="5129081"/>
+            <a:ext cx="3611880" cy="279244"/>
+          </a:xfrm>
+          <a:prstGeom prst="rect">
+            <a:avLst/>
+          </a:prstGeom>
+          <a:noFill/>
+          <a:ln/>
+        </p:spPr>
+        <p:txBody>
+          <a:bodyPr wrap="none" lIns="0" tIns="0" rIns="0" bIns="0" rtlCol="0" anchor="ctr"/>
+          <a:lstStyle/>
+          <a:p>
+            <a:pPr algn="l" indent="0" marL="0">
+              <a:buNone/>
+            </a:pPr>
+            <a:r>
+              <a:rPr lang="en-US" sz="1600" b="1" dirty="0">
+                <a:solidFill>
+                  <a:schemeClr val="tx1"/>
+                </a:solidFill>
+              </a:rPr>
+              <a:t>M1. Два робота с координацией</a:t>
+            </a:r>
+            <a:endParaRPr lang="en-US" sz="1600" dirty="0"/>
+          </a:p>
+        </p:txBody>
+      </p:sp>
+      <p:sp>
+        <p:nvSpPr>
+          <p:cNvPr id="194" name="lane-12-chip-1-tile"/>
+          <p:cNvSpPr/>
+          <p:nvPr/>
+        </p:nvSpPr>
+        <p:spPr>
+          <a:xfrm>
+            <a:off x="4251960" y="5149830"/>
             <a:ext cx="237744" cy="237744"/>
           </a:xfrm>
           <a:prstGeom prst="roundRect">
@@ -8676,7 +8752,7 @@
       </p:sp>
       <p:pic>
         <p:nvPicPr>
-          <p:cNvPr id="193" name="lane-12-chip-3" descr="/Users/a/MAI/DID/presentation/assets/logos/claude.png">    </p:cNvPr>
+          <p:cNvPr id="195" name="lane-12-chip-1" descr="/Users/a/MAI/DID/presentation/assets/logos/claude.png">    </p:cNvPr>
           <p:cNvPicPr>
             <a:picLocks noChangeAspect="1"/>
           </p:cNvPicPr>
@@ -8690,7 +8766,7 @@
         </p:blipFill>
         <p:spPr>
           <a:xfrm>
-            <a:off x="4841748" y="5190978"/>
+            <a:off x="4293108" y="5190978"/>
             <a:ext cx="155448" cy="155448"/>
           </a:xfrm>
           <a:prstGeom prst="rect">
@@ -8700,13 +8776,13 @@
       </p:pic>
       <p:sp>
         <p:nvSpPr>
-          <p:cNvPr id="194" name="lane-12-chip-4-tile"/>
-          <p:cNvSpPr/>
-          <p:nvPr/>
-        </p:nvSpPr>
-        <p:spPr>
-          <a:xfrm>
-            <a:off x="5074920" y="5149830"/>
+          <p:cNvPr id="196" name="lane-12-chip-2-tile"/>
+          <p:cNvSpPr/>
+          <p:nvPr/>
+        </p:nvSpPr>
+        <p:spPr>
+          <a:xfrm>
+            <a:off x="4526280" y="5149830"/>
             <a:ext cx="237744" cy="237744"/>
           </a:xfrm>
           <a:prstGeom prst="roundRect">
@@ -8722,7 +8798,7 @@
       </p:sp>
       <p:pic>
         <p:nvPicPr>
-          <p:cNvPr id="195" name="lane-12-chip-4" descr="/Users/a/MAI/DID/presentation/assets/logos/openai.png">    </p:cNvPr>
+          <p:cNvPr id="197" name="lane-12-chip-2" descr="/Users/a/MAI/DID/presentation/assets/logos/openai.png">    </p:cNvPr>
           <p:cNvPicPr>
             <a:picLocks noChangeAspect="1"/>
           </p:cNvPicPr>
@@ -8736,7 +8812,7 @@
         </p:blipFill>
         <p:spPr>
           <a:xfrm>
-            <a:off x="5116068" y="5190978"/>
+            <a:off x="4567428" y="5190978"/>
             <a:ext cx="155448" cy="155448"/>
           </a:xfrm>
           <a:prstGeom prst="rect">
@@ -8746,13 +8822,13 @@
       </p:pic>
       <p:sp>
         <p:nvSpPr>
-          <p:cNvPr id="196" name="lane-12-chip-5-tile"/>
-          <p:cNvSpPr/>
-          <p:nvPr/>
-        </p:nvSpPr>
-        <p:spPr>
-          <a:xfrm>
-            <a:off x="5349240" y="5149830"/>
+          <p:cNvPr id="198" name="lane-12-chip-3-tile"/>
+          <p:cNvSpPr/>
+          <p:nvPr/>
+        </p:nvSpPr>
+        <p:spPr>
+          <a:xfrm>
+            <a:off x="4800600" y="5149830"/>
             <a:ext cx="237744" cy="237744"/>
           </a:xfrm>
           <a:prstGeom prst="roundRect">
@@ -8768,7 +8844,7 @@
       </p:sp>
       <p:pic>
         <p:nvPicPr>
-          <p:cNvPr id="197" name="lane-12-chip-5" descr="/Users/a/MAI/DID/presentation/assets/logos/claude.png">    </p:cNvPr>
+          <p:cNvPr id="199" name="lane-12-chip-3" descr="/Users/a/MAI/DID/presentation/assets/logos/claude.png">    </p:cNvPr>
           <p:cNvPicPr>
             <a:picLocks noChangeAspect="1"/>
           </p:cNvPicPr>
@@ -8782,7 +8858,7 @@
         </p:blipFill>
         <p:spPr>
           <a:xfrm>
-            <a:off x="5390388" y="5190978"/>
+            <a:off x="4841748" y="5190978"/>
             <a:ext cx="155448" cy="155448"/>
           </a:xfrm>
           <a:prstGeom prst="rect">
@@ -8792,148 +8868,13 @@
       </p:pic>
       <p:sp>
         <p:nvSpPr>
-          <p:cNvPr id="198" name="lane-12-chip-6"/>
-          <p:cNvSpPr txBox="1"/>
-          <p:nvPr/>
-        </p:nvSpPr>
-        <p:spPr>
-          <a:xfrm>
-            <a:off x="5623560" y="5149830"/>
-            <a:ext cx="237744" cy="237744"/>
-          </a:xfrm>
-          <a:prstGeom prst="roundRect">
-            <a:avLst>
-              <a:gd name="adj" fmla="val 15385"/>
-            </a:avLst>
-          </a:prstGeom>
-          <a:solidFill>
-            <a:schemeClr val="accent3"/>
-          </a:solidFill>
-          <a:ln/>
-        </p:spPr>
-        <p:txBody>
-          <a:bodyPr wrap="square" lIns="0" tIns="0" rIns="0" bIns="0" rtlCol="0" anchor="ctr"/>
-          <a:lstStyle/>
-          <a:p>
-            <a:pPr algn="ctr" indent="0" marL="0">
-              <a:buNone/>
-            </a:pPr>
-            <a:r>
-              <a:rPr lang="en-US" sz="1300" b="1" dirty="0">
-                <a:solidFill>
-                  <a:schemeClr val="bg1"/>
-                </a:solidFill>
-              </a:rPr>
-              <a:t>✓</a:t>
-            </a:r>
-            <a:endParaRPr lang="en-US" sz="1300" dirty="0"/>
-          </a:p>
-        </p:txBody>
-      </p:sp>
-      <p:sp>
-        <p:nvSpPr>
-          <p:cNvPr id="199" name="lane-12-result"/>
-          <p:cNvSpPr txBox="1"/>
-          <p:nvPr/>
-        </p:nvSpPr>
-        <p:spPr>
-          <a:xfrm>
-            <a:off x="7132320" y="5129081"/>
-            <a:ext cx="4507992" cy="279244"/>
-          </a:xfrm>
-          <a:prstGeom prst="rect">
-            <a:avLst/>
-          </a:prstGeom>
-          <a:noFill/>
-          <a:ln/>
-        </p:spPr>
-        <p:txBody>
-          <a:bodyPr wrap="none" lIns="0" tIns="0" rIns="0" bIns="0" rtlCol="0" anchor="ctr"/>
-          <a:lstStyle/>
-          <a:p>
-            <a:pPr algn="l" indent="0" marL="0">
-              <a:buNone/>
-            </a:pPr>
-            <a:r>
-              <a:rPr lang="en-US" sz="1400" dirty="0">
-                <a:solidFill>
-                  <a:schemeClr val="tx2"/>
-                </a:solidFill>
-              </a:rPr>
-              <a:t>прогон короче на 26 с, заряда на четверть меньше</a:t>
-            </a:r>
-            <a:endParaRPr lang="en-US" sz="1400" dirty="0"/>
-          </a:p>
-        </p:txBody>
-      </p:sp>
-      <p:sp>
-        <p:nvSpPr>
-          <p:cNvPr id="200" name="lane-13-rule"/>
-          <p:cNvSpPr/>
-          <p:nvPr/>
-        </p:nvSpPr>
-        <p:spPr>
-          <a:xfrm>
-            <a:off x="548640" y="5408324"/>
-            <a:ext cx="11091672" cy="0"/>
-          </a:xfrm>
-          <a:prstGeom prst="line">
-            <a:avLst/>
-          </a:prstGeom>
-          <a:noFill/>
-          <a:ln w="12700">
-            <a:solidFill>
-              <a:schemeClr val="bg2"/>
-            </a:solidFill>
-            <a:prstDash val="solid"/>
-          </a:ln>
-        </p:spPr>
-      </p:sp>
-      <p:sp>
-        <p:nvSpPr>
-          <p:cNvPr id="201" name="lane-13-name"/>
-          <p:cNvSpPr txBox="1"/>
-          <p:nvPr/>
-        </p:nvSpPr>
-        <p:spPr>
-          <a:xfrm>
-            <a:off x="548640" y="5408324"/>
-            <a:ext cx="3611880" cy="279244"/>
-          </a:xfrm>
-          <a:prstGeom prst="rect">
-            <a:avLst/>
-          </a:prstGeom>
-          <a:noFill/>
-          <a:ln/>
-        </p:spPr>
-        <p:txBody>
-          <a:bodyPr wrap="none" lIns="0" tIns="0" rIns="0" bIns="0" rtlCol="0" anchor="ctr"/>
-          <a:lstStyle/>
-          <a:p>
-            <a:pPr algn="l" indent="0" marL="0">
-              <a:buNone/>
-            </a:pPr>
-            <a:r>
-              <a:rPr lang="en-US" sz="1600" b="1" dirty="0">
-                <a:solidFill>
-                  <a:schemeClr val="tx1"/>
-                </a:solidFill>
-              </a:rPr>
-              <a:t>F2. SLAM вместо готовой карты</a:t>
-            </a:r>
-            <a:endParaRPr lang="en-US" sz="1600" dirty="0"/>
-          </a:p>
-        </p:txBody>
-      </p:sp>
-      <p:sp>
-        <p:nvSpPr>
-          <p:cNvPr id="202" name="lane-13-chip-1-tile"/>
-          <p:cNvSpPr/>
-          <p:nvPr/>
-        </p:nvSpPr>
-        <p:spPr>
-          <a:xfrm>
-            <a:off x="4251960" y="5429074"/>
+          <p:cNvPr id="200" name="lane-12-chip-4-tile"/>
+          <p:cNvSpPr/>
+          <p:nvPr/>
+        </p:nvSpPr>
+        <p:spPr>
+          <a:xfrm>
+            <a:off x="5074920" y="5149830"/>
             <a:ext cx="237744" cy="237744"/>
           </a:xfrm>
           <a:prstGeom prst="roundRect">
@@ -8949,7 +8890,7 @@
       </p:sp>
       <p:pic>
         <p:nvPicPr>
-          <p:cNvPr id="203" name="lane-13-chip-1" descr="/Users/a/MAI/DID/presentation/assets/logos/gemini.png">    </p:cNvPr>
+          <p:cNvPr id="201" name="lane-12-chip-4" descr="/Users/a/MAI/DID/presentation/assets/logos/openai.png">    </p:cNvPr>
           <p:cNvPicPr>
             <a:picLocks noChangeAspect="1"/>
           </p:cNvPicPr>
@@ -8963,7 +8904,7 @@
         </p:blipFill>
         <p:spPr>
           <a:xfrm>
-            <a:off x="4293108" y="5470222"/>
+            <a:off x="5116068" y="5190978"/>
             <a:ext cx="155448" cy="155448"/>
           </a:xfrm>
           <a:prstGeom prst="rect">
@@ -8973,13 +8914,13 @@
       </p:pic>
       <p:sp>
         <p:nvSpPr>
-          <p:cNvPr id="204" name="lane-13-chip-2-tile"/>
-          <p:cNvSpPr/>
-          <p:nvPr/>
-        </p:nvSpPr>
-        <p:spPr>
-          <a:xfrm>
-            <a:off x="4526280" y="5429074"/>
+          <p:cNvPr id="202" name="lane-12-chip-5-tile"/>
+          <p:cNvSpPr/>
+          <p:nvPr/>
+        </p:nvSpPr>
+        <p:spPr>
+          <a:xfrm>
+            <a:off x="5349240" y="5149830"/>
             <a:ext cx="237744" cy="237744"/>
           </a:xfrm>
           <a:prstGeom prst="roundRect">
@@ -8995,7 +8936,7 @@
       </p:sp>
       <p:pic>
         <p:nvPicPr>
-          <p:cNvPr id="205" name="lane-13-chip-2" descr="/Users/a/MAI/DID/presentation/assets/logos/claude.png">    </p:cNvPr>
+          <p:cNvPr id="203" name="lane-12-chip-5" descr="/Users/a/MAI/DID/presentation/assets/logos/claude.png">    </p:cNvPr>
           <p:cNvPicPr>
             <a:picLocks noChangeAspect="1"/>
           </p:cNvPicPr>
@@ -9009,7 +8950,7 @@
         </p:blipFill>
         <p:spPr>
           <a:xfrm>
-            <a:off x="4567428" y="5470222"/>
+            <a:off x="5390388" y="5190978"/>
             <a:ext cx="155448" cy="155448"/>
           </a:xfrm>
           <a:prstGeom prst="rect">
@@ -9019,13 +8960,148 @@
       </p:pic>
       <p:sp>
         <p:nvSpPr>
-          <p:cNvPr id="206" name="lane-13-chip-3-tile"/>
-          <p:cNvSpPr/>
-          <p:nvPr/>
-        </p:nvSpPr>
-        <p:spPr>
-          <a:xfrm>
-            <a:off x="4800600" y="5429074"/>
+          <p:cNvPr id="204" name="lane-12-chip-6"/>
+          <p:cNvSpPr txBox="1"/>
+          <p:nvPr/>
+        </p:nvSpPr>
+        <p:spPr>
+          <a:xfrm>
+            <a:off x="5623560" y="5149830"/>
+            <a:ext cx="237744" cy="237744"/>
+          </a:xfrm>
+          <a:prstGeom prst="roundRect">
+            <a:avLst>
+              <a:gd name="adj" fmla="val 15385"/>
+            </a:avLst>
+          </a:prstGeom>
+          <a:solidFill>
+            <a:schemeClr val="accent3"/>
+          </a:solidFill>
+          <a:ln/>
+        </p:spPr>
+        <p:txBody>
+          <a:bodyPr wrap="square" lIns="0" tIns="0" rIns="0" bIns="0" rtlCol="0" anchor="ctr"/>
+          <a:lstStyle/>
+          <a:p>
+            <a:pPr algn="ctr" indent="0" marL="0">
+              <a:buNone/>
+            </a:pPr>
+            <a:r>
+              <a:rPr lang="en-US" sz="1300" b="1" dirty="0">
+                <a:solidFill>
+                  <a:schemeClr val="bg1"/>
+                </a:solidFill>
+              </a:rPr>
+              <a:t>✓</a:t>
+            </a:r>
+            <a:endParaRPr lang="en-US" sz="1300" dirty="0"/>
+          </a:p>
+        </p:txBody>
+      </p:sp>
+      <p:sp>
+        <p:nvSpPr>
+          <p:cNvPr id="205" name="lane-12-result"/>
+          <p:cNvSpPr txBox="1"/>
+          <p:nvPr/>
+        </p:nvSpPr>
+        <p:spPr>
+          <a:xfrm>
+            <a:off x="7132320" y="5129081"/>
+            <a:ext cx="4507992" cy="279244"/>
+          </a:xfrm>
+          <a:prstGeom prst="rect">
+            <a:avLst/>
+          </a:prstGeom>
+          <a:noFill/>
+          <a:ln/>
+        </p:spPr>
+        <p:txBody>
+          <a:bodyPr wrap="none" lIns="0" tIns="0" rIns="0" bIns="0" rtlCol="0" anchor="ctr"/>
+          <a:lstStyle/>
+          <a:p>
+            <a:pPr algn="l" indent="0" marL="0">
+              <a:buNone/>
+            </a:pPr>
+            <a:r>
+              <a:rPr lang="en-US" sz="1400" dirty="0">
+                <a:solidFill>
+                  <a:schemeClr val="tx2"/>
+                </a:solidFill>
+              </a:rPr>
+              <a:t>прогон короче на 26 с, заряда на четверть меньше</a:t>
+            </a:r>
+            <a:endParaRPr lang="en-US" sz="1400" dirty="0"/>
+          </a:p>
+        </p:txBody>
+      </p:sp>
+      <p:sp>
+        <p:nvSpPr>
+          <p:cNvPr id="206" name="lane-13-rule"/>
+          <p:cNvSpPr/>
+          <p:nvPr/>
+        </p:nvSpPr>
+        <p:spPr>
+          <a:xfrm>
+            <a:off x="548640" y="5408324"/>
+            <a:ext cx="11091672" cy="0"/>
+          </a:xfrm>
+          <a:prstGeom prst="line">
+            <a:avLst/>
+          </a:prstGeom>
+          <a:noFill/>
+          <a:ln w="12700">
+            <a:solidFill>
+              <a:schemeClr val="bg2"/>
+            </a:solidFill>
+            <a:prstDash val="solid"/>
+          </a:ln>
+        </p:spPr>
+      </p:sp>
+      <p:sp>
+        <p:nvSpPr>
+          <p:cNvPr id="207" name="lane-13-name"/>
+          <p:cNvSpPr txBox="1"/>
+          <p:nvPr/>
+        </p:nvSpPr>
+        <p:spPr>
+          <a:xfrm>
+            <a:off x="548640" y="5408324"/>
+            <a:ext cx="3611880" cy="279244"/>
+          </a:xfrm>
+          <a:prstGeom prst="rect">
+            <a:avLst/>
+          </a:prstGeom>
+          <a:noFill/>
+          <a:ln/>
+        </p:spPr>
+        <p:txBody>
+          <a:bodyPr wrap="none" lIns="0" tIns="0" rIns="0" bIns="0" rtlCol="0" anchor="ctr"/>
+          <a:lstStyle/>
+          <a:p>
+            <a:pPr algn="l" indent="0" marL="0">
+              <a:buNone/>
+            </a:pPr>
+            <a:r>
+              <a:rPr lang="en-US" sz="1600" b="1" dirty="0">
+                <a:solidFill>
+                  <a:schemeClr val="tx1"/>
+                </a:solidFill>
+              </a:rPr>
+              <a:t>F2. SLAM вместо готовой карты</a:t>
+            </a:r>
+            <a:endParaRPr lang="en-US" sz="1600" dirty="0"/>
+          </a:p>
+        </p:txBody>
+      </p:sp>
+      <p:sp>
+        <p:nvSpPr>
+          <p:cNvPr id="208" name="lane-13-chip-1-tile"/>
+          <p:cNvSpPr/>
+          <p:nvPr/>
+        </p:nvSpPr>
+        <p:spPr>
+          <a:xfrm>
+            <a:off x="4251960" y="5429074"/>
             <a:ext cx="237744" cy="237744"/>
           </a:xfrm>
           <a:prstGeom prst="roundRect">
@@ -9041,7 +9117,7 @@
       </p:sp>
       <p:pic>
         <p:nvPicPr>
-          <p:cNvPr id="207" name="lane-13-chip-3" descr="/Users/a/MAI/DID/presentation/assets/logos/openai.png">    </p:cNvPr>
+          <p:cNvPr id="209" name="lane-13-chip-1" descr="/Users/a/MAI/DID/presentation/assets/logos/gemini.png">    </p:cNvPr>
           <p:cNvPicPr>
             <a:picLocks noChangeAspect="1"/>
           </p:cNvPicPr>
@@ -9055,7 +9131,7 @@
         </p:blipFill>
         <p:spPr>
           <a:xfrm>
-            <a:off x="4841748" y="5470222"/>
+            <a:off x="4293108" y="5470222"/>
             <a:ext cx="155448" cy="155448"/>
           </a:xfrm>
           <a:prstGeom prst="rect">
@@ -9065,13 +9141,13 @@
       </p:pic>
       <p:sp>
         <p:nvSpPr>
-          <p:cNvPr id="208" name="lane-13-chip-4-tile"/>
-          <p:cNvSpPr/>
-          <p:nvPr/>
-        </p:nvSpPr>
-        <p:spPr>
-          <a:xfrm>
-            <a:off x="5074920" y="5429074"/>
+          <p:cNvPr id="210" name="lane-13-chip-2-tile"/>
+          <p:cNvSpPr/>
+          <p:nvPr/>
+        </p:nvSpPr>
+        <p:spPr>
+          <a:xfrm>
+            <a:off x="4526280" y="5429074"/>
             <a:ext cx="237744" cy="237744"/>
           </a:xfrm>
           <a:prstGeom prst="roundRect">
@@ -9087,7 +9163,7 @@
       </p:sp>
       <p:pic>
         <p:nvPicPr>
-          <p:cNvPr id="209" name="lane-13-chip-4" descr="/Users/a/MAI/DID/presentation/assets/logos/claude.png">    </p:cNvPr>
+          <p:cNvPr id="211" name="lane-13-chip-2" descr="/Users/a/MAI/DID/presentation/assets/logos/claude.png">    </p:cNvPr>
           <p:cNvPicPr>
             <a:picLocks noChangeAspect="1"/>
           </p:cNvPicPr>
@@ -9101,7 +9177,7 @@
         </p:blipFill>
         <p:spPr>
           <a:xfrm>
-            <a:off x="5116068" y="5470222"/>
+            <a:off x="4567428" y="5470222"/>
             <a:ext cx="155448" cy="155448"/>
           </a:xfrm>
           <a:prstGeom prst="rect">
@@ -9111,13 +9187,13 @@
       </p:pic>
       <p:sp>
         <p:nvSpPr>
-          <p:cNvPr id="210" name="lane-13-chip-5-tile"/>
-          <p:cNvSpPr/>
-          <p:nvPr/>
-        </p:nvSpPr>
-        <p:spPr>
-          <a:xfrm>
-            <a:off x="5349240" y="5429074"/>
+          <p:cNvPr id="212" name="lane-13-chip-3-tile"/>
+          <p:cNvSpPr/>
+          <p:nvPr/>
+        </p:nvSpPr>
+        <p:spPr>
+          <a:xfrm>
+            <a:off x="4800600" y="5429074"/>
             <a:ext cx="237744" cy="237744"/>
           </a:xfrm>
           <a:prstGeom prst="roundRect">
@@ -9133,7 +9209,7 @@
       </p:sp>
       <p:pic>
         <p:nvPicPr>
-          <p:cNvPr id="211" name="lane-13-chip-5" descr="/Users/a/MAI/DID/presentation/assets/logos/openai.png">    </p:cNvPr>
+          <p:cNvPr id="213" name="lane-13-chip-3" descr="/Users/a/MAI/DID/presentation/assets/logos/openai.png">    </p:cNvPr>
           <p:cNvPicPr>
             <a:picLocks noChangeAspect="1"/>
           </p:cNvPicPr>
@@ -9147,7 +9223,7 @@
         </p:blipFill>
         <p:spPr>
           <a:xfrm>
-            <a:off x="5390388" y="5470222"/>
+            <a:off x="4841748" y="5470222"/>
             <a:ext cx="155448" cy="155448"/>
           </a:xfrm>
           <a:prstGeom prst="rect">
@@ -9157,13 +9233,13 @@
       </p:pic>
       <p:sp>
         <p:nvSpPr>
-          <p:cNvPr id="212" name="lane-13-chip-6-tile"/>
-          <p:cNvSpPr/>
-          <p:nvPr/>
-        </p:nvSpPr>
-        <p:spPr>
-          <a:xfrm>
-            <a:off x="5623560" y="5429074"/>
+          <p:cNvPr id="214" name="lane-13-chip-4-tile"/>
+          <p:cNvSpPr/>
+          <p:nvPr/>
+        </p:nvSpPr>
+        <p:spPr>
+          <a:xfrm>
+            <a:off x="5074920" y="5429074"/>
             <a:ext cx="237744" cy="237744"/>
           </a:xfrm>
           <a:prstGeom prst="roundRect">
@@ -9179,7 +9255,7 @@
       </p:sp>
       <p:pic>
         <p:nvPicPr>
-          <p:cNvPr id="213" name="lane-13-chip-6" descr="/Users/a/MAI/DID/presentation/assets/logos/claude.png">    </p:cNvPr>
+          <p:cNvPr id="215" name="lane-13-chip-4" descr="/Users/a/MAI/DID/presentation/assets/logos/claude.png">    </p:cNvPr>
           <p:cNvPicPr>
             <a:picLocks noChangeAspect="1"/>
           </p:cNvPicPr>
@@ -9193,7 +9269,7 @@
         </p:blipFill>
         <p:spPr>
           <a:xfrm>
-            <a:off x="5664708" y="5470222"/>
+            <a:off x="5116068" y="5470222"/>
             <a:ext cx="155448" cy="155448"/>
           </a:xfrm>
           <a:prstGeom prst="rect">
@@ -9203,13 +9279,13 @@
       </p:pic>
       <p:sp>
         <p:nvSpPr>
-          <p:cNvPr id="214" name="lane-13-chip-7-tile"/>
-          <p:cNvSpPr/>
-          <p:nvPr/>
-        </p:nvSpPr>
-        <p:spPr>
-          <a:xfrm>
-            <a:off x="5897880" y="5429074"/>
+          <p:cNvPr id="216" name="lane-13-chip-5-tile"/>
+          <p:cNvSpPr/>
+          <p:nvPr/>
+        </p:nvSpPr>
+        <p:spPr>
+          <a:xfrm>
+            <a:off x="5349240" y="5429074"/>
             <a:ext cx="237744" cy="237744"/>
           </a:xfrm>
           <a:prstGeom prst="roundRect">
@@ -9225,7 +9301,7 @@
       </p:sp>
       <p:pic>
         <p:nvPicPr>
-          <p:cNvPr id="215" name="lane-13-chip-7" descr="/Users/a/MAI/DID/presentation/assets/logos/openai.png">    </p:cNvPr>
+          <p:cNvPr id="217" name="lane-13-chip-5" descr="/Users/a/MAI/DID/presentation/assets/logos/openai.png">    </p:cNvPr>
           <p:cNvPicPr>
             <a:picLocks noChangeAspect="1"/>
           </p:cNvPicPr>
@@ -9239,6 +9315,98 @@
         </p:blipFill>
         <p:spPr>
           <a:xfrm>
+            <a:off x="5390388" y="5470222"/>
+            <a:ext cx="155448" cy="155448"/>
+          </a:xfrm>
+          <a:prstGeom prst="rect">
+            <a:avLst/>
+          </a:prstGeom>
+        </p:spPr>
+      </p:pic>
+      <p:sp>
+        <p:nvSpPr>
+          <p:cNvPr id="218" name="lane-13-chip-6-tile"/>
+          <p:cNvSpPr/>
+          <p:nvPr/>
+        </p:nvSpPr>
+        <p:spPr>
+          <a:xfrm>
+            <a:off x="5623560" y="5429074"/>
+            <a:ext cx="237744" cy="237744"/>
+          </a:xfrm>
+          <a:prstGeom prst="roundRect">
+            <a:avLst>
+              <a:gd name="adj" fmla="val 15385"/>
+            </a:avLst>
+          </a:prstGeom>
+          <a:solidFill>
+            <a:schemeClr val="bg2"/>
+          </a:solidFill>
+          <a:ln/>
+        </p:spPr>
+      </p:sp>
+      <p:pic>
+        <p:nvPicPr>
+          <p:cNvPr id="219" name="lane-13-chip-6" descr="/Users/a/MAI/DID/presentation/assets/logos/claude.png">    </p:cNvPr>
+          <p:cNvPicPr>
+            <a:picLocks noChangeAspect="1"/>
+          </p:cNvPicPr>
+          <p:nvPr/>
+        </p:nvPicPr>
+        <p:blipFill>
+          <a:blip r:embed="rId76"/>
+          <a:stretch>
+            <a:fillRect/>
+          </a:stretch>
+        </p:blipFill>
+        <p:spPr>
+          <a:xfrm>
+            <a:off x="5664708" y="5470222"/>
+            <a:ext cx="155448" cy="155448"/>
+          </a:xfrm>
+          <a:prstGeom prst="rect">
+            <a:avLst/>
+          </a:prstGeom>
+        </p:spPr>
+      </p:pic>
+      <p:sp>
+        <p:nvSpPr>
+          <p:cNvPr id="220" name="lane-13-chip-7-tile"/>
+          <p:cNvSpPr/>
+          <p:nvPr/>
+        </p:nvSpPr>
+        <p:spPr>
+          <a:xfrm>
+            <a:off x="5897880" y="5429074"/>
+            <a:ext cx="237744" cy="237744"/>
+          </a:xfrm>
+          <a:prstGeom prst="roundRect">
+            <a:avLst>
+              <a:gd name="adj" fmla="val 15385"/>
+            </a:avLst>
+          </a:prstGeom>
+          <a:solidFill>
+            <a:schemeClr val="bg2"/>
+          </a:solidFill>
+          <a:ln/>
+        </p:spPr>
+      </p:sp>
+      <p:pic>
+        <p:nvPicPr>
+          <p:cNvPr id="221" name="lane-13-chip-7" descr="/Users/a/MAI/DID/presentation/assets/logos/openai.png">    </p:cNvPr>
+          <p:cNvPicPr>
+            <a:picLocks noChangeAspect="1"/>
+          </p:cNvPicPr>
+          <p:nvPr/>
+        </p:nvPicPr>
+        <p:blipFill>
+          <a:blip r:embed="rId77"/>
+          <a:stretch>
+            <a:fillRect/>
+          </a:stretch>
+        </p:blipFill>
+        <p:spPr>
+          <a:xfrm>
             <a:off x="5939028" y="5470222"/>
             <a:ext cx="155448" cy="155448"/>
           </a:xfrm>
@@ -9249,7 +9417,7 @@
       </p:pic>
       <p:sp>
         <p:nvSpPr>
-          <p:cNvPr id="216" name="lane-13-chip-8"/>
+          <p:cNvPr id="222" name="lane-13-chip-8"/>
           <p:cNvSpPr txBox="1"/>
           <p:nvPr/>
         </p:nvSpPr>
@@ -9289,7 +9457,7 @@
       </p:sp>
       <p:sp>
         <p:nvSpPr>
-          <p:cNvPr id="217" name="lane-13-result"/>
+          <p:cNvPr id="223" name="lane-13-result"/>
           <p:cNvSpPr txBox="1"/>
           <p:nvPr/>
         </p:nvSpPr>
@@ -9325,7 +9493,7 @@
       </p:sp>
       <p:sp>
         <p:nvSpPr>
-          <p:cNvPr id="218" name="conclusion-card"/>
+          <p:cNvPr id="224" name="conclusion-card"/>
           <p:cNvSpPr/>
           <p:nvPr/>
         </p:nvSpPr>
@@ -9347,7 +9515,7 @@
       </p:sp>
       <p:sp>
         <p:nvSpPr>
-          <p:cNvPr id="219" name="conclusion-text"/>
+          <p:cNvPr id="225" name="conclusion-text"/>
           <p:cNvSpPr txBox="1"/>
           <p:nvPr/>
         </p:nvSpPr>

--- a/presentation/ai_process.pptx
+++ b/presentation/ai_process.pptx
@@ -108,7 +108,7 @@
   <p:extLst>
     <p:ext uri="{521415D9-36F7-43E2-AB2F-B90AF26B5E84}">
       <p14:sectionLst xmlns:p14="http://schemas.microsoft.com/office/powerpoint/2010/main">
-        <p14:section name="Как работали" id="{8e2b27e4-7454-4044-d58b-f88d3ea2e44c}">
+        <p14:section name="Как работали" id="{530d199d-a576-2e27-d80b-6f4d5eae92f7}">
           <p14:sldIdLst>
             <p14:sldId id="256"/>
             <p14:sldId id="257"/>
@@ -518,7 +518,7 @@
           <a:p>
             <a:r>
               <a:rPr lang="en-US" dirty="0"/>
-              <a:t>С ИИ-агентами мы работали как в лаборатории: человек ею руководит, агенты в ней работают. Человек задаёт цель, роли и ограничения и принимает решения на развилках. Ведущий агент ведёт план, пишет задания остальным, сводит их работу в общий код и сам пересчитывает числа. Исследователи читают литературу и кода не пишут. Инженеры пишут код и ставят опыты, каждый в своей копии кода. Отдельная модель-ревьюер читает каждую работу и ищет ошибки. Советников зовём редко, на развилках. Каждое исследование идёт по одному кругу: вопрос и гипотеза, задание, код и опыт, независимое ревью, исправления, вливание, пересчёт чисел. Больше 85 поручений агентам и 32 круга ревью: 19 работ из 20 ревью вернуло на исправления. Агенты работали часами без участия человека, но направление, роли и приоритеты задавал человек.</a:t>
+              <a:t>С ИИ-агентами мы работали как в лаборатории: человек ею руководит, агенты в ней работают. Человек задаёт цель, роли и ограничения и принимает решения на развилках. Ведущий агент ведёт план, пишет задания остальным, сводит их работу в общий код и сам пересчитывает числа. Исследователи читают литературу и кода не пишут. Инженеры пишут код и ставят опыты, каждый в своей копии кода. Отдельная модель-ревьюер читает каждую работу и ищет ошибки. Советников зовём редко, на развилках. Каждое исследование идёт по одному кругу: вопрос и гипотеза, задание, код и опыт, независимое ревью, исправления, вливание, пересчёт чисел. Больше 90 поручений агентам и 34 круга ревью: 19 работ из 20 ревью вернуло на исправления. Агенты работали часами без участия человека, но направление, роли и приоритеты задавал человек.</a:t>
             </a:r>
             <a:endParaRPr lang="en-US" dirty="0"/>
           </a:p>
@@ -3186,7 +3186,7 @@
                   <a:schemeClr val="tx1"/>
                 </a:solidFill>
               </a:rPr>
-              <a:t>85+</a:t>
+              <a:t>90+</a:t>
             </a:r>
             <a:endParaRPr lang="en-US" sz="2800" dirty="0"/>
           </a:p>
@@ -3374,7 +3374,7 @@
                   <a:schemeClr val="tx1"/>
                 </a:solidFill>
               </a:rPr>
-              <a:t>260</a:t>
+              <a:t>279</a:t>
             </a:r>
             <a:endParaRPr lang="en-US" sz="2800" dirty="0"/>
           </a:p>
@@ -3446,7 +3446,7 @@
                   <a:schemeClr val="tx1"/>
                 </a:solidFill>
               </a:rPr>
-              <a:t>982</a:t>
+              <a:t>1022</a:t>
             </a:r>
             <a:endParaRPr lang="en-US" sz="2800" dirty="0"/>
           </a:p>
@@ -3518,7 +3518,7 @@
                   <a:schemeClr val="tx1"/>
                 </a:solidFill>
               </a:rPr>
-              <a:t>24 000+</a:t>
+              <a:t>30 000+</a:t>
             </a:r>
             <a:endParaRPr lang="en-US" sz="2800" dirty="0"/>
           </a:p>

--- a/presentation/ai_process.pptx
+++ b/presentation/ai_process.pptx
@@ -108,7 +108,7 @@
   <p:extLst>
     <p:ext uri="{521415D9-36F7-43E2-AB2F-B90AF26B5E84}">
       <p14:sectionLst xmlns:p14="http://schemas.microsoft.com/office/powerpoint/2010/main">
-        <p14:section name="Как работали" id="{530d199d-a576-2e27-d80b-6f4d5eae92f7}">
+        <p14:section name="Как работали" id="{33106f19-2a3b-d83b-fed0-99d28b4f199b}">
           <p14:sldIdLst>
             <p14:sldId id="256"/>
             <p14:sldId id="257"/>
@@ -3374,7 +3374,7 @@
                   <a:schemeClr val="tx1"/>
                 </a:solidFill>
               </a:rPr>
-              <a:t>279</a:t>
+              <a:t>323</a:t>
             </a:r>
             <a:endParaRPr lang="en-US" sz="2800" dirty="0"/>
           </a:p>
@@ -4060,7 +4060,7 @@
         <p:spPr>
           <a:xfrm>
             <a:off x="548640" y="2057400"/>
-            <a:ext cx="3611880" cy="279244"/>
+            <a:ext cx="3611880" cy="302514"/>
           </a:xfrm>
           <a:prstGeom prst="rect">
             <a:avLst/>
@@ -4095,7 +4095,7 @@
         </p:nvSpPr>
         <p:spPr>
           <a:xfrm>
-            <a:off x="4251960" y="2078150"/>
+            <a:off x="4251960" y="2089785"/>
             <a:ext cx="237744" cy="237744"/>
           </a:xfrm>
           <a:prstGeom prst="roundRect">
@@ -4125,7 +4125,7 @@
         </p:blipFill>
         <p:spPr>
           <a:xfrm>
-            <a:off x="4293108" y="2119298"/>
+            <a:off x="4293108" y="2130933"/>
             <a:ext cx="155448" cy="155448"/>
           </a:xfrm>
           <a:prstGeom prst="rect">
@@ -4141,7 +4141,7 @@
         </p:nvSpPr>
         <p:spPr>
           <a:xfrm>
-            <a:off x="4526280" y="2078150"/>
+            <a:off x="4526280" y="2089785"/>
             <a:ext cx="237744" cy="237744"/>
           </a:xfrm>
           <a:prstGeom prst="roundRect">
@@ -4171,7 +4171,7 @@
         </p:blipFill>
         <p:spPr>
           <a:xfrm>
-            <a:off x="4567428" y="2119298"/>
+            <a:off x="4567428" y="2130933"/>
             <a:ext cx="155448" cy="155448"/>
           </a:xfrm>
           <a:prstGeom prst="rect">
@@ -4187,7 +4187,7 @@
         </p:nvSpPr>
         <p:spPr>
           <a:xfrm>
-            <a:off x="4800600" y="2078150"/>
+            <a:off x="4800600" y="2089785"/>
             <a:ext cx="237744" cy="237744"/>
           </a:xfrm>
           <a:prstGeom prst="roundRect">
@@ -4217,7 +4217,7 @@
         </p:blipFill>
         <p:spPr>
           <a:xfrm>
-            <a:off x="4841748" y="2119298"/>
+            <a:off x="4841748" y="2130933"/>
             <a:ext cx="155448" cy="155448"/>
           </a:xfrm>
           <a:prstGeom prst="rect">
@@ -4233,7 +4233,7 @@
         </p:nvSpPr>
         <p:spPr>
           <a:xfrm>
-            <a:off x="5074920" y="2078150"/>
+            <a:off x="5074920" y="2089785"/>
             <a:ext cx="237744" cy="237744"/>
           </a:xfrm>
           <a:prstGeom prst="roundRect">
@@ -4263,7 +4263,7 @@
         </p:blipFill>
         <p:spPr>
           <a:xfrm>
-            <a:off x="5116068" y="2119298"/>
+            <a:off x="5116068" y="2130933"/>
             <a:ext cx="155448" cy="155448"/>
           </a:xfrm>
           <a:prstGeom prst="rect">
@@ -4279,7 +4279,7 @@
         </p:nvSpPr>
         <p:spPr>
           <a:xfrm>
-            <a:off x="5349240" y="2078150"/>
+            <a:off x="5349240" y="2089785"/>
             <a:ext cx="237744" cy="237744"/>
           </a:xfrm>
           <a:prstGeom prst="roundRect">
@@ -4309,7 +4309,7 @@
         </p:blipFill>
         <p:spPr>
           <a:xfrm>
-            <a:off x="5390388" y="2119298"/>
+            <a:off x="5390388" y="2130933"/>
             <a:ext cx="155448" cy="155448"/>
           </a:xfrm>
           <a:prstGeom prst="rect">
@@ -4325,7 +4325,7 @@
         </p:nvSpPr>
         <p:spPr>
           <a:xfrm>
-            <a:off x="5623560" y="2078150"/>
+            <a:off x="5623560" y="2089785"/>
             <a:ext cx="237744" cy="237744"/>
           </a:xfrm>
           <a:prstGeom prst="roundRect">
@@ -4355,7 +4355,7 @@
         </p:blipFill>
         <p:spPr>
           <a:xfrm>
-            <a:off x="5664708" y="2119298"/>
+            <a:off x="5664708" y="2130933"/>
             <a:ext cx="155448" cy="155448"/>
           </a:xfrm>
           <a:prstGeom prst="rect">
@@ -4371,7 +4371,7 @@
         </p:nvSpPr>
         <p:spPr>
           <a:xfrm>
-            <a:off x="5897880" y="2078150"/>
+            <a:off x="5897880" y="2089785"/>
             <a:ext cx="237744" cy="237744"/>
           </a:xfrm>
           <a:prstGeom prst="roundRect">
@@ -4401,7 +4401,7 @@
         </p:blipFill>
         <p:spPr>
           <a:xfrm>
-            <a:off x="5939028" y="2119298"/>
+            <a:off x="5939028" y="2130933"/>
             <a:ext cx="155448" cy="155448"/>
           </a:xfrm>
           <a:prstGeom prst="rect">
@@ -4417,7 +4417,7 @@
         </p:nvSpPr>
         <p:spPr>
           <a:xfrm>
-            <a:off x="6172200" y="2078150"/>
+            <a:off x="6172200" y="2089785"/>
             <a:ext cx="237744" cy="237744"/>
           </a:xfrm>
           <a:prstGeom prst="roundRect">
@@ -4447,7 +4447,7 @@
         </p:blipFill>
         <p:spPr>
           <a:xfrm>
-            <a:off x="6213348" y="2119298"/>
+            <a:off x="6213348" y="2130933"/>
             <a:ext cx="155448" cy="155448"/>
           </a:xfrm>
           <a:prstGeom prst="rect">
@@ -4463,7 +4463,7 @@
         </p:nvSpPr>
         <p:spPr>
           <a:xfrm>
-            <a:off x="6446520" y="2078150"/>
+            <a:off x="6446520" y="2089785"/>
             <a:ext cx="237744" cy="237744"/>
           </a:xfrm>
           <a:prstGeom prst="roundRect">
@@ -4493,7 +4493,7 @@
         </p:blipFill>
         <p:spPr>
           <a:xfrm>
-            <a:off x="6487668" y="2119298"/>
+            <a:off x="6487668" y="2130933"/>
             <a:ext cx="155448" cy="155448"/>
           </a:xfrm>
           <a:prstGeom prst="rect">
@@ -4509,7 +4509,7 @@
         </p:nvSpPr>
         <p:spPr>
           <a:xfrm>
-            <a:off x="6720840" y="2078150"/>
+            <a:off x="6720840" y="2089785"/>
             <a:ext cx="237744" cy="237744"/>
           </a:xfrm>
           <a:prstGeom prst="roundRect">
@@ -4550,7 +4550,7 @@
         <p:spPr>
           <a:xfrm>
             <a:off x="7132320" y="2057400"/>
-            <a:ext cx="4507992" cy="279244"/>
+            <a:ext cx="4507992" cy="302514"/>
           </a:xfrm>
           <a:prstGeom prst="rect">
             <a:avLst/>
@@ -4585,7 +4585,7 @@
         </p:nvSpPr>
         <p:spPr>
           <a:xfrm>
-            <a:off x="548640" y="2336644"/>
+            <a:off x="548640" y="2359914"/>
             <a:ext cx="11091672" cy="0"/>
           </a:xfrm>
           <a:prstGeom prst="line">
@@ -4608,8 +4608,8 @@
         </p:nvSpPr>
         <p:spPr>
           <a:xfrm>
-            <a:off x="548640" y="2336644"/>
-            <a:ext cx="3611880" cy="279244"/>
+            <a:off x="548640" y="2359914"/>
+            <a:ext cx="3611880" cy="302514"/>
           </a:xfrm>
           <a:prstGeom prst="rect">
             <a:avLst/>
@@ -4644,7 +4644,7 @@
         </p:nvSpPr>
         <p:spPr>
           <a:xfrm>
-            <a:off x="4251960" y="2357394"/>
+            <a:off x="4251960" y="2392299"/>
             <a:ext cx="237744" cy="237744"/>
           </a:xfrm>
           <a:prstGeom prst="roundRect">
@@ -4674,7 +4674,7 @@
         </p:blipFill>
         <p:spPr>
           <a:xfrm>
-            <a:off x="4293108" y="2398542"/>
+            <a:off x="4293108" y="2433447"/>
             <a:ext cx="155448" cy="155448"/>
           </a:xfrm>
           <a:prstGeom prst="rect">
@@ -4690,7 +4690,7 @@
         </p:nvSpPr>
         <p:spPr>
           <a:xfrm>
-            <a:off x="4526280" y="2357394"/>
+            <a:off x="4526280" y="2392299"/>
             <a:ext cx="237744" cy="237744"/>
           </a:xfrm>
           <a:prstGeom prst="roundRect">
@@ -4720,7 +4720,7 @@
         </p:blipFill>
         <p:spPr>
           <a:xfrm>
-            <a:off x="4567428" y="2398542"/>
+            <a:off x="4567428" y="2433447"/>
             <a:ext cx="155448" cy="155448"/>
           </a:xfrm>
           <a:prstGeom prst="rect">
@@ -4736,7 +4736,7 @@
         </p:nvSpPr>
         <p:spPr>
           <a:xfrm>
-            <a:off x="4800600" y="2357394"/>
+            <a:off x="4800600" y="2392299"/>
             <a:ext cx="237744" cy="237744"/>
           </a:xfrm>
           <a:prstGeom prst="roundRect">
@@ -4766,7 +4766,7 @@
         </p:blipFill>
         <p:spPr>
           <a:xfrm>
-            <a:off x="4841748" y="2398542"/>
+            <a:off x="4841748" y="2433447"/>
             <a:ext cx="155448" cy="155448"/>
           </a:xfrm>
           <a:prstGeom prst="rect">
@@ -4782,7 +4782,7 @@
         </p:nvSpPr>
         <p:spPr>
           <a:xfrm>
-            <a:off x="5074920" y="2357394"/>
+            <a:off x="5074920" y="2392299"/>
             <a:ext cx="237744" cy="237744"/>
           </a:xfrm>
           <a:prstGeom prst="roundRect">
@@ -4812,7 +4812,7 @@
         </p:blipFill>
         <p:spPr>
           <a:xfrm>
-            <a:off x="5116068" y="2398542"/>
+            <a:off x="5116068" y="2433447"/>
             <a:ext cx="155448" cy="155448"/>
           </a:xfrm>
           <a:prstGeom prst="rect">
@@ -4828,7 +4828,7 @@
         </p:nvSpPr>
         <p:spPr>
           <a:xfrm>
-            <a:off x="5349240" y="2357394"/>
+            <a:off x="5349240" y="2392299"/>
             <a:ext cx="237744" cy="237744"/>
           </a:xfrm>
           <a:prstGeom prst="roundRect">
@@ -4858,7 +4858,7 @@
         </p:blipFill>
         <p:spPr>
           <a:xfrm>
-            <a:off x="5390388" y="2398542"/>
+            <a:off x="5390388" y="2433447"/>
             <a:ext cx="155448" cy="155448"/>
           </a:xfrm>
           <a:prstGeom prst="rect">
@@ -4874,7 +4874,7 @@
         </p:nvSpPr>
         <p:spPr>
           <a:xfrm>
-            <a:off x="5623560" y="2357394"/>
+            <a:off x="5623560" y="2392299"/>
             <a:ext cx="237744" cy="237744"/>
           </a:xfrm>
           <a:prstGeom prst="roundRect">
@@ -4914,8 +4914,8 @@
         </p:nvSpPr>
         <p:spPr>
           <a:xfrm>
-            <a:off x="7132320" y="2336644"/>
-            <a:ext cx="4507992" cy="279244"/>
+            <a:off x="7132320" y="2359914"/>
+            <a:ext cx="4507992" cy="302514"/>
           </a:xfrm>
           <a:prstGeom prst="rect">
             <a:avLst/>
@@ -4950,7 +4950,7 @@
         </p:nvSpPr>
         <p:spPr>
           <a:xfrm>
-            <a:off x="548640" y="2615887"/>
+            <a:off x="548640" y="2662428"/>
             <a:ext cx="11091672" cy="0"/>
           </a:xfrm>
           <a:prstGeom prst="line">
@@ -4973,8 +4973,8 @@
         </p:nvSpPr>
         <p:spPr>
           <a:xfrm>
-            <a:off x="548640" y="2615887"/>
-            <a:ext cx="3611880" cy="279244"/>
+            <a:off x="548640" y="2662428"/>
+            <a:ext cx="3611880" cy="302514"/>
           </a:xfrm>
           <a:prstGeom prst="rect">
             <a:avLst/>
@@ -5009,7 +5009,7 @@
         </p:nvSpPr>
         <p:spPr>
           <a:xfrm>
-            <a:off x="4251960" y="2636637"/>
+            <a:off x="4251960" y="2694813"/>
             <a:ext cx="237744" cy="237744"/>
           </a:xfrm>
           <a:prstGeom prst="roundRect">
@@ -5039,7 +5039,7 @@
         </p:blipFill>
         <p:spPr>
           <a:xfrm>
-            <a:off x="4293108" y="2677785"/>
+            <a:off x="4293108" y="2735961"/>
             <a:ext cx="155448" cy="155448"/>
           </a:xfrm>
           <a:prstGeom prst="rect">
@@ -5055,7 +5055,7 @@
         </p:nvSpPr>
         <p:spPr>
           <a:xfrm>
-            <a:off x="4526280" y="2636637"/>
+            <a:off x="4526280" y="2694813"/>
             <a:ext cx="237744" cy="237744"/>
           </a:xfrm>
           <a:prstGeom prst="roundRect">
@@ -5085,7 +5085,7 @@
         </p:blipFill>
         <p:spPr>
           <a:xfrm>
-            <a:off x="4567428" y="2677785"/>
+            <a:off x="4567428" y="2735961"/>
             <a:ext cx="155448" cy="155448"/>
           </a:xfrm>
           <a:prstGeom prst="rect">
@@ -5101,7 +5101,7 @@
         </p:nvSpPr>
         <p:spPr>
           <a:xfrm>
-            <a:off x="4800600" y="2636637"/>
+            <a:off x="4800600" y="2694813"/>
             <a:ext cx="237744" cy="237744"/>
           </a:xfrm>
           <a:prstGeom prst="roundRect">
@@ -5131,7 +5131,7 @@
         </p:blipFill>
         <p:spPr>
           <a:xfrm>
-            <a:off x="4841748" y="2677785"/>
+            <a:off x="4841748" y="2735961"/>
             <a:ext cx="155448" cy="155448"/>
           </a:xfrm>
           <a:prstGeom prst="rect">
@@ -5147,7 +5147,7 @@
         </p:nvSpPr>
         <p:spPr>
           <a:xfrm>
-            <a:off x="5074920" y="2636637"/>
+            <a:off x="5074920" y="2694813"/>
             <a:ext cx="237744" cy="237744"/>
           </a:xfrm>
           <a:prstGeom prst="roundRect">
@@ -5177,7 +5177,7 @@
         </p:blipFill>
         <p:spPr>
           <a:xfrm>
-            <a:off x="5116068" y="2677785"/>
+            <a:off x="5116068" y="2735961"/>
             <a:ext cx="155448" cy="155448"/>
           </a:xfrm>
           <a:prstGeom prst="rect">
@@ -5193,7 +5193,7 @@
         </p:nvSpPr>
         <p:spPr>
           <a:xfrm>
-            <a:off x="5349240" y="2636637"/>
+            <a:off x="5349240" y="2694813"/>
             <a:ext cx="237744" cy="237744"/>
           </a:xfrm>
           <a:prstGeom prst="roundRect">
@@ -5233,8 +5233,8 @@
         </p:nvSpPr>
         <p:spPr>
           <a:xfrm>
-            <a:off x="5623560" y="2615887"/>
-            <a:ext cx="237744" cy="279244"/>
+            <a:off x="5623560" y="2662428"/>
+            <a:ext cx="237744" cy="302514"/>
           </a:xfrm>
           <a:prstGeom prst="rect">
             <a:avLst/>
@@ -5269,7 +5269,7 @@
         </p:nvSpPr>
         <p:spPr>
           <a:xfrm>
-            <a:off x="5897880" y="2636637"/>
+            <a:off x="5897880" y="2694813"/>
             <a:ext cx="237744" cy="237744"/>
           </a:xfrm>
           <a:prstGeom prst="roundRect">
@@ -5299,7 +5299,7 @@
         </p:blipFill>
         <p:spPr>
           <a:xfrm>
-            <a:off x="5939028" y="2677785"/>
+            <a:off x="5939028" y="2735961"/>
             <a:ext cx="155448" cy="155448"/>
           </a:xfrm>
           <a:prstGeom prst="rect">
@@ -5315,7 +5315,7 @@
         </p:nvSpPr>
         <p:spPr>
           <a:xfrm>
-            <a:off x="6172200" y="2636637"/>
+            <a:off x="6172200" y="2694813"/>
             <a:ext cx="237744" cy="237744"/>
           </a:xfrm>
           <a:prstGeom prst="roundRect">
@@ -5345,7 +5345,7 @@
         </p:blipFill>
         <p:spPr>
           <a:xfrm>
-            <a:off x="6213348" y="2677785"/>
+            <a:off x="6213348" y="2735961"/>
             <a:ext cx="155448" cy="155448"/>
           </a:xfrm>
           <a:prstGeom prst="rect">
@@ -5361,7 +5361,7 @@
         </p:nvSpPr>
         <p:spPr>
           <a:xfrm>
-            <a:off x="6446520" y="2636637"/>
+            <a:off x="6446520" y="2694813"/>
             <a:ext cx="237744" cy="237744"/>
           </a:xfrm>
           <a:prstGeom prst="roundRect">
@@ -5391,7 +5391,7 @@
         </p:blipFill>
         <p:spPr>
           <a:xfrm>
-            <a:off x="6487668" y="2677785"/>
+            <a:off x="6487668" y="2735961"/>
             <a:ext cx="155448" cy="155448"/>
           </a:xfrm>
           <a:prstGeom prst="rect">
@@ -5407,7 +5407,7 @@
         </p:nvSpPr>
         <p:spPr>
           <a:xfrm>
-            <a:off x="6720840" y="2636637"/>
+            <a:off x="6720840" y="2694813"/>
             <a:ext cx="237744" cy="237744"/>
           </a:xfrm>
           <a:prstGeom prst="roundRect">
@@ -5447,8 +5447,8 @@
         </p:nvSpPr>
         <p:spPr>
           <a:xfrm>
-            <a:off x="7132320" y="2615887"/>
-            <a:ext cx="4507992" cy="279244"/>
+            <a:off x="7132320" y="2662428"/>
+            <a:ext cx="4507992" cy="302514"/>
           </a:xfrm>
           <a:prstGeom prst="rect">
             <a:avLst/>
@@ -5483,7 +5483,7 @@
         </p:nvSpPr>
         <p:spPr>
           <a:xfrm>
-            <a:off x="548640" y="2895131"/>
+            <a:off x="548640" y="2964942"/>
             <a:ext cx="11091672" cy="0"/>
           </a:xfrm>
           <a:prstGeom prst="line">
@@ -5506,8 +5506,8 @@
         </p:nvSpPr>
         <p:spPr>
           <a:xfrm>
-            <a:off x="548640" y="2895131"/>
-            <a:ext cx="3611880" cy="279244"/>
+            <a:off x="548640" y="2964942"/>
+            <a:ext cx="3611880" cy="302514"/>
           </a:xfrm>
           <a:prstGeom prst="rect">
             <a:avLst/>
@@ -5542,7 +5542,7 @@
         </p:nvSpPr>
         <p:spPr>
           <a:xfrm>
-            <a:off x="4251960" y="2915881"/>
+            <a:off x="4251960" y="2997327"/>
             <a:ext cx="237744" cy="237744"/>
           </a:xfrm>
           <a:prstGeom prst="roundRect">
@@ -5572,7 +5572,7 @@
         </p:blipFill>
         <p:spPr>
           <a:xfrm>
-            <a:off x="4293108" y="2957029"/>
+            <a:off x="4293108" y="3038475"/>
             <a:ext cx="155448" cy="155448"/>
           </a:xfrm>
           <a:prstGeom prst="rect">
@@ -5588,7 +5588,7 @@
         </p:nvSpPr>
         <p:spPr>
           <a:xfrm>
-            <a:off x="4526280" y="2915881"/>
+            <a:off x="4526280" y="2997327"/>
             <a:ext cx="237744" cy="237744"/>
           </a:xfrm>
           <a:prstGeom prst="roundRect">
@@ -5618,7 +5618,7 @@
         </p:blipFill>
         <p:spPr>
           <a:xfrm>
-            <a:off x="4567428" y="2957029"/>
+            <a:off x="4567428" y="3038475"/>
             <a:ext cx="155448" cy="155448"/>
           </a:xfrm>
           <a:prstGeom prst="rect">
@@ -5634,7 +5634,7 @@
         </p:nvSpPr>
         <p:spPr>
           <a:xfrm>
-            <a:off x="4800600" y="2915881"/>
+            <a:off x="4800600" y="2997327"/>
             <a:ext cx="237744" cy="237744"/>
           </a:xfrm>
           <a:prstGeom prst="roundRect">
@@ -5664,7 +5664,7 @@
         </p:blipFill>
         <p:spPr>
           <a:xfrm>
-            <a:off x="4841748" y="2957029"/>
+            <a:off x="4841748" y="3038475"/>
             <a:ext cx="155448" cy="155448"/>
           </a:xfrm>
           <a:prstGeom prst="rect">
@@ -5680,7 +5680,7 @@
         </p:nvSpPr>
         <p:spPr>
           <a:xfrm>
-            <a:off x="5074920" y="2915881"/>
+            <a:off x="5074920" y="2997327"/>
             <a:ext cx="237744" cy="237744"/>
           </a:xfrm>
           <a:prstGeom prst="roundRect">
@@ -5710,7 +5710,7 @@
         </p:blipFill>
         <p:spPr>
           <a:xfrm>
-            <a:off x="5116068" y="2957029"/>
+            <a:off x="5116068" y="3038475"/>
             <a:ext cx="155448" cy="155448"/>
           </a:xfrm>
           <a:prstGeom prst="rect">
@@ -5726,7 +5726,7 @@
         </p:nvSpPr>
         <p:spPr>
           <a:xfrm>
-            <a:off x="5349240" y="2915881"/>
+            <a:off x="5349240" y="2997327"/>
             <a:ext cx="237744" cy="237744"/>
           </a:xfrm>
           <a:prstGeom prst="roundRect">
@@ -5756,7 +5756,7 @@
         </p:blipFill>
         <p:spPr>
           <a:xfrm>
-            <a:off x="5390388" y="2957029"/>
+            <a:off x="5390388" y="3038475"/>
             <a:ext cx="155448" cy="155448"/>
           </a:xfrm>
           <a:prstGeom prst="rect">
@@ -5772,7 +5772,7 @@
         </p:nvSpPr>
         <p:spPr>
           <a:xfrm>
-            <a:off x="5623560" y="2915881"/>
+            <a:off x="5623560" y="2997327"/>
             <a:ext cx="237744" cy="237744"/>
           </a:xfrm>
           <a:prstGeom prst="roundRect">
@@ -5812,8 +5812,8 @@
         </p:nvSpPr>
         <p:spPr>
           <a:xfrm>
-            <a:off x="5897880" y="2895131"/>
-            <a:ext cx="237744" cy="279244"/>
+            <a:off x="5897880" y="2964942"/>
+            <a:ext cx="237744" cy="302514"/>
           </a:xfrm>
           <a:prstGeom prst="rect">
             <a:avLst/>
@@ -5848,7 +5848,7 @@
         </p:nvSpPr>
         <p:spPr>
           <a:xfrm>
-            <a:off x="6172200" y="2915881"/>
+            <a:off x="6172200" y="2997327"/>
             <a:ext cx="237744" cy="237744"/>
           </a:xfrm>
           <a:prstGeom prst="roundRect">
@@ -5878,7 +5878,7 @@
         </p:blipFill>
         <p:spPr>
           <a:xfrm>
-            <a:off x="6213348" y="2957029"/>
+            <a:off x="6213348" y="3038475"/>
             <a:ext cx="155448" cy="155448"/>
           </a:xfrm>
           <a:prstGeom prst="rect">
@@ -5894,7 +5894,7 @@
         </p:nvSpPr>
         <p:spPr>
           <a:xfrm>
-            <a:off x="6446520" y="2915881"/>
+            <a:off x="6446520" y="2997327"/>
             <a:ext cx="237744" cy="237744"/>
           </a:xfrm>
           <a:prstGeom prst="roundRect">
@@ -5924,7 +5924,7 @@
         </p:blipFill>
         <p:spPr>
           <a:xfrm>
-            <a:off x="6487668" y="2957029"/>
+            <a:off x="6487668" y="3038475"/>
             <a:ext cx="155448" cy="155448"/>
           </a:xfrm>
           <a:prstGeom prst="rect">
@@ -5940,7 +5940,7 @@
         </p:nvSpPr>
         <p:spPr>
           <a:xfrm>
-            <a:off x="6720840" y="2915881"/>
+            <a:off x="6720840" y="2997327"/>
             <a:ext cx="237744" cy="237744"/>
           </a:xfrm>
           <a:prstGeom prst="roundRect">
@@ -5980,8 +5980,8 @@
         </p:nvSpPr>
         <p:spPr>
           <a:xfrm>
-            <a:off x="7132320" y="2895131"/>
-            <a:ext cx="4507992" cy="279244"/>
+            <a:off x="7132320" y="2964942"/>
+            <a:ext cx="4507992" cy="302514"/>
           </a:xfrm>
           <a:prstGeom prst="rect">
             <a:avLst/>
@@ -6016,7 +6016,7 @@
         </p:nvSpPr>
         <p:spPr>
           <a:xfrm>
-            <a:off x="548640" y="3174375"/>
+            <a:off x="548640" y="3267456"/>
             <a:ext cx="11091672" cy="0"/>
           </a:xfrm>
           <a:prstGeom prst="line">
@@ -6039,8 +6039,8 @@
         </p:nvSpPr>
         <p:spPr>
           <a:xfrm>
-            <a:off x="548640" y="3174375"/>
-            <a:ext cx="3611880" cy="279244"/>
+            <a:off x="548640" y="3267456"/>
+            <a:ext cx="3611880" cy="302514"/>
           </a:xfrm>
           <a:prstGeom prst="rect">
             <a:avLst/>
@@ -6075,7 +6075,7 @@
         </p:nvSpPr>
         <p:spPr>
           <a:xfrm>
-            <a:off x="4251960" y="3195125"/>
+            <a:off x="4251960" y="3299841"/>
             <a:ext cx="237744" cy="237744"/>
           </a:xfrm>
           <a:prstGeom prst="roundRect">
@@ -6105,7 +6105,7 @@
         </p:blipFill>
         <p:spPr>
           <a:xfrm>
-            <a:off x="4293108" y="3236273"/>
+            <a:off x="4293108" y="3340989"/>
             <a:ext cx="155448" cy="155448"/>
           </a:xfrm>
           <a:prstGeom prst="rect">
@@ -6121,7 +6121,7 @@
         </p:nvSpPr>
         <p:spPr>
           <a:xfrm>
-            <a:off x="4526280" y="3195125"/>
+            <a:off x="4526280" y="3299841"/>
             <a:ext cx="237744" cy="237744"/>
           </a:xfrm>
           <a:prstGeom prst="roundRect">
@@ -6151,7 +6151,7 @@
         </p:blipFill>
         <p:spPr>
           <a:xfrm>
-            <a:off x="4567428" y="3236273"/>
+            <a:off x="4567428" y="3340989"/>
             <a:ext cx="155448" cy="155448"/>
           </a:xfrm>
           <a:prstGeom prst="rect">
@@ -6167,7 +6167,7 @@
         </p:nvSpPr>
         <p:spPr>
           <a:xfrm>
-            <a:off x="4800600" y="3195125"/>
+            <a:off x="4800600" y="3299841"/>
             <a:ext cx="237744" cy="237744"/>
           </a:xfrm>
           <a:prstGeom prst="roundRect">
@@ -6197,7 +6197,7 @@
         </p:blipFill>
         <p:spPr>
           <a:xfrm>
-            <a:off x="4841748" y="3236273"/>
+            <a:off x="4841748" y="3340989"/>
             <a:ext cx="155448" cy="155448"/>
           </a:xfrm>
           <a:prstGeom prst="rect">
@@ -6213,7 +6213,7 @@
         </p:nvSpPr>
         <p:spPr>
           <a:xfrm>
-            <a:off x="5074920" y="3195125"/>
+            <a:off x="5074920" y="3299841"/>
             <a:ext cx="237744" cy="237744"/>
           </a:xfrm>
           <a:prstGeom prst="roundRect">
@@ -6243,7 +6243,7 @@
         </p:blipFill>
         <p:spPr>
           <a:xfrm>
-            <a:off x="5116068" y="3236273"/>
+            <a:off x="5116068" y="3340989"/>
             <a:ext cx="155448" cy="155448"/>
           </a:xfrm>
           <a:prstGeom prst="rect">
@@ -6259,7 +6259,7 @@
         </p:nvSpPr>
         <p:spPr>
           <a:xfrm>
-            <a:off x="5349240" y="3195125"/>
+            <a:off x="5349240" y="3299841"/>
             <a:ext cx="237744" cy="237744"/>
           </a:xfrm>
           <a:prstGeom prst="roundRect">
@@ -6299,8 +6299,8 @@
         </p:nvSpPr>
         <p:spPr>
           <a:xfrm>
-            <a:off x="7132320" y="3174375"/>
-            <a:ext cx="4507992" cy="279244"/>
+            <a:off x="7132320" y="3267456"/>
+            <a:ext cx="4507992" cy="302514"/>
           </a:xfrm>
           <a:prstGeom prst="rect">
             <a:avLst/>
@@ -6335,7 +6335,7 @@
         </p:nvSpPr>
         <p:spPr>
           <a:xfrm>
-            <a:off x="548640" y="3453618"/>
+            <a:off x="548640" y="3569970"/>
             <a:ext cx="11091672" cy="0"/>
           </a:xfrm>
           <a:prstGeom prst="line">
@@ -6358,8 +6358,8 @@
         </p:nvSpPr>
         <p:spPr>
           <a:xfrm>
-            <a:off x="548640" y="3453618"/>
-            <a:ext cx="3611880" cy="279244"/>
+            <a:off x="548640" y="3569970"/>
+            <a:ext cx="3611880" cy="302514"/>
           </a:xfrm>
           <a:prstGeom prst="rect">
             <a:avLst/>
@@ -6394,7 +6394,7 @@
         </p:nvSpPr>
         <p:spPr>
           <a:xfrm>
-            <a:off x="4251960" y="3474368"/>
+            <a:off x="4251960" y="3602355"/>
             <a:ext cx="237744" cy="237744"/>
           </a:xfrm>
           <a:prstGeom prst="roundRect">
@@ -6424,7 +6424,7 @@
         </p:blipFill>
         <p:spPr>
           <a:xfrm>
-            <a:off x="4293108" y="3515516"/>
+            <a:off x="4293108" y="3643503"/>
             <a:ext cx="155448" cy="155448"/>
           </a:xfrm>
           <a:prstGeom prst="rect">
@@ -6440,7 +6440,7 @@
         </p:nvSpPr>
         <p:spPr>
           <a:xfrm>
-            <a:off x="4526280" y="3474368"/>
+            <a:off x="4526280" y="3602355"/>
             <a:ext cx="237744" cy="237744"/>
           </a:xfrm>
           <a:prstGeom prst="roundRect">
@@ -6470,7 +6470,7 @@
         </p:blipFill>
         <p:spPr>
           <a:xfrm>
-            <a:off x="4567428" y="3515516"/>
+            <a:off x="4567428" y="3643503"/>
             <a:ext cx="155448" cy="155448"/>
           </a:xfrm>
           <a:prstGeom prst="rect">
@@ -6486,7 +6486,7 @@
         </p:nvSpPr>
         <p:spPr>
           <a:xfrm>
-            <a:off x="4800600" y="3474368"/>
+            <a:off x="4800600" y="3602355"/>
             <a:ext cx="237744" cy="237744"/>
           </a:xfrm>
           <a:prstGeom prst="roundRect">
@@ -6516,7 +6516,7 @@
         </p:blipFill>
         <p:spPr>
           <a:xfrm>
-            <a:off x="4841748" y="3515516"/>
+            <a:off x="4841748" y="3643503"/>
             <a:ext cx="155448" cy="155448"/>
           </a:xfrm>
           <a:prstGeom prst="rect">
@@ -6532,7 +6532,7 @@
         </p:nvSpPr>
         <p:spPr>
           <a:xfrm>
-            <a:off x="5074920" y="3474368"/>
+            <a:off x="5074920" y="3602355"/>
             <a:ext cx="237744" cy="237744"/>
           </a:xfrm>
           <a:prstGeom prst="roundRect">
@@ -6572,8 +6572,8 @@
         </p:nvSpPr>
         <p:spPr>
           <a:xfrm>
-            <a:off x="5349240" y="3453618"/>
-            <a:ext cx="237744" cy="279244"/>
+            <a:off x="5349240" y="3569970"/>
+            <a:ext cx="237744" cy="302514"/>
           </a:xfrm>
           <a:prstGeom prst="rect">
             <a:avLst/>
@@ -6608,7 +6608,7 @@
         </p:nvSpPr>
         <p:spPr>
           <a:xfrm>
-            <a:off x="5623560" y="3474368"/>
+            <a:off x="5623560" y="3602355"/>
             <a:ext cx="237744" cy="237744"/>
           </a:xfrm>
           <a:prstGeom prst="roundRect">
@@ -6638,7 +6638,7 @@
         </p:blipFill>
         <p:spPr>
           <a:xfrm>
-            <a:off x="5664708" y="3515516"/>
+            <a:off x="5664708" y="3643503"/>
             <a:ext cx="155448" cy="155448"/>
           </a:xfrm>
           <a:prstGeom prst="rect">
@@ -6654,7 +6654,7 @@
         </p:nvSpPr>
         <p:spPr>
           <a:xfrm>
-            <a:off x="5897880" y="3474368"/>
+            <a:off x="5897880" y="3602355"/>
             <a:ext cx="237744" cy="237744"/>
           </a:xfrm>
           <a:prstGeom prst="roundRect">
@@ -6684,7 +6684,7 @@
         </p:blipFill>
         <p:spPr>
           <a:xfrm>
-            <a:off x="5939028" y="3515516"/>
+            <a:off x="5939028" y="3643503"/>
             <a:ext cx="155448" cy="155448"/>
           </a:xfrm>
           <a:prstGeom prst="rect">
@@ -6700,7 +6700,7 @@
         </p:nvSpPr>
         <p:spPr>
           <a:xfrm>
-            <a:off x="6172200" y="3474368"/>
+            <a:off x="6172200" y="3602355"/>
             <a:ext cx="237744" cy="237744"/>
           </a:xfrm>
           <a:prstGeom prst="roundRect">
@@ -6730,7 +6730,7 @@
         </p:blipFill>
         <p:spPr>
           <a:xfrm>
-            <a:off x="6213348" y="3515516"/>
+            <a:off x="6213348" y="3643503"/>
             <a:ext cx="155448" cy="155448"/>
           </a:xfrm>
           <a:prstGeom prst="rect">
@@ -6746,7 +6746,7 @@
         </p:nvSpPr>
         <p:spPr>
           <a:xfrm>
-            <a:off x="6446520" y="3474368"/>
+            <a:off x="6446520" y="3602355"/>
             <a:ext cx="237744" cy="237744"/>
           </a:xfrm>
           <a:prstGeom prst="roundRect">
@@ -6776,7 +6776,7 @@
         </p:blipFill>
         <p:spPr>
           <a:xfrm>
-            <a:off x="6487668" y="3515516"/>
+            <a:off x="6487668" y="3643503"/>
             <a:ext cx="155448" cy="155448"/>
           </a:xfrm>
           <a:prstGeom prst="rect">
@@ -6792,7 +6792,7 @@
         </p:nvSpPr>
         <p:spPr>
           <a:xfrm>
-            <a:off x="6720840" y="3474368"/>
+            <a:off x="6720840" y="3602355"/>
             <a:ext cx="237744" cy="237744"/>
           </a:xfrm>
           <a:prstGeom prst="roundRect">
@@ -6832,8 +6832,8 @@
         </p:nvSpPr>
         <p:spPr>
           <a:xfrm>
-            <a:off x="7132320" y="3453618"/>
-            <a:ext cx="4507992" cy="279244"/>
+            <a:off x="7132320" y="3569970"/>
+            <a:ext cx="4507992" cy="302514"/>
           </a:xfrm>
           <a:prstGeom prst="rect">
             <a:avLst/>
@@ -6868,7 +6868,7 @@
         </p:nvSpPr>
         <p:spPr>
           <a:xfrm>
-            <a:off x="548640" y="3732862"/>
+            <a:off x="548640" y="3872484"/>
             <a:ext cx="11091672" cy="0"/>
           </a:xfrm>
           <a:prstGeom prst="line">
@@ -6891,8 +6891,8 @@
         </p:nvSpPr>
         <p:spPr>
           <a:xfrm>
-            <a:off x="548640" y="3732862"/>
-            <a:ext cx="3611880" cy="279244"/>
+            <a:off x="548640" y="3872484"/>
+            <a:ext cx="3611880" cy="302514"/>
           </a:xfrm>
           <a:prstGeom prst="rect">
             <a:avLst/>
@@ -6927,7 +6927,7 @@
         </p:nvSpPr>
         <p:spPr>
           <a:xfrm>
-            <a:off x="4251960" y="3753612"/>
+            <a:off x="4251960" y="3904869"/>
             <a:ext cx="237744" cy="237744"/>
           </a:xfrm>
           <a:prstGeom prst="roundRect">
@@ -6957,7 +6957,7 @@
         </p:blipFill>
         <p:spPr>
           <a:xfrm>
-            <a:off x="4293108" y="3794760"/>
+            <a:off x="4293108" y="3946017"/>
             <a:ext cx="155448" cy="155448"/>
           </a:xfrm>
           <a:prstGeom prst="rect">
@@ -6973,7 +6973,7 @@
         </p:nvSpPr>
         <p:spPr>
           <a:xfrm>
-            <a:off x="4526280" y="3753612"/>
+            <a:off x="4526280" y="3904869"/>
             <a:ext cx="237744" cy="237744"/>
           </a:xfrm>
           <a:prstGeom prst="roundRect">
@@ -7003,7 +7003,7 @@
         </p:blipFill>
         <p:spPr>
           <a:xfrm>
-            <a:off x="4567428" y="3794760"/>
+            <a:off x="4567428" y="3946017"/>
             <a:ext cx="155448" cy="155448"/>
           </a:xfrm>
           <a:prstGeom prst="rect">
@@ -7019,7 +7019,7 @@
         </p:nvSpPr>
         <p:spPr>
           <a:xfrm>
-            <a:off x="4800600" y="3753612"/>
+            <a:off x="4800600" y="3904869"/>
             <a:ext cx="237744" cy="237744"/>
           </a:xfrm>
           <a:prstGeom prst="roundRect">
@@ -7049,7 +7049,7 @@
         </p:blipFill>
         <p:spPr>
           <a:xfrm>
-            <a:off x="4841748" y="3794760"/>
+            <a:off x="4841748" y="3946017"/>
             <a:ext cx="155448" cy="155448"/>
           </a:xfrm>
           <a:prstGeom prst="rect">
@@ -7065,7 +7065,7 @@
         </p:nvSpPr>
         <p:spPr>
           <a:xfrm>
-            <a:off x="5074920" y="3753612"/>
+            <a:off x="5074920" y="3904869"/>
             <a:ext cx="237744" cy="237744"/>
           </a:xfrm>
           <a:prstGeom prst="roundRect">
@@ -7095,7 +7095,7 @@
         </p:blipFill>
         <p:spPr>
           <a:xfrm>
-            <a:off x="5116068" y="3794760"/>
+            <a:off x="5116068" y="3946017"/>
             <a:ext cx="155448" cy="155448"/>
           </a:xfrm>
           <a:prstGeom prst="rect">
@@ -7111,7 +7111,7 @@
         </p:nvSpPr>
         <p:spPr>
           <a:xfrm>
-            <a:off x="5349240" y="3753612"/>
+            <a:off x="5349240" y="3904869"/>
             <a:ext cx="237744" cy="237744"/>
           </a:xfrm>
           <a:prstGeom prst="roundRect">
@@ -7151,8 +7151,8 @@
         </p:nvSpPr>
         <p:spPr>
           <a:xfrm>
-            <a:off x="5623560" y="3732862"/>
-            <a:ext cx="237744" cy="279244"/>
+            <a:off x="5623560" y="3872484"/>
+            <a:ext cx="237744" cy="302514"/>
           </a:xfrm>
           <a:prstGeom prst="rect">
             <a:avLst/>
@@ -7187,7 +7187,7 @@
         </p:nvSpPr>
         <p:spPr>
           <a:xfrm>
-            <a:off x="5897880" y="3753612"/>
+            <a:off x="5897880" y="3904869"/>
             <a:ext cx="237744" cy="237744"/>
           </a:xfrm>
           <a:prstGeom prst="roundRect">
@@ -7217,7 +7217,7 @@
         </p:blipFill>
         <p:spPr>
           <a:xfrm>
-            <a:off x="5939028" y="3794760"/>
+            <a:off x="5939028" y="3946017"/>
             <a:ext cx="155448" cy="155448"/>
           </a:xfrm>
           <a:prstGeom prst="rect">
@@ -7233,7 +7233,7 @@
         </p:nvSpPr>
         <p:spPr>
           <a:xfrm>
-            <a:off x="6172200" y="3753612"/>
+            <a:off x="6172200" y="3904869"/>
             <a:ext cx="237744" cy="237744"/>
           </a:xfrm>
           <a:prstGeom prst="roundRect">
@@ -7263,7 +7263,7 @@
         </p:blipFill>
         <p:spPr>
           <a:xfrm>
-            <a:off x="6213348" y="3794760"/>
+            <a:off x="6213348" y="3946017"/>
             <a:ext cx="155448" cy="155448"/>
           </a:xfrm>
           <a:prstGeom prst="rect">
@@ -7279,7 +7279,7 @@
         </p:nvSpPr>
         <p:spPr>
           <a:xfrm>
-            <a:off x="6446520" y="3753612"/>
+            <a:off x="6446520" y="3904869"/>
             <a:ext cx="237744" cy="237744"/>
           </a:xfrm>
           <a:prstGeom prst="roundRect">
@@ -7309,7 +7309,7 @@
         </p:blipFill>
         <p:spPr>
           <a:xfrm>
-            <a:off x="6487668" y="3794760"/>
+            <a:off x="6487668" y="3946017"/>
             <a:ext cx="155448" cy="155448"/>
           </a:xfrm>
           <a:prstGeom prst="rect">
@@ -7325,7 +7325,7 @@
         </p:nvSpPr>
         <p:spPr>
           <a:xfrm>
-            <a:off x="6720840" y="3753612"/>
+            <a:off x="6720840" y="3904869"/>
             <a:ext cx="237744" cy="237744"/>
           </a:xfrm>
           <a:prstGeom prst="roundRect">
@@ -7365,8 +7365,8 @@
         </p:nvSpPr>
         <p:spPr>
           <a:xfrm>
-            <a:off x="7132320" y="3732862"/>
-            <a:ext cx="4507992" cy="279244"/>
+            <a:off x="7132320" y="3872484"/>
+            <a:ext cx="4507992" cy="302514"/>
           </a:xfrm>
           <a:prstGeom prst="rect">
             <a:avLst/>
@@ -7401,7 +7401,7 @@
         </p:nvSpPr>
         <p:spPr>
           <a:xfrm>
-            <a:off x="548640" y="4012106"/>
+            <a:off x="548640" y="4174998"/>
             <a:ext cx="11091672" cy="0"/>
           </a:xfrm>
           <a:prstGeom prst="line">
@@ -7424,8 +7424,8 @@
         </p:nvSpPr>
         <p:spPr>
           <a:xfrm>
-            <a:off x="548640" y="4012106"/>
-            <a:ext cx="3611880" cy="279244"/>
+            <a:off x="548640" y="4174998"/>
+            <a:ext cx="3611880" cy="302514"/>
           </a:xfrm>
           <a:prstGeom prst="rect">
             <a:avLst/>
@@ -7460,7 +7460,7 @@
         </p:nvSpPr>
         <p:spPr>
           <a:xfrm>
-            <a:off x="4251960" y="4032856"/>
+            <a:off x="4251960" y="4207383"/>
             <a:ext cx="237744" cy="237744"/>
           </a:xfrm>
           <a:prstGeom prst="roundRect">
@@ -7490,7 +7490,7 @@
         </p:blipFill>
         <p:spPr>
           <a:xfrm>
-            <a:off x="4293108" y="4074004"/>
+            <a:off x="4293108" y="4248531"/>
             <a:ext cx="155448" cy="155448"/>
           </a:xfrm>
           <a:prstGeom prst="rect">
@@ -7506,7 +7506,7 @@
         </p:nvSpPr>
         <p:spPr>
           <a:xfrm>
-            <a:off x="4526280" y="4032856"/>
+            <a:off x="4526280" y="4207383"/>
             <a:ext cx="237744" cy="237744"/>
           </a:xfrm>
           <a:prstGeom prst="roundRect">
@@ -7536,7 +7536,7 @@
         </p:blipFill>
         <p:spPr>
           <a:xfrm>
-            <a:off x="4567428" y="4074004"/>
+            <a:off x="4567428" y="4248531"/>
             <a:ext cx="155448" cy="155448"/>
           </a:xfrm>
           <a:prstGeom prst="rect">
@@ -7552,7 +7552,7 @@
         </p:nvSpPr>
         <p:spPr>
           <a:xfrm>
-            <a:off x="4800600" y="4032856"/>
+            <a:off x="4800600" y="4207383"/>
             <a:ext cx="237744" cy="237744"/>
           </a:xfrm>
           <a:prstGeom prst="roundRect">
@@ -7582,7 +7582,7 @@
         </p:blipFill>
         <p:spPr>
           <a:xfrm>
-            <a:off x="4841748" y="4074004"/>
+            <a:off x="4841748" y="4248531"/>
             <a:ext cx="155448" cy="155448"/>
           </a:xfrm>
           <a:prstGeom prst="rect">
@@ -7598,7 +7598,7 @@
         </p:nvSpPr>
         <p:spPr>
           <a:xfrm>
-            <a:off x="5074920" y="4032856"/>
+            <a:off x="5074920" y="4207383"/>
             <a:ext cx="237744" cy="237744"/>
           </a:xfrm>
           <a:prstGeom prst="roundRect">
@@ -7638,8 +7638,8 @@
         </p:nvSpPr>
         <p:spPr>
           <a:xfrm>
-            <a:off x="7132320" y="4012106"/>
-            <a:ext cx="4507992" cy="279244"/>
+            <a:off x="7132320" y="4174998"/>
+            <a:ext cx="4507992" cy="302514"/>
           </a:xfrm>
           <a:prstGeom prst="rect">
             <a:avLst/>
@@ -7674,7 +7674,7 @@
         </p:nvSpPr>
         <p:spPr>
           <a:xfrm>
-            <a:off x="548640" y="4291350"/>
+            <a:off x="548640" y="4477512"/>
             <a:ext cx="11091672" cy="0"/>
           </a:xfrm>
           <a:prstGeom prst="line">
@@ -7697,8 +7697,8 @@
         </p:nvSpPr>
         <p:spPr>
           <a:xfrm>
-            <a:off x="548640" y="4291350"/>
-            <a:ext cx="3611880" cy="279244"/>
+            <a:off x="548640" y="4477512"/>
+            <a:ext cx="3611880" cy="302514"/>
           </a:xfrm>
           <a:prstGeom prst="rect">
             <a:avLst/>
@@ -7733,7 +7733,7 @@
         </p:nvSpPr>
         <p:spPr>
           <a:xfrm>
-            <a:off x="4251960" y="4312099"/>
+            <a:off x="4251960" y="4509897"/>
             <a:ext cx="237744" cy="237744"/>
           </a:xfrm>
           <a:prstGeom prst="roundRect">
@@ -7763,7 +7763,7 @@
         </p:blipFill>
         <p:spPr>
           <a:xfrm>
-            <a:off x="4293108" y="4353247"/>
+            <a:off x="4293108" y="4551045"/>
             <a:ext cx="155448" cy="155448"/>
           </a:xfrm>
           <a:prstGeom prst="rect">
@@ -7779,7 +7779,7 @@
         </p:nvSpPr>
         <p:spPr>
           <a:xfrm>
-            <a:off x="4526280" y="4312099"/>
+            <a:off x="4526280" y="4509897"/>
             <a:ext cx="237744" cy="237744"/>
           </a:xfrm>
           <a:prstGeom prst="roundRect">
@@ -7809,7 +7809,7 @@
         </p:blipFill>
         <p:spPr>
           <a:xfrm>
-            <a:off x="4567428" y="4353247"/>
+            <a:off x="4567428" y="4551045"/>
             <a:ext cx="155448" cy="155448"/>
           </a:xfrm>
           <a:prstGeom prst="rect">
@@ -7825,7 +7825,7 @@
         </p:nvSpPr>
         <p:spPr>
           <a:xfrm>
-            <a:off x="4800600" y="4312099"/>
+            <a:off x="4800600" y="4509897"/>
             <a:ext cx="237744" cy="237744"/>
           </a:xfrm>
           <a:prstGeom prst="roundRect">
@@ -7855,7 +7855,7 @@
         </p:blipFill>
         <p:spPr>
           <a:xfrm>
-            <a:off x="4841748" y="4353247"/>
+            <a:off x="4841748" y="4551045"/>
             <a:ext cx="155448" cy="155448"/>
           </a:xfrm>
           <a:prstGeom prst="rect">
@@ -7871,7 +7871,7 @@
         </p:nvSpPr>
         <p:spPr>
           <a:xfrm>
-            <a:off x="5074920" y="4312099"/>
+            <a:off x="5074920" y="4509897"/>
             <a:ext cx="237744" cy="237744"/>
           </a:xfrm>
           <a:prstGeom prst="roundRect">
@@ -7911,8 +7911,8 @@
         </p:nvSpPr>
         <p:spPr>
           <a:xfrm>
-            <a:off x="7132320" y="4291350"/>
-            <a:ext cx="4507992" cy="279244"/>
+            <a:off x="7132320" y="4477512"/>
+            <a:ext cx="4507992" cy="302514"/>
           </a:xfrm>
           <a:prstGeom prst="rect">
             <a:avLst/>
@@ -7947,7 +7947,7 @@
         </p:nvSpPr>
         <p:spPr>
           <a:xfrm>
-            <a:off x="548640" y="4570593"/>
+            <a:off x="548640" y="4780026"/>
             <a:ext cx="11091672" cy="0"/>
           </a:xfrm>
           <a:prstGeom prst="line">
@@ -7970,8 +7970,8 @@
         </p:nvSpPr>
         <p:spPr>
           <a:xfrm>
-            <a:off x="548640" y="4570593"/>
-            <a:ext cx="3611880" cy="279244"/>
+            <a:off x="548640" y="4780026"/>
+            <a:ext cx="3611880" cy="302514"/>
           </a:xfrm>
           <a:prstGeom prst="rect">
             <a:avLst/>
@@ -8006,7 +8006,7 @@
         </p:nvSpPr>
         <p:spPr>
           <a:xfrm>
-            <a:off x="4251960" y="4591343"/>
+            <a:off x="4251960" y="4812411"/>
             <a:ext cx="237744" cy="237744"/>
           </a:xfrm>
           <a:prstGeom prst="roundRect">
@@ -8036,7 +8036,7 @@
         </p:blipFill>
         <p:spPr>
           <a:xfrm>
-            <a:off x="4293108" y="4632491"/>
+            <a:off x="4293108" y="4853559"/>
             <a:ext cx="155448" cy="155448"/>
           </a:xfrm>
           <a:prstGeom prst="rect">
@@ -8052,7 +8052,7 @@
         </p:nvSpPr>
         <p:spPr>
           <a:xfrm>
-            <a:off x="4526280" y="4591343"/>
+            <a:off x="4526280" y="4812411"/>
             <a:ext cx="237744" cy="237744"/>
           </a:xfrm>
           <a:prstGeom prst="roundRect">
@@ -8082,7 +8082,7 @@
         </p:blipFill>
         <p:spPr>
           <a:xfrm>
-            <a:off x="4567428" y="4632491"/>
+            <a:off x="4567428" y="4853559"/>
             <a:ext cx="155448" cy="155448"/>
           </a:xfrm>
           <a:prstGeom prst="rect">
@@ -8098,7 +8098,7 @@
         </p:nvSpPr>
         <p:spPr>
           <a:xfrm>
-            <a:off x="4800600" y="4591343"/>
+            <a:off x="4800600" y="4812411"/>
             <a:ext cx="237744" cy="237744"/>
           </a:xfrm>
           <a:prstGeom prst="roundRect">
@@ -8128,7 +8128,7 @@
         </p:blipFill>
         <p:spPr>
           <a:xfrm>
-            <a:off x="4841748" y="4632491"/>
+            <a:off x="4841748" y="4853559"/>
             <a:ext cx="155448" cy="155448"/>
           </a:xfrm>
           <a:prstGeom prst="rect">
@@ -8144,7 +8144,7 @@
         </p:nvSpPr>
         <p:spPr>
           <a:xfrm>
-            <a:off x="5074920" y="4591343"/>
+            <a:off x="5074920" y="4812411"/>
             <a:ext cx="237744" cy="237744"/>
           </a:xfrm>
           <a:prstGeom prst="roundRect">
@@ -8174,7 +8174,7 @@
         </p:blipFill>
         <p:spPr>
           <a:xfrm>
-            <a:off x="5116068" y="4632491"/>
+            <a:off x="5116068" y="4853559"/>
             <a:ext cx="155448" cy="155448"/>
           </a:xfrm>
           <a:prstGeom prst="rect">
@@ -8190,7 +8190,7 @@
         </p:nvSpPr>
         <p:spPr>
           <a:xfrm>
-            <a:off x="5349240" y="4591343"/>
+            <a:off x="5349240" y="4812411"/>
             <a:ext cx="237744" cy="237744"/>
           </a:xfrm>
           <a:prstGeom prst="roundRect">
@@ -8220,7 +8220,7 @@
         </p:blipFill>
         <p:spPr>
           <a:xfrm>
-            <a:off x="5390388" y="4632491"/>
+            <a:off x="5390388" y="4853559"/>
             <a:ext cx="155448" cy="155448"/>
           </a:xfrm>
           <a:prstGeom prst="rect">
@@ -8236,7 +8236,7 @@
         </p:nvSpPr>
         <p:spPr>
           <a:xfrm>
-            <a:off x="5623560" y="4591343"/>
+            <a:off x="5623560" y="4812411"/>
             <a:ext cx="237744" cy="237744"/>
           </a:xfrm>
           <a:prstGeom prst="roundRect">
@@ -8276,8 +8276,8 @@
         </p:nvSpPr>
         <p:spPr>
           <a:xfrm>
-            <a:off x="7132320" y="4570593"/>
-            <a:ext cx="4507992" cy="279244"/>
+            <a:off x="7132320" y="4780026"/>
+            <a:ext cx="4507992" cy="302514"/>
           </a:xfrm>
           <a:prstGeom prst="rect">
             <a:avLst/>
@@ -8312,7 +8312,7 @@
         </p:nvSpPr>
         <p:spPr>
           <a:xfrm>
-            <a:off x="548640" y="4849837"/>
+            <a:off x="548640" y="5082540"/>
             <a:ext cx="11091672" cy="0"/>
           </a:xfrm>
           <a:prstGeom prst="line">
@@ -8335,8 +8335,8 @@
         </p:nvSpPr>
         <p:spPr>
           <a:xfrm>
-            <a:off x="548640" y="4849837"/>
-            <a:ext cx="3611880" cy="279244"/>
+            <a:off x="548640" y="5082540"/>
+            <a:ext cx="3611880" cy="302514"/>
           </a:xfrm>
           <a:prstGeom prst="rect">
             <a:avLst/>
@@ -8357,7 +8357,7 @@
                   <a:schemeClr val="tx1"/>
                 </a:solidFill>
               </a:rPr>
-              <a:t>J1. Быстрая модель-сторож</a:t>
+              <a:t>M1. Два робота с координацией</a:t>
             </a:r>
             <a:endParaRPr lang="en-US" sz="1600" dirty="0"/>
           </a:p>
@@ -8371,7 +8371,7 @@
         </p:nvSpPr>
         <p:spPr>
           <a:xfrm>
-            <a:off x="4251960" y="4870587"/>
+            <a:off x="4251960" y="5114925"/>
             <a:ext cx="237744" cy="237744"/>
           </a:xfrm>
           <a:prstGeom prst="roundRect">
@@ -8401,7 +8401,7 @@
         </p:blipFill>
         <p:spPr>
           <a:xfrm>
-            <a:off x="4293108" y="4911735"/>
+            <a:off x="4293108" y="5156073"/>
             <a:ext cx="155448" cy="155448"/>
           </a:xfrm>
           <a:prstGeom prst="rect">
@@ -8417,7 +8417,7 @@
         </p:nvSpPr>
         <p:spPr>
           <a:xfrm>
-            <a:off x="4526280" y="4870587"/>
+            <a:off x="4526280" y="5114925"/>
             <a:ext cx="237744" cy="237744"/>
           </a:xfrm>
           <a:prstGeom prst="roundRect">
@@ -8447,7 +8447,7 @@
         </p:blipFill>
         <p:spPr>
           <a:xfrm>
-            <a:off x="4567428" y="4911735"/>
+            <a:off x="4567428" y="5156073"/>
             <a:ext cx="155448" cy="155448"/>
           </a:xfrm>
           <a:prstGeom prst="rect">
@@ -8463,7 +8463,7 @@
         </p:nvSpPr>
         <p:spPr>
           <a:xfrm>
-            <a:off x="4800600" y="4870587"/>
+            <a:off x="4800600" y="5114925"/>
             <a:ext cx="237744" cy="237744"/>
           </a:xfrm>
           <a:prstGeom prst="roundRect">
@@ -8493,7 +8493,7 @@
         </p:blipFill>
         <p:spPr>
           <a:xfrm>
-            <a:off x="4841748" y="4911735"/>
+            <a:off x="4841748" y="5156073"/>
             <a:ext cx="155448" cy="155448"/>
           </a:xfrm>
           <a:prstGeom prst="rect">
@@ -8509,7 +8509,7 @@
         </p:nvSpPr>
         <p:spPr>
           <a:xfrm>
-            <a:off x="5074920" y="4870587"/>
+            <a:off x="5074920" y="5114925"/>
             <a:ext cx="237744" cy="237744"/>
           </a:xfrm>
           <a:prstGeom prst="roundRect">
@@ -8525,7 +8525,7 @@
       </p:sp>
       <p:pic>
         <p:nvPicPr>
-          <p:cNvPr id="187" name="lane-11-chip-4" descr="/Users/a/MAI/DID/presentation/assets/logos/claude.png">    </p:cNvPr>
+          <p:cNvPr id="187" name="lane-11-chip-4" descr="/Users/a/MAI/DID/presentation/assets/logos/openai.png">    </p:cNvPr>
           <p:cNvPicPr>
             <a:picLocks noChangeAspect="1"/>
           </p:cNvPicPr>
@@ -8539,7 +8539,7 @@
         </p:blipFill>
         <p:spPr>
           <a:xfrm>
-            <a:off x="5116068" y="4911735"/>
+            <a:off x="5116068" y="5156073"/>
             <a:ext cx="155448" cy="155448"/>
           </a:xfrm>
           <a:prstGeom prst="rect">
@@ -8555,7 +8555,7 @@
         </p:nvSpPr>
         <p:spPr>
           <a:xfrm>
-            <a:off x="5349240" y="4870587"/>
+            <a:off x="5349240" y="5114925"/>
             <a:ext cx="237744" cy="237744"/>
           </a:xfrm>
           <a:prstGeom prst="roundRect">
@@ -8571,7 +8571,7 @@
       </p:sp>
       <p:pic>
         <p:nvPicPr>
-          <p:cNvPr id="189" name="lane-11-chip-5" descr="/Users/a/MAI/DID/presentation/assets/logos/openai.png">    </p:cNvPr>
+          <p:cNvPr id="189" name="lane-11-chip-5" descr="/Users/a/MAI/DID/presentation/assets/logos/claude.png">    </p:cNvPr>
           <p:cNvPicPr>
             <a:picLocks noChangeAspect="1"/>
           </p:cNvPicPr>
@@ -8585,7 +8585,7 @@
         </p:blipFill>
         <p:spPr>
           <a:xfrm>
-            <a:off x="5390388" y="4911735"/>
+            <a:off x="5390388" y="5156073"/>
             <a:ext cx="155448" cy="155448"/>
           </a:xfrm>
           <a:prstGeom prst="rect">
@@ -8601,7 +8601,7 @@
         </p:nvSpPr>
         <p:spPr>
           <a:xfrm>
-            <a:off x="5623560" y="4870587"/>
+            <a:off x="5623560" y="5114925"/>
             <a:ext cx="237744" cy="237744"/>
           </a:xfrm>
           <a:prstGeom prst="roundRect">
@@ -8641,8 +8641,8 @@
         </p:nvSpPr>
         <p:spPr>
           <a:xfrm>
-            <a:off x="7132320" y="4849837"/>
-            <a:ext cx="4507992" cy="279244"/>
+            <a:off x="7132320" y="5082540"/>
+            <a:ext cx="4507992" cy="302514"/>
           </a:xfrm>
           <a:prstGeom prst="rect">
             <a:avLst/>
@@ -8663,7 +8663,7 @@
                   <a:schemeClr val="tx2"/>
                 </a:solidFill>
               </a:rPr>
-              <a:t>миссия «ровно два образца»: 20 из 20</a:t>
+              <a:t>прогон короче на 26 с, заряда на четверть меньше</a:t>
             </a:r>
             <a:endParaRPr lang="en-US" sz="1400" dirty="0"/>
           </a:p>
@@ -8677,7 +8677,7 @@
         </p:nvSpPr>
         <p:spPr>
           <a:xfrm>
-            <a:off x="548640" y="5129081"/>
+            <a:off x="548640" y="5385054"/>
             <a:ext cx="11091672" cy="0"/>
           </a:xfrm>
           <a:prstGeom prst="line">
@@ -8700,8 +8700,8 @@
         </p:nvSpPr>
         <p:spPr>
           <a:xfrm>
-            <a:off x="548640" y="5129081"/>
-            <a:ext cx="3611880" cy="279244"/>
+            <a:off x="548640" y="5385054"/>
+            <a:ext cx="3611880" cy="302514"/>
           </a:xfrm>
           <a:prstGeom prst="rect">
             <a:avLst/>
@@ -8722,7 +8722,7 @@
                   <a:schemeClr val="tx1"/>
                 </a:solidFill>
               </a:rPr>
-              <a:t>M1. Два робота с координацией</a:t>
+              <a:t>F2. SLAM вместо готовой карты</a:t>
             </a:r>
             <a:endParaRPr lang="en-US" sz="1600" dirty="0"/>
           </a:p>
@@ -8736,7 +8736,7 @@
         </p:nvSpPr>
         <p:spPr>
           <a:xfrm>
-            <a:off x="4251960" y="5149830"/>
+            <a:off x="4251960" y="5417439"/>
             <a:ext cx="237744" cy="237744"/>
           </a:xfrm>
           <a:prstGeom prst="roundRect">
@@ -8752,7 +8752,7 @@
       </p:sp>
       <p:pic>
         <p:nvPicPr>
-          <p:cNvPr id="195" name="lane-12-chip-1" descr="/Users/a/MAI/DID/presentation/assets/logos/claude.png">    </p:cNvPr>
+          <p:cNvPr id="195" name="lane-12-chip-1" descr="/Users/a/MAI/DID/presentation/assets/logos/gemini.png">    </p:cNvPr>
           <p:cNvPicPr>
             <a:picLocks noChangeAspect="1"/>
           </p:cNvPicPr>
@@ -8766,7 +8766,7 @@
         </p:blipFill>
         <p:spPr>
           <a:xfrm>
-            <a:off x="4293108" y="5190978"/>
+            <a:off x="4293108" y="5458587"/>
             <a:ext cx="155448" cy="155448"/>
           </a:xfrm>
           <a:prstGeom prst="rect">
@@ -8782,7 +8782,7 @@
         </p:nvSpPr>
         <p:spPr>
           <a:xfrm>
-            <a:off x="4526280" y="5149830"/>
+            <a:off x="4526280" y="5417439"/>
             <a:ext cx="237744" cy="237744"/>
           </a:xfrm>
           <a:prstGeom prst="roundRect">
@@ -8798,7 +8798,7 @@
       </p:sp>
       <p:pic>
         <p:nvPicPr>
-          <p:cNvPr id="197" name="lane-12-chip-2" descr="/Users/a/MAI/DID/presentation/assets/logos/openai.png">    </p:cNvPr>
+          <p:cNvPr id="197" name="lane-12-chip-2" descr="/Users/a/MAI/DID/presentation/assets/logos/claude.png">    </p:cNvPr>
           <p:cNvPicPr>
             <a:picLocks noChangeAspect="1"/>
           </p:cNvPicPr>
@@ -8812,7 +8812,7 @@
         </p:blipFill>
         <p:spPr>
           <a:xfrm>
-            <a:off x="4567428" y="5190978"/>
+            <a:off x="4567428" y="5458587"/>
             <a:ext cx="155448" cy="155448"/>
           </a:xfrm>
           <a:prstGeom prst="rect">
@@ -8828,7 +8828,7 @@
         </p:nvSpPr>
         <p:spPr>
           <a:xfrm>
-            <a:off x="4800600" y="5149830"/>
+            <a:off x="4800600" y="5417439"/>
             <a:ext cx="237744" cy="237744"/>
           </a:xfrm>
           <a:prstGeom prst="roundRect">
@@ -8844,7 +8844,7 @@
       </p:sp>
       <p:pic>
         <p:nvPicPr>
-          <p:cNvPr id="199" name="lane-12-chip-3" descr="/Users/a/MAI/DID/presentation/assets/logos/claude.png">    </p:cNvPr>
+          <p:cNvPr id="199" name="lane-12-chip-3" descr="/Users/a/MAI/DID/presentation/assets/logos/openai.png">    </p:cNvPr>
           <p:cNvPicPr>
             <a:picLocks noChangeAspect="1"/>
           </p:cNvPicPr>
@@ -8858,7 +8858,7 @@
         </p:blipFill>
         <p:spPr>
           <a:xfrm>
-            <a:off x="4841748" y="5190978"/>
+            <a:off x="4841748" y="5458587"/>
             <a:ext cx="155448" cy="155448"/>
           </a:xfrm>
           <a:prstGeom prst="rect">
@@ -8874,7 +8874,7 @@
         </p:nvSpPr>
         <p:spPr>
           <a:xfrm>
-            <a:off x="5074920" y="5149830"/>
+            <a:off x="5074920" y="5417439"/>
             <a:ext cx="237744" cy="237744"/>
           </a:xfrm>
           <a:prstGeom prst="roundRect">
@@ -8890,7 +8890,7 @@
       </p:sp>
       <p:pic>
         <p:nvPicPr>
-          <p:cNvPr id="201" name="lane-12-chip-4" descr="/Users/a/MAI/DID/presentation/assets/logos/openai.png">    </p:cNvPr>
+          <p:cNvPr id="201" name="lane-12-chip-4" descr="/Users/a/MAI/DID/presentation/assets/logos/claude.png">    </p:cNvPr>
           <p:cNvPicPr>
             <a:picLocks noChangeAspect="1"/>
           </p:cNvPicPr>
@@ -8904,7 +8904,7 @@
         </p:blipFill>
         <p:spPr>
           <a:xfrm>
-            <a:off x="5116068" y="5190978"/>
+            <a:off x="5116068" y="5458587"/>
             <a:ext cx="155448" cy="155448"/>
           </a:xfrm>
           <a:prstGeom prst="rect">
@@ -8920,7 +8920,7 @@
         </p:nvSpPr>
         <p:spPr>
           <a:xfrm>
-            <a:off x="5349240" y="5149830"/>
+            <a:off x="5349240" y="5417439"/>
             <a:ext cx="237744" cy="237744"/>
           </a:xfrm>
           <a:prstGeom prst="roundRect">
@@ -8936,7 +8936,7 @@
       </p:sp>
       <p:pic>
         <p:nvPicPr>
-          <p:cNvPr id="203" name="lane-12-chip-5" descr="/Users/a/MAI/DID/presentation/assets/logos/claude.png">    </p:cNvPr>
+          <p:cNvPr id="203" name="lane-12-chip-5" descr="/Users/a/MAI/DID/presentation/assets/logos/openai.png">    </p:cNvPr>
           <p:cNvPicPr>
             <a:picLocks noChangeAspect="1"/>
           </p:cNvPicPr>
@@ -8950,7 +8950,7 @@
         </p:blipFill>
         <p:spPr>
           <a:xfrm>
-            <a:off x="5390388" y="5190978"/>
+            <a:off x="5390388" y="5458587"/>
             <a:ext cx="155448" cy="155448"/>
           </a:xfrm>
           <a:prstGeom prst="rect">
@@ -8960,148 +8960,13 @@
       </p:pic>
       <p:sp>
         <p:nvSpPr>
-          <p:cNvPr id="204" name="lane-12-chip-6"/>
-          <p:cNvSpPr txBox="1"/>
-          <p:nvPr/>
-        </p:nvSpPr>
-        <p:spPr>
-          <a:xfrm>
-            <a:off x="5623560" y="5149830"/>
-            <a:ext cx="237744" cy="237744"/>
-          </a:xfrm>
-          <a:prstGeom prst="roundRect">
-            <a:avLst>
-              <a:gd name="adj" fmla="val 15385"/>
-            </a:avLst>
-          </a:prstGeom>
-          <a:solidFill>
-            <a:schemeClr val="accent3"/>
-          </a:solidFill>
-          <a:ln/>
-        </p:spPr>
-        <p:txBody>
-          <a:bodyPr wrap="square" lIns="0" tIns="0" rIns="0" bIns="0" rtlCol="0" anchor="ctr"/>
-          <a:lstStyle/>
-          <a:p>
-            <a:pPr algn="ctr" indent="0" marL="0">
-              <a:buNone/>
-            </a:pPr>
-            <a:r>
-              <a:rPr lang="en-US" sz="1300" b="1" dirty="0">
-                <a:solidFill>
-                  <a:schemeClr val="bg1"/>
-                </a:solidFill>
-              </a:rPr>
-              <a:t>✓</a:t>
-            </a:r>
-            <a:endParaRPr lang="en-US" sz="1300" dirty="0"/>
-          </a:p>
-        </p:txBody>
-      </p:sp>
-      <p:sp>
-        <p:nvSpPr>
-          <p:cNvPr id="205" name="lane-12-result"/>
-          <p:cNvSpPr txBox="1"/>
-          <p:nvPr/>
-        </p:nvSpPr>
-        <p:spPr>
-          <a:xfrm>
-            <a:off x="7132320" y="5129081"/>
-            <a:ext cx="4507992" cy="279244"/>
-          </a:xfrm>
-          <a:prstGeom prst="rect">
-            <a:avLst/>
-          </a:prstGeom>
-          <a:noFill/>
-          <a:ln/>
-        </p:spPr>
-        <p:txBody>
-          <a:bodyPr wrap="none" lIns="0" tIns="0" rIns="0" bIns="0" rtlCol="0" anchor="ctr"/>
-          <a:lstStyle/>
-          <a:p>
-            <a:pPr algn="l" indent="0" marL="0">
-              <a:buNone/>
-            </a:pPr>
-            <a:r>
-              <a:rPr lang="en-US" sz="1400" dirty="0">
-                <a:solidFill>
-                  <a:schemeClr val="tx2"/>
-                </a:solidFill>
-              </a:rPr>
-              <a:t>прогон короче на 26 с, заряда на четверть меньше</a:t>
-            </a:r>
-            <a:endParaRPr lang="en-US" sz="1400" dirty="0"/>
-          </a:p>
-        </p:txBody>
-      </p:sp>
-      <p:sp>
-        <p:nvSpPr>
-          <p:cNvPr id="206" name="lane-13-rule"/>
-          <p:cNvSpPr/>
-          <p:nvPr/>
-        </p:nvSpPr>
-        <p:spPr>
-          <a:xfrm>
-            <a:off x="548640" y="5408324"/>
-            <a:ext cx="11091672" cy="0"/>
-          </a:xfrm>
-          <a:prstGeom prst="line">
-            <a:avLst/>
-          </a:prstGeom>
-          <a:noFill/>
-          <a:ln w="12700">
-            <a:solidFill>
-              <a:schemeClr val="bg2"/>
-            </a:solidFill>
-            <a:prstDash val="solid"/>
-          </a:ln>
-        </p:spPr>
-      </p:sp>
-      <p:sp>
-        <p:nvSpPr>
-          <p:cNvPr id="207" name="lane-13-name"/>
-          <p:cNvSpPr txBox="1"/>
-          <p:nvPr/>
-        </p:nvSpPr>
-        <p:spPr>
-          <a:xfrm>
-            <a:off x="548640" y="5408324"/>
-            <a:ext cx="3611880" cy="279244"/>
-          </a:xfrm>
-          <a:prstGeom prst="rect">
-            <a:avLst/>
-          </a:prstGeom>
-          <a:noFill/>
-          <a:ln/>
-        </p:spPr>
-        <p:txBody>
-          <a:bodyPr wrap="none" lIns="0" tIns="0" rIns="0" bIns="0" rtlCol="0" anchor="ctr"/>
-          <a:lstStyle/>
-          <a:p>
-            <a:pPr algn="l" indent="0" marL="0">
-              <a:buNone/>
-            </a:pPr>
-            <a:r>
-              <a:rPr lang="en-US" sz="1600" b="1" dirty="0">
-                <a:solidFill>
-                  <a:schemeClr val="tx1"/>
-                </a:solidFill>
-              </a:rPr>
-              <a:t>F2. SLAM вместо готовой карты</a:t>
-            </a:r>
-            <a:endParaRPr lang="en-US" sz="1600" dirty="0"/>
-          </a:p>
-        </p:txBody>
-      </p:sp>
-      <p:sp>
-        <p:nvSpPr>
-          <p:cNvPr id="208" name="lane-13-chip-1-tile"/>
-          <p:cNvSpPr/>
-          <p:nvPr/>
-        </p:nvSpPr>
-        <p:spPr>
-          <a:xfrm>
-            <a:off x="4251960" y="5429074"/>
+          <p:cNvPr id="204" name="lane-12-chip-6-tile"/>
+          <p:cNvSpPr/>
+          <p:nvPr/>
+        </p:nvSpPr>
+        <p:spPr>
+          <a:xfrm>
+            <a:off x="5623560" y="5417439"/>
             <a:ext cx="237744" cy="237744"/>
           </a:xfrm>
           <a:prstGeom prst="roundRect">
@@ -9117,7 +8982,7 @@
       </p:sp>
       <p:pic>
         <p:nvPicPr>
-          <p:cNvPr id="209" name="lane-13-chip-1" descr="/Users/a/MAI/DID/presentation/assets/logos/gemini.png">    </p:cNvPr>
+          <p:cNvPr id="205" name="lane-12-chip-6" descr="/Users/a/MAI/DID/presentation/assets/logos/claude.png">    </p:cNvPr>
           <p:cNvPicPr>
             <a:picLocks noChangeAspect="1"/>
           </p:cNvPicPr>
@@ -9131,7 +8996,7 @@
         </p:blipFill>
         <p:spPr>
           <a:xfrm>
-            <a:off x="4293108" y="5470222"/>
+            <a:off x="5664708" y="5458587"/>
             <a:ext cx="155448" cy="155448"/>
           </a:xfrm>
           <a:prstGeom prst="rect">
@@ -9141,13 +9006,13 @@
       </p:pic>
       <p:sp>
         <p:nvSpPr>
-          <p:cNvPr id="210" name="lane-13-chip-2-tile"/>
-          <p:cNvSpPr/>
-          <p:nvPr/>
-        </p:nvSpPr>
-        <p:spPr>
-          <a:xfrm>
-            <a:off x="4526280" y="5429074"/>
+          <p:cNvPr id="206" name="lane-12-chip-7-tile"/>
+          <p:cNvSpPr/>
+          <p:nvPr/>
+        </p:nvSpPr>
+        <p:spPr>
+          <a:xfrm>
+            <a:off x="5897880" y="5417439"/>
             <a:ext cx="237744" cy="237744"/>
           </a:xfrm>
           <a:prstGeom prst="roundRect">
@@ -9163,7 +9028,7 @@
       </p:sp>
       <p:pic>
         <p:nvPicPr>
-          <p:cNvPr id="211" name="lane-13-chip-2" descr="/Users/a/MAI/DID/presentation/assets/logos/claude.png">    </p:cNvPr>
+          <p:cNvPr id="207" name="lane-12-chip-7" descr="/Users/a/MAI/DID/presentation/assets/logos/openai.png">    </p:cNvPr>
           <p:cNvPicPr>
             <a:picLocks noChangeAspect="1"/>
           </p:cNvPicPr>
@@ -9177,7 +9042,7 @@
         </p:blipFill>
         <p:spPr>
           <a:xfrm>
-            <a:off x="4567428" y="5470222"/>
+            <a:off x="5939028" y="5458587"/>
             <a:ext cx="155448" cy="155448"/>
           </a:xfrm>
           <a:prstGeom prst="rect">
@@ -9187,13 +9052,13 @@
       </p:pic>
       <p:sp>
         <p:nvSpPr>
-          <p:cNvPr id="212" name="lane-13-chip-3-tile"/>
-          <p:cNvSpPr/>
-          <p:nvPr/>
-        </p:nvSpPr>
-        <p:spPr>
-          <a:xfrm>
-            <a:off x="4800600" y="5429074"/>
+          <p:cNvPr id="208" name="lane-12-chip-8"/>
+          <p:cNvSpPr txBox="1"/>
+          <p:nvPr/>
+        </p:nvSpPr>
+        <p:spPr>
+          <a:xfrm>
+            <a:off x="6172200" y="5417439"/>
             <a:ext cx="237744" cy="237744"/>
           </a:xfrm>
           <a:prstGeom prst="roundRect">
@@ -9202,269 +9067,39 @@
             </a:avLst>
           </a:prstGeom>
           <a:solidFill>
-            <a:schemeClr val="bg2"/>
-          </a:solidFill>
-          <a:ln/>
-        </p:spPr>
-      </p:sp>
-      <p:pic>
-        <p:nvPicPr>
-          <p:cNvPr id="213" name="lane-13-chip-3" descr="/Users/a/MAI/DID/presentation/assets/logos/openai.png">    </p:cNvPr>
-          <p:cNvPicPr>
-            <a:picLocks noChangeAspect="1"/>
-          </p:cNvPicPr>
-          <p:nvPr/>
-        </p:nvPicPr>
-        <p:blipFill>
-          <a:blip r:embed="rId73"/>
-          <a:stretch>
-            <a:fillRect/>
-          </a:stretch>
-        </p:blipFill>
-        <p:spPr>
-          <a:xfrm>
-            <a:off x="4841748" y="5470222"/>
-            <a:ext cx="155448" cy="155448"/>
-          </a:xfrm>
-          <a:prstGeom prst="rect">
-            <a:avLst/>
-          </a:prstGeom>
-        </p:spPr>
-      </p:pic>
-      <p:sp>
-        <p:nvSpPr>
-          <p:cNvPr id="214" name="lane-13-chip-4-tile"/>
-          <p:cNvSpPr/>
-          <p:nvPr/>
-        </p:nvSpPr>
-        <p:spPr>
-          <a:xfrm>
-            <a:off x="5074920" y="5429074"/>
-            <a:ext cx="237744" cy="237744"/>
-          </a:xfrm>
-          <a:prstGeom prst="roundRect">
-            <a:avLst>
-              <a:gd name="adj" fmla="val 15385"/>
-            </a:avLst>
-          </a:prstGeom>
-          <a:solidFill>
-            <a:schemeClr val="bg2"/>
-          </a:solidFill>
-          <a:ln/>
-        </p:spPr>
-      </p:sp>
-      <p:pic>
-        <p:nvPicPr>
-          <p:cNvPr id="215" name="lane-13-chip-4" descr="/Users/a/MAI/DID/presentation/assets/logos/claude.png">    </p:cNvPr>
-          <p:cNvPicPr>
-            <a:picLocks noChangeAspect="1"/>
-          </p:cNvPicPr>
-          <p:nvPr/>
-        </p:nvPicPr>
-        <p:blipFill>
-          <a:blip r:embed="rId74"/>
-          <a:stretch>
-            <a:fillRect/>
-          </a:stretch>
-        </p:blipFill>
-        <p:spPr>
-          <a:xfrm>
-            <a:off x="5116068" y="5470222"/>
-            <a:ext cx="155448" cy="155448"/>
-          </a:xfrm>
-          <a:prstGeom prst="rect">
-            <a:avLst/>
-          </a:prstGeom>
-        </p:spPr>
-      </p:pic>
-      <p:sp>
-        <p:nvSpPr>
-          <p:cNvPr id="216" name="lane-13-chip-5-tile"/>
-          <p:cNvSpPr/>
-          <p:nvPr/>
-        </p:nvSpPr>
-        <p:spPr>
-          <a:xfrm>
-            <a:off x="5349240" y="5429074"/>
-            <a:ext cx="237744" cy="237744"/>
-          </a:xfrm>
-          <a:prstGeom prst="roundRect">
-            <a:avLst>
-              <a:gd name="adj" fmla="val 15385"/>
-            </a:avLst>
-          </a:prstGeom>
-          <a:solidFill>
-            <a:schemeClr val="bg2"/>
-          </a:solidFill>
-          <a:ln/>
-        </p:spPr>
-      </p:sp>
-      <p:pic>
-        <p:nvPicPr>
-          <p:cNvPr id="217" name="lane-13-chip-5" descr="/Users/a/MAI/DID/presentation/assets/logos/openai.png">    </p:cNvPr>
-          <p:cNvPicPr>
-            <a:picLocks noChangeAspect="1"/>
-          </p:cNvPicPr>
-          <p:nvPr/>
-        </p:nvPicPr>
-        <p:blipFill>
-          <a:blip r:embed="rId75"/>
-          <a:stretch>
-            <a:fillRect/>
-          </a:stretch>
-        </p:blipFill>
-        <p:spPr>
-          <a:xfrm>
-            <a:off x="5390388" y="5470222"/>
-            <a:ext cx="155448" cy="155448"/>
-          </a:xfrm>
-          <a:prstGeom prst="rect">
-            <a:avLst/>
-          </a:prstGeom>
-        </p:spPr>
-      </p:pic>
-      <p:sp>
-        <p:nvSpPr>
-          <p:cNvPr id="218" name="lane-13-chip-6-tile"/>
-          <p:cNvSpPr/>
-          <p:nvPr/>
-        </p:nvSpPr>
-        <p:spPr>
-          <a:xfrm>
-            <a:off x="5623560" y="5429074"/>
-            <a:ext cx="237744" cy="237744"/>
-          </a:xfrm>
-          <a:prstGeom prst="roundRect">
-            <a:avLst>
-              <a:gd name="adj" fmla="val 15385"/>
-            </a:avLst>
-          </a:prstGeom>
-          <a:solidFill>
-            <a:schemeClr val="bg2"/>
-          </a:solidFill>
-          <a:ln/>
-        </p:spPr>
-      </p:sp>
-      <p:pic>
-        <p:nvPicPr>
-          <p:cNvPr id="219" name="lane-13-chip-6" descr="/Users/a/MAI/DID/presentation/assets/logos/claude.png">    </p:cNvPr>
-          <p:cNvPicPr>
-            <a:picLocks noChangeAspect="1"/>
-          </p:cNvPicPr>
-          <p:nvPr/>
-        </p:nvPicPr>
-        <p:blipFill>
-          <a:blip r:embed="rId76"/>
-          <a:stretch>
-            <a:fillRect/>
-          </a:stretch>
-        </p:blipFill>
-        <p:spPr>
-          <a:xfrm>
-            <a:off x="5664708" y="5470222"/>
-            <a:ext cx="155448" cy="155448"/>
-          </a:xfrm>
-          <a:prstGeom prst="rect">
-            <a:avLst/>
-          </a:prstGeom>
-        </p:spPr>
-      </p:pic>
-      <p:sp>
-        <p:nvSpPr>
-          <p:cNvPr id="220" name="lane-13-chip-7-tile"/>
-          <p:cNvSpPr/>
-          <p:nvPr/>
-        </p:nvSpPr>
-        <p:spPr>
-          <a:xfrm>
-            <a:off x="5897880" y="5429074"/>
-            <a:ext cx="237744" cy="237744"/>
-          </a:xfrm>
-          <a:prstGeom prst="roundRect">
-            <a:avLst>
-              <a:gd name="adj" fmla="val 15385"/>
-            </a:avLst>
-          </a:prstGeom>
-          <a:solidFill>
-            <a:schemeClr val="bg2"/>
-          </a:solidFill>
-          <a:ln/>
-        </p:spPr>
-      </p:sp>
-      <p:pic>
-        <p:nvPicPr>
-          <p:cNvPr id="221" name="lane-13-chip-7" descr="/Users/a/MAI/DID/presentation/assets/logos/openai.png">    </p:cNvPr>
-          <p:cNvPicPr>
-            <a:picLocks noChangeAspect="1"/>
-          </p:cNvPicPr>
-          <p:nvPr/>
-        </p:nvPicPr>
-        <p:blipFill>
-          <a:blip r:embed="rId77"/>
-          <a:stretch>
-            <a:fillRect/>
-          </a:stretch>
-        </p:blipFill>
-        <p:spPr>
-          <a:xfrm>
-            <a:off x="5939028" y="5470222"/>
-            <a:ext cx="155448" cy="155448"/>
-          </a:xfrm>
-          <a:prstGeom prst="rect">
-            <a:avLst/>
-          </a:prstGeom>
-        </p:spPr>
-      </p:pic>
-      <p:sp>
-        <p:nvSpPr>
-          <p:cNvPr id="222" name="lane-13-chip-8"/>
+            <a:schemeClr val="accent3"/>
+          </a:solidFill>
+          <a:ln/>
+        </p:spPr>
+        <p:txBody>
+          <a:bodyPr wrap="square" lIns="0" tIns="0" rIns="0" bIns="0" rtlCol="0" anchor="ctr"/>
+          <a:lstStyle/>
+          <a:p>
+            <a:pPr algn="ctr" indent="0" marL="0">
+              <a:buNone/>
+            </a:pPr>
+            <a:r>
+              <a:rPr lang="en-US" sz="1300" b="1" dirty="0">
+                <a:solidFill>
+                  <a:schemeClr val="bg1"/>
+                </a:solidFill>
+              </a:rPr>
+              <a:t>✓</a:t>
+            </a:r>
+            <a:endParaRPr lang="en-US" sz="1300" dirty="0"/>
+          </a:p>
+        </p:txBody>
+      </p:sp>
+      <p:sp>
+        <p:nvSpPr>
+          <p:cNvPr id="209" name="lane-12-result"/>
           <p:cNvSpPr txBox="1"/>
           <p:nvPr/>
         </p:nvSpPr>
         <p:spPr>
           <a:xfrm>
-            <a:off x="6172200" y="5429074"/>
-            <a:ext cx="237744" cy="237744"/>
-          </a:xfrm>
-          <a:prstGeom prst="roundRect">
-            <a:avLst>
-              <a:gd name="adj" fmla="val 15385"/>
-            </a:avLst>
-          </a:prstGeom>
-          <a:solidFill>
-            <a:schemeClr val="accent3"/>
-          </a:solidFill>
-          <a:ln/>
-        </p:spPr>
-        <p:txBody>
-          <a:bodyPr wrap="square" lIns="0" tIns="0" rIns="0" bIns="0" rtlCol="0" anchor="ctr"/>
-          <a:lstStyle/>
-          <a:p>
-            <a:pPr algn="ctr" indent="0" marL="0">
-              <a:buNone/>
-            </a:pPr>
-            <a:r>
-              <a:rPr lang="en-US" sz="1300" b="1" dirty="0">
-                <a:solidFill>
-                  <a:schemeClr val="bg1"/>
-                </a:solidFill>
-              </a:rPr>
-              <a:t>✓</a:t>
-            </a:r>
-            <a:endParaRPr lang="en-US" sz="1300" dirty="0"/>
-          </a:p>
-        </p:txBody>
-      </p:sp>
-      <p:sp>
-        <p:nvSpPr>
-          <p:cNvPr id="223" name="lane-13-result"/>
-          <p:cNvSpPr txBox="1"/>
-          <p:nvPr/>
-        </p:nvSpPr>
-        <p:spPr>
-          <a:xfrm>
-            <a:off x="7132320" y="5408324"/>
-            <a:ext cx="4507992" cy="279244"/>
+            <a:off x="7132320" y="5385054"/>
+            <a:ext cx="4507992" cy="302514"/>
           </a:xfrm>
           <a:prstGeom prst="rect">
             <a:avLst/>
@@ -9493,7 +9128,7 @@
       </p:sp>
       <p:sp>
         <p:nvSpPr>
-          <p:cNvPr id="224" name="conclusion-card"/>
+          <p:cNvPr id="210" name="conclusion-card"/>
           <p:cNvSpPr/>
           <p:nvPr/>
         </p:nvSpPr>
@@ -9515,7 +9150,7 @@
       </p:sp>
       <p:sp>
         <p:nvSpPr>
-          <p:cNvPr id="225" name="conclusion-text"/>
+          <p:cNvPr id="211" name="conclusion-text"/>
           <p:cNvSpPr txBox="1"/>
           <p:nvPr/>
         </p:nvSpPr>
